--- a/downloads/presentations/modules/pmg-210.pptx
+++ b/downloads/presentations/modules/pmg-210.pptx
@@ -3518,13 +3518,11 @@
             </a:avLst>
           </a:prstGeom>
           <a:solidFill>
-            <a:srgbClr val="FFFFFF">
-              <a:alpha val="88000"/>
-            </a:srgbClr>
+            <a:srgbClr val="FFFFFF"/>
           </a:solidFill>
           <a:ln w="12700">
             <a:solidFill>
-              <a:srgbClr val="D6E8F2"/>
+              <a:srgbClr val="B9D7E6"/>
             </a:solidFill>
             <a:prstDash val="solid"/>
           </a:ln>
@@ -3532,30 +3530,42 @@
       </p:sp>
       <p:sp>
         <p:nvSpPr>
-          <p:cNvPr id="14" name="Shape 12"/>
-          <p:cNvSpPr/>
-          <p:nvPr/>
-        </p:nvSpPr>
-        <p:spPr>
-          <a:xfrm>
-            <a:off x="7927848" y="3319272"/>
-            <a:ext cx="792480" cy="749808"/>
-          </a:xfrm>
-          <a:prstGeom prst="roundRect">
-            <a:avLst>
-              <a:gd name="adj" fmla="val 14634"/>
-            </a:avLst>
-          </a:prstGeom>
-          <a:solidFill>
-            <a:srgbClr val="0068B7"/>
-          </a:solidFill>
-          <a:ln w="12700">
-            <a:solidFill>
-              <a:srgbClr val="0068B7"/>
-            </a:solidFill>
-            <a:prstDash val="solid"/>
-          </a:ln>
-        </p:spPr>
+          <p:cNvPr id="14" name="Text 12"/>
+          <p:cNvSpPr/>
+          <p:nvPr/>
+        </p:nvSpPr>
+        <p:spPr>
+          <a:xfrm>
+            <a:off x="7799832" y="2935224"/>
+            <a:ext cx="3145536" cy="256032"/>
+          </a:xfrm>
+          <a:prstGeom prst="rect">
+            <a:avLst/>
+          </a:prstGeom>
+          <a:noFill/>
+          <a:ln/>
+        </p:spPr>
+        <p:txBody>
+          <a:bodyPr wrap="square" lIns="0" tIns="0" rIns="0" bIns="0" rtlCol="0" anchor="ctr"/>
+          <a:lstStyle/>
+          <a:p>
+            <a:pPr indent="0" marL="0">
+              <a:buNone/>
+            </a:pPr>
+            <a:r>
+              <a:rPr lang="en-US" sz="1300" b="1" dirty="0">
+                <a:solidFill>
+                  <a:srgbClr val="0068B7"/>
+                </a:solidFill>
+                <a:latin typeface="Aptos" pitchFamily="34" charset="0"/>
+                <a:ea typeface="Aptos" pitchFamily="34" charset="-122"/>
+                <a:cs typeface="Aptos" pitchFamily="34" charset="-120"/>
+              </a:rPr>
+              <a:t>Concept checkpoints</a:t>
+            </a:r>
+            <a:endParaRPr lang="en-US" sz="1300" dirty="0"/>
+          </a:p>
+        </p:txBody>
       </p:sp>
       <p:sp>
         <p:nvSpPr>
@@ -3565,240 +3575,67 @@
         </p:nvSpPr>
         <p:spPr>
           <a:xfrm>
-            <a:off x="8001000" y="3511296"/>
-            <a:ext cx="646176" cy="310896"/>
-          </a:xfrm>
-          <a:prstGeom prst="rect">
-            <a:avLst/>
-          </a:prstGeom>
-          <a:noFill/>
-          <a:ln/>
-        </p:spPr>
-        <p:txBody>
-          <a:bodyPr wrap="square" lIns="0" tIns="0" rIns="0" bIns="0" rtlCol="0" anchor="ctr">
+            <a:off x="7818120" y="3300984"/>
+            <a:ext cx="3090672" cy="877824"/>
+          </a:xfrm>
+          <a:prstGeom prst="rect">
+            <a:avLst/>
+          </a:prstGeom>
+          <a:noFill/>
+          <a:ln/>
+        </p:spPr>
+        <p:txBody>
+          <a:bodyPr wrap="square" lIns="254" tIns="254" rIns="254" bIns="254" rtlCol="0" anchor="t">
             <a:normAutofit/>
           </a:bodyPr>
           <a:lstStyle/>
           <a:p>
-            <a:pPr algn="ctr" indent="0" marL="0">
-              <a:buNone/>
-            </a:pPr>
-            <a:r>
-              <a:rPr lang="en-US" sz="1500" b="1" dirty="0">
-                <a:solidFill>
-                  <a:srgbClr val="FFFFFF"/>
-                </a:solidFill>
-                <a:latin typeface="Aptos" pitchFamily="34" charset="0"/>
-                <a:ea typeface="Aptos" pitchFamily="34" charset="-122"/>
-                <a:cs typeface="Aptos" pitchFamily="34" charset="-120"/>
-              </a:rPr>
-              <a:t>Plan</a:t>
-            </a:r>
-            <a:endParaRPr lang="en-US" sz="1500" dirty="0"/>
+            <a:r>
+              <a:rPr lang="en-US" sz="1380" dirty="0">
+                <a:solidFill>
+                  <a:srgbClr val="17364A"/>
+                </a:solidFill>
+                <a:latin typeface="Aptos" pitchFamily="34" charset="0"/>
+                <a:ea typeface="Aptos" pitchFamily="34" charset="-122"/>
+                <a:cs typeface="Aptos" pitchFamily="34" charset="-120"/>
+              </a:rPr>
+              <a:t>AI requirements must cover functional capabilities, nonfunctional expectations, data.</a:t>
+            </a:r>
+            <a:endParaRPr lang="en-US" sz="1380" dirty="0"/>
+          </a:p>
+          <a:p>
+            <a:r>
+              <a:rPr lang="en-US" sz="1380" dirty="0">
+                <a:solidFill>
+                  <a:srgbClr val="17364A"/>
+                </a:solidFill>
+                <a:latin typeface="Aptos" pitchFamily="34" charset="0"/>
+                <a:ea typeface="Aptos" pitchFamily="34" charset="-122"/>
+                <a:cs typeface="Aptos" pitchFamily="34" charset="-120"/>
+              </a:rPr>
+              <a:t>Functional requirements describe what the tool must do, such as summarize a case report,.</a:t>
+            </a:r>
+            <a:endParaRPr lang="en-US" sz="1380" dirty="0"/>
+          </a:p>
+          <a:p>
+            <a:r>
+              <a:rPr lang="en-US" sz="1380" dirty="0">
+                <a:solidFill>
+                  <a:srgbClr val="17364A"/>
+                </a:solidFill>
+                <a:latin typeface="Aptos" pitchFamily="34" charset="0"/>
+                <a:ea typeface="Aptos" pitchFamily="34" charset="-122"/>
+                <a:cs typeface="Aptos" pitchFamily="34" charset="-120"/>
+              </a:rPr>
+              <a:t>Nonfunctional requirements describe how the tool must perform, such as uptime, response.</a:t>
+            </a:r>
+            <a:endParaRPr lang="en-US" sz="1380" dirty="0"/>
           </a:p>
         </p:txBody>
       </p:sp>
       <p:sp>
         <p:nvSpPr>
           <p:cNvPr id="16" name="Shape 14"/>
-          <p:cNvSpPr/>
-          <p:nvPr/>
-        </p:nvSpPr>
-        <p:spPr>
-          <a:xfrm>
-            <a:off x="8976360" y="3319272"/>
-            <a:ext cx="792480" cy="749808"/>
-          </a:xfrm>
-          <a:prstGeom prst="roundRect">
-            <a:avLst>
-              <a:gd name="adj" fmla="val 14634"/>
-            </a:avLst>
-          </a:prstGeom>
-          <a:solidFill>
-            <a:srgbClr val="2F8A28"/>
-          </a:solidFill>
-          <a:ln w="12700">
-            <a:solidFill>
-              <a:srgbClr val="2F8A28"/>
-            </a:solidFill>
-            <a:prstDash val="solid"/>
-          </a:ln>
-        </p:spPr>
-      </p:sp>
-      <p:sp>
-        <p:nvSpPr>
-          <p:cNvPr id="17" name="Text 15"/>
-          <p:cNvSpPr/>
-          <p:nvPr/>
-        </p:nvSpPr>
-        <p:spPr>
-          <a:xfrm>
-            <a:off x="9049512" y="3511296"/>
-            <a:ext cx="646176" cy="310896"/>
-          </a:xfrm>
-          <a:prstGeom prst="rect">
-            <a:avLst/>
-          </a:prstGeom>
-          <a:noFill/>
-          <a:ln/>
-        </p:spPr>
-        <p:txBody>
-          <a:bodyPr wrap="square" lIns="0" tIns="0" rIns="0" bIns="0" rtlCol="0" anchor="ctr">
-            <a:normAutofit/>
-          </a:bodyPr>
-          <a:lstStyle/>
-          <a:p>
-            <a:pPr algn="ctr" indent="0" marL="0">
-              <a:buNone/>
-            </a:pPr>
-            <a:r>
-              <a:rPr lang="en-US" sz="1500" b="1" dirty="0">
-                <a:solidFill>
-                  <a:srgbClr val="FFFFFF"/>
-                </a:solidFill>
-                <a:latin typeface="Aptos" pitchFamily="34" charset="0"/>
-                <a:ea typeface="Aptos" pitchFamily="34" charset="-122"/>
-                <a:cs typeface="Aptos" pitchFamily="34" charset="-120"/>
-              </a:rPr>
-              <a:t>Do</a:t>
-            </a:r>
-            <a:endParaRPr lang="en-US" sz="1500" dirty="0"/>
-          </a:p>
-        </p:txBody>
-      </p:sp>
-      <p:sp>
-        <p:nvSpPr>
-          <p:cNvPr id="18" name="Shape 16"/>
-          <p:cNvSpPr/>
-          <p:nvPr/>
-        </p:nvSpPr>
-        <p:spPr>
-          <a:xfrm>
-            <a:off x="10024872" y="3319272"/>
-            <a:ext cx="792480" cy="749808"/>
-          </a:xfrm>
-          <a:prstGeom prst="roundRect">
-            <a:avLst>
-              <a:gd name="adj" fmla="val 14634"/>
-            </a:avLst>
-          </a:prstGeom>
-          <a:solidFill>
-            <a:srgbClr val="D69A2D"/>
-          </a:solidFill>
-          <a:ln w="12700">
-            <a:solidFill>
-              <a:srgbClr val="D69A2D"/>
-            </a:solidFill>
-            <a:prstDash val="solid"/>
-          </a:ln>
-        </p:spPr>
-      </p:sp>
-      <p:sp>
-        <p:nvSpPr>
-          <p:cNvPr id="19" name="Text 17"/>
-          <p:cNvSpPr/>
-          <p:nvPr/>
-        </p:nvSpPr>
-        <p:spPr>
-          <a:xfrm>
-            <a:off x="10098024" y="3511296"/>
-            <a:ext cx="646176" cy="310896"/>
-          </a:xfrm>
-          <a:prstGeom prst="rect">
-            <a:avLst/>
-          </a:prstGeom>
-          <a:noFill/>
-          <a:ln/>
-        </p:spPr>
-        <p:txBody>
-          <a:bodyPr wrap="square" lIns="0" tIns="0" rIns="0" bIns="0" rtlCol="0" anchor="ctr">
-            <a:normAutofit/>
-          </a:bodyPr>
-          <a:lstStyle/>
-          <a:p>
-            <a:pPr algn="ctr" indent="0" marL="0">
-              <a:buNone/>
-            </a:pPr>
-            <a:r>
-              <a:rPr lang="en-US" sz="1500" b="1" dirty="0">
-                <a:solidFill>
-                  <a:srgbClr val="FFFFFF"/>
-                </a:solidFill>
-                <a:latin typeface="Aptos" pitchFamily="34" charset="0"/>
-                <a:ea typeface="Aptos" pitchFamily="34" charset="-122"/>
-                <a:cs typeface="Aptos" pitchFamily="34" charset="-120"/>
-              </a:rPr>
-              <a:t>Review</a:t>
-            </a:r>
-            <a:endParaRPr lang="en-US" sz="1500" dirty="0"/>
-          </a:p>
-        </p:txBody>
-      </p:sp>
-      <p:sp>
-        <p:nvSpPr>
-          <p:cNvPr id="20" name="Shape 18"/>
-          <p:cNvSpPr/>
-          <p:nvPr/>
-        </p:nvSpPr>
-        <p:spPr>
-          <a:xfrm>
-            <a:off x="8293608" y="4389120"/>
-            <a:ext cx="2157984" cy="0"/>
-          </a:xfrm>
-          <a:prstGeom prst="line">
-            <a:avLst/>
-          </a:prstGeom>
-          <a:noFill/>
-          <a:ln w="25400">
-            <a:solidFill>
-              <a:srgbClr val="8ABBD8"/>
-            </a:solidFill>
-            <a:prstDash val="solid"/>
-          </a:ln>
-        </p:spPr>
-      </p:sp>
-      <p:sp>
-        <p:nvSpPr>
-          <p:cNvPr id="21" name="Text 19"/>
-          <p:cNvSpPr/>
-          <p:nvPr/>
-        </p:nvSpPr>
-        <p:spPr>
-          <a:xfrm>
-            <a:off x="7909560" y="3977640"/>
-            <a:ext cx="2926080" cy="182880"/>
-          </a:xfrm>
-          <a:prstGeom prst="rect">
-            <a:avLst/>
-          </a:prstGeom>
-          <a:noFill/>
-          <a:ln/>
-        </p:spPr>
-        <p:txBody>
-          <a:bodyPr wrap="square" lIns="0" tIns="0" rIns="0" bIns="0" rtlCol="0" anchor="ctr"/>
-          <a:lstStyle/>
-          <a:p>
-            <a:pPr algn="ctr" indent="0" marL="0">
-              <a:buNone/>
-            </a:pPr>
-            <a:r>
-              <a:rPr lang="en-US" sz="1000" dirty="0">
-                <a:solidFill>
-                  <a:srgbClr val="003A63"/>
-                </a:solidFill>
-                <a:latin typeface="Aptos" pitchFamily="34" charset="0"/>
-                <a:ea typeface="Aptos" pitchFamily="34" charset="-122"/>
-                <a:cs typeface="Aptos" pitchFamily="34" charset="-120"/>
-              </a:rPr>
-              <a:t>Dependencies visible</a:t>
-            </a:r>
-            <a:endParaRPr lang="en-US" sz="1000" dirty="0"/>
-          </a:p>
-        </p:txBody>
-      </p:sp>
-      <p:sp>
-        <p:nvSpPr>
-          <p:cNvPr id="22" name="Shape 20"/>
           <p:cNvSpPr/>
           <p:nvPr/>
         </p:nvSpPr>
@@ -3825,7 +3662,7 @@
       </p:sp>
       <p:sp>
         <p:nvSpPr>
-          <p:cNvPr id="23" name="Text 21"/>
+          <p:cNvPr id="17" name="Text 15"/>
           <p:cNvSpPr/>
           <p:nvPr/>
         </p:nvSpPr>
@@ -3864,7 +3701,7 @@
       </p:sp>
       <p:sp>
         <p:nvSpPr>
-          <p:cNvPr id="24" name="Text 22"/>
+          <p:cNvPr id="18" name="Text 16"/>
           <p:cNvSpPr/>
           <p:nvPr/>
         </p:nvSpPr>
@@ -4358,13 +4195,11 @@
             </a:avLst>
           </a:prstGeom>
           <a:solidFill>
-            <a:srgbClr val="FFFFFF">
-              <a:alpha val="88000"/>
-            </a:srgbClr>
+            <a:srgbClr val="FFFFFF"/>
           </a:solidFill>
           <a:ln w="12700">
             <a:solidFill>
-              <a:srgbClr val="D6E8F2"/>
+              <a:srgbClr val="B9D7E6"/>
             </a:solidFill>
             <a:prstDash val="solid"/>
           </a:ln>
@@ -4372,30 +4207,42 @@
       </p:sp>
       <p:sp>
         <p:nvSpPr>
-          <p:cNvPr id="14" name="Shape 12"/>
-          <p:cNvSpPr/>
-          <p:nvPr/>
-        </p:nvSpPr>
-        <p:spPr>
-          <a:xfrm>
-            <a:off x="7927848" y="3319272"/>
-            <a:ext cx="792480" cy="749808"/>
-          </a:xfrm>
-          <a:prstGeom prst="roundRect">
-            <a:avLst>
-              <a:gd name="adj" fmla="val 14634"/>
-            </a:avLst>
-          </a:prstGeom>
-          <a:solidFill>
-            <a:srgbClr val="0068B7"/>
-          </a:solidFill>
-          <a:ln w="12700">
-            <a:solidFill>
-              <a:srgbClr val="0068B7"/>
-            </a:solidFill>
-            <a:prstDash val="solid"/>
-          </a:ln>
-        </p:spPr>
+          <p:cNvPr id="14" name="Text 12"/>
+          <p:cNvSpPr/>
+          <p:nvPr/>
+        </p:nvSpPr>
+        <p:spPr>
+          <a:xfrm>
+            <a:off x="7799832" y="2935224"/>
+            <a:ext cx="3145536" cy="256032"/>
+          </a:xfrm>
+          <a:prstGeom prst="rect">
+            <a:avLst/>
+          </a:prstGeom>
+          <a:noFill/>
+          <a:ln/>
+        </p:spPr>
+        <p:txBody>
+          <a:bodyPr wrap="square" lIns="0" tIns="0" rIns="0" bIns="0" rtlCol="0" anchor="ctr"/>
+          <a:lstStyle/>
+          <a:p>
+            <a:pPr indent="0" marL="0">
+              <a:buNone/>
+            </a:pPr>
+            <a:r>
+              <a:rPr lang="en-US" sz="1300" b="1" dirty="0">
+                <a:solidFill>
+                  <a:srgbClr val="0068B7"/>
+                </a:solidFill>
+                <a:latin typeface="Aptos" pitchFamily="34" charset="0"/>
+                <a:ea typeface="Aptos" pitchFamily="34" charset="-122"/>
+                <a:cs typeface="Aptos" pitchFamily="34" charset="-120"/>
+              </a:rPr>
+              <a:t>Concept checkpoints</a:t>
+            </a:r>
+            <a:endParaRPr lang="en-US" sz="1300" dirty="0"/>
+          </a:p>
+        </p:txBody>
       </p:sp>
       <p:sp>
         <p:nvSpPr>
@@ -4405,240 +4252,53 @@
         </p:nvSpPr>
         <p:spPr>
           <a:xfrm>
-            <a:off x="8001000" y="3511296"/>
-            <a:ext cx="646176" cy="310896"/>
-          </a:xfrm>
-          <a:prstGeom prst="rect">
-            <a:avLst/>
-          </a:prstGeom>
-          <a:noFill/>
-          <a:ln/>
-        </p:spPr>
-        <p:txBody>
-          <a:bodyPr wrap="square" lIns="0" tIns="0" rIns="0" bIns="0" rtlCol="0" anchor="ctr">
+            <a:off x="7818120" y="3300984"/>
+            <a:ext cx="3090672" cy="877824"/>
+          </a:xfrm>
+          <a:prstGeom prst="rect">
+            <a:avLst/>
+          </a:prstGeom>
+          <a:noFill/>
+          <a:ln/>
+        </p:spPr>
+        <p:txBody>
+          <a:bodyPr wrap="square" lIns="254" tIns="254" rIns="254" bIns="254" rtlCol="0" anchor="t">
             <a:normAutofit/>
           </a:bodyPr>
           <a:lstStyle/>
           <a:p>
-            <a:pPr algn="ctr" indent="0" marL="0">
-              <a:buNone/>
-            </a:pPr>
-            <a:r>
-              <a:rPr lang="en-US" sz="1500" b="1" dirty="0">
-                <a:solidFill>
-                  <a:srgbClr val="FFFFFF"/>
-                </a:solidFill>
-                <a:latin typeface="Aptos" pitchFamily="34" charset="0"/>
-                <a:ea typeface="Aptos" pitchFamily="34" charset="-122"/>
-                <a:cs typeface="Aptos" pitchFamily="34" charset="-120"/>
-              </a:rPr>
-              <a:t>Plan</a:t>
-            </a:r>
-            <a:endParaRPr lang="en-US" sz="1500" dirty="0"/>
+            <a:r>
+              <a:rPr lang="en-US" sz="1380" dirty="0">
+                <a:solidFill>
+                  <a:srgbClr val="17364A"/>
+                </a:solidFill>
+                <a:latin typeface="Aptos" pitchFamily="34" charset="0"/>
+                <a:ea typeface="Aptos" pitchFamily="34" charset="-122"/>
+                <a:cs typeface="Aptos" pitchFamily="34" charset="-120"/>
+              </a:rPr>
+              <a:t>A state health agency procuring an AI-supported case triage tool should require.</a:t>
+            </a:r>
+            <a:endParaRPr lang="en-US" sz="1380" dirty="0"/>
+          </a:p>
+          <a:p>
+            <a:r>
+              <a:rPr lang="en-US" sz="1380" dirty="0">
+                <a:solidFill>
+                  <a:srgbClr val="17364A"/>
+                </a:solidFill>
+                <a:latin typeface="Aptos" pitchFamily="34" charset="0"/>
+                <a:ea typeface="Aptos" pitchFamily="34" charset="-122"/>
+                <a:cs typeface="Aptos" pitchFamily="34" charset="-120"/>
+              </a:rPr>
+              <a:t>These requirements make vendor claims testable and enforceable.</a:t>
+            </a:r>
+            <a:endParaRPr lang="en-US" sz="1380" dirty="0"/>
           </a:p>
         </p:txBody>
       </p:sp>
       <p:sp>
         <p:nvSpPr>
           <p:cNvPr id="16" name="Shape 14"/>
-          <p:cNvSpPr/>
-          <p:nvPr/>
-        </p:nvSpPr>
-        <p:spPr>
-          <a:xfrm>
-            <a:off x="8976360" y="3319272"/>
-            <a:ext cx="792480" cy="749808"/>
-          </a:xfrm>
-          <a:prstGeom prst="roundRect">
-            <a:avLst>
-              <a:gd name="adj" fmla="val 14634"/>
-            </a:avLst>
-          </a:prstGeom>
-          <a:solidFill>
-            <a:srgbClr val="2F8A28"/>
-          </a:solidFill>
-          <a:ln w="12700">
-            <a:solidFill>
-              <a:srgbClr val="2F8A28"/>
-            </a:solidFill>
-            <a:prstDash val="solid"/>
-          </a:ln>
-        </p:spPr>
-      </p:sp>
-      <p:sp>
-        <p:nvSpPr>
-          <p:cNvPr id="17" name="Text 15"/>
-          <p:cNvSpPr/>
-          <p:nvPr/>
-        </p:nvSpPr>
-        <p:spPr>
-          <a:xfrm>
-            <a:off x="9049512" y="3511296"/>
-            <a:ext cx="646176" cy="310896"/>
-          </a:xfrm>
-          <a:prstGeom prst="rect">
-            <a:avLst/>
-          </a:prstGeom>
-          <a:noFill/>
-          <a:ln/>
-        </p:spPr>
-        <p:txBody>
-          <a:bodyPr wrap="square" lIns="0" tIns="0" rIns="0" bIns="0" rtlCol="0" anchor="ctr">
-            <a:normAutofit/>
-          </a:bodyPr>
-          <a:lstStyle/>
-          <a:p>
-            <a:pPr algn="ctr" indent="0" marL="0">
-              <a:buNone/>
-            </a:pPr>
-            <a:r>
-              <a:rPr lang="en-US" sz="1500" b="1" dirty="0">
-                <a:solidFill>
-                  <a:srgbClr val="FFFFFF"/>
-                </a:solidFill>
-                <a:latin typeface="Aptos" pitchFamily="34" charset="0"/>
-                <a:ea typeface="Aptos" pitchFamily="34" charset="-122"/>
-                <a:cs typeface="Aptos" pitchFamily="34" charset="-120"/>
-              </a:rPr>
-              <a:t>Do</a:t>
-            </a:r>
-            <a:endParaRPr lang="en-US" sz="1500" dirty="0"/>
-          </a:p>
-        </p:txBody>
-      </p:sp>
-      <p:sp>
-        <p:nvSpPr>
-          <p:cNvPr id="18" name="Shape 16"/>
-          <p:cNvSpPr/>
-          <p:nvPr/>
-        </p:nvSpPr>
-        <p:spPr>
-          <a:xfrm>
-            <a:off x="10024872" y="3319272"/>
-            <a:ext cx="792480" cy="749808"/>
-          </a:xfrm>
-          <a:prstGeom prst="roundRect">
-            <a:avLst>
-              <a:gd name="adj" fmla="val 14634"/>
-            </a:avLst>
-          </a:prstGeom>
-          <a:solidFill>
-            <a:srgbClr val="D69A2D"/>
-          </a:solidFill>
-          <a:ln w="12700">
-            <a:solidFill>
-              <a:srgbClr val="D69A2D"/>
-            </a:solidFill>
-            <a:prstDash val="solid"/>
-          </a:ln>
-        </p:spPr>
-      </p:sp>
-      <p:sp>
-        <p:nvSpPr>
-          <p:cNvPr id="19" name="Text 17"/>
-          <p:cNvSpPr/>
-          <p:nvPr/>
-        </p:nvSpPr>
-        <p:spPr>
-          <a:xfrm>
-            <a:off x="10098024" y="3511296"/>
-            <a:ext cx="646176" cy="310896"/>
-          </a:xfrm>
-          <a:prstGeom prst="rect">
-            <a:avLst/>
-          </a:prstGeom>
-          <a:noFill/>
-          <a:ln/>
-        </p:spPr>
-        <p:txBody>
-          <a:bodyPr wrap="square" lIns="0" tIns="0" rIns="0" bIns="0" rtlCol="0" anchor="ctr">
-            <a:normAutofit/>
-          </a:bodyPr>
-          <a:lstStyle/>
-          <a:p>
-            <a:pPr algn="ctr" indent="0" marL="0">
-              <a:buNone/>
-            </a:pPr>
-            <a:r>
-              <a:rPr lang="en-US" sz="1500" b="1" dirty="0">
-                <a:solidFill>
-                  <a:srgbClr val="FFFFFF"/>
-                </a:solidFill>
-                <a:latin typeface="Aptos" pitchFamily="34" charset="0"/>
-                <a:ea typeface="Aptos" pitchFamily="34" charset="-122"/>
-                <a:cs typeface="Aptos" pitchFamily="34" charset="-120"/>
-              </a:rPr>
-              <a:t>Review</a:t>
-            </a:r>
-            <a:endParaRPr lang="en-US" sz="1500" dirty="0"/>
-          </a:p>
-        </p:txBody>
-      </p:sp>
-      <p:sp>
-        <p:nvSpPr>
-          <p:cNvPr id="20" name="Shape 18"/>
-          <p:cNvSpPr/>
-          <p:nvPr/>
-        </p:nvSpPr>
-        <p:spPr>
-          <a:xfrm>
-            <a:off x="8293608" y="4389120"/>
-            <a:ext cx="2157984" cy="0"/>
-          </a:xfrm>
-          <a:prstGeom prst="line">
-            <a:avLst/>
-          </a:prstGeom>
-          <a:noFill/>
-          <a:ln w="25400">
-            <a:solidFill>
-              <a:srgbClr val="8ABBD8"/>
-            </a:solidFill>
-            <a:prstDash val="solid"/>
-          </a:ln>
-        </p:spPr>
-      </p:sp>
-      <p:sp>
-        <p:nvSpPr>
-          <p:cNvPr id="21" name="Text 19"/>
-          <p:cNvSpPr/>
-          <p:nvPr/>
-        </p:nvSpPr>
-        <p:spPr>
-          <a:xfrm>
-            <a:off x="7909560" y="3977640"/>
-            <a:ext cx="2926080" cy="182880"/>
-          </a:xfrm>
-          <a:prstGeom prst="rect">
-            <a:avLst/>
-          </a:prstGeom>
-          <a:noFill/>
-          <a:ln/>
-        </p:spPr>
-        <p:txBody>
-          <a:bodyPr wrap="square" lIns="0" tIns="0" rIns="0" bIns="0" rtlCol="0" anchor="ctr"/>
-          <a:lstStyle/>
-          <a:p>
-            <a:pPr algn="ctr" indent="0" marL="0">
-              <a:buNone/>
-            </a:pPr>
-            <a:r>
-              <a:rPr lang="en-US" sz="1000" dirty="0">
-                <a:solidFill>
-                  <a:srgbClr val="003A63"/>
-                </a:solidFill>
-                <a:latin typeface="Aptos" pitchFamily="34" charset="0"/>
-                <a:ea typeface="Aptos" pitchFamily="34" charset="-122"/>
-                <a:cs typeface="Aptos" pitchFamily="34" charset="-120"/>
-              </a:rPr>
-              <a:t>Dependencies visible</a:t>
-            </a:r>
-            <a:endParaRPr lang="en-US" sz="1000" dirty="0"/>
-          </a:p>
-        </p:txBody>
-      </p:sp>
-      <p:sp>
-        <p:nvSpPr>
-          <p:cNvPr id="22" name="Shape 20"/>
           <p:cNvSpPr/>
           <p:nvPr/>
         </p:nvSpPr>
@@ -4665,7 +4325,7 @@
       </p:sp>
       <p:sp>
         <p:nvSpPr>
-          <p:cNvPr id="23" name="Text 21"/>
+          <p:cNvPr id="17" name="Text 15"/>
           <p:cNvSpPr/>
           <p:nvPr/>
         </p:nvSpPr>
@@ -4704,7 +4364,7 @@
       </p:sp>
       <p:sp>
         <p:nvSpPr>
-          <p:cNvPr id="24" name="Text 22"/>
+          <p:cNvPr id="18" name="Text 16"/>
           <p:cNvSpPr/>
           <p:nvPr/>
         </p:nvSpPr>
@@ -5212,13 +4872,11 @@
             </a:avLst>
           </a:prstGeom>
           <a:solidFill>
-            <a:srgbClr val="FFFFFF">
-              <a:alpha val="88000"/>
-            </a:srgbClr>
+            <a:srgbClr val="FFFFFF"/>
           </a:solidFill>
           <a:ln w="12700">
             <a:solidFill>
-              <a:srgbClr val="D6E8F2"/>
+              <a:srgbClr val="B9D7E6"/>
             </a:solidFill>
             <a:prstDash val="solid"/>
           </a:ln>
@@ -5226,30 +4884,42 @@
       </p:sp>
       <p:sp>
         <p:nvSpPr>
-          <p:cNvPr id="14" name="Shape 12"/>
-          <p:cNvSpPr/>
-          <p:nvPr/>
-        </p:nvSpPr>
-        <p:spPr>
-          <a:xfrm>
-            <a:off x="7927848" y="3319272"/>
-            <a:ext cx="792480" cy="749808"/>
-          </a:xfrm>
-          <a:prstGeom prst="roundRect">
-            <a:avLst>
-              <a:gd name="adj" fmla="val 14634"/>
-            </a:avLst>
-          </a:prstGeom>
-          <a:solidFill>
-            <a:srgbClr val="0068B7"/>
-          </a:solidFill>
-          <a:ln w="12700">
-            <a:solidFill>
-              <a:srgbClr val="0068B7"/>
-            </a:solidFill>
-            <a:prstDash val="solid"/>
-          </a:ln>
-        </p:spPr>
+          <p:cNvPr id="14" name="Text 12"/>
+          <p:cNvSpPr/>
+          <p:nvPr/>
+        </p:nvSpPr>
+        <p:spPr>
+          <a:xfrm>
+            <a:off x="7799832" y="2935224"/>
+            <a:ext cx="3145536" cy="256032"/>
+          </a:xfrm>
+          <a:prstGeom prst="rect">
+            <a:avLst/>
+          </a:prstGeom>
+          <a:noFill/>
+          <a:ln/>
+        </p:spPr>
+        <p:txBody>
+          <a:bodyPr wrap="square" lIns="0" tIns="0" rIns="0" bIns="0" rtlCol="0" anchor="ctr"/>
+          <a:lstStyle/>
+          <a:p>
+            <a:pPr indent="0" marL="0">
+              <a:buNone/>
+            </a:pPr>
+            <a:r>
+              <a:rPr lang="en-US" sz="1300" b="1" dirty="0">
+                <a:solidFill>
+                  <a:srgbClr val="0068B7"/>
+                </a:solidFill>
+                <a:latin typeface="Aptos" pitchFamily="34" charset="0"/>
+                <a:ea typeface="Aptos" pitchFamily="34" charset="-122"/>
+                <a:cs typeface="Aptos" pitchFamily="34" charset="-120"/>
+              </a:rPr>
+              <a:t>Concept checkpoints</a:t>
+            </a:r>
+            <a:endParaRPr lang="en-US" sz="1300" dirty="0"/>
+          </a:p>
+        </p:txBody>
       </p:sp>
       <p:sp>
         <p:nvSpPr>
@@ -5259,240 +4929,67 @@
         </p:nvSpPr>
         <p:spPr>
           <a:xfrm>
-            <a:off x="8001000" y="3511296"/>
-            <a:ext cx="646176" cy="310896"/>
-          </a:xfrm>
-          <a:prstGeom prst="rect">
-            <a:avLst/>
-          </a:prstGeom>
-          <a:noFill/>
-          <a:ln/>
-        </p:spPr>
-        <p:txBody>
-          <a:bodyPr wrap="square" lIns="0" tIns="0" rIns="0" bIns="0" rtlCol="0" anchor="ctr">
+            <a:off x="7818120" y="3300984"/>
+            <a:ext cx="3090672" cy="877824"/>
+          </a:xfrm>
+          <a:prstGeom prst="rect">
+            <a:avLst/>
+          </a:prstGeom>
+          <a:noFill/>
+          <a:ln/>
+        </p:spPr>
+        <p:txBody>
+          <a:bodyPr wrap="square" lIns="254" tIns="254" rIns="254" bIns="254" rtlCol="0" anchor="t">
             <a:normAutofit/>
           </a:bodyPr>
           <a:lstStyle/>
           <a:p>
-            <a:pPr algn="ctr" indent="0" marL="0">
-              <a:buNone/>
-            </a:pPr>
-            <a:r>
-              <a:rPr lang="en-US" sz="1500" b="1" dirty="0">
-                <a:solidFill>
-                  <a:srgbClr val="FFFFFF"/>
-                </a:solidFill>
-                <a:latin typeface="Aptos" pitchFamily="34" charset="0"/>
-                <a:ea typeface="Aptos" pitchFamily="34" charset="-122"/>
-                <a:cs typeface="Aptos" pitchFamily="34" charset="-120"/>
-              </a:rPr>
-              <a:t>Plan</a:t>
-            </a:r>
-            <a:endParaRPr lang="en-US" sz="1500" dirty="0"/>
+            <a:r>
+              <a:rPr lang="en-US" sz="1380" dirty="0">
+                <a:solidFill>
+                  <a:srgbClr val="17364A"/>
+                </a:solidFill>
+                <a:latin typeface="Aptos" pitchFamily="34" charset="0"/>
+                <a:ea typeface="Aptos" pitchFamily="34" charset="-122"/>
+                <a:cs typeface="Aptos" pitchFamily="34" charset="-120"/>
+              </a:rPr>
+              <a:t>The agency should state the specific workflow, users, data sources, outputs, and decisions.</a:t>
+            </a:r>
+            <a:endParaRPr lang="en-US" sz="1380" dirty="0"/>
+          </a:p>
+          <a:p>
+            <a:r>
+              <a:rPr lang="en-US" sz="1380" dirty="0">
+                <a:solidFill>
+                  <a:srgbClr val="17364A"/>
+                </a:solidFill>
+                <a:latin typeface="Aptos" pitchFamily="34" charset="0"/>
+                <a:ea typeface="Aptos" pitchFamily="34" charset="-122"/>
+                <a:cs typeface="Aptos" pitchFamily="34" charset="-120"/>
+              </a:rPr>
+              <a:t>This prevents scope creep and reduces the chance that a tool will be used for decisions it.</a:t>
+            </a:r>
+            <a:endParaRPr lang="en-US" sz="1380" dirty="0"/>
+          </a:p>
+          <a:p>
+            <a:r>
+              <a:rPr lang="en-US" sz="1380" dirty="0">
+                <a:solidFill>
+                  <a:srgbClr val="17364A"/>
+                </a:solidFill>
+                <a:latin typeface="Aptos" pitchFamily="34" charset="0"/>
+                <a:ea typeface="Aptos" pitchFamily="34" charset="-122"/>
+                <a:cs typeface="Aptos" pitchFamily="34" charset="-120"/>
+              </a:rPr>
+              <a:t>Data requirements should specify allowed data sources, minimum necessary fields,.</a:t>
+            </a:r>
+            <a:endParaRPr lang="en-US" sz="1380" dirty="0"/>
           </a:p>
         </p:txBody>
       </p:sp>
       <p:sp>
         <p:nvSpPr>
           <p:cNvPr id="16" name="Shape 14"/>
-          <p:cNvSpPr/>
-          <p:nvPr/>
-        </p:nvSpPr>
-        <p:spPr>
-          <a:xfrm>
-            <a:off x="8976360" y="3319272"/>
-            <a:ext cx="792480" cy="749808"/>
-          </a:xfrm>
-          <a:prstGeom prst="roundRect">
-            <a:avLst>
-              <a:gd name="adj" fmla="val 14634"/>
-            </a:avLst>
-          </a:prstGeom>
-          <a:solidFill>
-            <a:srgbClr val="2F8A28"/>
-          </a:solidFill>
-          <a:ln w="12700">
-            <a:solidFill>
-              <a:srgbClr val="2F8A28"/>
-            </a:solidFill>
-            <a:prstDash val="solid"/>
-          </a:ln>
-        </p:spPr>
-      </p:sp>
-      <p:sp>
-        <p:nvSpPr>
-          <p:cNvPr id="17" name="Text 15"/>
-          <p:cNvSpPr/>
-          <p:nvPr/>
-        </p:nvSpPr>
-        <p:spPr>
-          <a:xfrm>
-            <a:off x="9049512" y="3511296"/>
-            <a:ext cx="646176" cy="310896"/>
-          </a:xfrm>
-          <a:prstGeom prst="rect">
-            <a:avLst/>
-          </a:prstGeom>
-          <a:noFill/>
-          <a:ln/>
-        </p:spPr>
-        <p:txBody>
-          <a:bodyPr wrap="square" lIns="0" tIns="0" rIns="0" bIns="0" rtlCol="0" anchor="ctr">
-            <a:normAutofit/>
-          </a:bodyPr>
-          <a:lstStyle/>
-          <a:p>
-            <a:pPr algn="ctr" indent="0" marL="0">
-              <a:buNone/>
-            </a:pPr>
-            <a:r>
-              <a:rPr lang="en-US" sz="1500" b="1" dirty="0">
-                <a:solidFill>
-                  <a:srgbClr val="FFFFFF"/>
-                </a:solidFill>
-                <a:latin typeface="Aptos" pitchFamily="34" charset="0"/>
-                <a:ea typeface="Aptos" pitchFamily="34" charset="-122"/>
-                <a:cs typeface="Aptos" pitchFamily="34" charset="-120"/>
-              </a:rPr>
-              <a:t>Do</a:t>
-            </a:r>
-            <a:endParaRPr lang="en-US" sz="1500" dirty="0"/>
-          </a:p>
-        </p:txBody>
-      </p:sp>
-      <p:sp>
-        <p:nvSpPr>
-          <p:cNvPr id="18" name="Shape 16"/>
-          <p:cNvSpPr/>
-          <p:nvPr/>
-        </p:nvSpPr>
-        <p:spPr>
-          <a:xfrm>
-            <a:off x="10024872" y="3319272"/>
-            <a:ext cx="792480" cy="749808"/>
-          </a:xfrm>
-          <a:prstGeom prst="roundRect">
-            <a:avLst>
-              <a:gd name="adj" fmla="val 14634"/>
-            </a:avLst>
-          </a:prstGeom>
-          <a:solidFill>
-            <a:srgbClr val="D69A2D"/>
-          </a:solidFill>
-          <a:ln w="12700">
-            <a:solidFill>
-              <a:srgbClr val="D69A2D"/>
-            </a:solidFill>
-            <a:prstDash val="solid"/>
-          </a:ln>
-        </p:spPr>
-      </p:sp>
-      <p:sp>
-        <p:nvSpPr>
-          <p:cNvPr id="19" name="Text 17"/>
-          <p:cNvSpPr/>
-          <p:nvPr/>
-        </p:nvSpPr>
-        <p:spPr>
-          <a:xfrm>
-            <a:off x="10098024" y="3511296"/>
-            <a:ext cx="646176" cy="310896"/>
-          </a:xfrm>
-          <a:prstGeom prst="rect">
-            <a:avLst/>
-          </a:prstGeom>
-          <a:noFill/>
-          <a:ln/>
-        </p:spPr>
-        <p:txBody>
-          <a:bodyPr wrap="square" lIns="0" tIns="0" rIns="0" bIns="0" rtlCol="0" anchor="ctr">
-            <a:normAutofit/>
-          </a:bodyPr>
-          <a:lstStyle/>
-          <a:p>
-            <a:pPr algn="ctr" indent="0" marL="0">
-              <a:buNone/>
-            </a:pPr>
-            <a:r>
-              <a:rPr lang="en-US" sz="1500" b="1" dirty="0">
-                <a:solidFill>
-                  <a:srgbClr val="FFFFFF"/>
-                </a:solidFill>
-                <a:latin typeface="Aptos" pitchFamily="34" charset="0"/>
-                <a:ea typeface="Aptos" pitchFamily="34" charset="-122"/>
-                <a:cs typeface="Aptos" pitchFamily="34" charset="-120"/>
-              </a:rPr>
-              <a:t>Review</a:t>
-            </a:r>
-            <a:endParaRPr lang="en-US" sz="1500" dirty="0"/>
-          </a:p>
-        </p:txBody>
-      </p:sp>
-      <p:sp>
-        <p:nvSpPr>
-          <p:cNvPr id="20" name="Shape 18"/>
-          <p:cNvSpPr/>
-          <p:nvPr/>
-        </p:nvSpPr>
-        <p:spPr>
-          <a:xfrm>
-            <a:off x="8293608" y="4389120"/>
-            <a:ext cx="2157984" cy="0"/>
-          </a:xfrm>
-          <a:prstGeom prst="line">
-            <a:avLst/>
-          </a:prstGeom>
-          <a:noFill/>
-          <a:ln w="25400">
-            <a:solidFill>
-              <a:srgbClr val="8ABBD8"/>
-            </a:solidFill>
-            <a:prstDash val="solid"/>
-          </a:ln>
-        </p:spPr>
-      </p:sp>
-      <p:sp>
-        <p:nvSpPr>
-          <p:cNvPr id="21" name="Text 19"/>
-          <p:cNvSpPr/>
-          <p:nvPr/>
-        </p:nvSpPr>
-        <p:spPr>
-          <a:xfrm>
-            <a:off x="7909560" y="3977640"/>
-            <a:ext cx="2926080" cy="182880"/>
-          </a:xfrm>
-          <a:prstGeom prst="rect">
-            <a:avLst/>
-          </a:prstGeom>
-          <a:noFill/>
-          <a:ln/>
-        </p:spPr>
-        <p:txBody>
-          <a:bodyPr wrap="square" lIns="0" tIns="0" rIns="0" bIns="0" rtlCol="0" anchor="ctr"/>
-          <a:lstStyle/>
-          <a:p>
-            <a:pPr algn="ctr" indent="0" marL="0">
-              <a:buNone/>
-            </a:pPr>
-            <a:r>
-              <a:rPr lang="en-US" sz="1000" dirty="0">
-                <a:solidFill>
-                  <a:srgbClr val="003A63"/>
-                </a:solidFill>
-                <a:latin typeface="Aptos" pitchFamily="34" charset="0"/>
-                <a:ea typeface="Aptos" pitchFamily="34" charset="-122"/>
-                <a:cs typeface="Aptos" pitchFamily="34" charset="-120"/>
-              </a:rPr>
-              <a:t>Dependencies visible</a:t>
-            </a:r>
-            <a:endParaRPr lang="en-US" sz="1000" dirty="0"/>
-          </a:p>
-        </p:txBody>
-      </p:sp>
-      <p:sp>
-        <p:nvSpPr>
-          <p:cNvPr id="22" name="Shape 20"/>
           <p:cNvSpPr/>
           <p:nvPr/>
         </p:nvSpPr>
@@ -5519,7 +5016,7 @@
       </p:sp>
       <p:sp>
         <p:nvSpPr>
-          <p:cNvPr id="23" name="Text 21"/>
+          <p:cNvPr id="17" name="Text 15"/>
           <p:cNvSpPr/>
           <p:nvPr/>
         </p:nvSpPr>
@@ -5558,7 +5055,7 @@
       </p:sp>
       <p:sp>
         <p:nvSpPr>
-          <p:cNvPr id="24" name="Text 22"/>
+          <p:cNvPr id="18" name="Text 16"/>
           <p:cNvSpPr/>
           <p:nvPr/>
         </p:nvSpPr>
@@ -6066,13 +5563,11 @@
             </a:avLst>
           </a:prstGeom>
           <a:solidFill>
-            <a:srgbClr val="FFFFFF">
-              <a:alpha val="88000"/>
-            </a:srgbClr>
+            <a:srgbClr val="FFFFFF"/>
           </a:solidFill>
           <a:ln w="12700">
             <a:solidFill>
-              <a:srgbClr val="D6E8F2"/>
+              <a:srgbClr val="B9D7E6"/>
             </a:solidFill>
             <a:prstDash val="solid"/>
           </a:ln>
@@ -6080,26 +5575,42 @@
       </p:sp>
       <p:sp>
         <p:nvSpPr>
-          <p:cNvPr id="14" name="Shape 12"/>
-          <p:cNvSpPr/>
-          <p:nvPr/>
-        </p:nvSpPr>
-        <p:spPr>
-          <a:xfrm>
-            <a:off x="8046720" y="3108960"/>
-            <a:ext cx="2651760" cy="896112"/>
-          </a:xfrm>
-          <a:prstGeom prst="arc">
-            <a:avLst/>
-          </a:prstGeom>
-          <a:noFill/>
-          <a:ln w="25400">
-            <a:solidFill>
-              <a:srgbClr val="0068B7"/>
-            </a:solidFill>
-            <a:prstDash val="solid"/>
-          </a:ln>
-        </p:spPr>
+          <p:cNvPr id="14" name="Text 12"/>
+          <p:cNvSpPr/>
+          <p:nvPr/>
+        </p:nvSpPr>
+        <p:spPr>
+          <a:xfrm>
+            <a:off x="7799832" y="2935224"/>
+            <a:ext cx="3145536" cy="256032"/>
+          </a:xfrm>
+          <a:prstGeom prst="rect">
+            <a:avLst/>
+          </a:prstGeom>
+          <a:noFill/>
+          <a:ln/>
+        </p:spPr>
+        <p:txBody>
+          <a:bodyPr wrap="square" lIns="0" tIns="0" rIns="0" bIns="0" rtlCol="0" anchor="ctr"/>
+          <a:lstStyle/>
+          <a:p>
+            <a:pPr indent="0" marL="0">
+              <a:buNone/>
+            </a:pPr>
+            <a:r>
+              <a:rPr lang="en-US" sz="1300" b="1" dirty="0">
+                <a:solidFill>
+                  <a:srgbClr val="0068B7"/>
+                </a:solidFill>
+                <a:latin typeface="Aptos" pitchFamily="34" charset="0"/>
+                <a:ea typeface="Aptos" pitchFamily="34" charset="-122"/>
+                <a:cs typeface="Aptos" pitchFamily="34" charset="-120"/>
+              </a:rPr>
+              <a:t>Concept checkpoints</a:t>
+            </a:r>
+            <a:endParaRPr lang="en-US" sz="1300" dirty="0"/>
+          </a:p>
+        </p:txBody>
       </p:sp>
       <p:sp>
         <p:nvSpPr>
@@ -6109,102 +5620,67 @@
         </p:nvSpPr>
         <p:spPr>
           <a:xfrm>
-            <a:off x="7909560" y="3099816"/>
-            <a:ext cx="2926080" cy="256032"/>
-          </a:xfrm>
-          <a:prstGeom prst="rect">
-            <a:avLst/>
-          </a:prstGeom>
-          <a:noFill/>
-          <a:ln/>
-        </p:spPr>
-        <p:txBody>
-          <a:bodyPr wrap="square" lIns="0" tIns="0" rIns="0" bIns="0" rtlCol="0" anchor="ctr"/>
-          <a:lstStyle/>
-          <a:p>
-            <a:pPr algn="ctr" indent="0" marL="0">
-              <a:buNone/>
-            </a:pPr>
-            <a:r>
-              <a:rPr lang="en-US" sz="1500" b="1" dirty="0">
-                <a:solidFill>
-                  <a:srgbClr val="003A63"/>
-                </a:solidFill>
-                <a:latin typeface="Aptos" pitchFamily="34" charset="0"/>
-                <a:ea typeface="Aptos" pitchFamily="34" charset="-122"/>
-                <a:cs typeface="Aptos" pitchFamily="34" charset="-120"/>
-              </a:rPr>
-              <a:t>Risk</a:t>
-            </a:r>
-            <a:endParaRPr lang="en-US" sz="1500" dirty="0"/>
+            <a:off x="7818120" y="3300984"/>
+            <a:ext cx="3090672" cy="877824"/>
+          </a:xfrm>
+          <a:prstGeom prst="rect">
+            <a:avLst/>
+          </a:prstGeom>
+          <a:noFill/>
+          <a:ln/>
+        </p:spPr>
+        <p:txBody>
+          <a:bodyPr wrap="square" lIns="254" tIns="254" rIns="254" bIns="254" rtlCol="0" anchor="t">
+            <a:normAutofit/>
+          </a:bodyPr>
+          <a:lstStyle/>
+          <a:p>
+            <a:r>
+              <a:rPr lang="en-US" sz="1380" dirty="0">
+                <a:solidFill>
+                  <a:srgbClr val="17364A"/>
+                </a:solidFill>
+                <a:latin typeface="Aptos" pitchFamily="34" charset="0"/>
+                <a:ea typeface="Aptos" pitchFamily="34" charset="-122"/>
+                <a:cs typeface="Aptos" pitchFamily="34" charset="-120"/>
+              </a:rPr>
+              <a:t>When staff do not connect technical decisions to authority, workflow, equity, privacy,.</a:t>
+            </a:r>
+            <a:endParaRPr lang="en-US" sz="1380" dirty="0"/>
+          </a:p>
+          <a:p>
+            <a:r>
+              <a:rPr lang="en-US" sz="1380" dirty="0">
+                <a:solidFill>
+                  <a:srgbClr val="17364A"/>
+                </a:solidFill>
+                <a:latin typeface="Aptos" pitchFamily="34" charset="0"/>
+                <a:ea typeface="Aptos" pitchFamily="34" charset="-122"/>
+                <a:cs typeface="Aptos" pitchFamily="34" charset="-120"/>
+              </a:rPr>
+              <a:t>Vendors may provide demonstrations, dashboards, or summary metrics that do not match the.</a:t>
+            </a:r>
+            <a:endParaRPr lang="en-US" sz="1380" dirty="0"/>
+          </a:p>
+          <a:p>
+            <a:r>
+              <a:rPr lang="en-US" sz="1380" dirty="0">
+                <a:solidFill>
+                  <a:srgbClr val="17364A"/>
+                </a:solidFill>
+                <a:latin typeface="Aptos" pitchFamily="34" charset="0"/>
+                <a:ea typeface="Aptos" pitchFamily="34" charset="-122"/>
+                <a:cs typeface="Aptos" pitchFamily="34" charset="-120"/>
+              </a:rPr>
+              <a:t>A guardrail is to require documentation, test results, acceptance criteria, and.</a:t>
+            </a:r>
+            <a:endParaRPr lang="en-US" sz="1380" dirty="0"/>
           </a:p>
         </p:txBody>
       </p:sp>
       <p:sp>
         <p:nvSpPr>
           <p:cNvPr id="16" name="Shape 14"/>
-          <p:cNvSpPr/>
-          <p:nvPr/>
-        </p:nvSpPr>
-        <p:spPr>
-          <a:xfrm>
-            <a:off x="8366760" y="3639312"/>
-            <a:ext cx="2011680" cy="0"/>
-          </a:xfrm>
-          <a:prstGeom prst="line">
-            <a:avLst/>
-          </a:prstGeom>
-          <a:noFill/>
-          <a:ln w="63500">
-            <a:solidFill>
-              <a:srgbClr val="2F8A28"/>
-            </a:solidFill>
-            <a:prstDash val="solid"/>
-          </a:ln>
-        </p:spPr>
-      </p:sp>
-      <p:sp>
-        <p:nvSpPr>
-          <p:cNvPr id="17" name="Text 15"/>
-          <p:cNvSpPr/>
-          <p:nvPr/>
-        </p:nvSpPr>
-        <p:spPr>
-          <a:xfrm>
-            <a:off x="7909560" y="3849624"/>
-            <a:ext cx="2926080" cy="164592"/>
-          </a:xfrm>
-          <a:prstGeom prst="rect">
-            <a:avLst/>
-          </a:prstGeom>
-          <a:noFill/>
-          <a:ln/>
-        </p:spPr>
-        <p:txBody>
-          <a:bodyPr wrap="square" lIns="0" tIns="0" rIns="0" bIns="0" rtlCol="0" anchor="ctr"/>
-          <a:lstStyle/>
-          <a:p>
-            <a:pPr algn="ctr" indent="0" marL="0">
-              <a:buNone/>
-            </a:pPr>
-            <a:r>
-              <a:rPr lang="en-US" sz="900" dirty="0">
-                <a:solidFill>
-                  <a:srgbClr val="003A63"/>
-                </a:solidFill>
-                <a:latin typeface="Aptos" pitchFamily="34" charset="0"/>
-                <a:ea typeface="Aptos" pitchFamily="34" charset="-122"/>
-                <a:cs typeface="Aptos" pitchFamily="34" charset="-120"/>
-              </a:rPr>
-              <a:t>Human review</a:t>
-            </a:r>
-            <a:endParaRPr lang="en-US" sz="900" dirty="0"/>
-          </a:p>
-        </p:txBody>
-      </p:sp>
-      <p:sp>
-        <p:nvSpPr>
-          <p:cNvPr id="18" name="Shape 16"/>
           <p:cNvSpPr/>
           <p:nvPr/>
         </p:nvSpPr>
@@ -6231,7 +5707,7 @@
       </p:sp>
       <p:sp>
         <p:nvSpPr>
-          <p:cNvPr id="19" name="Text 17"/>
+          <p:cNvPr id="17" name="Text 15"/>
           <p:cNvSpPr/>
           <p:nvPr/>
         </p:nvSpPr>
@@ -6270,7 +5746,7 @@
       </p:sp>
       <p:sp>
         <p:nvSpPr>
-          <p:cNvPr id="20" name="Text 18"/>
+          <p:cNvPr id="18" name="Text 16"/>
           <p:cNvSpPr/>
           <p:nvPr/>
         </p:nvSpPr>
@@ -6778,13 +6254,11 @@
             </a:avLst>
           </a:prstGeom>
           <a:solidFill>
-            <a:srgbClr val="FFFFFF">
-              <a:alpha val="88000"/>
-            </a:srgbClr>
+            <a:srgbClr val="FFFFFF"/>
           </a:solidFill>
           <a:ln w="12700">
             <a:solidFill>
-              <a:srgbClr val="D6E8F2"/>
+              <a:srgbClr val="B9D7E6"/>
             </a:solidFill>
             <a:prstDash val="solid"/>
           </a:ln>
@@ -6792,30 +6266,42 @@
       </p:sp>
       <p:sp>
         <p:nvSpPr>
-          <p:cNvPr id="14" name="Shape 12"/>
-          <p:cNvSpPr/>
-          <p:nvPr/>
-        </p:nvSpPr>
-        <p:spPr>
-          <a:xfrm>
-            <a:off x="7927848" y="3319272"/>
-            <a:ext cx="792480" cy="749808"/>
-          </a:xfrm>
-          <a:prstGeom prst="roundRect">
-            <a:avLst>
-              <a:gd name="adj" fmla="val 14634"/>
-            </a:avLst>
-          </a:prstGeom>
-          <a:solidFill>
-            <a:srgbClr val="0068B7"/>
-          </a:solidFill>
-          <a:ln w="12700">
-            <a:solidFill>
-              <a:srgbClr val="0068B7"/>
-            </a:solidFill>
-            <a:prstDash val="solid"/>
-          </a:ln>
-        </p:spPr>
+          <p:cNvPr id="14" name="Text 12"/>
+          <p:cNvSpPr/>
+          <p:nvPr/>
+        </p:nvSpPr>
+        <p:spPr>
+          <a:xfrm>
+            <a:off x="7799832" y="2935224"/>
+            <a:ext cx="3145536" cy="256032"/>
+          </a:xfrm>
+          <a:prstGeom prst="rect">
+            <a:avLst/>
+          </a:prstGeom>
+          <a:noFill/>
+          <a:ln/>
+        </p:spPr>
+        <p:txBody>
+          <a:bodyPr wrap="square" lIns="0" tIns="0" rIns="0" bIns="0" rtlCol="0" anchor="ctr"/>
+          <a:lstStyle/>
+          <a:p>
+            <a:pPr indent="0" marL="0">
+              <a:buNone/>
+            </a:pPr>
+            <a:r>
+              <a:rPr lang="en-US" sz="1300" b="1" dirty="0">
+                <a:solidFill>
+                  <a:srgbClr val="0068B7"/>
+                </a:solidFill>
+                <a:latin typeface="Aptos" pitchFamily="34" charset="0"/>
+                <a:ea typeface="Aptos" pitchFamily="34" charset="-122"/>
+                <a:cs typeface="Aptos" pitchFamily="34" charset="-120"/>
+              </a:rPr>
+              <a:t>Concept checkpoints</a:t>
+            </a:r>
+            <a:endParaRPr lang="en-US" sz="1300" dirty="0"/>
+          </a:p>
+        </p:txBody>
       </p:sp>
       <p:sp>
         <p:nvSpPr>
@@ -6825,240 +6311,67 @@
         </p:nvSpPr>
         <p:spPr>
           <a:xfrm>
-            <a:off x="8001000" y="3511296"/>
-            <a:ext cx="646176" cy="310896"/>
-          </a:xfrm>
-          <a:prstGeom prst="rect">
-            <a:avLst/>
-          </a:prstGeom>
-          <a:noFill/>
-          <a:ln/>
-        </p:spPr>
-        <p:txBody>
-          <a:bodyPr wrap="square" lIns="0" tIns="0" rIns="0" bIns="0" rtlCol="0" anchor="ctr">
+            <a:off x="7818120" y="3300984"/>
+            <a:ext cx="3090672" cy="877824"/>
+          </a:xfrm>
+          <a:prstGeom prst="rect">
+            <a:avLst/>
+          </a:prstGeom>
+          <a:noFill/>
+          <a:ln/>
+        </p:spPr>
+        <p:txBody>
+          <a:bodyPr wrap="square" lIns="254" tIns="254" rIns="254" bIns="254" rtlCol="0" anchor="t">
             <a:normAutofit/>
           </a:bodyPr>
           <a:lstStyle/>
           <a:p>
-            <a:pPr algn="ctr" indent="0" marL="0">
-              <a:buNone/>
-            </a:pPr>
-            <a:r>
-              <a:rPr lang="en-US" sz="1500" b="1" dirty="0">
-                <a:solidFill>
-                  <a:srgbClr val="FFFFFF"/>
-                </a:solidFill>
-                <a:latin typeface="Aptos" pitchFamily="34" charset="0"/>
-                <a:ea typeface="Aptos" pitchFamily="34" charset="-122"/>
-                <a:cs typeface="Aptos" pitchFamily="34" charset="-120"/>
-              </a:rPr>
-              <a:t>Plan</a:t>
-            </a:r>
-            <a:endParaRPr lang="en-US" sz="1500" dirty="0"/>
+            <a:r>
+              <a:rPr lang="en-US" sz="1380" dirty="0">
+                <a:solidFill>
+                  <a:srgbClr val="17364A"/>
+                </a:solidFill>
+                <a:latin typeface="Aptos" pitchFamily="34" charset="0"/>
+                <a:ea typeface="Aptos" pitchFamily="34" charset="-122"/>
+                <a:cs typeface="Aptos" pitchFamily="34" charset="-120"/>
+              </a:rPr>
+              <a:t>Generative AI, predictive analytics, RAG, automation, and agentic workflows all depend on.</a:t>
+            </a:r>
+            <a:endParaRPr lang="en-US" sz="1380" dirty="0"/>
+          </a:p>
+          <a:p>
+            <a:r>
+              <a:rPr lang="en-US" sz="1380" dirty="0">
+                <a:solidFill>
+                  <a:srgbClr val="17364A"/>
+                </a:solidFill>
+                <a:latin typeface="Aptos" pitchFamily="34" charset="0"/>
+                <a:ea typeface="Aptos" pitchFamily="34" charset="-122"/>
+                <a:cs typeface="Aptos" pitchFamily="34" charset="-120"/>
+              </a:rPr>
+              <a:t>A tool that drafts internal training text may require lighter review than a tool that.</a:t>
+            </a:r>
+            <a:endParaRPr lang="en-US" sz="1380" dirty="0"/>
+          </a:p>
+          <a:p>
+            <a:r>
+              <a:rPr lang="en-US" sz="1380" dirty="0">
+                <a:solidFill>
+                  <a:srgbClr val="17364A"/>
+                </a:solidFill>
+                <a:latin typeface="Aptos" pitchFamily="34" charset="0"/>
+                <a:ea typeface="Aptos" pitchFamily="34" charset="-122"/>
+                <a:cs typeface="Aptos" pitchFamily="34" charset="-120"/>
+              </a:rPr>
+              <a:t>The module should be applied during readiness assessment, procurement, implementation.</a:t>
+            </a:r>
+            <a:endParaRPr lang="en-US" sz="1380" dirty="0"/>
           </a:p>
         </p:txBody>
       </p:sp>
       <p:sp>
         <p:nvSpPr>
           <p:cNvPr id="16" name="Shape 14"/>
-          <p:cNvSpPr/>
-          <p:nvPr/>
-        </p:nvSpPr>
-        <p:spPr>
-          <a:xfrm>
-            <a:off x="8976360" y="3319272"/>
-            <a:ext cx="792480" cy="749808"/>
-          </a:xfrm>
-          <a:prstGeom prst="roundRect">
-            <a:avLst>
-              <a:gd name="adj" fmla="val 14634"/>
-            </a:avLst>
-          </a:prstGeom>
-          <a:solidFill>
-            <a:srgbClr val="2F8A28"/>
-          </a:solidFill>
-          <a:ln w="12700">
-            <a:solidFill>
-              <a:srgbClr val="2F8A28"/>
-            </a:solidFill>
-            <a:prstDash val="solid"/>
-          </a:ln>
-        </p:spPr>
-      </p:sp>
-      <p:sp>
-        <p:nvSpPr>
-          <p:cNvPr id="17" name="Text 15"/>
-          <p:cNvSpPr/>
-          <p:nvPr/>
-        </p:nvSpPr>
-        <p:spPr>
-          <a:xfrm>
-            <a:off x="9049512" y="3511296"/>
-            <a:ext cx="646176" cy="310896"/>
-          </a:xfrm>
-          <a:prstGeom prst="rect">
-            <a:avLst/>
-          </a:prstGeom>
-          <a:noFill/>
-          <a:ln/>
-        </p:spPr>
-        <p:txBody>
-          <a:bodyPr wrap="square" lIns="0" tIns="0" rIns="0" bIns="0" rtlCol="0" anchor="ctr">
-            <a:normAutofit/>
-          </a:bodyPr>
-          <a:lstStyle/>
-          <a:p>
-            <a:pPr algn="ctr" indent="0" marL="0">
-              <a:buNone/>
-            </a:pPr>
-            <a:r>
-              <a:rPr lang="en-US" sz="1500" b="1" dirty="0">
-                <a:solidFill>
-                  <a:srgbClr val="FFFFFF"/>
-                </a:solidFill>
-                <a:latin typeface="Aptos" pitchFamily="34" charset="0"/>
-                <a:ea typeface="Aptos" pitchFamily="34" charset="-122"/>
-                <a:cs typeface="Aptos" pitchFamily="34" charset="-120"/>
-              </a:rPr>
-              <a:t>Do</a:t>
-            </a:r>
-            <a:endParaRPr lang="en-US" sz="1500" dirty="0"/>
-          </a:p>
-        </p:txBody>
-      </p:sp>
-      <p:sp>
-        <p:nvSpPr>
-          <p:cNvPr id="18" name="Shape 16"/>
-          <p:cNvSpPr/>
-          <p:nvPr/>
-        </p:nvSpPr>
-        <p:spPr>
-          <a:xfrm>
-            <a:off x="10024872" y="3319272"/>
-            <a:ext cx="792480" cy="749808"/>
-          </a:xfrm>
-          <a:prstGeom prst="roundRect">
-            <a:avLst>
-              <a:gd name="adj" fmla="val 14634"/>
-            </a:avLst>
-          </a:prstGeom>
-          <a:solidFill>
-            <a:srgbClr val="D69A2D"/>
-          </a:solidFill>
-          <a:ln w="12700">
-            <a:solidFill>
-              <a:srgbClr val="D69A2D"/>
-            </a:solidFill>
-            <a:prstDash val="solid"/>
-          </a:ln>
-        </p:spPr>
-      </p:sp>
-      <p:sp>
-        <p:nvSpPr>
-          <p:cNvPr id="19" name="Text 17"/>
-          <p:cNvSpPr/>
-          <p:nvPr/>
-        </p:nvSpPr>
-        <p:spPr>
-          <a:xfrm>
-            <a:off x="10098024" y="3511296"/>
-            <a:ext cx="646176" cy="310896"/>
-          </a:xfrm>
-          <a:prstGeom prst="rect">
-            <a:avLst/>
-          </a:prstGeom>
-          <a:noFill/>
-          <a:ln/>
-        </p:spPr>
-        <p:txBody>
-          <a:bodyPr wrap="square" lIns="0" tIns="0" rIns="0" bIns="0" rtlCol="0" anchor="ctr">
-            <a:normAutofit/>
-          </a:bodyPr>
-          <a:lstStyle/>
-          <a:p>
-            <a:pPr algn="ctr" indent="0" marL="0">
-              <a:buNone/>
-            </a:pPr>
-            <a:r>
-              <a:rPr lang="en-US" sz="1500" b="1" dirty="0">
-                <a:solidFill>
-                  <a:srgbClr val="FFFFFF"/>
-                </a:solidFill>
-                <a:latin typeface="Aptos" pitchFamily="34" charset="0"/>
-                <a:ea typeface="Aptos" pitchFamily="34" charset="-122"/>
-                <a:cs typeface="Aptos" pitchFamily="34" charset="-120"/>
-              </a:rPr>
-              <a:t>Review</a:t>
-            </a:r>
-            <a:endParaRPr lang="en-US" sz="1500" dirty="0"/>
-          </a:p>
-        </p:txBody>
-      </p:sp>
-      <p:sp>
-        <p:nvSpPr>
-          <p:cNvPr id="20" name="Shape 18"/>
-          <p:cNvSpPr/>
-          <p:nvPr/>
-        </p:nvSpPr>
-        <p:spPr>
-          <a:xfrm>
-            <a:off x="8293608" y="4389120"/>
-            <a:ext cx="2157984" cy="0"/>
-          </a:xfrm>
-          <a:prstGeom prst="line">
-            <a:avLst/>
-          </a:prstGeom>
-          <a:noFill/>
-          <a:ln w="25400">
-            <a:solidFill>
-              <a:srgbClr val="8ABBD8"/>
-            </a:solidFill>
-            <a:prstDash val="solid"/>
-          </a:ln>
-        </p:spPr>
-      </p:sp>
-      <p:sp>
-        <p:nvSpPr>
-          <p:cNvPr id="21" name="Text 19"/>
-          <p:cNvSpPr/>
-          <p:nvPr/>
-        </p:nvSpPr>
-        <p:spPr>
-          <a:xfrm>
-            <a:off x="7909560" y="3977640"/>
-            <a:ext cx="2926080" cy="182880"/>
-          </a:xfrm>
-          <a:prstGeom prst="rect">
-            <a:avLst/>
-          </a:prstGeom>
-          <a:noFill/>
-          <a:ln/>
-        </p:spPr>
-        <p:txBody>
-          <a:bodyPr wrap="square" lIns="0" tIns="0" rIns="0" bIns="0" rtlCol="0" anchor="ctr"/>
-          <a:lstStyle/>
-          <a:p>
-            <a:pPr algn="ctr" indent="0" marL="0">
-              <a:buNone/>
-            </a:pPr>
-            <a:r>
-              <a:rPr lang="en-US" sz="1000" dirty="0">
-                <a:solidFill>
-                  <a:srgbClr val="003A63"/>
-                </a:solidFill>
-                <a:latin typeface="Aptos" pitchFamily="34" charset="0"/>
-                <a:ea typeface="Aptos" pitchFamily="34" charset="-122"/>
-                <a:cs typeface="Aptos" pitchFamily="34" charset="-120"/>
-              </a:rPr>
-              <a:t>Dependencies visible</a:t>
-            </a:r>
-            <a:endParaRPr lang="en-US" sz="1000" dirty="0"/>
-          </a:p>
-        </p:txBody>
-      </p:sp>
-      <p:sp>
-        <p:nvSpPr>
-          <p:cNvPr id="22" name="Shape 20"/>
           <p:cNvSpPr/>
           <p:nvPr/>
         </p:nvSpPr>
@@ -7085,7 +6398,7 @@
       </p:sp>
       <p:sp>
         <p:nvSpPr>
-          <p:cNvPr id="23" name="Text 21"/>
+          <p:cNvPr id="17" name="Text 15"/>
           <p:cNvSpPr/>
           <p:nvPr/>
         </p:nvSpPr>
@@ -7124,7 +6437,7 @@
       </p:sp>
       <p:sp>
         <p:nvSpPr>
-          <p:cNvPr id="24" name="Text 22"/>
+          <p:cNvPr id="18" name="Text 16"/>
           <p:cNvSpPr/>
           <p:nvPr/>
         </p:nvSpPr>
@@ -7632,13 +6945,11 @@
             </a:avLst>
           </a:prstGeom>
           <a:solidFill>
-            <a:srgbClr val="FFFFFF">
-              <a:alpha val="88000"/>
-            </a:srgbClr>
+            <a:srgbClr val="FFFFFF"/>
           </a:solidFill>
           <a:ln w="12700">
             <a:solidFill>
-              <a:srgbClr val="D6E8F2"/>
+              <a:srgbClr val="B9D7E6"/>
             </a:solidFill>
             <a:prstDash val="solid"/>
           </a:ln>
@@ -7646,30 +6957,42 @@
       </p:sp>
       <p:sp>
         <p:nvSpPr>
-          <p:cNvPr id="14" name="Shape 12"/>
-          <p:cNvSpPr/>
-          <p:nvPr/>
-        </p:nvSpPr>
-        <p:spPr>
-          <a:xfrm>
-            <a:off x="7927848" y="3319272"/>
-            <a:ext cx="792480" cy="749808"/>
-          </a:xfrm>
-          <a:prstGeom prst="roundRect">
-            <a:avLst>
-              <a:gd name="adj" fmla="val 14634"/>
-            </a:avLst>
-          </a:prstGeom>
-          <a:solidFill>
-            <a:srgbClr val="0068B7"/>
-          </a:solidFill>
-          <a:ln w="12700">
-            <a:solidFill>
-              <a:srgbClr val="0068B7"/>
-            </a:solidFill>
-            <a:prstDash val="solid"/>
-          </a:ln>
-        </p:spPr>
+          <p:cNvPr id="14" name="Text 12"/>
+          <p:cNvSpPr/>
+          <p:nvPr/>
+        </p:nvSpPr>
+        <p:spPr>
+          <a:xfrm>
+            <a:off x="7799832" y="2935224"/>
+            <a:ext cx="3145536" cy="256032"/>
+          </a:xfrm>
+          <a:prstGeom prst="rect">
+            <a:avLst/>
+          </a:prstGeom>
+          <a:noFill/>
+          <a:ln/>
+        </p:spPr>
+        <p:txBody>
+          <a:bodyPr wrap="square" lIns="0" tIns="0" rIns="0" bIns="0" rtlCol="0" anchor="ctr"/>
+          <a:lstStyle/>
+          <a:p>
+            <a:pPr indent="0" marL="0">
+              <a:buNone/>
+            </a:pPr>
+            <a:r>
+              <a:rPr lang="en-US" sz="1300" b="1" dirty="0">
+                <a:solidFill>
+                  <a:srgbClr val="0068B7"/>
+                </a:solidFill>
+                <a:latin typeface="Aptos" pitchFamily="34" charset="0"/>
+                <a:ea typeface="Aptos" pitchFamily="34" charset="-122"/>
+                <a:cs typeface="Aptos" pitchFamily="34" charset="-120"/>
+              </a:rPr>
+              <a:t>Concept checkpoints</a:t>
+            </a:r>
+            <a:endParaRPr lang="en-US" sz="1300" dirty="0"/>
+          </a:p>
+        </p:txBody>
       </p:sp>
       <p:sp>
         <p:nvSpPr>
@@ -7679,240 +7002,67 @@
         </p:nvSpPr>
         <p:spPr>
           <a:xfrm>
-            <a:off x="8001000" y="3511296"/>
-            <a:ext cx="646176" cy="310896"/>
-          </a:xfrm>
-          <a:prstGeom prst="rect">
-            <a:avLst/>
-          </a:prstGeom>
-          <a:noFill/>
-          <a:ln/>
-        </p:spPr>
-        <p:txBody>
-          <a:bodyPr wrap="square" lIns="0" tIns="0" rIns="0" bIns="0" rtlCol="0" anchor="ctr">
+            <a:off x="7818120" y="3300984"/>
+            <a:ext cx="3090672" cy="877824"/>
+          </a:xfrm>
+          <a:prstGeom prst="rect">
+            <a:avLst/>
+          </a:prstGeom>
+          <a:noFill/>
+          <a:ln/>
+        </p:spPr>
+        <p:txBody>
+          <a:bodyPr wrap="square" lIns="254" tIns="254" rIns="254" bIns="254" rtlCol="0" anchor="t">
             <a:normAutofit/>
           </a:bodyPr>
           <a:lstStyle/>
           <a:p>
-            <a:pPr algn="ctr" indent="0" marL="0">
-              <a:buNone/>
-            </a:pPr>
-            <a:r>
-              <a:rPr lang="en-US" sz="1500" b="1" dirty="0">
-                <a:solidFill>
-                  <a:srgbClr val="FFFFFF"/>
-                </a:solidFill>
-                <a:latin typeface="Aptos" pitchFamily="34" charset="0"/>
-                <a:ea typeface="Aptos" pitchFamily="34" charset="-122"/>
-                <a:cs typeface="Aptos" pitchFamily="34" charset="-120"/>
-              </a:rPr>
-              <a:t>Plan</a:t>
-            </a:r>
-            <a:endParaRPr lang="en-US" sz="1500" dirty="0"/>
+            <a:r>
+              <a:rPr lang="en-US" sz="1380" dirty="0">
+                <a:solidFill>
+                  <a:srgbClr val="17364A"/>
+                </a:solidFill>
+                <a:latin typeface="Aptos" pitchFamily="34" charset="0"/>
+                <a:ea typeface="Aptos" pitchFamily="34" charset="-122"/>
+                <a:cs typeface="Aptos" pitchFamily="34" charset="-120"/>
+              </a:rPr>
+              <a:t>Where does this topic appear in one current or proposed AI workflow in your agency?</a:t>
+            </a:r>
+            <a:endParaRPr lang="en-US" sz="1380" dirty="0"/>
+          </a:p>
+          <a:p>
+            <a:r>
+              <a:rPr lang="en-US" sz="1380" dirty="0">
+                <a:solidFill>
+                  <a:srgbClr val="17364A"/>
+                </a:solidFill>
+                <a:latin typeface="Aptos" pitchFamily="34" charset="0"/>
+                <a:ea typeface="Aptos" pitchFamily="34" charset="-122"/>
+                <a:cs typeface="Aptos" pitchFamily="34" charset="-120"/>
+              </a:rPr>
+              <a:t>What decisions, data sources, users, or partners would be affected if this area is poorly.</a:t>
+            </a:r>
+            <a:endParaRPr lang="en-US" sz="1380" dirty="0"/>
+          </a:p>
+          <a:p>
+            <a:r>
+              <a:rPr lang="en-US" sz="1380" dirty="0">
+                <a:solidFill>
+                  <a:srgbClr val="17364A"/>
+                </a:solidFill>
+                <a:latin typeface="Aptos" pitchFamily="34" charset="0"/>
+                <a:ea typeface="Aptos" pitchFamily="34" charset="-122"/>
+                <a:cs typeface="Aptos" pitchFamily="34" charset="-120"/>
+              </a:rPr>
+              <a:t>What evidence would governance reviewers need before approving the workflow?</a:t>
+            </a:r>
+            <a:endParaRPr lang="en-US" sz="1380" dirty="0"/>
           </a:p>
         </p:txBody>
       </p:sp>
       <p:sp>
         <p:nvSpPr>
           <p:cNvPr id="16" name="Shape 14"/>
-          <p:cNvSpPr/>
-          <p:nvPr/>
-        </p:nvSpPr>
-        <p:spPr>
-          <a:xfrm>
-            <a:off x="8976360" y="3319272"/>
-            <a:ext cx="792480" cy="749808"/>
-          </a:xfrm>
-          <a:prstGeom prst="roundRect">
-            <a:avLst>
-              <a:gd name="adj" fmla="val 14634"/>
-            </a:avLst>
-          </a:prstGeom>
-          <a:solidFill>
-            <a:srgbClr val="2F8A28"/>
-          </a:solidFill>
-          <a:ln w="12700">
-            <a:solidFill>
-              <a:srgbClr val="2F8A28"/>
-            </a:solidFill>
-            <a:prstDash val="solid"/>
-          </a:ln>
-        </p:spPr>
-      </p:sp>
-      <p:sp>
-        <p:nvSpPr>
-          <p:cNvPr id="17" name="Text 15"/>
-          <p:cNvSpPr/>
-          <p:nvPr/>
-        </p:nvSpPr>
-        <p:spPr>
-          <a:xfrm>
-            <a:off x="9049512" y="3511296"/>
-            <a:ext cx="646176" cy="310896"/>
-          </a:xfrm>
-          <a:prstGeom prst="rect">
-            <a:avLst/>
-          </a:prstGeom>
-          <a:noFill/>
-          <a:ln/>
-        </p:spPr>
-        <p:txBody>
-          <a:bodyPr wrap="square" lIns="0" tIns="0" rIns="0" bIns="0" rtlCol="0" anchor="ctr">
-            <a:normAutofit/>
-          </a:bodyPr>
-          <a:lstStyle/>
-          <a:p>
-            <a:pPr algn="ctr" indent="0" marL="0">
-              <a:buNone/>
-            </a:pPr>
-            <a:r>
-              <a:rPr lang="en-US" sz="1500" b="1" dirty="0">
-                <a:solidFill>
-                  <a:srgbClr val="FFFFFF"/>
-                </a:solidFill>
-                <a:latin typeface="Aptos" pitchFamily="34" charset="0"/>
-                <a:ea typeface="Aptos" pitchFamily="34" charset="-122"/>
-                <a:cs typeface="Aptos" pitchFamily="34" charset="-120"/>
-              </a:rPr>
-              <a:t>Do</a:t>
-            </a:r>
-            <a:endParaRPr lang="en-US" sz="1500" dirty="0"/>
-          </a:p>
-        </p:txBody>
-      </p:sp>
-      <p:sp>
-        <p:nvSpPr>
-          <p:cNvPr id="18" name="Shape 16"/>
-          <p:cNvSpPr/>
-          <p:nvPr/>
-        </p:nvSpPr>
-        <p:spPr>
-          <a:xfrm>
-            <a:off x="10024872" y="3319272"/>
-            <a:ext cx="792480" cy="749808"/>
-          </a:xfrm>
-          <a:prstGeom prst="roundRect">
-            <a:avLst>
-              <a:gd name="adj" fmla="val 14634"/>
-            </a:avLst>
-          </a:prstGeom>
-          <a:solidFill>
-            <a:srgbClr val="D69A2D"/>
-          </a:solidFill>
-          <a:ln w="12700">
-            <a:solidFill>
-              <a:srgbClr val="D69A2D"/>
-            </a:solidFill>
-            <a:prstDash val="solid"/>
-          </a:ln>
-        </p:spPr>
-      </p:sp>
-      <p:sp>
-        <p:nvSpPr>
-          <p:cNvPr id="19" name="Text 17"/>
-          <p:cNvSpPr/>
-          <p:nvPr/>
-        </p:nvSpPr>
-        <p:spPr>
-          <a:xfrm>
-            <a:off x="10098024" y="3511296"/>
-            <a:ext cx="646176" cy="310896"/>
-          </a:xfrm>
-          <a:prstGeom prst="rect">
-            <a:avLst/>
-          </a:prstGeom>
-          <a:noFill/>
-          <a:ln/>
-        </p:spPr>
-        <p:txBody>
-          <a:bodyPr wrap="square" lIns="0" tIns="0" rIns="0" bIns="0" rtlCol="0" anchor="ctr">
-            <a:normAutofit/>
-          </a:bodyPr>
-          <a:lstStyle/>
-          <a:p>
-            <a:pPr algn="ctr" indent="0" marL="0">
-              <a:buNone/>
-            </a:pPr>
-            <a:r>
-              <a:rPr lang="en-US" sz="1500" b="1" dirty="0">
-                <a:solidFill>
-                  <a:srgbClr val="FFFFFF"/>
-                </a:solidFill>
-                <a:latin typeface="Aptos" pitchFamily="34" charset="0"/>
-                <a:ea typeface="Aptos" pitchFamily="34" charset="-122"/>
-                <a:cs typeface="Aptos" pitchFamily="34" charset="-120"/>
-              </a:rPr>
-              <a:t>Review</a:t>
-            </a:r>
-            <a:endParaRPr lang="en-US" sz="1500" dirty="0"/>
-          </a:p>
-        </p:txBody>
-      </p:sp>
-      <p:sp>
-        <p:nvSpPr>
-          <p:cNvPr id="20" name="Shape 18"/>
-          <p:cNvSpPr/>
-          <p:nvPr/>
-        </p:nvSpPr>
-        <p:spPr>
-          <a:xfrm>
-            <a:off x="8293608" y="4389120"/>
-            <a:ext cx="2157984" cy="0"/>
-          </a:xfrm>
-          <a:prstGeom prst="line">
-            <a:avLst/>
-          </a:prstGeom>
-          <a:noFill/>
-          <a:ln w="25400">
-            <a:solidFill>
-              <a:srgbClr val="8ABBD8"/>
-            </a:solidFill>
-            <a:prstDash val="solid"/>
-          </a:ln>
-        </p:spPr>
-      </p:sp>
-      <p:sp>
-        <p:nvSpPr>
-          <p:cNvPr id="21" name="Text 19"/>
-          <p:cNvSpPr/>
-          <p:nvPr/>
-        </p:nvSpPr>
-        <p:spPr>
-          <a:xfrm>
-            <a:off x="7909560" y="3977640"/>
-            <a:ext cx="2926080" cy="182880"/>
-          </a:xfrm>
-          <a:prstGeom prst="rect">
-            <a:avLst/>
-          </a:prstGeom>
-          <a:noFill/>
-          <a:ln/>
-        </p:spPr>
-        <p:txBody>
-          <a:bodyPr wrap="square" lIns="0" tIns="0" rIns="0" bIns="0" rtlCol="0" anchor="ctr"/>
-          <a:lstStyle/>
-          <a:p>
-            <a:pPr algn="ctr" indent="0" marL="0">
-              <a:buNone/>
-            </a:pPr>
-            <a:r>
-              <a:rPr lang="en-US" sz="1000" dirty="0">
-                <a:solidFill>
-                  <a:srgbClr val="003A63"/>
-                </a:solidFill>
-                <a:latin typeface="Aptos" pitchFamily="34" charset="0"/>
-                <a:ea typeface="Aptos" pitchFamily="34" charset="-122"/>
-                <a:cs typeface="Aptos" pitchFamily="34" charset="-120"/>
-              </a:rPr>
-              <a:t>Dependencies visible</a:t>
-            </a:r>
-            <a:endParaRPr lang="en-US" sz="1000" dirty="0"/>
-          </a:p>
-        </p:txBody>
-      </p:sp>
-      <p:sp>
-        <p:nvSpPr>
-          <p:cNvPr id="22" name="Shape 20"/>
           <p:cNvSpPr/>
           <p:nvPr/>
         </p:nvSpPr>
@@ -7939,7 +7089,7 @@
       </p:sp>
       <p:sp>
         <p:nvSpPr>
-          <p:cNvPr id="23" name="Text 21"/>
+          <p:cNvPr id="17" name="Text 15"/>
           <p:cNvSpPr/>
           <p:nvPr/>
         </p:nvSpPr>
@@ -7978,7 +7128,7 @@
       </p:sp>
       <p:sp>
         <p:nvSpPr>
-          <p:cNvPr id="24" name="Text 22"/>
+          <p:cNvPr id="18" name="Text 16"/>
           <p:cNvSpPr/>
           <p:nvPr/>
         </p:nvSpPr>
@@ -8472,13 +7622,11 @@
             </a:avLst>
           </a:prstGeom>
           <a:solidFill>
-            <a:srgbClr val="FFFFFF">
-              <a:alpha val="88000"/>
-            </a:srgbClr>
+            <a:srgbClr val="FFFFFF"/>
           </a:solidFill>
           <a:ln w="12700">
             <a:solidFill>
-              <a:srgbClr val="D6E8F2"/>
+              <a:srgbClr val="B9D7E6"/>
             </a:solidFill>
             <a:prstDash val="solid"/>
           </a:ln>
@@ -8486,30 +7634,42 @@
       </p:sp>
       <p:sp>
         <p:nvSpPr>
-          <p:cNvPr id="14" name="Shape 12"/>
-          <p:cNvSpPr/>
-          <p:nvPr/>
-        </p:nvSpPr>
-        <p:spPr>
-          <a:xfrm>
-            <a:off x="7927848" y="3319272"/>
-            <a:ext cx="792480" cy="749808"/>
-          </a:xfrm>
-          <a:prstGeom prst="roundRect">
-            <a:avLst>
-              <a:gd name="adj" fmla="val 14634"/>
-            </a:avLst>
-          </a:prstGeom>
-          <a:solidFill>
-            <a:srgbClr val="0068B7"/>
-          </a:solidFill>
-          <a:ln w="12700">
-            <a:solidFill>
-              <a:srgbClr val="0068B7"/>
-            </a:solidFill>
-            <a:prstDash val="solid"/>
-          </a:ln>
-        </p:spPr>
+          <p:cNvPr id="14" name="Text 12"/>
+          <p:cNvSpPr/>
+          <p:nvPr/>
+        </p:nvSpPr>
+        <p:spPr>
+          <a:xfrm>
+            <a:off x="7799832" y="2935224"/>
+            <a:ext cx="3145536" cy="256032"/>
+          </a:xfrm>
+          <a:prstGeom prst="rect">
+            <a:avLst/>
+          </a:prstGeom>
+          <a:noFill/>
+          <a:ln/>
+        </p:spPr>
+        <p:txBody>
+          <a:bodyPr wrap="square" lIns="0" tIns="0" rIns="0" bIns="0" rtlCol="0" anchor="ctr"/>
+          <a:lstStyle/>
+          <a:p>
+            <a:pPr indent="0" marL="0">
+              <a:buNone/>
+            </a:pPr>
+            <a:r>
+              <a:rPr lang="en-US" sz="1300" b="1" dirty="0">
+                <a:solidFill>
+                  <a:srgbClr val="0068B7"/>
+                </a:solidFill>
+                <a:latin typeface="Aptos" pitchFamily="34" charset="0"/>
+                <a:ea typeface="Aptos" pitchFamily="34" charset="-122"/>
+                <a:cs typeface="Aptos" pitchFamily="34" charset="-120"/>
+              </a:rPr>
+              <a:t>Concept checkpoints</a:t>
+            </a:r>
+            <a:endParaRPr lang="en-US" sz="1300" dirty="0"/>
+          </a:p>
+        </p:txBody>
       </p:sp>
       <p:sp>
         <p:nvSpPr>
@@ -8519,240 +7679,53 @@
         </p:nvSpPr>
         <p:spPr>
           <a:xfrm>
-            <a:off x="8001000" y="3511296"/>
-            <a:ext cx="646176" cy="310896"/>
-          </a:xfrm>
-          <a:prstGeom prst="rect">
-            <a:avLst/>
-          </a:prstGeom>
-          <a:noFill/>
-          <a:ln/>
-        </p:spPr>
-        <p:txBody>
-          <a:bodyPr wrap="square" lIns="0" tIns="0" rIns="0" bIns="0" rtlCol="0" anchor="ctr">
+            <a:off x="7818120" y="3300984"/>
+            <a:ext cx="3090672" cy="877824"/>
+          </a:xfrm>
+          <a:prstGeom prst="rect">
+            <a:avLst/>
+          </a:prstGeom>
+          <a:noFill/>
+          <a:ln/>
+        </p:spPr>
+        <p:txBody>
+          <a:bodyPr wrap="square" lIns="254" tIns="254" rIns="254" bIns="254" rtlCol="0" anchor="t">
             <a:normAutofit/>
           </a:bodyPr>
           <a:lstStyle/>
           <a:p>
-            <a:pPr algn="ctr" indent="0" marL="0">
-              <a:buNone/>
-            </a:pPr>
-            <a:r>
-              <a:rPr lang="en-US" sz="1500" b="1" dirty="0">
-                <a:solidFill>
-                  <a:srgbClr val="FFFFFF"/>
-                </a:solidFill>
-                <a:latin typeface="Aptos" pitchFamily="34" charset="0"/>
-                <a:ea typeface="Aptos" pitchFamily="34" charset="-122"/>
-                <a:cs typeface="Aptos" pitchFamily="34" charset="-120"/>
-              </a:rPr>
-              <a:t>Plan</a:t>
-            </a:r>
-            <a:endParaRPr lang="en-US" sz="1500" dirty="0"/>
+            <a:r>
+              <a:rPr lang="en-US" sz="1380" dirty="0">
+                <a:solidFill>
+                  <a:srgbClr val="17364A"/>
+                </a:solidFill>
+                <a:latin typeface="Aptos" pitchFamily="34" charset="0"/>
+                <a:ea typeface="Aptos" pitchFamily="34" charset="-122"/>
+                <a:cs typeface="Aptos" pitchFamily="34" charset="-120"/>
+              </a:rPr>
+              <a:t>Which safeguards should be required before pilot testing?</a:t>
+            </a:r>
+            <a:endParaRPr lang="en-US" sz="1380" dirty="0"/>
+          </a:p>
+          <a:p>
+            <a:r>
+              <a:rPr lang="en-US" sz="1380" dirty="0">
+                <a:solidFill>
+                  <a:srgbClr val="17364A"/>
+                </a:solidFill>
+                <a:latin typeface="Aptos" pitchFamily="34" charset="0"/>
+                <a:ea typeface="Aptos" pitchFamily="34" charset="-122"/>
+                <a:cs typeface="Aptos" pitchFamily="34" charset="-120"/>
+              </a:rPr>
+              <a:t>Who owns ongoing monitoring and review?</a:t>
+            </a:r>
+            <a:endParaRPr lang="en-US" sz="1380" dirty="0"/>
           </a:p>
         </p:txBody>
       </p:sp>
       <p:sp>
         <p:nvSpPr>
           <p:cNvPr id="16" name="Shape 14"/>
-          <p:cNvSpPr/>
-          <p:nvPr/>
-        </p:nvSpPr>
-        <p:spPr>
-          <a:xfrm>
-            <a:off x="8976360" y="3319272"/>
-            <a:ext cx="792480" cy="749808"/>
-          </a:xfrm>
-          <a:prstGeom prst="roundRect">
-            <a:avLst>
-              <a:gd name="adj" fmla="val 14634"/>
-            </a:avLst>
-          </a:prstGeom>
-          <a:solidFill>
-            <a:srgbClr val="2F8A28"/>
-          </a:solidFill>
-          <a:ln w="12700">
-            <a:solidFill>
-              <a:srgbClr val="2F8A28"/>
-            </a:solidFill>
-            <a:prstDash val="solid"/>
-          </a:ln>
-        </p:spPr>
-      </p:sp>
-      <p:sp>
-        <p:nvSpPr>
-          <p:cNvPr id="17" name="Text 15"/>
-          <p:cNvSpPr/>
-          <p:nvPr/>
-        </p:nvSpPr>
-        <p:spPr>
-          <a:xfrm>
-            <a:off x="9049512" y="3511296"/>
-            <a:ext cx="646176" cy="310896"/>
-          </a:xfrm>
-          <a:prstGeom prst="rect">
-            <a:avLst/>
-          </a:prstGeom>
-          <a:noFill/>
-          <a:ln/>
-        </p:spPr>
-        <p:txBody>
-          <a:bodyPr wrap="square" lIns="0" tIns="0" rIns="0" bIns="0" rtlCol="0" anchor="ctr">
-            <a:normAutofit/>
-          </a:bodyPr>
-          <a:lstStyle/>
-          <a:p>
-            <a:pPr algn="ctr" indent="0" marL="0">
-              <a:buNone/>
-            </a:pPr>
-            <a:r>
-              <a:rPr lang="en-US" sz="1500" b="1" dirty="0">
-                <a:solidFill>
-                  <a:srgbClr val="FFFFFF"/>
-                </a:solidFill>
-                <a:latin typeface="Aptos" pitchFamily="34" charset="0"/>
-                <a:ea typeface="Aptos" pitchFamily="34" charset="-122"/>
-                <a:cs typeface="Aptos" pitchFamily="34" charset="-120"/>
-              </a:rPr>
-              <a:t>Do</a:t>
-            </a:r>
-            <a:endParaRPr lang="en-US" sz="1500" dirty="0"/>
-          </a:p>
-        </p:txBody>
-      </p:sp>
-      <p:sp>
-        <p:nvSpPr>
-          <p:cNvPr id="18" name="Shape 16"/>
-          <p:cNvSpPr/>
-          <p:nvPr/>
-        </p:nvSpPr>
-        <p:spPr>
-          <a:xfrm>
-            <a:off x="10024872" y="3319272"/>
-            <a:ext cx="792480" cy="749808"/>
-          </a:xfrm>
-          <a:prstGeom prst="roundRect">
-            <a:avLst>
-              <a:gd name="adj" fmla="val 14634"/>
-            </a:avLst>
-          </a:prstGeom>
-          <a:solidFill>
-            <a:srgbClr val="D69A2D"/>
-          </a:solidFill>
-          <a:ln w="12700">
-            <a:solidFill>
-              <a:srgbClr val="D69A2D"/>
-            </a:solidFill>
-            <a:prstDash val="solid"/>
-          </a:ln>
-        </p:spPr>
-      </p:sp>
-      <p:sp>
-        <p:nvSpPr>
-          <p:cNvPr id="19" name="Text 17"/>
-          <p:cNvSpPr/>
-          <p:nvPr/>
-        </p:nvSpPr>
-        <p:spPr>
-          <a:xfrm>
-            <a:off x="10098024" y="3511296"/>
-            <a:ext cx="646176" cy="310896"/>
-          </a:xfrm>
-          <a:prstGeom prst="rect">
-            <a:avLst/>
-          </a:prstGeom>
-          <a:noFill/>
-          <a:ln/>
-        </p:spPr>
-        <p:txBody>
-          <a:bodyPr wrap="square" lIns="0" tIns="0" rIns="0" bIns="0" rtlCol="0" anchor="ctr">
-            <a:normAutofit/>
-          </a:bodyPr>
-          <a:lstStyle/>
-          <a:p>
-            <a:pPr algn="ctr" indent="0" marL="0">
-              <a:buNone/>
-            </a:pPr>
-            <a:r>
-              <a:rPr lang="en-US" sz="1500" b="1" dirty="0">
-                <a:solidFill>
-                  <a:srgbClr val="FFFFFF"/>
-                </a:solidFill>
-                <a:latin typeface="Aptos" pitchFamily="34" charset="0"/>
-                <a:ea typeface="Aptos" pitchFamily="34" charset="-122"/>
-                <a:cs typeface="Aptos" pitchFamily="34" charset="-120"/>
-              </a:rPr>
-              <a:t>Review</a:t>
-            </a:r>
-            <a:endParaRPr lang="en-US" sz="1500" dirty="0"/>
-          </a:p>
-        </p:txBody>
-      </p:sp>
-      <p:sp>
-        <p:nvSpPr>
-          <p:cNvPr id="20" name="Shape 18"/>
-          <p:cNvSpPr/>
-          <p:nvPr/>
-        </p:nvSpPr>
-        <p:spPr>
-          <a:xfrm>
-            <a:off x="8293608" y="4389120"/>
-            <a:ext cx="2157984" cy="0"/>
-          </a:xfrm>
-          <a:prstGeom prst="line">
-            <a:avLst/>
-          </a:prstGeom>
-          <a:noFill/>
-          <a:ln w="25400">
-            <a:solidFill>
-              <a:srgbClr val="8ABBD8"/>
-            </a:solidFill>
-            <a:prstDash val="solid"/>
-          </a:ln>
-        </p:spPr>
-      </p:sp>
-      <p:sp>
-        <p:nvSpPr>
-          <p:cNvPr id="21" name="Text 19"/>
-          <p:cNvSpPr/>
-          <p:nvPr/>
-        </p:nvSpPr>
-        <p:spPr>
-          <a:xfrm>
-            <a:off x="7909560" y="3977640"/>
-            <a:ext cx="2926080" cy="182880"/>
-          </a:xfrm>
-          <a:prstGeom prst="rect">
-            <a:avLst/>
-          </a:prstGeom>
-          <a:noFill/>
-          <a:ln/>
-        </p:spPr>
-        <p:txBody>
-          <a:bodyPr wrap="square" lIns="0" tIns="0" rIns="0" bIns="0" rtlCol="0" anchor="ctr"/>
-          <a:lstStyle/>
-          <a:p>
-            <a:pPr algn="ctr" indent="0" marL="0">
-              <a:buNone/>
-            </a:pPr>
-            <a:r>
-              <a:rPr lang="en-US" sz="1000" dirty="0">
-                <a:solidFill>
-                  <a:srgbClr val="003A63"/>
-                </a:solidFill>
-                <a:latin typeface="Aptos" pitchFamily="34" charset="0"/>
-                <a:ea typeface="Aptos" pitchFamily="34" charset="-122"/>
-                <a:cs typeface="Aptos" pitchFamily="34" charset="-120"/>
-              </a:rPr>
-              <a:t>Dependencies visible</a:t>
-            </a:r>
-            <a:endParaRPr lang="en-US" sz="1000" dirty="0"/>
-          </a:p>
-        </p:txBody>
-      </p:sp>
-      <p:sp>
-        <p:nvSpPr>
-          <p:cNvPr id="22" name="Shape 20"/>
           <p:cNvSpPr/>
           <p:nvPr/>
         </p:nvSpPr>
@@ -8779,7 +7752,7 @@
       </p:sp>
       <p:sp>
         <p:nvSpPr>
-          <p:cNvPr id="23" name="Text 21"/>
+          <p:cNvPr id="17" name="Text 15"/>
           <p:cNvSpPr/>
           <p:nvPr/>
         </p:nvSpPr>
@@ -8818,7 +7791,7 @@
       </p:sp>
       <p:sp>
         <p:nvSpPr>
-          <p:cNvPr id="24" name="Text 22"/>
+          <p:cNvPr id="18" name="Text 16"/>
           <p:cNvSpPr/>
           <p:nvPr/>
         </p:nvSpPr>
@@ -9326,13 +8299,11 @@
             </a:avLst>
           </a:prstGeom>
           <a:solidFill>
-            <a:srgbClr val="FFFFFF">
-              <a:alpha val="88000"/>
-            </a:srgbClr>
+            <a:srgbClr val="FFFFFF"/>
           </a:solidFill>
           <a:ln w="12700">
             <a:solidFill>
-              <a:srgbClr val="D6E8F2"/>
+              <a:srgbClr val="B9D7E6"/>
             </a:solidFill>
             <a:prstDash val="solid"/>
           </a:ln>
@@ -9340,30 +8311,42 @@
       </p:sp>
       <p:sp>
         <p:nvSpPr>
-          <p:cNvPr id="14" name="Shape 12"/>
-          <p:cNvSpPr/>
-          <p:nvPr/>
-        </p:nvSpPr>
-        <p:spPr>
-          <a:xfrm>
-            <a:off x="7927848" y="3319272"/>
-            <a:ext cx="792480" cy="749808"/>
-          </a:xfrm>
-          <a:prstGeom prst="roundRect">
-            <a:avLst>
-              <a:gd name="adj" fmla="val 14634"/>
-            </a:avLst>
-          </a:prstGeom>
-          <a:solidFill>
-            <a:srgbClr val="0068B7"/>
-          </a:solidFill>
-          <a:ln w="12700">
-            <a:solidFill>
-              <a:srgbClr val="0068B7"/>
-            </a:solidFill>
-            <a:prstDash val="solid"/>
-          </a:ln>
-        </p:spPr>
+          <p:cNvPr id="14" name="Text 12"/>
+          <p:cNvSpPr/>
+          <p:nvPr/>
+        </p:nvSpPr>
+        <p:spPr>
+          <a:xfrm>
+            <a:off x="7799832" y="2935224"/>
+            <a:ext cx="3145536" cy="256032"/>
+          </a:xfrm>
+          <a:prstGeom prst="rect">
+            <a:avLst/>
+          </a:prstGeom>
+          <a:noFill/>
+          <a:ln/>
+        </p:spPr>
+        <p:txBody>
+          <a:bodyPr wrap="square" lIns="0" tIns="0" rIns="0" bIns="0" rtlCol="0" anchor="ctr"/>
+          <a:lstStyle/>
+          <a:p>
+            <a:pPr indent="0" marL="0">
+              <a:buNone/>
+            </a:pPr>
+            <a:r>
+              <a:rPr lang="en-US" sz="1300" b="1" dirty="0">
+                <a:solidFill>
+                  <a:srgbClr val="0068B7"/>
+                </a:solidFill>
+                <a:latin typeface="Aptos" pitchFamily="34" charset="0"/>
+                <a:ea typeface="Aptos" pitchFamily="34" charset="-122"/>
+                <a:cs typeface="Aptos" pitchFamily="34" charset="-120"/>
+              </a:rPr>
+              <a:t>Concept checkpoints</a:t>
+            </a:r>
+            <a:endParaRPr lang="en-US" sz="1300" dirty="0"/>
+          </a:p>
+        </p:txBody>
       </p:sp>
       <p:sp>
         <p:nvSpPr>
@@ -9373,240 +8356,67 @@
         </p:nvSpPr>
         <p:spPr>
           <a:xfrm>
-            <a:off x="8001000" y="3511296"/>
-            <a:ext cx="646176" cy="310896"/>
-          </a:xfrm>
-          <a:prstGeom prst="rect">
-            <a:avLst/>
-          </a:prstGeom>
-          <a:noFill/>
-          <a:ln/>
-        </p:spPr>
-        <p:txBody>
-          <a:bodyPr wrap="square" lIns="0" tIns="0" rIns="0" bIns="0" rtlCol="0" anchor="ctr">
+            <a:off x="7818120" y="3300984"/>
+            <a:ext cx="3090672" cy="877824"/>
+          </a:xfrm>
+          <a:prstGeom prst="rect">
+            <a:avLst/>
+          </a:prstGeom>
+          <a:noFill/>
+          <a:ln/>
+        </p:spPr>
+        <p:txBody>
+          <a:bodyPr wrap="square" lIns="254" tIns="254" rIns="254" bIns="254" rtlCol="0" anchor="t">
             <a:normAutofit/>
           </a:bodyPr>
           <a:lstStyle/>
           <a:p>
-            <a:pPr algn="ctr" indent="0" marL="0">
-              <a:buNone/>
-            </a:pPr>
-            <a:r>
-              <a:rPr lang="en-US" sz="1500" b="1" dirty="0">
-                <a:solidFill>
-                  <a:srgbClr val="FFFFFF"/>
-                </a:solidFill>
-                <a:latin typeface="Aptos" pitchFamily="34" charset="0"/>
-                <a:ea typeface="Aptos" pitchFamily="34" charset="-122"/>
-                <a:cs typeface="Aptos" pitchFamily="34" charset="-120"/>
-              </a:rPr>
-              <a:t>Plan</a:t>
-            </a:r>
-            <a:endParaRPr lang="en-US" sz="1500" dirty="0"/>
+            <a:r>
+              <a:rPr lang="en-US" sz="1380" dirty="0">
+                <a:solidFill>
+                  <a:srgbClr val="17364A"/>
+                </a:solidFill>
+                <a:latin typeface="Aptos" pitchFamily="34" charset="0"/>
+                <a:ea typeface="Aptos" pitchFamily="34" charset="-122"/>
+                <a:cs typeface="Aptos" pitchFamily="34" charset="-120"/>
+              </a:rPr>
+              <a:t>The artifact should describe the use case, affected users, data sources, system.</a:t>
+            </a:r>
+            <a:endParaRPr lang="en-US" sz="1380" dirty="0"/>
+          </a:p>
+          <a:p>
+            <a:r>
+              <a:rPr lang="en-US" sz="1380" dirty="0">
+                <a:solidFill>
+                  <a:srgbClr val="17364A"/>
+                </a:solidFill>
+                <a:latin typeface="Aptos" pitchFamily="34" charset="0"/>
+                <a:ea typeface="Aptos" pitchFamily="34" charset="-122"/>
+                <a:cs typeface="Aptos" pitchFamily="34" charset="-120"/>
+              </a:rPr>
+              <a:t>The exercise should produce a work product that could be used in a governance meeting,.</a:t>
+            </a:r>
+            <a:endParaRPr lang="en-US" sz="1380" dirty="0"/>
+          </a:p>
+          <a:p>
+            <a:r>
+              <a:rPr lang="en-US" sz="1380" dirty="0">
+                <a:solidFill>
+                  <a:srgbClr val="17364A"/>
+                </a:solidFill>
+                <a:latin typeface="Aptos" pitchFamily="34" charset="0"/>
+                <a:ea typeface="Aptos" pitchFamily="34" charset="-122"/>
+                <a:cs typeface="Aptos" pitchFamily="34" charset="-120"/>
+              </a:rPr>
+              <a:t>Learners should document assumptions and identify which staff or partners need to be.</a:t>
+            </a:r>
+            <a:endParaRPr lang="en-US" sz="1380" dirty="0"/>
           </a:p>
         </p:txBody>
       </p:sp>
       <p:sp>
         <p:nvSpPr>
           <p:cNvPr id="16" name="Shape 14"/>
-          <p:cNvSpPr/>
-          <p:nvPr/>
-        </p:nvSpPr>
-        <p:spPr>
-          <a:xfrm>
-            <a:off x="8976360" y="3319272"/>
-            <a:ext cx="792480" cy="749808"/>
-          </a:xfrm>
-          <a:prstGeom prst="roundRect">
-            <a:avLst>
-              <a:gd name="adj" fmla="val 14634"/>
-            </a:avLst>
-          </a:prstGeom>
-          <a:solidFill>
-            <a:srgbClr val="2F8A28"/>
-          </a:solidFill>
-          <a:ln w="12700">
-            <a:solidFill>
-              <a:srgbClr val="2F8A28"/>
-            </a:solidFill>
-            <a:prstDash val="solid"/>
-          </a:ln>
-        </p:spPr>
-      </p:sp>
-      <p:sp>
-        <p:nvSpPr>
-          <p:cNvPr id="17" name="Text 15"/>
-          <p:cNvSpPr/>
-          <p:nvPr/>
-        </p:nvSpPr>
-        <p:spPr>
-          <a:xfrm>
-            <a:off x="9049512" y="3511296"/>
-            <a:ext cx="646176" cy="310896"/>
-          </a:xfrm>
-          <a:prstGeom prst="rect">
-            <a:avLst/>
-          </a:prstGeom>
-          <a:noFill/>
-          <a:ln/>
-        </p:spPr>
-        <p:txBody>
-          <a:bodyPr wrap="square" lIns="0" tIns="0" rIns="0" bIns="0" rtlCol="0" anchor="ctr">
-            <a:normAutofit/>
-          </a:bodyPr>
-          <a:lstStyle/>
-          <a:p>
-            <a:pPr algn="ctr" indent="0" marL="0">
-              <a:buNone/>
-            </a:pPr>
-            <a:r>
-              <a:rPr lang="en-US" sz="1500" b="1" dirty="0">
-                <a:solidFill>
-                  <a:srgbClr val="FFFFFF"/>
-                </a:solidFill>
-                <a:latin typeface="Aptos" pitchFamily="34" charset="0"/>
-                <a:ea typeface="Aptos" pitchFamily="34" charset="-122"/>
-                <a:cs typeface="Aptos" pitchFamily="34" charset="-120"/>
-              </a:rPr>
-              <a:t>Do</a:t>
-            </a:r>
-            <a:endParaRPr lang="en-US" sz="1500" dirty="0"/>
-          </a:p>
-        </p:txBody>
-      </p:sp>
-      <p:sp>
-        <p:nvSpPr>
-          <p:cNvPr id="18" name="Shape 16"/>
-          <p:cNvSpPr/>
-          <p:nvPr/>
-        </p:nvSpPr>
-        <p:spPr>
-          <a:xfrm>
-            <a:off x="10024872" y="3319272"/>
-            <a:ext cx="792480" cy="749808"/>
-          </a:xfrm>
-          <a:prstGeom prst="roundRect">
-            <a:avLst>
-              <a:gd name="adj" fmla="val 14634"/>
-            </a:avLst>
-          </a:prstGeom>
-          <a:solidFill>
-            <a:srgbClr val="D69A2D"/>
-          </a:solidFill>
-          <a:ln w="12700">
-            <a:solidFill>
-              <a:srgbClr val="D69A2D"/>
-            </a:solidFill>
-            <a:prstDash val="solid"/>
-          </a:ln>
-        </p:spPr>
-      </p:sp>
-      <p:sp>
-        <p:nvSpPr>
-          <p:cNvPr id="19" name="Text 17"/>
-          <p:cNvSpPr/>
-          <p:nvPr/>
-        </p:nvSpPr>
-        <p:spPr>
-          <a:xfrm>
-            <a:off x="10098024" y="3511296"/>
-            <a:ext cx="646176" cy="310896"/>
-          </a:xfrm>
-          <a:prstGeom prst="rect">
-            <a:avLst/>
-          </a:prstGeom>
-          <a:noFill/>
-          <a:ln/>
-        </p:spPr>
-        <p:txBody>
-          <a:bodyPr wrap="square" lIns="0" tIns="0" rIns="0" bIns="0" rtlCol="0" anchor="ctr">
-            <a:normAutofit/>
-          </a:bodyPr>
-          <a:lstStyle/>
-          <a:p>
-            <a:pPr algn="ctr" indent="0" marL="0">
-              <a:buNone/>
-            </a:pPr>
-            <a:r>
-              <a:rPr lang="en-US" sz="1500" b="1" dirty="0">
-                <a:solidFill>
-                  <a:srgbClr val="FFFFFF"/>
-                </a:solidFill>
-                <a:latin typeface="Aptos" pitchFamily="34" charset="0"/>
-                <a:ea typeface="Aptos" pitchFamily="34" charset="-122"/>
-                <a:cs typeface="Aptos" pitchFamily="34" charset="-120"/>
-              </a:rPr>
-              <a:t>Review</a:t>
-            </a:r>
-            <a:endParaRPr lang="en-US" sz="1500" dirty="0"/>
-          </a:p>
-        </p:txBody>
-      </p:sp>
-      <p:sp>
-        <p:nvSpPr>
-          <p:cNvPr id="20" name="Shape 18"/>
-          <p:cNvSpPr/>
-          <p:nvPr/>
-        </p:nvSpPr>
-        <p:spPr>
-          <a:xfrm>
-            <a:off x="8293608" y="4389120"/>
-            <a:ext cx="2157984" cy="0"/>
-          </a:xfrm>
-          <a:prstGeom prst="line">
-            <a:avLst/>
-          </a:prstGeom>
-          <a:noFill/>
-          <a:ln w="25400">
-            <a:solidFill>
-              <a:srgbClr val="8ABBD8"/>
-            </a:solidFill>
-            <a:prstDash val="solid"/>
-          </a:ln>
-        </p:spPr>
-      </p:sp>
-      <p:sp>
-        <p:nvSpPr>
-          <p:cNvPr id="21" name="Text 19"/>
-          <p:cNvSpPr/>
-          <p:nvPr/>
-        </p:nvSpPr>
-        <p:spPr>
-          <a:xfrm>
-            <a:off x="7909560" y="3977640"/>
-            <a:ext cx="2926080" cy="182880"/>
-          </a:xfrm>
-          <a:prstGeom prst="rect">
-            <a:avLst/>
-          </a:prstGeom>
-          <a:noFill/>
-          <a:ln/>
-        </p:spPr>
-        <p:txBody>
-          <a:bodyPr wrap="square" lIns="0" tIns="0" rIns="0" bIns="0" rtlCol="0" anchor="ctr"/>
-          <a:lstStyle/>
-          <a:p>
-            <a:pPr algn="ctr" indent="0" marL="0">
-              <a:buNone/>
-            </a:pPr>
-            <a:r>
-              <a:rPr lang="en-US" sz="1000" dirty="0">
-                <a:solidFill>
-                  <a:srgbClr val="003A63"/>
-                </a:solidFill>
-                <a:latin typeface="Aptos" pitchFamily="34" charset="0"/>
-                <a:ea typeface="Aptos" pitchFamily="34" charset="-122"/>
-                <a:cs typeface="Aptos" pitchFamily="34" charset="-120"/>
-              </a:rPr>
-              <a:t>Dependencies visible</a:t>
-            </a:r>
-            <a:endParaRPr lang="en-US" sz="1000" dirty="0"/>
-          </a:p>
-        </p:txBody>
-      </p:sp>
-      <p:sp>
-        <p:nvSpPr>
-          <p:cNvPr id="22" name="Shape 20"/>
           <p:cNvSpPr/>
           <p:nvPr/>
         </p:nvSpPr>
@@ -9633,7 +8443,7 @@
       </p:sp>
       <p:sp>
         <p:nvSpPr>
-          <p:cNvPr id="23" name="Text 21"/>
+          <p:cNvPr id="17" name="Text 15"/>
           <p:cNvSpPr/>
           <p:nvPr/>
         </p:nvSpPr>
@@ -9672,7 +8482,7 @@
       </p:sp>
       <p:sp>
         <p:nvSpPr>
-          <p:cNvPr id="24" name="Text 22"/>
+          <p:cNvPr id="18" name="Text 16"/>
           <p:cNvSpPr/>
           <p:nvPr/>
         </p:nvSpPr>
@@ -10166,13 +8976,11 @@
             </a:avLst>
           </a:prstGeom>
           <a:solidFill>
-            <a:srgbClr val="FFFFFF">
-              <a:alpha val="88000"/>
-            </a:srgbClr>
+            <a:srgbClr val="FFFFFF"/>
           </a:solidFill>
           <a:ln w="12700">
             <a:solidFill>
-              <a:srgbClr val="D6E8F2"/>
+              <a:srgbClr val="B9D7E6"/>
             </a:solidFill>
             <a:prstDash val="solid"/>
           </a:ln>
@@ -10180,30 +8988,42 @@
       </p:sp>
       <p:sp>
         <p:nvSpPr>
-          <p:cNvPr id="14" name="Shape 12"/>
-          <p:cNvSpPr/>
-          <p:nvPr/>
-        </p:nvSpPr>
-        <p:spPr>
-          <a:xfrm>
-            <a:off x="7927848" y="3319272"/>
-            <a:ext cx="792480" cy="749808"/>
-          </a:xfrm>
-          <a:prstGeom prst="roundRect">
-            <a:avLst>
-              <a:gd name="adj" fmla="val 14634"/>
-            </a:avLst>
-          </a:prstGeom>
-          <a:solidFill>
-            <a:srgbClr val="0068B7"/>
-          </a:solidFill>
-          <a:ln w="12700">
-            <a:solidFill>
-              <a:srgbClr val="0068B7"/>
-            </a:solidFill>
-            <a:prstDash val="solid"/>
-          </a:ln>
-        </p:spPr>
+          <p:cNvPr id="14" name="Text 12"/>
+          <p:cNvSpPr/>
+          <p:nvPr/>
+        </p:nvSpPr>
+        <p:spPr>
+          <a:xfrm>
+            <a:off x="7799832" y="2935224"/>
+            <a:ext cx="3145536" cy="256032"/>
+          </a:xfrm>
+          <a:prstGeom prst="rect">
+            <a:avLst/>
+          </a:prstGeom>
+          <a:noFill/>
+          <a:ln/>
+        </p:spPr>
+        <p:txBody>
+          <a:bodyPr wrap="square" lIns="0" tIns="0" rIns="0" bIns="0" rtlCol="0" anchor="ctr"/>
+          <a:lstStyle/>
+          <a:p>
+            <a:pPr indent="0" marL="0">
+              <a:buNone/>
+            </a:pPr>
+            <a:r>
+              <a:rPr lang="en-US" sz="1300" b="1" dirty="0">
+                <a:solidFill>
+                  <a:srgbClr val="0068B7"/>
+                </a:solidFill>
+                <a:latin typeface="Aptos" pitchFamily="34" charset="0"/>
+                <a:ea typeface="Aptos" pitchFamily="34" charset="-122"/>
+                <a:cs typeface="Aptos" pitchFamily="34" charset="-120"/>
+              </a:rPr>
+              <a:t>Concept checkpoints</a:t>
+            </a:r>
+            <a:endParaRPr lang="en-US" sz="1300" dirty="0"/>
+          </a:p>
+        </p:txBody>
       </p:sp>
       <p:sp>
         <p:nvSpPr>
@@ -10213,240 +9033,53 @@
         </p:nvSpPr>
         <p:spPr>
           <a:xfrm>
-            <a:off x="8001000" y="3511296"/>
-            <a:ext cx="646176" cy="310896"/>
-          </a:xfrm>
-          <a:prstGeom prst="rect">
-            <a:avLst/>
-          </a:prstGeom>
-          <a:noFill/>
-          <a:ln/>
-        </p:spPr>
-        <p:txBody>
-          <a:bodyPr wrap="square" lIns="0" tIns="0" rIns="0" bIns="0" rtlCol="0" anchor="ctr">
+            <a:off x="7818120" y="3300984"/>
+            <a:ext cx="3090672" cy="877824"/>
+          </a:xfrm>
+          <a:prstGeom prst="rect">
+            <a:avLst/>
+          </a:prstGeom>
+          <a:noFill/>
+          <a:ln/>
+        </p:spPr>
+        <p:txBody>
+          <a:bodyPr wrap="square" lIns="254" tIns="254" rIns="254" bIns="254" rtlCol="0" anchor="t">
             <a:normAutofit/>
           </a:bodyPr>
           <a:lstStyle/>
           <a:p>
-            <a:pPr algn="ctr" indent="0" marL="0">
-              <a:buNone/>
-            </a:pPr>
-            <a:r>
-              <a:rPr lang="en-US" sz="1500" b="1" dirty="0">
-                <a:solidFill>
-                  <a:srgbClr val="FFFFFF"/>
-                </a:solidFill>
-                <a:latin typeface="Aptos" pitchFamily="34" charset="0"/>
-                <a:ea typeface="Aptos" pitchFamily="34" charset="-122"/>
-                <a:cs typeface="Aptos" pitchFamily="34" charset="-120"/>
-              </a:rPr>
-              <a:t>Plan</a:t>
-            </a:r>
-            <a:endParaRPr lang="en-US" sz="1500" dirty="0"/>
+            <a:r>
+              <a:rPr lang="en-US" sz="1380" dirty="0">
+                <a:solidFill>
+                  <a:srgbClr val="17364A"/>
+                </a:solidFill>
+                <a:latin typeface="Aptos" pitchFamily="34" charset="0"/>
+                <a:ea typeface="Aptos" pitchFamily="34" charset="-122"/>
+                <a:cs typeface="Aptos" pitchFamily="34" charset="-120"/>
+              </a:rPr>
+              <a:t>The expected artifact is a completed AI requirements matrix.</a:t>
+            </a:r>
+            <a:endParaRPr lang="en-US" sz="1380" dirty="0"/>
+          </a:p>
+          <a:p>
+            <a:r>
+              <a:rPr lang="en-US" sz="1380" dirty="0">
+                <a:solidFill>
+                  <a:srgbClr val="17364A"/>
+                </a:solidFill>
+                <a:latin typeface="Aptos" pitchFamily="34" charset="0"/>
+                <a:ea typeface="Aptos" pitchFamily="34" charset="-122"/>
+                <a:cs typeface="Aptos" pitchFamily="34" charset="-120"/>
+              </a:rPr>
+              <a:t>It should be specific to a public health workflow and should include technical.</a:t>
+            </a:r>
+            <a:endParaRPr lang="en-US" sz="1380" dirty="0"/>
           </a:p>
         </p:txBody>
       </p:sp>
       <p:sp>
         <p:nvSpPr>
           <p:cNvPr id="16" name="Shape 14"/>
-          <p:cNvSpPr/>
-          <p:nvPr/>
-        </p:nvSpPr>
-        <p:spPr>
-          <a:xfrm>
-            <a:off x="8976360" y="3319272"/>
-            <a:ext cx="792480" cy="749808"/>
-          </a:xfrm>
-          <a:prstGeom prst="roundRect">
-            <a:avLst>
-              <a:gd name="adj" fmla="val 14634"/>
-            </a:avLst>
-          </a:prstGeom>
-          <a:solidFill>
-            <a:srgbClr val="2F8A28"/>
-          </a:solidFill>
-          <a:ln w="12700">
-            <a:solidFill>
-              <a:srgbClr val="2F8A28"/>
-            </a:solidFill>
-            <a:prstDash val="solid"/>
-          </a:ln>
-        </p:spPr>
-      </p:sp>
-      <p:sp>
-        <p:nvSpPr>
-          <p:cNvPr id="17" name="Text 15"/>
-          <p:cNvSpPr/>
-          <p:nvPr/>
-        </p:nvSpPr>
-        <p:spPr>
-          <a:xfrm>
-            <a:off x="9049512" y="3511296"/>
-            <a:ext cx="646176" cy="310896"/>
-          </a:xfrm>
-          <a:prstGeom prst="rect">
-            <a:avLst/>
-          </a:prstGeom>
-          <a:noFill/>
-          <a:ln/>
-        </p:spPr>
-        <p:txBody>
-          <a:bodyPr wrap="square" lIns="0" tIns="0" rIns="0" bIns="0" rtlCol="0" anchor="ctr">
-            <a:normAutofit/>
-          </a:bodyPr>
-          <a:lstStyle/>
-          <a:p>
-            <a:pPr algn="ctr" indent="0" marL="0">
-              <a:buNone/>
-            </a:pPr>
-            <a:r>
-              <a:rPr lang="en-US" sz="1500" b="1" dirty="0">
-                <a:solidFill>
-                  <a:srgbClr val="FFFFFF"/>
-                </a:solidFill>
-                <a:latin typeface="Aptos" pitchFamily="34" charset="0"/>
-                <a:ea typeface="Aptos" pitchFamily="34" charset="-122"/>
-                <a:cs typeface="Aptos" pitchFamily="34" charset="-120"/>
-              </a:rPr>
-              <a:t>Do</a:t>
-            </a:r>
-            <a:endParaRPr lang="en-US" sz="1500" dirty="0"/>
-          </a:p>
-        </p:txBody>
-      </p:sp>
-      <p:sp>
-        <p:nvSpPr>
-          <p:cNvPr id="18" name="Shape 16"/>
-          <p:cNvSpPr/>
-          <p:nvPr/>
-        </p:nvSpPr>
-        <p:spPr>
-          <a:xfrm>
-            <a:off x="10024872" y="3319272"/>
-            <a:ext cx="792480" cy="749808"/>
-          </a:xfrm>
-          <a:prstGeom prst="roundRect">
-            <a:avLst>
-              <a:gd name="adj" fmla="val 14634"/>
-            </a:avLst>
-          </a:prstGeom>
-          <a:solidFill>
-            <a:srgbClr val="D69A2D"/>
-          </a:solidFill>
-          <a:ln w="12700">
-            <a:solidFill>
-              <a:srgbClr val="D69A2D"/>
-            </a:solidFill>
-            <a:prstDash val="solid"/>
-          </a:ln>
-        </p:spPr>
-      </p:sp>
-      <p:sp>
-        <p:nvSpPr>
-          <p:cNvPr id="19" name="Text 17"/>
-          <p:cNvSpPr/>
-          <p:nvPr/>
-        </p:nvSpPr>
-        <p:spPr>
-          <a:xfrm>
-            <a:off x="10098024" y="3511296"/>
-            <a:ext cx="646176" cy="310896"/>
-          </a:xfrm>
-          <a:prstGeom prst="rect">
-            <a:avLst/>
-          </a:prstGeom>
-          <a:noFill/>
-          <a:ln/>
-        </p:spPr>
-        <p:txBody>
-          <a:bodyPr wrap="square" lIns="0" tIns="0" rIns="0" bIns="0" rtlCol="0" anchor="ctr">
-            <a:normAutofit/>
-          </a:bodyPr>
-          <a:lstStyle/>
-          <a:p>
-            <a:pPr algn="ctr" indent="0" marL="0">
-              <a:buNone/>
-            </a:pPr>
-            <a:r>
-              <a:rPr lang="en-US" sz="1500" b="1" dirty="0">
-                <a:solidFill>
-                  <a:srgbClr val="FFFFFF"/>
-                </a:solidFill>
-                <a:latin typeface="Aptos" pitchFamily="34" charset="0"/>
-                <a:ea typeface="Aptos" pitchFamily="34" charset="-122"/>
-                <a:cs typeface="Aptos" pitchFamily="34" charset="-120"/>
-              </a:rPr>
-              <a:t>Review</a:t>
-            </a:r>
-            <a:endParaRPr lang="en-US" sz="1500" dirty="0"/>
-          </a:p>
-        </p:txBody>
-      </p:sp>
-      <p:sp>
-        <p:nvSpPr>
-          <p:cNvPr id="20" name="Shape 18"/>
-          <p:cNvSpPr/>
-          <p:nvPr/>
-        </p:nvSpPr>
-        <p:spPr>
-          <a:xfrm>
-            <a:off x="8293608" y="4389120"/>
-            <a:ext cx="2157984" cy="0"/>
-          </a:xfrm>
-          <a:prstGeom prst="line">
-            <a:avLst/>
-          </a:prstGeom>
-          <a:noFill/>
-          <a:ln w="25400">
-            <a:solidFill>
-              <a:srgbClr val="8ABBD8"/>
-            </a:solidFill>
-            <a:prstDash val="solid"/>
-          </a:ln>
-        </p:spPr>
-      </p:sp>
-      <p:sp>
-        <p:nvSpPr>
-          <p:cNvPr id="21" name="Text 19"/>
-          <p:cNvSpPr/>
-          <p:nvPr/>
-        </p:nvSpPr>
-        <p:spPr>
-          <a:xfrm>
-            <a:off x="7909560" y="3977640"/>
-            <a:ext cx="2926080" cy="182880"/>
-          </a:xfrm>
-          <a:prstGeom prst="rect">
-            <a:avLst/>
-          </a:prstGeom>
-          <a:noFill/>
-          <a:ln/>
-        </p:spPr>
-        <p:txBody>
-          <a:bodyPr wrap="square" lIns="0" tIns="0" rIns="0" bIns="0" rtlCol="0" anchor="ctr"/>
-          <a:lstStyle/>
-          <a:p>
-            <a:pPr algn="ctr" indent="0" marL="0">
-              <a:buNone/>
-            </a:pPr>
-            <a:r>
-              <a:rPr lang="en-US" sz="1000" dirty="0">
-                <a:solidFill>
-                  <a:srgbClr val="003A63"/>
-                </a:solidFill>
-                <a:latin typeface="Aptos" pitchFamily="34" charset="0"/>
-                <a:ea typeface="Aptos" pitchFamily="34" charset="-122"/>
-                <a:cs typeface="Aptos" pitchFamily="34" charset="-120"/>
-              </a:rPr>
-              <a:t>Dependencies visible</a:t>
-            </a:r>
-            <a:endParaRPr lang="en-US" sz="1000" dirty="0"/>
-          </a:p>
-        </p:txBody>
-      </p:sp>
-      <p:sp>
-        <p:nvSpPr>
-          <p:cNvPr id="22" name="Shape 20"/>
           <p:cNvSpPr/>
           <p:nvPr/>
         </p:nvSpPr>
@@ -10473,7 +9106,7 @@
       </p:sp>
       <p:sp>
         <p:nvSpPr>
-          <p:cNvPr id="23" name="Text 21"/>
+          <p:cNvPr id="17" name="Text 15"/>
           <p:cNvSpPr/>
           <p:nvPr/>
         </p:nvSpPr>
@@ -10512,7 +9145,7 @@
       </p:sp>
       <p:sp>
         <p:nvSpPr>
-          <p:cNvPr id="24" name="Text 22"/>
+          <p:cNvPr id="18" name="Text 16"/>
           <p:cNvSpPr/>
           <p:nvPr/>
         </p:nvSpPr>
@@ -10992,13 +9625,11 @@
             </a:avLst>
           </a:prstGeom>
           <a:solidFill>
-            <a:srgbClr val="FFFFFF">
-              <a:alpha val="88000"/>
-            </a:srgbClr>
+            <a:srgbClr val="FFFFFF"/>
           </a:solidFill>
           <a:ln w="12700">
             <a:solidFill>
-              <a:srgbClr val="D6E8F2"/>
+              <a:srgbClr val="B9D7E6"/>
             </a:solidFill>
             <a:prstDash val="solid"/>
           </a:ln>
@@ -11006,30 +9637,42 @@
       </p:sp>
       <p:sp>
         <p:nvSpPr>
-          <p:cNvPr id="14" name="Shape 12"/>
-          <p:cNvSpPr/>
-          <p:nvPr/>
-        </p:nvSpPr>
-        <p:spPr>
-          <a:xfrm>
-            <a:off x="7927848" y="3319272"/>
-            <a:ext cx="792480" cy="749808"/>
-          </a:xfrm>
-          <a:prstGeom prst="roundRect">
-            <a:avLst>
-              <a:gd name="adj" fmla="val 14634"/>
-            </a:avLst>
-          </a:prstGeom>
-          <a:solidFill>
-            <a:srgbClr val="0068B7"/>
-          </a:solidFill>
-          <a:ln w="12700">
-            <a:solidFill>
-              <a:srgbClr val="0068B7"/>
-            </a:solidFill>
-            <a:prstDash val="solid"/>
-          </a:ln>
-        </p:spPr>
+          <p:cNvPr id="14" name="Text 12"/>
+          <p:cNvSpPr/>
+          <p:nvPr/>
+        </p:nvSpPr>
+        <p:spPr>
+          <a:xfrm>
+            <a:off x="7799832" y="2935224"/>
+            <a:ext cx="3145536" cy="256032"/>
+          </a:xfrm>
+          <a:prstGeom prst="rect">
+            <a:avLst/>
+          </a:prstGeom>
+          <a:noFill/>
+          <a:ln/>
+        </p:spPr>
+        <p:txBody>
+          <a:bodyPr wrap="square" lIns="0" tIns="0" rIns="0" bIns="0" rtlCol="0" anchor="ctr"/>
+          <a:lstStyle/>
+          <a:p>
+            <a:pPr indent="0" marL="0">
+              <a:buNone/>
+            </a:pPr>
+            <a:r>
+              <a:rPr lang="en-US" sz="1300" b="1" dirty="0">
+                <a:solidFill>
+                  <a:srgbClr val="0068B7"/>
+                </a:solidFill>
+                <a:latin typeface="Aptos" pitchFamily="34" charset="0"/>
+                <a:ea typeface="Aptos" pitchFamily="34" charset="-122"/>
+                <a:cs typeface="Aptos" pitchFamily="34" charset="-120"/>
+              </a:rPr>
+              <a:t>Concept checkpoints</a:t>
+            </a:r>
+            <a:endParaRPr lang="en-US" sz="1300" dirty="0"/>
+          </a:p>
+        </p:txBody>
       </p:sp>
       <p:sp>
         <p:nvSpPr>
@@ -11039,240 +9682,53 @@
         </p:nvSpPr>
         <p:spPr>
           <a:xfrm>
-            <a:off x="8001000" y="3511296"/>
-            <a:ext cx="646176" cy="310896"/>
-          </a:xfrm>
-          <a:prstGeom prst="rect">
-            <a:avLst/>
-          </a:prstGeom>
-          <a:noFill/>
-          <a:ln/>
-        </p:spPr>
-        <p:txBody>
-          <a:bodyPr wrap="square" lIns="0" tIns="0" rIns="0" bIns="0" rtlCol="0" anchor="ctr">
+            <a:off x="7818120" y="3300984"/>
+            <a:ext cx="3090672" cy="877824"/>
+          </a:xfrm>
+          <a:prstGeom prst="rect">
+            <a:avLst/>
+          </a:prstGeom>
+          <a:noFill/>
+          <a:ln/>
+        </p:spPr>
+        <p:txBody>
+          <a:bodyPr wrap="square" lIns="254" tIns="254" rIns="254" bIns="254" rtlCol="0" anchor="t">
             <a:normAutofit/>
           </a:bodyPr>
           <a:lstStyle/>
           <a:p>
-            <a:pPr algn="ctr" indent="0" marL="0">
-              <a:buNone/>
-            </a:pPr>
-            <a:r>
-              <a:rPr lang="en-US" sz="1500" b="1" dirty="0">
-                <a:solidFill>
-                  <a:srgbClr val="FFFFFF"/>
-                </a:solidFill>
-                <a:latin typeface="Aptos" pitchFamily="34" charset="0"/>
-                <a:ea typeface="Aptos" pitchFamily="34" charset="-122"/>
-                <a:cs typeface="Aptos" pitchFamily="34" charset="-120"/>
-              </a:rPr>
-              <a:t>Plan</a:t>
-            </a:r>
-            <a:endParaRPr lang="en-US" sz="1500" dirty="0"/>
+            <a:r>
+              <a:rPr lang="en-US" sz="1380" dirty="0">
+                <a:solidFill>
+                  <a:srgbClr val="17364A"/>
+                </a:solidFill>
+                <a:latin typeface="Aptos" pitchFamily="34" charset="0"/>
+                <a:ea typeface="Aptos" pitchFamily="34" charset="-122"/>
+                <a:cs typeface="Aptos" pitchFamily="34" charset="-120"/>
+              </a:rPr>
+              <a:t>The expected artifact is a completed AI requirements matrix.</a:t>
+            </a:r>
+            <a:endParaRPr lang="en-US" sz="1380" dirty="0"/>
+          </a:p>
+          <a:p>
+            <a:r>
+              <a:rPr lang="en-US" sz="1380" dirty="0">
+                <a:solidFill>
+                  <a:srgbClr val="17364A"/>
+                </a:solidFill>
+                <a:latin typeface="Aptos" pitchFamily="34" charset="0"/>
+                <a:ea typeface="Aptos" pitchFamily="34" charset="-122"/>
+                <a:cs typeface="Aptos" pitchFamily="34" charset="-120"/>
+              </a:rPr>
+              <a:t>It should be specific to a public health workflow and should include technical.</a:t>
+            </a:r>
+            <a:endParaRPr lang="en-US" sz="1380" dirty="0"/>
           </a:p>
         </p:txBody>
       </p:sp>
       <p:sp>
         <p:nvSpPr>
           <p:cNvPr id="16" name="Shape 14"/>
-          <p:cNvSpPr/>
-          <p:nvPr/>
-        </p:nvSpPr>
-        <p:spPr>
-          <a:xfrm>
-            <a:off x="8976360" y="3319272"/>
-            <a:ext cx="792480" cy="749808"/>
-          </a:xfrm>
-          <a:prstGeom prst="roundRect">
-            <a:avLst>
-              <a:gd name="adj" fmla="val 14634"/>
-            </a:avLst>
-          </a:prstGeom>
-          <a:solidFill>
-            <a:srgbClr val="2F8A28"/>
-          </a:solidFill>
-          <a:ln w="12700">
-            <a:solidFill>
-              <a:srgbClr val="2F8A28"/>
-            </a:solidFill>
-            <a:prstDash val="solid"/>
-          </a:ln>
-        </p:spPr>
-      </p:sp>
-      <p:sp>
-        <p:nvSpPr>
-          <p:cNvPr id="17" name="Text 15"/>
-          <p:cNvSpPr/>
-          <p:nvPr/>
-        </p:nvSpPr>
-        <p:spPr>
-          <a:xfrm>
-            <a:off x="9049512" y="3511296"/>
-            <a:ext cx="646176" cy="310896"/>
-          </a:xfrm>
-          <a:prstGeom prst="rect">
-            <a:avLst/>
-          </a:prstGeom>
-          <a:noFill/>
-          <a:ln/>
-        </p:spPr>
-        <p:txBody>
-          <a:bodyPr wrap="square" lIns="0" tIns="0" rIns="0" bIns="0" rtlCol="0" anchor="ctr">
-            <a:normAutofit/>
-          </a:bodyPr>
-          <a:lstStyle/>
-          <a:p>
-            <a:pPr algn="ctr" indent="0" marL="0">
-              <a:buNone/>
-            </a:pPr>
-            <a:r>
-              <a:rPr lang="en-US" sz="1500" b="1" dirty="0">
-                <a:solidFill>
-                  <a:srgbClr val="FFFFFF"/>
-                </a:solidFill>
-                <a:latin typeface="Aptos" pitchFamily="34" charset="0"/>
-                <a:ea typeface="Aptos" pitchFamily="34" charset="-122"/>
-                <a:cs typeface="Aptos" pitchFamily="34" charset="-120"/>
-              </a:rPr>
-              <a:t>Do</a:t>
-            </a:r>
-            <a:endParaRPr lang="en-US" sz="1500" dirty="0"/>
-          </a:p>
-        </p:txBody>
-      </p:sp>
-      <p:sp>
-        <p:nvSpPr>
-          <p:cNvPr id="18" name="Shape 16"/>
-          <p:cNvSpPr/>
-          <p:nvPr/>
-        </p:nvSpPr>
-        <p:spPr>
-          <a:xfrm>
-            <a:off x="10024872" y="3319272"/>
-            <a:ext cx="792480" cy="749808"/>
-          </a:xfrm>
-          <a:prstGeom prst="roundRect">
-            <a:avLst>
-              <a:gd name="adj" fmla="val 14634"/>
-            </a:avLst>
-          </a:prstGeom>
-          <a:solidFill>
-            <a:srgbClr val="D69A2D"/>
-          </a:solidFill>
-          <a:ln w="12700">
-            <a:solidFill>
-              <a:srgbClr val="D69A2D"/>
-            </a:solidFill>
-            <a:prstDash val="solid"/>
-          </a:ln>
-        </p:spPr>
-      </p:sp>
-      <p:sp>
-        <p:nvSpPr>
-          <p:cNvPr id="19" name="Text 17"/>
-          <p:cNvSpPr/>
-          <p:nvPr/>
-        </p:nvSpPr>
-        <p:spPr>
-          <a:xfrm>
-            <a:off x="10098024" y="3511296"/>
-            <a:ext cx="646176" cy="310896"/>
-          </a:xfrm>
-          <a:prstGeom prst="rect">
-            <a:avLst/>
-          </a:prstGeom>
-          <a:noFill/>
-          <a:ln/>
-        </p:spPr>
-        <p:txBody>
-          <a:bodyPr wrap="square" lIns="0" tIns="0" rIns="0" bIns="0" rtlCol="0" anchor="ctr">
-            <a:normAutofit/>
-          </a:bodyPr>
-          <a:lstStyle/>
-          <a:p>
-            <a:pPr algn="ctr" indent="0" marL="0">
-              <a:buNone/>
-            </a:pPr>
-            <a:r>
-              <a:rPr lang="en-US" sz="1500" b="1" dirty="0">
-                <a:solidFill>
-                  <a:srgbClr val="FFFFFF"/>
-                </a:solidFill>
-                <a:latin typeface="Aptos" pitchFamily="34" charset="0"/>
-                <a:ea typeface="Aptos" pitchFamily="34" charset="-122"/>
-                <a:cs typeface="Aptos" pitchFamily="34" charset="-120"/>
-              </a:rPr>
-              <a:t>Review</a:t>
-            </a:r>
-            <a:endParaRPr lang="en-US" sz="1500" dirty="0"/>
-          </a:p>
-        </p:txBody>
-      </p:sp>
-      <p:sp>
-        <p:nvSpPr>
-          <p:cNvPr id="20" name="Shape 18"/>
-          <p:cNvSpPr/>
-          <p:nvPr/>
-        </p:nvSpPr>
-        <p:spPr>
-          <a:xfrm>
-            <a:off x="8293608" y="4389120"/>
-            <a:ext cx="2157984" cy="0"/>
-          </a:xfrm>
-          <a:prstGeom prst="line">
-            <a:avLst/>
-          </a:prstGeom>
-          <a:noFill/>
-          <a:ln w="25400">
-            <a:solidFill>
-              <a:srgbClr val="8ABBD8"/>
-            </a:solidFill>
-            <a:prstDash val="solid"/>
-          </a:ln>
-        </p:spPr>
-      </p:sp>
-      <p:sp>
-        <p:nvSpPr>
-          <p:cNvPr id="21" name="Text 19"/>
-          <p:cNvSpPr/>
-          <p:nvPr/>
-        </p:nvSpPr>
-        <p:spPr>
-          <a:xfrm>
-            <a:off x="7909560" y="3977640"/>
-            <a:ext cx="2926080" cy="182880"/>
-          </a:xfrm>
-          <a:prstGeom prst="rect">
-            <a:avLst/>
-          </a:prstGeom>
-          <a:noFill/>
-          <a:ln/>
-        </p:spPr>
-        <p:txBody>
-          <a:bodyPr wrap="square" lIns="0" tIns="0" rIns="0" bIns="0" rtlCol="0" anchor="ctr"/>
-          <a:lstStyle/>
-          <a:p>
-            <a:pPr algn="ctr" indent="0" marL="0">
-              <a:buNone/>
-            </a:pPr>
-            <a:r>
-              <a:rPr lang="en-US" sz="1000" dirty="0">
-                <a:solidFill>
-                  <a:srgbClr val="003A63"/>
-                </a:solidFill>
-                <a:latin typeface="Aptos" pitchFamily="34" charset="0"/>
-                <a:ea typeface="Aptos" pitchFamily="34" charset="-122"/>
-                <a:cs typeface="Aptos" pitchFamily="34" charset="-120"/>
-              </a:rPr>
-              <a:t>Dependencies visible</a:t>
-            </a:r>
-            <a:endParaRPr lang="en-US" sz="1000" dirty="0"/>
-          </a:p>
-        </p:txBody>
-      </p:sp>
-      <p:sp>
-        <p:nvSpPr>
-          <p:cNvPr id="22" name="Shape 20"/>
           <p:cNvSpPr/>
           <p:nvPr/>
         </p:nvSpPr>
@@ -11299,7 +9755,7 @@
       </p:sp>
       <p:sp>
         <p:nvSpPr>
-          <p:cNvPr id="23" name="Text 21"/>
+          <p:cNvPr id="17" name="Text 15"/>
           <p:cNvSpPr/>
           <p:nvPr/>
         </p:nvSpPr>
@@ -11338,7 +9794,7 @@
       </p:sp>
       <p:sp>
         <p:nvSpPr>
-          <p:cNvPr id="24" name="Text 22"/>
+          <p:cNvPr id="18" name="Text 16"/>
           <p:cNvSpPr/>
           <p:nvPr/>
         </p:nvSpPr>
@@ -11857,20 +10313,20 @@
         </p:nvSpPr>
         <p:spPr>
           <a:xfrm>
-            <a:off x="7635240" y="3730752"/>
-            <a:ext cx="1033272" cy="749808"/>
+            <a:off x="7909560" y="3675888"/>
+            <a:ext cx="3154680" cy="1691640"/>
           </a:xfrm>
           <a:prstGeom prst="roundRect">
             <a:avLst>
-              <a:gd name="adj" fmla="val 14634"/>
+              <a:gd name="adj" fmla="val 6486"/>
             </a:avLst>
           </a:prstGeom>
           <a:solidFill>
-            <a:srgbClr val="0068B7"/>
+            <a:srgbClr val="FFFFFF"/>
           </a:solidFill>
           <a:ln w="12700">
             <a:solidFill>
-              <a:srgbClr val="0068B7"/>
+              <a:srgbClr val="B9D7E6"/>
             </a:solidFill>
             <a:prstDash val="solid"/>
           </a:ln>
@@ -11884,172 +10340,100 @@
         </p:nvSpPr>
         <p:spPr>
           <a:xfrm>
-            <a:off x="7708392" y="3922776"/>
-            <a:ext cx="886968" cy="310896"/>
-          </a:xfrm>
-          <a:prstGeom prst="rect">
-            <a:avLst/>
-          </a:prstGeom>
-          <a:noFill/>
-          <a:ln/>
-        </p:spPr>
-        <p:txBody>
-          <a:bodyPr wrap="square" lIns="0" tIns="0" rIns="0" bIns="0" rtlCol="0" anchor="ctr">
+            <a:off x="8074152" y="3822192"/>
+            <a:ext cx="2825496" cy="256032"/>
+          </a:xfrm>
+          <a:prstGeom prst="rect">
+            <a:avLst/>
+          </a:prstGeom>
+          <a:noFill/>
+          <a:ln/>
+        </p:spPr>
+        <p:txBody>
+          <a:bodyPr wrap="square" lIns="0" tIns="0" rIns="0" bIns="0" rtlCol="0" anchor="ctr"/>
+          <a:lstStyle/>
+          <a:p>
+            <a:pPr indent="0" marL="0">
+              <a:buNone/>
+            </a:pPr>
+            <a:r>
+              <a:rPr lang="en-US" sz="1300" b="1" dirty="0">
+                <a:solidFill>
+                  <a:srgbClr val="0068B7"/>
+                </a:solidFill>
+                <a:latin typeface="Aptos" pitchFamily="34" charset="0"/>
+                <a:ea typeface="Aptos" pitchFamily="34" charset="-122"/>
+                <a:cs typeface="Aptos" pitchFamily="34" charset="-120"/>
+              </a:rPr>
+              <a:t>Learning sequence</a:t>
+            </a:r>
+            <a:endParaRPr lang="en-US" sz="1300" dirty="0"/>
+          </a:p>
+        </p:txBody>
+      </p:sp>
+      <p:sp>
+        <p:nvSpPr>
+          <p:cNvPr id="15" name="Text 13"/>
+          <p:cNvSpPr/>
+          <p:nvPr/>
+        </p:nvSpPr>
+        <p:spPr>
+          <a:xfrm>
+            <a:off x="8092440" y="4187952"/>
+            <a:ext cx="2770632" cy="1033272"/>
+          </a:xfrm>
+          <a:prstGeom prst="rect">
+            <a:avLst/>
+          </a:prstGeom>
+          <a:noFill/>
+          <a:ln/>
+        </p:spPr>
+        <p:txBody>
+          <a:bodyPr wrap="square" lIns="254" tIns="254" rIns="254" bIns="254" rtlCol="0" anchor="t">
             <a:normAutofit/>
           </a:bodyPr>
           <a:lstStyle/>
           <a:p>
-            <a:pPr algn="ctr" indent="0" marL="0">
-              <a:buNone/>
-            </a:pPr>
-            <a:r>
-              <a:rPr lang="en-US" sz="1500" b="1" dirty="0">
-                <a:solidFill>
-                  <a:srgbClr val="FFFFFF"/>
-                </a:solidFill>
-                <a:latin typeface="Aptos" pitchFamily="34" charset="0"/>
-                <a:ea typeface="Aptos" pitchFamily="34" charset="-122"/>
-                <a:cs typeface="Aptos" pitchFamily="34" charset="-120"/>
-              </a:rPr>
-              <a:t>Learn</a:t>
-            </a:r>
-            <a:endParaRPr lang="en-US" sz="1500" dirty="0"/>
-          </a:p>
-        </p:txBody>
-      </p:sp>
-      <p:sp>
-        <p:nvSpPr>
-          <p:cNvPr id="15" name="Shape 13"/>
-          <p:cNvSpPr/>
-          <p:nvPr/>
-        </p:nvSpPr>
-        <p:spPr>
-          <a:xfrm>
-            <a:off x="8924544" y="3730752"/>
-            <a:ext cx="1033272" cy="749808"/>
-          </a:xfrm>
-          <a:prstGeom prst="roundRect">
-            <a:avLst>
-              <a:gd name="adj" fmla="val 14634"/>
-            </a:avLst>
-          </a:prstGeom>
-          <a:solidFill>
-            <a:srgbClr val="2F8A28"/>
-          </a:solidFill>
-          <a:ln w="12700">
-            <a:solidFill>
-              <a:srgbClr val="2F8A28"/>
-            </a:solidFill>
-            <a:prstDash val="solid"/>
-          </a:ln>
-        </p:spPr>
-      </p:sp>
-      <p:sp>
-        <p:nvSpPr>
-          <p:cNvPr id="16" name="Text 14"/>
-          <p:cNvSpPr/>
-          <p:nvPr/>
-        </p:nvSpPr>
-        <p:spPr>
-          <a:xfrm>
-            <a:off x="8997696" y="3922776"/>
-            <a:ext cx="886968" cy="310896"/>
-          </a:xfrm>
-          <a:prstGeom prst="rect">
-            <a:avLst/>
-          </a:prstGeom>
-          <a:noFill/>
-          <a:ln/>
-        </p:spPr>
-        <p:txBody>
-          <a:bodyPr wrap="square" lIns="0" tIns="0" rIns="0" bIns="0" rtlCol="0" anchor="ctr">
-            <a:normAutofit/>
-          </a:bodyPr>
-          <a:lstStyle/>
-          <a:p>
-            <a:pPr algn="ctr" indent="0" marL="0">
-              <a:buNone/>
-            </a:pPr>
-            <a:r>
-              <a:rPr lang="en-US" sz="1500" b="1" dirty="0">
-                <a:solidFill>
-                  <a:srgbClr val="FFFFFF"/>
-                </a:solidFill>
-                <a:latin typeface="Aptos" pitchFamily="34" charset="0"/>
-                <a:ea typeface="Aptos" pitchFamily="34" charset="-122"/>
-                <a:cs typeface="Aptos" pitchFamily="34" charset="-120"/>
-              </a:rPr>
-              <a:t>Apply</a:t>
-            </a:r>
-            <a:endParaRPr lang="en-US" sz="1500" dirty="0"/>
-          </a:p>
-        </p:txBody>
-      </p:sp>
-      <p:sp>
-        <p:nvSpPr>
-          <p:cNvPr id="17" name="Shape 15"/>
-          <p:cNvSpPr/>
-          <p:nvPr/>
-        </p:nvSpPr>
-        <p:spPr>
-          <a:xfrm>
-            <a:off x="10213848" y="3730752"/>
-            <a:ext cx="1033272" cy="749808"/>
-          </a:xfrm>
-          <a:prstGeom prst="roundRect">
-            <a:avLst>
-              <a:gd name="adj" fmla="val 14634"/>
-            </a:avLst>
-          </a:prstGeom>
-          <a:solidFill>
-            <a:srgbClr val="6A4CA3"/>
-          </a:solidFill>
-          <a:ln w="12700">
-            <a:solidFill>
-              <a:srgbClr val="6A4CA3"/>
-            </a:solidFill>
-            <a:prstDash val="solid"/>
-          </a:ln>
-        </p:spPr>
-      </p:sp>
-      <p:sp>
-        <p:nvSpPr>
-          <p:cNvPr id="18" name="Text 16"/>
-          <p:cNvSpPr/>
-          <p:nvPr/>
-        </p:nvSpPr>
-        <p:spPr>
-          <a:xfrm>
-            <a:off x="10287000" y="3922776"/>
-            <a:ext cx="886968" cy="310896"/>
-          </a:xfrm>
-          <a:prstGeom prst="rect">
-            <a:avLst/>
-          </a:prstGeom>
-          <a:noFill/>
-          <a:ln/>
-        </p:spPr>
-        <p:txBody>
-          <a:bodyPr wrap="square" lIns="0" tIns="0" rIns="0" bIns="0" rtlCol="0" anchor="ctr">
-            <a:normAutofit/>
-          </a:bodyPr>
-          <a:lstStyle/>
-          <a:p>
-            <a:pPr algn="ctr" indent="0" marL="0">
-              <a:buNone/>
-            </a:pPr>
-            <a:r>
-              <a:rPr lang="en-US" sz="1500" b="1" dirty="0">
-                <a:solidFill>
-                  <a:srgbClr val="FFFFFF"/>
-                </a:solidFill>
-                <a:latin typeface="Aptos" pitchFamily="34" charset="0"/>
-                <a:ea typeface="Aptos" pitchFamily="34" charset="-122"/>
-                <a:cs typeface="Aptos" pitchFamily="34" charset="-120"/>
-              </a:rPr>
-              <a:t>Document</a:t>
-            </a:r>
-            <a:endParaRPr lang="en-US" sz="1500" dirty="0"/>
+            <a:r>
+              <a:rPr lang="en-US" sz="1380" dirty="0">
+                <a:solidFill>
+                  <a:srgbClr val="17364A"/>
+                </a:solidFill>
+                <a:latin typeface="Aptos" pitchFamily="34" charset="0"/>
+                <a:ea typeface="Aptos" pitchFamily="34" charset="-122"/>
+                <a:cs typeface="Aptos" pitchFamily="34" charset="-120"/>
+              </a:rPr>
+              <a:t>Read the module for shared vocabulary and context.</a:t>
+            </a:r>
+            <a:endParaRPr lang="en-US" sz="1380" dirty="0"/>
+          </a:p>
+          <a:p>
+            <a:r>
+              <a:rPr lang="en-US" sz="1380" dirty="0">
+                <a:solidFill>
+                  <a:srgbClr val="17364A"/>
+                </a:solidFill>
+                <a:latin typeface="Aptos" pitchFamily="34" charset="0"/>
+                <a:ea typeface="Aptos" pitchFamily="34" charset="-122"/>
+                <a:cs typeface="Aptos" pitchFamily="34" charset="-120"/>
+              </a:rPr>
+              <a:t>Complete the practical exercise to apply the concept.</a:t>
+            </a:r>
+            <a:endParaRPr lang="en-US" sz="1380" dirty="0"/>
+          </a:p>
+          <a:p>
+            <a:r>
+              <a:rPr lang="en-US" sz="1380" dirty="0">
+                <a:solidFill>
+                  <a:srgbClr val="17364A"/>
+                </a:solidFill>
+                <a:latin typeface="Aptos" pitchFamily="34" charset="0"/>
+                <a:ea typeface="Aptos" pitchFamily="34" charset="-122"/>
+                <a:cs typeface="Aptos" pitchFamily="34" charset="-120"/>
+              </a:rPr>
+              <a:t>Use the notes and references for deeper review.</a:t>
+            </a:r>
+            <a:endParaRPr lang="en-US" sz="1380" dirty="0"/>
           </a:p>
         </p:txBody>
       </p:sp>
@@ -12522,13 +10906,11 @@
             </a:avLst>
           </a:prstGeom>
           <a:solidFill>
-            <a:srgbClr val="FFFFFF">
-              <a:alpha val="88000"/>
-            </a:srgbClr>
+            <a:srgbClr val="FFFFFF"/>
           </a:solidFill>
           <a:ln w="12700">
             <a:solidFill>
-              <a:srgbClr val="D6E8F2"/>
+              <a:srgbClr val="B9D7E6"/>
             </a:solidFill>
             <a:prstDash val="solid"/>
           </a:ln>
@@ -12536,30 +10918,42 @@
       </p:sp>
       <p:sp>
         <p:nvSpPr>
-          <p:cNvPr id="14" name="Shape 12"/>
-          <p:cNvSpPr/>
-          <p:nvPr/>
-        </p:nvSpPr>
-        <p:spPr>
-          <a:xfrm>
-            <a:off x="7927848" y="3319272"/>
-            <a:ext cx="792480" cy="749808"/>
-          </a:xfrm>
-          <a:prstGeom prst="roundRect">
-            <a:avLst>
-              <a:gd name="adj" fmla="val 14634"/>
-            </a:avLst>
-          </a:prstGeom>
-          <a:solidFill>
-            <a:srgbClr val="0068B7"/>
-          </a:solidFill>
-          <a:ln w="12700">
-            <a:solidFill>
-              <a:srgbClr val="0068B7"/>
-            </a:solidFill>
-            <a:prstDash val="solid"/>
-          </a:ln>
-        </p:spPr>
+          <p:cNvPr id="14" name="Text 12"/>
+          <p:cNvSpPr/>
+          <p:nvPr/>
+        </p:nvSpPr>
+        <p:spPr>
+          <a:xfrm>
+            <a:off x="7799832" y="2935224"/>
+            <a:ext cx="3145536" cy="256032"/>
+          </a:xfrm>
+          <a:prstGeom prst="rect">
+            <a:avLst/>
+          </a:prstGeom>
+          <a:noFill/>
+          <a:ln/>
+        </p:spPr>
+        <p:txBody>
+          <a:bodyPr wrap="square" lIns="0" tIns="0" rIns="0" bIns="0" rtlCol="0" anchor="ctr"/>
+          <a:lstStyle/>
+          <a:p>
+            <a:pPr indent="0" marL="0">
+              <a:buNone/>
+            </a:pPr>
+            <a:r>
+              <a:rPr lang="en-US" sz="1300" b="1" dirty="0">
+                <a:solidFill>
+                  <a:srgbClr val="0068B7"/>
+                </a:solidFill>
+                <a:latin typeface="Aptos" pitchFamily="34" charset="0"/>
+                <a:ea typeface="Aptos" pitchFamily="34" charset="-122"/>
+                <a:cs typeface="Aptos" pitchFamily="34" charset="-120"/>
+              </a:rPr>
+              <a:t>Concept checkpoints</a:t>
+            </a:r>
+            <a:endParaRPr lang="en-US" sz="1300" dirty="0"/>
+          </a:p>
+        </p:txBody>
       </p:sp>
       <p:sp>
         <p:nvSpPr>
@@ -12569,240 +10963,67 @@
         </p:nvSpPr>
         <p:spPr>
           <a:xfrm>
-            <a:off x="8001000" y="3511296"/>
-            <a:ext cx="646176" cy="310896"/>
-          </a:xfrm>
-          <a:prstGeom prst="rect">
-            <a:avLst/>
-          </a:prstGeom>
-          <a:noFill/>
-          <a:ln/>
-        </p:spPr>
-        <p:txBody>
-          <a:bodyPr wrap="square" lIns="0" tIns="0" rIns="0" bIns="0" rtlCol="0" anchor="ctr">
+            <a:off x="7818120" y="3300984"/>
+            <a:ext cx="3090672" cy="877824"/>
+          </a:xfrm>
+          <a:prstGeom prst="rect">
+            <a:avLst/>
+          </a:prstGeom>
+          <a:noFill/>
+          <a:ln/>
+        </p:spPr>
+        <p:txBody>
+          <a:bodyPr wrap="square" lIns="254" tIns="254" rIns="254" bIns="254" rtlCol="0" anchor="t">
             <a:normAutofit/>
           </a:bodyPr>
           <a:lstStyle/>
           <a:p>
-            <a:pPr algn="ctr" indent="0" marL="0">
-              <a:buNone/>
-            </a:pPr>
-            <a:r>
-              <a:rPr lang="en-US" sz="1500" b="1" dirty="0">
-                <a:solidFill>
-                  <a:srgbClr val="FFFFFF"/>
-                </a:solidFill>
-                <a:latin typeface="Aptos" pitchFamily="34" charset="0"/>
-                <a:ea typeface="Aptos" pitchFamily="34" charset="-122"/>
-                <a:cs typeface="Aptos" pitchFamily="34" charset="-120"/>
-              </a:rPr>
-              <a:t>Plan</a:t>
-            </a:r>
-            <a:endParaRPr lang="en-US" sz="1500" dirty="0"/>
+            <a:r>
+              <a:rPr lang="en-US" sz="1380" dirty="0">
+                <a:solidFill>
+                  <a:srgbClr val="17364A"/>
+                </a:solidFill>
+                <a:latin typeface="Aptos" pitchFamily="34" charset="0"/>
+                <a:ea typeface="Aptos" pitchFamily="34" charset="-122"/>
+                <a:cs typeface="Aptos" pitchFamily="34" charset="-120"/>
+              </a:rPr>
+              <a:t>1.</a:t>
+            </a:r>
+            <a:endParaRPr lang="en-US" sz="1380" dirty="0"/>
+          </a:p>
+          <a:p>
+            <a:r>
+              <a:rPr lang="en-US" sz="1380" dirty="0">
+                <a:solidFill>
+                  <a:srgbClr val="17364A"/>
+                </a:solidFill>
+                <a:latin typeface="Aptos" pitchFamily="34" charset="0"/>
+                <a:ea typeface="Aptos" pitchFamily="34" charset="-122"/>
+                <a:cs typeface="Aptos" pitchFamily="34" charset="-120"/>
+              </a:rPr>
+              <a:t>What is the best reason to address requirements writing for ai procurement and.</a:t>
+            </a:r>
+            <a:endParaRPr lang="en-US" sz="1380" dirty="0"/>
+          </a:p>
+          <a:p>
+            <a:r>
+              <a:rPr lang="en-US" sz="1380" dirty="0">
+                <a:solidFill>
+                  <a:srgbClr val="17364A"/>
+                </a:solidFill>
+                <a:latin typeface="Aptos" pitchFamily="34" charset="0"/>
+                <a:ea typeface="Aptos" pitchFamily="34" charset="-122"/>
+                <a:cs typeface="Aptos" pitchFamily="34" charset="-120"/>
+              </a:rPr>
+              <a:t>2.</a:t>
+            </a:r>
+            <a:endParaRPr lang="en-US" sz="1380" dirty="0"/>
           </a:p>
         </p:txBody>
       </p:sp>
       <p:sp>
         <p:nvSpPr>
           <p:cNvPr id="16" name="Shape 14"/>
-          <p:cNvSpPr/>
-          <p:nvPr/>
-        </p:nvSpPr>
-        <p:spPr>
-          <a:xfrm>
-            <a:off x="8976360" y="3319272"/>
-            <a:ext cx="792480" cy="749808"/>
-          </a:xfrm>
-          <a:prstGeom prst="roundRect">
-            <a:avLst>
-              <a:gd name="adj" fmla="val 14634"/>
-            </a:avLst>
-          </a:prstGeom>
-          <a:solidFill>
-            <a:srgbClr val="2F8A28"/>
-          </a:solidFill>
-          <a:ln w="12700">
-            <a:solidFill>
-              <a:srgbClr val="2F8A28"/>
-            </a:solidFill>
-            <a:prstDash val="solid"/>
-          </a:ln>
-        </p:spPr>
-      </p:sp>
-      <p:sp>
-        <p:nvSpPr>
-          <p:cNvPr id="17" name="Text 15"/>
-          <p:cNvSpPr/>
-          <p:nvPr/>
-        </p:nvSpPr>
-        <p:spPr>
-          <a:xfrm>
-            <a:off x="9049512" y="3511296"/>
-            <a:ext cx="646176" cy="310896"/>
-          </a:xfrm>
-          <a:prstGeom prst="rect">
-            <a:avLst/>
-          </a:prstGeom>
-          <a:noFill/>
-          <a:ln/>
-        </p:spPr>
-        <p:txBody>
-          <a:bodyPr wrap="square" lIns="0" tIns="0" rIns="0" bIns="0" rtlCol="0" anchor="ctr">
-            <a:normAutofit/>
-          </a:bodyPr>
-          <a:lstStyle/>
-          <a:p>
-            <a:pPr algn="ctr" indent="0" marL="0">
-              <a:buNone/>
-            </a:pPr>
-            <a:r>
-              <a:rPr lang="en-US" sz="1500" b="1" dirty="0">
-                <a:solidFill>
-                  <a:srgbClr val="FFFFFF"/>
-                </a:solidFill>
-                <a:latin typeface="Aptos" pitchFamily="34" charset="0"/>
-                <a:ea typeface="Aptos" pitchFamily="34" charset="-122"/>
-                <a:cs typeface="Aptos" pitchFamily="34" charset="-120"/>
-              </a:rPr>
-              <a:t>Do</a:t>
-            </a:r>
-            <a:endParaRPr lang="en-US" sz="1500" dirty="0"/>
-          </a:p>
-        </p:txBody>
-      </p:sp>
-      <p:sp>
-        <p:nvSpPr>
-          <p:cNvPr id="18" name="Shape 16"/>
-          <p:cNvSpPr/>
-          <p:nvPr/>
-        </p:nvSpPr>
-        <p:spPr>
-          <a:xfrm>
-            <a:off x="10024872" y="3319272"/>
-            <a:ext cx="792480" cy="749808"/>
-          </a:xfrm>
-          <a:prstGeom prst="roundRect">
-            <a:avLst>
-              <a:gd name="adj" fmla="val 14634"/>
-            </a:avLst>
-          </a:prstGeom>
-          <a:solidFill>
-            <a:srgbClr val="D69A2D"/>
-          </a:solidFill>
-          <a:ln w="12700">
-            <a:solidFill>
-              <a:srgbClr val="D69A2D"/>
-            </a:solidFill>
-            <a:prstDash val="solid"/>
-          </a:ln>
-        </p:spPr>
-      </p:sp>
-      <p:sp>
-        <p:nvSpPr>
-          <p:cNvPr id="19" name="Text 17"/>
-          <p:cNvSpPr/>
-          <p:nvPr/>
-        </p:nvSpPr>
-        <p:spPr>
-          <a:xfrm>
-            <a:off x="10098024" y="3511296"/>
-            <a:ext cx="646176" cy="310896"/>
-          </a:xfrm>
-          <a:prstGeom prst="rect">
-            <a:avLst/>
-          </a:prstGeom>
-          <a:noFill/>
-          <a:ln/>
-        </p:spPr>
-        <p:txBody>
-          <a:bodyPr wrap="square" lIns="0" tIns="0" rIns="0" bIns="0" rtlCol="0" anchor="ctr">
-            <a:normAutofit/>
-          </a:bodyPr>
-          <a:lstStyle/>
-          <a:p>
-            <a:pPr algn="ctr" indent="0" marL="0">
-              <a:buNone/>
-            </a:pPr>
-            <a:r>
-              <a:rPr lang="en-US" sz="1500" b="1" dirty="0">
-                <a:solidFill>
-                  <a:srgbClr val="FFFFFF"/>
-                </a:solidFill>
-                <a:latin typeface="Aptos" pitchFamily="34" charset="0"/>
-                <a:ea typeface="Aptos" pitchFamily="34" charset="-122"/>
-                <a:cs typeface="Aptos" pitchFamily="34" charset="-120"/>
-              </a:rPr>
-              <a:t>Review</a:t>
-            </a:r>
-            <a:endParaRPr lang="en-US" sz="1500" dirty="0"/>
-          </a:p>
-        </p:txBody>
-      </p:sp>
-      <p:sp>
-        <p:nvSpPr>
-          <p:cNvPr id="20" name="Shape 18"/>
-          <p:cNvSpPr/>
-          <p:nvPr/>
-        </p:nvSpPr>
-        <p:spPr>
-          <a:xfrm>
-            <a:off x="8293608" y="4389120"/>
-            <a:ext cx="2157984" cy="0"/>
-          </a:xfrm>
-          <a:prstGeom prst="line">
-            <a:avLst/>
-          </a:prstGeom>
-          <a:noFill/>
-          <a:ln w="25400">
-            <a:solidFill>
-              <a:srgbClr val="8ABBD8"/>
-            </a:solidFill>
-            <a:prstDash val="solid"/>
-          </a:ln>
-        </p:spPr>
-      </p:sp>
-      <p:sp>
-        <p:nvSpPr>
-          <p:cNvPr id="21" name="Text 19"/>
-          <p:cNvSpPr/>
-          <p:nvPr/>
-        </p:nvSpPr>
-        <p:spPr>
-          <a:xfrm>
-            <a:off x="7909560" y="3977640"/>
-            <a:ext cx="2926080" cy="182880"/>
-          </a:xfrm>
-          <a:prstGeom prst="rect">
-            <a:avLst/>
-          </a:prstGeom>
-          <a:noFill/>
-          <a:ln/>
-        </p:spPr>
-        <p:txBody>
-          <a:bodyPr wrap="square" lIns="0" tIns="0" rIns="0" bIns="0" rtlCol="0" anchor="ctr"/>
-          <a:lstStyle/>
-          <a:p>
-            <a:pPr algn="ctr" indent="0" marL="0">
-              <a:buNone/>
-            </a:pPr>
-            <a:r>
-              <a:rPr lang="en-US" sz="1000" dirty="0">
-                <a:solidFill>
-                  <a:srgbClr val="003A63"/>
-                </a:solidFill>
-                <a:latin typeface="Aptos" pitchFamily="34" charset="0"/>
-                <a:ea typeface="Aptos" pitchFamily="34" charset="-122"/>
-                <a:cs typeface="Aptos" pitchFamily="34" charset="-120"/>
-              </a:rPr>
-              <a:t>Dependencies visible</a:t>
-            </a:r>
-            <a:endParaRPr lang="en-US" sz="1000" dirty="0"/>
-          </a:p>
-        </p:txBody>
-      </p:sp>
-      <p:sp>
-        <p:nvSpPr>
-          <p:cNvPr id="22" name="Shape 20"/>
           <p:cNvSpPr/>
           <p:nvPr/>
         </p:nvSpPr>
@@ -12829,7 +11050,7 @@
       </p:sp>
       <p:sp>
         <p:nvSpPr>
-          <p:cNvPr id="23" name="Text 21"/>
+          <p:cNvPr id="17" name="Text 15"/>
           <p:cNvSpPr/>
           <p:nvPr/>
         </p:nvSpPr>
@@ -12868,7 +11089,7 @@
       </p:sp>
       <p:sp>
         <p:nvSpPr>
-          <p:cNvPr id="24" name="Text 22"/>
+          <p:cNvPr id="18" name="Text 16"/>
           <p:cNvSpPr/>
           <p:nvPr/>
         </p:nvSpPr>
@@ -13376,13 +11597,11 @@
             </a:avLst>
           </a:prstGeom>
           <a:solidFill>
-            <a:srgbClr val="FFFFFF">
-              <a:alpha val="88000"/>
-            </a:srgbClr>
+            <a:srgbClr val="FFFFFF"/>
           </a:solidFill>
           <a:ln w="12700">
             <a:solidFill>
-              <a:srgbClr val="D6E8F2"/>
+              <a:srgbClr val="B9D7E6"/>
             </a:solidFill>
             <a:prstDash val="solid"/>
           </a:ln>
@@ -13390,30 +11609,42 @@
       </p:sp>
       <p:sp>
         <p:nvSpPr>
-          <p:cNvPr id="14" name="Shape 12"/>
-          <p:cNvSpPr/>
-          <p:nvPr/>
-        </p:nvSpPr>
-        <p:spPr>
-          <a:xfrm>
-            <a:off x="7927848" y="3319272"/>
-            <a:ext cx="792480" cy="749808"/>
-          </a:xfrm>
-          <a:prstGeom prst="roundRect">
-            <a:avLst>
-              <a:gd name="adj" fmla="val 14634"/>
-            </a:avLst>
-          </a:prstGeom>
-          <a:solidFill>
-            <a:srgbClr val="0068B7"/>
-          </a:solidFill>
-          <a:ln w="12700">
-            <a:solidFill>
-              <a:srgbClr val="0068B7"/>
-            </a:solidFill>
-            <a:prstDash val="solid"/>
-          </a:ln>
-        </p:spPr>
+          <p:cNvPr id="14" name="Text 12"/>
+          <p:cNvSpPr/>
+          <p:nvPr/>
+        </p:nvSpPr>
+        <p:spPr>
+          <a:xfrm>
+            <a:off x="7799832" y="2935224"/>
+            <a:ext cx="3145536" cy="256032"/>
+          </a:xfrm>
+          <a:prstGeom prst="rect">
+            <a:avLst/>
+          </a:prstGeom>
+          <a:noFill/>
+          <a:ln/>
+        </p:spPr>
+        <p:txBody>
+          <a:bodyPr wrap="square" lIns="0" tIns="0" rIns="0" bIns="0" rtlCol="0" anchor="ctr"/>
+          <a:lstStyle/>
+          <a:p>
+            <a:pPr indent="0" marL="0">
+              <a:buNone/>
+            </a:pPr>
+            <a:r>
+              <a:rPr lang="en-US" sz="1300" b="1" dirty="0">
+                <a:solidFill>
+                  <a:srgbClr val="0068B7"/>
+                </a:solidFill>
+                <a:latin typeface="Aptos" pitchFamily="34" charset="0"/>
+                <a:ea typeface="Aptos" pitchFamily="34" charset="-122"/>
+                <a:cs typeface="Aptos" pitchFamily="34" charset="-120"/>
+              </a:rPr>
+              <a:t>Concept checkpoints</a:t>
+            </a:r>
+            <a:endParaRPr lang="en-US" sz="1300" dirty="0"/>
+          </a:p>
+        </p:txBody>
       </p:sp>
       <p:sp>
         <p:nvSpPr>
@@ -13423,240 +11654,53 @@
         </p:nvSpPr>
         <p:spPr>
           <a:xfrm>
-            <a:off x="8001000" y="3511296"/>
-            <a:ext cx="646176" cy="310896"/>
-          </a:xfrm>
-          <a:prstGeom prst="rect">
-            <a:avLst/>
-          </a:prstGeom>
-          <a:noFill/>
-          <a:ln/>
-        </p:spPr>
-        <p:txBody>
-          <a:bodyPr wrap="square" lIns="0" tIns="0" rIns="0" bIns="0" rtlCol="0" anchor="ctr">
+            <a:off x="7818120" y="3300984"/>
+            <a:ext cx="3090672" cy="877824"/>
+          </a:xfrm>
+          <a:prstGeom prst="rect">
+            <a:avLst/>
+          </a:prstGeom>
+          <a:noFill/>
+          <a:ln/>
+        </p:spPr>
+        <p:txBody>
+          <a:bodyPr wrap="square" lIns="254" tIns="254" rIns="254" bIns="254" rtlCol="0" anchor="t">
             <a:normAutofit/>
           </a:bodyPr>
           <a:lstStyle/>
           <a:p>
-            <a:pPr algn="ctr" indent="0" marL="0">
-              <a:buNone/>
-            </a:pPr>
-            <a:r>
-              <a:rPr lang="en-US" sz="1500" b="1" dirty="0">
-                <a:solidFill>
-                  <a:srgbClr val="FFFFFF"/>
-                </a:solidFill>
-                <a:latin typeface="Aptos" pitchFamily="34" charset="0"/>
-                <a:ea typeface="Aptos" pitchFamily="34" charset="-122"/>
-                <a:cs typeface="Aptos" pitchFamily="34" charset="-120"/>
-              </a:rPr>
-              <a:t>Plan</a:t>
-            </a:r>
-            <a:endParaRPr lang="en-US" sz="1500" dirty="0"/>
+            <a:r>
+              <a:rPr lang="en-US" sz="1380" dirty="0">
+                <a:solidFill>
+                  <a:srgbClr val="17364A"/>
+                </a:solidFill>
+                <a:latin typeface="Aptos" pitchFamily="34" charset="0"/>
+                <a:ea typeface="Aptos" pitchFamily="34" charset="-122"/>
+                <a:cs typeface="Aptos" pitchFamily="34" charset="-120"/>
+              </a:rPr>
+              <a:t>CDC Public Health Data Strategy and Data Modernization resources:.</a:t>
+            </a:r>
+            <a:endParaRPr lang="en-US" sz="1380" dirty="0"/>
+          </a:p>
+          <a:p>
+            <a:r>
+              <a:rPr lang="en-US" sz="1380" dirty="0">
+                <a:solidFill>
+                  <a:srgbClr val="17364A"/>
+                </a:solidFill>
+                <a:latin typeface="Aptos" pitchFamily="34" charset="0"/>
+                <a:ea typeface="Aptos" pitchFamily="34" charset="-122"/>
+                <a:cs typeface="Aptos" pitchFamily="34" charset="-120"/>
+              </a:rPr>
+              <a:t>OWASP Top 10 for LLM Applications, when security or AI integrations are relevant</a:t>
+            </a:r>
+            <a:endParaRPr lang="en-US" sz="1380" dirty="0"/>
           </a:p>
         </p:txBody>
       </p:sp>
       <p:sp>
         <p:nvSpPr>
           <p:cNvPr id="16" name="Shape 14"/>
-          <p:cNvSpPr/>
-          <p:nvPr/>
-        </p:nvSpPr>
-        <p:spPr>
-          <a:xfrm>
-            <a:off x="8976360" y="3319272"/>
-            <a:ext cx="792480" cy="749808"/>
-          </a:xfrm>
-          <a:prstGeom prst="roundRect">
-            <a:avLst>
-              <a:gd name="adj" fmla="val 14634"/>
-            </a:avLst>
-          </a:prstGeom>
-          <a:solidFill>
-            <a:srgbClr val="2F8A28"/>
-          </a:solidFill>
-          <a:ln w="12700">
-            <a:solidFill>
-              <a:srgbClr val="2F8A28"/>
-            </a:solidFill>
-            <a:prstDash val="solid"/>
-          </a:ln>
-        </p:spPr>
-      </p:sp>
-      <p:sp>
-        <p:nvSpPr>
-          <p:cNvPr id="17" name="Text 15"/>
-          <p:cNvSpPr/>
-          <p:nvPr/>
-        </p:nvSpPr>
-        <p:spPr>
-          <a:xfrm>
-            <a:off x="9049512" y="3511296"/>
-            <a:ext cx="646176" cy="310896"/>
-          </a:xfrm>
-          <a:prstGeom prst="rect">
-            <a:avLst/>
-          </a:prstGeom>
-          <a:noFill/>
-          <a:ln/>
-        </p:spPr>
-        <p:txBody>
-          <a:bodyPr wrap="square" lIns="0" tIns="0" rIns="0" bIns="0" rtlCol="0" anchor="ctr">
-            <a:normAutofit/>
-          </a:bodyPr>
-          <a:lstStyle/>
-          <a:p>
-            <a:pPr algn="ctr" indent="0" marL="0">
-              <a:buNone/>
-            </a:pPr>
-            <a:r>
-              <a:rPr lang="en-US" sz="1500" b="1" dirty="0">
-                <a:solidFill>
-                  <a:srgbClr val="FFFFFF"/>
-                </a:solidFill>
-                <a:latin typeface="Aptos" pitchFamily="34" charset="0"/>
-                <a:ea typeface="Aptos" pitchFamily="34" charset="-122"/>
-                <a:cs typeface="Aptos" pitchFamily="34" charset="-120"/>
-              </a:rPr>
-              <a:t>Do</a:t>
-            </a:r>
-            <a:endParaRPr lang="en-US" sz="1500" dirty="0"/>
-          </a:p>
-        </p:txBody>
-      </p:sp>
-      <p:sp>
-        <p:nvSpPr>
-          <p:cNvPr id="18" name="Shape 16"/>
-          <p:cNvSpPr/>
-          <p:nvPr/>
-        </p:nvSpPr>
-        <p:spPr>
-          <a:xfrm>
-            <a:off x="10024872" y="3319272"/>
-            <a:ext cx="792480" cy="749808"/>
-          </a:xfrm>
-          <a:prstGeom prst="roundRect">
-            <a:avLst>
-              <a:gd name="adj" fmla="val 14634"/>
-            </a:avLst>
-          </a:prstGeom>
-          <a:solidFill>
-            <a:srgbClr val="D69A2D"/>
-          </a:solidFill>
-          <a:ln w="12700">
-            <a:solidFill>
-              <a:srgbClr val="D69A2D"/>
-            </a:solidFill>
-            <a:prstDash val="solid"/>
-          </a:ln>
-        </p:spPr>
-      </p:sp>
-      <p:sp>
-        <p:nvSpPr>
-          <p:cNvPr id="19" name="Text 17"/>
-          <p:cNvSpPr/>
-          <p:nvPr/>
-        </p:nvSpPr>
-        <p:spPr>
-          <a:xfrm>
-            <a:off x="10098024" y="3511296"/>
-            <a:ext cx="646176" cy="310896"/>
-          </a:xfrm>
-          <a:prstGeom prst="rect">
-            <a:avLst/>
-          </a:prstGeom>
-          <a:noFill/>
-          <a:ln/>
-        </p:spPr>
-        <p:txBody>
-          <a:bodyPr wrap="square" lIns="0" tIns="0" rIns="0" bIns="0" rtlCol="0" anchor="ctr">
-            <a:normAutofit/>
-          </a:bodyPr>
-          <a:lstStyle/>
-          <a:p>
-            <a:pPr algn="ctr" indent="0" marL="0">
-              <a:buNone/>
-            </a:pPr>
-            <a:r>
-              <a:rPr lang="en-US" sz="1500" b="1" dirty="0">
-                <a:solidFill>
-                  <a:srgbClr val="FFFFFF"/>
-                </a:solidFill>
-                <a:latin typeface="Aptos" pitchFamily="34" charset="0"/>
-                <a:ea typeface="Aptos" pitchFamily="34" charset="-122"/>
-                <a:cs typeface="Aptos" pitchFamily="34" charset="-120"/>
-              </a:rPr>
-              <a:t>Review</a:t>
-            </a:r>
-            <a:endParaRPr lang="en-US" sz="1500" dirty="0"/>
-          </a:p>
-        </p:txBody>
-      </p:sp>
-      <p:sp>
-        <p:nvSpPr>
-          <p:cNvPr id="20" name="Shape 18"/>
-          <p:cNvSpPr/>
-          <p:nvPr/>
-        </p:nvSpPr>
-        <p:spPr>
-          <a:xfrm>
-            <a:off x="8293608" y="4389120"/>
-            <a:ext cx="2157984" cy="0"/>
-          </a:xfrm>
-          <a:prstGeom prst="line">
-            <a:avLst/>
-          </a:prstGeom>
-          <a:noFill/>
-          <a:ln w="25400">
-            <a:solidFill>
-              <a:srgbClr val="8ABBD8"/>
-            </a:solidFill>
-            <a:prstDash val="solid"/>
-          </a:ln>
-        </p:spPr>
-      </p:sp>
-      <p:sp>
-        <p:nvSpPr>
-          <p:cNvPr id="21" name="Text 19"/>
-          <p:cNvSpPr/>
-          <p:nvPr/>
-        </p:nvSpPr>
-        <p:spPr>
-          <a:xfrm>
-            <a:off x="7909560" y="3977640"/>
-            <a:ext cx="2926080" cy="182880"/>
-          </a:xfrm>
-          <a:prstGeom prst="rect">
-            <a:avLst/>
-          </a:prstGeom>
-          <a:noFill/>
-          <a:ln/>
-        </p:spPr>
-        <p:txBody>
-          <a:bodyPr wrap="square" lIns="0" tIns="0" rIns="0" bIns="0" rtlCol="0" anchor="ctr"/>
-          <a:lstStyle/>
-          <a:p>
-            <a:pPr algn="ctr" indent="0" marL="0">
-              <a:buNone/>
-            </a:pPr>
-            <a:r>
-              <a:rPr lang="en-US" sz="1000" dirty="0">
-                <a:solidFill>
-                  <a:srgbClr val="003A63"/>
-                </a:solidFill>
-                <a:latin typeface="Aptos" pitchFamily="34" charset="0"/>
-                <a:ea typeface="Aptos" pitchFamily="34" charset="-122"/>
-                <a:cs typeface="Aptos" pitchFamily="34" charset="-120"/>
-              </a:rPr>
-              <a:t>Dependencies visible</a:t>
-            </a:r>
-            <a:endParaRPr lang="en-US" sz="1000" dirty="0"/>
-          </a:p>
-        </p:txBody>
-      </p:sp>
-      <p:sp>
-        <p:nvSpPr>
-          <p:cNvPr id="22" name="Shape 20"/>
           <p:cNvSpPr/>
           <p:nvPr/>
         </p:nvSpPr>
@@ -13683,7 +11727,7 @@
       </p:sp>
       <p:sp>
         <p:nvSpPr>
-          <p:cNvPr id="23" name="Text 21"/>
+          <p:cNvPr id="17" name="Text 15"/>
           <p:cNvSpPr/>
           <p:nvPr/>
         </p:nvSpPr>
@@ -13722,7 +11766,7 @@
       </p:sp>
       <p:sp>
         <p:nvSpPr>
-          <p:cNvPr id="24" name="Text 22"/>
+          <p:cNvPr id="18" name="Text 16"/>
           <p:cNvSpPr/>
           <p:nvPr/>
         </p:nvSpPr>
@@ -14202,13 +12246,11 @@
             </a:avLst>
           </a:prstGeom>
           <a:solidFill>
-            <a:srgbClr val="FFFFFF">
-              <a:alpha val="88000"/>
-            </a:srgbClr>
+            <a:srgbClr val="FFFFFF"/>
           </a:solidFill>
           <a:ln w="12700">
             <a:solidFill>
-              <a:srgbClr val="D6E8F2"/>
+              <a:srgbClr val="B9D7E6"/>
             </a:solidFill>
             <a:prstDash val="solid"/>
           </a:ln>
@@ -14216,30 +12258,42 @@
       </p:sp>
       <p:sp>
         <p:nvSpPr>
-          <p:cNvPr id="14" name="Shape 12"/>
-          <p:cNvSpPr/>
-          <p:nvPr/>
-        </p:nvSpPr>
-        <p:spPr>
-          <a:xfrm>
-            <a:off x="7927848" y="3319272"/>
-            <a:ext cx="792480" cy="749808"/>
-          </a:xfrm>
-          <a:prstGeom prst="roundRect">
-            <a:avLst>
-              <a:gd name="adj" fmla="val 14634"/>
-            </a:avLst>
-          </a:prstGeom>
-          <a:solidFill>
-            <a:srgbClr val="0068B7"/>
-          </a:solidFill>
-          <a:ln w="12700">
-            <a:solidFill>
-              <a:srgbClr val="0068B7"/>
-            </a:solidFill>
-            <a:prstDash val="solid"/>
-          </a:ln>
-        </p:spPr>
+          <p:cNvPr id="14" name="Text 12"/>
+          <p:cNvSpPr/>
+          <p:nvPr/>
+        </p:nvSpPr>
+        <p:spPr>
+          <a:xfrm>
+            <a:off x="7799832" y="2935224"/>
+            <a:ext cx="3145536" cy="256032"/>
+          </a:xfrm>
+          <a:prstGeom prst="rect">
+            <a:avLst/>
+          </a:prstGeom>
+          <a:noFill/>
+          <a:ln/>
+        </p:spPr>
+        <p:txBody>
+          <a:bodyPr wrap="square" lIns="0" tIns="0" rIns="0" bIns="0" rtlCol="0" anchor="ctr"/>
+          <a:lstStyle/>
+          <a:p>
+            <a:pPr indent="0" marL="0">
+              <a:buNone/>
+            </a:pPr>
+            <a:r>
+              <a:rPr lang="en-US" sz="1300" b="1" dirty="0">
+                <a:solidFill>
+                  <a:srgbClr val="0068B7"/>
+                </a:solidFill>
+                <a:latin typeface="Aptos" pitchFamily="34" charset="0"/>
+                <a:ea typeface="Aptos" pitchFamily="34" charset="-122"/>
+                <a:cs typeface="Aptos" pitchFamily="34" charset="-120"/>
+              </a:rPr>
+              <a:t>Concept checkpoints</a:t>
+            </a:r>
+            <a:endParaRPr lang="en-US" sz="1300" dirty="0"/>
+          </a:p>
+        </p:txBody>
       </p:sp>
       <p:sp>
         <p:nvSpPr>
@@ -14249,240 +12303,39 @@
         </p:nvSpPr>
         <p:spPr>
           <a:xfrm>
-            <a:off x="8001000" y="3511296"/>
-            <a:ext cx="646176" cy="310896"/>
-          </a:xfrm>
-          <a:prstGeom prst="rect">
-            <a:avLst/>
-          </a:prstGeom>
-          <a:noFill/>
-          <a:ln/>
-        </p:spPr>
-        <p:txBody>
-          <a:bodyPr wrap="square" lIns="0" tIns="0" rIns="0" bIns="0" rtlCol="0" anchor="ctr">
+            <a:off x="7818120" y="3300984"/>
+            <a:ext cx="3090672" cy="877824"/>
+          </a:xfrm>
+          <a:prstGeom prst="rect">
+            <a:avLst/>
+          </a:prstGeom>
+          <a:noFill/>
+          <a:ln/>
+        </p:spPr>
+        <p:txBody>
+          <a:bodyPr wrap="square" lIns="254" tIns="254" rIns="254" bIns="254" rtlCol="0" anchor="t">
             <a:normAutofit/>
           </a:bodyPr>
           <a:lstStyle/>
           <a:p>
-            <a:pPr algn="ctr" indent="0" marL="0">
-              <a:buNone/>
-            </a:pPr>
-            <a:r>
-              <a:rPr lang="en-US" sz="1500" b="1" dirty="0">
-                <a:solidFill>
-                  <a:srgbClr val="FFFFFF"/>
-                </a:solidFill>
-                <a:latin typeface="Aptos" pitchFamily="34" charset="0"/>
-                <a:ea typeface="Aptos" pitchFamily="34" charset="-122"/>
-                <a:cs typeface="Aptos" pitchFamily="34" charset="-120"/>
-              </a:rPr>
-              <a:t>Plan</a:t>
-            </a:r>
-            <a:endParaRPr lang="en-US" sz="1500" dirty="0"/>
+            <a:r>
+              <a:rPr lang="en-US" sz="1380" dirty="0">
+                <a:solidFill>
+                  <a:srgbClr val="17364A"/>
+                </a:solidFill>
+                <a:latin typeface="Aptos" pitchFamily="34" charset="0"/>
+                <a:ea typeface="Aptos" pitchFamily="34" charset="-122"/>
+                <a:cs typeface="Aptos" pitchFamily="34" charset="-120"/>
+              </a:rPr>
+              <a:t>Agency privacy, cybersecurity, data governance, procurement, and records management policies</a:t>
+            </a:r>
+            <a:endParaRPr lang="en-US" sz="1380" dirty="0"/>
           </a:p>
         </p:txBody>
       </p:sp>
       <p:sp>
         <p:nvSpPr>
           <p:cNvPr id="16" name="Shape 14"/>
-          <p:cNvSpPr/>
-          <p:nvPr/>
-        </p:nvSpPr>
-        <p:spPr>
-          <a:xfrm>
-            <a:off x="8976360" y="3319272"/>
-            <a:ext cx="792480" cy="749808"/>
-          </a:xfrm>
-          <a:prstGeom prst="roundRect">
-            <a:avLst>
-              <a:gd name="adj" fmla="val 14634"/>
-            </a:avLst>
-          </a:prstGeom>
-          <a:solidFill>
-            <a:srgbClr val="2F8A28"/>
-          </a:solidFill>
-          <a:ln w="12700">
-            <a:solidFill>
-              <a:srgbClr val="2F8A28"/>
-            </a:solidFill>
-            <a:prstDash val="solid"/>
-          </a:ln>
-        </p:spPr>
-      </p:sp>
-      <p:sp>
-        <p:nvSpPr>
-          <p:cNvPr id="17" name="Text 15"/>
-          <p:cNvSpPr/>
-          <p:nvPr/>
-        </p:nvSpPr>
-        <p:spPr>
-          <a:xfrm>
-            <a:off x="9049512" y="3511296"/>
-            <a:ext cx="646176" cy="310896"/>
-          </a:xfrm>
-          <a:prstGeom prst="rect">
-            <a:avLst/>
-          </a:prstGeom>
-          <a:noFill/>
-          <a:ln/>
-        </p:spPr>
-        <p:txBody>
-          <a:bodyPr wrap="square" lIns="0" tIns="0" rIns="0" bIns="0" rtlCol="0" anchor="ctr">
-            <a:normAutofit/>
-          </a:bodyPr>
-          <a:lstStyle/>
-          <a:p>
-            <a:pPr algn="ctr" indent="0" marL="0">
-              <a:buNone/>
-            </a:pPr>
-            <a:r>
-              <a:rPr lang="en-US" sz="1500" b="1" dirty="0">
-                <a:solidFill>
-                  <a:srgbClr val="FFFFFF"/>
-                </a:solidFill>
-                <a:latin typeface="Aptos" pitchFamily="34" charset="0"/>
-                <a:ea typeface="Aptos" pitchFamily="34" charset="-122"/>
-                <a:cs typeface="Aptos" pitchFamily="34" charset="-120"/>
-              </a:rPr>
-              <a:t>Do</a:t>
-            </a:r>
-            <a:endParaRPr lang="en-US" sz="1500" dirty="0"/>
-          </a:p>
-        </p:txBody>
-      </p:sp>
-      <p:sp>
-        <p:nvSpPr>
-          <p:cNvPr id="18" name="Shape 16"/>
-          <p:cNvSpPr/>
-          <p:nvPr/>
-        </p:nvSpPr>
-        <p:spPr>
-          <a:xfrm>
-            <a:off x="10024872" y="3319272"/>
-            <a:ext cx="792480" cy="749808"/>
-          </a:xfrm>
-          <a:prstGeom prst="roundRect">
-            <a:avLst>
-              <a:gd name="adj" fmla="val 14634"/>
-            </a:avLst>
-          </a:prstGeom>
-          <a:solidFill>
-            <a:srgbClr val="D69A2D"/>
-          </a:solidFill>
-          <a:ln w="12700">
-            <a:solidFill>
-              <a:srgbClr val="D69A2D"/>
-            </a:solidFill>
-            <a:prstDash val="solid"/>
-          </a:ln>
-        </p:spPr>
-      </p:sp>
-      <p:sp>
-        <p:nvSpPr>
-          <p:cNvPr id="19" name="Text 17"/>
-          <p:cNvSpPr/>
-          <p:nvPr/>
-        </p:nvSpPr>
-        <p:spPr>
-          <a:xfrm>
-            <a:off x="10098024" y="3511296"/>
-            <a:ext cx="646176" cy="310896"/>
-          </a:xfrm>
-          <a:prstGeom prst="rect">
-            <a:avLst/>
-          </a:prstGeom>
-          <a:noFill/>
-          <a:ln/>
-        </p:spPr>
-        <p:txBody>
-          <a:bodyPr wrap="square" lIns="0" tIns="0" rIns="0" bIns="0" rtlCol="0" anchor="ctr">
-            <a:normAutofit/>
-          </a:bodyPr>
-          <a:lstStyle/>
-          <a:p>
-            <a:pPr algn="ctr" indent="0" marL="0">
-              <a:buNone/>
-            </a:pPr>
-            <a:r>
-              <a:rPr lang="en-US" sz="1500" b="1" dirty="0">
-                <a:solidFill>
-                  <a:srgbClr val="FFFFFF"/>
-                </a:solidFill>
-                <a:latin typeface="Aptos" pitchFamily="34" charset="0"/>
-                <a:ea typeface="Aptos" pitchFamily="34" charset="-122"/>
-                <a:cs typeface="Aptos" pitchFamily="34" charset="-120"/>
-              </a:rPr>
-              <a:t>Review</a:t>
-            </a:r>
-            <a:endParaRPr lang="en-US" sz="1500" dirty="0"/>
-          </a:p>
-        </p:txBody>
-      </p:sp>
-      <p:sp>
-        <p:nvSpPr>
-          <p:cNvPr id="20" name="Shape 18"/>
-          <p:cNvSpPr/>
-          <p:nvPr/>
-        </p:nvSpPr>
-        <p:spPr>
-          <a:xfrm>
-            <a:off x="8293608" y="4389120"/>
-            <a:ext cx="2157984" cy="0"/>
-          </a:xfrm>
-          <a:prstGeom prst="line">
-            <a:avLst/>
-          </a:prstGeom>
-          <a:noFill/>
-          <a:ln w="25400">
-            <a:solidFill>
-              <a:srgbClr val="8ABBD8"/>
-            </a:solidFill>
-            <a:prstDash val="solid"/>
-          </a:ln>
-        </p:spPr>
-      </p:sp>
-      <p:sp>
-        <p:nvSpPr>
-          <p:cNvPr id="21" name="Text 19"/>
-          <p:cNvSpPr/>
-          <p:nvPr/>
-        </p:nvSpPr>
-        <p:spPr>
-          <a:xfrm>
-            <a:off x="7909560" y="3977640"/>
-            <a:ext cx="2926080" cy="182880"/>
-          </a:xfrm>
-          <a:prstGeom prst="rect">
-            <a:avLst/>
-          </a:prstGeom>
-          <a:noFill/>
-          <a:ln/>
-        </p:spPr>
-        <p:txBody>
-          <a:bodyPr wrap="square" lIns="0" tIns="0" rIns="0" bIns="0" rtlCol="0" anchor="ctr"/>
-          <a:lstStyle/>
-          <a:p>
-            <a:pPr algn="ctr" indent="0" marL="0">
-              <a:buNone/>
-            </a:pPr>
-            <a:r>
-              <a:rPr lang="en-US" sz="1000" dirty="0">
-                <a:solidFill>
-                  <a:srgbClr val="003A63"/>
-                </a:solidFill>
-                <a:latin typeface="Aptos" pitchFamily="34" charset="0"/>
-                <a:ea typeface="Aptos" pitchFamily="34" charset="-122"/>
-                <a:cs typeface="Aptos" pitchFamily="34" charset="-120"/>
-              </a:rPr>
-              <a:t>Dependencies visible</a:t>
-            </a:r>
-            <a:endParaRPr lang="en-US" sz="1000" dirty="0"/>
-          </a:p>
-        </p:txBody>
-      </p:sp>
-      <p:sp>
-        <p:nvSpPr>
-          <p:cNvPr id="22" name="Shape 20"/>
           <p:cNvSpPr/>
           <p:nvPr/>
         </p:nvSpPr>
@@ -14509,7 +12362,7 @@
       </p:sp>
       <p:sp>
         <p:nvSpPr>
-          <p:cNvPr id="23" name="Text 21"/>
+          <p:cNvPr id="17" name="Text 15"/>
           <p:cNvSpPr/>
           <p:nvPr/>
         </p:nvSpPr>
@@ -14548,7 +12401,7 @@
       </p:sp>
       <p:sp>
         <p:nvSpPr>
-          <p:cNvPr id="24" name="Text 22"/>
+          <p:cNvPr id="18" name="Text 16"/>
           <p:cNvSpPr/>
           <p:nvPr/>
         </p:nvSpPr>
@@ -15061,20 +12914,20 @@
         </p:nvSpPr>
         <p:spPr>
           <a:xfrm>
-            <a:off x="7818120" y="3977640"/>
-            <a:ext cx="972312" cy="749808"/>
+            <a:off x="8046720" y="3794760"/>
+            <a:ext cx="3063240" cy="1600200"/>
           </a:xfrm>
           <a:prstGeom prst="roundRect">
             <a:avLst>
-              <a:gd name="adj" fmla="val 14634"/>
+              <a:gd name="adj" fmla="val 6857"/>
             </a:avLst>
           </a:prstGeom>
           <a:solidFill>
-            <a:srgbClr val="0068B7"/>
+            <a:srgbClr val="FFFFFF"/>
           </a:solidFill>
           <a:ln w="12700">
             <a:solidFill>
-              <a:srgbClr val="0068B7"/>
+              <a:srgbClr val="B9D7E6"/>
             </a:solidFill>
             <a:prstDash val="solid"/>
           </a:ln>
@@ -15088,172 +12941,100 @@
         </p:nvSpPr>
         <p:spPr>
           <a:xfrm>
-            <a:off x="7891272" y="4169664"/>
-            <a:ext cx="826008" cy="310896"/>
-          </a:xfrm>
-          <a:prstGeom prst="rect">
-            <a:avLst/>
-          </a:prstGeom>
-          <a:noFill/>
-          <a:ln/>
-        </p:spPr>
-        <p:txBody>
-          <a:bodyPr wrap="square" lIns="0" tIns="0" rIns="0" bIns="0" rtlCol="0" anchor="ctr">
+            <a:off x="8211312" y="3941064"/>
+            <a:ext cx="2734056" cy="256032"/>
+          </a:xfrm>
+          <a:prstGeom prst="rect">
+            <a:avLst/>
+          </a:prstGeom>
+          <a:noFill/>
+          <a:ln/>
+        </p:spPr>
+        <p:txBody>
+          <a:bodyPr wrap="square" lIns="0" tIns="0" rIns="0" bIns="0" rtlCol="0" anchor="ctr"/>
+          <a:lstStyle/>
+          <a:p>
+            <a:pPr indent="0" marL="0">
+              <a:buNone/>
+            </a:pPr>
+            <a:r>
+              <a:rPr lang="en-US" sz="1300" b="1" dirty="0">
+                <a:solidFill>
+                  <a:srgbClr val="0068B7"/>
+                </a:solidFill>
+                <a:latin typeface="Aptos" pitchFamily="34" charset="0"/>
+                <a:ea typeface="Aptos" pitchFamily="34" charset="-122"/>
+                <a:cs typeface="Aptos" pitchFamily="34" charset="-120"/>
+              </a:rPr>
+              <a:t>Use the play links to</a:t>
+            </a:r>
+            <a:endParaRPr lang="en-US" sz="1300" dirty="0"/>
+          </a:p>
+        </p:txBody>
+      </p:sp>
+      <p:sp>
+        <p:nvSpPr>
+          <p:cNvPr id="15" name="Text 13"/>
+          <p:cNvSpPr/>
+          <p:nvPr/>
+        </p:nvSpPr>
+        <p:spPr>
+          <a:xfrm>
+            <a:off x="8229600" y="4306824"/>
+            <a:ext cx="2679192" cy="941832"/>
+          </a:xfrm>
+          <a:prstGeom prst="rect">
+            <a:avLst/>
+          </a:prstGeom>
+          <a:noFill/>
+          <a:ln/>
+        </p:spPr>
+        <p:txBody>
+          <a:bodyPr wrap="square" lIns="254" tIns="254" rIns="254" bIns="254" rtlCol="0" anchor="t">
             <a:normAutofit/>
           </a:bodyPr>
           <a:lstStyle/>
           <a:p>
-            <a:pPr algn="ctr" indent="0" marL="0">
-              <a:buNone/>
-            </a:pPr>
-            <a:r>
-              <a:rPr lang="en-US" sz="1500" b="1" dirty="0">
-                <a:solidFill>
-                  <a:srgbClr val="FFFFFF"/>
-                </a:solidFill>
-                <a:latin typeface="Aptos" pitchFamily="34" charset="0"/>
-                <a:ea typeface="Aptos" pitchFamily="34" charset="-122"/>
-                <a:cs typeface="Aptos" pitchFamily="34" charset="-120"/>
-              </a:rPr>
-              <a:t>Lesson</a:t>
-            </a:r>
-            <a:endParaRPr lang="en-US" sz="1500" dirty="0"/>
-          </a:p>
-        </p:txBody>
-      </p:sp>
-      <p:sp>
-        <p:nvSpPr>
-          <p:cNvPr id="15" name="Shape 13"/>
-          <p:cNvSpPr/>
-          <p:nvPr/>
-        </p:nvSpPr>
-        <p:spPr>
-          <a:xfrm>
-            <a:off x="9046464" y="3977640"/>
-            <a:ext cx="972312" cy="749808"/>
-          </a:xfrm>
-          <a:prstGeom prst="roundRect">
-            <a:avLst>
-              <a:gd name="adj" fmla="val 14634"/>
-            </a:avLst>
-          </a:prstGeom>
-          <a:solidFill>
-            <a:srgbClr val="2F8A28"/>
-          </a:solidFill>
-          <a:ln w="12700">
-            <a:solidFill>
-              <a:srgbClr val="2F8A28"/>
-            </a:solidFill>
-            <a:prstDash val="solid"/>
-          </a:ln>
-        </p:spPr>
-      </p:sp>
-      <p:sp>
-        <p:nvSpPr>
-          <p:cNvPr id="16" name="Text 14"/>
-          <p:cNvSpPr/>
-          <p:nvPr/>
-        </p:nvSpPr>
-        <p:spPr>
-          <a:xfrm>
-            <a:off x="9119616" y="4169664"/>
-            <a:ext cx="826008" cy="310896"/>
-          </a:xfrm>
-          <a:prstGeom prst="rect">
-            <a:avLst/>
-          </a:prstGeom>
-          <a:noFill/>
-          <a:ln/>
-        </p:spPr>
-        <p:txBody>
-          <a:bodyPr wrap="square" lIns="0" tIns="0" rIns="0" bIns="0" rtlCol="0" anchor="ctr">
-            <a:normAutofit/>
-          </a:bodyPr>
-          <a:lstStyle/>
-          <a:p>
-            <a:pPr algn="ctr" indent="0" marL="0">
-              <a:buNone/>
-            </a:pPr>
-            <a:r>
-              <a:rPr lang="en-US" sz="1500" b="1" dirty="0">
-                <a:solidFill>
-                  <a:srgbClr val="FFFFFF"/>
-                </a:solidFill>
-                <a:latin typeface="Aptos" pitchFamily="34" charset="0"/>
-                <a:ea typeface="Aptos" pitchFamily="34" charset="-122"/>
-                <a:cs typeface="Aptos" pitchFamily="34" charset="-120"/>
-              </a:rPr>
-              <a:t>Plays</a:t>
-            </a:r>
-            <a:endParaRPr lang="en-US" sz="1500" dirty="0"/>
-          </a:p>
-        </p:txBody>
-      </p:sp>
-      <p:sp>
-        <p:nvSpPr>
-          <p:cNvPr id="17" name="Shape 15"/>
-          <p:cNvSpPr/>
-          <p:nvPr/>
-        </p:nvSpPr>
-        <p:spPr>
-          <a:xfrm>
-            <a:off x="10274808" y="3977640"/>
-            <a:ext cx="972312" cy="749808"/>
-          </a:xfrm>
-          <a:prstGeom prst="roundRect">
-            <a:avLst>
-              <a:gd name="adj" fmla="val 14634"/>
-            </a:avLst>
-          </a:prstGeom>
-          <a:solidFill>
-            <a:srgbClr val="6A4CA3"/>
-          </a:solidFill>
-          <a:ln w="12700">
-            <a:solidFill>
-              <a:srgbClr val="6A4CA3"/>
-            </a:solidFill>
-            <a:prstDash val="solid"/>
-          </a:ln>
-        </p:spPr>
-      </p:sp>
-      <p:sp>
-        <p:nvSpPr>
-          <p:cNvPr id="18" name="Text 16"/>
-          <p:cNvSpPr/>
-          <p:nvPr/>
-        </p:nvSpPr>
-        <p:spPr>
-          <a:xfrm>
-            <a:off x="10347960" y="4169664"/>
-            <a:ext cx="826008" cy="310896"/>
-          </a:xfrm>
-          <a:prstGeom prst="rect">
-            <a:avLst/>
-          </a:prstGeom>
-          <a:noFill/>
-          <a:ln/>
-        </p:spPr>
-        <p:txBody>
-          <a:bodyPr wrap="square" lIns="0" tIns="0" rIns="0" bIns="0" rtlCol="0" anchor="ctr">
-            <a:normAutofit/>
-          </a:bodyPr>
-          <a:lstStyle/>
-          <a:p>
-            <a:pPr algn="ctr" indent="0" marL="0">
-              <a:buNone/>
-            </a:pPr>
-            <a:r>
-              <a:rPr lang="en-US" sz="1500" b="1" dirty="0">
-                <a:solidFill>
-                  <a:srgbClr val="FFFFFF"/>
-                </a:solidFill>
-                <a:latin typeface="Aptos" pitchFamily="34" charset="0"/>
-                <a:ea typeface="Aptos" pitchFamily="34" charset="-122"/>
-                <a:cs typeface="Aptos" pitchFamily="34" charset="-120"/>
-              </a:rPr>
-              <a:t>Action</a:t>
-            </a:r>
-            <a:endParaRPr lang="en-US" sz="1500" dirty="0"/>
+            <a:r>
+              <a:rPr lang="en-US" sz="1380" dirty="0">
+                <a:solidFill>
+                  <a:srgbClr val="17364A"/>
+                </a:solidFill>
+                <a:latin typeface="Aptos" pitchFamily="34" charset="0"/>
+                <a:ea typeface="Aptos" pitchFamily="34" charset="-122"/>
+                <a:cs typeface="Aptos" pitchFamily="34" charset="-120"/>
+              </a:rPr>
+              <a:t>Locate the decision point in the playbook sequence.</a:t>
+            </a:r>
+            <a:endParaRPr lang="en-US" sz="1380" dirty="0"/>
+          </a:p>
+          <a:p>
+            <a:r>
+              <a:rPr lang="en-US" sz="1380" dirty="0">
+                <a:solidFill>
+                  <a:srgbClr val="17364A"/>
+                </a:solidFill>
+                <a:latin typeface="Aptos" pitchFamily="34" charset="0"/>
+                <a:ea typeface="Aptos" pitchFamily="34" charset="-122"/>
+                <a:cs typeface="Aptos" pitchFamily="34" charset="-120"/>
+              </a:rPr>
+              <a:t>Identify who should participate in the work.</a:t>
+            </a:r>
+            <a:endParaRPr lang="en-US" sz="1380" dirty="0"/>
+          </a:p>
+          <a:p>
+            <a:r>
+              <a:rPr lang="en-US" sz="1380" dirty="0">
+                <a:solidFill>
+                  <a:srgbClr val="17364A"/>
+                </a:solidFill>
+                <a:latin typeface="Aptos" pitchFamily="34" charset="0"/>
+                <a:ea typeface="Aptos" pitchFamily="34" charset="-122"/>
+                <a:cs typeface="Aptos" pitchFamily="34" charset="-120"/>
+              </a:rPr>
+              <a:t>Document the review, approval, or implementation step.</a:t>
+            </a:r>
+            <a:endParaRPr lang="en-US" sz="1380" dirty="0"/>
           </a:p>
         </p:txBody>
       </p:sp>
@@ -15731,20 +13512,20 @@
         </p:nvSpPr>
         <p:spPr>
           <a:xfrm>
-            <a:off x="7818120" y="3977640"/>
-            <a:ext cx="972312" cy="749808"/>
+            <a:off x="8046720" y="3794760"/>
+            <a:ext cx="3063240" cy="1600200"/>
           </a:xfrm>
           <a:prstGeom prst="roundRect">
             <a:avLst>
-              <a:gd name="adj" fmla="val 14634"/>
+              <a:gd name="adj" fmla="val 6857"/>
             </a:avLst>
           </a:prstGeom>
           <a:solidFill>
-            <a:srgbClr val="0068B7"/>
+            <a:srgbClr val="FFFFFF"/>
           </a:solidFill>
           <a:ln w="12700">
             <a:solidFill>
-              <a:srgbClr val="0068B7"/>
+              <a:srgbClr val="B9D7E6"/>
             </a:solidFill>
             <a:prstDash val="solid"/>
           </a:ln>
@@ -15758,172 +13539,100 @@
         </p:nvSpPr>
         <p:spPr>
           <a:xfrm>
-            <a:off x="7891272" y="4169664"/>
-            <a:ext cx="826008" cy="310896"/>
-          </a:xfrm>
-          <a:prstGeom prst="rect">
-            <a:avLst/>
-          </a:prstGeom>
-          <a:noFill/>
-          <a:ln/>
-        </p:spPr>
-        <p:txBody>
-          <a:bodyPr wrap="square" lIns="0" tIns="0" rIns="0" bIns="0" rtlCol="0" anchor="ctr">
+            <a:off x="8211312" y="3941064"/>
+            <a:ext cx="2734056" cy="256032"/>
+          </a:xfrm>
+          <a:prstGeom prst="rect">
+            <a:avLst/>
+          </a:prstGeom>
+          <a:noFill/>
+          <a:ln/>
+        </p:spPr>
+        <p:txBody>
+          <a:bodyPr wrap="square" lIns="0" tIns="0" rIns="0" bIns="0" rtlCol="0" anchor="ctr"/>
+          <a:lstStyle/>
+          <a:p>
+            <a:pPr indent="0" marL="0">
+              <a:buNone/>
+            </a:pPr>
+            <a:r>
+              <a:rPr lang="en-US" sz="1300" b="1" dirty="0">
+                <a:solidFill>
+                  <a:srgbClr val="0068B7"/>
+                </a:solidFill>
+                <a:latin typeface="Aptos" pitchFamily="34" charset="0"/>
+                <a:ea typeface="Aptos" pitchFamily="34" charset="-122"/>
+                <a:cs typeface="Aptos" pitchFamily="34" charset="-120"/>
+              </a:rPr>
+              <a:t>Tool selection cues</a:t>
+            </a:r>
+            <a:endParaRPr lang="en-US" sz="1300" dirty="0"/>
+          </a:p>
+        </p:txBody>
+      </p:sp>
+      <p:sp>
+        <p:nvSpPr>
+          <p:cNvPr id="15" name="Text 13"/>
+          <p:cNvSpPr/>
+          <p:nvPr/>
+        </p:nvSpPr>
+        <p:spPr>
+          <a:xfrm>
+            <a:off x="8229600" y="4306824"/>
+            <a:ext cx="2679192" cy="941832"/>
+          </a:xfrm>
+          <a:prstGeom prst="rect">
+            <a:avLst/>
+          </a:prstGeom>
+          <a:noFill/>
+          <a:ln/>
+        </p:spPr>
+        <p:txBody>
+          <a:bodyPr wrap="square" lIns="254" tIns="254" rIns="254" bIns="254" rtlCol="0" anchor="t">
             <a:normAutofit/>
           </a:bodyPr>
           <a:lstStyle/>
           <a:p>
-            <a:pPr algn="ctr" indent="0" marL="0">
-              <a:buNone/>
-            </a:pPr>
-            <a:r>
-              <a:rPr lang="en-US" sz="1500" b="1" dirty="0">
-                <a:solidFill>
-                  <a:srgbClr val="FFFFFF"/>
-                </a:solidFill>
-                <a:latin typeface="Aptos" pitchFamily="34" charset="0"/>
-                <a:ea typeface="Aptos" pitchFamily="34" charset="-122"/>
-                <a:cs typeface="Aptos" pitchFamily="34" charset="-120"/>
-              </a:rPr>
-              <a:t>Concept</a:t>
-            </a:r>
-            <a:endParaRPr lang="en-US" sz="1500" dirty="0"/>
-          </a:p>
-        </p:txBody>
-      </p:sp>
-      <p:sp>
-        <p:nvSpPr>
-          <p:cNvPr id="15" name="Shape 13"/>
-          <p:cNvSpPr/>
-          <p:nvPr/>
-        </p:nvSpPr>
-        <p:spPr>
-          <a:xfrm>
-            <a:off x="9046464" y="3977640"/>
-            <a:ext cx="972312" cy="749808"/>
-          </a:xfrm>
-          <a:prstGeom prst="roundRect">
-            <a:avLst>
-              <a:gd name="adj" fmla="val 14634"/>
-            </a:avLst>
-          </a:prstGeom>
-          <a:solidFill>
-            <a:srgbClr val="2F8A28"/>
-          </a:solidFill>
-          <a:ln w="12700">
-            <a:solidFill>
-              <a:srgbClr val="2F8A28"/>
-            </a:solidFill>
-            <a:prstDash val="solid"/>
-          </a:ln>
-        </p:spPr>
-      </p:sp>
-      <p:sp>
-        <p:nvSpPr>
-          <p:cNvPr id="16" name="Text 14"/>
-          <p:cNvSpPr/>
-          <p:nvPr/>
-        </p:nvSpPr>
-        <p:spPr>
-          <a:xfrm>
-            <a:off x="9119616" y="4169664"/>
-            <a:ext cx="826008" cy="310896"/>
-          </a:xfrm>
-          <a:prstGeom prst="rect">
-            <a:avLst/>
-          </a:prstGeom>
-          <a:noFill/>
-          <a:ln/>
-        </p:spPr>
-        <p:txBody>
-          <a:bodyPr wrap="square" lIns="0" tIns="0" rIns="0" bIns="0" rtlCol="0" anchor="ctr">
-            <a:normAutofit/>
-          </a:bodyPr>
-          <a:lstStyle/>
-          <a:p>
-            <a:pPr algn="ctr" indent="0" marL="0">
-              <a:buNone/>
-            </a:pPr>
-            <a:r>
-              <a:rPr lang="en-US" sz="1500" b="1" dirty="0">
-                <a:solidFill>
-                  <a:srgbClr val="FFFFFF"/>
-                </a:solidFill>
-                <a:latin typeface="Aptos" pitchFamily="34" charset="0"/>
-                <a:ea typeface="Aptos" pitchFamily="34" charset="-122"/>
-                <a:cs typeface="Aptos" pitchFamily="34" charset="-120"/>
-              </a:rPr>
-              <a:t>Tool</a:t>
-            </a:r>
-            <a:endParaRPr lang="en-US" sz="1500" dirty="0"/>
-          </a:p>
-        </p:txBody>
-      </p:sp>
-      <p:sp>
-        <p:nvSpPr>
-          <p:cNvPr id="17" name="Shape 15"/>
-          <p:cNvSpPr/>
-          <p:nvPr/>
-        </p:nvSpPr>
-        <p:spPr>
-          <a:xfrm>
-            <a:off x="10274808" y="3977640"/>
-            <a:ext cx="972312" cy="749808"/>
-          </a:xfrm>
-          <a:prstGeom prst="roundRect">
-            <a:avLst>
-              <a:gd name="adj" fmla="val 14634"/>
-            </a:avLst>
-          </a:prstGeom>
-          <a:solidFill>
-            <a:srgbClr val="D69A2D"/>
-          </a:solidFill>
-          <a:ln w="12700">
-            <a:solidFill>
-              <a:srgbClr val="D69A2D"/>
-            </a:solidFill>
-            <a:prstDash val="solid"/>
-          </a:ln>
-        </p:spPr>
-      </p:sp>
-      <p:sp>
-        <p:nvSpPr>
-          <p:cNvPr id="18" name="Text 16"/>
-          <p:cNvSpPr/>
-          <p:nvPr/>
-        </p:nvSpPr>
-        <p:spPr>
-          <a:xfrm>
-            <a:off x="10347960" y="4169664"/>
-            <a:ext cx="826008" cy="310896"/>
-          </a:xfrm>
-          <a:prstGeom prst="rect">
-            <a:avLst/>
-          </a:prstGeom>
-          <a:noFill/>
-          <a:ln/>
-        </p:spPr>
-        <p:txBody>
-          <a:bodyPr wrap="square" lIns="0" tIns="0" rIns="0" bIns="0" rtlCol="0" anchor="ctr">
-            <a:normAutofit/>
-          </a:bodyPr>
-          <a:lstStyle/>
-          <a:p>
-            <a:pPr algn="ctr" indent="0" marL="0">
-              <a:buNone/>
-            </a:pPr>
-            <a:r>
-              <a:rPr lang="en-US" sz="1500" b="1" dirty="0">
-                <a:solidFill>
-                  <a:srgbClr val="FFFFFF"/>
-                </a:solidFill>
-                <a:latin typeface="Aptos" pitchFamily="34" charset="0"/>
-                <a:ea typeface="Aptos" pitchFamily="34" charset="-122"/>
-                <a:cs typeface="Aptos" pitchFamily="34" charset="-120"/>
-              </a:rPr>
-              <a:t>Artifact</a:t>
-            </a:r>
-            <a:endParaRPr lang="en-US" sz="1500" dirty="0"/>
+            <a:r>
+              <a:rPr lang="en-US" sz="1380" dirty="0">
+                <a:solidFill>
+                  <a:srgbClr val="17364A"/>
+                </a:solidFill>
+                <a:latin typeface="Aptos" pitchFamily="34" charset="0"/>
+                <a:ea typeface="Aptos" pitchFamily="34" charset="-122"/>
+                <a:cs typeface="Aptos" pitchFamily="34" charset="-120"/>
+              </a:rPr>
+              <a:t>Use a tool when no comparable local process exists.</a:t>
+            </a:r>
+            <a:endParaRPr lang="en-US" sz="1380" dirty="0"/>
+          </a:p>
+          <a:p>
+            <a:r>
+              <a:rPr lang="en-US" sz="1380" dirty="0">
+                <a:solidFill>
+                  <a:srgbClr val="17364A"/>
+                </a:solidFill>
+                <a:latin typeface="Aptos" pitchFamily="34" charset="0"/>
+                <a:ea typeface="Aptos" pitchFamily="34" charset="-122"/>
+                <a:cs typeface="Aptos" pitchFamily="34" charset="-120"/>
+              </a:rPr>
+              <a:t>Adapt existing department templates when they already fit the purpose.</a:t>
+            </a:r>
+            <a:endParaRPr lang="en-US" sz="1380" dirty="0"/>
+          </a:p>
+          <a:p>
+            <a:r>
+              <a:rPr lang="en-US" sz="1380" dirty="0">
+                <a:solidFill>
+                  <a:srgbClr val="17364A"/>
+                </a:solidFill>
+                <a:latin typeface="Aptos" pitchFamily="34" charset="0"/>
+                <a:ea typeface="Aptos" pitchFamily="34" charset="-122"/>
+                <a:cs typeface="Aptos" pitchFamily="34" charset="-120"/>
+              </a:rPr>
+              <a:t>Save the completed artifact as evidence of the decision.</a:t>
+            </a:r>
+            <a:endParaRPr lang="en-US" sz="1380" dirty="0"/>
           </a:p>
         </p:txBody>
       </p:sp>
@@ -16396,13 +14105,11 @@
             </a:avLst>
           </a:prstGeom>
           <a:solidFill>
-            <a:srgbClr val="FFFFFF">
-              <a:alpha val="88000"/>
-            </a:srgbClr>
+            <a:srgbClr val="FFFFFF"/>
           </a:solidFill>
           <a:ln w="12700">
             <a:solidFill>
-              <a:srgbClr val="D6E8F2"/>
+              <a:srgbClr val="B9D7E6"/>
             </a:solidFill>
             <a:prstDash val="solid"/>
           </a:ln>
@@ -16410,30 +14117,42 @@
       </p:sp>
       <p:sp>
         <p:nvSpPr>
-          <p:cNvPr id="14" name="Shape 12"/>
-          <p:cNvSpPr/>
-          <p:nvPr/>
-        </p:nvSpPr>
-        <p:spPr>
-          <a:xfrm>
-            <a:off x="7927848" y="3319272"/>
-            <a:ext cx="792480" cy="749808"/>
-          </a:xfrm>
-          <a:prstGeom prst="roundRect">
-            <a:avLst>
-              <a:gd name="adj" fmla="val 14634"/>
-            </a:avLst>
-          </a:prstGeom>
-          <a:solidFill>
-            <a:srgbClr val="0068B7"/>
-          </a:solidFill>
-          <a:ln w="12700">
-            <a:solidFill>
-              <a:srgbClr val="0068B7"/>
-            </a:solidFill>
-            <a:prstDash val="solid"/>
-          </a:ln>
-        </p:spPr>
+          <p:cNvPr id="14" name="Text 12"/>
+          <p:cNvSpPr/>
+          <p:nvPr/>
+        </p:nvSpPr>
+        <p:spPr>
+          <a:xfrm>
+            <a:off x="7799832" y="2935224"/>
+            <a:ext cx="3145536" cy="256032"/>
+          </a:xfrm>
+          <a:prstGeom prst="rect">
+            <a:avLst/>
+          </a:prstGeom>
+          <a:noFill/>
+          <a:ln/>
+        </p:spPr>
+        <p:txBody>
+          <a:bodyPr wrap="square" lIns="0" tIns="0" rIns="0" bIns="0" rtlCol="0" anchor="ctr"/>
+          <a:lstStyle/>
+          <a:p>
+            <a:pPr indent="0" marL="0">
+              <a:buNone/>
+            </a:pPr>
+            <a:r>
+              <a:rPr lang="en-US" sz="1300" b="1" dirty="0">
+                <a:solidFill>
+                  <a:srgbClr val="0068B7"/>
+                </a:solidFill>
+                <a:latin typeface="Aptos" pitchFamily="34" charset="0"/>
+                <a:ea typeface="Aptos" pitchFamily="34" charset="-122"/>
+                <a:cs typeface="Aptos" pitchFamily="34" charset="-120"/>
+              </a:rPr>
+              <a:t>Concept checkpoints</a:t>
+            </a:r>
+            <a:endParaRPr lang="en-US" sz="1300" dirty="0"/>
+          </a:p>
+        </p:txBody>
       </p:sp>
       <p:sp>
         <p:nvSpPr>
@@ -16443,240 +14162,67 @@
         </p:nvSpPr>
         <p:spPr>
           <a:xfrm>
-            <a:off x="8001000" y="3511296"/>
-            <a:ext cx="646176" cy="310896"/>
-          </a:xfrm>
-          <a:prstGeom prst="rect">
-            <a:avLst/>
-          </a:prstGeom>
-          <a:noFill/>
-          <a:ln/>
-        </p:spPr>
-        <p:txBody>
-          <a:bodyPr wrap="square" lIns="0" tIns="0" rIns="0" bIns="0" rtlCol="0" anchor="ctr">
+            <a:off x="7818120" y="3300984"/>
+            <a:ext cx="3090672" cy="877824"/>
+          </a:xfrm>
+          <a:prstGeom prst="rect">
+            <a:avLst/>
+          </a:prstGeom>
+          <a:noFill/>
+          <a:ln/>
+        </p:spPr>
+        <p:txBody>
+          <a:bodyPr wrap="square" lIns="254" tIns="254" rIns="254" bIns="254" rtlCol="0" anchor="t">
             <a:normAutofit/>
           </a:bodyPr>
           <a:lstStyle/>
           <a:p>
-            <a:pPr algn="ctr" indent="0" marL="0">
-              <a:buNone/>
-            </a:pPr>
-            <a:r>
-              <a:rPr lang="en-US" sz="1500" b="1" dirty="0">
-                <a:solidFill>
-                  <a:srgbClr val="FFFFFF"/>
-                </a:solidFill>
-                <a:latin typeface="Aptos" pitchFamily="34" charset="0"/>
-                <a:ea typeface="Aptos" pitchFamily="34" charset="-122"/>
-                <a:cs typeface="Aptos" pitchFamily="34" charset="-120"/>
-              </a:rPr>
-              <a:t>Plan</a:t>
-            </a:r>
-            <a:endParaRPr lang="en-US" sz="1500" dirty="0"/>
+            <a:r>
+              <a:rPr lang="en-US" sz="1380" dirty="0">
+                <a:solidFill>
+                  <a:srgbClr val="17364A"/>
+                </a:solidFill>
+                <a:latin typeface="Aptos" pitchFamily="34" charset="0"/>
+                <a:ea typeface="Aptos" pitchFamily="34" charset="-122"/>
+                <a:cs typeface="Aptos" pitchFamily="34" charset="-120"/>
+              </a:rPr>
+              <a:t>Explain the purpose of requirements writing for ai procurement and implementation in.</a:t>
+            </a:r>
+            <a:endParaRPr lang="en-US" sz="1380" dirty="0"/>
+          </a:p>
+          <a:p>
+            <a:r>
+              <a:rPr lang="en-US" sz="1380" dirty="0">
+                <a:solidFill>
+                  <a:srgbClr val="17364A"/>
+                </a:solidFill>
+                <a:latin typeface="Aptos" pitchFamily="34" charset="0"/>
+                <a:ea typeface="Aptos" pitchFamily="34" charset="-122"/>
+                <a:cs typeface="Aptos" pitchFamily="34" charset="-120"/>
+              </a:rPr>
+              <a:t>Identify the technical, operational, privacy, security, equity, and governance issues.</a:t>
+            </a:r>
+            <a:endParaRPr lang="en-US" sz="1380" dirty="0"/>
+          </a:p>
+          <a:p>
+            <a:r>
+              <a:rPr lang="en-US" sz="1380" dirty="0">
+                <a:solidFill>
+                  <a:srgbClr val="17364A"/>
+                </a:solidFill>
+                <a:latin typeface="Aptos" pitchFamily="34" charset="0"/>
+                <a:ea typeface="Aptos" pitchFamily="34" charset="-122"/>
+                <a:cs typeface="Aptos" pitchFamily="34" charset="-120"/>
+              </a:rPr>
+              <a:t>Recognize common failure modes that can affect safety, accuracy, trust, workflow fit, or.</a:t>
+            </a:r>
+            <a:endParaRPr lang="en-US" sz="1380" dirty="0"/>
           </a:p>
         </p:txBody>
       </p:sp>
       <p:sp>
         <p:nvSpPr>
           <p:cNvPr id="16" name="Shape 14"/>
-          <p:cNvSpPr/>
-          <p:nvPr/>
-        </p:nvSpPr>
-        <p:spPr>
-          <a:xfrm>
-            <a:off x="8976360" y="3319272"/>
-            <a:ext cx="792480" cy="749808"/>
-          </a:xfrm>
-          <a:prstGeom prst="roundRect">
-            <a:avLst>
-              <a:gd name="adj" fmla="val 14634"/>
-            </a:avLst>
-          </a:prstGeom>
-          <a:solidFill>
-            <a:srgbClr val="2F8A28"/>
-          </a:solidFill>
-          <a:ln w="12700">
-            <a:solidFill>
-              <a:srgbClr val="2F8A28"/>
-            </a:solidFill>
-            <a:prstDash val="solid"/>
-          </a:ln>
-        </p:spPr>
-      </p:sp>
-      <p:sp>
-        <p:nvSpPr>
-          <p:cNvPr id="17" name="Text 15"/>
-          <p:cNvSpPr/>
-          <p:nvPr/>
-        </p:nvSpPr>
-        <p:spPr>
-          <a:xfrm>
-            <a:off x="9049512" y="3511296"/>
-            <a:ext cx="646176" cy="310896"/>
-          </a:xfrm>
-          <a:prstGeom prst="rect">
-            <a:avLst/>
-          </a:prstGeom>
-          <a:noFill/>
-          <a:ln/>
-        </p:spPr>
-        <p:txBody>
-          <a:bodyPr wrap="square" lIns="0" tIns="0" rIns="0" bIns="0" rtlCol="0" anchor="ctr">
-            <a:normAutofit/>
-          </a:bodyPr>
-          <a:lstStyle/>
-          <a:p>
-            <a:pPr algn="ctr" indent="0" marL="0">
-              <a:buNone/>
-            </a:pPr>
-            <a:r>
-              <a:rPr lang="en-US" sz="1500" b="1" dirty="0">
-                <a:solidFill>
-                  <a:srgbClr val="FFFFFF"/>
-                </a:solidFill>
-                <a:latin typeface="Aptos" pitchFamily="34" charset="0"/>
-                <a:ea typeface="Aptos" pitchFamily="34" charset="-122"/>
-                <a:cs typeface="Aptos" pitchFamily="34" charset="-120"/>
-              </a:rPr>
-              <a:t>Do</a:t>
-            </a:r>
-            <a:endParaRPr lang="en-US" sz="1500" dirty="0"/>
-          </a:p>
-        </p:txBody>
-      </p:sp>
-      <p:sp>
-        <p:nvSpPr>
-          <p:cNvPr id="18" name="Shape 16"/>
-          <p:cNvSpPr/>
-          <p:nvPr/>
-        </p:nvSpPr>
-        <p:spPr>
-          <a:xfrm>
-            <a:off x="10024872" y="3319272"/>
-            <a:ext cx="792480" cy="749808"/>
-          </a:xfrm>
-          <a:prstGeom prst="roundRect">
-            <a:avLst>
-              <a:gd name="adj" fmla="val 14634"/>
-            </a:avLst>
-          </a:prstGeom>
-          <a:solidFill>
-            <a:srgbClr val="D69A2D"/>
-          </a:solidFill>
-          <a:ln w="12700">
-            <a:solidFill>
-              <a:srgbClr val="D69A2D"/>
-            </a:solidFill>
-            <a:prstDash val="solid"/>
-          </a:ln>
-        </p:spPr>
-      </p:sp>
-      <p:sp>
-        <p:nvSpPr>
-          <p:cNvPr id="19" name="Text 17"/>
-          <p:cNvSpPr/>
-          <p:nvPr/>
-        </p:nvSpPr>
-        <p:spPr>
-          <a:xfrm>
-            <a:off x="10098024" y="3511296"/>
-            <a:ext cx="646176" cy="310896"/>
-          </a:xfrm>
-          <a:prstGeom prst="rect">
-            <a:avLst/>
-          </a:prstGeom>
-          <a:noFill/>
-          <a:ln/>
-        </p:spPr>
-        <p:txBody>
-          <a:bodyPr wrap="square" lIns="0" tIns="0" rIns="0" bIns="0" rtlCol="0" anchor="ctr">
-            <a:normAutofit/>
-          </a:bodyPr>
-          <a:lstStyle/>
-          <a:p>
-            <a:pPr algn="ctr" indent="0" marL="0">
-              <a:buNone/>
-            </a:pPr>
-            <a:r>
-              <a:rPr lang="en-US" sz="1500" b="1" dirty="0">
-                <a:solidFill>
-                  <a:srgbClr val="FFFFFF"/>
-                </a:solidFill>
-                <a:latin typeface="Aptos" pitchFamily="34" charset="0"/>
-                <a:ea typeface="Aptos" pitchFamily="34" charset="-122"/>
-                <a:cs typeface="Aptos" pitchFamily="34" charset="-120"/>
-              </a:rPr>
-              <a:t>Review</a:t>
-            </a:r>
-            <a:endParaRPr lang="en-US" sz="1500" dirty="0"/>
-          </a:p>
-        </p:txBody>
-      </p:sp>
-      <p:sp>
-        <p:nvSpPr>
-          <p:cNvPr id="20" name="Shape 18"/>
-          <p:cNvSpPr/>
-          <p:nvPr/>
-        </p:nvSpPr>
-        <p:spPr>
-          <a:xfrm>
-            <a:off x="8293608" y="4389120"/>
-            <a:ext cx="2157984" cy="0"/>
-          </a:xfrm>
-          <a:prstGeom prst="line">
-            <a:avLst/>
-          </a:prstGeom>
-          <a:noFill/>
-          <a:ln w="25400">
-            <a:solidFill>
-              <a:srgbClr val="8ABBD8"/>
-            </a:solidFill>
-            <a:prstDash val="solid"/>
-          </a:ln>
-        </p:spPr>
-      </p:sp>
-      <p:sp>
-        <p:nvSpPr>
-          <p:cNvPr id="21" name="Text 19"/>
-          <p:cNvSpPr/>
-          <p:nvPr/>
-        </p:nvSpPr>
-        <p:spPr>
-          <a:xfrm>
-            <a:off x="7909560" y="3977640"/>
-            <a:ext cx="2926080" cy="182880"/>
-          </a:xfrm>
-          <a:prstGeom prst="rect">
-            <a:avLst/>
-          </a:prstGeom>
-          <a:noFill/>
-          <a:ln/>
-        </p:spPr>
-        <p:txBody>
-          <a:bodyPr wrap="square" lIns="0" tIns="0" rIns="0" bIns="0" rtlCol="0" anchor="ctr"/>
-          <a:lstStyle/>
-          <a:p>
-            <a:pPr algn="ctr" indent="0" marL="0">
-              <a:buNone/>
-            </a:pPr>
-            <a:r>
-              <a:rPr lang="en-US" sz="1000" dirty="0">
-                <a:solidFill>
-                  <a:srgbClr val="003A63"/>
-                </a:solidFill>
-                <a:latin typeface="Aptos" pitchFamily="34" charset="0"/>
-                <a:ea typeface="Aptos" pitchFamily="34" charset="-122"/>
-                <a:cs typeface="Aptos" pitchFamily="34" charset="-120"/>
-              </a:rPr>
-              <a:t>Dependencies visible</a:t>
-            </a:r>
-            <a:endParaRPr lang="en-US" sz="1000" dirty="0"/>
-          </a:p>
-        </p:txBody>
-      </p:sp>
-      <p:sp>
-        <p:nvSpPr>
-          <p:cNvPr id="22" name="Shape 20"/>
           <p:cNvSpPr/>
           <p:nvPr/>
         </p:nvSpPr>
@@ -16703,7 +14249,7 @@
       </p:sp>
       <p:sp>
         <p:nvSpPr>
-          <p:cNvPr id="23" name="Text 21"/>
+          <p:cNvPr id="17" name="Text 15"/>
           <p:cNvSpPr/>
           <p:nvPr/>
         </p:nvSpPr>
@@ -16742,7 +14288,7 @@
       </p:sp>
       <p:sp>
         <p:nvSpPr>
-          <p:cNvPr id="24" name="Text 22"/>
+          <p:cNvPr id="18" name="Text 16"/>
           <p:cNvSpPr/>
           <p:nvPr/>
         </p:nvSpPr>
@@ -17222,13 +14768,11 @@
             </a:avLst>
           </a:prstGeom>
           <a:solidFill>
-            <a:srgbClr val="FFFFFF">
-              <a:alpha val="88000"/>
-            </a:srgbClr>
+            <a:srgbClr val="FFFFFF"/>
           </a:solidFill>
           <a:ln w="12700">
             <a:solidFill>
-              <a:srgbClr val="D6E8F2"/>
+              <a:srgbClr val="B9D7E6"/>
             </a:solidFill>
             <a:prstDash val="solid"/>
           </a:ln>
@@ -17236,30 +14780,42 @@
       </p:sp>
       <p:sp>
         <p:nvSpPr>
-          <p:cNvPr id="14" name="Shape 12"/>
-          <p:cNvSpPr/>
-          <p:nvPr/>
-        </p:nvSpPr>
-        <p:spPr>
-          <a:xfrm>
-            <a:off x="7927848" y="3319272"/>
-            <a:ext cx="792480" cy="749808"/>
-          </a:xfrm>
-          <a:prstGeom prst="roundRect">
-            <a:avLst>
-              <a:gd name="adj" fmla="val 14634"/>
-            </a:avLst>
-          </a:prstGeom>
-          <a:solidFill>
-            <a:srgbClr val="0068B7"/>
-          </a:solidFill>
-          <a:ln w="12700">
-            <a:solidFill>
-              <a:srgbClr val="0068B7"/>
-            </a:solidFill>
-            <a:prstDash val="solid"/>
-          </a:ln>
-        </p:spPr>
+          <p:cNvPr id="14" name="Text 12"/>
+          <p:cNvSpPr/>
+          <p:nvPr/>
+        </p:nvSpPr>
+        <p:spPr>
+          <a:xfrm>
+            <a:off x="7799832" y="2935224"/>
+            <a:ext cx="3145536" cy="256032"/>
+          </a:xfrm>
+          <a:prstGeom prst="rect">
+            <a:avLst/>
+          </a:prstGeom>
+          <a:noFill/>
+          <a:ln/>
+        </p:spPr>
+        <p:txBody>
+          <a:bodyPr wrap="square" lIns="0" tIns="0" rIns="0" bIns="0" rtlCol="0" anchor="ctr"/>
+          <a:lstStyle/>
+          <a:p>
+            <a:pPr indent="0" marL="0">
+              <a:buNone/>
+            </a:pPr>
+            <a:r>
+              <a:rPr lang="en-US" sz="1300" b="1" dirty="0">
+                <a:solidFill>
+                  <a:srgbClr val="0068B7"/>
+                </a:solidFill>
+                <a:latin typeface="Aptos" pitchFamily="34" charset="0"/>
+                <a:ea typeface="Aptos" pitchFamily="34" charset="-122"/>
+                <a:cs typeface="Aptos" pitchFamily="34" charset="-120"/>
+              </a:rPr>
+              <a:t>Concept checkpoints</a:t>
+            </a:r>
+            <a:endParaRPr lang="en-US" sz="1300" dirty="0"/>
+          </a:p>
+        </p:txBody>
       </p:sp>
       <p:sp>
         <p:nvSpPr>
@@ -17269,240 +14825,39 @@
         </p:nvSpPr>
         <p:spPr>
           <a:xfrm>
-            <a:off x="8001000" y="3511296"/>
-            <a:ext cx="646176" cy="310896"/>
-          </a:xfrm>
-          <a:prstGeom prst="rect">
-            <a:avLst/>
-          </a:prstGeom>
-          <a:noFill/>
-          <a:ln/>
-        </p:spPr>
-        <p:txBody>
-          <a:bodyPr wrap="square" lIns="0" tIns="0" rIns="0" bIns="0" rtlCol="0" anchor="ctr">
+            <a:off x="7818120" y="3300984"/>
+            <a:ext cx="3090672" cy="877824"/>
+          </a:xfrm>
+          <a:prstGeom prst="rect">
+            <a:avLst/>
+          </a:prstGeom>
+          <a:noFill/>
+          <a:ln/>
+        </p:spPr>
+        <p:txBody>
+          <a:bodyPr wrap="square" lIns="254" tIns="254" rIns="254" bIns="254" rtlCol="0" anchor="t">
             <a:normAutofit/>
           </a:bodyPr>
           <a:lstStyle/>
           <a:p>
-            <a:pPr algn="ctr" indent="0" marL="0">
-              <a:buNone/>
-            </a:pPr>
-            <a:r>
-              <a:rPr lang="en-US" sz="1500" b="1" dirty="0">
-                <a:solidFill>
-                  <a:srgbClr val="FFFFFF"/>
-                </a:solidFill>
-                <a:latin typeface="Aptos" pitchFamily="34" charset="0"/>
-                <a:ea typeface="Aptos" pitchFamily="34" charset="-122"/>
-                <a:cs typeface="Aptos" pitchFamily="34" charset="-120"/>
-              </a:rPr>
-              <a:t>Plan</a:t>
-            </a:r>
-            <a:endParaRPr lang="en-US" sz="1500" dirty="0"/>
+            <a:r>
+              <a:rPr lang="en-US" sz="1380" dirty="0">
+                <a:solidFill>
+                  <a:srgbClr val="17364A"/>
+                </a:solidFill>
+                <a:latin typeface="Aptos" pitchFamily="34" charset="0"/>
+                <a:ea typeface="Aptos" pitchFamily="34" charset="-122"/>
+                <a:cs typeface="Aptos" pitchFamily="34" charset="-120"/>
+              </a:rPr>
+              <a:t>Produce a AI requirements matrix that can support readiness assessment, governance review,.</a:t>
+            </a:r>
+            <a:endParaRPr lang="en-US" sz="1380" dirty="0"/>
           </a:p>
         </p:txBody>
       </p:sp>
       <p:sp>
         <p:nvSpPr>
           <p:cNvPr id="16" name="Shape 14"/>
-          <p:cNvSpPr/>
-          <p:nvPr/>
-        </p:nvSpPr>
-        <p:spPr>
-          <a:xfrm>
-            <a:off x="8976360" y="3319272"/>
-            <a:ext cx="792480" cy="749808"/>
-          </a:xfrm>
-          <a:prstGeom prst="roundRect">
-            <a:avLst>
-              <a:gd name="adj" fmla="val 14634"/>
-            </a:avLst>
-          </a:prstGeom>
-          <a:solidFill>
-            <a:srgbClr val="2F8A28"/>
-          </a:solidFill>
-          <a:ln w="12700">
-            <a:solidFill>
-              <a:srgbClr val="2F8A28"/>
-            </a:solidFill>
-            <a:prstDash val="solid"/>
-          </a:ln>
-        </p:spPr>
-      </p:sp>
-      <p:sp>
-        <p:nvSpPr>
-          <p:cNvPr id="17" name="Text 15"/>
-          <p:cNvSpPr/>
-          <p:nvPr/>
-        </p:nvSpPr>
-        <p:spPr>
-          <a:xfrm>
-            <a:off x="9049512" y="3511296"/>
-            <a:ext cx="646176" cy="310896"/>
-          </a:xfrm>
-          <a:prstGeom prst="rect">
-            <a:avLst/>
-          </a:prstGeom>
-          <a:noFill/>
-          <a:ln/>
-        </p:spPr>
-        <p:txBody>
-          <a:bodyPr wrap="square" lIns="0" tIns="0" rIns="0" bIns="0" rtlCol="0" anchor="ctr">
-            <a:normAutofit/>
-          </a:bodyPr>
-          <a:lstStyle/>
-          <a:p>
-            <a:pPr algn="ctr" indent="0" marL="0">
-              <a:buNone/>
-            </a:pPr>
-            <a:r>
-              <a:rPr lang="en-US" sz="1500" b="1" dirty="0">
-                <a:solidFill>
-                  <a:srgbClr val="FFFFFF"/>
-                </a:solidFill>
-                <a:latin typeface="Aptos" pitchFamily="34" charset="0"/>
-                <a:ea typeface="Aptos" pitchFamily="34" charset="-122"/>
-                <a:cs typeface="Aptos" pitchFamily="34" charset="-120"/>
-              </a:rPr>
-              <a:t>Do</a:t>
-            </a:r>
-            <a:endParaRPr lang="en-US" sz="1500" dirty="0"/>
-          </a:p>
-        </p:txBody>
-      </p:sp>
-      <p:sp>
-        <p:nvSpPr>
-          <p:cNvPr id="18" name="Shape 16"/>
-          <p:cNvSpPr/>
-          <p:nvPr/>
-        </p:nvSpPr>
-        <p:spPr>
-          <a:xfrm>
-            <a:off x="10024872" y="3319272"/>
-            <a:ext cx="792480" cy="749808"/>
-          </a:xfrm>
-          <a:prstGeom prst="roundRect">
-            <a:avLst>
-              <a:gd name="adj" fmla="val 14634"/>
-            </a:avLst>
-          </a:prstGeom>
-          <a:solidFill>
-            <a:srgbClr val="D69A2D"/>
-          </a:solidFill>
-          <a:ln w="12700">
-            <a:solidFill>
-              <a:srgbClr val="D69A2D"/>
-            </a:solidFill>
-            <a:prstDash val="solid"/>
-          </a:ln>
-        </p:spPr>
-      </p:sp>
-      <p:sp>
-        <p:nvSpPr>
-          <p:cNvPr id="19" name="Text 17"/>
-          <p:cNvSpPr/>
-          <p:nvPr/>
-        </p:nvSpPr>
-        <p:spPr>
-          <a:xfrm>
-            <a:off x="10098024" y="3511296"/>
-            <a:ext cx="646176" cy="310896"/>
-          </a:xfrm>
-          <a:prstGeom prst="rect">
-            <a:avLst/>
-          </a:prstGeom>
-          <a:noFill/>
-          <a:ln/>
-        </p:spPr>
-        <p:txBody>
-          <a:bodyPr wrap="square" lIns="0" tIns="0" rIns="0" bIns="0" rtlCol="0" anchor="ctr">
-            <a:normAutofit/>
-          </a:bodyPr>
-          <a:lstStyle/>
-          <a:p>
-            <a:pPr algn="ctr" indent="0" marL="0">
-              <a:buNone/>
-            </a:pPr>
-            <a:r>
-              <a:rPr lang="en-US" sz="1500" b="1" dirty="0">
-                <a:solidFill>
-                  <a:srgbClr val="FFFFFF"/>
-                </a:solidFill>
-                <a:latin typeface="Aptos" pitchFamily="34" charset="0"/>
-                <a:ea typeface="Aptos" pitchFamily="34" charset="-122"/>
-                <a:cs typeface="Aptos" pitchFamily="34" charset="-120"/>
-              </a:rPr>
-              <a:t>Review</a:t>
-            </a:r>
-            <a:endParaRPr lang="en-US" sz="1500" dirty="0"/>
-          </a:p>
-        </p:txBody>
-      </p:sp>
-      <p:sp>
-        <p:nvSpPr>
-          <p:cNvPr id="20" name="Shape 18"/>
-          <p:cNvSpPr/>
-          <p:nvPr/>
-        </p:nvSpPr>
-        <p:spPr>
-          <a:xfrm>
-            <a:off x="8293608" y="4389120"/>
-            <a:ext cx="2157984" cy="0"/>
-          </a:xfrm>
-          <a:prstGeom prst="line">
-            <a:avLst/>
-          </a:prstGeom>
-          <a:noFill/>
-          <a:ln w="25400">
-            <a:solidFill>
-              <a:srgbClr val="8ABBD8"/>
-            </a:solidFill>
-            <a:prstDash val="solid"/>
-          </a:ln>
-        </p:spPr>
-      </p:sp>
-      <p:sp>
-        <p:nvSpPr>
-          <p:cNvPr id="21" name="Text 19"/>
-          <p:cNvSpPr/>
-          <p:nvPr/>
-        </p:nvSpPr>
-        <p:spPr>
-          <a:xfrm>
-            <a:off x="7909560" y="3977640"/>
-            <a:ext cx="2926080" cy="182880"/>
-          </a:xfrm>
-          <a:prstGeom prst="rect">
-            <a:avLst/>
-          </a:prstGeom>
-          <a:noFill/>
-          <a:ln/>
-        </p:spPr>
-        <p:txBody>
-          <a:bodyPr wrap="square" lIns="0" tIns="0" rIns="0" bIns="0" rtlCol="0" anchor="ctr"/>
-          <a:lstStyle/>
-          <a:p>
-            <a:pPr algn="ctr" indent="0" marL="0">
-              <a:buNone/>
-            </a:pPr>
-            <a:r>
-              <a:rPr lang="en-US" sz="1000" dirty="0">
-                <a:solidFill>
-                  <a:srgbClr val="003A63"/>
-                </a:solidFill>
-                <a:latin typeface="Aptos" pitchFamily="34" charset="0"/>
-                <a:ea typeface="Aptos" pitchFamily="34" charset="-122"/>
-                <a:cs typeface="Aptos" pitchFamily="34" charset="-120"/>
-              </a:rPr>
-              <a:t>Dependencies visible</a:t>
-            </a:r>
-            <a:endParaRPr lang="en-US" sz="1000" dirty="0"/>
-          </a:p>
-        </p:txBody>
-      </p:sp>
-      <p:sp>
-        <p:nvSpPr>
-          <p:cNvPr id="22" name="Shape 20"/>
           <p:cNvSpPr/>
           <p:nvPr/>
         </p:nvSpPr>
@@ -17529,7 +14884,7 @@
       </p:sp>
       <p:sp>
         <p:nvSpPr>
-          <p:cNvPr id="23" name="Text 21"/>
+          <p:cNvPr id="17" name="Text 15"/>
           <p:cNvSpPr/>
           <p:nvPr/>
         </p:nvSpPr>
@@ -17568,7 +14923,7 @@
       </p:sp>
       <p:sp>
         <p:nvSpPr>
-          <p:cNvPr id="24" name="Text 22"/>
+          <p:cNvPr id="18" name="Text 16"/>
           <p:cNvSpPr/>
           <p:nvPr/>
         </p:nvSpPr>
@@ -18062,13 +15417,11 @@
             </a:avLst>
           </a:prstGeom>
           <a:solidFill>
-            <a:srgbClr val="FFFFFF">
-              <a:alpha val="88000"/>
-            </a:srgbClr>
+            <a:srgbClr val="FFFFFF"/>
           </a:solidFill>
           <a:ln w="12700">
             <a:solidFill>
-              <a:srgbClr val="D6E8F2"/>
+              <a:srgbClr val="B9D7E6"/>
             </a:solidFill>
             <a:prstDash val="solid"/>
           </a:ln>
@@ -18076,30 +15429,42 @@
       </p:sp>
       <p:sp>
         <p:nvSpPr>
-          <p:cNvPr id="14" name="Shape 12"/>
-          <p:cNvSpPr/>
-          <p:nvPr/>
-        </p:nvSpPr>
-        <p:spPr>
-          <a:xfrm>
-            <a:off x="7927848" y="3319272"/>
-            <a:ext cx="792480" cy="749808"/>
-          </a:xfrm>
-          <a:prstGeom prst="roundRect">
-            <a:avLst>
-              <a:gd name="adj" fmla="val 14634"/>
-            </a:avLst>
-          </a:prstGeom>
-          <a:solidFill>
-            <a:srgbClr val="0068B7"/>
-          </a:solidFill>
-          <a:ln w="12700">
-            <a:solidFill>
-              <a:srgbClr val="0068B7"/>
-            </a:solidFill>
-            <a:prstDash val="solid"/>
-          </a:ln>
-        </p:spPr>
+          <p:cNvPr id="14" name="Text 12"/>
+          <p:cNvSpPr/>
+          <p:nvPr/>
+        </p:nvSpPr>
+        <p:spPr>
+          <a:xfrm>
+            <a:off x="7799832" y="2935224"/>
+            <a:ext cx="3145536" cy="256032"/>
+          </a:xfrm>
+          <a:prstGeom prst="rect">
+            <a:avLst/>
+          </a:prstGeom>
+          <a:noFill/>
+          <a:ln/>
+        </p:spPr>
+        <p:txBody>
+          <a:bodyPr wrap="square" lIns="0" tIns="0" rIns="0" bIns="0" rtlCol="0" anchor="ctr"/>
+          <a:lstStyle/>
+          <a:p>
+            <a:pPr indent="0" marL="0">
+              <a:buNone/>
+            </a:pPr>
+            <a:r>
+              <a:rPr lang="en-US" sz="1300" b="1" dirty="0">
+                <a:solidFill>
+                  <a:srgbClr val="0068B7"/>
+                </a:solidFill>
+                <a:latin typeface="Aptos" pitchFamily="34" charset="0"/>
+                <a:ea typeface="Aptos" pitchFamily="34" charset="-122"/>
+                <a:cs typeface="Aptos" pitchFamily="34" charset="-120"/>
+              </a:rPr>
+              <a:t>Concept checkpoints</a:t>
+            </a:r>
+            <a:endParaRPr lang="en-US" sz="1300" dirty="0"/>
+          </a:p>
+        </p:txBody>
       </p:sp>
       <p:sp>
         <p:nvSpPr>
@@ -18109,240 +15474,53 @@
         </p:nvSpPr>
         <p:spPr>
           <a:xfrm>
-            <a:off x="8001000" y="3511296"/>
-            <a:ext cx="646176" cy="310896"/>
-          </a:xfrm>
-          <a:prstGeom prst="rect">
-            <a:avLst/>
-          </a:prstGeom>
-          <a:noFill/>
-          <a:ln/>
-        </p:spPr>
-        <p:txBody>
-          <a:bodyPr wrap="square" lIns="0" tIns="0" rIns="0" bIns="0" rtlCol="0" anchor="ctr">
+            <a:off x="7818120" y="3300984"/>
+            <a:ext cx="3090672" cy="877824"/>
+          </a:xfrm>
+          <a:prstGeom prst="rect">
+            <a:avLst/>
+          </a:prstGeom>
+          <a:noFill/>
+          <a:ln/>
+        </p:spPr>
+        <p:txBody>
+          <a:bodyPr wrap="square" lIns="254" tIns="254" rIns="254" bIns="254" rtlCol="0" anchor="t">
             <a:normAutofit/>
           </a:bodyPr>
           <a:lstStyle/>
           <a:p>
-            <a:pPr algn="ctr" indent="0" marL="0">
-              <a:buNone/>
-            </a:pPr>
-            <a:r>
-              <a:rPr lang="en-US" sz="1500" b="1" dirty="0">
-                <a:solidFill>
-                  <a:srgbClr val="FFFFFF"/>
-                </a:solidFill>
-                <a:latin typeface="Aptos" pitchFamily="34" charset="0"/>
-                <a:ea typeface="Aptos" pitchFamily="34" charset="-122"/>
-                <a:cs typeface="Aptos" pitchFamily="34" charset="-120"/>
-              </a:rPr>
-              <a:t>Plan</a:t>
-            </a:r>
-            <a:endParaRPr lang="en-US" sz="1500" dirty="0"/>
+            <a:r>
+              <a:rPr lang="en-US" sz="1380" dirty="0">
+                <a:solidFill>
+                  <a:srgbClr val="17364A"/>
+                </a:solidFill>
+                <a:latin typeface="Aptos" pitchFamily="34" charset="0"/>
+                <a:ea typeface="Aptos" pitchFamily="34" charset="-122"/>
+                <a:cs typeface="Aptos" pitchFamily="34" charset="-120"/>
+              </a:rPr>
+              <a:t>AI procurement requires stronger requirements than ordinary software purchasing because.</a:t>
+            </a:r>
+            <a:endParaRPr lang="en-US" sz="1380" dirty="0"/>
+          </a:p>
+          <a:p>
+            <a:r>
+              <a:rPr lang="en-US" sz="1380" dirty="0">
+                <a:solidFill>
+                  <a:srgbClr val="17364A"/>
+                </a:solidFill>
+                <a:latin typeface="Aptos" pitchFamily="34" charset="0"/>
+                <a:ea typeface="Aptos" pitchFamily="34" charset="-122"/>
+                <a:cs typeface="Aptos" pitchFamily="34" charset="-120"/>
+              </a:rPr>
+              <a:t>This module teaches learners how to write requirements that can be evaluated, tested,.</a:t>
+            </a:r>
+            <a:endParaRPr lang="en-US" sz="1380" dirty="0"/>
           </a:p>
         </p:txBody>
       </p:sp>
       <p:sp>
         <p:nvSpPr>
           <p:cNvPr id="16" name="Shape 14"/>
-          <p:cNvSpPr/>
-          <p:nvPr/>
-        </p:nvSpPr>
-        <p:spPr>
-          <a:xfrm>
-            <a:off x="8976360" y="3319272"/>
-            <a:ext cx="792480" cy="749808"/>
-          </a:xfrm>
-          <a:prstGeom prst="roundRect">
-            <a:avLst>
-              <a:gd name="adj" fmla="val 14634"/>
-            </a:avLst>
-          </a:prstGeom>
-          <a:solidFill>
-            <a:srgbClr val="2F8A28"/>
-          </a:solidFill>
-          <a:ln w="12700">
-            <a:solidFill>
-              <a:srgbClr val="2F8A28"/>
-            </a:solidFill>
-            <a:prstDash val="solid"/>
-          </a:ln>
-        </p:spPr>
-      </p:sp>
-      <p:sp>
-        <p:nvSpPr>
-          <p:cNvPr id="17" name="Text 15"/>
-          <p:cNvSpPr/>
-          <p:nvPr/>
-        </p:nvSpPr>
-        <p:spPr>
-          <a:xfrm>
-            <a:off x="9049512" y="3511296"/>
-            <a:ext cx="646176" cy="310896"/>
-          </a:xfrm>
-          <a:prstGeom prst="rect">
-            <a:avLst/>
-          </a:prstGeom>
-          <a:noFill/>
-          <a:ln/>
-        </p:spPr>
-        <p:txBody>
-          <a:bodyPr wrap="square" lIns="0" tIns="0" rIns="0" bIns="0" rtlCol="0" anchor="ctr">
-            <a:normAutofit/>
-          </a:bodyPr>
-          <a:lstStyle/>
-          <a:p>
-            <a:pPr algn="ctr" indent="0" marL="0">
-              <a:buNone/>
-            </a:pPr>
-            <a:r>
-              <a:rPr lang="en-US" sz="1500" b="1" dirty="0">
-                <a:solidFill>
-                  <a:srgbClr val="FFFFFF"/>
-                </a:solidFill>
-                <a:latin typeface="Aptos" pitchFamily="34" charset="0"/>
-                <a:ea typeface="Aptos" pitchFamily="34" charset="-122"/>
-                <a:cs typeface="Aptos" pitchFamily="34" charset="-120"/>
-              </a:rPr>
-              <a:t>Do</a:t>
-            </a:r>
-            <a:endParaRPr lang="en-US" sz="1500" dirty="0"/>
-          </a:p>
-        </p:txBody>
-      </p:sp>
-      <p:sp>
-        <p:nvSpPr>
-          <p:cNvPr id="18" name="Shape 16"/>
-          <p:cNvSpPr/>
-          <p:nvPr/>
-        </p:nvSpPr>
-        <p:spPr>
-          <a:xfrm>
-            <a:off x="10024872" y="3319272"/>
-            <a:ext cx="792480" cy="749808"/>
-          </a:xfrm>
-          <a:prstGeom prst="roundRect">
-            <a:avLst>
-              <a:gd name="adj" fmla="val 14634"/>
-            </a:avLst>
-          </a:prstGeom>
-          <a:solidFill>
-            <a:srgbClr val="D69A2D"/>
-          </a:solidFill>
-          <a:ln w="12700">
-            <a:solidFill>
-              <a:srgbClr val="D69A2D"/>
-            </a:solidFill>
-            <a:prstDash val="solid"/>
-          </a:ln>
-        </p:spPr>
-      </p:sp>
-      <p:sp>
-        <p:nvSpPr>
-          <p:cNvPr id="19" name="Text 17"/>
-          <p:cNvSpPr/>
-          <p:nvPr/>
-        </p:nvSpPr>
-        <p:spPr>
-          <a:xfrm>
-            <a:off x="10098024" y="3511296"/>
-            <a:ext cx="646176" cy="310896"/>
-          </a:xfrm>
-          <a:prstGeom prst="rect">
-            <a:avLst/>
-          </a:prstGeom>
-          <a:noFill/>
-          <a:ln/>
-        </p:spPr>
-        <p:txBody>
-          <a:bodyPr wrap="square" lIns="0" tIns="0" rIns="0" bIns="0" rtlCol="0" anchor="ctr">
-            <a:normAutofit/>
-          </a:bodyPr>
-          <a:lstStyle/>
-          <a:p>
-            <a:pPr algn="ctr" indent="0" marL="0">
-              <a:buNone/>
-            </a:pPr>
-            <a:r>
-              <a:rPr lang="en-US" sz="1500" b="1" dirty="0">
-                <a:solidFill>
-                  <a:srgbClr val="FFFFFF"/>
-                </a:solidFill>
-                <a:latin typeface="Aptos" pitchFamily="34" charset="0"/>
-                <a:ea typeface="Aptos" pitchFamily="34" charset="-122"/>
-                <a:cs typeface="Aptos" pitchFamily="34" charset="-120"/>
-              </a:rPr>
-              <a:t>Review</a:t>
-            </a:r>
-            <a:endParaRPr lang="en-US" sz="1500" dirty="0"/>
-          </a:p>
-        </p:txBody>
-      </p:sp>
-      <p:sp>
-        <p:nvSpPr>
-          <p:cNvPr id="20" name="Shape 18"/>
-          <p:cNvSpPr/>
-          <p:nvPr/>
-        </p:nvSpPr>
-        <p:spPr>
-          <a:xfrm>
-            <a:off x="8293608" y="4389120"/>
-            <a:ext cx="2157984" cy="0"/>
-          </a:xfrm>
-          <a:prstGeom prst="line">
-            <a:avLst/>
-          </a:prstGeom>
-          <a:noFill/>
-          <a:ln w="25400">
-            <a:solidFill>
-              <a:srgbClr val="8ABBD8"/>
-            </a:solidFill>
-            <a:prstDash val="solid"/>
-          </a:ln>
-        </p:spPr>
-      </p:sp>
-      <p:sp>
-        <p:nvSpPr>
-          <p:cNvPr id="21" name="Text 19"/>
-          <p:cNvSpPr/>
-          <p:nvPr/>
-        </p:nvSpPr>
-        <p:spPr>
-          <a:xfrm>
-            <a:off x="7909560" y="3977640"/>
-            <a:ext cx="2926080" cy="182880"/>
-          </a:xfrm>
-          <a:prstGeom prst="rect">
-            <a:avLst/>
-          </a:prstGeom>
-          <a:noFill/>
-          <a:ln/>
-        </p:spPr>
-        <p:txBody>
-          <a:bodyPr wrap="square" lIns="0" tIns="0" rIns="0" bIns="0" rtlCol="0" anchor="ctr"/>
-          <a:lstStyle/>
-          <a:p>
-            <a:pPr algn="ctr" indent="0" marL="0">
-              <a:buNone/>
-            </a:pPr>
-            <a:r>
-              <a:rPr lang="en-US" sz="1000" dirty="0">
-                <a:solidFill>
-                  <a:srgbClr val="003A63"/>
-                </a:solidFill>
-                <a:latin typeface="Aptos" pitchFamily="34" charset="0"/>
-                <a:ea typeface="Aptos" pitchFamily="34" charset="-122"/>
-                <a:cs typeface="Aptos" pitchFamily="34" charset="-120"/>
-              </a:rPr>
-              <a:t>Dependencies visible</a:t>
-            </a:r>
-            <a:endParaRPr lang="en-US" sz="1000" dirty="0"/>
-          </a:p>
-        </p:txBody>
-      </p:sp>
-      <p:sp>
-        <p:nvSpPr>
-          <p:cNvPr id="22" name="Shape 20"/>
           <p:cNvSpPr/>
           <p:nvPr/>
         </p:nvSpPr>
@@ -18369,7 +15547,7 @@
       </p:sp>
       <p:sp>
         <p:nvSpPr>
-          <p:cNvPr id="23" name="Text 21"/>
+          <p:cNvPr id="17" name="Text 15"/>
           <p:cNvSpPr/>
           <p:nvPr/>
         </p:nvSpPr>
@@ -18408,7 +15586,7 @@
       </p:sp>
       <p:sp>
         <p:nvSpPr>
-          <p:cNvPr id="24" name="Text 22"/>
+          <p:cNvPr id="18" name="Text 16"/>
           <p:cNvSpPr/>
           <p:nvPr/>
         </p:nvSpPr>
@@ -18916,13 +16094,11 @@
             </a:avLst>
           </a:prstGeom>
           <a:solidFill>
-            <a:srgbClr val="FFFFFF">
-              <a:alpha val="88000"/>
-            </a:srgbClr>
+            <a:srgbClr val="FFFFFF"/>
           </a:solidFill>
           <a:ln w="12700">
             <a:solidFill>
-              <a:srgbClr val="D6E8F2"/>
+              <a:srgbClr val="B9D7E6"/>
             </a:solidFill>
             <a:prstDash val="solid"/>
           </a:ln>
@@ -18930,190 +16106,112 @@
       </p:sp>
       <p:sp>
         <p:nvSpPr>
-          <p:cNvPr id="14" name="Shape 12"/>
-          <p:cNvSpPr/>
-          <p:nvPr/>
-        </p:nvSpPr>
-        <p:spPr>
-          <a:xfrm>
-            <a:off x="7891272" y="3108960"/>
-            <a:ext cx="566928" cy="566928"/>
-          </a:xfrm>
-          <a:prstGeom prst="ellipse">
-            <a:avLst/>
-          </a:prstGeom>
-          <a:solidFill>
-            <a:srgbClr val="0068B7"/>
-          </a:solidFill>
-          <a:ln w="12700">
-            <a:solidFill>
-              <a:srgbClr val="0068B7"/>
-            </a:solidFill>
-            <a:prstDash val="solid"/>
-          </a:ln>
-        </p:spPr>
-      </p:sp>
-      <p:sp>
-        <p:nvSpPr>
-          <p:cNvPr id="15" name="Shape 13"/>
-          <p:cNvSpPr/>
-          <p:nvPr/>
-        </p:nvSpPr>
-        <p:spPr>
-          <a:xfrm>
-            <a:off x="10287000" y="3108960"/>
-            <a:ext cx="566928" cy="566928"/>
-          </a:xfrm>
-          <a:prstGeom prst="ellipse">
-            <a:avLst/>
-          </a:prstGeom>
-          <a:solidFill>
-            <a:srgbClr val="2F8A28"/>
-          </a:solidFill>
-          <a:ln w="12700">
-            <a:solidFill>
-              <a:srgbClr val="2F8A28"/>
-            </a:solidFill>
-            <a:prstDash val="solid"/>
-          </a:ln>
-        </p:spPr>
+          <p:cNvPr id="14" name="Text 12"/>
+          <p:cNvSpPr/>
+          <p:nvPr/>
+        </p:nvSpPr>
+        <p:spPr>
+          <a:xfrm>
+            <a:off x="7799832" y="2935224"/>
+            <a:ext cx="3145536" cy="256032"/>
+          </a:xfrm>
+          <a:prstGeom prst="rect">
+            <a:avLst/>
+          </a:prstGeom>
+          <a:noFill/>
+          <a:ln/>
+        </p:spPr>
+        <p:txBody>
+          <a:bodyPr wrap="square" lIns="0" tIns="0" rIns="0" bIns="0" rtlCol="0" anchor="ctr"/>
+          <a:lstStyle/>
+          <a:p>
+            <a:pPr indent="0" marL="0">
+              <a:buNone/>
+            </a:pPr>
+            <a:r>
+              <a:rPr lang="en-US" sz="1300" b="1" dirty="0">
+                <a:solidFill>
+                  <a:srgbClr val="0068B7"/>
+                </a:solidFill>
+                <a:latin typeface="Aptos" pitchFamily="34" charset="0"/>
+                <a:ea typeface="Aptos" pitchFamily="34" charset="-122"/>
+                <a:cs typeface="Aptos" pitchFamily="34" charset="-120"/>
+              </a:rPr>
+              <a:t>Concept checkpoints</a:t>
+            </a:r>
+            <a:endParaRPr lang="en-US" sz="1300" dirty="0"/>
+          </a:p>
+        </p:txBody>
+      </p:sp>
+      <p:sp>
+        <p:nvSpPr>
+          <p:cNvPr id="15" name="Text 13"/>
+          <p:cNvSpPr/>
+          <p:nvPr/>
+        </p:nvSpPr>
+        <p:spPr>
+          <a:xfrm>
+            <a:off x="7818120" y="3300984"/>
+            <a:ext cx="3090672" cy="877824"/>
+          </a:xfrm>
+          <a:prstGeom prst="rect">
+            <a:avLst/>
+          </a:prstGeom>
+          <a:noFill/>
+          <a:ln/>
+        </p:spPr>
+        <p:txBody>
+          <a:bodyPr wrap="square" lIns="254" tIns="254" rIns="254" bIns="254" rtlCol="0" anchor="t">
+            <a:normAutofit/>
+          </a:bodyPr>
+          <a:lstStyle/>
+          <a:p>
+            <a:r>
+              <a:rPr lang="en-US" sz="1380" dirty="0">
+                <a:solidFill>
+                  <a:srgbClr val="17364A"/>
+                </a:solidFill>
+                <a:latin typeface="Aptos" pitchFamily="34" charset="0"/>
+                <a:ea typeface="Aptos" pitchFamily="34" charset="-122"/>
+                <a:cs typeface="Aptos" pitchFamily="34" charset="-120"/>
+              </a:rPr>
+              <a:t>It is not legal advice and does not replace review by agency legal counsel, privacy.</a:t>
+            </a:r>
+            <a:endParaRPr lang="en-US" sz="1380" dirty="0"/>
+          </a:p>
+          <a:p>
+            <a:r>
+              <a:rPr lang="en-US" sz="1380" dirty="0">
+                <a:solidFill>
+                  <a:srgbClr val="17364A"/>
+                </a:solidFill>
+                <a:latin typeface="Aptos" pitchFamily="34" charset="0"/>
+                <a:ea typeface="Aptos" pitchFamily="34" charset="-122"/>
+                <a:cs typeface="Aptos" pitchFamily="34" charset="-120"/>
+              </a:rPr>
+              <a:t>Requirements may vary by state, locality, territory, Tribe, agency, funding source,.</a:t>
+            </a:r>
+            <a:endParaRPr lang="en-US" sz="1380" dirty="0"/>
+          </a:p>
+          <a:p>
+            <a:r>
+              <a:rPr lang="en-US" sz="1380" dirty="0">
+                <a:solidFill>
+                  <a:srgbClr val="17364A"/>
+                </a:solidFill>
+                <a:latin typeface="Aptos" pitchFamily="34" charset="0"/>
+                <a:ea typeface="Aptos" pitchFamily="34" charset="-122"/>
+                <a:cs typeface="Aptos" pitchFamily="34" charset="-120"/>
+              </a:rPr>
+              <a:t>Learners should use this module to identify the issues that require review and should.</a:t>
+            </a:r>
+            <a:endParaRPr lang="en-US" sz="1380" dirty="0"/>
+          </a:p>
+        </p:txBody>
       </p:sp>
       <p:sp>
         <p:nvSpPr>
           <p:cNvPr id="16" name="Shape 14"/>
-          <p:cNvSpPr/>
-          <p:nvPr/>
-        </p:nvSpPr>
-        <p:spPr>
-          <a:xfrm>
-            <a:off x="9089136" y="3456432"/>
-            <a:ext cx="566928" cy="566928"/>
-          </a:xfrm>
-          <a:prstGeom prst="ellipse">
-            <a:avLst/>
-          </a:prstGeom>
-          <a:solidFill>
-            <a:srgbClr val="6A4CA3"/>
-          </a:solidFill>
-          <a:ln w="12700">
-            <a:solidFill>
-              <a:srgbClr val="6A4CA3"/>
-            </a:solidFill>
-            <a:prstDash val="solid"/>
-          </a:ln>
-        </p:spPr>
-      </p:sp>
-      <p:sp>
-        <p:nvSpPr>
-          <p:cNvPr id="17" name="Shape 15"/>
-          <p:cNvSpPr/>
-          <p:nvPr/>
-        </p:nvSpPr>
-        <p:spPr>
-          <a:xfrm>
-            <a:off x="8385048" y="3419856"/>
-            <a:ext cx="1975104" cy="0"/>
-          </a:xfrm>
-          <a:prstGeom prst="line">
-            <a:avLst/>
-          </a:prstGeom>
-          <a:noFill/>
-          <a:ln w="25400">
-            <a:solidFill>
-              <a:srgbClr val="8ABBD8"/>
-            </a:solidFill>
-            <a:prstDash val="solid"/>
-          </a:ln>
-        </p:spPr>
-      </p:sp>
-      <p:sp>
-        <p:nvSpPr>
-          <p:cNvPr id="18" name="Shape 16"/>
-          <p:cNvSpPr/>
-          <p:nvPr/>
-        </p:nvSpPr>
-        <p:spPr>
-          <a:xfrm>
-            <a:off x="8202168" y="3630168"/>
-            <a:ext cx="1170432" cy="118872"/>
-          </a:xfrm>
-          <a:prstGeom prst="line">
-            <a:avLst/>
-          </a:prstGeom>
-          <a:noFill/>
-          <a:ln w="25400">
-            <a:solidFill>
-              <a:srgbClr val="8ABBD8"/>
-            </a:solidFill>
-            <a:prstDash val="solid"/>
-          </a:ln>
-        </p:spPr>
-      </p:sp>
-      <p:sp>
-        <p:nvSpPr>
-          <p:cNvPr id="19" name="Shape 17"/>
-          <p:cNvSpPr/>
-          <p:nvPr/>
-        </p:nvSpPr>
-        <p:spPr>
-          <a:xfrm>
-            <a:off x="10543032" y="3630168"/>
-            <a:ext cx="-1170432" cy="118872"/>
-          </a:xfrm>
-          <a:prstGeom prst="line">
-            <a:avLst/>
-          </a:prstGeom>
-          <a:noFill/>
-          <a:ln w="25400">
-            <a:solidFill>
-              <a:srgbClr val="8ABBD8"/>
-            </a:solidFill>
-            <a:prstDash val="solid"/>
-          </a:ln>
-        </p:spPr>
-      </p:sp>
-      <p:sp>
-        <p:nvSpPr>
-          <p:cNvPr id="20" name="Text 18"/>
-          <p:cNvSpPr/>
-          <p:nvPr/>
-        </p:nvSpPr>
-        <p:spPr>
-          <a:xfrm>
-            <a:off x="7863840" y="4069080"/>
-            <a:ext cx="3017520" cy="164592"/>
-          </a:xfrm>
-          <a:prstGeom prst="rect">
-            <a:avLst/>
-          </a:prstGeom>
-          <a:noFill/>
-          <a:ln/>
-        </p:spPr>
-        <p:txBody>
-          <a:bodyPr wrap="square" lIns="0" tIns="0" rIns="0" bIns="0" rtlCol="0" anchor="ctr"/>
-          <a:lstStyle/>
-          <a:p>
-            <a:pPr algn="ctr" indent="0" marL="0">
-              <a:buNone/>
-            </a:pPr>
-            <a:r>
-              <a:rPr lang="en-US" sz="900" b="1" dirty="0">
-                <a:solidFill>
-                  <a:srgbClr val="003A63"/>
-                </a:solidFill>
-                <a:latin typeface="Aptos" pitchFamily="34" charset="0"/>
-                <a:ea typeface="Aptos" pitchFamily="34" charset="-122"/>
-                <a:cs typeface="Aptos" pitchFamily="34" charset="-120"/>
-              </a:rPr>
-              <a:t>Decision rights</a:t>
-            </a:r>
-            <a:endParaRPr lang="en-US" sz="900" dirty="0"/>
-          </a:p>
-        </p:txBody>
-      </p:sp>
-      <p:sp>
-        <p:nvSpPr>
-          <p:cNvPr id="21" name="Shape 19"/>
           <p:cNvSpPr/>
           <p:nvPr/>
         </p:nvSpPr>
@@ -19140,7 +16238,7 @@
       </p:sp>
       <p:sp>
         <p:nvSpPr>
-          <p:cNvPr id="22" name="Text 20"/>
+          <p:cNvPr id="17" name="Text 15"/>
           <p:cNvSpPr/>
           <p:nvPr/>
         </p:nvSpPr>
@@ -19179,7 +16277,7 @@
       </p:sp>
       <p:sp>
         <p:nvSpPr>
-          <p:cNvPr id="23" name="Text 21"/>
+          <p:cNvPr id="18" name="Text 16"/>
           <p:cNvSpPr/>
           <p:nvPr/>
         </p:nvSpPr>
@@ -19687,13 +16785,11 @@
             </a:avLst>
           </a:prstGeom>
           <a:solidFill>
-            <a:srgbClr val="FFFFFF">
-              <a:alpha val="88000"/>
-            </a:srgbClr>
+            <a:srgbClr val="FFFFFF"/>
           </a:solidFill>
           <a:ln w="12700">
             <a:solidFill>
-              <a:srgbClr val="D6E8F2"/>
+              <a:srgbClr val="B9D7E6"/>
             </a:solidFill>
             <a:prstDash val="solid"/>
           </a:ln>
@@ -19701,30 +16797,42 @@
       </p:sp>
       <p:sp>
         <p:nvSpPr>
-          <p:cNvPr id="14" name="Shape 12"/>
-          <p:cNvSpPr/>
-          <p:nvPr/>
-        </p:nvSpPr>
-        <p:spPr>
-          <a:xfrm>
-            <a:off x="7927848" y="3319272"/>
-            <a:ext cx="792480" cy="749808"/>
-          </a:xfrm>
-          <a:prstGeom prst="roundRect">
-            <a:avLst>
-              <a:gd name="adj" fmla="val 14634"/>
-            </a:avLst>
-          </a:prstGeom>
-          <a:solidFill>
-            <a:srgbClr val="0068B7"/>
-          </a:solidFill>
-          <a:ln w="12700">
-            <a:solidFill>
-              <a:srgbClr val="0068B7"/>
-            </a:solidFill>
-            <a:prstDash val="solid"/>
-          </a:ln>
-        </p:spPr>
+          <p:cNvPr id="14" name="Text 12"/>
+          <p:cNvSpPr/>
+          <p:nvPr/>
+        </p:nvSpPr>
+        <p:spPr>
+          <a:xfrm>
+            <a:off x="7799832" y="2935224"/>
+            <a:ext cx="3145536" cy="256032"/>
+          </a:xfrm>
+          <a:prstGeom prst="rect">
+            <a:avLst/>
+          </a:prstGeom>
+          <a:noFill/>
+          <a:ln/>
+        </p:spPr>
+        <p:txBody>
+          <a:bodyPr wrap="square" lIns="0" tIns="0" rIns="0" bIns="0" rtlCol="0" anchor="ctr"/>
+          <a:lstStyle/>
+          <a:p>
+            <a:pPr indent="0" marL="0">
+              <a:buNone/>
+            </a:pPr>
+            <a:r>
+              <a:rPr lang="en-US" sz="1300" b="1" dirty="0">
+                <a:solidFill>
+                  <a:srgbClr val="0068B7"/>
+                </a:solidFill>
+                <a:latin typeface="Aptos" pitchFamily="34" charset="0"/>
+                <a:ea typeface="Aptos" pitchFamily="34" charset="-122"/>
+                <a:cs typeface="Aptos" pitchFamily="34" charset="-120"/>
+              </a:rPr>
+              <a:t>Concept checkpoints</a:t>
+            </a:r>
+            <a:endParaRPr lang="en-US" sz="1300" dirty="0"/>
+          </a:p>
+        </p:txBody>
       </p:sp>
       <p:sp>
         <p:nvSpPr>
@@ -19734,240 +16842,67 @@
         </p:nvSpPr>
         <p:spPr>
           <a:xfrm>
-            <a:off x="8001000" y="3511296"/>
-            <a:ext cx="646176" cy="310896"/>
-          </a:xfrm>
-          <a:prstGeom prst="rect">
-            <a:avLst/>
-          </a:prstGeom>
-          <a:noFill/>
-          <a:ln/>
-        </p:spPr>
-        <p:txBody>
-          <a:bodyPr wrap="square" lIns="0" tIns="0" rIns="0" bIns="0" rtlCol="0" anchor="ctr">
+            <a:off x="7818120" y="3300984"/>
+            <a:ext cx="3090672" cy="877824"/>
+          </a:xfrm>
+          <a:prstGeom prst="rect">
+            <a:avLst/>
+          </a:prstGeom>
+          <a:noFill/>
+          <a:ln/>
+        </p:spPr>
+        <p:txBody>
+          <a:bodyPr wrap="square" lIns="254" tIns="254" rIns="254" bIns="254" rtlCol="0" anchor="t">
             <a:normAutofit/>
           </a:bodyPr>
           <a:lstStyle/>
           <a:p>
-            <a:pPr algn="ctr" indent="0" marL="0">
-              <a:buNone/>
-            </a:pPr>
-            <a:r>
-              <a:rPr lang="en-US" sz="1500" b="1" dirty="0">
-                <a:solidFill>
-                  <a:srgbClr val="FFFFFF"/>
-                </a:solidFill>
-                <a:latin typeface="Aptos" pitchFamily="34" charset="0"/>
-                <a:ea typeface="Aptos" pitchFamily="34" charset="-122"/>
-                <a:cs typeface="Aptos" pitchFamily="34" charset="-120"/>
-              </a:rPr>
-              <a:t>Plan</a:t>
-            </a:r>
-            <a:endParaRPr lang="en-US" sz="1500" dirty="0"/>
+            <a:r>
+              <a:rPr lang="en-US" sz="1380" dirty="0">
+                <a:solidFill>
+                  <a:srgbClr val="17364A"/>
+                </a:solidFill>
+                <a:latin typeface="Aptos" pitchFamily="34" charset="0"/>
+                <a:ea typeface="Aptos" pitchFamily="34" charset="-122"/>
+                <a:cs typeface="Aptos" pitchFamily="34" charset="-120"/>
+              </a:rPr>
+              <a:t>Requirements Writing for AI Procurement and Implementation matters because AI systems are.</a:t>
+            </a:r>
+            <a:endParaRPr lang="en-US" sz="1380" dirty="0"/>
+          </a:p>
+          <a:p>
+            <a:r>
+              <a:rPr lang="en-US" sz="1380" dirty="0">
+                <a:solidFill>
+                  <a:srgbClr val="17364A"/>
+                </a:solidFill>
+                <a:latin typeface="Aptos" pitchFamily="34" charset="0"/>
+                <a:ea typeface="Aptos" pitchFamily="34" charset="-122"/>
+                <a:cs typeface="Aptos" pitchFamily="34" charset="-120"/>
+              </a:rPr>
+              <a:t>The topic also affects accountability.</a:t>
+            </a:r>
+            <a:endParaRPr lang="en-US" sz="1380" dirty="0"/>
+          </a:p>
+          <a:p>
+            <a:r>
+              <a:rPr lang="en-US" sz="1380" dirty="0">
+                <a:solidFill>
+                  <a:srgbClr val="17364A"/>
+                </a:solidFill>
+                <a:latin typeface="Aptos" pitchFamily="34" charset="0"/>
+                <a:ea typeface="Aptos" pitchFamily="34" charset="-122"/>
+                <a:cs typeface="Aptos" pitchFamily="34" charset="-120"/>
+              </a:rPr>
+              <a:t>Public health agencies must be able to explain how data are used, why a tool was approved,.</a:t>
+            </a:r>
+            <a:endParaRPr lang="en-US" sz="1380" dirty="0"/>
           </a:p>
         </p:txBody>
       </p:sp>
       <p:sp>
         <p:nvSpPr>
           <p:cNvPr id="16" name="Shape 14"/>
-          <p:cNvSpPr/>
-          <p:nvPr/>
-        </p:nvSpPr>
-        <p:spPr>
-          <a:xfrm>
-            <a:off x="8976360" y="3319272"/>
-            <a:ext cx="792480" cy="749808"/>
-          </a:xfrm>
-          <a:prstGeom prst="roundRect">
-            <a:avLst>
-              <a:gd name="adj" fmla="val 14634"/>
-            </a:avLst>
-          </a:prstGeom>
-          <a:solidFill>
-            <a:srgbClr val="2F8A28"/>
-          </a:solidFill>
-          <a:ln w="12700">
-            <a:solidFill>
-              <a:srgbClr val="2F8A28"/>
-            </a:solidFill>
-            <a:prstDash val="solid"/>
-          </a:ln>
-        </p:spPr>
-      </p:sp>
-      <p:sp>
-        <p:nvSpPr>
-          <p:cNvPr id="17" name="Text 15"/>
-          <p:cNvSpPr/>
-          <p:nvPr/>
-        </p:nvSpPr>
-        <p:spPr>
-          <a:xfrm>
-            <a:off x="9049512" y="3511296"/>
-            <a:ext cx="646176" cy="310896"/>
-          </a:xfrm>
-          <a:prstGeom prst="rect">
-            <a:avLst/>
-          </a:prstGeom>
-          <a:noFill/>
-          <a:ln/>
-        </p:spPr>
-        <p:txBody>
-          <a:bodyPr wrap="square" lIns="0" tIns="0" rIns="0" bIns="0" rtlCol="0" anchor="ctr">
-            <a:normAutofit/>
-          </a:bodyPr>
-          <a:lstStyle/>
-          <a:p>
-            <a:pPr algn="ctr" indent="0" marL="0">
-              <a:buNone/>
-            </a:pPr>
-            <a:r>
-              <a:rPr lang="en-US" sz="1500" b="1" dirty="0">
-                <a:solidFill>
-                  <a:srgbClr val="FFFFFF"/>
-                </a:solidFill>
-                <a:latin typeface="Aptos" pitchFamily="34" charset="0"/>
-                <a:ea typeface="Aptos" pitchFamily="34" charset="-122"/>
-                <a:cs typeface="Aptos" pitchFamily="34" charset="-120"/>
-              </a:rPr>
-              <a:t>Do</a:t>
-            </a:r>
-            <a:endParaRPr lang="en-US" sz="1500" dirty="0"/>
-          </a:p>
-        </p:txBody>
-      </p:sp>
-      <p:sp>
-        <p:nvSpPr>
-          <p:cNvPr id="18" name="Shape 16"/>
-          <p:cNvSpPr/>
-          <p:nvPr/>
-        </p:nvSpPr>
-        <p:spPr>
-          <a:xfrm>
-            <a:off x="10024872" y="3319272"/>
-            <a:ext cx="792480" cy="749808"/>
-          </a:xfrm>
-          <a:prstGeom prst="roundRect">
-            <a:avLst>
-              <a:gd name="adj" fmla="val 14634"/>
-            </a:avLst>
-          </a:prstGeom>
-          <a:solidFill>
-            <a:srgbClr val="D69A2D"/>
-          </a:solidFill>
-          <a:ln w="12700">
-            <a:solidFill>
-              <a:srgbClr val="D69A2D"/>
-            </a:solidFill>
-            <a:prstDash val="solid"/>
-          </a:ln>
-        </p:spPr>
-      </p:sp>
-      <p:sp>
-        <p:nvSpPr>
-          <p:cNvPr id="19" name="Text 17"/>
-          <p:cNvSpPr/>
-          <p:nvPr/>
-        </p:nvSpPr>
-        <p:spPr>
-          <a:xfrm>
-            <a:off x="10098024" y="3511296"/>
-            <a:ext cx="646176" cy="310896"/>
-          </a:xfrm>
-          <a:prstGeom prst="rect">
-            <a:avLst/>
-          </a:prstGeom>
-          <a:noFill/>
-          <a:ln/>
-        </p:spPr>
-        <p:txBody>
-          <a:bodyPr wrap="square" lIns="0" tIns="0" rIns="0" bIns="0" rtlCol="0" anchor="ctr">
-            <a:normAutofit/>
-          </a:bodyPr>
-          <a:lstStyle/>
-          <a:p>
-            <a:pPr algn="ctr" indent="0" marL="0">
-              <a:buNone/>
-            </a:pPr>
-            <a:r>
-              <a:rPr lang="en-US" sz="1500" b="1" dirty="0">
-                <a:solidFill>
-                  <a:srgbClr val="FFFFFF"/>
-                </a:solidFill>
-                <a:latin typeface="Aptos" pitchFamily="34" charset="0"/>
-                <a:ea typeface="Aptos" pitchFamily="34" charset="-122"/>
-                <a:cs typeface="Aptos" pitchFamily="34" charset="-120"/>
-              </a:rPr>
-              <a:t>Review</a:t>
-            </a:r>
-            <a:endParaRPr lang="en-US" sz="1500" dirty="0"/>
-          </a:p>
-        </p:txBody>
-      </p:sp>
-      <p:sp>
-        <p:nvSpPr>
-          <p:cNvPr id="20" name="Shape 18"/>
-          <p:cNvSpPr/>
-          <p:nvPr/>
-        </p:nvSpPr>
-        <p:spPr>
-          <a:xfrm>
-            <a:off x="8293608" y="4389120"/>
-            <a:ext cx="2157984" cy="0"/>
-          </a:xfrm>
-          <a:prstGeom prst="line">
-            <a:avLst/>
-          </a:prstGeom>
-          <a:noFill/>
-          <a:ln w="25400">
-            <a:solidFill>
-              <a:srgbClr val="8ABBD8"/>
-            </a:solidFill>
-            <a:prstDash val="solid"/>
-          </a:ln>
-        </p:spPr>
-      </p:sp>
-      <p:sp>
-        <p:nvSpPr>
-          <p:cNvPr id="21" name="Text 19"/>
-          <p:cNvSpPr/>
-          <p:nvPr/>
-        </p:nvSpPr>
-        <p:spPr>
-          <a:xfrm>
-            <a:off x="7909560" y="3977640"/>
-            <a:ext cx="2926080" cy="182880"/>
-          </a:xfrm>
-          <a:prstGeom prst="rect">
-            <a:avLst/>
-          </a:prstGeom>
-          <a:noFill/>
-          <a:ln/>
-        </p:spPr>
-        <p:txBody>
-          <a:bodyPr wrap="square" lIns="0" tIns="0" rIns="0" bIns="0" rtlCol="0" anchor="ctr"/>
-          <a:lstStyle/>
-          <a:p>
-            <a:pPr algn="ctr" indent="0" marL="0">
-              <a:buNone/>
-            </a:pPr>
-            <a:r>
-              <a:rPr lang="en-US" sz="1000" dirty="0">
-                <a:solidFill>
-                  <a:srgbClr val="003A63"/>
-                </a:solidFill>
-                <a:latin typeface="Aptos" pitchFamily="34" charset="0"/>
-                <a:ea typeface="Aptos" pitchFamily="34" charset="-122"/>
-                <a:cs typeface="Aptos" pitchFamily="34" charset="-120"/>
-              </a:rPr>
-              <a:t>Dependencies visible</a:t>
-            </a:r>
-            <a:endParaRPr lang="en-US" sz="1000" dirty="0"/>
-          </a:p>
-        </p:txBody>
-      </p:sp>
-      <p:sp>
-        <p:nvSpPr>
-          <p:cNvPr id="22" name="Shape 20"/>
           <p:cNvSpPr/>
           <p:nvPr/>
         </p:nvSpPr>
@@ -19994,7 +16929,7 @@
       </p:sp>
       <p:sp>
         <p:nvSpPr>
-          <p:cNvPr id="23" name="Text 21"/>
+          <p:cNvPr id="17" name="Text 15"/>
           <p:cNvSpPr/>
           <p:nvPr/>
         </p:nvSpPr>
@@ -20033,7 +16968,7 @@
       </p:sp>
       <p:sp>
         <p:nvSpPr>
-          <p:cNvPr id="24" name="Text 22"/>
+          <p:cNvPr id="18" name="Text 16"/>
           <p:cNvSpPr/>
           <p:nvPr/>
         </p:nvSpPr>

--- a/downloads/presentations/modules/pmg-210.pptx
+++ b/downloads/presentations/modules/pmg-210.pptx
@@ -3346,49 +3346,58 @@
           <a:ln/>
         </p:spPr>
         <p:txBody>
-          <a:bodyPr wrap="square" lIns="635" tIns="635" rIns="635" bIns="635" rtlCol="0" anchor="t">
+          <a:bodyPr wrap="square" lIns="1016" tIns="1016" rIns="1016" bIns="1016" rtlCol="0" anchor="t">
             <a:normAutofit/>
           </a:bodyPr>
           <a:lstStyle/>
           <a:p>
+            <a:pPr indent="0" marL="0">
+              <a:buNone/>
+            </a:pPr>
             <a:r>
               <a:rPr lang="en-US" sz="2100" dirty="0">
                 <a:solidFill>
-                  <a:srgbClr val="17364A"/>
-                </a:solidFill>
-                <a:latin typeface="Aptos" pitchFamily="34" charset="0"/>
-                <a:ea typeface="Aptos" pitchFamily="34" charset="-122"/>
-                <a:cs typeface="Aptos" pitchFamily="34" charset="-120"/>
-              </a:rPr>
-              <a:t>A requirement is a clear statement of what a system must do or how it must perform.</a:t>
+                  <a:srgbClr val="003A63"/>
+                </a:solidFill>
+                <a:latin typeface="Aptos" pitchFamily="34" charset="0"/>
+                <a:ea typeface="Aptos" pitchFamily="34" charset="-122"/>
+                <a:cs typeface="Aptos" pitchFamily="34" charset="-120"/>
+              </a:rPr>
+              <a:t>• A requirement is a clear statement of what a system must do or how it must perform.</a:t>
             </a:r>
             <a:endParaRPr lang="en-US" sz="2100" dirty="0"/>
           </a:p>
           <a:p>
+            <a:pPr indent="0" marL="0">
+              <a:buNone/>
+            </a:pPr>
             <a:r>
               <a:rPr lang="en-US" sz="2100" dirty="0">
                 <a:solidFill>
-                  <a:srgbClr val="17364A"/>
-                </a:solidFill>
-                <a:latin typeface="Aptos" pitchFamily="34" charset="0"/>
-                <a:ea typeface="Aptos" pitchFamily="34" charset="-122"/>
-                <a:cs typeface="Aptos" pitchFamily="34" charset="-120"/>
-              </a:rPr>
-              <a:t>AI requirements must cover functional capabilities, nonfunctional expectations, data handling,.</a:t>
+                  <a:srgbClr val="003A63"/>
+                </a:solidFill>
+                <a:latin typeface="Aptos" pitchFamily="34" charset="0"/>
+                <a:ea typeface="Aptos" pitchFamily="34" charset="-122"/>
+                <a:cs typeface="Aptos" pitchFamily="34" charset="-120"/>
+              </a:rPr>
+              <a:t>• AI requirements must cover functional capabilities, nonfunctional expectations, data handling,.</a:t>
             </a:r>
             <a:endParaRPr lang="en-US" sz="2100" dirty="0"/>
           </a:p>
           <a:p>
+            <a:pPr indent="0" marL="0">
+              <a:buNone/>
+            </a:pPr>
             <a:r>
               <a:rPr lang="en-US" sz="2100" dirty="0">
                 <a:solidFill>
-                  <a:srgbClr val="17364A"/>
-                </a:solidFill>
-                <a:latin typeface="Aptos" pitchFamily="34" charset="0"/>
-                <a:ea typeface="Aptos" pitchFamily="34" charset="-122"/>
-                <a:cs typeface="Aptos" pitchFamily="34" charset="-120"/>
-              </a:rPr>
-              <a:t>Functional requirements describe what the tool must do, such as summarize a case report, classify a.</a:t>
+                  <a:srgbClr val="003A63"/>
+                </a:solidFill>
+                <a:latin typeface="Aptos" pitchFamily="34" charset="0"/>
+                <a:ea typeface="Aptos" pitchFamily="34" charset="-122"/>
+                <a:cs typeface="Aptos" pitchFamily="34" charset="-120"/>
+              </a:rPr>
+              <a:t>• Functional requirements describe what the tool must do, such as summarize a case report,.</a:t>
             </a:r>
             <a:endParaRPr lang="en-US" sz="2100" dirty="0"/>
           </a:p>
@@ -3468,17 +3477,17 @@
         </p:nvSpPr>
         <p:spPr>
           <a:xfrm>
-            <a:off x="7799832" y="1828800"/>
-            <a:ext cx="3145536" cy="685800"/>
-          </a:xfrm>
-          <a:prstGeom prst="rect">
-            <a:avLst/>
-          </a:prstGeom>
-          <a:noFill/>
-          <a:ln/>
-        </p:spPr>
-        <p:txBody>
-          <a:bodyPr wrap="square" lIns="0" tIns="0" rIns="0" bIns="0" rtlCol="0" anchor="t">
+            <a:off x="7799832" y="1801368"/>
+            <a:ext cx="3145536" cy="758952"/>
+          </a:xfrm>
+          <a:prstGeom prst="rect">
+            <a:avLst/>
+          </a:prstGeom>
+          <a:noFill/>
+          <a:ln/>
+        </p:spPr>
+        <p:txBody>
+          <a:bodyPr wrap="square" lIns="254" tIns="254" rIns="254" bIns="254" rtlCol="0" anchor="t">
             <a:normAutofit/>
           </a:bodyPr>
           <a:lstStyle/>
@@ -3487,7 +3496,7 @@
               <a:buNone/>
             </a:pPr>
             <a:r>
-              <a:rPr lang="en-US" sz="1550" dirty="0">
+              <a:rPr lang="en-US" sz="1320" dirty="0">
                 <a:solidFill>
                   <a:srgbClr val="17364A"/>
                 </a:solidFill>
@@ -3497,7 +3506,7 @@
               </a:rPr>
               <a:t>A requirement is a clear statement of what a system must do or how it must perform.</a:t>
             </a:r>
-            <a:endParaRPr lang="en-US" sz="1550" dirty="0"/>
+            <a:endParaRPr lang="en-US" sz="1320" dirty="0"/>
           </a:p>
         </p:txBody>
       </p:sp>
@@ -3585,13 +3594,16 @@
           <a:ln/>
         </p:spPr>
         <p:txBody>
-          <a:bodyPr wrap="square" lIns="254" tIns="254" rIns="254" bIns="254" rtlCol="0" anchor="t">
+          <a:bodyPr wrap="square" lIns="508" tIns="508" rIns="508" bIns="508" rtlCol="0" anchor="t">
             <a:normAutofit/>
           </a:bodyPr>
           <a:lstStyle/>
           <a:p>
-            <a:r>
-              <a:rPr lang="en-US" sz="1380" dirty="0">
+            <a:pPr indent="0" marL="0">
+              <a:buNone/>
+            </a:pPr>
+            <a:r>
+              <a:rPr lang="en-US" sz="1220" dirty="0">
                 <a:solidFill>
                   <a:srgbClr val="17364A"/>
                 </a:solidFill>
@@ -3599,13 +3611,16 @@
                 <a:ea typeface="Aptos" pitchFamily="34" charset="-122"/>
                 <a:cs typeface="Aptos" pitchFamily="34" charset="-120"/>
               </a:rPr>
-              <a:t>AI requirements must cover functional capabilities, nonfunctional expectations, data.</a:t>
-            </a:r>
-            <a:endParaRPr lang="en-US" sz="1380" dirty="0"/>
-          </a:p>
-          <a:p>
-            <a:r>
-              <a:rPr lang="en-US" sz="1380" dirty="0">
+              <a:t>AI requirements must cover functional capabilities, nonfunctional.</a:t>
+            </a:r>
+            <a:endParaRPr lang="en-US" sz="1220" dirty="0"/>
+          </a:p>
+          <a:p>
+            <a:pPr indent="0" marL="0">
+              <a:buNone/>
+            </a:pPr>
+            <a:r>
+              <a:rPr lang="en-US" sz="1220" dirty="0">
                 <a:solidFill>
                   <a:srgbClr val="17364A"/>
                 </a:solidFill>
@@ -3613,13 +3628,16 @@
                 <a:ea typeface="Aptos" pitchFamily="34" charset="-122"/>
                 <a:cs typeface="Aptos" pitchFamily="34" charset="-120"/>
               </a:rPr>
-              <a:t>Functional requirements describe what the tool must do, such as summarize a case report,.</a:t>
-            </a:r>
-            <a:endParaRPr lang="en-US" sz="1380" dirty="0"/>
-          </a:p>
-          <a:p>
-            <a:r>
-              <a:rPr lang="en-US" sz="1380" dirty="0">
+              <a:t>Functional requirements describe what the tool must do, such as.</a:t>
+            </a:r>
+            <a:endParaRPr lang="en-US" sz="1220" dirty="0"/>
+          </a:p>
+          <a:p>
+            <a:pPr indent="0" marL="0">
+              <a:buNone/>
+            </a:pPr>
+            <a:r>
+              <a:rPr lang="en-US" sz="1220" dirty="0">
                 <a:solidFill>
                   <a:srgbClr val="17364A"/>
                 </a:solidFill>
@@ -3627,9 +3645,9 @@
                 <a:ea typeface="Aptos" pitchFamily="34" charset="-122"/>
                 <a:cs typeface="Aptos" pitchFamily="34" charset="-120"/>
               </a:rPr>
-              <a:t>Nonfunctional requirements describe how the tool must perform, such as uptime, response.</a:t>
-            </a:r>
-            <a:endParaRPr lang="en-US" sz="1380" dirty="0"/>
+              <a:t>Nonfunctional requirements describe how the tool must perform,.</a:t>
+            </a:r>
+            <a:endParaRPr lang="en-US" sz="1220" dirty="0"/>
           </a:p>
         </p:txBody>
       </p:sp>
@@ -3707,17 +3725,17 @@
         </p:nvSpPr>
         <p:spPr>
           <a:xfrm>
-            <a:off x="7799832" y="5001768"/>
-            <a:ext cx="3145536" cy="502920"/>
-          </a:xfrm>
-          <a:prstGeom prst="rect">
-            <a:avLst/>
-          </a:prstGeom>
-          <a:noFill/>
-          <a:ln/>
-        </p:spPr>
-        <p:txBody>
-          <a:bodyPr wrap="square" lIns="0" tIns="0" rIns="0" bIns="0" rtlCol="0" anchor="t">
+            <a:off x="7799832" y="4974336"/>
+            <a:ext cx="3145536" cy="576072"/>
+          </a:xfrm>
+          <a:prstGeom prst="rect">
+            <a:avLst/>
+          </a:prstGeom>
+          <a:noFill/>
+          <a:ln/>
+        </p:spPr>
+        <p:txBody>
+          <a:bodyPr wrap="square" lIns="254" tIns="254" rIns="254" bIns="254" rtlCol="0" anchor="t">
             <a:normAutofit/>
           </a:bodyPr>
           <a:lstStyle/>
@@ -3726,7 +3744,7 @@
               <a:buNone/>
             </a:pPr>
             <a:r>
-              <a:rPr lang="en-US" sz="1550" dirty="0">
+              <a:rPr lang="en-US" sz="1320" dirty="0">
                 <a:solidFill>
                   <a:srgbClr val="17364A"/>
                 </a:solidFill>
@@ -3734,9 +3752,9 @@
                 <a:ea typeface="Aptos" pitchFamily="34" charset="-122"/>
                 <a:cs typeface="Aptos" pitchFamily="34" charset="-120"/>
               </a:rPr>
-              <a:t>Use the concept to clarify workflow changes, dependencies, staffing, procurement requirements, training needs, and implementation checkpoints.</a:t>
-            </a:r>
-            <a:endParaRPr lang="en-US" sz="1550" dirty="0"/>
+              <a:t>Use the concept to clarify workflow changes, dependencies, staffing, procurement requirements, training needs, and.</a:t>
+            </a:r>
+            <a:endParaRPr lang="en-US" sz="1320" dirty="0"/>
           </a:p>
         </p:txBody>
       </p:sp>
@@ -4037,35 +4055,41 @@
           <a:ln/>
         </p:spPr>
         <p:txBody>
-          <a:bodyPr wrap="square" lIns="635" tIns="635" rIns="635" bIns="635" rtlCol="0" anchor="t">
+          <a:bodyPr wrap="square" lIns="1016" tIns="1016" rIns="1016" bIns="1016" rtlCol="0" anchor="t">
             <a:normAutofit/>
           </a:bodyPr>
           <a:lstStyle/>
           <a:p>
+            <a:pPr indent="0" marL="0">
+              <a:buNone/>
+            </a:pPr>
             <a:r>
               <a:rPr lang="en-US" sz="2100" dirty="0">
                 <a:solidFill>
-                  <a:srgbClr val="17364A"/>
-                </a:solidFill>
-                <a:latin typeface="Aptos" pitchFamily="34" charset="0"/>
-                <a:ea typeface="Aptos" pitchFamily="34" charset="-122"/>
-                <a:cs typeface="Aptos" pitchFamily="34" charset="-120"/>
-              </a:rPr>
-              <a:t>A state health agency procuring an AI-supported case triage tool should require interoperability with.</a:t>
+                  <a:srgbClr val="003A63"/>
+                </a:solidFill>
+                <a:latin typeface="Aptos" pitchFamily="34" charset="0"/>
+                <a:ea typeface="Aptos" pitchFamily="34" charset="-122"/>
+                <a:cs typeface="Aptos" pitchFamily="34" charset="-120"/>
+              </a:rPr>
+              <a:t>• A state health agency procuring an AI-supported case triage tool should require.</a:t>
             </a:r>
             <a:endParaRPr lang="en-US" sz="2100" dirty="0"/>
           </a:p>
           <a:p>
+            <a:pPr indent="0" marL="0">
+              <a:buNone/>
+            </a:pPr>
             <a:r>
               <a:rPr lang="en-US" sz="2100" dirty="0">
                 <a:solidFill>
-                  <a:srgbClr val="17364A"/>
-                </a:solidFill>
-                <a:latin typeface="Aptos" pitchFamily="34" charset="0"/>
-                <a:ea typeface="Aptos" pitchFamily="34" charset="-122"/>
-                <a:cs typeface="Aptos" pitchFamily="34" charset="-120"/>
-              </a:rPr>
-              <a:t>These requirements make vendor claims testable and enforceable.</a:t>
+                  <a:srgbClr val="003A63"/>
+                </a:solidFill>
+                <a:latin typeface="Aptos" pitchFamily="34" charset="0"/>
+                <a:ea typeface="Aptos" pitchFamily="34" charset="-122"/>
+                <a:cs typeface="Aptos" pitchFamily="34" charset="-120"/>
+              </a:rPr>
+              <a:t>• These requirements make vendor claims testable and enforceable.</a:t>
             </a:r>
             <a:endParaRPr lang="en-US" sz="2100" dirty="0"/>
           </a:p>
@@ -4145,17 +4169,17 @@
         </p:nvSpPr>
         <p:spPr>
           <a:xfrm>
-            <a:off x="7799832" y="1828800"/>
-            <a:ext cx="3145536" cy="685800"/>
-          </a:xfrm>
-          <a:prstGeom prst="rect">
-            <a:avLst/>
-          </a:prstGeom>
-          <a:noFill/>
-          <a:ln/>
-        </p:spPr>
-        <p:txBody>
-          <a:bodyPr wrap="square" lIns="0" tIns="0" rIns="0" bIns="0" rtlCol="0" anchor="t">
+            <a:off x="7799832" y="1801368"/>
+            <a:ext cx="3145536" cy="758952"/>
+          </a:xfrm>
+          <a:prstGeom prst="rect">
+            <a:avLst/>
+          </a:prstGeom>
+          <a:noFill/>
+          <a:ln/>
+        </p:spPr>
+        <p:txBody>
+          <a:bodyPr wrap="square" lIns="254" tIns="254" rIns="254" bIns="254" rtlCol="0" anchor="t">
             <a:normAutofit/>
           </a:bodyPr>
           <a:lstStyle/>
@@ -4164,7 +4188,7 @@
               <a:buNone/>
             </a:pPr>
             <a:r>
-              <a:rPr lang="en-US" sz="1550" dirty="0">
+              <a:rPr lang="en-US" sz="1320" dirty="0">
                 <a:solidFill>
                   <a:srgbClr val="17364A"/>
                 </a:solidFill>
@@ -4174,7 +4198,7 @@
               </a:rPr>
               <a:t>A state health agency procuring an AI-supported case triage tool should require interoperability with.</a:t>
             </a:r>
-            <a:endParaRPr lang="en-US" sz="1550" dirty="0"/>
+            <a:endParaRPr lang="en-US" sz="1320" dirty="0"/>
           </a:p>
         </p:txBody>
       </p:sp>
@@ -4262,13 +4286,16 @@
           <a:ln/>
         </p:spPr>
         <p:txBody>
-          <a:bodyPr wrap="square" lIns="254" tIns="254" rIns="254" bIns="254" rtlCol="0" anchor="t">
+          <a:bodyPr wrap="square" lIns="508" tIns="508" rIns="508" bIns="508" rtlCol="0" anchor="t">
             <a:normAutofit/>
           </a:bodyPr>
           <a:lstStyle/>
           <a:p>
-            <a:r>
-              <a:rPr lang="en-US" sz="1380" dirty="0">
+            <a:pPr indent="0" marL="0">
+              <a:buNone/>
+            </a:pPr>
+            <a:r>
+              <a:rPr lang="en-US" sz="1220" dirty="0">
                 <a:solidFill>
                   <a:srgbClr val="17364A"/>
                 </a:solidFill>
@@ -4276,13 +4303,16 @@
                 <a:ea typeface="Aptos" pitchFamily="34" charset="-122"/>
                 <a:cs typeface="Aptos" pitchFamily="34" charset="-120"/>
               </a:rPr>
-              <a:t>A state health agency procuring an AI-supported case triage tool should require.</a:t>
-            </a:r>
-            <a:endParaRPr lang="en-US" sz="1380" dirty="0"/>
-          </a:p>
-          <a:p>
-            <a:r>
-              <a:rPr lang="en-US" sz="1380" dirty="0">
+              <a:t>A state health agency procuring an AI-supported case triage tool.</a:t>
+            </a:r>
+            <a:endParaRPr lang="en-US" sz="1220" dirty="0"/>
+          </a:p>
+          <a:p>
+            <a:pPr indent="0" marL="0">
+              <a:buNone/>
+            </a:pPr>
+            <a:r>
+              <a:rPr lang="en-US" sz="1220" dirty="0">
                 <a:solidFill>
                   <a:srgbClr val="17364A"/>
                 </a:solidFill>
@@ -4292,7 +4322,7 @@
               </a:rPr>
               <a:t>These requirements make vendor claims testable and enforceable.</a:t>
             </a:r>
-            <a:endParaRPr lang="en-US" sz="1380" dirty="0"/>
+            <a:endParaRPr lang="en-US" sz="1220" dirty="0"/>
           </a:p>
         </p:txBody>
       </p:sp>
@@ -4370,17 +4400,17 @@
         </p:nvSpPr>
         <p:spPr>
           <a:xfrm>
-            <a:off x="7799832" y="5001768"/>
-            <a:ext cx="3145536" cy="502920"/>
-          </a:xfrm>
-          <a:prstGeom prst="rect">
-            <a:avLst/>
-          </a:prstGeom>
-          <a:noFill/>
-          <a:ln/>
-        </p:spPr>
-        <p:txBody>
-          <a:bodyPr wrap="square" lIns="0" tIns="0" rIns="0" bIns="0" rtlCol="0" anchor="t">
+            <a:off x="7799832" y="4974336"/>
+            <a:ext cx="3145536" cy="576072"/>
+          </a:xfrm>
+          <a:prstGeom prst="rect">
+            <a:avLst/>
+          </a:prstGeom>
+          <a:noFill/>
+          <a:ln/>
+        </p:spPr>
+        <p:txBody>
+          <a:bodyPr wrap="square" lIns="254" tIns="254" rIns="254" bIns="254" rtlCol="0" anchor="t">
             <a:normAutofit/>
           </a:bodyPr>
           <a:lstStyle/>
@@ -4389,7 +4419,7 @@
               <a:buNone/>
             </a:pPr>
             <a:r>
-              <a:rPr lang="en-US" sz="1550" dirty="0">
+              <a:rPr lang="en-US" sz="1320" dirty="0">
                 <a:solidFill>
                   <a:srgbClr val="17364A"/>
                 </a:solidFill>
@@ -4397,9 +4427,9 @@
                 <a:ea typeface="Aptos" pitchFamily="34" charset="-122"/>
                 <a:cs typeface="Aptos" pitchFamily="34" charset="-120"/>
               </a:rPr>
-              <a:t>Use the concept to clarify workflow changes, dependencies, staffing, procurement requirements, training needs, and implementation checkpoints.</a:t>
-            </a:r>
-            <a:endParaRPr lang="en-US" sz="1550" dirty="0"/>
+              <a:t>Use the concept to clarify workflow changes, dependencies, staffing, procurement requirements, training needs, and.</a:t>
+            </a:r>
+            <a:endParaRPr lang="en-US" sz="1320" dirty="0"/>
           </a:p>
         </p:txBody>
       </p:sp>
@@ -4700,49 +4730,58 @@
           <a:ln/>
         </p:spPr>
         <p:txBody>
-          <a:bodyPr wrap="square" lIns="635" tIns="635" rIns="635" bIns="635" rtlCol="0" anchor="t">
+          <a:bodyPr wrap="square" lIns="1016" tIns="1016" rIns="1016" bIns="1016" rtlCol="0" anchor="t">
             <a:normAutofit/>
           </a:bodyPr>
           <a:lstStyle/>
           <a:p>
+            <a:pPr indent="0" marL="0">
+              <a:buNone/>
+            </a:pPr>
             <a:r>
               <a:rPr lang="en-US" sz="2100" dirty="0">
                 <a:solidFill>
-                  <a:srgbClr val="17364A"/>
-                </a:solidFill>
-                <a:latin typeface="Aptos" pitchFamily="34" charset="0"/>
-                <a:ea typeface="Aptos" pitchFamily="34" charset="-122"/>
-                <a:cs typeface="Aptos" pitchFamily="34" charset="-120"/>
-              </a:rPr>
-              <a:t>Strong AI requirements begin with intended use.</a:t>
+                  <a:srgbClr val="003A63"/>
+                </a:solidFill>
+                <a:latin typeface="Aptos" pitchFamily="34" charset="0"/>
+                <a:ea typeface="Aptos" pitchFamily="34" charset="-122"/>
+                <a:cs typeface="Aptos" pitchFamily="34" charset="-120"/>
+              </a:rPr>
+              <a:t>• Strong AI requirements begin with intended use.</a:t>
             </a:r>
             <a:endParaRPr lang="en-US" sz="2100" dirty="0"/>
           </a:p>
           <a:p>
+            <a:pPr indent="0" marL="0">
+              <a:buNone/>
+            </a:pPr>
             <a:r>
               <a:rPr lang="en-US" sz="2100" dirty="0">
                 <a:solidFill>
-                  <a:srgbClr val="17364A"/>
-                </a:solidFill>
-                <a:latin typeface="Aptos" pitchFamily="34" charset="0"/>
-                <a:ea typeface="Aptos" pitchFamily="34" charset="-122"/>
-                <a:cs typeface="Aptos" pitchFamily="34" charset="-120"/>
-              </a:rPr>
-              <a:t>The agency should state the specific workflow, users, data sources, outputs, and decisions the system.</a:t>
+                  <a:srgbClr val="003A63"/>
+                </a:solidFill>
+                <a:latin typeface="Aptos" pitchFamily="34" charset="0"/>
+                <a:ea typeface="Aptos" pitchFamily="34" charset="-122"/>
+                <a:cs typeface="Aptos" pitchFamily="34" charset="-120"/>
+              </a:rPr>
+              <a:t>• The agency should state the specific workflow, users, data sources, outputs, and decisions the.</a:t>
             </a:r>
             <a:endParaRPr lang="en-US" sz="2100" dirty="0"/>
           </a:p>
           <a:p>
+            <a:pPr indent="0" marL="0">
+              <a:buNone/>
+            </a:pPr>
             <a:r>
               <a:rPr lang="en-US" sz="2100" dirty="0">
                 <a:solidFill>
-                  <a:srgbClr val="17364A"/>
-                </a:solidFill>
-                <a:latin typeface="Aptos" pitchFamily="34" charset="0"/>
-                <a:ea typeface="Aptos" pitchFamily="34" charset="-122"/>
-                <a:cs typeface="Aptos" pitchFamily="34" charset="-120"/>
-              </a:rPr>
-              <a:t>It should also state prohibited uses.</a:t>
+                  <a:srgbClr val="003A63"/>
+                </a:solidFill>
+                <a:latin typeface="Aptos" pitchFamily="34" charset="0"/>
+                <a:ea typeface="Aptos" pitchFamily="34" charset="-122"/>
+                <a:cs typeface="Aptos" pitchFamily="34" charset="-120"/>
+              </a:rPr>
+              <a:t>• It should also state prohibited uses.</a:t>
             </a:r>
             <a:endParaRPr lang="en-US" sz="2100" dirty="0"/>
           </a:p>
@@ -4822,17 +4861,17 @@
         </p:nvSpPr>
         <p:spPr>
           <a:xfrm>
-            <a:off x="7799832" y="1828800"/>
-            <a:ext cx="3145536" cy="685800"/>
-          </a:xfrm>
-          <a:prstGeom prst="rect">
-            <a:avLst/>
-          </a:prstGeom>
-          <a:noFill/>
-          <a:ln/>
-        </p:spPr>
-        <p:txBody>
-          <a:bodyPr wrap="square" lIns="0" tIns="0" rIns="0" bIns="0" rtlCol="0" anchor="t">
+            <a:off x="7799832" y="1801368"/>
+            <a:ext cx="3145536" cy="758952"/>
+          </a:xfrm>
+          <a:prstGeom prst="rect">
+            <a:avLst/>
+          </a:prstGeom>
+          <a:noFill/>
+          <a:ln/>
+        </p:spPr>
+        <p:txBody>
+          <a:bodyPr wrap="square" lIns="254" tIns="254" rIns="254" bIns="254" rtlCol="0" anchor="t">
             <a:normAutofit/>
           </a:bodyPr>
           <a:lstStyle/>
@@ -4841,7 +4880,7 @@
               <a:buNone/>
             </a:pPr>
             <a:r>
-              <a:rPr lang="en-US" sz="1550" dirty="0">
+              <a:rPr lang="en-US" sz="1320" dirty="0">
                 <a:solidFill>
                   <a:srgbClr val="17364A"/>
                 </a:solidFill>
@@ -4851,7 +4890,7 @@
               </a:rPr>
               <a:t>Strong AI requirements begin with intended use.</a:t>
             </a:r>
-            <a:endParaRPr lang="en-US" sz="1550" dirty="0"/>
+            <a:endParaRPr lang="en-US" sz="1320" dirty="0"/>
           </a:p>
         </p:txBody>
       </p:sp>
@@ -4939,13 +4978,16 @@
           <a:ln/>
         </p:spPr>
         <p:txBody>
-          <a:bodyPr wrap="square" lIns="254" tIns="254" rIns="254" bIns="254" rtlCol="0" anchor="t">
+          <a:bodyPr wrap="square" lIns="508" tIns="508" rIns="508" bIns="508" rtlCol="0" anchor="t">
             <a:normAutofit/>
           </a:bodyPr>
           <a:lstStyle/>
           <a:p>
-            <a:r>
-              <a:rPr lang="en-US" sz="1380" dirty="0">
+            <a:pPr indent="0" marL="0">
+              <a:buNone/>
+            </a:pPr>
+            <a:r>
+              <a:rPr lang="en-US" sz="1220" dirty="0">
                 <a:solidFill>
                   <a:srgbClr val="17364A"/>
                 </a:solidFill>
@@ -4953,13 +4995,16 @@
                 <a:ea typeface="Aptos" pitchFamily="34" charset="-122"/>
                 <a:cs typeface="Aptos" pitchFamily="34" charset="-120"/>
               </a:rPr>
-              <a:t>The agency should state the specific workflow, users, data sources, outputs, and decisions.</a:t>
-            </a:r>
-            <a:endParaRPr lang="en-US" sz="1380" dirty="0"/>
-          </a:p>
-          <a:p>
-            <a:r>
-              <a:rPr lang="en-US" sz="1380" dirty="0">
+              <a:t>The agency should state the specific workflow, users, data.</a:t>
+            </a:r>
+            <a:endParaRPr lang="en-US" sz="1220" dirty="0"/>
+          </a:p>
+          <a:p>
+            <a:pPr indent="0" marL="0">
+              <a:buNone/>
+            </a:pPr>
+            <a:r>
+              <a:rPr lang="en-US" sz="1220" dirty="0">
                 <a:solidFill>
                   <a:srgbClr val="17364A"/>
                 </a:solidFill>
@@ -4967,13 +5012,16 @@
                 <a:ea typeface="Aptos" pitchFamily="34" charset="-122"/>
                 <a:cs typeface="Aptos" pitchFamily="34" charset="-120"/>
               </a:rPr>
-              <a:t>This prevents scope creep and reduces the chance that a tool will be used for decisions it.</a:t>
-            </a:r>
-            <a:endParaRPr lang="en-US" sz="1380" dirty="0"/>
-          </a:p>
-          <a:p>
-            <a:r>
-              <a:rPr lang="en-US" sz="1380" dirty="0">
+              <a:t>This prevents scope creep and reduces the chance that a tool will.</a:t>
+            </a:r>
+            <a:endParaRPr lang="en-US" sz="1220" dirty="0"/>
+          </a:p>
+          <a:p>
+            <a:pPr indent="0" marL="0">
+              <a:buNone/>
+            </a:pPr>
+            <a:r>
+              <a:rPr lang="en-US" sz="1220" dirty="0">
                 <a:solidFill>
                   <a:srgbClr val="17364A"/>
                 </a:solidFill>
@@ -4981,9 +5029,9 @@
                 <a:ea typeface="Aptos" pitchFamily="34" charset="-122"/>
                 <a:cs typeface="Aptos" pitchFamily="34" charset="-120"/>
               </a:rPr>
-              <a:t>Data requirements should specify allowed data sources, minimum necessary fields,.</a:t>
-            </a:r>
-            <a:endParaRPr lang="en-US" sz="1380" dirty="0"/>
+              <a:t>Data requirements should specify allowed data sources, minimum.</a:t>
+            </a:r>
+            <a:endParaRPr lang="en-US" sz="1220" dirty="0"/>
           </a:p>
         </p:txBody>
       </p:sp>
@@ -5061,17 +5109,17 @@
         </p:nvSpPr>
         <p:spPr>
           <a:xfrm>
-            <a:off x="7799832" y="5001768"/>
-            <a:ext cx="3145536" cy="502920"/>
-          </a:xfrm>
-          <a:prstGeom prst="rect">
-            <a:avLst/>
-          </a:prstGeom>
-          <a:noFill/>
-          <a:ln/>
-        </p:spPr>
-        <p:txBody>
-          <a:bodyPr wrap="square" lIns="0" tIns="0" rIns="0" bIns="0" rtlCol="0" anchor="t">
+            <a:off x="7799832" y="4974336"/>
+            <a:ext cx="3145536" cy="576072"/>
+          </a:xfrm>
+          <a:prstGeom prst="rect">
+            <a:avLst/>
+          </a:prstGeom>
+          <a:noFill/>
+          <a:ln/>
+        </p:spPr>
+        <p:txBody>
+          <a:bodyPr wrap="square" lIns="254" tIns="254" rIns="254" bIns="254" rtlCol="0" anchor="t">
             <a:normAutofit/>
           </a:bodyPr>
           <a:lstStyle/>
@@ -5080,7 +5128,7 @@
               <a:buNone/>
             </a:pPr>
             <a:r>
-              <a:rPr lang="en-US" sz="1550" dirty="0">
+              <a:rPr lang="en-US" sz="1320" dirty="0">
                 <a:solidFill>
                   <a:srgbClr val="17364A"/>
                 </a:solidFill>
@@ -5088,9 +5136,9 @@
                 <a:ea typeface="Aptos" pitchFamily="34" charset="-122"/>
                 <a:cs typeface="Aptos" pitchFamily="34" charset="-120"/>
               </a:rPr>
-              <a:t>Use the concept to clarify workflow changes, dependencies, staffing, procurement requirements, training needs, and implementation checkpoints.</a:t>
-            </a:r>
-            <a:endParaRPr lang="en-US" sz="1550" dirty="0"/>
+              <a:t>Use the concept to clarify workflow changes, dependencies, staffing, procurement requirements, training needs, and.</a:t>
+            </a:r>
+            <a:endParaRPr lang="en-US" sz="1320" dirty="0"/>
           </a:p>
         </p:txBody>
       </p:sp>
@@ -5391,49 +5439,58 @@
           <a:ln/>
         </p:spPr>
         <p:txBody>
-          <a:bodyPr wrap="square" lIns="635" tIns="635" rIns="635" bIns="635" rtlCol="0" anchor="t">
+          <a:bodyPr wrap="square" lIns="1016" tIns="1016" rIns="1016" bIns="1016" rtlCol="0" anchor="t">
             <a:normAutofit/>
           </a:bodyPr>
           <a:lstStyle/>
           <a:p>
+            <a:pPr indent="0" marL="0">
+              <a:buNone/>
+            </a:pPr>
             <a:r>
               <a:rPr lang="en-US" sz="2100" dirty="0">
                 <a:solidFill>
-                  <a:srgbClr val="17364A"/>
-                </a:solidFill>
-                <a:latin typeface="Aptos" pitchFamily="34" charset="0"/>
-                <a:ea typeface="Aptos" pitchFamily="34" charset="-122"/>
-                <a:cs typeface="Aptos" pitchFamily="34" charset="-120"/>
-              </a:rPr>
-              <a:t>A common failure mode is treating the topic as a technical detail rather than a public health control.</a:t>
+                  <a:srgbClr val="003A63"/>
+                </a:solidFill>
+                <a:latin typeface="Aptos" pitchFamily="34" charset="0"/>
+                <a:ea typeface="Aptos" pitchFamily="34" charset="-122"/>
+                <a:cs typeface="Aptos" pitchFamily="34" charset="-120"/>
+              </a:rPr>
+              <a:t>• A common failure mode is treating the topic as a technical detail rather than a public health.</a:t>
             </a:r>
             <a:endParaRPr lang="en-US" sz="2100" dirty="0"/>
           </a:p>
           <a:p>
+            <a:pPr indent="0" marL="0">
+              <a:buNone/>
+            </a:pPr>
             <a:r>
               <a:rPr lang="en-US" sz="2100" dirty="0">
                 <a:solidFill>
-                  <a:srgbClr val="17364A"/>
-                </a:solidFill>
-                <a:latin typeface="Aptos" pitchFamily="34" charset="0"/>
-                <a:ea typeface="Aptos" pitchFamily="34" charset="-122"/>
-                <a:cs typeface="Aptos" pitchFamily="34" charset="-120"/>
-              </a:rPr>
-              <a:t>When staff do not connect technical decisions to authority, workflow, equity, privacy, security, and.</a:t>
+                  <a:srgbClr val="003A63"/>
+                </a:solidFill>
+                <a:latin typeface="Aptos" pitchFamily="34" charset="0"/>
+                <a:ea typeface="Aptos" pitchFamily="34" charset="-122"/>
+                <a:cs typeface="Aptos" pitchFamily="34" charset="-120"/>
+              </a:rPr>
+              <a:t>• When staff do not connect technical decisions to authority, workflow, equity, privacy,.</a:t>
             </a:r>
             <a:endParaRPr lang="en-US" sz="2100" dirty="0"/>
           </a:p>
           <a:p>
+            <a:pPr indent="0" marL="0">
+              <a:buNone/>
+            </a:pPr>
             <a:r>
               <a:rPr lang="en-US" sz="2100" dirty="0">
                 <a:solidFill>
-                  <a:srgbClr val="17364A"/>
-                </a:solidFill>
-                <a:latin typeface="Aptos" pitchFamily="34" charset="0"/>
-                <a:ea typeface="Aptos" pitchFamily="34" charset="-122"/>
-                <a:cs typeface="Aptos" pitchFamily="34" charset="-120"/>
-              </a:rPr>
-              <a:t>Another risk is relying on vendor claims without agency-defined evidence.</a:t>
+                  <a:srgbClr val="003A63"/>
+                </a:solidFill>
+                <a:latin typeface="Aptos" pitchFamily="34" charset="0"/>
+                <a:ea typeface="Aptos" pitchFamily="34" charset="-122"/>
+                <a:cs typeface="Aptos" pitchFamily="34" charset="-120"/>
+              </a:rPr>
+              <a:t>• Another risk is relying on vendor claims without agency-defined evidence.</a:t>
             </a:r>
             <a:endParaRPr lang="en-US" sz="2100" dirty="0"/>
           </a:p>
@@ -5513,17 +5570,17 @@
         </p:nvSpPr>
         <p:spPr>
           <a:xfrm>
-            <a:off x="7799832" y="1828800"/>
-            <a:ext cx="3145536" cy="685800"/>
-          </a:xfrm>
-          <a:prstGeom prst="rect">
-            <a:avLst/>
-          </a:prstGeom>
-          <a:noFill/>
-          <a:ln/>
-        </p:spPr>
-        <p:txBody>
-          <a:bodyPr wrap="square" lIns="0" tIns="0" rIns="0" bIns="0" rtlCol="0" anchor="t">
+            <a:off x="7799832" y="1801368"/>
+            <a:ext cx="3145536" cy="758952"/>
+          </a:xfrm>
+          <a:prstGeom prst="rect">
+            <a:avLst/>
+          </a:prstGeom>
+          <a:noFill/>
+          <a:ln/>
+        </p:spPr>
+        <p:txBody>
+          <a:bodyPr wrap="square" lIns="254" tIns="254" rIns="254" bIns="254" rtlCol="0" anchor="t">
             <a:normAutofit/>
           </a:bodyPr>
           <a:lstStyle/>
@@ -5532,7 +5589,7 @@
               <a:buNone/>
             </a:pPr>
             <a:r>
-              <a:rPr lang="en-US" sz="1550" dirty="0">
+              <a:rPr lang="en-US" sz="1320" dirty="0">
                 <a:solidFill>
                   <a:srgbClr val="17364A"/>
                 </a:solidFill>
@@ -5542,7 +5599,7 @@
               </a:rPr>
               <a:t>A common failure mode is treating the topic as a technical detail rather than a public health control.</a:t>
             </a:r>
-            <a:endParaRPr lang="en-US" sz="1550" dirty="0"/>
+            <a:endParaRPr lang="en-US" sz="1320" dirty="0"/>
           </a:p>
         </p:txBody>
       </p:sp>
@@ -5630,13 +5687,16 @@
           <a:ln/>
         </p:spPr>
         <p:txBody>
-          <a:bodyPr wrap="square" lIns="254" tIns="254" rIns="254" bIns="254" rtlCol="0" anchor="t">
+          <a:bodyPr wrap="square" lIns="508" tIns="508" rIns="508" bIns="508" rtlCol="0" anchor="t">
             <a:normAutofit/>
           </a:bodyPr>
           <a:lstStyle/>
           <a:p>
-            <a:r>
-              <a:rPr lang="en-US" sz="1380" dirty="0">
+            <a:pPr indent="0" marL="0">
+              <a:buNone/>
+            </a:pPr>
+            <a:r>
+              <a:rPr lang="en-US" sz="1220" dirty="0">
                 <a:solidFill>
                   <a:srgbClr val="17364A"/>
                 </a:solidFill>
@@ -5644,13 +5704,16 @@
                 <a:ea typeface="Aptos" pitchFamily="34" charset="-122"/>
                 <a:cs typeface="Aptos" pitchFamily="34" charset="-120"/>
               </a:rPr>
-              <a:t>When staff do not connect technical decisions to authority, workflow, equity, privacy,.</a:t>
-            </a:r>
-            <a:endParaRPr lang="en-US" sz="1380" dirty="0"/>
-          </a:p>
-          <a:p>
-            <a:r>
-              <a:rPr lang="en-US" sz="1380" dirty="0">
+              <a:t>When staff do not connect technical decisions to authority,.</a:t>
+            </a:r>
+            <a:endParaRPr lang="en-US" sz="1220" dirty="0"/>
+          </a:p>
+          <a:p>
+            <a:pPr indent="0" marL="0">
+              <a:buNone/>
+            </a:pPr>
+            <a:r>
+              <a:rPr lang="en-US" sz="1220" dirty="0">
                 <a:solidFill>
                   <a:srgbClr val="17364A"/>
                 </a:solidFill>
@@ -5658,13 +5721,16 @@
                 <a:ea typeface="Aptos" pitchFamily="34" charset="-122"/>
                 <a:cs typeface="Aptos" pitchFamily="34" charset="-120"/>
               </a:rPr>
-              <a:t>Vendors may provide demonstrations, dashboards, or summary metrics that do not match the.</a:t>
-            </a:r>
-            <a:endParaRPr lang="en-US" sz="1380" dirty="0"/>
-          </a:p>
-          <a:p>
-            <a:r>
-              <a:rPr lang="en-US" sz="1380" dirty="0">
+              <a:t>Vendors may provide demonstrations, dashboards, or summary metrics.</a:t>
+            </a:r>
+            <a:endParaRPr lang="en-US" sz="1220" dirty="0"/>
+          </a:p>
+          <a:p>
+            <a:pPr indent="0" marL="0">
+              <a:buNone/>
+            </a:pPr>
+            <a:r>
+              <a:rPr lang="en-US" sz="1220" dirty="0">
                 <a:solidFill>
                   <a:srgbClr val="17364A"/>
                 </a:solidFill>
@@ -5672,9 +5738,9 @@
                 <a:ea typeface="Aptos" pitchFamily="34" charset="-122"/>
                 <a:cs typeface="Aptos" pitchFamily="34" charset="-120"/>
               </a:rPr>
-              <a:t>A guardrail is to require documentation, test results, acceptance criteria, and.</a:t>
-            </a:r>
-            <a:endParaRPr lang="en-US" sz="1380" dirty="0"/>
+              <a:t>A guardrail is to require documentation, test results, acceptance.</a:t>
+            </a:r>
+            <a:endParaRPr lang="en-US" sz="1220" dirty="0"/>
           </a:p>
         </p:txBody>
       </p:sp>
@@ -5752,17 +5818,17 @@
         </p:nvSpPr>
         <p:spPr>
           <a:xfrm>
-            <a:off x="7799832" y="5001768"/>
-            <a:ext cx="3145536" cy="502920"/>
-          </a:xfrm>
-          <a:prstGeom prst="rect">
-            <a:avLst/>
-          </a:prstGeom>
-          <a:noFill/>
-          <a:ln/>
-        </p:spPr>
-        <p:txBody>
-          <a:bodyPr wrap="square" lIns="0" tIns="0" rIns="0" bIns="0" rtlCol="0" anchor="t">
+            <a:off x="7799832" y="4974336"/>
+            <a:ext cx="3145536" cy="576072"/>
+          </a:xfrm>
+          <a:prstGeom prst="rect">
+            <a:avLst/>
+          </a:prstGeom>
+          <a:noFill/>
+          <a:ln/>
+        </p:spPr>
+        <p:txBody>
+          <a:bodyPr wrap="square" lIns="254" tIns="254" rIns="254" bIns="254" rtlCol="0" anchor="t">
             <a:normAutofit/>
           </a:bodyPr>
           <a:lstStyle/>
@@ -5771,7 +5837,7 @@
               <a:buNone/>
             </a:pPr>
             <a:r>
-              <a:rPr lang="en-US" sz="1550" dirty="0">
+              <a:rPr lang="en-US" sz="1320" dirty="0">
                 <a:solidFill>
                   <a:srgbClr val="17364A"/>
                 </a:solidFill>
@@ -5779,9 +5845,9 @@
                 <a:ea typeface="Aptos" pitchFamily="34" charset="-122"/>
                 <a:cs typeface="Aptos" pitchFamily="34" charset="-120"/>
               </a:rPr>
-              <a:t>Identify what could go wrong, who could be affected, what safeguards are needed, and what evidence should be reviewed before use expands.</a:t>
-            </a:r>
-            <a:endParaRPr lang="en-US" sz="1550" dirty="0"/>
+              <a:t>Identify what could go wrong, who could be affected, what safeguards are needed, and what evidence should be reviewed.</a:t>
+            </a:r>
+            <a:endParaRPr lang="en-US" sz="1320" dirty="0"/>
           </a:p>
         </p:txBody>
       </p:sp>
@@ -6082,49 +6148,58 @@
           <a:ln/>
         </p:spPr>
         <p:txBody>
-          <a:bodyPr wrap="square" lIns="635" tIns="635" rIns="635" bIns="635" rtlCol="0" anchor="t">
+          <a:bodyPr wrap="square" lIns="1016" tIns="1016" rIns="1016" bIns="1016" rtlCol="0" anchor="t">
             <a:normAutofit/>
           </a:bodyPr>
           <a:lstStyle/>
           <a:p>
+            <a:pPr indent="0" marL="0">
+              <a:buNone/>
+            </a:pPr>
             <a:r>
               <a:rPr lang="en-US" sz="2100" dirty="0">
                 <a:solidFill>
-                  <a:srgbClr val="17364A"/>
-                </a:solidFill>
-                <a:latin typeface="Aptos" pitchFamily="34" charset="0"/>
-                <a:ea typeface="Aptos" pitchFamily="34" charset="-122"/>
-                <a:cs typeface="Aptos" pitchFamily="34" charset="-120"/>
-              </a:rPr>
-              <a:t>Generative AI, predictive analytics, RAG, automation, and agentic workflows all depend on the controls.</a:t>
+                  <a:srgbClr val="003A63"/>
+                </a:solidFill>
+                <a:latin typeface="Aptos" pitchFamily="34" charset="0"/>
+                <a:ea typeface="Aptos" pitchFamily="34" charset="-122"/>
+                <a:cs typeface="Aptos" pitchFamily="34" charset="-120"/>
+              </a:rPr>
+              <a:t>• Generative AI, predictive analytics, RAG, automation, and agentic workflows all depend on the.</a:t>
             </a:r>
             <a:endParaRPr lang="en-US" sz="2100" dirty="0"/>
           </a:p>
           <a:p>
+            <a:pPr indent="0" marL="0">
+              <a:buNone/>
+            </a:pPr>
             <a:r>
               <a:rPr lang="en-US" sz="2100" dirty="0">
                 <a:solidFill>
-                  <a:srgbClr val="17364A"/>
-                </a:solidFill>
-                <a:latin typeface="Aptos" pitchFamily="34" charset="0"/>
-                <a:ea typeface="Aptos" pitchFamily="34" charset="-122"/>
-                <a:cs typeface="Aptos" pitchFamily="34" charset="-120"/>
-              </a:rPr>
-              <a:t>The controls should be scaled to the risk of the use case.</a:t>
+                  <a:srgbClr val="003A63"/>
+                </a:solidFill>
+                <a:latin typeface="Aptos" pitchFamily="34" charset="0"/>
+                <a:ea typeface="Aptos" pitchFamily="34" charset="-122"/>
+                <a:cs typeface="Aptos" pitchFamily="34" charset="-120"/>
+              </a:rPr>
+              <a:t>• The controls should be scaled to the risk of the use case.</a:t>
             </a:r>
             <a:endParaRPr lang="en-US" sz="2100" dirty="0"/>
           </a:p>
           <a:p>
+            <a:pPr indent="0" marL="0">
+              <a:buNone/>
+            </a:pPr>
             <a:r>
               <a:rPr lang="en-US" sz="2100" dirty="0">
                 <a:solidFill>
-                  <a:srgbClr val="17364A"/>
-                </a:solidFill>
-                <a:latin typeface="Aptos" pitchFamily="34" charset="0"/>
-                <a:ea typeface="Aptos" pitchFamily="34" charset="-122"/>
-                <a:cs typeface="Aptos" pitchFamily="34" charset="-120"/>
-              </a:rPr>
-              <a:t>A tool that drafts internal training text may require lighter review than a tool that updates case.</a:t>
+                  <a:srgbClr val="003A63"/>
+                </a:solidFill>
+                <a:latin typeface="Aptos" pitchFamily="34" charset="0"/>
+                <a:ea typeface="Aptos" pitchFamily="34" charset="-122"/>
+                <a:cs typeface="Aptos" pitchFamily="34" charset="-120"/>
+              </a:rPr>
+              <a:t>• A tool that drafts internal training text may require lighter review than a tool that updates.</a:t>
             </a:r>
             <a:endParaRPr lang="en-US" sz="2100" dirty="0"/>
           </a:p>
@@ -6204,17 +6279,17 @@
         </p:nvSpPr>
         <p:spPr>
           <a:xfrm>
-            <a:off x="7799832" y="1828800"/>
-            <a:ext cx="3145536" cy="685800"/>
-          </a:xfrm>
-          <a:prstGeom prst="rect">
-            <a:avLst/>
-          </a:prstGeom>
-          <a:noFill/>
-          <a:ln/>
-        </p:spPr>
-        <p:txBody>
-          <a:bodyPr wrap="square" lIns="0" tIns="0" rIns="0" bIns="0" rtlCol="0" anchor="t">
+            <a:off x="7799832" y="1801368"/>
+            <a:ext cx="3145536" cy="758952"/>
+          </a:xfrm>
+          <a:prstGeom prst="rect">
+            <a:avLst/>
+          </a:prstGeom>
+          <a:noFill/>
+          <a:ln/>
+        </p:spPr>
+        <p:txBody>
+          <a:bodyPr wrap="square" lIns="254" tIns="254" rIns="254" bIns="254" rtlCol="0" anchor="t">
             <a:normAutofit/>
           </a:bodyPr>
           <a:lstStyle/>
@@ -6223,7 +6298,7 @@
               <a:buNone/>
             </a:pPr>
             <a:r>
-              <a:rPr lang="en-US" sz="1550" dirty="0">
+              <a:rPr lang="en-US" sz="1320" dirty="0">
                 <a:solidFill>
                   <a:srgbClr val="17364A"/>
                 </a:solidFill>
@@ -6233,7 +6308,7 @@
               </a:rPr>
               <a:t>Generative AI, predictive analytics, RAG, automation, and agentic workflows all depend on the controls.</a:t>
             </a:r>
-            <a:endParaRPr lang="en-US" sz="1550" dirty="0"/>
+            <a:endParaRPr lang="en-US" sz="1320" dirty="0"/>
           </a:p>
         </p:txBody>
       </p:sp>
@@ -6321,13 +6396,16 @@
           <a:ln/>
         </p:spPr>
         <p:txBody>
-          <a:bodyPr wrap="square" lIns="254" tIns="254" rIns="254" bIns="254" rtlCol="0" anchor="t">
+          <a:bodyPr wrap="square" lIns="508" tIns="508" rIns="508" bIns="508" rtlCol="0" anchor="t">
             <a:normAutofit/>
           </a:bodyPr>
           <a:lstStyle/>
           <a:p>
-            <a:r>
-              <a:rPr lang="en-US" sz="1380" dirty="0">
+            <a:pPr indent="0" marL="0">
+              <a:buNone/>
+            </a:pPr>
+            <a:r>
+              <a:rPr lang="en-US" sz="1220" dirty="0">
                 <a:solidFill>
                   <a:srgbClr val="17364A"/>
                 </a:solidFill>
@@ -6335,13 +6413,16 @@
                 <a:ea typeface="Aptos" pitchFamily="34" charset="-122"/>
                 <a:cs typeface="Aptos" pitchFamily="34" charset="-120"/>
               </a:rPr>
-              <a:t>Generative AI, predictive analytics, RAG, automation, and agentic workflows all depend on.</a:t>
-            </a:r>
-            <a:endParaRPr lang="en-US" sz="1380" dirty="0"/>
-          </a:p>
-          <a:p>
-            <a:r>
-              <a:rPr lang="en-US" sz="1380" dirty="0">
+              <a:t>Generative AI, predictive analytics, RAG, automation, and agentic.</a:t>
+            </a:r>
+            <a:endParaRPr lang="en-US" sz="1220" dirty="0"/>
+          </a:p>
+          <a:p>
+            <a:pPr indent="0" marL="0">
+              <a:buNone/>
+            </a:pPr>
+            <a:r>
+              <a:rPr lang="en-US" sz="1220" dirty="0">
                 <a:solidFill>
                   <a:srgbClr val="17364A"/>
                 </a:solidFill>
@@ -6349,13 +6430,16 @@
                 <a:ea typeface="Aptos" pitchFamily="34" charset="-122"/>
                 <a:cs typeface="Aptos" pitchFamily="34" charset="-120"/>
               </a:rPr>
-              <a:t>A tool that drafts internal training text may require lighter review than a tool that.</a:t>
-            </a:r>
-            <a:endParaRPr lang="en-US" sz="1380" dirty="0"/>
-          </a:p>
-          <a:p>
-            <a:r>
-              <a:rPr lang="en-US" sz="1380" dirty="0">
+              <a:t>A tool that drafts internal training text may require lighter.</a:t>
+            </a:r>
+            <a:endParaRPr lang="en-US" sz="1220" dirty="0"/>
+          </a:p>
+          <a:p>
+            <a:pPr indent="0" marL="0">
+              <a:buNone/>
+            </a:pPr>
+            <a:r>
+              <a:rPr lang="en-US" sz="1220" dirty="0">
                 <a:solidFill>
                   <a:srgbClr val="17364A"/>
                 </a:solidFill>
@@ -6363,9 +6447,9 @@
                 <a:ea typeface="Aptos" pitchFamily="34" charset="-122"/>
                 <a:cs typeface="Aptos" pitchFamily="34" charset="-120"/>
               </a:rPr>
-              <a:t>The module should be applied during readiness assessment, procurement, implementation.</a:t>
-            </a:r>
-            <a:endParaRPr lang="en-US" sz="1380" dirty="0"/>
+              <a:t>The module should be applied during readiness assessment,.</a:t>
+            </a:r>
+            <a:endParaRPr lang="en-US" sz="1220" dirty="0"/>
           </a:p>
         </p:txBody>
       </p:sp>
@@ -6443,17 +6527,17 @@
         </p:nvSpPr>
         <p:spPr>
           <a:xfrm>
-            <a:off x="7799832" y="5001768"/>
-            <a:ext cx="3145536" cy="502920"/>
-          </a:xfrm>
-          <a:prstGeom prst="rect">
-            <a:avLst/>
-          </a:prstGeom>
-          <a:noFill/>
-          <a:ln/>
-        </p:spPr>
-        <p:txBody>
-          <a:bodyPr wrap="square" lIns="0" tIns="0" rIns="0" bIns="0" rtlCol="0" anchor="t">
+            <a:off x="7799832" y="4974336"/>
+            <a:ext cx="3145536" cy="576072"/>
+          </a:xfrm>
+          <a:prstGeom prst="rect">
+            <a:avLst/>
+          </a:prstGeom>
+          <a:noFill/>
+          <a:ln/>
+        </p:spPr>
+        <p:txBody>
+          <a:bodyPr wrap="square" lIns="254" tIns="254" rIns="254" bIns="254" rtlCol="0" anchor="t">
             <a:normAutofit/>
           </a:bodyPr>
           <a:lstStyle/>
@@ -6462,7 +6546,7 @@
               <a:buNone/>
             </a:pPr>
             <a:r>
-              <a:rPr lang="en-US" sz="1550" dirty="0">
+              <a:rPr lang="en-US" sz="1320" dirty="0">
                 <a:solidFill>
                   <a:srgbClr val="17364A"/>
                 </a:solidFill>
@@ -6470,9 +6554,9 @@
                 <a:ea typeface="Aptos" pitchFamily="34" charset="-122"/>
                 <a:cs typeface="Aptos" pitchFamily="34" charset="-120"/>
               </a:rPr>
-              <a:t>Use the concept to clarify workflow changes, dependencies, staffing, procurement requirements, training needs, and implementation checkpoints.</a:t>
-            </a:r>
-            <a:endParaRPr lang="en-US" sz="1550" dirty="0"/>
+              <a:t>Use the concept to clarify workflow changes, dependencies, staffing, procurement requirements, training needs, and.</a:t>
+            </a:r>
+            <a:endParaRPr lang="en-US" sz="1320" dirty="0"/>
           </a:p>
         </p:txBody>
       </p:sp>
@@ -6773,49 +6857,58 @@
           <a:ln/>
         </p:spPr>
         <p:txBody>
-          <a:bodyPr wrap="square" lIns="635" tIns="635" rIns="635" bIns="635" rtlCol="0" anchor="t">
+          <a:bodyPr wrap="square" lIns="1016" tIns="1016" rIns="1016" bIns="1016" rtlCol="0" anchor="t">
             <a:normAutofit/>
           </a:bodyPr>
           <a:lstStyle/>
           <a:p>
+            <a:pPr indent="0" marL="0">
+              <a:buNone/>
+            </a:pPr>
             <a:r>
               <a:rPr lang="en-US" sz="2100" dirty="0">
                 <a:solidFill>
-                  <a:srgbClr val="17364A"/>
-                </a:solidFill>
-                <a:latin typeface="Aptos" pitchFamily="34" charset="0"/>
-                <a:ea typeface="Aptos" pitchFamily="34" charset="-122"/>
-                <a:cs typeface="Aptos" pitchFamily="34" charset="-120"/>
-              </a:rPr>
-              <a:t>Where does this topic appear in one current or proposed AI workflow in your agency?</a:t>
+                  <a:srgbClr val="003A63"/>
+                </a:solidFill>
+                <a:latin typeface="Aptos" pitchFamily="34" charset="0"/>
+                <a:ea typeface="Aptos" pitchFamily="34" charset="-122"/>
+                <a:cs typeface="Aptos" pitchFamily="34" charset="-120"/>
+              </a:rPr>
+              <a:t>• Where does this topic appear in one current or proposed AI workflow in your agency?</a:t>
             </a:r>
             <a:endParaRPr lang="en-US" sz="2100" dirty="0"/>
           </a:p>
           <a:p>
+            <a:pPr indent="0" marL="0">
+              <a:buNone/>
+            </a:pPr>
             <a:r>
               <a:rPr lang="en-US" sz="2100" dirty="0">
                 <a:solidFill>
-                  <a:srgbClr val="17364A"/>
-                </a:solidFill>
-                <a:latin typeface="Aptos" pitchFamily="34" charset="0"/>
-                <a:ea typeface="Aptos" pitchFamily="34" charset="-122"/>
-                <a:cs typeface="Aptos" pitchFamily="34" charset="-120"/>
-              </a:rPr>
-              <a:t>What decisions, data sources, users, or partners would be affected if this area is poorly designed?</a:t>
+                  <a:srgbClr val="003A63"/>
+                </a:solidFill>
+                <a:latin typeface="Aptos" pitchFamily="34" charset="0"/>
+                <a:ea typeface="Aptos" pitchFamily="34" charset="-122"/>
+                <a:cs typeface="Aptos" pitchFamily="34" charset="-120"/>
+              </a:rPr>
+              <a:t>• What decisions, data sources, users, or partners would be affected if this area is poorly.</a:t>
             </a:r>
             <a:endParaRPr lang="en-US" sz="2100" dirty="0"/>
           </a:p>
           <a:p>
+            <a:pPr indent="0" marL="0">
+              <a:buNone/>
+            </a:pPr>
             <a:r>
               <a:rPr lang="en-US" sz="2100" dirty="0">
                 <a:solidFill>
-                  <a:srgbClr val="17364A"/>
-                </a:solidFill>
-                <a:latin typeface="Aptos" pitchFamily="34" charset="0"/>
-                <a:ea typeface="Aptos" pitchFamily="34" charset="-122"/>
-                <a:cs typeface="Aptos" pitchFamily="34" charset="-120"/>
-              </a:rPr>
-              <a:t>What evidence would governance reviewers need before approving the workflow?</a:t>
+                  <a:srgbClr val="003A63"/>
+                </a:solidFill>
+                <a:latin typeface="Aptos" pitchFamily="34" charset="0"/>
+                <a:ea typeface="Aptos" pitchFamily="34" charset="-122"/>
+                <a:cs typeface="Aptos" pitchFamily="34" charset="-120"/>
+              </a:rPr>
+              <a:t>• What evidence would governance reviewers need before approving the workflow?</a:t>
             </a:r>
             <a:endParaRPr lang="en-US" sz="2100" dirty="0"/>
           </a:p>
@@ -6895,17 +6988,17 @@
         </p:nvSpPr>
         <p:spPr>
           <a:xfrm>
-            <a:off x="7799832" y="1828800"/>
-            <a:ext cx="3145536" cy="685800"/>
-          </a:xfrm>
-          <a:prstGeom prst="rect">
-            <a:avLst/>
-          </a:prstGeom>
-          <a:noFill/>
-          <a:ln/>
-        </p:spPr>
-        <p:txBody>
-          <a:bodyPr wrap="square" lIns="0" tIns="0" rIns="0" bIns="0" rtlCol="0" anchor="t">
+            <a:off x="7799832" y="1801368"/>
+            <a:ext cx="3145536" cy="758952"/>
+          </a:xfrm>
+          <a:prstGeom prst="rect">
+            <a:avLst/>
+          </a:prstGeom>
+          <a:noFill/>
+          <a:ln/>
+        </p:spPr>
+        <p:txBody>
+          <a:bodyPr wrap="square" lIns="254" tIns="254" rIns="254" bIns="254" rtlCol="0" anchor="t">
             <a:normAutofit/>
           </a:bodyPr>
           <a:lstStyle/>
@@ -6914,7 +7007,7 @@
               <a:buNone/>
             </a:pPr>
             <a:r>
-              <a:rPr lang="en-US" sz="1550" dirty="0">
+              <a:rPr lang="en-US" sz="1320" dirty="0">
                 <a:solidFill>
                   <a:srgbClr val="17364A"/>
                 </a:solidFill>
@@ -6924,7 +7017,7 @@
               </a:rPr>
               <a:t>Where does this topic appear in one current or proposed AI workflow in your agency?</a:t>
             </a:r>
-            <a:endParaRPr lang="en-US" sz="1550" dirty="0"/>
+            <a:endParaRPr lang="en-US" sz="1320" dirty="0"/>
           </a:p>
         </p:txBody>
       </p:sp>
@@ -7012,13 +7105,16 @@
           <a:ln/>
         </p:spPr>
         <p:txBody>
-          <a:bodyPr wrap="square" lIns="254" tIns="254" rIns="254" bIns="254" rtlCol="0" anchor="t">
+          <a:bodyPr wrap="square" lIns="508" tIns="508" rIns="508" bIns="508" rtlCol="0" anchor="t">
             <a:normAutofit/>
           </a:bodyPr>
           <a:lstStyle/>
           <a:p>
-            <a:r>
-              <a:rPr lang="en-US" sz="1380" dirty="0">
+            <a:pPr indent="0" marL="0">
+              <a:buNone/>
+            </a:pPr>
+            <a:r>
+              <a:rPr lang="en-US" sz="1220" dirty="0">
                 <a:solidFill>
                   <a:srgbClr val="17364A"/>
                 </a:solidFill>
@@ -7026,13 +7122,16 @@
                 <a:ea typeface="Aptos" pitchFamily="34" charset="-122"/>
                 <a:cs typeface="Aptos" pitchFamily="34" charset="-120"/>
               </a:rPr>
-              <a:t>Where does this topic appear in one current or proposed AI workflow in your agency?</a:t>
-            </a:r>
-            <a:endParaRPr lang="en-US" sz="1380" dirty="0"/>
-          </a:p>
-          <a:p>
-            <a:r>
-              <a:rPr lang="en-US" sz="1380" dirty="0">
+              <a:t>Where does this topic appear in one current or proposed AI.</a:t>
+            </a:r>
+            <a:endParaRPr lang="en-US" sz="1220" dirty="0"/>
+          </a:p>
+          <a:p>
+            <a:pPr indent="0" marL="0">
+              <a:buNone/>
+            </a:pPr>
+            <a:r>
+              <a:rPr lang="en-US" sz="1220" dirty="0">
                 <a:solidFill>
                   <a:srgbClr val="17364A"/>
                 </a:solidFill>
@@ -7040,13 +7139,16 @@
                 <a:ea typeface="Aptos" pitchFamily="34" charset="-122"/>
                 <a:cs typeface="Aptos" pitchFamily="34" charset="-120"/>
               </a:rPr>
-              <a:t>What decisions, data sources, users, or partners would be affected if this area is poorly.</a:t>
-            </a:r>
-            <a:endParaRPr lang="en-US" sz="1380" dirty="0"/>
-          </a:p>
-          <a:p>
-            <a:r>
-              <a:rPr lang="en-US" sz="1380" dirty="0">
+              <a:t>What decisions, data sources, users, or partners would be affected.</a:t>
+            </a:r>
+            <a:endParaRPr lang="en-US" sz="1220" dirty="0"/>
+          </a:p>
+          <a:p>
+            <a:pPr indent="0" marL="0">
+              <a:buNone/>
+            </a:pPr>
+            <a:r>
+              <a:rPr lang="en-US" sz="1220" dirty="0">
                 <a:solidFill>
                   <a:srgbClr val="17364A"/>
                 </a:solidFill>
@@ -7054,9 +7156,9 @@
                 <a:ea typeface="Aptos" pitchFamily="34" charset="-122"/>
                 <a:cs typeface="Aptos" pitchFamily="34" charset="-120"/>
               </a:rPr>
-              <a:t>What evidence would governance reviewers need before approving the workflow?</a:t>
-            </a:r>
-            <a:endParaRPr lang="en-US" sz="1380" dirty="0"/>
+              <a:t>What evidence would governance reviewers need before approving the.</a:t>
+            </a:r>
+            <a:endParaRPr lang="en-US" sz="1220" dirty="0"/>
           </a:p>
         </p:txBody>
       </p:sp>
@@ -7134,17 +7236,17 @@
         </p:nvSpPr>
         <p:spPr>
           <a:xfrm>
-            <a:off x="7799832" y="5001768"/>
-            <a:ext cx="3145536" cy="502920"/>
-          </a:xfrm>
-          <a:prstGeom prst="rect">
-            <a:avLst/>
-          </a:prstGeom>
-          <a:noFill/>
-          <a:ln/>
-        </p:spPr>
-        <p:txBody>
-          <a:bodyPr wrap="square" lIns="0" tIns="0" rIns="0" bIns="0" rtlCol="0" anchor="t">
+            <a:off x="7799832" y="4974336"/>
+            <a:ext cx="3145536" cy="576072"/>
+          </a:xfrm>
+          <a:prstGeom prst="rect">
+            <a:avLst/>
+          </a:prstGeom>
+          <a:noFill/>
+          <a:ln/>
+        </p:spPr>
+        <p:txBody>
+          <a:bodyPr wrap="square" lIns="254" tIns="254" rIns="254" bIns="254" rtlCol="0" anchor="t">
             <a:normAutofit/>
           </a:bodyPr>
           <a:lstStyle/>
@@ -7153,7 +7255,7 @@
               <a:buNone/>
             </a:pPr>
             <a:r>
-              <a:rPr lang="en-US" sz="1550" dirty="0">
+              <a:rPr lang="en-US" sz="1320" dirty="0">
                 <a:solidFill>
                   <a:srgbClr val="17364A"/>
                 </a:solidFill>
@@ -7161,9 +7263,9 @@
                 <a:ea typeface="Aptos" pitchFamily="34" charset="-122"/>
                 <a:cs typeface="Aptos" pitchFamily="34" charset="-120"/>
               </a:rPr>
-              <a:t>Use the concept to clarify workflow changes, dependencies, staffing, procurement requirements, training needs, and implementation checkpoints.</a:t>
-            </a:r>
-            <a:endParaRPr lang="en-US" sz="1550" dirty="0"/>
+              <a:t>Use the concept to clarify workflow changes, dependencies, staffing, procurement requirements, training needs, and.</a:t>
+            </a:r>
+            <a:endParaRPr lang="en-US" sz="1320" dirty="0"/>
           </a:p>
         </p:txBody>
       </p:sp>
@@ -7464,35 +7566,41 @@
           <a:ln/>
         </p:spPr>
         <p:txBody>
-          <a:bodyPr wrap="square" lIns="635" tIns="635" rIns="635" bIns="635" rtlCol="0" anchor="t">
+          <a:bodyPr wrap="square" lIns="1016" tIns="1016" rIns="1016" bIns="1016" rtlCol="0" anchor="t">
             <a:normAutofit/>
           </a:bodyPr>
           <a:lstStyle/>
           <a:p>
+            <a:pPr indent="0" marL="0">
+              <a:buNone/>
+            </a:pPr>
             <a:r>
               <a:rPr lang="en-US" sz="2100" dirty="0">
                 <a:solidFill>
-                  <a:srgbClr val="17364A"/>
-                </a:solidFill>
-                <a:latin typeface="Aptos" pitchFamily="34" charset="0"/>
-                <a:ea typeface="Aptos" pitchFamily="34" charset="-122"/>
-                <a:cs typeface="Aptos" pitchFamily="34" charset="-120"/>
-              </a:rPr>
-              <a:t>Which safeguards should be required before pilot testing?</a:t>
+                  <a:srgbClr val="003A63"/>
+                </a:solidFill>
+                <a:latin typeface="Aptos" pitchFamily="34" charset="0"/>
+                <a:ea typeface="Aptos" pitchFamily="34" charset="-122"/>
+                <a:cs typeface="Aptos" pitchFamily="34" charset="-120"/>
+              </a:rPr>
+              <a:t>• Which safeguards should be required before pilot testing?</a:t>
             </a:r>
             <a:endParaRPr lang="en-US" sz="2100" dirty="0"/>
           </a:p>
           <a:p>
+            <a:pPr indent="0" marL="0">
+              <a:buNone/>
+            </a:pPr>
             <a:r>
               <a:rPr lang="en-US" sz="2100" dirty="0">
                 <a:solidFill>
-                  <a:srgbClr val="17364A"/>
-                </a:solidFill>
-                <a:latin typeface="Aptos" pitchFamily="34" charset="0"/>
-                <a:ea typeface="Aptos" pitchFamily="34" charset="-122"/>
-                <a:cs typeface="Aptos" pitchFamily="34" charset="-120"/>
-              </a:rPr>
-              <a:t>Who owns ongoing monitoring and review?</a:t>
+                  <a:srgbClr val="003A63"/>
+                </a:solidFill>
+                <a:latin typeface="Aptos" pitchFamily="34" charset="0"/>
+                <a:ea typeface="Aptos" pitchFamily="34" charset="-122"/>
+                <a:cs typeface="Aptos" pitchFamily="34" charset="-120"/>
+              </a:rPr>
+              <a:t>• Who owns ongoing monitoring and review?</a:t>
             </a:r>
             <a:endParaRPr lang="en-US" sz="2100" dirty="0"/>
           </a:p>
@@ -7572,17 +7680,17 @@
         </p:nvSpPr>
         <p:spPr>
           <a:xfrm>
-            <a:off x="7799832" y="1828800"/>
-            <a:ext cx="3145536" cy="685800"/>
-          </a:xfrm>
-          <a:prstGeom prst="rect">
-            <a:avLst/>
-          </a:prstGeom>
-          <a:noFill/>
-          <a:ln/>
-        </p:spPr>
-        <p:txBody>
-          <a:bodyPr wrap="square" lIns="0" tIns="0" rIns="0" bIns="0" rtlCol="0" anchor="t">
+            <a:off x="7799832" y="1801368"/>
+            <a:ext cx="3145536" cy="758952"/>
+          </a:xfrm>
+          <a:prstGeom prst="rect">
+            <a:avLst/>
+          </a:prstGeom>
+          <a:noFill/>
+          <a:ln/>
+        </p:spPr>
+        <p:txBody>
+          <a:bodyPr wrap="square" lIns="254" tIns="254" rIns="254" bIns="254" rtlCol="0" anchor="t">
             <a:normAutofit/>
           </a:bodyPr>
           <a:lstStyle/>
@@ -7591,7 +7699,7 @@
               <a:buNone/>
             </a:pPr>
             <a:r>
-              <a:rPr lang="en-US" sz="1550" dirty="0">
+              <a:rPr lang="en-US" sz="1320" dirty="0">
                 <a:solidFill>
                   <a:srgbClr val="17364A"/>
                 </a:solidFill>
@@ -7601,7 +7709,7 @@
               </a:rPr>
               <a:t>Which safeguards should be required before pilot testing?</a:t>
             </a:r>
-            <a:endParaRPr lang="en-US" sz="1550" dirty="0"/>
+            <a:endParaRPr lang="en-US" sz="1320" dirty="0"/>
           </a:p>
         </p:txBody>
       </p:sp>
@@ -7689,13 +7797,16 @@
           <a:ln/>
         </p:spPr>
         <p:txBody>
-          <a:bodyPr wrap="square" lIns="254" tIns="254" rIns="254" bIns="254" rtlCol="0" anchor="t">
+          <a:bodyPr wrap="square" lIns="508" tIns="508" rIns="508" bIns="508" rtlCol="0" anchor="t">
             <a:normAutofit/>
           </a:bodyPr>
           <a:lstStyle/>
           <a:p>
-            <a:r>
-              <a:rPr lang="en-US" sz="1380" dirty="0">
+            <a:pPr indent="0" marL="0">
+              <a:buNone/>
+            </a:pPr>
+            <a:r>
+              <a:rPr lang="en-US" sz="1220" dirty="0">
                 <a:solidFill>
                   <a:srgbClr val="17364A"/>
                 </a:solidFill>
@@ -7705,11 +7816,14 @@
               </a:rPr>
               <a:t>Which safeguards should be required before pilot testing?</a:t>
             </a:r>
-            <a:endParaRPr lang="en-US" sz="1380" dirty="0"/>
-          </a:p>
-          <a:p>
-            <a:r>
-              <a:rPr lang="en-US" sz="1380" dirty="0">
+            <a:endParaRPr lang="en-US" sz="1220" dirty="0"/>
+          </a:p>
+          <a:p>
+            <a:pPr indent="0" marL="0">
+              <a:buNone/>
+            </a:pPr>
+            <a:r>
+              <a:rPr lang="en-US" sz="1220" dirty="0">
                 <a:solidFill>
                   <a:srgbClr val="17364A"/>
                 </a:solidFill>
@@ -7719,7 +7833,7 @@
               </a:rPr>
               <a:t>Who owns ongoing monitoring and review?</a:t>
             </a:r>
-            <a:endParaRPr lang="en-US" sz="1380" dirty="0"/>
+            <a:endParaRPr lang="en-US" sz="1220" dirty="0"/>
           </a:p>
         </p:txBody>
       </p:sp>
@@ -7797,17 +7911,17 @@
         </p:nvSpPr>
         <p:spPr>
           <a:xfrm>
-            <a:off x="7799832" y="5001768"/>
-            <a:ext cx="3145536" cy="502920"/>
-          </a:xfrm>
-          <a:prstGeom prst="rect">
-            <a:avLst/>
-          </a:prstGeom>
-          <a:noFill/>
-          <a:ln/>
-        </p:spPr>
-        <p:txBody>
-          <a:bodyPr wrap="square" lIns="0" tIns="0" rIns="0" bIns="0" rtlCol="0" anchor="t">
+            <a:off x="7799832" y="4974336"/>
+            <a:ext cx="3145536" cy="576072"/>
+          </a:xfrm>
+          <a:prstGeom prst="rect">
+            <a:avLst/>
+          </a:prstGeom>
+          <a:noFill/>
+          <a:ln/>
+        </p:spPr>
+        <p:txBody>
+          <a:bodyPr wrap="square" lIns="254" tIns="254" rIns="254" bIns="254" rtlCol="0" anchor="t">
             <a:normAutofit/>
           </a:bodyPr>
           <a:lstStyle/>
@@ -7816,7 +7930,7 @@
               <a:buNone/>
             </a:pPr>
             <a:r>
-              <a:rPr lang="en-US" sz="1550" dirty="0">
+              <a:rPr lang="en-US" sz="1320" dirty="0">
                 <a:solidFill>
                   <a:srgbClr val="17364A"/>
                 </a:solidFill>
@@ -7824,9 +7938,9 @@
                 <a:ea typeface="Aptos" pitchFamily="34" charset="-122"/>
                 <a:cs typeface="Aptos" pitchFamily="34" charset="-120"/>
               </a:rPr>
-              <a:t>Use the concept to clarify workflow changes, dependencies, staffing, procurement requirements, training needs, and implementation checkpoints.</a:t>
-            </a:r>
-            <a:endParaRPr lang="en-US" sz="1550" dirty="0"/>
+              <a:t>Use the concept to clarify workflow changes, dependencies, staffing, procurement requirements, training needs, and.</a:t>
+            </a:r>
+            <a:endParaRPr lang="en-US" sz="1320" dirty="0"/>
           </a:p>
         </p:txBody>
       </p:sp>
@@ -8127,49 +8241,58 @@
           <a:ln/>
         </p:spPr>
         <p:txBody>
-          <a:bodyPr wrap="square" lIns="635" tIns="635" rIns="635" bIns="635" rtlCol="0" anchor="t">
+          <a:bodyPr wrap="square" lIns="1016" tIns="1016" rIns="1016" bIns="1016" rtlCol="0" anchor="t">
             <a:normAutofit/>
           </a:bodyPr>
           <a:lstStyle/>
           <a:p>
+            <a:pPr indent="0" marL="0">
+              <a:buNone/>
+            </a:pPr>
             <a:r>
               <a:rPr lang="en-US" sz="2100" dirty="0">
                 <a:solidFill>
-                  <a:srgbClr val="17364A"/>
-                </a:solidFill>
-                <a:latin typeface="Aptos" pitchFamily="34" charset="0"/>
-                <a:ea typeface="Aptos" pitchFamily="34" charset="-122"/>
-                <a:cs typeface="Aptos" pitchFamily="34" charset="-120"/>
-              </a:rPr>
-              <a:t>Create a AI requirements matrix for one real or realistic public health AI workflow.</a:t>
+                  <a:srgbClr val="003A63"/>
+                </a:solidFill>
+                <a:latin typeface="Aptos" pitchFamily="34" charset="0"/>
+                <a:ea typeface="Aptos" pitchFamily="34" charset="-122"/>
+                <a:cs typeface="Aptos" pitchFamily="34" charset="-120"/>
+              </a:rPr>
+              <a:t>• Create a AI requirements matrix for one real or realistic public health AI workflow.</a:t>
             </a:r>
             <a:endParaRPr lang="en-US" sz="2100" dirty="0"/>
           </a:p>
           <a:p>
+            <a:pPr indent="0" marL="0">
+              <a:buNone/>
+            </a:pPr>
             <a:r>
               <a:rPr lang="en-US" sz="2100" dirty="0">
                 <a:solidFill>
-                  <a:srgbClr val="17364A"/>
-                </a:solidFill>
-                <a:latin typeface="Aptos" pitchFamily="34" charset="0"/>
-                <a:ea typeface="Aptos" pitchFamily="34" charset="-122"/>
-                <a:cs typeface="Aptos" pitchFamily="34" charset="-120"/>
-              </a:rPr>
-              <a:t>The artifact should describe the use case, affected users, data sources, system dependencies, risks,.</a:t>
+                  <a:srgbClr val="003A63"/>
+                </a:solidFill>
+                <a:latin typeface="Aptos" pitchFamily="34" charset="0"/>
+                <a:ea typeface="Aptos" pitchFamily="34" charset="-122"/>
+                <a:cs typeface="Aptos" pitchFamily="34" charset="-120"/>
+              </a:rPr>
+              <a:t>• The artifact should describe the use case, affected users, data sources, system dependencies,.</a:t>
             </a:r>
             <a:endParaRPr lang="en-US" sz="2100" dirty="0"/>
           </a:p>
           <a:p>
+            <a:pPr indent="0" marL="0">
+              <a:buNone/>
+            </a:pPr>
             <a:r>
               <a:rPr lang="en-US" sz="2100" dirty="0">
                 <a:solidFill>
-                  <a:srgbClr val="17364A"/>
-                </a:solidFill>
-                <a:latin typeface="Aptos" pitchFamily="34" charset="0"/>
-                <a:ea typeface="Aptos" pitchFamily="34" charset="-122"/>
-                <a:cs typeface="Aptos" pitchFamily="34" charset="-120"/>
-              </a:rPr>
-              <a:t>The exercise should produce a work product that could be used in a governance meeting, procurement.</a:t>
+                  <a:srgbClr val="003A63"/>
+                </a:solidFill>
+                <a:latin typeface="Aptos" pitchFamily="34" charset="0"/>
+                <a:ea typeface="Aptos" pitchFamily="34" charset="-122"/>
+                <a:cs typeface="Aptos" pitchFamily="34" charset="-120"/>
+              </a:rPr>
+              <a:t>• The exercise should produce a work product that could be used in a governance meeting,.</a:t>
             </a:r>
             <a:endParaRPr lang="en-US" sz="2100" dirty="0"/>
           </a:p>
@@ -8249,17 +8372,17 @@
         </p:nvSpPr>
         <p:spPr>
           <a:xfrm>
-            <a:off x="7799832" y="1828800"/>
-            <a:ext cx="3145536" cy="685800"/>
-          </a:xfrm>
-          <a:prstGeom prst="rect">
-            <a:avLst/>
-          </a:prstGeom>
-          <a:noFill/>
-          <a:ln/>
-        </p:spPr>
-        <p:txBody>
-          <a:bodyPr wrap="square" lIns="0" tIns="0" rIns="0" bIns="0" rtlCol="0" anchor="t">
+            <a:off x="7799832" y="1801368"/>
+            <a:ext cx="3145536" cy="758952"/>
+          </a:xfrm>
+          <a:prstGeom prst="rect">
+            <a:avLst/>
+          </a:prstGeom>
+          <a:noFill/>
+          <a:ln/>
+        </p:spPr>
+        <p:txBody>
+          <a:bodyPr wrap="square" lIns="254" tIns="254" rIns="254" bIns="254" rtlCol="0" anchor="t">
             <a:normAutofit/>
           </a:bodyPr>
           <a:lstStyle/>
@@ -8268,7 +8391,7 @@
               <a:buNone/>
             </a:pPr>
             <a:r>
-              <a:rPr lang="en-US" sz="1550" dirty="0">
+              <a:rPr lang="en-US" sz="1320" dirty="0">
                 <a:solidFill>
                   <a:srgbClr val="17364A"/>
                 </a:solidFill>
@@ -8278,7 +8401,7 @@
               </a:rPr>
               <a:t>Create a AI requirements matrix for one real or realistic public health AI workflow.</a:t>
             </a:r>
-            <a:endParaRPr lang="en-US" sz="1550" dirty="0"/>
+            <a:endParaRPr lang="en-US" sz="1320" dirty="0"/>
           </a:p>
         </p:txBody>
       </p:sp>
@@ -8366,13 +8489,16 @@
           <a:ln/>
         </p:spPr>
         <p:txBody>
-          <a:bodyPr wrap="square" lIns="254" tIns="254" rIns="254" bIns="254" rtlCol="0" anchor="t">
+          <a:bodyPr wrap="square" lIns="508" tIns="508" rIns="508" bIns="508" rtlCol="0" anchor="t">
             <a:normAutofit/>
           </a:bodyPr>
           <a:lstStyle/>
           <a:p>
-            <a:r>
-              <a:rPr lang="en-US" sz="1380" dirty="0">
+            <a:pPr indent="0" marL="0">
+              <a:buNone/>
+            </a:pPr>
+            <a:r>
+              <a:rPr lang="en-US" sz="1220" dirty="0">
                 <a:solidFill>
                   <a:srgbClr val="17364A"/>
                 </a:solidFill>
@@ -8380,13 +8506,16 @@
                 <a:ea typeface="Aptos" pitchFamily="34" charset="-122"/>
                 <a:cs typeface="Aptos" pitchFamily="34" charset="-120"/>
               </a:rPr>
-              <a:t>The artifact should describe the use case, affected users, data sources, system.</a:t>
-            </a:r>
-            <a:endParaRPr lang="en-US" sz="1380" dirty="0"/>
-          </a:p>
-          <a:p>
-            <a:r>
-              <a:rPr lang="en-US" sz="1380" dirty="0">
+              <a:t>The artifact should describe the use case, affected users, data.</a:t>
+            </a:r>
+            <a:endParaRPr lang="en-US" sz="1220" dirty="0"/>
+          </a:p>
+          <a:p>
+            <a:pPr indent="0" marL="0">
+              <a:buNone/>
+            </a:pPr>
+            <a:r>
+              <a:rPr lang="en-US" sz="1220" dirty="0">
                 <a:solidFill>
                   <a:srgbClr val="17364A"/>
                 </a:solidFill>
@@ -8394,13 +8523,16 @@
                 <a:ea typeface="Aptos" pitchFamily="34" charset="-122"/>
                 <a:cs typeface="Aptos" pitchFamily="34" charset="-120"/>
               </a:rPr>
-              <a:t>The exercise should produce a work product that could be used in a governance meeting,.</a:t>
-            </a:r>
-            <a:endParaRPr lang="en-US" sz="1380" dirty="0"/>
-          </a:p>
-          <a:p>
-            <a:r>
-              <a:rPr lang="en-US" sz="1380" dirty="0">
+              <a:t>The exercise should produce a work product that could be used in a.</a:t>
+            </a:r>
+            <a:endParaRPr lang="en-US" sz="1220" dirty="0"/>
+          </a:p>
+          <a:p>
+            <a:pPr indent="0" marL="0">
+              <a:buNone/>
+            </a:pPr>
+            <a:r>
+              <a:rPr lang="en-US" sz="1220" dirty="0">
                 <a:solidFill>
                   <a:srgbClr val="17364A"/>
                 </a:solidFill>
@@ -8408,9 +8540,9 @@
                 <a:ea typeface="Aptos" pitchFamily="34" charset="-122"/>
                 <a:cs typeface="Aptos" pitchFamily="34" charset="-120"/>
               </a:rPr>
-              <a:t>Learners should document assumptions and identify which staff or partners need to be.</a:t>
-            </a:r>
-            <a:endParaRPr lang="en-US" sz="1380" dirty="0"/>
+              <a:t>Learners should document assumptions and identify which staff or.</a:t>
+            </a:r>
+            <a:endParaRPr lang="en-US" sz="1220" dirty="0"/>
           </a:p>
         </p:txBody>
       </p:sp>
@@ -8488,17 +8620,17 @@
         </p:nvSpPr>
         <p:spPr>
           <a:xfrm>
-            <a:off x="7799832" y="5001768"/>
-            <a:ext cx="3145536" cy="502920"/>
-          </a:xfrm>
-          <a:prstGeom prst="rect">
-            <a:avLst/>
-          </a:prstGeom>
-          <a:noFill/>
-          <a:ln/>
-        </p:spPr>
-        <p:txBody>
-          <a:bodyPr wrap="square" lIns="0" tIns="0" rIns="0" bIns="0" rtlCol="0" anchor="t">
+            <a:off x="7799832" y="4974336"/>
+            <a:ext cx="3145536" cy="576072"/>
+          </a:xfrm>
+          <a:prstGeom prst="rect">
+            <a:avLst/>
+          </a:prstGeom>
+          <a:noFill/>
+          <a:ln/>
+        </p:spPr>
+        <p:txBody>
+          <a:bodyPr wrap="square" lIns="254" tIns="254" rIns="254" bIns="254" rtlCol="0" anchor="t">
             <a:normAutofit/>
           </a:bodyPr>
           <a:lstStyle/>
@@ -8507,7 +8639,7 @@
               <a:buNone/>
             </a:pPr>
             <a:r>
-              <a:rPr lang="en-US" sz="1550" dirty="0">
+              <a:rPr lang="en-US" sz="1320" dirty="0">
                 <a:solidFill>
                   <a:srgbClr val="17364A"/>
                 </a:solidFill>
@@ -8515,9 +8647,9 @@
                 <a:ea typeface="Aptos" pitchFamily="34" charset="-122"/>
                 <a:cs typeface="Aptos" pitchFamily="34" charset="-120"/>
               </a:rPr>
-              <a:t>Use the assignment to test whether you can explain the concept, apply it to a realistic public health situation, and identify what would need review before the work moves forward.</a:t>
-            </a:r>
-            <a:endParaRPr lang="en-US" sz="1550" dirty="0"/>
+              <a:t>Use the assignment to test whether you can explain the concept, apply it to a realistic public health situation, and.</a:t>
+            </a:r>
+            <a:endParaRPr lang="en-US" sz="1320" dirty="0"/>
           </a:p>
         </p:txBody>
       </p:sp>
@@ -8818,35 +8950,41 @@
           <a:ln/>
         </p:spPr>
         <p:txBody>
-          <a:bodyPr wrap="square" lIns="635" tIns="635" rIns="635" bIns="635" rtlCol="0" anchor="t">
+          <a:bodyPr wrap="square" lIns="1016" tIns="1016" rIns="1016" bIns="1016" rtlCol="0" anchor="t">
             <a:normAutofit/>
           </a:bodyPr>
           <a:lstStyle/>
           <a:p>
+            <a:pPr indent="0" marL="0">
+              <a:buNone/>
+            </a:pPr>
             <a:r>
               <a:rPr lang="en-US" sz="2100" dirty="0">
                 <a:solidFill>
-                  <a:srgbClr val="17364A"/>
-                </a:solidFill>
-                <a:latin typeface="Aptos" pitchFamily="34" charset="0"/>
-                <a:ea typeface="Aptos" pitchFamily="34" charset="-122"/>
-                <a:cs typeface="Aptos" pitchFamily="34" charset="-120"/>
-              </a:rPr>
-              <a:t>The expected artifact is a completed AI requirements matrix.</a:t>
+                  <a:srgbClr val="003A63"/>
+                </a:solidFill>
+                <a:latin typeface="Aptos" pitchFamily="34" charset="0"/>
+                <a:ea typeface="Aptos" pitchFamily="34" charset="-122"/>
+                <a:cs typeface="Aptos" pitchFamily="34" charset="-120"/>
+              </a:rPr>
+              <a:t>• The expected artifact is a completed AI requirements matrix.</a:t>
             </a:r>
             <a:endParaRPr lang="en-US" sz="2100" dirty="0"/>
           </a:p>
           <a:p>
+            <a:pPr indent="0" marL="0">
+              <a:buNone/>
+            </a:pPr>
             <a:r>
               <a:rPr lang="en-US" sz="2100" dirty="0">
                 <a:solidFill>
-                  <a:srgbClr val="17364A"/>
-                </a:solidFill>
-                <a:latin typeface="Aptos" pitchFamily="34" charset="0"/>
-                <a:ea typeface="Aptos" pitchFamily="34" charset="-122"/>
-                <a:cs typeface="Aptos" pitchFamily="34" charset="-120"/>
-              </a:rPr>
-              <a:t>It should be specific to a public health workflow and should include technical dependencies, governance.</a:t>
+                  <a:srgbClr val="003A63"/>
+                </a:solidFill>
+                <a:latin typeface="Aptos" pitchFamily="34" charset="0"/>
+                <a:ea typeface="Aptos" pitchFamily="34" charset="-122"/>
+                <a:cs typeface="Aptos" pitchFamily="34" charset="-120"/>
+              </a:rPr>
+              <a:t>• It should be specific to a public health workflow and should include technical dependencies,.</a:t>
             </a:r>
             <a:endParaRPr lang="en-US" sz="2100" dirty="0"/>
           </a:p>
@@ -8926,17 +9064,17 @@
         </p:nvSpPr>
         <p:spPr>
           <a:xfrm>
-            <a:off x="7799832" y="1828800"/>
-            <a:ext cx="3145536" cy="685800"/>
-          </a:xfrm>
-          <a:prstGeom prst="rect">
-            <a:avLst/>
-          </a:prstGeom>
-          <a:noFill/>
-          <a:ln/>
-        </p:spPr>
-        <p:txBody>
-          <a:bodyPr wrap="square" lIns="0" tIns="0" rIns="0" bIns="0" rtlCol="0" anchor="t">
+            <a:off x="7799832" y="1801368"/>
+            <a:ext cx="3145536" cy="758952"/>
+          </a:xfrm>
+          <a:prstGeom prst="rect">
+            <a:avLst/>
+          </a:prstGeom>
+          <a:noFill/>
+          <a:ln/>
+        </p:spPr>
+        <p:txBody>
+          <a:bodyPr wrap="square" lIns="254" tIns="254" rIns="254" bIns="254" rtlCol="0" anchor="t">
             <a:normAutofit/>
           </a:bodyPr>
           <a:lstStyle/>
@@ -8945,7 +9083,7 @@
               <a:buNone/>
             </a:pPr>
             <a:r>
-              <a:rPr lang="en-US" sz="1550" dirty="0">
+              <a:rPr lang="en-US" sz="1320" dirty="0">
                 <a:solidFill>
                   <a:srgbClr val="17364A"/>
                 </a:solidFill>
@@ -8955,7 +9093,7 @@
               </a:rPr>
               <a:t>The expected artifact is a completed AI requirements matrix.</a:t>
             </a:r>
-            <a:endParaRPr lang="en-US" sz="1550" dirty="0"/>
+            <a:endParaRPr lang="en-US" sz="1320" dirty="0"/>
           </a:p>
         </p:txBody>
       </p:sp>
@@ -9043,13 +9181,16 @@
           <a:ln/>
         </p:spPr>
         <p:txBody>
-          <a:bodyPr wrap="square" lIns="254" tIns="254" rIns="254" bIns="254" rtlCol="0" anchor="t">
+          <a:bodyPr wrap="square" lIns="508" tIns="508" rIns="508" bIns="508" rtlCol="0" anchor="t">
             <a:normAutofit/>
           </a:bodyPr>
           <a:lstStyle/>
           <a:p>
-            <a:r>
-              <a:rPr lang="en-US" sz="1380" dirty="0">
+            <a:pPr indent="0" marL="0">
+              <a:buNone/>
+            </a:pPr>
+            <a:r>
+              <a:rPr lang="en-US" sz="1220" dirty="0">
                 <a:solidFill>
                   <a:srgbClr val="17364A"/>
                 </a:solidFill>
@@ -9059,11 +9200,14 @@
               </a:rPr>
               <a:t>The expected artifact is a completed AI requirements matrix.</a:t>
             </a:r>
-            <a:endParaRPr lang="en-US" sz="1380" dirty="0"/>
-          </a:p>
-          <a:p>
-            <a:r>
-              <a:rPr lang="en-US" sz="1380" dirty="0">
+            <a:endParaRPr lang="en-US" sz="1220" dirty="0"/>
+          </a:p>
+          <a:p>
+            <a:pPr indent="0" marL="0">
+              <a:buNone/>
+            </a:pPr>
+            <a:r>
+              <a:rPr lang="en-US" sz="1220" dirty="0">
                 <a:solidFill>
                   <a:srgbClr val="17364A"/>
                 </a:solidFill>
@@ -9071,9 +9215,9 @@
                 <a:ea typeface="Aptos" pitchFamily="34" charset="-122"/>
                 <a:cs typeface="Aptos" pitchFamily="34" charset="-120"/>
               </a:rPr>
-              <a:t>It should be specific to a public health workflow and should include technical.</a:t>
-            </a:r>
-            <a:endParaRPr lang="en-US" sz="1380" dirty="0"/>
+              <a:t>It should be specific to a public health workflow and should.</a:t>
+            </a:r>
+            <a:endParaRPr lang="en-US" sz="1220" dirty="0"/>
           </a:p>
         </p:txBody>
       </p:sp>
@@ -9151,17 +9295,17 @@
         </p:nvSpPr>
         <p:spPr>
           <a:xfrm>
-            <a:off x="7799832" y="5001768"/>
-            <a:ext cx="3145536" cy="502920"/>
-          </a:xfrm>
-          <a:prstGeom prst="rect">
-            <a:avLst/>
-          </a:prstGeom>
-          <a:noFill/>
-          <a:ln/>
-        </p:spPr>
-        <p:txBody>
-          <a:bodyPr wrap="square" lIns="0" tIns="0" rIns="0" bIns="0" rtlCol="0" anchor="t">
+            <a:off x="7799832" y="4974336"/>
+            <a:ext cx="3145536" cy="576072"/>
+          </a:xfrm>
+          <a:prstGeom prst="rect">
+            <a:avLst/>
+          </a:prstGeom>
+          <a:noFill/>
+          <a:ln/>
+        </p:spPr>
+        <p:txBody>
+          <a:bodyPr wrap="square" lIns="254" tIns="254" rIns="254" bIns="254" rtlCol="0" anchor="t">
             <a:normAutofit/>
           </a:bodyPr>
           <a:lstStyle/>
@@ -9170,7 +9314,7 @@
               <a:buNone/>
             </a:pPr>
             <a:r>
-              <a:rPr lang="en-US" sz="1550" dirty="0">
+              <a:rPr lang="en-US" sz="1320" dirty="0">
                 <a:solidFill>
                   <a:srgbClr val="17364A"/>
                 </a:solidFill>
@@ -9178,9 +9322,9 @@
                 <a:ea typeface="Aptos" pitchFamily="34" charset="-122"/>
                 <a:cs typeface="Aptos" pitchFamily="34" charset="-120"/>
               </a:rPr>
-              <a:t>Use the concept to clarify workflow changes, dependencies, staffing, procurement requirements, training needs, and implementation checkpoints.</a:t>
-            </a:r>
-            <a:endParaRPr lang="en-US" sz="1550" dirty="0"/>
+              <a:t>Use the concept to clarify workflow changes, dependencies, staffing, procurement requirements, training needs, and.</a:t>
+            </a:r>
+            <a:endParaRPr lang="en-US" sz="1320" dirty="0"/>
           </a:p>
         </p:txBody>
       </p:sp>
@@ -9481,21 +9625,24 @@
           <a:ln/>
         </p:spPr>
         <p:txBody>
-          <a:bodyPr wrap="square" lIns="635" tIns="635" rIns="635" bIns="635" rtlCol="0" anchor="t">
+          <a:bodyPr wrap="square" lIns="1016" tIns="1016" rIns="1016" bIns="1016" rtlCol="0" anchor="t">
             <a:normAutofit/>
           </a:bodyPr>
           <a:lstStyle/>
           <a:p>
+            <a:pPr indent="0" marL="0">
+              <a:buNone/>
+            </a:pPr>
             <a:r>
               <a:rPr lang="en-US" sz="2100" dirty="0">
                 <a:solidFill>
-                  <a:srgbClr val="17364A"/>
-                </a:solidFill>
-                <a:latin typeface="Aptos" pitchFamily="34" charset="0"/>
-                <a:ea typeface="Aptos" pitchFamily="34" charset="-122"/>
-                <a:cs typeface="Aptos" pitchFamily="34" charset="-120"/>
-              </a:rPr>
-              <a:t>The expected artifact is a completed AI requirements matrix. It should be specific to a public health.</a:t>
+                  <a:srgbClr val="003A63"/>
+                </a:solidFill>
+                <a:latin typeface="Aptos" pitchFamily="34" charset="0"/>
+                <a:ea typeface="Aptos" pitchFamily="34" charset="-122"/>
+                <a:cs typeface="Aptos" pitchFamily="34" charset="-120"/>
+              </a:rPr>
+              <a:t>• The expected artifact is a completed AI requirements matrix. It should be specific to a public.</a:t>
             </a:r>
             <a:endParaRPr lang="en-US" sz="2100" dirty="0"/>
           </a:p>
@@ -9575,17 +9722,17 @@
         </p:nvSpPr>
         <p:spPr>
           <a:xfrm>
-            <a:off x="7799832" y="1828800"/>
-            <a:ext cx="3145536" cy="685800"/>
-          </a:xfrm>
-          <a:prstGeom prst="rect">
-            <a:avLst/>
-          </a:prstGeom>
-          <a:noFill/>
-          <a:ln/>
-        </p:spPr>
-        <p:txBody>
-          <a:bodyPr wrap="square" lIns="0" tIns="0" rIns="0" bIns="0" rtlCol="0" anchor="t">
+            <a:off x="7799832" y="1801368"/>
+            <a:ext cx="3145536" cy="758952"/>
+          </a:xfrm>
+          <a:prstGeom prst="rect">
+            <a:avLst/>
+          </a:prstGeom>
+          <a:noFill/>
+          <a:ln/>
+        </p:spPr>
+        <p:txBody>
+          <a:bodyPr wrap="square" lIns="254" tIns="254" rIns="254" bIns="254" rtlCol="0" anchor="t">
             <a:normAutofit/>
           </a:bodyPr>
           <a:lstStyle/>
@@ -9594,7 +9741,7 @@
               <a:buNone/>
             </a:pPr>
             <a:r>
-              <a:rPr lang="en-US" sz="1550" dirty="0">
+              <a:rPr lang="en-US" sz="1320" dirty="0">
                 <a:solidFill>
                   <a:srgbClr val="17364A"/>
                 </a:solidFill>
@@ -9604,7 +9751,7 @@
               </a:rPr>
               <a:t>The expected artifact is a completed AI requirements matrix. It should be specific to a public health.</a:t>
             </a:r>
-            <a:endParaRPr lang="en-US" sz="1550" dirty="0"/>
+            <a:endParaRPr lang="en-US" sz="1320" dirty="0"/>
           </a:p>
         </p:txBody>
       </p:sp>
@@ -9692,13 +9839,16 @@
           <a:ln/>
         </p:spPr>
         <p:txBody>
-          <a:bodyPr wrap="square" lIns="254" tIns="254" rIns="254" bIns="254" rtlCol="0" anchor="t">
+          <a:bodyPr wrap="square" lIns="508" tIns="508" rIns="508" bIns="508" rtlCol="0" anchor="t">
             <a:normAutofit/>
           </a:bodyPr>
           <a:lstStyle/>
           <a:p>
-            <a:r>
-              <a:rPr lang="en-US" sz="1380" dirty="0">
+            <a:pPr indent="0" marL="0">
+              <a:buNone/>
+            </a:pPr>
+            <a:r>
+              <a:rPr lang="en-US" sz="1220" dirty="0">
                 <a:solidFill>
                   <a:srgbClr val="17364A"/>
                 </a:solidFill>
@@ -9708,11 +9858,14 @@
               </a:rPr>
               <a:t>The expected artifact is a completed AI requirements matrix.</a:t>
             </a:r>
-            <a:endParaRPr lang="en-US" sz="1380" dirty="0"/>
-          </a:p>
-          <a:p>
-            <a:r>
-              <a:rPr lang="en-US" sz="1380" dirty="0">
+            <a:endParaRPr lang="en-US" sz="1220" dirty="0"/>
+          </a:p>
+          <a:p>
+            <a:pPr indent="0" marL="0">
+              <a:buNone/>
+            </a:pPr>
+            <a:r>
+              <a:rPr lang="en-US" sz="1220" dirty="0">
                 <a:solidFill>
                   <a:srgbClr val="17364A"/>
                 </a:solidFill>
@@ -9720,9 +9873,9 @@
                 <a:ea typeface="Aptos" pitchFamily="34" charset="-122"/>
                 <a:cs typeface="Aptos" pitchFamily="34" charset="-120"/>
               </a:rPr>
-              <a:t>It should be specific to a public health workflow and should include technical.</a:t>
-            </a:r>
-            <a:endParaRPr lang="en-US" sz="1380" dirty="0"/>
+              <a:t>It should be specific to a public health workflow and should.</a:t>
+            </a:r>
+            <a:endParaRPr lang="en-US" sz="1220" dirty="0"/>
           </a:p>
         </p:txBody>
       </p:sp>
@@ -9800,17 +9953,17 @@
         </p:nvSpPr>
         <p:spPr>
           <a:xfrm>
-            <a:off x="7799832" y="5001768"/>
-            <a:ext cx="3145536" cy="502920"/>
-          </a:xfrm>
-          <a:prstGeom prst="rect">
-            <a:avLst/>
-          </a:prstGeom>
-          <a:noFill/>
-          <a:ln/>
-        </p:spPr>
-        <p:txBody>
-          <a:bodyPr wrap="square" lIns="0" tIns="0" rIns="0" bIns="0" rtlCol="0" anchor="t">
+            <a:off x="7799832" y="4974336"/>
+            <a:ext cx="3145536" cy="576072"/>
+          </a:xfrm>
+          <a:prstGeom prst="rect">
+            <a:avLst/>
+          </a:prstGeom>
+          <a:noFill/>
+          <a:ln/>
+        </p:spPr>
+        <p:txBody>
+          <a:bodyPr wrap="square" lIns="254" tIns="254" rIns="254" bIns="254" rtlCol="0" anchor="t">
             <a:normAutofit/>
           </a:bodyPr>
           <a:lstStyle/>
@@ -9819,7 +9972,7 @@
               <a:buNone/>
             </a:pPr>
             <a:r>
-              <a:rPr lang="en-US" sz="1550" dirty="0">
+              <a:rPr lang="en-US" sz="1320" dirty="0">
                 <a:solidFill>
                   <a:srgbClr val="17364A"/>
                 </a:solidFill>
@@ -9827,9 +9980,9 @@
                 <a:ea typeface="Aptos" pitchFamily="34" charset="-122"/>
                 <a:cs typeface="Aptos" pitchFamily="34" charset="-120"/>
               </a:rPr>
-              <a:t>Use the assignment to test whether you can explain the concept, apply it to a realistic public health situation, and identify what would need review before the work moves forward.</a:t>
-            </a:r>
-            <a:endParaRPr lang="en-US" sz="1550" dirty="0"/>
+              <a:t>Use the assignment to test whether you can explain the concept, apply it to a realistic public health situation, and.</a:t>
+            </a:r>
+            <a:endParaRPr lang="en-US" sz="1320" dirty="0"/>
           </a:p>
         </p:txBody>
       </p:sp>
@@ -10130,35 +10283,41 @@
           <a:ln/>
         </p:spPr>
         <p:txBody>
-          <a:bodyPr wrap="square" lIns="635" tIns="635" rIns="635" bIns="635" rtlCol="0" anchor="t">
+          <a:bodyPr wrap="square" lIns="1016" tIns="1016" rIns="1016" bIns="1016" rtlCol="0" anchor="t">
             <a:normAutofit/>
           </a:bodyPr>
           <a:lstStyle/>
           <a:p>
+            <a:pPr indent="0" marL="0">
+              <a:buNone/>
+            </a:pPr>
             <a:r>
               <a:rPr lang="en-US" sz="2100" dirty="0">
                 <a:solidFill>
-                  <a:srgbClr val="17364A"/>
-                </a:solidFill>
-                <a:latin typeface="Aptos" pitchFamily="34" charset="0"/>
-                <a:ea typeface="Aptos" pitchFamily="34" charset="-122"/>
-                <a:cs typeface="Aptos" pitchFamily="34" charset="-120"/>
-              </a:rPr>
-              <a:t>AI procurement requires stronger requirements than ordinary software purchasing because agencies must define not.</a:t>
+                  <a:srgbClr val="003A63"/>
+                </a:solidFill>
+                <a:latin typeface="Aptos" pitchFamily="34" charset="0"/>
+                <a:ea typeface="Aptos" pitchFamily="34" charset="-122"/>
+                <a:cs typeface="Aptos" pitchFamily="34" charset="-120"/>
+              </a:rPr>
+              <a:t>• AI procurement requires stronger requirements than ordinary software purchasing because.</a:t>
             </a:r>
             <a:endParaRPr lang="en-US" sz="2100" dirty="0"/>
           </a:p>
           <a:p>
+            <a:pPr indent="0" marL="0">
+              <a:buNone/>
+            </a:pPr>
             <a:r>
               <a:rPr lang="en-US" sz="2100" dirty="0">
                 <a:solidFill>
-                  <a:srgbClr val="17364A"/>
-                </a:solidFill>
-                <a:latin typeface="Aptos" pitchFamily="34" charset="0"/>
-                <a:ea typeface="Aptos" pitchFamily="34" charset="-122"/>
-                <a:cs typeface="Aptos" pitchFamily="34" charset="-120"/>
-              </a:rPr>
-              <a:t>This module teaches learners how to write requirements that can be evaluated, tested, enforced, and monitored.</a:t>
+                  <a:srgbClr val="003A63"/>
+                </a:solidFill>
+                <a:latin typeface="Aptos" pitchFamily="34" charset="0"/>
+                <a:ea typeface="Aptos" pitchFamily="34" charset="-122"/>
+                <a:cs typeface="Aptos" pitchFamily="34" charset="-120"/>
+              </a:rPr>
+              <a:t>• This module teaches learners how to write requirements that can be evaluated, tested,.</a:t>
             </a:r>
             <a:endParaRPr lang="en-US" sz="2100" dirty="0"/>
           </a:p>
@@ -10238,17 +10397,17 @@
         </p:nvSpPr>
         <p:spPr>
           <a:xfrm>
-            <a:off x="8074152" y="1920240"/>
-            <a:ext cx="2825496" cy="1280160"/>
-          </a:xfrm>
-          <a:prstGeom prst="rect">
-            <a:avLst/>
-          </a:prstGeom>
-          <a:noFill/>
-          <a:ln/>
-        </p:spPr>
-        <p:txBody>
-          <a:bodyPr wrap="square" lIns="0" tIns="0" rIns="0" bIns="0" rtlCol="0" anchor="t">
+            <a:off x="8074152" y="1892808"/>
+            <a:ext cx="2825496" cy="1353312"/>
+          </a:xfrm>
+          <a:prstGeom prst="rect">
+            <a:avLst/>
+          </a:prstGeom>
+          <a:noFill/>
+          <a:ln/>
+        </p:spPr>
+        <p:txBody>
+          <a:bodyPr wrap="square" lIns="254" tIns="254" rIns="254" bIns="254" rtlCol="0" anchor="t">
             <a:normAutofit/>
           </a:bodyPr>
           <a:lstStyle/>
@@ -10257,7 +10416,7 @@
               <a:buNone/>
             </a:pPr>
             <a:r>
-              <a:rPr lang="en-US" sz="1550" dirty="0">
+              <a:rPr lang="en-US" sz="1320" dirty="0">
                 <a:solidFill>
                   <a:srgbClr val="17364A"/>
                 </a:solidFill>
@@ -10265,43 +10424,9 @@
                 <a:ea typeface="Aptos" pitchFamily="34" charset="-122"/>
                 <a:cs typeface="Aptos" pitchFamily="34" charset="-120"/>
               </a:rPr>
-              <a:t>Level: applied/foundational</a:t>
-            </a:r>
-            <a:endParaRPr lang="en-US" sz="1550" dirty="0"/>
-          </a:p>
-          <a:p>
-            <a:pPr indent="0" marL="0">
-              <a:buNone/>
-            </a:pPr>
-            <a:r>
-              <a:rPr lang="en-US" sz="1550" dirty="0">
-                <a:solidFill>
-                  <a:srgbClr val="17364A"/>
-                </a:solidFill>
-                <a:latin typeface="Aptos" pitchFamily="34" charset="0"/>
-                <a:ea typeface="Aptos" pitchFamily="34" charset="-122"/>
-                <a:cs typeface="Aptos" pitchFamily="34" charset="-120"/>
-              </a:rPr>
-              <a:t>Primary track: Program Management Role-Based Track</a:t>
-            </a:r>
-            <a:endParaRPr lang="en-US" sz="1550" dirty="0"/>
-          </a:p>
-          <a:p>
-            <a:pPr indent="0" marL="0">
-              <a:buNone/>
-            </a:pPr>
-            <a:r>
-              <a:rPr lang="en-US" sz="1550" dirty="0">
-                <a:solidFill>
-                  <a:srgbClr val="17364A"/>
-                </a:solidFill>
-                <a:latin typeface="Aptos" pitchFamily="34" charset="0"/>
-                <a:ea typeface="Aptos" pitchFamily="34" charset="-122"/>
-                <a:cs typeface="Aptos" pitchFamily="34" charset="-120"/>
-              </a:rPr>
-              <a:t>Appears in tracks: operations-data-quality</a:t>
-            </a:r>
-            <a:endParaRPr lang="en-US" sz="1550" dirty="0"/>
+              <a:t>Level: applied/foundational Primary track: Program Management Role-Based Track Appears in tracks: operations-data-quality</a:t>
+            </a:r>
+            <a:endParaRPr lang="en-US" sz="1320" dirty="0"/>
           </a:p>
         </p:txBody>
       </p:sp>
@@ -10389,13 +10514,16 @@
           <a:ln/>
         </p:spPr>
         <p:txBody>
-          <a:bodyPr wrap="square" lIns="254" tIns="254" rIns="254" bIns="254" rtlCol="0" anchor="t">
+          <a:bodyPr wrap="square" lIns="508" tIns="508" rIns="508" bIns="508" rtlCol="0" anchor="t">
             <a:normAutofit/>
           </a:bodyPr>
           <a:lstStyle/>
           <a:p>
-            <a:r>
-              <a:rPr lang="en-US" sz="1380" dirty="0">
+            <a:pPr indent="0" marL="0">
+              <a:buNone/>
+            </a:pPr>
+            <a:r>
+              <a:rPr lang="en-US" sz="1220" dirty="0">
                 <a:solidFill>
                   <a:srgbClr val="17364A"/>
                 </a:solidFill>
@@ -10405,11 +10533,14 @@
               </a:rPr>
               <a:t>Read the module for shared vocabulary and context.</a:t>
             </a:r>
-            <a:endParaRPr lang="en-US" sz="1380" dirty="0"/>
-          </a:p>
-          <a:p>
-            <a:r>
-              <a:rPr lang="en-US" sz="1380" dirty="0">
+            <a:endParaRPr lang="en-US" sz="1220" dirty="0"/>
+          </a:p>
+          <a:p>
+            <a:pPr indent="0" marL="0">
+              <a:buNone/>
+            </a:pPr>
+            <a:r>
+              <a:rPr lang="en-US" sz="1220" dirty="0">
                 <a:solidFill>
                   <a:srgbClr val="17364A"/>
                 </a:solidFill>
@@ -10419,11 +10550,14 @@
               </a:rPr>
               <a:t>Complete the practical exercise to apply the concept.</a:t>
             </a:r>
-            <a:endParaRPr lang="en-US" sz="1380" dirty="0"/>
-          </a:p>
-          <a:p>
-            <a:r>
-              <a:rPr lang="en-US" sz="1380" dirty="0">
+            <a:endParaRPr lang="en-US" sz="1220" dirty="0"/>
+          </a:p>
+          <a:p>
+            <a:pPr indent="0" marL="0">
+              <a:buNone/>
+            </a:pPr>
+            <a:r>
+              <a:rPr lang="en-US" sz="1220" dirty="0">
                 <a:solidFill>
                   <a:srgbClr val="17364A"/>
                 </a:solidFill>
@@ -10433,7 +10567,7 @@
               </a:rPr>
               <a:t>Use the notes and references for deeper review.</a:t>
             </a:r>
-            <a:endParaRPr lang="en-US" sz="1380" dirty="0"/>
+            <a:endParaRPr lang="en-US" sz="1220" dirty="0"/>
           </a:p>
         </p:txBody>
       </p:sp>
@@ -10734,49 +10868,58 @@
           <a:ln/>
         </p:spPr>
         <p:txBody>
-          <a:bodyPr wrap="square" lIns="635" tIns="635" rIns="635" bIns="635" rtlCol="0" anchor="t">
+          <a:bodyPr wrap="square" lIns="1016" tIns="1016" rIns="1016" bIns="1016" rtlCol="0" anchor="t">
             <a:normAutofit/>
           </a:bodyPr>
           <a:lstStyle/>
           <a:p>
+            <a:pPr indent="0" marL="0">
+              <a:buNone/>
+            </a:pPr>
             <a:r>
               <a:rPr lang="en-US" sz="2100" dirty="0">
                 <a:solidFill>
-                  <a:srgbClr val="17364A"/>
-                </a:solidFill>
-                <a:latin typeface="Aptos" pitchFamily="34" charset="0"/>
-                <a:ea typeface="Aptos" pitchFamily="34" charset="-122"/>
-                <a:cs typeface="Aptos" pitchFamily="34" charset="-120"/>
-              </a:rPr>
-              <a:t>1. What is the best reason to address requirements writing for ai procurement and implementation before.</a:t>
+                  <a:srgbClr val="003A63"/>
+                </a:solidFill>
+                <a:latin typeface="Aptos" pitchFamily="34" charset="0"/>
+                <a:ea typeface="Aptos" pitchFamily="34" charset="-122"/>
+                <a:cs typeface="Aptos" pitchFamily="34" charset="-120"/>
+              </a:rPr>
+              <a:t>• 1. What is the best reason to address requirements writing for ai procurement and.</a:t>
             </a:r>
             <a:endParaRPr lang="en-US" sz="2100" dirty="0"/>
           </a:p>
           <a:p>
+            <a:pPr indent="0" marL="0">
+              <a:buNone/>
+            </a:pPr>
             <a:r>
               <a:rPr lang="en-US" sz="2100" dirty="0">
                 <a:solidFill>
-                  <a:srgbClr val="17364A"/>
-                </a:solidFill>
-                <a:latin typeface="Aptos" pitchFamily="34" charset="0"/>
-                <a:ea typeface="Aptos" pitchFamily="34" charset="-122"/>
-                <a:cs typeface="Aptos" pitchFamily="34" charset="-120"/>
-              </a:rPr>
-              <a:t>2. Which practice best supports responsible implementation?</a:t>
+                  <a:srgbClr val="003A63"/>
+                </a:solidFill>
+                <a:latin typeface="Aptos" pitchFamily="34" charset="0"/>
+                <a:ea typeface="Aptos" pitchFamily="34" charset="-122"/>
+                <a:cs typeface="Aptos" pitchFamily="34" charset="-120"/>
+              </a:rPr>
+              <a:t>• 2. Which practice best supports responsible implementation?</a:t>
             </a:r>
             <a:endParaRPr lang="en-US" sz="2100" dirty="0"/>
           </a:p>
           <a:p>
+            <a:pPr indent="0" marL="0">
+              <a:buNone/>
+            </a:pPr>
             <a:r>
               <a:rPr lang="en-US" sz="2100" dirty="0">
                 <a:solidFill>
-                  <a:srgbClr val="17364A"/>
-                </a:solidFill>
-                <a:latin typeface="Aptos" pitchFamily="34" charset="0"/>
-                <a:ea typeface="Aptos" pitchFamily="34" charset="-122"/>
-                <a:cs typeface="Aptos" pitchFamily="34" charset="-120"/>
-              </a:rPr>
-              <a:t>3. Which statement best describes a common failure mode?</a:t>
+                  <a:srgbClr val="003A63"/>
+                </a:solidFill>
+                <a:latin typeface="Aptos" pitchFamily="34" charset="0"/>
+                <a:ea typeface="Aptos" pitchFamily="34" charset="-122"/>
+                <a:cs typeface="Aptos" pitchFamily="34" charset="-120"/>
+              </a:rPr>
+              <a:t>• 3. Which statement best describes a common failure mode?</a:t>
             </a:r>
             <a:endParaRPr lang="en-US" sz="2100" dirty="0"/>
           </a:p>
@@ -10856,17 +10999,17 @@
         </p:nvSpPr>
         <p:spPr>
           <a:xfrm>
-            <a:off x="7799832" y="1828800"/>
-            <a:ext cx="3145536" cy="685800"/>
-          </a:xfrm>
-          <a:prstGeom prst="rect">
-            <a:avLst/>
-          </a:prstGeom>
-          <a:noFill/>
-          <a:ln/>
-        </p:spPr>
-        <p:txBody>
-          <a:bodyPr wrap="square" lIns="0" tIns="0" rIns="0" bIns="0" rtlCol="0" anchor="t">
+            <a:off x="7799832" y="1801368"/>
+            <a:ext cx="3145536" cy="758952"/>
+          </a:xfrm>
+          <a:prstGeom prst="rect">
+            <a:avLst/>
+          </a:prstGeom>
+          <a:noFill/>
+          <a:ln/>
+        </p:spPr>
+        <p:txBody>
+          <a:bodyPr wrap="square" lIns="254" tIns="254" rIns="254" bIns="254" rtlCol="0" anchor="t">
             <a:normAutofit/>
           </a:bodyPr>
           <a:lstStyle/>
@@ -10875,7 +11018,7 @@
               <a:buNone/>
             </a:pPr>
             <a:r>
-              <a:rPr lang="en-US" sz="1550" dirty="0">
+              <a:rPr lang="en-US" sz="1320" dirty="0">
                 <a:solidFill>
                   <a:srgbClr val="17364A"/>
                 </a:solidFill>
@@ -10885,7 +11028,7 @@
               </a:rPr>
               <a:t>1. What is the best reason to address requirements writing for ai procurement and implementation before.</a:t>
             </a:r>
-            <a:endParaRPr lang="en-US" sz="1550" dirty="0"/>
+            <a:endParaRPr lang="en-US" sz="1320" dirty="0"/>
           </a:p>
         </p:txBody>
       </p:sp>
@@ -10973,13 +11116,16 @@
           <a:ln/>
         </p:spPr>
         <p:txBody>
-          <a:bodyPr wrap="square" lIns="254" tIns="254" rIns="254" bIns="254" rtlCol="0" anchor="t">
+          <a:bodyPr wrap="square" lIns="508" tIns="508" rIns="508" bIns="508" rtlCol="0" anchor="t">
             <a:normAutofit/>
           </a:bodyPr>
           <a:lstStyle/>
           <a:p>
-            <a:r>
-              <a:rPr lang="en-US" sz="1380" dirty="0">
+            <a:pPr indent="0" marL="0">
+              <a:buNone/>
+            </a:pPr>
+            <a:r>
+              <a:rPr lang="en-US" sz="1220" dirty="0">
                 <a:solidFill>
                   <a:srgbClr val="17364A"/>
                 </a:solidFill>
@@ -10989,11 +11135,14 @@
               </a:rPr>
               <a:t>1.</a:t>
             </a:r>
-            <a:endParaRPr lang="en-US" sz="1380" dirty="0"/>
-          </a:p>
-          <a:p>
-            <a:r>
-              <a:rPr lang="en-US" sz="1380" dirty="0">
+            <a:endParaRPr lang="en-US" sz="1220" dirty="0"/>
+          </a:p>
+          <a:p>
+            <a:pPr indent="0" marL="0">
+              <a:buNone/>
+            </a:pPr>
+            <a:r>
+              <a:rPr lang="en-US" sz="1220" dirty="0">
                 <a:solidFill>
                   <a:srgbClr val="17364A"/>
                 </a:solidFill>
@@ -11001,13 +11150,16 @@
                 <a:ea typeface="Aptos" pitchFamily="34" charset="-122"/>
                 <a:cs typeface="Aptos" pitchFamily="34" charset="-120"/>
               </a:rPr>
-              <a:t>What is the best reason to address requirements writing for ai procurement and.</a:t>
-            </a:r>
-            <a:endParaRPr lang="en-US" sz="1380" dirty="0"/>
-          </a:p>
-          <a:p>
-            <a:r>
-              <a:rPr lang="en-US" sz="1380" dirty="0">
+              <a:t>What is the best reason to address requirements writing for ai.</a:t>
+            </a:r>
+            <a:endParaRPr lang="en-US" sz="1220" dirty="0"/>
+          </a:p>
+          <a:p>
+            <a:pPr indent="0" marL="0">
+              <a:buNone/>
+            </a:pPr>
+            <a:r>
+              <a:rPr lang="en-US" sz="1220" dirty="0">
                 <a:solidFill>
                   <a:srgbClr val="17364A"/>
                 </a:solidFill>
@@ -11017,7 +11169,7 @@
               </a:rPr>
               <a:t>2.</a:t>
             </a:r>
-            <a:endParaRPr lang="en-US" sz="1380" dirty="0"/>
+            <a:endParaRPr lang="en-US" sz="1220" dirty="0"/>
           </a:p>
         </p:txBody>
       </p:sp>
@@ -11095,17 +11247,17 @@
         </p:nvSpPr>
         <p:spPr>
           <a:xfrm>
-            <a:off x="7799832" y="5001768"/>
-            <a:ext cx="3145536" cy="502920"/>
-          </a:xfrm>
-          <a:prstGeom prst="rect">
-            <a:avLst/>
-          </a:prstGeom>
-          <a:noFill/>
-          <a:ln/>
-        </p:spPr>
-        <p:txBody>
-          <a:bodyPr wrap="square" lIns="0" tIns="0" rIns="0" bIns="0" rtlCol="0" anchor="t">
+            <a:off x="7799832" y="4974336"/>
+            <a:ext cx="3145536" cy="576072"/>
+          </a:xfrm>
+          <a:prstGeom prst="rect">
+            <a:avLst/>
+          </a:prstGeom>
+          <a:noFill/>
+          <a:ln/>
+        </p:spPr>
+        <p:txBody>
+          <a:bodyPr wrap="square" lIns="254" tIns="254" rIns="254" bIns="254" rtlCol="0" anchor="t">
             <a:normAutofit/>
           </a:bodyPr>
           <a:lstStyle/>
@@ -11114,7 +11266,7 @@
               <a:buNone/>
             </a:pPr>
             <a:r>
-              <a:rPr lang="en-US" sz="1550" dirty="0">
+              <a:rPr lang="en-US" sz="1320" dirty="0">
                 <a:solidFill>
                   <a:srgbClr val="17364A"/>
                 </a:solidFill>
@@ -11122,9 +11274,9 @@
                 <a:ea typeface="Aptos" pitchFamily="34" charset="-122"/>
                 <a:cs typeface="Aptos" pitchFamily="34" charset="-120"/>
               </a:rPr>
-              <a:t>Use the assignment to test whether you can explain the concept, apply it to a realistic public health situation, and identify what would need review before the work moves forward.</a:t>
-            </a:r>
-            <a:endParaRPr lang="en-US" sz="1550" dirty="0"/>
+              <a:t>Use the assignment to test whether you can explain the concept, apply it to a realistic public health situation, and.</a:t>
+            </a:r>
+            <a:endParaRPr lang="en-US" sz="1320" dirty="0"/>
           </a:p>
         </p:txBody>
       </p:sp>
@@ -11425,49 +11577,58 @@
           <a:ln/>
         </p:spPr>
         <p:txBody>
-          <a:bodyPr wrap="square" lIns="635" tIns="635" rIns="635" bIns="635" rtlCol="0" anchor="t">
+          <a:bodyPr wrap="square" lIns="1016" tIns="1016" rIns="1016" bIns="1016" rtlCol="0" anchor="t">
             <a:normAutofit/>
           </a:bodyPr>
           <a:lstStyle/>
           <a:p>
+            <a:pPr indent="0" marL="0">
+              <a:buNone/>
+            </a:pPr>
             <a:r>
               <a:rPr lang="en-US" sz="2100" dirty="0">
                 <a:solidFill>
-                  <a:srgbClr val="17364A"/>
-                </a:solidFill>
-                <a:latin typeface="Aptos" pitchFamily="34" charset="0"/>
-                <a:ea typeface="Aptos" pitchFamily="34" charset="-122"/>
-                <a:cs typeface="Aptos" pitchFamily="34" charset="-120"/>
-              </a:rPr>
-              <a:t>NIST AI Risk Management Framework: https://www.nist.gov/itl/ai-risk-management-framework</a:t>
+                  <a:srgbClr val="003A63"/>
+                </a:solidFill>
+                <a:latin typeface="Aptos" pitchFamily="34" charset="0"/>
+                <a:ea typeface="Aptos" pitchFamily="34" charset="-122"/>
+                <a:cs typeface="Aptos" pitchFamily="34" charset="-120"/>
+              </a:rPr>
+              <a:t>• NIST AI Risk Management Framework: https://www.nist.gov/itl/ai-risk-management-framework</a:t>
             </a:r>
             <a:endParaRPr lang="en-US" sz="2100" dirty="0"/>
           </a:p>
           <a:p>
+            <a:pPr indent="0" marL="0">
+              <a:buNone/>
+            </a:pPr>
             <a:r>
               <a:rPr lang="en-US" sz="2100" dirty="0">
                 <a:solidFill>
-                  <a:srgbClr val="17364A"/>
-                </a:solidFill>
-                <a:latin typeface="Aptos" pitchFamily="34" charset="0"/>
-                <a:ea typeface="Aptos" pitchFamily="34" charset="-122"/>
-                <a:cs typeface="Aptos" pitchFamily="34" charset="-120"/>
-              </a:rPr>
-              <a:t>ONC interoperability resources and agency procurement templates</a:t>
+                  <a:srgbClr val="003A63"/>
+                </a:solidFill>
+                <a:latin typeface="Aptos" pitchFamily="34" charset="0"/>
+                <a:ea typeface="Aptos" pitchFamily="34" charset="-122"/>
+                <a:cs typeface="Aptos" pitchFamily="34" charset="-120"/>
+              </a:rPr>
+              <a:t>• ONC interoperability resources and agency procurement templates</a:t>
             </a:r>
             <a:endParaRPr lang="en-US" sz="2100" dirty="0"/>
           </a:p>
           <a:p>
+            <a:pPr indent="0" marL="0">
+              <a:buNone/>
+            </a:pPr>
             <a:r>
               <a:rPr lang="en-US" sz="2100" dirty="0">
                 <a:solidFill>
-                  <a:srgbClr val="17364A"/>
-                </a:solidFill>
-                <a:latin typeface="Aptos" pitchFamily="34" charset="0"/>
-                <a:ea typeface="Aptos" pitchFamily="34" charset="-122"/>
-                <a:cs typeface="Aptos" pitchFamily="34" charset="-120"/>
-              </a:rPr>
-              <a:t>NIST Generative AI Profile:.</a:t>
+                  <a:srgbClr val="003A63"/>
+                </a:solidFill>
+                <a:latin typeface="Aptos" pitchFamily="34" charset="0"/>
+                <a:ea typeface="Aptos" pitchFamily="34" charset="-122"/>
+                <a:cs typeface="Aptos" pitchFamily="34" charset="-120"/>
+              </a:rPr>
+              <a:t>• NIST Generative AI Profile:.</a:t>
             </a:r>
             <a:endParaRPr lang="en-US" sz="2100" dirty="0"/>
           </a:p>
@@ -11547,17 +11708,17 @@
         </p:nvSpPr>
         <p:spPr>
           <a:xfrm>
-            <a:off x="7799832" y="1828800"/>
-            <a:ext cx="3145536" cy="685800"/>
-          </a:xfrm>
-          <a:prstGeom prst="rect">
-            <a:avLst/>
-          </a:prstGeom>
-          <a:noFill/>
-          <a:ln/>
-        </p:spPr>
-        <p:txBody>
-          <a:bodyPr wrap="square" lIns="0" tIns="0" rIns="0" bIns="0" rtlCol="0" anchor="t">
+            <a:off x="7799832" y="1801368"/>
+            <a:ext cx="3145536" cy="758952"/>
+          </a:xfrm>
+          <a:prstGeom prst="rect">
+            <a:avLst/>
+          </a:prstGeom>
+          <a:noFill/>
+          <a:ln/>
+        </p:spPr>
+        <p:txBody>
+          <a:bodyPr wrap="square" lIns="254" tIns="254" rIns="254" bIns="254" rtlCol="0" anchor="t">
             <a:normAutofit/>
           </a:bodyPr>
           <a:lstStyle/>
@@ -11566,7 +11727,7 @@
               <a:buNone/>
             </a:pPr>
             <a:r>
-              <a:rPr lang="en-US" sz="1550" dirty="0">
+              <a:rPr lang="en-US" sz="1320" dirty="0">
                 <a:solidFill>
                   <a:srgbClr val="17364A"/>
                 </a:solidFill>
@@ -11576,7 +11737,7 @@
               </a:rPr>
               <a:t>NIST AI Risk Management Framework: https://www.nist.gov/itl/ai-risk-management-framework</a:t>
             </a:r>
-            <a:endParaRPr lang="en-US" sz="1550" dirty="0"/>
+            <a:endParaRPr lang="en-US" sz="1320" dirty="0"/>
           </a:p>
         </p:txBody>
       </p:sp>
@@ -11664,13 +11825,16 @@
           <a:ln/>
         </p:spPr>
         <p:txBody>
-          <a:bodyPr wrap="square" lIns="254" tIns="254" rIns="254" bIns="254" rtlCol="0" anchor="t">
+          <a:bodyPr wrap="square" lIns="508" tIns="508" rIns="508" bIns="508" rtlCol="0" anchor="t">
             <a:normAutofit/>
           </a:bodyPr>
           <a:lstStyle/>
           <a:p>
-            <a:r>
-              <a:rPr lang="en-US" sz="1380" dirty="0">
+            <a:pPr indent="0" marL="0">
+              <a:buNone/>
+            </a:pPr>
+            <a:r>
+              <a:rPr lang="en-US" sz="1220" dirty="0">
                 <a:solidFill>
                   <a:srgbClr val="17364A"/>
                 </a:solidFill>
@@ -11680,11 +11844,14 @@
               </a:rPr>
               <a:t>CDC Public Health Data Strategy and Data Modernization resources:.</a:t>
             </a:r>
-            <a:endParaRPr lang="en-US" sz="1380" dirty="0"/>
-          </a:p>
-          <a:p>
-            <a:r>
-              <a:rPr lang="en-US" sz="1380" dirty="0">
+            <a:endParaRPr lang="en-US" sz="1220" dirty="0"/>
+          </a:p>
+          <a:p>
+            <a:pPr indent="0" marL="0">
+              <a:buNone/>
+            </a:pPr>
+            <a:r>
+              <a:rPr lang="en-US" sz="1220" dirty="0">
                 <a:solidFill>
                   <a:srgbClr val="17364A"/>
                 </a:solidFill>
@@ -11692,9 +11859,9 @@
                 <a:ea typeface="Aptos" pitchFamily="34" charset="-122"/>
                 <a:cs typeface="Aptos" pitchFamily="34" charset="-120"/>
               </a:rPr>
-              <a:t>OWASP Top 10 for LLM Applications, when security or AI integrations are relevant</a:t>
-            </a:r>
-            <a:endParaRPr lang="en-US" sz="1380" dirty="0"/>
+              <a:t>OWASP Top 10 for LLM Applications, when security or AI.</a:t>
+            </a:r>
+            <a:endParaRPr lang="en-US" sz="1220" dirty="0"/>
           </a:p>
         </p:txBody>
       </p:sp>
@@ -11772,17 +11939,17 @@
         </p:nvSpPr>
         <p:spPr>
           <a:xfrm>
-            <a:off x="7799832" y="5001768"/>
-            <a:ext cx="3145536" cy="502920"/>
-          </a:xfrm>
-          <a:prstGeom prst="rect">
-            <a:avLst/>
-          </a:prstGeom>
-          <a:noFill/>
-          <a:ln/>
-        </p:spPr>
-        <p:txBody>
-          <a:bodyPr wrap="square" lIns="0" tIns="0" rIns="0" bIns="0" rtlCol="0" anchor="t">
+            <a:off x="7799832" y="4974336"/>
+            <a:ext cx="3145536" cy="576072"/>
+          </a:xfrm>
+          <a:prstGeom prst="rect">
+            <a:avLst/>
+          </a:prstGeom>
+          <a:noFill/>
+          <a:ln/>
+        </p:spPr>
+        <p:txBody>
+          <a:bodyPr wrap="square" lIns="254" tIns="254" rIns="254" bIns="254" rtlCol="0" anchor="t">
             <a:normAutofit/>
           </a:bodyPr>
           <a:lstStyle/>
@@ -11791,7 +11958,7 @@
               <a:buNone/>
             </a:pPr>
             <a:r>
-              <a:rPr lang="en-US" sz="1550" dirty="0">
+              <a:rPr lang="en-US" sz="1320" dirty="0">
                 <a:solidFill>
                   <a:srgbClr val="17364A"/>
                 </a:solidFill>
@@ -11799,9 +11966,9 @@
                 <a:ea typeface="Aptos" pitchFamily="34" charset="-122"/>
                 <a:cs typeface="Aptos" pitchFamily="34" charset="-120"/>
               </a:rPr>
-              <a:t>Use the concept to clarify workflow changes, dependencies, staffing, procurement requirements, training needs, and implementation checkpoints.</a:t>
-            </a:r>
-            <a:endParaRPr lang="en-US" sz="1550" dirty="0"/>
+              <a:t>Use the concept to clarify workflow changes, dependencies, staffing, procurement requirements, training needs, and.</a:t>
+            </a:r>
+            <a:endParaRPr lang="en-US" sz="1320" dirty="0"/>
           </a:p>
         </p:txBody>
       </p:sp>
@@ -12102,21 +12269,24 @@
           <a:ln/>
         </p:spPr>
         <p:txBody>
-          <a:bodyPr wrap="square" lIns="635" tIns="635" rIns="635" bIns="635" rtlCol="0" anchor="t">
+          <a:bodyPr wrap="square" lIns="1016" tIns="1016" rIns="1016" bIns="1016" rtlCol="0" anchor="t">
             <a:normAutofit/>
           </a:bodyPr>
           <a:lstStyle/>
           <a:p>
+            <a:pPr indent="0" marL="0">
+              <a:buNone/>
+            </a:pPr>
             <a:r>
               <a:rPr lang="en-US" sz="2100" dirty="0">
                 <a:solidFill>
-                  <a:srgbClr val="17364A"/>
-                </a:solidFill>
-                <a:latin typeface="Aptos" pitchFamily="34" charset="0"/>
-                <a:ea typeface="Aptos" pitchFamily="34" charset="-122"/>
-                <a:cs typeface="Aptos" pitchFamily="34" charset="-120"/>
-              </a:rPr>
-              <a:t>Agency privacy, cybersecurity, data governance, procurement, and records management policies</a:t>
+                  <a:srgbClr val="003A63"/>
+                </a:solidFill>
+                <a:latin typeface="Aptos" pitchFamily="34" charset="0"/>
+                <a:ea typeface="Aptos" pitchFamily="34" charset="-122"/>
+                <a:cs typeface="Aptos" pitchFamily="34" charset="-120"/>
+              </a:rPr>
+              <a:t>• Agency privacy, cybersecurity, data governance, procurement, and records management policies</a:t>
             </a:r>
             <a:endParaRPr lang="en-US" sz="2100" dirty="0"/>
           </a:p>
@@ -12196,17 +12366,17 @@
         </p:nvSpPr>
         <p:spPr>
           <a:xfrm>
-            <a:off x="7799832" y="1828800"/>
-            <a:ext cx="3145536" cy="685800"/>
-          </a:xfrm>
-          <a:prstGeom prst="rect">
-            <a:avLst/>
-          </a:prstGeom>
-          <a:noFill/>
-          <a:ln/>
-        </p:spPr>
-        <p:txBody>
-          <a:bodyPr wrap="square" lIns="0" tIns="0" rIns="0" bIns="0" rtlCol="0" anchor="t">
+            <a:off x="7799832" y="1801368"/>
+            <a:ext cx="3145536" cy="758952"/>
+          </a:xfrm>
+          <a:prstGeom prst="rect">
+            <a:avLst/>
+          </a:prstGeom>
+          <a:noFill/>
+          <a:ln/>
+        </p:spPr>
+        <p:txBody>
+          <a:bodyPr wrap="square" lIns="254" tIns="254" rIns="254" bIns="254" rtlCol="0" anchor="t">
             <a:normAutofit/>
           </a:bodyPr>
           <a:lstStyle/>
@@ -12215,7 +12385,7 @@
               <a:buNone/>
             </a:pPr>
             <a:r>
-              <a:rPr lang="en-US" sz="1550" dirty="0">
+              <a:rPr lang="en-US" sz="1320" dirty="0">
                 <a:solidFill>
                   <a:srgbClr val="17364A"/>
                 </a:solidFill>
@@ -12225,7 +12395,7 @@
               </a:rPr>
               <a:t>Agency privacy, cybersecurity, data governance, procurement, and records management policies</a:t>
             </a:r>
-            <a:endParaRPr lang="en-US" sz="1550" dirty="0"/>
+            <a:endParaRPr lang="en-US" sz="1320" dirty="0"/>
           </a:p>
         </p:txBody>
       </p:sp>
@@ -12313,13 +12483,16 @@
           <a:ln/>
         </p:spPr>
         <p:txBody>
-          <a:bodyPr wrap="square" lIns="254" tIns="254" rIns="254" bIns="254" rtlCol="0" anchor="t">
+          <a:bodyPr wrap="square" lIns="508" tIns="508" rIns="508" bIns="508" rtlCol="0" anchor="t">
             <a:normAutofit/>
           </a:bodyPr>
           <a:lstStyle/>
           <a:p>
-            <a:r>
-              <a:rPr lang="en-US" sz="1380" dirty="0">
+            <a:pPr indent="0" marL="0">
+              <a:buNone/>
+            </a:pPr>
+            <a:r>
+              <a:rPr lang="en-US" sz="1220" dirty="0">
                 <a:solidFill>
                   <a:srgbClr val="17364A"/>
                 </a:solidFill>
@@ -12327,9 +12500,9 @@
                 <a:ea typeface="Aptos" pitchFamily="34" charset="-122"/>
                 <a:cs typeface="Aptos" pitchFamily="34" charset="-120"/>
               </a:rPr>
-              <a:t>Agency privacy, cybersecurity, data governance, procurement, and records management policies</a:t>
-            </a:r>
-            <a:endParaRPr lang="en-US" sz="1380" dirty="0"/>
+              <a:t>Agency privacy, cybersecurity, data governance, procurement, and.</a:t>
+            </a:r>
+            <a:endParaRPr lang="en-US" sz="1220" dirty="0"/>
           </a:p>
         </p:txBody>
       </p:sp>
@@ -12407,17 +12580,17 @@
         </p:nvSpPr>
         <p:spPr>
           <a:xfrm>
-            <a:off x="7799832" y="5001768"/>
-            <a:ext cx="3145536" cy="502920"/>
-          </a:xfrm>
-          <a:prstGeom prst="rect">
-            <a:avLst/>
-          </a:prstGeom>
-          <a:noFill/>
-          <a:ln/>
-        </p:spPr>
-        <p:txBody>
-          <a:bodyPr wrap="square" lIns="0" tIns="0" rIns="0" bIns="0" rtlCol="0" anchor="t">
+            <a:off x="7799832" y="4974336"/>
+            <a:ext cx="3145536" cy="576072"/>
+          </a:xfrm>
+          <a:prstGeom prst="rect">
+            <a:avLst/>
+          </a:prstGeom>
+          <a:noFill/>
+          <a:ln/>
+        </p:spPr>
+        <p:txBody>
+          <a:bodyPr wrap="square" lIns="254" tIns="254" rIns="254" bIns="254" rtlCol="0" anchor="t">
             <a:normAutofit/>
           </a:bodyPr>
           <a:lstStyle/>
@@ -12426,7 +12599,7 @@
               <a:buNone/>
             </a:pPr>
             <a:r>
-              <a:rPr lang="en-US" sz="1550" dirty="0">
+              <a:rPr lang="en-US" sz="1320" dirty="0">
                 <a:solidFill>
                   <a:srgbClr val="17364A"/>
                 </a:solidFill>
@@ -12434,9 +12607,9 @@
                 <a:ea typeface="Aptos" pitchFamily="34" charset="-122"/>
                 <a:cs typeface="Aptos" pitchFamily="34" charset="-120"/>
               </a:rPr>
-              <a:t>Use the concept to clarify workflow changes, dependencies, staffing, procurement requirements, training needs, and implementation checkpoints.</a:t>
-            </a:r>
-            <a:endParaRPr lang="en-US" sz="1550" dirty="0"/>
+              <a:t>Use the concept to clarify workflow changes, dependencies, staffing, procurement requirements, training needs, and.</a:t>
+            </a:r>
+            <a:endParaRPr lang="en-US" sz="1320" dirty="0"/>
           </a:p>
         </p:txBody>
       </p:sp>
@@ -12737,63 +12910,75 @@
           <a:ln/>
         </p:spPr>
         <p:txBody>
-          <a:bodyPr wrap="square" lIns="635" tIns="635" rIns="635" bIns="635" rtlCol="0" anchor="t">
+          <a:bodyPr wrap="square" lIns="1016" tIns="1016" rIns="1016" bIns="1016" rtlCol="0" anchor="t">
             <a:normAutofit/>
           </a:bodyPr>
           <a:lstStyle/>
           <a:p>
+            <a:pPr indent="0" marL="0">
+              <a:buNone/>
+            </a:pPr>
             <a:r>
               <a:rPr lang="en-US" sz="1900" dirty="0">
                 <a:solidFill>
-                  <a:srgbClr val="17364A"/>
-                </a:solidFill>
-                <a:latin typeface="Aptos" pitchFamily="34" charset="0"/>
-                <a:ea typeface="Aptos" pitchFamily="34" charset="-122"/>
-                <a:cs typeface="Aptos" pitchFamily="34" charset="-120"/>
-              </a:rPr>
-              <a:t>Play 11: Build and Deploy AI Solutions - This lesson informs Play 11 by helping learners connect the lesson.</a:t>
+                  <a:srgbClr val="003A63"/>
+                </a:solidFill>
+                <a:latin typeface="Aptos" pitchFamily="34" charset="0"/>
+                <a:ea typeface="Aptos" pitchFamily="34" charset="-122"/>
+                <a:cs typeface="Aptos" pitchFamily="34" charset="-120"/>
+              </a:rPr>
+              <a:t>• Play 11: Build and Deploy AI Solutions - This lesson informs Play 11 by helping learners.</a:t>
             </a:r>
             <a:endParaRPr lang="en-US" sz="1900" dirty="0"/>
           </a:p>
           <a:p>
+            <a:pPr indent="0" marL="0">
+              <a:buNone/>
+            </a:pPr>
             <a:r>
               <a:rPr lang="en-US" sz="1900" dirty="0">
                 <a:solidFill>
-                  <a:srgbClr val="17364A"/>
-                </a:solidFill>
-                <a:latin typeface="Aptos" pitchFamily="34" charset="0"/>
-                <a:ea typeface="Aptos" pitchFamily="34" charset="-122"/>
-                <a:cs typeface="Aptos" pitchFamily="34" charset="-120"/>
-              </a:rPr>
-              <a:t>Play 2: Readiness Assessment - This lesson informs Play 2 by helping learners connect the lesson topic to.</a:t>
+                  <a:srgbClr val="003A63"/>
+                </a:solidFill>
+                <a:latin typeface="Aptos" pitchFamily="34" charset="0"/>
+                <a:ea typeface="Aptos" pitchFamily="34" charset="-122"/>
+                <a:cs typeface="Aptos" pitchFamily="34" charset="-120"/>
+              </a:rPr>
+              <a:t>• Play 2: Readiness Assessment - This lesson informs Play 2 by helping learners connect the.</a:t>
             </a:r>
             <a:endParaRPr lang="en-US" sz="1900" dirty="0"/>
           </a:p>
           <a:p>
+            <a:pPr indent="0" marL="0">
+              <a:buNone/>
+            </a:pPr>
             <a:r>
               <a:rPr lang="en-US" sz="1900" dirty="0">
                 <a:solidFill>
-                  <a:srgbClr val="17364A"/>
-                </a:solidFill>
-                <a:latin typeface="Aptos" pitchFamily="34" charset="0"/>
-                <a:ea typeface="Aptos" pitchFamily="34" charset="-122"/>
-                <a:cs typeface="Aptos" pitchFamily="34" charset="-120"/>
-              </a:rPr>
-              <a:t>Play 7: Prioritize Use Cases - This lesson informs Play 7 by helping learners connect the lesson topic to.</a:t>
+                  <a:srgbClr val="003A63"/>
+                </a:solidFill>
+                <a:latin typeface="Aptos" pitchFamily="34" charset="0"/>
+                <a:ea typeface="Aptos" pitchFamily="34" charset="-122"/>
+                <a:cs typeface="Aptos" pitchFamily="34" charset="-120"/>
+              </a:rPr>
+              <a:t>• Play 7: Prioritize Use Cases - This lesson informs Play 7 by helping learners connect the.</a:t>
             </a:r>
             <a:endParaRPr lang="en-US" sz="1900" dirty="0"/>
           </a:p>
           <a:p>
+            <a:pPr indent="0" marL="0">
+              <a:buNone/>
+            </a:pPr>
             <a:r>
               <a:rPr lang="en-US" sz="1900" dirty="0">
                 <a:solidFill>
-                  <a:srgbClr val="17364A"/>
-                </a:solidFill>
-                <a:latin typeface="Aptos" pitchFamily="34" charset="0"/>
-                <a:ea typeface="Aptos" pitchFamily="34" charset="-122"/>
-                <a:cs typeface="Aptos" pitchFamily="34" charset="-120"/>
-              </a:rPr>
-              <a:t>Play 3: Establish AI Governance - This lesson informs Play 3 by helping learners connect the lesson topic to.</a:t>
+                  <a:srgbClr val="003A63"/>
+                </a:solidFill>
+                <a:latin typeface="Aptos" pitchFamily="34" charset="0"/>
+                <a:ea typeface="Aptos" pitchFamily="34" charset="-122"/>
+                <a:cs typeface="Aptos" pitchFamily="34" charset="-120"/>
+              </a:rPr>
+              <a:t>• Play 3: Establish AI Governance - This lesson informs Play 3 by helping learners connect the.</a:t>
             </a:r>
             <a:endParaRPr lang="en-US" sz="1900" dirty="0"/>
           </a:p>
@@ -12873,17 +13058,17 @@
         </p:nvSpPr>
         <p:spPr>
           <a:xfrm>
-            <a:off x="8211312" y="1920240"/>
-            <a:ext cx="2734056" cy="1463040"/>
-          </a:xfrm>
-          <a:prstGeom prst="rect">
-            <a:avLst/>
-          </a:prstGeom>
-          <a:noFill/>
-          <a:ln/>
-        </p:spPr>
-        <p:txBody>
-          <a:bodyPr wrap="square" lIns="0" tIns="0" rIns="0" bIns="0" rtlCol="0" anchor="t">
+            <a:off x="8211312" y="1892808"/>
+            <a:ext cx="2734056" cy="1536192"/>
+          </a:xfrm>
+          <a:prstGeom prst="rect">
+            <a:avLst/>
+          </a:prstGeom>
+          <a:noFill/>
+          <a:ln/>
+        </p:spPr>
+        <p:txBody>
+          <a:bodyPr wrap="square" lIns="254" tIns="254" rIns="254" bIns="254" rtlCol="0" anchor="t">
             <a:normAutofit/>
           </a:bodyPr>
           <a:lstStyle/>
@@ -12892,7 +13077,7 @@
               <a:buNone/>
             </a:pPr>
             <a:r>
-              <a:rPr lang="en-US" sz="1550" dirty="0">
+              <a:rPr lang="en-US" sz="1320" dirty="0">
                 <a:solidFill>
                   <a:srgbClr val="17364A"/>
                 </a:solidFill>
@@ -12900,9 +13085,9 @@
                 <a:ea typeface="Aptos" pitchFamily="34" charset="-122"/>
                 <a:cs typeface="Aptos" pitchFamily="34" charset="-120"/>
               </a:rPr>
-              <a:t>Use the related plays to identify decisions, participants, timing, approvals, and documentation needed for responsible implementation.</a:t>
-            </a:r>
-            <a:endParaRPr lang="en-US" sz="1550" dirty="0"/>
+              <a:t>Use the related plays to identify decisions, participants, timing, approvals, and documentation needed for responsible.</a:t>
+            </a:r>
+            <a:endParaRPr lang="en-US" sz="1320" dirty="0"/>
           </a:p>
         </p:txBody>
       </p:sp>
@@ -12990,13 +13175,16 @@
           <a:ln/>
         </p:spPr>
         <p:txBody>
-          <a:bodyPr wrap="square" lIns="254" tIns="254" rIns="254" bIns="254" rtlCol="0" anchor="t">
+          <a:bodyPr wrap="square" lIns="508" tIns="508" rIns="508" bIns="508" rtlCol="0" anchor="t">
             <a:normAutofit/>
           </a:bodyPr>
           <a:lstStyle/>
           <a:p>
-            <a:r>
-              <a:rPr lang="en-US" sz="1380" dirty="0">
+            <a:pPr indent="0" marL="0">
+              <a:buNone/>
+            </a:pPr>
+            <a:r>
+              <a:rPr lang="en-US" sz="1220" dirty="0">
                 <a:solidFill>
                   <a:srgbClr val="17364A"/>
                 </a:solidFill>
@@ -13006,11 +13194,14 @@
               </a:rPr>
               <a:t>Locate the decision point in the playbook sequence.</a:t>
             </a:r>
-            <a:endParaRPr lang="en-US" sz="1380" dirty="0"/>
-          </a:p>
-          <a:p>
-            <a:r>
-              <a:rPr lang="en-US" sz="1380" dirty="0">
+            <a:endParaRPr lang="en-US" sz="1220" dirty="0"/>
+          </a:p>
+          <a:p>
+            <a:pPr indent="0" marL="0">
+              <a:buNone/>
+            </a:pPr>
+            <a:r>
+              <a:rPr lang="en-US" sz="1220" dirty="0">
                 <a:solidFill>
                   <a:srgbClr val="17364A"/>
                 </a:solidFill>
@@ -13020,11 +13211,14 @@
               </a:rPr>
               <a:t>Identify who should participate in the work.</a:t>
             </a:r>
-            <a:endParaRPr lang="en-US" sz="1380" dirty="0"/>
-          </a:p>
-          <a:p>
-            <a:r>
-              <a:rPr lang="en-US" sz="1380" dirty="0">
+            <a:endParaRPr lang="en-US" sz="1220" dirty="0"/>
+          </a:p>
+          <a:p>
+            <a:pPr indent="0" marL="0">
+              <a:buNone/>
+            </a:pPr>
+            <a:r>
+              <a:rPr lang="en-US" sz="1220" dirty="0">
                 <a:solidFill>
                   <a:srgbClr val="17364A"/>
                 </a:solidFill>
@@ -13034,7 +13228,7 @@
               </a:rPr>
               <a:t>Document the review, approval, or implementation step.</a:t>
             </a:r>
-            <a:endParaRPr lang="en-US" sz="1380" dirty="0"/>
+            <a:endParaRPr lang="en-US" sz="1220" dirty="0"/>
           </a:p>
         </p:txBody>
       </p:sp>
@@ -13335,63 +13529,75 @@
           <a:ln/>
         </p:spPr>
         <p:txBody>
-          <a:bodyPr wrap="square" lIns="635" tIns="635" rIns="635" bIns="635" rtlCol="0" anchor="t">
+          <a:bodyPr wrap="square" lIns="1016" tIns="1016" rIns="1016" bIns="1016" rtlCol="0" anchor="t">
             <a:normAutofit/>
           </a:bodyPr>
           <a:lstStyle/>
           <a:p>
+            <a:pPr indent="0" marL="0">
+              <a:buNone/>
+            </a:pPr>
             <a:r>
               <a:rPr lang="en-US" sz="1850" dirty="0">
                 <a:solidFill>
-                  <a:srgbClr val="17364A"/>
-                </a:solidFill>
-                <a:latin typeface="Aptos" pitchFamily="34" charset="0"/>
-                <a:ea typeface="Aptos" pitchFamily="34" charset="-122"/>
-                <a:cs typeface="Aptos" pitchFamily="34" charset="-120"/>
-              </a:rPr>
-              <a:t>Tool 4: AI Policy Landscape Scan (Worksheet) - Use AI Policy Landscape Scan to translate this lesson into a.</a:t>
+                  <a:srgbClr val="003A63"/>
+                </a:solidFill>
+                <a:latin typeface="Aptos" pitchFamily="34" charset="0"/>
+                <a:ea typeface="Aptos" pitchFamily="34" charset="-122"/>
+                <a:cs typeface="Aptos" pitchFamily="34" charset="-120"/>
+              </a:rPr>
+              <a:t>• Tool 4: AI Policy Landscape Scan (Worksheet) - Use AI Policy Landscape Scan to translate this.</a:t>
             </a:r>
             <a:endParaRPr lang="en-US" sz="1850" dirty="0"/>
           </a:p>
           <a:p>
+            <a:pPr indent="0" marL="0">
+              <a:buNone/>
+            </a:pPr>
             <a:r>
               <a:rPr lang="en-US" sz="1850" dirty="0">
                 <a:solidFill>
-                  <a:srgbClr val="17364A"/>
-                </a:solidFill>
-                <a:latin typeface="Aptos" pitchFamily="34" charset="0"/>
-                <a:ea typeface="Aptos" pitchFamily="34" charset="-122"/>
-                <a:cs typeface="Aptos" pitchFamily="34" charset="-120"/>
-              </a:rPr>
-              <a:t>Tool 5: AI Environmental and Resource Impact Review (Checklist) - Use this tool to complete or strengthen.</a:t>
+                  <a:srgbClr val="003A63"/>
+                </a:solidFill>
+                <a:latin typeface="Aptos" pitchFamily="34" charset="0"/>
+                <a:ea typeface="Aptos" pitchFamily="34" charset="-122"/>
+                <a:cs typeface="Aptos" pitchFamily="34" charset="-120"/>
+              </a:rPr>
+              <a:t>• Tool 5: AI Environmental and Resource Impact Review (Checklist) - Use this tool to complete or.</a:t>
             </a:r>
             <a:endParaRPr lang="en-US" sz="1850" dirty="0"/>
           </a:p>
           <a:p>
+            <a:pPr indent="0" marL="0">
+              <a:buNone/>
+            </a:pPr>
             <a:r>
               <a:rPr lang="en-US" sz="1850" dirty="0">
                 <a:solidFill>
-                  <a:srgbClr val="17364A"/>
-                </a:solidFill>
-                <a:latin typeface="Aptos" pitchFamily="34" charset="0"/>
-                <a:ea typeface="Aptos" pitchFamily="34" charset="-122"/>
-                <a:cs typeface="Aptos" pitchFamily="34" charset="-120"/>
-              </a:rPr>
-              <a:t>Tool 6: Human-Centered AI Decision Rule Checklist (Checklist) - Use Human-Centered AI Decision Rule.</a:t>
+                  <a:srgbClr val="003A63"/>
+                </a:solidFill>
+                <a:latin typeface="Aptos" pitchFamily="34" charset="0"/>
+                <a:ea typeface="Aptos" pitchFamily="34" charset="-122"/>
+                <a:cs typeface="Aptos" pitchFamily="34" charset="-120"/>
+              </a:rPr>
+              <a:t>• Tool 6: Human-Centered AI Decision Rule Checklist (Checklist) - Use Human-Centered AI Decision.</a:t>
             </a:r>
             <a:endParaRPr lang="en-US" sz="1850" dirty="0"/>
           </a:p>
           <a:p>
+            <a:pPr indent="0" marL="0">
+              <a:buNone/>
+            </a:pPr>
             <a:r>
               <a:rPr lang="en-US" sz="1850" dirty="0">
                 <a:solidFill>
-                  <a:srgbClr val="17364A"/>
-                </a:solidFill>
-                <a:latin typeface="Aptos" pitchFamily="34" charset="0"/>
-                <a:ea typeface="Aptos" pitchFamily="34" charset="-122"/>
-                <a:cs typeface="Aptos" pitchFamily="34" charset="-120"/>
-              </a:rPr>
-              <a:t>Tool 8: AI Project Charter (Planning) - Use AI Project Charter to translate this lesson into a documented.</a:t>
+                  <a:srgbClr val="003A63"/>
+                </a:solidFill>
+                <a:latin typeface="Aptos" pitchFamily="34" charset="0"/>
+                <a:ea typeface="Aptos" pitchFamily="34" charset="-122"/>
+                <a:cs typeface="Aptos" pitchFamily="34" charset="-120"/>
+              </a:rPr>
+              <a:t>• Tool 8: AI Project Charter (Planning) - Use AI Project Charter to translate this lesson into a.</a:t>
             </a:r>
             <a:endParaRPr lang="en-US" sz="1850" dirty="0"/>
           </a:p>
@@ -13471,17 +13677,17 @@
         </p:nvSpPr>
         <p:spPr>
           <a:xfrm>
-            <a:off x="8211312" y="1920240"/>
-            <a:ext cx="2734056" cy="1463040"/>
-          </a:xfrm>
-          <a:prstGeom prst="rect">
-            <a:avLst/>
-          </a:prstGeom>
-          <a:noFill/>
-          <a:ln/>
-        </p:spPr>
-        <p:txBody>
-          <a:bodyPr wrap="square" lIns="0" tIns="0" rIns="0" bIns="0" rtlCol="0" anchor="t">
+            <a:off x="8211312" y="1892808"/>
+            <a:ext cx="2734056" cy="1536192"/>
+          </a:xfrm>
+          <a:prstGeom prst="rect">
+            <a:avLst/>
+          </a:prstGeom>
+          <a:noFill/>
+          <a:ln/>
+        </p:spPr>
+        <p:txBody>
+          <a:bodyPr wrap="square" lIns="254" tIns="254" rIns="254" bIns="254" rtlCol="0" anchor="t">
             <a:normAutofit/>
           </a:bodyPr>
           <a:lstStyle/>
@@ -13490,7 +13696,7 @@
               <a:buNone/>
             </a:pPr>
             <a:r>
-              <a:rPr lang="en-US" sz="1550" dirty="0">
+              <a:rPr lang="en-US" sz="1320" dirty="0">
                 <a:solidFill>
                   <a:srgbClr val="17364A"/>
                 </a:solidFill>
@@ -13498,9 +13704,9 @@
                 <a:ea typeface="Aptos" pitchFamily="34" charset="-122"/>
                 <a:cs typeface="Aptos" pitchFamily="34" charset="-120"/>
               </a:rPr>
-              <a:t>Use linked tools when your department needs a structured worksheet, template, checklist, review process, or documentation artifact.</a:t>
-            </a:r>
-            <a:endParaRPr lang="en-US" sz="1550" dirty="0"/>
+              <a:t>Use linked tools when your department needs a structured worksheet, template, checklist, review process, or.</a:t>
+            </a:r>
+            <a:endParaRPr lang="en-US" sz="1320" dirty="0"/>
           </a:p>
         </p:txBody>
       </p:sp>
@@ -13588,13 +13794,16 @@
           <a:ln/>
         </p:spPr>
         <p:txBody>
-          <a:bodyPr wrap="square" lIns="254" tIns="254" rIns="254" bIns="254" rtlCol="0" anchor="t">
+          <a:bodyPr wrap="square" lIns="508" tIns="508" rIns="508" bIns="508" rtlCol="0" anchor="t">
             <a:normAutofit/>
           </a:bodyPr>
           <a:lstStyle/>
           <a:p>
-            <a:r>
-              <a:rPr lang="en-US" sz="1380" dirty="0">
+            <a:pPr indent="0" marL="0">
+              <a:buNone/>
+            </a:pPr>
+            <a:r>
+              <a:rPr lang="en-US" sz="1220" dirty="0">
                 <a:solidFill>
                   <a:srgbClr val="17364A"/>
                 </a:solidFill>
@@ -13604,11 +13813,14 @@
               </a:rPr>
               <a:t>Use a tool when no comparable local process exists.</a:t>
             </a:r>
-            <a:endParaRPr lang="en-US" sz="1380" dirty="0"/>
-          </a:p>
-          <a:p>
-            <a:r>
-              <a:rPr lang="en-US" sz="1380" dirty="0">
+            <a:endParaRPr lang="en-US" sz="1220" dirty="0"/>
+          </a:p>
+          <a:p>
+            <a:pPr indent="0" marL="0">
+              <a:buNone/>
+            </a:pPr>
+            <a:r>
+              <a:rPr lang="en-US" sz="1220" dirty="0">
                 <a:solidFill>
                   <a:srgbClr val="17364A"/>
                 </a:solidFill>
@@ -13616,13 +13828,16 @@
                 <a:ea typeface="Aptos" pitchFamily="34" charset="-122"/>
                 <a:cs typeface="Aptos" pitchFamily="34" charset="-120"/>
               </a:rPr>
-              <a:t>Adapt existing department templates when they already fit the purpose.</a:t>
-            </a:r>
-            <a:endParaRPr lang="en-US" sz="1380" dirty="0"/>
-          </a:p>
-          <a:p>
-            <a:r>
-              <a:rPr lang="en-US" sz="1380" dirty="0">
+              <a:t>Adapt existing department templates when they already fit the.</a:t>
+            </a:r>
+            <a:endParaRPr lang="en-US" sz="1220" dirty="0"/>
+          </a:p>
+          <a:p>
+            <a:pPr indent="0" marL="0">
+              <a:buNone/>
+            </a:pPr>
+            <a:r>
+              <a:rPr lang="en-US" sz="1220" dirty="0">
                 <a:solidFill>
                   <a:srgbClr val="17364A"/>
                 </a:solidFill>
@@ -13632,7 +13847,7 @@
               </a:rPr>
               <a:t>Save the completed artifact as evidence of the decision.</a:t>
             </a:r>
-            <a:endParaRPr lang="en-US" sz="1380" dirty="0"/>
+            <a:endParaRPr lang="en-US" sz="1220" dirty="0"/>
           </a:p>
         </p:txBody>
       </p:sp>
@@ -13933,49 +14148,58 @@
           <a:ln/>
         </p:spPr>
         <p:txBody>
-          <a:bodyPr wrap="square" lIns="635" tIns="635" rIns="635" bIns="635" rtlCol="0" anchor="t">
+          <a:bodyPr wrap="square" lIns="1016" tIns="1016" rIns="1016" bIns="1016" rtlCol="0" anchor="t">
             <a:normAutofit/>
           </a:bodyPr>
           <a:lstStyle/>
           <a:p>
+            <a:pPr indent="0" marL="0">
+              <a:buNone/>
+            </a:pPr>
             <a:r>
               <a:rPr lang="en-US" sz="2100" dirty="0">
                 <a:solidFill>
-                  <a:srgbClr val="17364A"/>
-                </a:solidFill>
-                <a:latin typeface="Aptos" pitchFamily="34" charset="0"/>
-                <a:ea typeface="Aptos" pitchFamily="34" charset="-122"/>
-                <a:cs typeface="Aptos" pitchFamily="34" charset="-120"/>
-              </a:rPr>
-              <a:t>Explain the purpose of requirements writing for ai procurement and implementation in public health AI.</a:t>
+                  <a:srgbClr val="003A63"/>
+                </a:solidFill>
+                <a:latin typeface="Aptos" pitchFamily="34" charset="0"/>
+                <a:ea typeface="Aptos" pitchFamily="34" charset="-122"/>
+                <a:cs typeface="Aptos" pitchFamily="34" charset="-120"/>
+              </a:rPr>
+              <a:t>• Explain the purpose of requirements writing for ai procurement and implementation in public.</a:t>
             </a:r>
             <a:endParaRPr lang="en-US" sz="2100" dirty="0"/>
           </a:p>
           <a:p>
+            <a:pPr indent="0" marL="0">
+              <a:buNone/>
+            </a:pPr>
             <a:r>
               <a:rPr lang="en-US" sz="2100" dirty="0">
                 <a:solidFill>
-                  <a:srgbClr val="17364A"/>
-                </a:solidFill>
-                <a:latin typeface="Aptos" pitchFamily="34" charset="0"/>
-                <a:ea typeface="Aptos" pitchFamily="34" charset="-122"/>
-                <a:cs typeface="Aptos" pitchFamily="34" charset="-120"/>
-              </a:rPr>
-              <a:t>Identify the technical, operational, privacy, security, equity, and governance issues associated with.</a:t>
+                  <a:srgbClr val="003A63"/>
+                </a:solidFill>
+                <a:latin typeface="Aptos" pitchFamily="34" charset="0"/>
+                <a:ea typeface="Aptos" pitchFamily="34" charset="-122"/>
+                <a:cs typeface="Aptos" pitchFamily="34" charset="-120"/>
+              </a:rPr>
+              <a:t>• Identify the technical, operational, privacy, security, equity, and governance issues.</a:t>
             </a:r>
             <a:endParaRPr lang="en-US" sz="2100" dirty="0"/>
           </a:p>
           <a:p>
+            <a:pPr indent="0" marL="0">
+              <a:buNone/>
+            </a:pPr>
             <a:r>
               <a:rPr lang="en-US" sz="2100" dirty="0">
                 <a:solidFill>
-                  <a:srgbClr val="17364A"/>
-                </a:solidFill>
-                <a:latin typeface="Aptos" pitchFamily="34" charset="0"/>
-                <a:ea typeface="Aptos" pitchFamily="34" charset="-122"/>
-                <a:cs typeface="Aptos" pitchFamily="34" charset="-120"/>
-              </a:rPr>
-              <a:t>Apply the topic to a real or realistic public health workflow, system, or implementation scenario.</a:t>
+                  <a:srgbClr val="003A63"/>
+                </a:solidFill>
+                <a:latin typeface="Aptos" pitchFamily="34" charset="0"/>
+                <a:ea typeface="Aptos" pitchFamily="34" charset="-122"/>
+                <a:cs typeface="Aptos" pitchFamily="34" charset="-120"/>
+              </a:rPr>
+              <a:t>• Apply the topic to a real or realistic public health workflow, system, or implementation.</a:t>
             </a:r>
             <a:endParaRPr lang="en-US" sz="2100" dirty="0"/>
           </a:p>
@@ -14055,17 +14279,17 @@
         </p:nvSpPr>
         <p:spPr>
           <a:xfrm>
-            <a:off x="7799832" y="1828800"/>
-            <a:ext cx="3145536" cy="685800"/>
-          </a:xfrm>
-          <a:prstGeom prst="rect">
-            <a:avLst/>
-          </a:prstGeom>
-          <a:noFill/>
-          <a:ln/>
-        </p:spPr>
-        <p:txBody>
-          <a:bodyPr wrap="square" lIns="0" tIns="0" rIns="0" bIns="0" rtlCol="0" anchor="t">
+            <a:off x="7799832" y="1801368"/>
+            <a:ext cx="3145536" cy="758952"/>
+          </a:xfrm>
+          <a:prstGeom prst="rect">
+            <a:avLst/>
+          </a:prstGeom>
+          <a:noFill/>
+          <a:ln/>
+        </p:spPr>
+        <p:txBody>
+          <a:bodyPr wrap="square" lIns="254" tIns="254" rIns="254" bIns="254" rtlCol="0" anchor="t">
             <a:normAutofit/>
           </a:bodyPr>
           <a:lstStyle/>
@@ -14074,7 +14298,7 @@
               <a:buNone/>
             </a:pPr>
             <a:r>
-              <a:rPr lang="en-US" sz="1550" dirty="0">
+              <a:rPr lang="en-US" sz="1320" dirty="0">
                 <a:solidFill>
                   <a:srgbClr val="17364A"/>
                 </a:solidFill>
@@ -14084,7 +14308,7 @@
               </a:rPr>
               <a:t>Explain the purpose of requirements writing for ai procurement and implementation in public health AI.</a:t>
             </a:r>
-            <a:endParaRPr lang="en-US" sz="1550" dirty="0"/>
+            <a:endParaRPr lang="en-US" sz="1320" dirty="0"/>
           </a:p>
         </p:txBody>
       </p:sp>
@@ -14172,13 +14396,16 @@
           <a:ln/>
         </p:spPr>
         <p:txBody>
-          <a:bodyPr wrap="square" lIns="254" tIns="254" rIns="254" bIns="254" rtlCol="0" anchor="t">
+          <a:bodyPr wrap="square" lIns="508" tIns="508" rIns="508" bIns="508" rtlCol="0" anchor="t">
             <a:normAutofit/>
           </a:bodyPr>
           <a:lstStyle/>
           <a:p>
-            <a:r>
-              <a:rPr lang="en-US" sz="1380" dirty="0">
+            <a:pPr indent="0" marL="0">
+              <a:buNone/>
+            </a:pPr>
+            <a:r>
+              <a:rPr lang="en-US" sz="1220" dirty="0">
                 <a:solidFill>
                   <a:srgbClr val="17364A"/>
                 </a:solidFill>
@@ -14186,13 +14413,16 @@
                 <a:ea typeface="Aptos" pitchFamily="34" charset="-122"/>
                 <a:cs typeface="Aptos" pitchFamily="34" charset="-120"/>
               </a:rPr>
-              <a:t>Explain the purpose of requirements writing for ai procurement and implementation in.</a:t>
-            </a:r>
-            <a:endParaRPr lang="en-US" sz="1380" dirty="0"/>
-          </a:p>
-          <a:p>
-            <a:r>
-              <a:rPr lang="en-US" sz="1380" dirty="0">
+              <a:t>Explain the purpose of requirements writing for ai procurement and.</a:t>
+            </a:r>
+            <a:endParaRPr lang="en-US" sz="1220" dirty="0"/>
+          </a:p>
+          <a:p>
+            <a:pPr indent="0" marL="0">
+              <a:buNone/>
+            </a:pPr>
+            <a:r>
+              <a:rPr lang="en-US" sz="1220" dirty="0">
                 <a:solidFill>
                   <a:srgbClr val="17364A"/>
                 </a:solidFill>
@@ -14200,13 +14430,16 @@
                 <a:ea typeface="Aptos" pitchFamily="34" charset="-122"/>
                 <a:cs typeface="Aptos" pitchFamily="34" charset="-120"/>
               </a:rPr>
-              <a:t>Identify the technical, operational, privacy, security, equity, and governance issues.</a:t>
-            </a:r>
-            <a:endParaRPr lang="en-US" sz="1380" dirty="0"/>
-          </a:p>
-          <a:p>
-            <a:r>
-              <a:rPr lang="en-US" sz="1380" dirty="0">
+              <a:t>Identify the technical, operational, privacy, security, equity,.</a:t>
+            </a:r>
+            <a:endParaRPr lang="en-US" sz="1220" dirty="0"/>
+          </a:p>
+          <a:p>
+            <a:pPr indent="0" marL="0">
+              <a:buNone/>
+            </a:pPr>
+            <a:r>
+              <a:rPr lang="en-US" sz="1220" dirty="0">
                 <a:solidFill>
                   <a:srgbClr val="17364A"/>
                 </a:solidFill>
@@ -14214,9 +14447,9 @@
                 <a:ea typeface="Aptos" pitchFamily="34" charset="-122"/>
                 <a:cs typeface="Aptos" pitchFamily="34" charset="-120"/>
               </a:rPr>
-              <a:t>Recognize common failure modes that can affect safety, accuracy, trust, workflow fit, or.</a:t>
-            </a:r>
-            <a:endParaRPr lang="en-US" sz="1380" dirty="0"/>
+              <a:t>Recognize common failure modes that can affect safety, accuracy,.</a:t>
+            </a:r>
+            <a:endParaRPr lang="en-US" sz="1220" dirty="0"/>
           </a:p>
         </p:txBody>
       </p:sp>
@@ -14294,17 +14527,17 @@
         </p:nvSpPr>
         <p:spPr>
           <a:xfrm>
-            <a:off x="7799832" y="5001768"/>
-            <a:ext cx="3145536" cy="502920"/>
-          </a:xfrm>
-          <a:prstGeom prst="rect">
-            <a:avLst/>
-          </a:prstGeom>
-          <a:noFill/>
-          <a:ln/>
-        </p:spPr>
-        <p:txBody>
-          <a:bodyPr wrap="square" lIns="0" tIns="0" rIns="0" bIns="0" rtlCol="0" anchor="t">
+            <a:off x="7799832" y="4974336"/>
+            <a:ext cx="3145536" cy="576072"/>
+          </a:xfrm>
+          <a:prstGeom prst="rect">
+            <a:avLst/>
+          </a:prstGeom>
+          <a:noFill/>
+          <a:ln/>
+        </p:spPr>
+        <p:txBody>
+          <a:bodyPr wrap="square" lIns="254" tIns="254" rIns="254" bIns="254" rtlCol="0" anchor="t">
             <a:normAutofit/>
           </a:bodyPr>
           <a:lstStyle/>
@@ -14313,7 +14546,7 @@
               <a:buNone/>
             </a:pPr>
             <a:r>
-              <a:rPr lang="en-US" sz="1550" dirty="0">
+              <a:rPr lang="en-US" sz="1320" dirty="0">
                 <a:solidFill>
                   <a:srgbClr val="17364A"/>
                 </a:solidFill>
@@ -14321,9 +14554,9 @@
                 <a:ea typeface="Aptos" pitchFamily="34" charset="-122"/>
                 <a:cs typeface="Aptos" pitchFamily="34" charset="-120"/>
               </a:rPr>
-              <a:t>Use the assignment to test whether you can explain the concept, apply it to a realistic public health situation, and identify what would need review before the work moves forward.</a:t>
-            </a:r>
-            <a:endParaRPr lang="en-US" sz="1550" dirty="0"/>
+              <a:t>Use the assignment to test whether you can explain the concept, apply it to a realistic public health situation, and.</a:t>
+            </a:r>
+            <a:endParaRPr lang="en-US" sz="1320" dirty="0"/>
           </a:p>
         </p:txBody>
       </p:sp>
@@ -14624,21 +14857,24 @@
           <a:ln/>
         </p:spPr>
         <p:txBody>
-          <a:bodyPr wrap="square" lIns="635" tIns="635" rIns="635" bIns="635" rtlCol="0" anchor="t">
+          <a:bodyPr wrap="square" lIns="1016" tIns="1016" rIns="1016" bIns="1016" rtlCol="0" anchor="t">
             <a:normAutofit/>
           </a:bodyPr>
           <a:lstStyle/>
           <a:p>
+            <a:pPr indent="0" marL="0">
+              <a:buNone/>
+            </a:pPr>
             <a:r>
               <a:rPr lang="en-US" sz="2100" dirty="0">
                 <a:solidFill>
-                  <a:srgbClr val="17364A"/>
-                </a:solidFill>
-                <a:latin typeface="Aptos" pitchFamily="34" charset="0"/>
-                <a:ea typeface="Aptos" pitchFamily="34" charset="-122"/>
-                <a:cs typeface="Aptos" pitchFamily="34" charset="-120"/>
-              </a:rPr>
-              <a:t>Produce a AI requirements matrix that can support readiness assessment, governance review, procurement,.</a:t>
+                  <a:srgbClr val="003A63"/>
+                </a:solidFill>
+                <a:latin typeface="Aptos" pitchFamily="34" charset="0"/>
+                <a:ea typeface="Aptos" pitchFamily="34" charset="-122"/>
+                <a:cs typeface="Aptos" pitchFamily="34" charset="-120"/>
+              </a:rPr>
+              <a:t>• Produce a AI requirements matrix that can support readiness assessment, governance review,.</a:t>
             </a:r>
             <a:endParaRPr lang="en-US" sz="2100" dirty="0"/>
           </a:p>
@@ -14718,17 +14954,17 @@
         </p:nvSpPr>
         <p:spPr>
           <a:xfrm>
-            <a:off x="7799832" y="1828800"/>
-            <a:ext cx="3145536" cy="685800"/>
-          </a:xfrm>
-          <a:prstGeom prst="rect">
-            <a:avLst/>
-          </a:prstGeom>
-          <a:noFill/>
-          <a:ln/>
-        </p:spPr>
-        <p:txBody>
-          <a:bodyPr wrap="square" lIns="0" tIns="0" rIns="0" bIns="0" rtlCol="0" anchor="t">
+            <a:off x="7799832" y="1801368"/>
+            <a:ext cx="3145536" cy="758952"/>
+          </a:xfrm>
+          <a:prstGeom prst="rect">
+            <a:avLst/>
+          </a:prstGeom>
+          <a:noFill/>
+          <a:ln/>
+        </p:spPr>
+        <p:txBody>
+          <a:bodyPr wrap="square" lIns="254" tIns="254" rIns="254" bIns="254" rtlCol="0" anchor="t">
             <a:normAutofit/>
           </a:bodyPr>
           <a:lstStyle/>
@@ -14737,7 +14973,7 @@
               <a:buNone/>
             </a:pPr>
             <a:r>
-              <a:rPr lang="en-US" sz="1550" dirty="0">
+              <a:rPr lang="en-US" sz="1320" dirty="0">
                 <a:solidFill>
                   <a:srgbClr val="17364A"/>
                 </a:solidFill>
@@ -14747,7 +14983,7 @@
               </a:rPr>
               <a:t>Produce a AI requirements matrix that can support readiness assessment, governance review, procurement,.</a:t>
             </a:r>
-            <a:endParaRPr lang="en-US" sz="1550" dirty="0"/>
+            <a:endParaRPr lang="en-US" sz="1320" dirty="0"/>
           </a:p>
         </p:txBody>
       </p:sp>
@@ -14835,13 +15071,16 @@
           <a:ln/>
         </p:spPr>
         <p:txBody>
-          <a:bodyPr wrap="square" lIns="254" tIns="254" rIns="254" bIns="254" rtlCol="0" anchor="t">
+          <a:bodyPr wrap="square" lIns="508" tIns="508" rIns="508" bIns="508" rtlCol="0" anchor="t">
             <a:normAutofit/>
           </a:bodyPr>
           <a:lstStyle/>
           <a:p>
-            <a:r>
-              <a:rPr lang="en-US" sz="1380" dirty="0">
+            <a:pPr indent="0" marL="0">
+              <a:buNone/>
+            </a:pPr>
+            <a:r>
+              <a:rPr lang="en-US" sz="1220" dirty="0">
                 <a:solidFill>
                   <a:srgbClr val="17364A"/>
                 </a:solidFill>
@@ -14849,9 +15088,9 @@
                 <a:ea typeface="Aptos" pitchFamily="34" charset="-122"/>
                 <a:cs typeface="Aptos" pitchFamily="34" charset="-120"/>
               </a:rPr>
-              <a:t>Produce a AI requirements matrix that can support readiness assessment, governance review,.</a:t>
-            </a:r>
-            <a:endParaRPr lang="en-US" sz="1380" dirty="0"/>
+              <a:t>Produce a AI requirements matrix that can support readiness.</a:t>
+            </a:r>
+            <a:endParaRPr lang="en-US" sz="1220" dirty="0"/>
           </a:p>
         </p:txBody>
       </p:sp>
@@ -14929,17 +15168,17 @@
         </p:nvSpPr>
         <p:spPr>
           <a:xfrm>
-            <a:off x="7799832" y="5001768"/>
-            <a:ext cx="3145536" cy="502920"/>
-          </a:xfrm>
-          <a:prstGeom prst="rect">
-            <a:avLst/>
-          </a:prstGeom>
-          <a:noFill/>
-          <a:ln/>
-        </p:spPr>
-        <p:txBody>
-          <a:bodyPr wrap="square" lIns="0" tIns="0" rIns="0" bIns="0" rtlCol="0" anchor="t">
+            <a:off x="7799832" y="4974336"/>
+            <a:ext cx="3145536" cy="576072"/>
+          </a:xfrm>
+          <a:prstGeom prst="rect">
+            <a:avLst/>
+          </a:prstGeom>
+          <a:noFill/>
+          <a:ln/>
+        </p:spPr>
+        <p:txBody>
+          <a:bodyPr wrap="square" lIns="254" tIns="254" rIns="254" bIns="254" rtlCol="0" anchor="t">
             <a:normAutofit/>
           </a:bodyPr>
           <a:lstStyle/>
@@ -14948,7 +15187,7 @@
               <a:buNone/>
             </a:pPr>
             <a:r>
-              <a:rPr lang="en-US" sz="1550" dirty="0">
+              <a:rPr lang="en-US" sz="1320" dirty="0">
                 <a:solidFill>
                   <a:srgbClr val="17364A"/>
                 </a:solidFill>
@@ -14956,9 +15195,9 @@
                 <a:ea typeface="Aptos" pitchFamily="34" charset="-122"/>
                 <a:cs typeface="Aptos" pitchFamily="34" charset="-120"/>
               </a:rPr>
-              <a:t>Use the assignment to test whether you can explain the concept, apply it to a realistic public health situation, and identify what would need review before the work moves forward.</a:t>
-            </a:r>
-            <a:endParaRPr lang="en-US" sz="1550" dirty="0"/>
+              <a:t>Use the assignment to test whether you can explain the concept, apply it to a realistic public health situation, and.</a:t>
+            </a:r>
+            <a:endParaRPr lang="en-US" sz="1320" dirty="0"/>
           </a:p>
         </p:txBody>
       </p:sp>
@@ -15259,35 +15498,41 @@
           <a:ln/>
         </p:spPr>
         <p:txBody>
-          <a:bodyPr wrap="square" lIns="635" tIns="635" rIns="635" bIns="635" rtlCol="0" anchor="t">
+          <a:bodyPr wrap="square" lIns="1016" tIns="1016" rIns="1016" bIns="1016" rtlCol="0" anchor="t">
             <a:normAutofit/>
           </a:bodyPr>
           <a:lstStyle/>
           <a:p>
+            <a:pPr indent="0" marL="0">
+              <a:buNone/>
+            </a:pPr>
             <a:r>
               <a:rPr lang="en-US" sz="2100" dirty="0">
                 <a:solidFill>
-                  <a:srgbClr val="17364A"/>
-                </a:solidFill>
-                <a:latin typeface="Aptos" pitchFamily="34" charset="0"/>
-                <a:ea typeface="Aptos" pitchFamily="34" charset="-122"/>
-                <a:cs typeface="Aptos" pitchFamily="34" charset="-120"/>
-              </a:rPr>
-              <a:t>AI procurement requires stronger requirements than ordinary software purchasing because agencies must.</a:t>
+                  <a:srgbClr val="003A63"/>
+                </a:solidFill>
+                <a:latin typeface="Aptos" pitchFamily="34" charset="0"/>
+                <a:ea typeface="Aptos" pitchFamily="34" charset="-122"/>
+                <a:cs typeface="Aptos" pitchFamily="34" charset="-120"/>
+              </a:rPr>
+              <a:t>• AI procurement requires stronger requirements than ordinary software purchasing because.</a:t>
             </a:r>
             <a:endParaRPr lang="en-US" sz="2100" dirty="0"/>
           </a:p>
           <a:p>
+            <a:pPr indent="0" marL="0">
+              <a:buNone/>
+            </a:pPr>
             <a:r>
               <a:rPr lang="en-US" sz="2100" dirty="0">
                 <a:solidFill>
-                  <a:srgbClr val="17364A"/>
-                </a:solidFill>
-                <a:latin typeface="Aptos" pitchFamily="34" charset="0"/>
-                <a:ea typeface="Aptos" pitchFamily="34" charset="-122"/>
-                <a:cs typeface="Aptos" pitchFamily="34" charset="-120"/>
-              </a:rPr>
-              <a:t>This module teaches learners how to write requirements that can be evaluated, tested, enforced, and.</a:t>
+                  <a:srgbClr val="003A63"/>
+                </a:solidFill>
+                <a:latin typeface="Aptos" pitchFamily="34" charset="0"/>
+                <a:ea typeface="Aptos" pitchFamily="34" charset="-122"/>
+                <a:cs typeface="Aptos" pitchFamily="34" charset="-120"/>
+              </a:rPr>
+              <a:t>• This module teaches learners how to write requirements that can be evaluated, tested,.</a:t>
             </a:r>
             <a:endParaRPr lang="en-US" sz="2100" dirty="0"/>
           </a:p>
@@ -15367,17 +15612,17 @@
         </p:nvSpPr>
         <p:spPr>
           <a:xfrm>
-            <a:off x="7799832" y="1828800"/>
-            <a:ext cx="3145536" cy="685800"/>
-          </a:xfrm>
-          <a:prstGeom prst="rect">
-            <a:avLst/>
-          </a:prstGeom>
-          <a:noFill/>
-          <a:ln/>
-        </p:spPr>
-        <p:txBody>
-          <a:bodyPr wrap="square" lIns="0" tIns="0" rIns="0" bIns="0" rtlCol="0" anchor="t">
+            <a:off x="7799832" y="1801368"/>
+            <a:ext cx="3145536" cy="758952"/>
+          </a:xfrm>
+          <a:prstGeom prst="rect">
+            <a:avLst/>
+          </a:prstGeom>
+          <a:noFill/>
+          <a:ln/>
+        </p:spPr>
+        <p:txBody>
+          <a:bodyPr wrap="square" lIns="254" tIns="254" rIns="254" bIns="254" rtlCol="0" anchor="t">
             <a:normAutofit/>
           </a:bodyPr>
           <a:lstStyle/>
@@ -15386,7 +15631,7 @@
               <a:buNone/>
             </a:pPr>
             <a:r>
-              <a:rPr lang="en-US" sz="1550" dirty="0">
+              <a:rPr lang="en-US" sz="1320" dirty="0">
                 <a:solidFill>
                   <a:srgbClr val="17364A"/>
                 </a:solidFill>
@@ -15396,7 +15641,7 @@
               </a:rPr>
               <a:t>AI procurement requires stronger requirements than ordinary software purchasing because agencies must.</a:t>
             </a:r>
-            <a:endParaRPr lang="en-US" sz="1550" dirty="0"/>
+            <a:endParaRPr lang="en-US" sz="1320" dirty="0"/>
           </a:p>
         </p:txBody>
       </p:sp>
@@ -15484,13 +15729,16 @@
           <a:ln/>
         </p:spPr>
         <p:txBody>
-          <a:bodyPr wrap="square" lIns="254" tIns="254" rIns="254" bIns="254" rtlCol="0" anchor="t">
+          <a:bodyPr wrap="square" lIns="508" tIns="508" rIns="508" bIns="508" rtlCol="0" anchor="t">
             <a:normAutofit/>
           </a:bodyPr>
           <a:lstStyle/>
           <a:p>
-            <a:r>
-              <a:rPr lang="en-US" sz="1380" dirty="0">
+            <a:pPr indent="0" marL="0">
+              <a:buNone/>
+            </a:pPr>
+            <a:r>
+              <a:rPr lang="en-US" sz="1220" dirty="0">
                 <a:solidFill>
                   <a:srgbClr val="17364A"/>
                 </a:solidFill>
@@ -15498,13 +15746,16 @@
                 <a:ea typeface="Aptos" pitchFamily="34" charset="-122"/>
                 <a:cs typeface="Aptos" pitchFamily="34" charset="-120"/>
               </a:rPr>
-              <a:t>AI procurement requires stronger requirements than ordinary software purchasing because.</a:t>
-            </a:r>
-            <a:endParaRPr lang="en-US" sz="1380" dirty="0"/>
-          </a:p>
-          <a:p>
-            <a:r>
-              <a:rPr lang="en-US" sz="1380" dirty="0">
+              <a:t>AI procurement requires stronger requirements than ordinary.</a:t>
+            </a:r>
+            <a:endParaRPr lang="en-US" sz="1220" dirty="0"/>
+          </a:p>
+          <a:p>
+            <a:pPr indent="0" marL="0">
+              <a:buNone/>
+            </a:pPr>
+            <a:r>
+              <a:rPr lang="en-US" sz="1220" dirty="0">
                 <a:solidFill>
                   <a:srgbClr val="17364A"/>
                 </a:solidFill>
@@ -15512,9 +15763,9 @@
                 <a:ea typeface="Aptos" pitchFamily="34" charset="-122"/>
                 <a:cs typeface="Aptos" pitchFamily="34" charset="-120"/>
               </a:rPr>
-              <a:t>This module teaches learners how to write requirements that can be evaluated, tested,.</a:t>
-            </a:r>
-            <a:endParaRPr lang="en-US" sz="1380" dirty="0"/>
+              <a:t>This module teaches learners how to write requirements that can be.</a:t>
+            </a:r>
+            <a:endParaRPr lang="en-US" sz="1220" dirty="0"/>
           </a:p>
         </p:txBody>
       </p:sp>
@@ -15592,17 +15843,17 @@
         </p:nvSpPr>
         <p:spPr>
           <a:xfrm>
-            <a:off x="7799832" y="5001768"/>
-            <a:ext cx="3145536" cy="502920"/>
-          </a:xfrm>
-          <a:prstGeom prst="rect">
-            <a:avLst/>
-          </a:prstGeom>
-          <a:noFill/>
-          <a:ln/>
-        </p:spPr>
-        <p:txBody>
-          <a:bodyPr wrap="square" lIns="0" tIns="0" rIns="0" bIns="0" rtlCol="0" anchor="t">
+            <a:off x="7799832" y="4974336"/>
+            <a:ext cx="3145536" cy="576072"/>
+          </a:xfrm>
+          <a:prstGeom prst="rect">
+            <a:avLst/>
+          </a:prstGeom>
+          <a:noFill/>
+          <a:ln/>
+        </p:spPr>
+        <p:txBody>
+          <a:bodyPr wrap="square" lIns="254" tIns="254" rIns="254" bIns="254" rtlCol="0" anchor="t">
             <a:normAutofit/>
           </a:bodyPr>
           <a:lstStyle/>
@@ -15611,7 +15862,7 @@
               <a:buNone/>
             </a:pPr>
             <a:r>
-              <a:rPr lang="en-US" sz="1550" dirty="0">
+              <a:rPr lang="en-US" sz="1320" dirty="0">
                 <a:solidFill>
                   <a:srgbClr val="17364A"/>
                 </a:solidFill>
@@ -15619,9 +15870,9 @@
                 <a:ea typeface="Aptos" pitchFamily="34" charset="-122"/>
                 <a:cs typeface="Aptos" pitchFamily="34" charset="-120"/>
               </a:rPr>
-              <a:t>Use the concept to clarify workflow changes, dependencies, staffing, procurement requirements, training needs, and implementation checkpoints.</a:t>
-            </a:r>
-            <a:endParaRPr lang="en-US" sz="1550" dirty="0"/>
+              <a:t>Use the concept to clarify workflow changes, dependencies, staffing, procurement requirements, training needs, and.</a:t>
+            </a:r>
+            <a:endParaRPr lang="en-US" sz="1320" dirty="0"/>
           </a:p>
         </p:txBody>
       </p:sp>
@@ -15922,49 +16173,58 @@
           <a:ln/>
         </p:spPr>
         <p:txBody>
-          <a:bodyPr wrap="square" lIns="635" tIns="635" rIns="635" bIns="635" rtlCol="0" anchor="t">
+          <a:bodyPr wrap="square" lIns="1016" tIns="1016" rIns="1016" bIns="1016" rtlCol="0" anchor="t">
             <a:normAutofit/>
           </a:bodyPr>
           <a:lstStyle/>
           <a:p>
+            <a:pPr indent="0" marL="0">
+              <a:buNone/>
+            </a:pPr>
             <a:r>
               <a:rPr lang="en-US" sz="2100" dirty="0">
                 <a:solidFill>
-                  <a:srgbClr val="17364A"/>
-                </a:solidFill>
-                <a:latin typeface="Aptos" pitchFamily="34" charset="0"/>
-                <a:ea typeface="Aptos" pitchFamily="34" charset="-122"/>
-                <a:cs typeface="Aptos" pitchFamily="34" charset="-120"/>
-              </a:rPr>
-              <a:t>This module provides national-level training guidance for public health agencies and partners.</a:t>
+                  <a:srgbClr val="003A63"/>
+                </a:solidFill>
+                <a:latin typeface="Aptos" pitchFamily="34" charset="0"/>
+                <a:ea typeface="Aptos" pitchFamily="34" charset="-122"/>
+                <a:cs typeface="Aptos" pitchFamily="34" charset="-120"/>
+              </a:rPr>
+              <a:t>• This module provides national-level training guidance for public health agencies and partners.</a:t>
             </a:r>
             <a:endParaRPr lang="en-US" sz="2100" dirty="0"/>
           </a:p>
           <a:p>
+            <a:pPr indent="0" marL="0">
+              <a:buNone/>
+            </a:pPr>
             <a:r>
               <a:rPr lang="en-US" sz="2100" dirty="0">
                 <a:solidFill>
-                  <a:srgbClr val="17364A"/>
-                </a:solidFill>
-                <a:latin typeface="Aptos" pitchFamily="34" charset="0"/>
-                <a:ea typeface="Aptos" pitchFamily="34" charset="-122"/>
-                <a:cs typeface="Aptos" pitchFamily="34" charset="-120"/>
-              </a:rPr>
-              <a:t>It is not legal advice and does not replace review by agency legal counsel, privacy officers,.</a:t>
+                  <a:srgbClr val="003A63"/>
+                </a:solidFill>
+                <a:latin typeface="Aptos" pitchFamily="34" charset="0"/>
+                <a:ea typeface="Aptos" pitchFamily="34" charset="-122"/>
+                <a:cs typeface="Aptos" pitchFamily="34" charset="-120"/>
+              </a:rPr>
+              <a:t>• It is not legal advice and does not replace review by agency legal counsel, privacy officers,.</a:t>
             </a:r>
             <a:endParaRPr lang="en-US" sz="2100" dirty="0"/>
           </a:p>
           <a:p>
+            <a:pPr indent="0" marL="0">
+              <a:buNone/>
+            </a:pPr>
             <a:r>
               <a:rPr lang="en-US" sz="2100" dirty="0">
                 <a:solidFill>
-                  <a:srgbClr val="17364A"/>
-                </a:solidFill>
-                <a:latin typeface="Aptos" pitchFamily="34" charset="0"/>
-                <a:ea typeface="Aptos" pitchFamily="34" charset="-122"/>
-                <a:cs typeface="Aptos" pitchFamily="34" charset="-120"/>
-              </a:rPr>
-              <a:t>Requirements may vary by state, locality, territory, Tribe, agency, funding source, data-sharing.</a:t>
+                  <a:srgbClr val="003A63"/>
+                </a:solidFill>
+                <a:latin typeface="Aptos" pitchFamily="34" charset="0"/>
+                <a:ea typeface="Aptos" pitchFamily="34" charset="-122"/>
+                <a:cs typeface="Aptos" pitchFamily="34" charset="-120"/>
+              </a:rPr>
+              <a:t>• Requirements may vary by state, locality, territory, Tribe, agency, funding source,.</a:t>
             </a:r>
             <a:endParaRPr lang="en-US" sz="2100" dirty="0"/>
           </a:p>
@@ -16044,17 +16304,17 @@
         </p:nvSpPr>
         <p:spPr>
           <a:xfrm>
-            <a:off x="7799832" y="1828800"/>
-            <a:ext cx="3145536" cy="685800"/>
-          </a:xfrm>
-          <a:prstGeom prst="rect">
-            <a:avLst/>
-          </a:prstGeom>
-          <a:noFill/>
-          <a:ln/>
-        </p:spPr>
-        <p:txBody>
-          <a:bodyPr wrap="square" lIns="0" tIns="0" rIns="0" bIns="0" rtlCol="0" anchor="t">
+            <a:off x="7799832" y="1801368"/>
+            <a:ext cx="3145536" cy="758952"/>
+          </a:xfrm>
+          <a:prstGeom prst="rect">
+            <a:avLst/>
+          </a:prstGeom>
+          <a:noFill/>
+          <a:ln/>
+        </p:spPr>
+        <p:txBody>
+          <a:bodyPr wrap="square" lIns="254" tIns="254" rIns="254" bIns="254" rtlCol="0" anchor="t">
             <a:normAutofit/>
           </a:bodyPr>
           <a:lstStyle/>
@@ -16063,7 +16323,7 @@
               <a:buNone/>
             </a:pPr>
             <a:r>
-              <a:rPr lang="en-US" sz="1550" dirty="0">
+              <a:rPr lang="en-US" sz="1320" dirty="0">
                 <a:solidFill>
                   <a:srgbClr val="17364A"/>
                 </a:solidFill>
@@ -16073,7 +16333,7 @@
               </a:rPr>
               <a:t>This module provides national-level training guidance for public health agencies and partners.</a:t>
             </a:r>
-            <a:endParaRPr lang="en-US" sz="1550" dirty="0"/>
+            <a:endParaRPr lang="en-US" sz="1320" dirty="0"/>
           </a:p>
         </p:txBody>
       </p:sp>
@@ -16161,13 +16421,16 @@
           <a:ln/>
         </p:spPr>
         <p:txBody>
-          <a:bodyPr wrap="square" lIns="254" tIns="254" rIns="254" bIns="254" rtlCol="0" anchor="t">
+          <a:bodyPr wrap="square" lIns="508" tIns="508" rIns="508" bIns="508" rtlCol="0" anchor="t">
             <a:normAutofit/>
           </a:bodyPr>
           <a:lstStyle/>
           <a:p>
-            <a:r>
-              <a:rPr lang="en-US" sz="1380" dirty="0">
+            <a:pPr indent="0" marL="0">
+              <a:buNone/>
+            </a:pPr>
+            <a:r>
+              <a:rPr lang="en-US" sz="1220" dirty="0">
                 <a:solidFill>
                   <a:srgbClr val="17364A"/>
                 </a:solidFill>
@@ -16175,13 +16438,16 @@
                 <a:ea typeface="Aptos" pitchFamily="34" charset="-122"/>
                 <a:cs typeface="Aptos" pitchFamily="34" charset="-120"/>
               </a:rPr>
-              <a:t>It is not legal advice and does not replace review by agency legal counsel, privacy.</a:t>
-            </a:r>
-            <a:endParaRPr lang="en-US" sz="1380" dirty="0"/>
-          </a:p>
-          <a:p>
-            <a:r>
-              <a:rPr lang="en-US" sz="1380" dirty="0">
+              <a:t>It is not legal advice and does not replace review by agency legal.</a:t>
+            </a:r>
+            <a:endParaRPr lang="en-US" sz="1220" dirty="0"/>
+          </a:p>
+          <a:p>
+            <a:pPr indent="0" marL="0">
+              <a:buNone/>
+            </a:pPr>
+            <a:r>
+              <a:rPr lang="en-US" sz="1220" dirty="0">
                 <a:solidFill>
                   <a:srgbClr val="17364A"/>
                 </a:solidFill>
@@ -16189,13 +16455,16 @@
                 <a:ea typeface="Aptos" pitchFamily="34" charset="-122"/>
                 <a:cs typeface="Aptos" pitchFamily="34" charset="-120"/>
               </a:rPr>
-              <a:t>Requirements may vary by state, locality, territory, Tribe, agency, funding source,.</a:t>
-            </a:r>
-            <a:endParaRPr lang="en-US" sz="1380" dirty="0"/>
-          </a:p>
-          <a:p>
-            <a:r>
-              <a:rPr lang="en-US" sz="1380" dirty="0">
+              <a:t>Requirements may vary by state, locality, territory, Tribe,.</a:t>
+            </a:r>
+            <a:endParaRPr lang="en-US" sz="1220" dirty="0"/>
+          </a:p>
+          <a:p>
+            <a:pPr indent="0" marL="0">
+              <a:buNone/>
+            </a:pPr>
+            <a:r>
+              <a:rPr lang="en-US" sz="1220" dirty="0">
                 <a:solidFill>
                   <a:srgbClr val="17364A"/>
                 </a:solidFill>
@@ -16203,9 +16472,9 @@
                 <a:ea typeface="Aptos" pitchFamily="34" charset="-122"/>
                 <a:cs typeface="Aptos" pitchFamily="34" charset="-120"/>
               </a:rPr>
-              <a:t>Learners should use this module to identify the issues that require review and should.</a:t>
-            </a:r>
-            <a:endParaRPr lang="en-US" sz="1380" dirty="0"/>
+              <a:t>Learners should use this module to identify the issues that.</a:t>
+            </a:r>
+            <a:endParaRPr lang="en-US" sz="1220" dirty="0"/>
           </a:p>
         </p:txBody>
       </p:sp>
@@ -16283,17 +16552,17 @@
         </p:nvSpPr>
         <p:spPr>
           <a:xfrm>
-            <a:off x="7799832" y="5001768"/>
-            <a:ext cx="3145536" cy="502920"/>
-          </a:xfrm>
-          <a:prstGeom prst="rect">
-            <a:avLst/>
-          </a:prstGeom>
-          <a:noFill/>
-          <a:ln/>
-        </p:spPr>
-        <p:txBody>
-          <a:bodyPr wrap="square" lIns="0" tIns="0" rIns="0" bIns="0" rtlCol="0" anchor="t">
+            <a:off x="7799832" y="4974336"/>
+            <a:ext cx="3145536" cy="576072"/>
+          </a:xfrm>
+          <a:prstGeom prst="rect">
+            <a:avLst/>
+          </a:prstGeom>
+          <a:noFill/>
+          <a:ln/>
+        </p:spPr>
+        <p:txBody>
+          <a:bodyPr wrap="square" lIns="254" tIns="254" rIns="254" bIns="254" rtlCol="0" anchor="t">
             <a:normAutofit/>
           </a:bodyPr>
           <a:lstStyle/>
@@ -16302,7 +16571,7 @@
               <a:buNone/>
             </a:pPr>
             <a:r>
-              <a:rPr lang="en-US" sz="1550" dirty="0">
+              <a:rPr lang="en-US" sz="1320" dirty="0">
                 <a:solidFill>
                   <a:srgbClr val="17364A"/>
                 </a:solidFill>
@@ -16310,9 +16579,9 @@
                 <a:ea typeface="Aptos" pitchFamily="34" charset="-122"/>
                 <a:cs typeface="Aptos" pitchFamily="34" charset="-120"/>
               </a:rPr>
-              <a:t>Translate this concept into clear decision rights, review steps, documentation expectations, and escalation paths before an AI-supported workflow is approved.</a:t>
-            </a:r>
-            <a:endParaRPr lang="en-US" sz="1550" dirty="0"/>
+              <a:t>Translate this concept into clear decision rights, review steps, documentation expectations, and escalation paths before.</a:t>
+            </a:r>
+            <a:endParaRPr lang="en-US" sz="1320" dirty="0"/>
           </a:p>
         </p:txBody>
       </p:sp>
@@ -16613,49 +16882,58 @@
           <a:ln/>
         </p:spPr>
         <p:txBody>
-          <a:bodyPr wrap="square" lIns="635" tIns="635" rIns="635" bIns="635" rtlCol="0" anchor="t">
+          <a:bodyPr wrap="square" lIns="1016" tIns="1016" rIns="1016" bIns="1016" rtlCol="0" anchor="t">
             <a:normAutofit/>
           </a:bodyPr>
           <a:lstStyle/>
           <a:p>
+            <a:pPr indent="0" marL="0">
+              <a:buNone/>
+            </a:pPr>
             <a:r>
               <a:rPr lang="en-US" sz="2100" dirty="0">
                 <a:solidFill>
-                  <a:srgbClr val="17364A"/>
-                </a:solidFill>
-                <a:latin typeface="Aptos" pitchFamily="34" charset="0"/>
-                <a:ea typeface="Aptos" pitchFamily="34" charset="-122"/>
-                <a:cs typeface="Aptos" pitchFamily="34" charset="-120"/>
-              </a:rPr>
-              <a:t>Requirements Writing for AI Procurement and Implementation matters because AI systems are embedded in.</a:t>
+                  <a:srgbClr val="003A63"/>
+                </a:solidFill>
+                <a:latin typeface="Aptos" pitchFamily="34" charset="0"/>
+                <a:ea typeface="Aptos" pitchFamily="34" charset="-122"/>
+                <a:cs typeface="Aptos" pitchFamily="34" charset="-120"/>
+              </a:rPr>
+              <a:t>• Requirements Writing for AI Procurement and Implementation matters because AI systems are.</a:t>
             </a:r>
             <a:endParaRPr lang="en-US" sz="2100" dirty="0"/>
           </a:p>
           <a:p>
+            <a:pPr indent="0" marL="0">
+              <a:buNone/>
+            </a:pPr>
             <a:r>
               <a:rPr lang="en-US" sz="2100" dirty="0">
                 <a:solidFill>
-                  <a:srgbClr val="17364A"/>
-                </a:solidFill>
-                <a:latin typeface="Aptos" pitchFamily="34" charset="0"/>
-                <a:ea typeface="Aptos" pitchFamily="34" charset="-122"/>
-                <a:cs typeface="Aptos" pitchFamily="34" charset="-120"/>
-              </a:rPr>
-              <a:t>The topic affects whether AI outputs are accurate, explainable, safe, equitable, secure, and sustainable.</a:t>
+                  <a:srgbClr val="003A63"/>
+                </a:solidFill>
+                <a:latin typeface="Aptos" pitchFamily="34" charset="0"/>
+                <a:ea typeface="Aptos" pitchFamily="34" charset="-122"/>
+                <a:cs typeface="Aptos" pitchFamily="34" charset="-120"/>
+              </a:rPr>
+              <a:t>• The topic affects whether AI outputs are accurate, explainable, safe, equitable, secure, and.</a:t>
             </a:r>
             <a:endParaRPr lang="en-US" sz="2100" dirty="0"/>
           </a:p>
           <a:p>
+            <a:pPr indent="0" marL="0">
+              <a:buNone/>
+            </a:pPr>
             <a:r>
               <a:rPr lang="en-US" sz="2100" dirty="0">
                 <a:solidFill>
-                  <a:srgbClr val="17364A"/>
-                </a:solidFill>
-                <a:latin typeface="Aptos" pitchFamily="34" charset="0"/>
-                <a:ea typeface="Aptos" pitchFamily="34" charset="-122"/>
-                <a:cs typeface="Aptos" pitchFamily="34" charset="-120"/>
-              </a:rPr>
-              <a:t>Agencies that ignore this area may create tools that work in a demonstration but fail in actual practice.</a:t>
+                  <a:srgbClr val="003A63"/>
+                </a:solidFill>
+                <a:latin typeface="Aptos" pitchFamily="34" charset="0"/>
+                <a:ea typeface="Aptos" pitchFamily="34" charset="-122"/>
+                <a:cs typeface="Aptos" pitchFamily="34" charset="-120"/>
+              </a:rPr>
+              <a:t>• Agencies that ignore this area may create tools that work in a demonstration but fail in.</a:t>
             </a:r>
             <a:endParaRPr lang="en-US" sz="2100" dirty="0"/>
           </a:p>
@@ -16735,17 +17013,17 @@
         </p:nvSpPr>
         <p:spPr>
           <a:xfrm>
-            <a:off x="7799832" y="1828800"/>
-            <a:ext cx="3145536" cy="685800"/>
-          </a:xfrm>
-          <a:prstGeom prst="rect">
-            <a:avLst/>
-          </a:prstGeom>
-          <a:noFill/>
-          <a:ln/>
-        </p:spPr>
-        <p:txBody>
-          <a:bodyPr wrap="square" lIns="0" tIns="0" rIns="0" bIns="0" rtlCol="0" anchor="t">
+            <a:off x="7799832" y="1801368"/>
+            <a:ext cx="3145536" cy="758952"/>
+          </a:xfrm>
+          <a:prstGeom prst="rect">
+            <a:avLst/>
+          </a:prstGeom>
+          <a:noFill/>
+          <a:ln/>
+        </p:spPr>
+        <p:txBody>
+          <a:bodyPr wrap="square" lIns="254" tIns="254" rIns="254" bIns="254" rtlCol="0" anchor="t">
             <a:normAutofit/>
           </a:bodyPr>
           <a:lstStyle/>
@@ -16754,7 +17032,7 @@
               <a:buNone/>
             </a:pPr>
             <a:r>
-              <a:rPr lang="en-US" sz="1550" dirty="0">
+              <a:rPr lang="en-US" sz="1320" dirty="0">
                 <a:solidFill>
                   <a:srgbClr val="17364A"/>
                 </a:solidFill>
@@ -16764,7 +17042,7 @@
               </a:rPr>
               <a:t>Requirements Writing for AI Procurement and Implementation matters because AI systems are embedded in.</a:t>
             </a:r>
-            <a:endParaRPr lang="en-US" sz="1550" dirty="0"/>
+            <a:endParaRPr lang="en-US" sz="1320" dirty="0"/>
           </a:p>
         </p:txBody>
       </p:sp>
@@ -16852,13 +17130,16 @@
           <a:ln/>
         </p:spPr>
         <p:txBody>
-          <a:bodyPr wrap="square" lIns="254" tIns="254" rIns="254" bIns="254" rtlCol="0" anchor="t">
+          <a:bodyPr wrap="square" lIns="508" tIns="508" rIns="508" bIns="508" rtlCol="0" anchor="t">
             <a:normAutofit/>
           </a:bodyPr>
           <a:lstStyle/>
           <a:p>
-            <a:r>
-              <a:rPr lang="en-US" sz="1380" dirty="0">
+            <a:pPr indent="0" marL="0">
+              <a:buNone/>
+            </a:pPr>
+            <a:r>
+              <a:rPr lang="en-US" sz="1220" dirty="0">
                 <a:solidFill>
                   <a:srgbClr val="17364A"/>
                 </a:solidFill>
@@ -16866,13 +17147,16 @@
                 <a:ea typeface="Aptos" pitchFamily="34" charset="-122"/>
                 <a:cs typeface="Aptos" pitchFamily="34" charset="-120"/>
               </a:rPr>
-              <a:t>Requirements Writing for AI Procurement and Implementation matters because AI systems are.</a:t>
-            </a:r>
-            <a:endParaRPr lang="en-US" sz="1380" dirty="0"/>
-          </a:p>
-          <a:p>
-            <a:r>
-              <a:rPr lang="en-US" sz="1380" dirty="0">
+              <a:t>Requirements Writing for AI Procurement and Implementation matters.</a:t>
+            </a:r>
+            <a:endParaRPr lang="en-US" sz="1220" dirty="0"/>
+          </a:p>
+          <a:p>
+            <a:pPr indent="0" marL="0">
+              <a:buNone/>
+            </a:pPr>
+            <a:r>
+              <a:rPr lang="en-US" sz="1220" dirty="0">
                 <a:solidFill>
                   <a:srgbClr val="17364A"/>
                 </a:solidFill>
@@ -16882,11 +17166,14 @@
               </a:rPr>
               <a:t>The topic also affects accountability.</a:t>
             </a:r>
-            <a:endParaRPr lang="en-US" sz="1380" dirty="0"/>
-          </a:p>
-          <a:p>
-            <a:r>
-              <a:rPr lang="en-US" sz="1380" dirty="0">
+            <a:endParaRPr lang="en-US" sz="1220" dirty="0"/>
+          </a:p>
+          <a:p>
+            <a:pPr indent="0" marL="0">
+              <a:buNone/>
+            </a:pPr>
+            <a:r>
+              <a:rPr lang="en-US" sz="1220" dirty="0">
                 <a:solidFill>
                   <a:srgbClr val="17364A"/>
                 </a:solidFill>
@@ -16894,9 +17181,9 @@
                 <a:ea typeface="Aptos" pitchFamily="34" charset="-122"/>
                 <a:cs typeface="Aptos" pitchFamily="34" charset="-120"/>
               </a:rPr>
-              <a:t>Public health agencies must be able to explain how data are used, why a tool was approved,.</a:t>
-            </a:r>
-            <a:endParaRPr lang="en-US" sz="1380" dirty="0"/>
+              <a:t>Public health agencies must be able to explain how data are used,.</a:t>
+            </a:r>
+            <a:endParaRPr lang="en-US" sz="1220" dirty="0"/>
           </a:p>
         </p:txBody>
       </p:sp>
@@ -16974,17 +17261,17 @@
         </p:nvSpPr>
         <p:spPr>
           <a:xfrm>
-            <a:off x="7799832" y="5001768"/>
-            <a:ext cx="3145536" cy="502920"/>
-          </a:xfrm>
-          <a:prstGeom prst="rect">
-            <a:avLst/>
-          </a:prstGeom>
-          <a:noFill/>
-          <a:ln/>
-        </p:spPr>
-        <p:txBody>
-          <a:bodyPr wrap="square" lIns="0" tIns="0" rIns="0" bIns="0" rtlCol="0" anchor="t">
+            <a:off x="7799832" y="4974336"/>
+            <a:ext cx="3145536" cy="576072"/>
+          </a:xfrm>
+          <a:prstGeom prst="rect">
+            <a:avLst/>
+          </a:prstGeom>
+          <a:noFill/>
+          <a:ln/>
+        </p:spPr>
+        <p:txBody>
+          <a:bodyPr wrap="square" lIns="254" tIns="254" rIns="254" bIns="254" rtlCol="0" anchor="t">
             <a:normAutofit/>
           </a:bodyPr>
           <a:lstStyle/>
@@ -16993,7 +17280,7 @@
               <a:buNone/>
             </a:pPr>
             <a:r>
-              <a:rPr lang="en-US" sz="1550" dirty="0">
+              <a:rPr lang="en-US" sz="1320" dirty="0">
                 <a:solidFill>
                   <a:srgbClr val="17364A"/>
                 </a:solidFill>
@@ -17001,9 +17288,9 @@
                 <a:ea typeface="Aptos" pitchFamily="34" charset="-122"/>
                 <a:cs typeface="Aptos" pitchFamily="34" charset="-120"/>
               </a:rPr>
-              <a:t>Use the concept to clarify workflow changes, dependencies, staffing, procurement requirements, training needs, and implementation checkpoints.</a:t>
-            </a:r>
-            <a:endParaRPr lang="en-US" sz="1550" dirty="0"/>
+              <a:t>Use the concept to clarify workflow changes, dependencies, staffing, procurement requirements, training needs, and.</a:t>
+            </a:r>
+            <a:endParaRPr lang="en-US" sz="1320" dirty="0"/>
           </a:p>
         </p:txBody>
       </p:sp>

--- a/downloads/presentations/modules/pmg-210.pptx
+++ b/downloads/presentations/modules/pmg-210.pptx
@@ -3412,11 +3412,11 @@
         <p:spPr>
           <a:xfrm>
             <a:off x="7635240" y="1325880"/>
-            <a:ext cx="3474720" cy="1325880"/>
+            <a:ext cx="3474720" cy="1207008"/>
           </a:xfrm>
           <a:prstGeom prst="roundRect">
             <a:avLst>
-              <a:gd name="adj" fmla="val 8276"/>
+              <a:gd name="adj" fmla="val 9091"/>
             </a:avLst>
           </a:prstGeom>
           <a:solidFill>
@@ -3478,7 +3478,7 @@
         <p:spPr>
           <a:xfrm>
             <a:off x="7799832" y="1801368"/>
-            <a:ext cx="3145536" cy="758952"/>
+            <a:ext cx="3145536" cy="640080"/>
           </a:xfrm>
           <a:prstGeom prst="rect">
             <a:avLst/>
@@ -3518,12 +3518,12 @@
         </p:nvSpPr>
         <p:spPr>
           <a:xfrm>
-            <a:off x="7635240" y="2788920"/>
-            <a:ext cx="3474720" cy="1536192"/>
+            <a:off x="7635240" y="2670048"/>
+            <a:ext cx="3474720" cy="1377086"/>
           </a:xfrm>
           <a:prstGeom prst="roundRect">
             <a:avLst>
-              <a:gd name="adj" fmla="val 7143"/>
+              <a:gd name="adj" fmla="val 7968"/>
             </a:avLst>
           </a:prstGeom>
           <a:solidFill>
@@ -3545,7 +3545,7 @@
         </p:nvSpPr>
         <p:spPr>
           <a:xfrm>
-            <a:off x="7799832" y="2935224"/>
+            <a:off x="7799832" y="2816352"/>
             <a:ext cx="3145536" cy="256032"/>
           </a:xfrm>
           <a:prstGeom prst="rect">
@@ -3584,8 +3584,8 @@
         </p:nvSpPr>
         <p:spPr>
           <a:xfrm>
-            <a:off x="7818120" y="3300984"/>
-            <a:ext cx="3090672" cy="877824"/>
+            <a:off x="7818120" y="3182112"/>
+            <a:ext cx="3090672" cy="718718"/>
           </a:xfrm>
           <a:prstGeom prst="rect">
             <a:avLst/>
@@ -3659,12 +3659,12 @@
         </p:nvSpPr>
         <p:spPr>
           <a:xfrm>
-            <a:off x="7635240" y="4498848"/>
-            <a:ext cx="3474720" cy="1143000"/>
+            <a:off x="7635240" y="4184294"/>
+            <a:ext cx="3474720" cy="1466698"/>
           </a:xfrm>
           <a:prstGeom prst="roundRect">
             <a:avLst>
-              <a:gd name="adj" fmla="val 9600"/>
+              <a:gd name="adj" fmla="val 7481"/>
             </a:avLst>
           </a:prstGeom>
           <a:solidFill>
@@ -3686,7 +3686,7 @@
         </p:nvSpPr>
         <p:spPr>
           <a:xfrm>
-            <a:off x="7799832" y="4645152"/>
+            <a:off x="7799832" y="4330598"/>
             <a:ext cx="3145536" cy="256032"/>
           </a:xfrm>
           <a:prstGeom prst="rect">
@@ -3725,8 +3725,8 @@
         </p:nvSpPr>
         <p:spPr>
           <a:xfrm>
-            <a:off x="7799832" y="4974336"/>
-            <a:ext cx="3145536" cy="576072"/>
+            <a:off x="7799832" y="4659782"/>
+            <a:ext cx="3145536" cy="899770"/>
           </a:xfrm>
           <a:prstGeom prst="rect">
             <a:avLst/>
@@ -3752,7 +3752,7 @@
                 <a:ea typeface="Aptos" pitchFamily="34" charset="-122"/>
                 <a:cs typeface="Aptos" pitchFamily="34" charset="-120"/>
               </a:rPr>
-              <a:t>Use the concept to clarify workflow changes, dependencies, staffing, procurement requirements, training needs, and.</a:t>
+              <a:t>Use the concept to clarify workflow changes, dependencies, staffing, procurement requirements, training needs, and implementation checkpoints.</a:t>
             </a:r>
             <a:endParaRPr lang="en-US" sz="1320" dirty="0"/>
           </a:p>
@@ -4104,11 +4104,11 @@
         <p:spPr>
           <a:xfrm>
             <a:off x="7635240" y="1325880"/>
-            <a:ext cx="3474720" cy="1325880"/>
+            <a:ext cx="3474720" cy="1255471"/>
           </a:xfrm>
           <a:prstGeom prst="roundRect">
             <a:avLst>
-              <a:gd name="adj" fmla="val 8276"/>
+              <a:gd name="adj" fmla="val 8740"/>
             </a:avLst>
           </a:prstGeom>
           <a:solidFill>
@@ -4170,7 +4170,7 @@
         <p:spPr>
           <a:xfrm>
             <a:off x="7799832" y="1801368"/>
-            <a:ext cx="3145536" cy="758952"/>
+            <a:ext cx="3145536" cy="688543"/>
           </a:xfrm>
           <a:prstGeom prst="rect">
             <a:avLst/>
@@ -4210,12 +4210,12 @@
         </p:nvSpPr>
         <p:spPr>
           <a:xfrm>
-            <a:off x="7635240" y="2788920"/>
-            <a:ext cx="3474720" cy="1536192"/>
+            <a:off x="7635240" y="2718511"/>
+            <a:ext cx="3474720" cy="1328623"/>
           </a:xfrm>
           <a:prstGeom prst="roundRect">
             <a:avLst>
-              <a:gd name="adj" fmla="val 7143"/>
+              <a:gd name="adj" fmla="val 8259"/>
             </a:avLst>
           </a:prstGeom>
           <a:solidFill>
@@ -4237,7 +4237,7 @@
         </p:nvSpPr>
         <p:spPr>
           <a:xfrm>
-            <a:off x="7799832" y="2935224"/>
+            <a:off x="7799832" y="2864815"/>
             <a:ext cx="3145536" cy="256032"/>
           </a:xfrm>
           <a:prstGeom prst="rect">
@@ -4276,8 +4276,8 @@
         </p:nvSpPr>
         <p:spPr>
           <a:xfrm>
-            <a:off x="7818120" y="3300984"/>
-            <a:ext cx="3090672" cy="877824"/>
+            <a:off x="7818120" y="3230575"/>
+            <a:ext cx="3090672" cy="670255"/>
           </a:xfrm>
           <a:prstGeom prst="rect">
             <a:avLst/>
@@ -4334,12 +4334,12 @@
         </p:nvSpPr>
         <p:spPr>
           <a:xfrm>
-            <a:off x="7635240" y="4498848"/>
-            <a:ext cx="3474720" cy="1143000"/>
+            <a:off x="7635240" y="4184294"/>
+            <a:ext cx="3474720" cy="1466698"/>
           </a:xfrm>
           <a:prstGeom prst="roundRect">
             <a:avLst>
-              <a:gd name="adj" fmla="val 9600"/>
+              <a:gd name="adj" fmla="val 7481"/>
             </a:avLst>
           </a:prstGeom>
           <a:solidFill>
@@ -4361,7 +4361,7 @@
         </p:nvSpPr>
         <p:spPr>
           <a:xfrm>
-            <a:off x="7799832" y="4645152"/>
+            <a:off x="7799832" y="4330598"/>
             <a:ext cx="3145536" cy="256032"/>
           </a:xfrm>
           <a:prstGeom prst="rect">
@@ -4400,8 +4400,8 @@
         </p:nvSpPr>
         <p:spPr>
           <a:xfrm>
-            <a:off x="7799832" y="4974336"/>
-            <a:ext cx="3145536" cy="576072"/>
+            <a:off x="7799832" y="4659782"/>
+            <a:ext cx="3145536" cy="899770"/>
           </a:xfrm>
           <a:prstGeom prst="rect">
             <a:avLst/>
@@ -4427,7 +4427,7 @@
                 <a:ea typeface="Aptos" pitchFamily="34" charset="-122"/>
                 <a:cs typeface="Aptos" pitchFamily="34" charset="-120"/>
               </a:rPr>
-              <a:t>Use the concept to clarify workflow changes, dependencies, staffing, procurement requirements, training needs, and.</a:t>
+              <a:t>Use the concept to clarify workflow changes, dependencies, staffing, procurement requirements, training needs, and implementation checkpoints.</a:t>
             </a:r>
             <a:endParaRPr lang="en-US" sz="1320" dirty="0"/>
           </a:p>
@@ -4796,11 +4796,11 @@
         <p:spPr>
           <a:xfrm>
             <a:off x="7635240" y="1325880"/>
-            <a:ext cx="3474720" cy="1325880"/>
+            <a:ext cx="3474720" cy="1207008"/>
           </a:xfrm>
           <a:prstGeom prst="roundRect">
             <a:avLst>
-              <a:gd name="adj" fmla="val 8276"/>
+              <a:gd name="adj" fmla="val 9091"/>
             </a:avLst>
           </a:prstGeom>
           <a:solidFill>
@@ -4862,7 +4862,7 @@
         <p:spPr>
           <a:xfrm>
             <a:off x="7799832" y="1801368"/>
-            <a:ext cx="3145536" cy="758952"/>
+            <a:ext cx="3145536" cy="640080"/>
           </a:xfrm>
           <a:prstGeom prst="rect">
             <a:avLst/>
@@ -4902,12 +4902,12 @@
         </p:nvSpPr>
         <p:spPr>
           <a:xfrm>
-            <a:off x="7635240" y="2788920"/>
-            <a:ext cx="3474720" cy="1536192"/>
+            <a:off x="7635240" y="2670048"/>
+            <a:ext cx="3474720" cy="1377086"/>
           </a:xfrm>
           <a:prstGeom prst="roundRect">
             <a:avLst>
-              <a:gd name="adj" fmla="val 7143"/>
+              <a:gd name="adj" fmla="val 7968"/>
             </a:avLst>
           </a:prstGeom>
           <a:solidFill>
@@ -4929,7 +4929,7 @@
         </p:nvSpPr>
         <p:spPr>
           <a:xfrm>
-            <a:off x="7799832" y="2935224"/>
+            <a:off x="7799832" y="2816352"/>
             <a:ext cx="3145536" cy="256032"/>
           </a:xfrm>
           <a:prstGeom prst="rect">
@@ -4968,8 +4968,8 @@
         </p:nvSpPr>
         <p:spPr>
           <a:xfrm>
-            <a:off x="7818120" y="3300984"/>
-            <a:ext cx="3090672" cy="877824"/>
+            <a:off x="7818120" y="3182112"/>
+            <a:ext cx="3090672" cy="718718"/>
           </a:xfrm>
           <a:prstGeom prst="rect">
             <a:avLst/>
@@ -5043,12 +5043,12 @@
         </p:nvSpPr>
         <p:spPr>
           <a:xfrm>
-            <a:off x="7635240" y="4498848"/>
-            <a:ext cx="3474720" cy="1143000"/>
+            <a:off x="7635240" y="4184294"/>
+            <a:ext cx="3474720" cy="1466698"/>
           </a:xfrm>
           <a:prstGeom prst="roundRect">
             <a:avLst>
-              <a:gd name="adj" fmla="val 9600"/>
+              <a:gd name="adj" fmla="val 7481"/>
             </a:avLst>
           </a:prstGeom>
           <a:solidFill>
@@ -5070,7 +5070,7 @@
         </p:nvSpPr>
         <p:spPr>
           <a:xfrm>
-            <a:off x="7799832" y="4645152"/>
+            <a:off x="7799832" y="4330598"/>
             <a:ext cx="3145536" cy="256032"/>
           </a:xfrm>
           <a:prstGeom prst="rect">
@@ -5109,8 +5109,8 @@
         </p:nvSpPr>
         <p:spPr>
           <a:xfrm>
-            <a:off x="7799832" y="4974336"/>
-            <a:ext cx="3145536" cy="576072"/>
+            <a:off x="7799832" y="4659782"/>
+            <a:ext cx="3145536" cy="899770"/>
           </a:xfrm>
           <a:prstGeom prst="rect">
             <a:avLst/>
@@ -5136,7 +5136,7 @@
                 <a:ea typeface="Aptos" pitchFamily="34" charset="-122"/>
                 <a:cs typeface="Aptos" pitchFamily="34" charset="-120"/>
               </a:rPr>
-              <a:t>Use the concept to clarify workflow changes, dependencies, staffing, procurement requirements, training needs, and.</a:t>
+              <a:t>Use the concept to clarify workflow changes, dependencies, staffing, procurement requirements, training needs, and implementation checkpoints.</a:t>
             </a:r>
             <a:endParaRPr lang="en-US" sz="1320" dirty="0"/>
           </a:p>
@@ -5505,11 +5505,11 @@
         <p:spPr>
           <a:xfrm>
             <a:off x="7635240" y="1325880"/>
-            <a:ext cx="3474720" cy="1325880"/>
+            <a:ext cx="3474720" cy="1255471"/>
           </a:xfrm>
           <a:prstGeom prst="roundRect">
             <a:avLst>
-              <a:gd name="adj" fmla="val 8276"/>
+              <a:gd name="adj" fmla="val 8740"/>
             </a:avLst>
           </a:prstGeom>
           <a:solidFill>
@@ -5571,7 +5571,7 @@
         <p:spPr>
           <a:xfrm>
             <a:off x="7799832" y="1801368"/>
-            <a:ext cx="3145536" cy="758952"/>
+            <a:ext cx="3145536" cy="688543"/>
           </a:xfrm>
           <a:prstGeom prst="rect">
             <a:avLst/>
@@ -5611,7 +5611,7 @@
         </p:nvSpPr>
         <p:spPr>
           <a:xfrm>
-            <a:off x="7635240" y="2788920"/>
+            <a:off x="7635240" y="2718511"/>
             <a:ext cx="3474720" cy="1536192"/>
           </a:xfrm>
           <a:prstGeom prst="roundRect">
@@ -5638,7 +5638,7 @@
         </p:nvSpPr>
         <p:spPr>
           <a:xfrm>
-            <a:off x="7799832" y="2935224"/>
+            <a:off x="7799832" y="2864815"/>
             <a:ext cx="3145536" cy="256032"/>
           </a:xfrm>
           <a:prstGeom prst="rect">
@@ -5677,7 +5677,7 @@
         </p:nvSpPr>
         <p:spPr>
           <a:xfrm>
-            <a:off x="7818120" y="3300984"/>
+            <a:off x="7818120" y="3230575"/>
             <a:ext cx="3090672" cy="877824"/>
           </a:xfrm>
           <a:prstGeom prst="rect">
@@ -5752,12 +5752,12 @@
         </p:nvSpPr>
         <p:spPr>
           <a:xfrm>
-            <a:off x="7635240" y="4498848"/>
-            <a:ext cx="3474720" cy="1143000"/>
+            <a:off x="7635240" y="4391863"/>
+            <a:ext cx="3474720" cy="1255471"/>
           </a:xfrm>
           <a:prstGeom prst="roundRect">
             <a:avLst>
-              <a:gd name="adj" fmla="val 9600"/>
+              <a:gd name="adj" fmla="val 8740"/>
             </a:avLst>
           </a:prstGeom>
           <a:solidFill>
@@ -5779,7 +5779,7 @@
         </p:nvSpPr>
         <p:spPr>
           <a:xfrm>
-            <a:off x="7799832" y="4645152"/>
+            <a:off x="7799832" y="4538167"/>
             <a:ext cx="3145536" cy="256032"/>
           </a:xfrm>
           <a:prstGeom prst="rect">
@@ -5818,8 +5818,8 @@
         </p:nvSpPr>
         <p:spPr>
           <a:xfrm>
-            <a:off x="7799832" y="4974336"/>
-            <a:ext cx="3145536" cy="576072"/>
+            <a:off x="7799832" y="4867351"/>
+            <a:ext cx="3145536" cy="688543"/>
           </a:xfrm>
           <a:prstGeom prst="rect">
             <a:avLst/>
@@ -5845,7 +5845,7 @@
                 <a:ea typeface="Aptos" pitchFamily="34" charset="-122"/>
                 <a:cs typeface="Aptos" pitchFamily="34" charset="-120"/>
               </a:rPr>
-              <a:t>Identify what could go wrong, who could be affected, what safeguards are needed, and what evidence should be reviewed.</a:t>
+              <a:t>Identify what could go wrong, who could be affected, what safeguards are needed, and what evidence should be reviewed before use.</a:t>
             </a:r>
             <a:endParaRPr lang="en-US" sz="1320" dirty="0"/>
           </a:p>
@@ -6214,11 +6214,11 @@
         <p:spPr>
           <a:xfrm>
             <a:off x="7635240" y="1325880"/>
-            <a:ext cx="3474720" cy="1325880"/>
+            <a:ext cx="3474720" cy="1255471"/>
           </a:xfrm>
           <a:prstGeom prst="roundRect">
             <a:avLst>
-              <a:gd name="adj" fmla="val 8276"/>
+              <a:gd name="adj" fmla="val 8740"/>
             </a:avLst>
           </a:prstGeom>
           <a:solidFill>
@@ -6280,7 +6280,7 @@
         <p:spPr>
           <a:xfrm>
             <a:off x="7799832" y="1801368"/>
-            <a:ext cx="3145536" cy="758952"/>
+            <a:ext cx="3145536" cy="688543"/>
           </a:xfrm>
           <a:prstGeom prst="rect">
             <a:avLst/>
@@ -6320,12 +6320,12 @@
         </p:nvSpPr>
         <p:spPr>
           <a:xfrm>
-            <a:off x="7635240" y="2788920"/>
-            <a:ext cx="3474720" cy="1536192"/>
+            <a:off x="7635240" y="2718511"/>
+            <a:ext cx="3474720" cy="1328623"/>
           </a:xfrm>
           <a:prstGeom prst="roundRect">
             <a:avLst>
-              <a:gd name="adj" fmla="val 7143"/>
+              <a:gd name="adj" fmla="val 8259"/>
             </a:avLst>
           </a:prstGeom>
           <a:solidFill>
@@ -6347,7 +6347,7 @@
         </p:nvSpPr>
         <p:spPr>
           <a:xfrm>
-            <a:off x="7799832" y="2935224"/>
+            <a:off x="7799832" y="2864815"/>
             <a:ext cx="3145536" cy="256032"/>
           </a:xfrm>
           <a:prstGeom prst="rect">
@@ -6386,8 +6386,8 @@
         </p:nvSpPr>
         <p:spPr>
           <a:xfrm>
-            <a:off x="7818120" y="3300984"/>
-            <a:ext cx="3090672" cy="877824"/>
+            <a:off x="7818120" y="3230575"/>
+            <a:ext cx="3090672" cy="670255"/>
           </a:xfrm>
           <a:prstGeom prst="rect">
             <a:avLst/>
@@ -6461,12 +6461,12 @@
         </p:nvSpPr>
         <p:spPr>
           <a:xfrm>
-            <a:off x="7635240" y="4498848"/>
-            <a:ext cx="3474720" cy="1143000"/>
+            <a:off x="7635240" y="4184294"/>
+            <a:ext cx="3474720" cy="1466698"/>
           </a:xfrm>
           <a:prstGeom prst="roundRect">
             <a:avLst>
-              <a:gd name="adj" fmla="val 9600"/>
+              <a:gd name="adj" fmla="val 7481"/>
             </a:avLst>
           </a:prstGeom>
           <a:solidFill>
@@ -6488,7 +6488,7 @@
         </p:nvSpPr>
         <p:spPr>
           <a:xfrm>
-            <a:off x="7799832" y="4645152"/>
+            <a:off x="7799832" y="4330598"/>
             <a:ext cx="3145536" cy="256032"/>
           </a:xfrm>
           <a:prstGeom prst="rect">
@@ -6527,8 +6527,8 @@
         </p:nvSpPr>
         <p:spPr>
           <a:xfrm>
-            <a:off x="7799832" y="4974336"/>
-            <a:ext cx="3145536" cy="576072"/>
+            <a:off x="7799832" y="4659782"/>
+            <a:ext cx="3145536" cy="899770"/>
           </a:xfrm>
           <a:prstGeom prst="rect">
             <a:avLst/>
@@ -6554,7 +6554,7 @@
                 <a:ea typeface="Aptos" pitchFamily="34" charset="-122"/>
                 <a:cs typeface="Aptos" pitchFamily="34" charset="-120"/>
               </a:rPr>
-              <a:t>Use the concept to clarify workflow changes, dependencies, staffing, procurement requirements, training needs, and.</a:t>
+              <a:t>Use the concept to clarify workflow changes, dependencies, staffing, procurement requirements, training needs, and implementation checkpoints.</a:t>
             </a:r>
             <a:endParaRPr lang="en-US" sz="1320" dirty="0"/>
           </a:p>
@@ -6923,11 +6923,11 @@
         <p:spPr>
           <a:xfrm>
             <a:off x="7635240" y="1325880"/>
-            <a:ext cx="3474720" cy="1325880"/>
+            <a:ext cx="3474720" cy="1207008"/>
           </a:xfrm>
           <a:prstGeom prst="roundRect">
             <a:avLst>
-              <a:gd name="adj" fmla="val 8276"/>
+              <a:gd name="adj" fmla="val 9091"/>
             </a:avLst>
           </a:prstGeom>
           <a:solidFill>
@@ -6989,7 +6989,7 @@
         <p:spPr>
           <a:xfrm>
             <a:off x="7799832" y="1801368"/>
-            <a:ext cx="3145536" cy="758952"/>
+            <a:ext cx="3145536" cy="640080"/>
           </a:xfrm>
           <a:prstGeom prst="rect">
             <a:avLst/>
@@ -7029,12 +7029,12 @@
         </p:nvSpPr>
         <p:spPr>
           <a:xfrm>
-            <a:off x="7635240" y="2788920"/>
-            <a:ext cx="3474720" cy="1536192"/>
+            <a:off x="7635240" y="2670048"/>
+            <a:ext cx="3474720" cy="1377086"/>
           </a:xfrm>
           <a:prstGeom prst="roundRect">
             <a:avLst>
-              <a:gd name="adj" fmla="val 7143"/>
+              <a:gd name="adj" fmla="val 7968"/>
             </a:avLst>
           </a:prstGeom>
           <a:solidFill>
@@ -7056,7 +7056,7 @@
         </p:nvSpPr>
         <p:spPr>
           <a:xfrm>
-            <a:off x="7799832" y="2935224"/>
+            <a:off x="7799832" y="2816352"/>
             <a:ext cx="3145536" cy="256032"/>
           </a:xfrm>
           <a:prstGeom prst="rect">
@@ -7095,8 +7095,8 @@
         </p:nvSpPr>
         <p:spPr>
           <a:xfrm>
-            <a:off x="7818120" y="3300984"/>
-            <a:ext cx="3090672" cy="877824"/>
+            <a:off x="7818120" y="3182112"/>
+            <a:ext cx="3090672" cy="718718"/>
           </a:xfrm>
           <a:prstGeom prst="rect">
             <a:avLst/>
@@ -7170,12 +7170,12 @@
         </p:nvSpPr>
         <p:spPr>
           <a:xfrm>
-            <a:off x="7635240" y="4498848"/>
-            <a:ext cx="3474720" cy="1143000"/>
+            <a:off x="7635240" y="4184294"/>
+            <a:ext cx="3474720" cy="1466698"/>
           </a:xfrm>
           <a:prstGeom prst="roundRect">
             <a:avLst>
-              <a:gd name="adj" fmla="val 9600"/>
+              <a:gd name="adj" fmla="val 7481"/>
             </a:avLst>
           </a:prstGeom>
           <a:solidFill>
@@ -7197,7 +7197,7 @@
         </p:nvSpPr>
         <p:spPr>
           <a:xfrm>
-            <a:off x="7799832" y="4645152"/>
+            <a:off x="7799832" y="4330598"/>
             <a:ext cx="3145536" cy="256032"/>
           </a:xfrm>
           <a:prstGeom prst="rect">
@@ -7236,8 +7236,8 @@
         </p:nvSpPr>
         <p:spPr>
           <a:xfrm>
-            <a:off x="7799832" y="4974336"/>
-            <a:ext cx="3145536" cy="576072"/>
+            <a:off x="7799832" y="4659782"/>
+            <a:ext cx="3145536" cy="899770"/>
           </a:xfrm>
           <a:prstGeom prst="rect">
             <a:avLst/>
@@ -7263,7 +7263,7 @@
                 <a:ea typeface="Aptos" pitchFamily="34" charset="-122"/>
                 <a:cs typeface="Aptos" pitchFamily="34" charset="-120"/>
               </a:rPr>
-              <a:t>Use the concept to clarify workflow changes, dependencies, staffing, procurement requirements, training needs, and.</a:t>
+              <a:t>Use the concept to clarify workflow changes, dependencies, staffing, procurement requirements, training needs, and implementation checkpoints.</a:t>
             </a:r>
             <a:endParaRPr lang="en-US" sz="1320" dirty="0"/>
           </a:p>
@@ -7615,11 +7615,11 @@
         <p:spPr>
           <a:xfrm>
             <a:off x="7635240" y="1325880"/>
-            <a:ext cx="3474720" cy="1325880"/>
+            <a:ext cx="3474720" cy="1207008"/>
           </a:xfrm>
           <a:prstGeom prst="roundRect">
             <a:avLst>
-              <a:gd name="adj" fmla="val 8276"/>
+              <a:gd name="adj" fmla="val 9091"/>
             </a:avLst>
           </a:prstGeom>
           <a:solidFill>
@@ -7681,7 +7681,7 @@
         <p:spPr>
           <a:xfrm>
             <a:off x="7799832" y="1801368"/>
-            <a:ext cx="3145536" cy="758952"/>
+            <a:ext cx="3145536" cy="640080"/>
           </a:xfrm>
           <a:prstGeom prst="rect">
             <a:avLst/>
@@ -7721,12 +7721,12 @@
         </p:nvSpPr>
         <p:spPr>
           <a:xfrm>
-            <a:off x="7635240" y="2788920"/>
-            <a:ext cx="3474720" cy="1536192"/>
+            <a:off x="7635240" y="2670048"/>
+            <a:ext cx="3474720" cy="1377086"/>
           </a:xfrm>
           <a:prstGeom prst="roundRect">
             <a:avLst>
-              <a:gd name="adj" fmla="val 7143"/>
+              <a:gd name="adj" fmla="val 7968"/>
             </a:avLst>
           </a:prstGeom>
           <a:solidFill>
@@ -7748,7 +7748,7 @@
         </p:nvSpPr>
         <p:spPr>
           <a:xfrm>
-            <a:off x="7799832" y="2935224"/>
+            <a:off x="7799832" y="2816352"/>
             <a:ext cx="3145536" cy="256032"/>
           </a:xfrm>
           <a:prstGeom prst="rect">
@@ -7787,8 +7787,8 @@
         </p:nvSpPr>
         <p:spPr>
           <a:xfrm>
-            <a:off x="7818120" y="3300984"/>
-            <a:ext cx="3090672" cy="877824"/>
+            <a:off x="7818120" y="3182112"/>
+            <a:ext cx="3090672" cy="718718"/>
           </a:xfrm>
           <a:prstGeom prst="rect">
             <a:avLst/>
@@ -7845,12 +7845,12 @@
         </p:nvSpPr>
         <p:spPr>
           <a:xfrm>
-            <a:off x="7635240" y="4498848"/>
-            <a:ext cx="3474720" cy="1143000"/>
+            <a:off x="7635240" y="4184294"/>
+            <a:ext cx="3474720" cy="1466698"/>
           </a:xfrm>
           <a:prstGeom prst="roundRect">
             <a:avLst>
-              <a:gd name="adj" fmla="val 9600"/>
+              <a:gd name="adj" fmla="val 7481"/>
             </a:avLst>
           </a:prstGeom>
           <a:solidFill>
@@ -7872,7 +7872,7 @@
         </p:nvSpPr>
         <p:spPr>
           <a:xfrm>
-            <a:off x="7799832" y="4645152"/>
+            <a:off x="7799832" y="4330598"/>
             <a:ext cx="3145536" cy="256032"/>
           </a:xfrm>
           <a:prstGeom prst="rect">
@@ -7911,8 +7911,8 @@
         </p:nvSpPr>
         <p:spPr>
           <a:xfrm>
-            <a:off x="7799832" y="4974336"/>
-            <a:ext cx="3145536" cy="576072"/>
+            <a:off x="7799832" y="4659782"/>
+            <a:ext cx="3145536" cy="899770"/>
           </a:xfrm>
           <a:prstGeom prst="rect">
             <a:avLst/>
@@ -7938,7 +7938,7 @@
                 <a:ea typeface="Aptos" pitchFamily="34" charset="-122"/>
                 <a:cs typeface="Aptos" pitchFamily="34" charset="-120"/>
               </a:rPr>
-              <a:t>Use the concept to clarify workflow changes, dependencies, staffing, procurement requirements, training needs, and.</a:t>
+              <a:t>Use the concept to clarify workflow changes, dependencies, staffing, procurement requirements, training needs, and implementation checkpoints.</a:t>
             </a:r>
             <a:endParaRPr lang="en-US" sz="1320" dirty="0"/>
           </a:p>
@@ -8307,11 +8307,11 @@
         <p:spPr>
           <a:xfrm>
             <a:off x="7635240" y="1325880"/>
-            <a:ext cx="3474720" cy="1325880"/>
+            <a:ext cx="3474720" cy="1207008"/>
           </a:xfrm>
           <a:prstGeom prst="roundRect">
             <a:avLst>
-              <a:gd name="adj" fmla="val 8276"/>
+              <a:gd name="adj" fmla="val 9091"/>
             </a:avLst>
           </a:prstGeom>
           <a:solidFill>
@@ -8373,7 +8373,7 @@
         <p:spPr>
           <a:xfrm>
             <a:off x="7799832" y="1801368"/>
-            <a:ext cx="3145536" cy="758952"/>
+            <a:ext cx="3145536" cy="640080"/>
           </a:xfrm>
           <a:prstGeom prst="rect">
             <a:avLst/>
@@ -8413,12 +8413,12 @@
         </p:nvSpPr>
         <p:spPr>
           <a:xfrm>
-            <a:off x="7635240" y="2788920"/>
-            <a:ext cx="3474720" cy="1536192"/>
+            <a:off x="7635240" y="2670048"/>
+            <a:ext cx="3474720" cy="1377086"/>
           </a:xfrm>
           <a:prstGeom prst="roundRect">
             <a:avLst>
-              <a:gd name="adj" fmla="val 7143"/>
+              <a:gd name="adj" fmla="val 7968"/>
             </a:avLst>
           </a:prstGeom>
           <a:solidFill>
@@ -8440,7 +8440,7 @@
         </p:nvSpPr>
         <p:spPr>
           <a:xfrm>
-            <a:off x="7799832" y="2935224"/>
+            <a:off x="7799832" y="2816352"/>
             <a:ext cx="3145536" cy="256032"/>
           </a:xfrm>
           <a:prstGeom prst="rect">
@@ -8479,8 +8479,8 @@
         </p:nvSpPr>
         <p:spPr>
           <a:xfrm>
-            <a:off x="7818120" y="3300984"/>
-            <a:ext cx="3090672" cy="877824"/>
+            <a:off x="7818120" y="3182112"/>
+            <a:ext cx="3090672" cy="718718"/>
           </a:xfrm>
           <a:prstGeom prst="rect">
             <a:avLst/>
@@ -8554,12 +8554,12 @@
         </p:nvSpPr>
         <p:spPr>
           <a:xfrm>
-            <a:off x="7635240" y="4498848"/>
-            <a:ext cx="3474720" cy="1143000"/>
+            <a:off x="7635240" y="4184294"/>
+            <a:ext cx="3474720" cy="1466698"/>
           </a:xfrm>
           <a:prstGeom prst="roundRect">
             <a:avLst>
-              <a:gd name="adj" fmla="val 9600"/>
+              <a:gd name="adj" fmla="val 7481"/>
             </a:avLst>
           </a:prstGeom>
           <a:solidFill>
@@ -8581,7 +8581,7 @@
         </p:nvSpPr>
         <p:spPr>
           <a:xfrm>
-            <a:off x="7799832" y="4645152"/>
+            <a:off x="7799832" y="4330598"/>
             <a:ext cx="3145536" cy="256032"/>
           </a:xfrm>
           <a:prstGeom prst="rect">
@@ -8620,8 +8620,8 @@
         </p:nvSpPr>
         <p:spPr>
           <a:xfrm>
-            <a:off x="7799832" y="4974336"/>
-            <a:ext cx="3145536" cy="576072"/>
+            <a:off x="7799832" y="4659782"/>
+            <a:ext cx="3145536" cy="899770"/>
           </a:xfrm>
           <a:prstGeom prst="rect">
             <a:avLst/>
@@ -8647,7 +8647,7 @@
                 <a:ea typeface="Aptos" pitchFamily="34" charset="-122"/>
                 <a:cs typeface="Aptos" pitchFamily="34" charset="-120"/>
               </a:rPr>
-              <a:t>Use the assignment to test whether you can explain the concept, apply it to a realistic public health situation, and.</a:t>
+              <a:t>Use the assignment to test whether you can explain the concept, apply it to a realistic public health situation, and identify what would need review before the work moves forward.</a:t>
             </a:r>
             <a:endParaRPr lang="en-US" sz="1320" dirty="0"/>
           </a:p>
@@ -8999,11 +8999,11 @@
         <p:spPr>
           <a:xfrm>
             <a:off x="7635240" y="1325880"/>
-            <a:ext cx="3474720" cy="1325880"/>
+            <a:ext cx="3474720" cy="1207008"/>
           </a:xfrm>
           <a:prstGeom prst="roundRect">
             <a:avLst>
-              <a:gd name="adj" fmla="val 8276"/>
+              <a:gd name="adj" fmla="val 9091"/>
             </a:avLst>
           </a:prstGeom>
           <a:solidFill>
@@ -9065,7 +9065,7 @@
         <p:spPr>
           <a:xfrm>
             <a:off x="7799832" y="1801368"/>
-            <a:ext cx="3145536" cy="758952"/>
+            <a:ext cx="3145536" cy="640080"/>
           </a:xfrm>
           <a:prstGeom prst="rect">
             <a:avLst/>
@@ -9105,12 +9105,12 @@
         </p:nvSpPr>
         <p:spPr>
           <a:xfrm>
-            <a:off x="7635240" y="2788920"/>
-            <a:ext cx="3474720" cy="1536192"/>
+            <a:off x="7635240" y="2670048"/>
+            <a:ext cx="3474720" cy="1377086"/>
           </a:xfrm>
           <a:prstGeom prst="roundRect">
             <a:avLst>
-              <a:gd name="adj" fmla="val 7143"/>
+              <a:gd name="adj" fmla="val 7968"/>
             </a:avLst>
           </a:prstGeom>
           <a:solidFill>
@@ -9132,7 +9132,7 @@
         </p:nvSpPr>
         <p:spPr>
           <a:xfrm>
-            <a:off x="7799832" y="2935224"/>
+            <a:off x="7799832" y="2816352"/>
             <a:ext cx="3145536" cy="256032"/>
           </a:xfrm>
           <a:prstGeom prst="rect">
@@ -9171,8 +9171,8 @@
         </p:nvSpPr>
         <p:spPr>
           <a:xfrm>
-            <a:off x="7818120" y="3300984"/>
-            <a:ext cx="3090672" cy="877824"/>
+            <a:off x="7818120" y="3182112"/>
+            <a:ext cx="3090672" cy="718718"/>
           </a:xfrm>
           <a:prstGeom prst="rect">
             <a:avLst/>
@@ -9229,12 +9229,12 @@
         </p:nvSpPr>
         <p:spPr>
           <a:xfrm>
-            <a:off x="7635240" y="4498848"/>
-            <a:ext cx="3474720" cy="1143000"/>
+            <a:off x="7635240" y="4184294"/>
+            <a:ext cx="3474720" cy="1466698"/>
           </a:xfrm>
           <a:prstGeom prst="roundRect">
             <a:avLst>
-              <a:gd name="adj" fmla="val 9600"/>
+              <a:gd name="adj" fmla="val 7481"/>
             </a:avLst>
           </a:prstGeom>
           <a:solidFill>
@@ -9256,7 +9256,7 @@
         </p:nvSpPr>
         <p:spPr>
           <a:xfrm>
-            <a:off x="7799832" y="4645152"/>
+            <a:off x="7799832" y="4330598"/>
             <a:ext cx="3145536" cy="256032"/>
           </a:xfrm>
           <a:prstGeom prst="rect">
@@ -9295,8 +9295,8 @@
         </p:nvSpPr>
         <p:spPr>
           <a:xfrm>
-            <a:off x="7799832" y="4974336"/>
-            <a:ext cx="3145536" cy="576072"/>
+            <a:off x="7799832" y="4659782"/>
+            <a:ext cx="3145536" cy="899770"/>
           </a:xfrm>
           <a:prstGeom prst="rect">
             <a:avLst/>
@@ -9322,7 +9322,7 @@
                 <a:ea typeface="Aptos" pitchFamily="34" charset="-122"/>
                 <a:cs typeface="Aptos" pitchFamily="34" charset="-120"/>
               </a:rPr>
-              <a:t>Use the concept to clarify workflow changes, dependencies, staffing, procurement requirements, training needs, and.</a:t>
+              <a:t>Use the concept to clarify workflow changes, dependencies, staffing, procurement requirements, training needs, and implementation checkpoints.</a:t>
             </a:r>
             <a:endParaRPr lang="en-US" sz="1320" dirty="0"/>
           </a:p>
@@ -9657,11 +9657,11 @@
         <p:spPr>
           <a:xfrm>
             <a:off x="7635240" y="1325880"/>
-            <a:ext cx="3474720" cy="1325880"/>
+            <a:ext cx="3474720" cy="1255471"/>
           </a:xfrm>
           <a:prstGeom prst="roundRect">
             <a:avLst>
-              <a:gd name="adj" fmla="val 8276"/>
+              <a:gd name="adj" fmla="val 8740"/>
             </a:avLst>
           </a:prstGeom>
           <a:solidFill>
@@ -9723,7 +9723,7 @@
         <p:spPr>
           <a:xfrm>
             <a:off x="7799832" y="1801368"/>
-            <a:ext cx="3145536" cy="758952"/>
+            <a:ext cx="3145536" cy="688543"/>
           </a:xfrm>
           <a:prstGeom prst="rect">
             <a:avLst/>
@@ -9763,12 +9763,12 @@
         </p:nvSpPr>
         <p:spPr>
           <a:xfrm>
-            <a:off x="7635240" y="2788920"/>
-            <a:ext cx="3474720" cy="1536192"/>
+            <a:off x="7635240" y="2718511"/>
+            <a:ext cx="3474720" cy="1328623"/>
           </a:xfrm>
           <a:prstGeom prst="roundRect">
             <a:avLst>
-              <a:gd name="adj" fmla="val 7143"/>
+              <a:gd name="adj" fmla="val 8259"/>
             </a:avLst>
           </a:prstGeom>
           <a:solidFill>
@@ -9790,7 +9790,7 @@
         </p:nvSpPr>
         <p:spPr>
           <a:xfrm>
-            <a:off x="7799832" y="2935224"/>
+            <a:off x="7799832" y="2864815"/>
             <a:ext cx="3145536" cy="256032"/>
           </a:xfrm>
           <a:prstGeom prst="rect">
@@ -9829,8 +9829,8 @@
         </p:nvSpPr>
         <p:spPr>
           <a:xfrm>
-            <a:off x="7818120" y="3300984"/>
-            <a:ext cx="3090672" cy="877824"/>
+            <a:off x="7818120" y="3230575"/>
+            <a:ext cx="3090672" cy="670255"/>
           </a:xfrm>
           <a:prstGeom prst="rect">
             <a:avLst/>
@@ -9887,12 +9887,12 @@
         </p:nvSpPr>
         <p:spPr>
           <a:xfrm>
-            <a:off x="7635240" y="4498848"/>
-            <a:ext cx="3474720" cy="1143000"/>
+            <a:off x="7635240" y="4184294"/>
+            <a:ext cx="3474720" cy="1466698"/>
           </a:xfrm>
           <a:prstGeom prst="roundRect">
             <a:avLst>
-              <a:gd name="adj" fmla="val 9600"/>
+              <a:gd name="adj" fmla="val 7481"/>
             </a:avLst>
           </a:prstGeom>
           <a:solidFill>
@@ -9914,7 +9914,7 @@
         </p:nvSpPr>
         <p:spPr>
           <a:xfrm>
-            <a:off x="7799832" y="4645152"/>
+            <a:off x="7799832" y="4330598"/>
             <a:ext cx="3145536" cy="256032"/>
           </a:xfrm>
           <a:prstGeom prst="rect">
@@ -9953,8 +9953,8 @@
         </p:nvSpPr>
         <p:spPr>
           <a:xfrm>
-            <a:off x="7799832" y="4974336"/>
-            <a:ext cx="3145536" cy="576072"/>
+            <a:off x="7799832" y="4659782"/>
+            <a:ext cx="3145536" cy="899770"/>
           </a:xfrm>
           <a:prstGeom prst="rect">
             <a:avLst/>
@@ -9980,7 +9980,7 @@
                 <a:ea typeface="Aptos" pitchFamily="34" charset="-122"/>
                 <a:cs typeface="Aptos" pitchFamily="34" charset="-120"/>
               </a:rPr>
-              <a:t>Use the assignment to test whether you can explain the concept, apply it to a realistic public health situation, and.</a:t>
+              <a:t>Use the assignment to test whether you can explain the concept, apply it to a realistic public health situation, and identify what would need review before the work moves forward.</a:t>
             </a:r>
             <a:endParaRPr lang="en-US" sz="1320" dirty="0"/>
           </a:p>
@@ -10934,11 +10934,11 @@
         <p:spPr>
           <a:xfrm>
             <a:off x="7635240" y="1325880"/>
-            <a:ext cx="3474720" cy="1325880"/>
+            <a:ext cx="3474720" cy="1255471"/>
           </a:xfrm>
           <a:prstGeom prst="roundRect">
             <a:avLst>
-              <a:gd name="adj" fmla="val 8276"/>
+              <a:gd name="adj" fmla="val 8740"/>
             </a:avLst>
           </a:prstGeom>
           <a:solidFill>
@@ -11000,7 +11000,7 @@
         <p:spPr>
           <a:xfrm>
             <a:off x="7799832" y="1801368"/>
-            <a:ext cx="3145536" cy="758952"/>
+            <a:ext cx="3145536" cy="688543"/>
           </a:xfrm>
           <a:prstGeom prst="rect">
             <a:avLst/>
@@ -11040,12 +11040,12 @@
         </p:nvSpPr>
         <p:spPr>
           <a:xfrm>
-            <a:off x="7635240" y="2788920"/>
-            <a:ext cx="3474720" cy="1536192"/>
+            <a:off x="7635240" y="2718511"/>
+            <a:ext cx="3474720" cy="1328623"/>
           </a:xfrm>
           <a:prstGeom prst="roundRect">
             <a:avLst>
-              <a:gd name="adj" fmla="val 7143"/>
+              <a:gd name="adj" fmla="val 8259"/>
             </a:avLst>
           </a:prstGeom>
           <a:solidFill>
@@ -11067,7 +11067,7 @@
         </p:nvSpPr>
         <p:spPr>
           <a:xfrm>
-            <a:off x="7799832" y="2935224"/>
+            <a:off x="7799832" y="2864815"/>
             <a:ext cx="3145536" cy="256032"/>
           </a:xfrm>
           <a:prstGeom prst="rect">
@@ -11106,8 +11106,8 @@
         </p:nvSpPr>
         <p:spPr>
           <a:xfrm>
-            <a:off x="7818120" y="3300984"/>
-            <a:ext cx="3090672" cy="877824"/>
+            <a:off x="7818120" y="3230575"/>
+            <a:ext cx="3090672" cy="670255"/>
           </a:xfrm>
           <a:prstGeom prst="rect">
             <a:avLst/>
@@ -11181,12 +11181,12 @@
         </p:nvSpPr>
         <p:spPr>
           <a:xfrm>
-            <a:off x="7635240" y="4498848"/>
-            <a:ext cx="3474720" cy="1143000"/>
+            <a:off x="7635240" y="4184294"/>
+            <a:ext cx="3474720" cy="1466698"/>
           </a:xfrm>
           <a:prstGeom prst="roundRect">
             <a:avLst>
-              <a:gd name="adj" fmla="val 9600"/>
+              <a:gd name="adj" fmla="val 7481"/>
             </a:avLst>
           </a:prstGeom>
           <a:solidFill>
@@ -11208,7 +11208,7 @@
         </p:nvSpPr>
         <p:spPr>
           <a:xfrm>
-            <a:off x="7799832" y="4645152"/>
+            <a:off x="7799832" y="4330598"/>
             <a:ext cx="3145536" cy="256032"/>
           </a:xfrm>
           <a:prstGeom prst="rect">
@@ -11247,8 +11247,8 @@
         </p:nvSpPr>
         <p:spPr>
           <a:xfrm>
-            <a:off x="7799832" y="4974336"/>
-            <a:ext cx="3145536" cy="576072"/>
+            <a:off x="7799832" y="4659782"/>
+            <a:ext cx="3145536" cy="899770"/>
           </a:xfrm>
           <a:prstGeom prst="rect">
             <a:avLst/>
@@ -11274,7 +11274,7 @@
                 <a:ea typeface="Aptos" pitchFamily="34" charset="-122"/>
                 <a:cs typeface="Aptos" pitchFamily="34" charset="-120"/>
               </a:rPr>
-              <a:t>Use the assignment to test whether you can explain the concept, apply it to a realistic public health situation, and.</a:t>
+              <a:t>Use the assignment to test whether you can explain the concept, apply it to a realistic public health situation, and identify what would need review before the work moves forward.</a:t>
             </a:r>
             <a:endParaRPr lang="en-US" sz="1320" dirty="0"/>
           </a:p>
@@ -11643,11 +11643,11 @@
         <p:spPr>
           <a:xfrm>
             <a:off x="7635240" y="1325880"/>
-            <a:ext cx="3474720" cy="1325880"/>
+            <a:ext cx="3474720" cy="1207008"/>
           </a:xfrm>
           <a:prstGeom prst="roundRect">
             <a:avLst>
-              <a:gd name="adj" fmla="val 8276"/>
+              <a:gd name="adj" fmla="val 9091"/>
             </a:avLst>
           </a:prstGeom>
           <a:solidFill>
@@ -11709,7 +11709,7 @@
         <p:spPr>
           <a:xfrm>
             <a:off x="7799832" y="1801368"/>
-            <a:ext cx="3145536" cy="758952"/>
+            <a:ext cx="3145536" cy="640080"/>
           </a:xfrm>
           <a:prstGeom prst="rect">
             <a:avLst/>
@@ -11749,12 +11749,12 @@
         </p:nvSpPr>
         <p:spPr>
           <a:xfrm>
-            <a:off x="7635240" y="2788920"/>
-            <a:ext cx="3474720" cy="1536192"/>
+            <a:off x="7635240" y="2670048"/>
+            <a:ext cx="3474720" cy="1377086"/>
           </a:xfrm>
           <a:prstGeom prst="roundRect">
             <a:avLst>
-              <a:gd name="adj" fmla="val 7143"/>
+              <a:gd name="adj" fmla="val 7968"/>
             </a:avLst>
           </a:prstGeom>
           <a:solidFill>
@@ -11776,7 +11776,7 @@
         </p:nvSpPr>
         <p:spPr>
           <a:xfrm>
-            <a:off x="7799832" y="2935224"/>
+            <a:off x="7799832" y="2816352"/>
             <a:ext cx="3145536" cy="256032"/>
           </a:xfrm>
           <a:prstGeom prst="rect">
@@ -11815,8 +11815,8 @@
         </p:nvSpPr>
         <p:spPr>
           <a:xfrm>
-            <a:off x="7818120" y="3300984"/>
-            <a:ext cx="3090672" cy="877824"/>
+            <a:off x="7818120" y="3182112"/>
+            <a:ext cx="3090672" cy="718718"/>
           </a:xfrm>
           <a:prstGeom prst="rect">
             <a:avLst/>
@@ -11873,12 +11873,12 @@
         </p:nvSpPr>
         <p:spPr>
           <a:xfrm>
-            <a:off x="7635240" y="4498848"/>
-            <a:ext cx="3474720" cy="1143000"/>
+            <a:off x="7635240" y="4184294"/>
+            <a:ext cx="3474720" cy="1466698"/>
           </a:xfrm>
           <a:prstGeom prst="roundRect">
             <a:avLst>
-              <a:gd name="adj" fmla="val 9600"/>
+              <a:gd name="adj" fmla="val 7481"/>
             </a:avLst>
           </a:prstGeom>
           <a:solidFill>
@@ -11900,7 +11900,7 @@
         </p:nvSpPr>
         <p:spPr>
           <a:xfrm>
-            <a:off x="7799832" y="4645152"/>
+            <a:off x="7799832" y="4330598"/>
             <a:ext cx="3145536" cy="256032"/>
           </a:xfrm>
           <a:prstGeom prst="rect">
@@ -11939,8 +11939,8 @@
         </p:nvSpPr>
         <p:spPr>
           <a:xfrm>
-            <a:off x="7799832" y="4974336"/>
-            <a:ext cx="3145536" cy="576072"/>
+            <a:off x="7799832" y="4659782"/>
+            <a:ext cx="3145536" cy="899770"/>
           </a:xfrm>
           <a:prstGeom prst="rect">
             <a:avLst/>
@@ -11966,7 +11966,7 @@
                 <a:ea typeface="Aptos" pitchFamily="34" charset="-122"/>
                 <a:cs typeface="Aptos" pitchFamily="34" charset="-120"/>
               </a:rPr>
-              <a:t>Use the concept to clarify workflow changes, dependencies, staffing, procurement requirements, training needs, and.</a:t>
+              <a:t>Use the concept to clarify workflow changes, dependencies, staffing, procurement requirements, training needs, and implementation checkpoints.</a:t>
             </a:r>
             <a:endParaRPr lang="en-US" sz="1320" dirty="0"/>
           </a:p>
@@ -12301,11 +12301,11 @@
         <p:spPr>
           <a:xfrm>
             <a:off x="7635240" y="1325880"/>
-            <a:ext cx="3474720" cy="1325880"/>
+            <a:ext cx="3474720" cy="1207008"/>
           </a:xfrm>
           <a:prstGeom prst="roundRect">
             <a:avLst>
-              <a:gd name="adj" fmla="val 8276"/>
+              <a:gd name="adj" fmla="val 9091"/>
             </a:avLst>
           </a:prstGeom>
           <a:solidFill>
@@ -12367,7 +12367,7 @@
         <p:spPr>
           <a:xfrm>
             <a:off x="7799832" y="1801368"/>
-            <a:ext cx="3145536" cy="758952"/>
+            <a:ext cx="3145536" cy="640080"/>
           </a:xfrm>
           <a:prstGeom prst="rect">
             <a:avLst/>
@@ -12393,7 +12393,7 @@
                 <a:ea typeface="Aptos" pitchFamily="34" charset="-122"/>
                 <a:cs typeface="Aptos" pitchFamily="34" charset="-120"/>
               </a:rPr>
-              <a:t>Agency privacy, cybersecurity, data governance, procurement, and records management policies</a:t>
+              <a:t>Agency privacy, cybersecurity, data governance, procurement, and records management.</a:t>
             </a:r>
             <a:endParaRPr lang="en-US" sz="1320" dirty="0"/>
           </a:p>
@@ -12407,12 +12407,12 @@
         </p:nvSpPr>
         <p:spPr>
           <a:xfrm>
-            <a:off x="7635240" y="2788920"/>
-            <a:ext cx="3474720" cy="1536192"/>
+            <a:off x="7635240" y="2670048"/>
+            <a:ext cx="3474720" cy="1377086"/>
           </a:xfrm>
           <a:prstGeom prst="roundRect">
             <a:avLst>
-              <a:gd name="adj" fmla="val 7143"/>
+              <a:gd name="adj" fmla="val 7968"/>
             </a:avLst>
           </a:prstGeom>
           <a:solidFill>
@@ -12434,7 +12434,7 @@
         </p:nvSpPr>
         <p:spPr>
           <a:xfrm>
-            <a:off x="7799832" y="2935224"/>
+            <a:off x="7799832" y="2816352"/>
             <a:ext cx="3145536" cy="256032"/>
           </a:xfrm>
           <a:prstGeom prst="rect">
@@ -12473,8 +12473,8 @@
         </p:nvSpPr>
         <p:spPr>
           <a:xfrm>
-            <a:off x="7818120" y="3300984"/>
-            <a:ext cx="3090672" cy="877824"/>
+            <a:off x="7818120" y="3182112"/>
+            <a:ext cx="3090672" cy="718718"/>
           </a:xfrm>
           <a:prstGeom prst="rect">
             <a:avLst/>
@@ -12514,12 +12514,12 @@
         </p:nvSpPr>
         <p:spPr>
           <a:xfrm>
-            <a:off x="7635240" y="4498848"/>
-            <a:ext cx="3474720" cy="1143000"/>
+            <a:off x="7635240" y="4184294"/>
+            <a:ext cx="3474720" cy="1466698"/>
           </a:xfrm>
           <a:prstGeom prst="roundRect">
             <a:avLst>
-              <a:gd name="adj" fmla="val 9600"/>
+              <a:gd name="adj" fmla="val 7481"/>
             </a:avLst>
           </a:prstGeom>
           <a:solidFill>
@@ -12541,7 +12541,7 @@
         </p:nvSpPr>
         <p:spPr>
           <a:xfrm>
-            <a:off x="7799832" y="4645152"/>
+            <a:off x="7799832" y="4330598"/>
             <a:ext cx="3145536" cy="256032"/>
           </a:xfrm>
           <a:prstGeom prst="rect">
@@ -12580,8 +12580,8 @@
         </p:nvSpPr>
         <p:spPr>
           <a:xfrm>
-            <a:off x="7799832" y="4974336"/>
-            <a:ext cx="3145536" cy="576072"/>
+            <a:off x="7799832" y="4659782"/>
+            <a:ext cx="3145536" cy="899770"/>
           </a:xfrm>
           <a:prstGeom prst="rect">
             <a:avLst/>
@@ -12607,7 +12607,7 @@
                 <a:ea typeface="Aptos" pitchFamily="34" charset="-122"/>
                 <a:cs typeface="Aptos" pitchFamily="34" charset="-120"/>
               </a:rPr>
-              <a:t>Use the concept to clarify workflow changes, dependencies, staffing, procurement requirements, training needs, and.</a:t>
+              <a:t>Use the concept to clarify workflow changes, dependencies, staffing, procurement requirements, training needs, and implementation checkpoints.</a:t>
             </a:r>
             <a:endParaRPr lang="en-US" sz="1320" dirty="0"/>
           </a:p>
@@ -13085,7 +13085,7 @@
                 <a:ea typeface="Aptos" pitchFamily="34" charset="-122"/>
                 <a:cs typeface="Aptos" pitchFamily="34" charset="-120"/>
               </a:rPr>
-              <a:t>Use the related plays to identify decisions, participants, timing, approvals, and documentation needed for responsible.</a:t>
+              <a:t>Use the related plays to identify decisions, participants, timing, approvals, and documentation needed for responsible implementation.</a:t>
             </a:r>
             <a:endParaRPr lang="en-US" sz="1320" dirty="0"/>
           </a:p>
@@ -13704,7 +13704,7 @@
                 <a:ea typeface="Aptos" pitchFamily="34" charset="-122"/>
                 <a:cs typeface="Aptos" pitchFamily="34" charset="-120"/>
               </a:rPr>
-              <a:t>Use linked tools when your department needs a structured worksheet, template, checklist, review process, or.</a:t>
+              <a:t>Use linked tools when your department needs a structured worksheet, template, checklist, review process, or documentation artifact.</a:t>
             </a:r>
             <a:endParaRPr lang="en-US" sz="1320" dirty="0"/>
           </a:p>
@@ -14214,11 +14214,11 @@
         <p:spPr>
           <a:xfrm>
             <a:off x="7635240" y="1325880"/>
-            <a:ext cx="3474720" cy="1325880"/>
+            <a:ext cx="3474720" cy="1255471"/>
           </a:xfrm>
           <a:prstGeom prst="roundRect">
             <a:avLst>
-              <a:gd name="adj" fmla="val 8276"/>
+              <a:gd name="adj" fmla="val 8740"/>
             </a:avLst>
           </a:prstGeom>
           <a:solidFill>
@@ -14280,7 +14280,7 @@
         <p:spPr>
           <a:xfrm>
             <a:off x="7799832" y="1801368"/>
-            <a:ext cx="3145536" cy="758952"/>
+            <a:ext cx="3145536" cy="688543"/>
           </a:xfrm>
           <a:prstGeom prst="rect">
             <a:avLst/>
@@ -14320,12 +14320,12 @@
         </p:nvSpPr>
         <p:spPr>
           <a:xfrm>
-            <a:off x="7635240" y="2788920"/>
-            <a:ext cx="3474720" cy="1536192"/>
+            <a:off x="7635240" y="2718511"/>
+            <a:ext cx="3474720" cy="1328623"/>
           </a:xfrm>
           <a:prstGeom prst="roundRect">
             <a:avLst>
-              <a:gd name="adj" fmla="val 7143"/>
+              <a:gd name="adj" fmla="val 8259"/>
             </a:avLst>
           </a:prstGeom>
           <a:solidFill>
@@ -14347,7 +14347,7 @@
         </p:nvSpPr>
         <p:spPr>
           <a:xfrm>
-            <a:off x="7799832" y="2935224"/>
+            <a:off x="7799832" y="2864815"/>
             <a:ext cx="3145536" cy="256032"/>
           </a:xfrm>
           <a:prstGeom prst="rect">
@@ -14386,8 +14386,8 @@
         </p:nvSpPr>
         <p:spPr>
           <a:xfrm>
-            <a:off x="7818120" y="3300984"/>
-            <a:ext cx="3090672" cy="877824"/>
+            <a:off x="7818120" y="3230575"/>
+            <a:ext cx="3090672" cy="670255"/>
           </a:xfrm>
           <a:prstGeom prst="rect">
             <a:avLst/>
@@ -14461,12 +14461,12 @@
         </p:nvSpPr>
         <p:spPr>
           <a:xfrm>
-            <a:off x="7635240" y="4498848"/>
-            <a:ext cx="3474720" cy="1143000"/>
+            <a:off x="7635240" y="4184294"/>
+            <a:ext cx="3474720" cy="1466698"/>
           </a:xfrm>
           <a:prstGeom prst="roundRect">
             <a:avLst>
-              <a:gd name="adj" fmla="val 9600"/>
+              <a:gd name="adj" fmla="val 7481"/>
             </a:avLst>
           </a:prstGeom>
           <a:solidFill>
@@ -14488,7 +14488,7 @@
         </p:nvSpPr>
         <p:spPr>
           <a:xfrm>
-            <a:off x="7799832" y="4645152"/>
+            <a:off x="7799832" y="4330598"/>
             <a:ext cx="3145536" cy="256032"/>
           </a:xfrm>
           <a:prstGeom prst="rect">
@@ -14527,8 +14527,8 @@
         </p:nvSpPr>
         <p:spPr>
           <a:xfrm>
-            <a:off x="7799832" y="4974336"/>
-            <a:ext cx="3145536" cy="576072"/>
+            <a:off x="7799832" y="4659782"/>
+            <a:ext cx="3145536" cy="899770"/>
           </a:xfrm>
           <a:prstGeom prst="rect">
             <a:avLst/>
@@ -14554,7 +14554,7 @@
                 <a:ea typeface="Aptos" pitchFamily="34" charset="-122"/>
                 <a:cs typeface="Aptos" pitchFamily="34" charset="-120"/>
               </a:rPr>
-              <a:t>Use the assignment to test whether you can explain the concept, apply it to a realistic public health situation, and.</a:t>
+              <a:t>Use the assignment to test whether you can explain the concept, apply it to a realistic public health situation, and identify what would need review before the work moves forward.</a:t>
             </a:r>
             <a:endParaRPr lang="en-US" sz="1320" dirty="0"/>
           </a:p>
@@ -14889,11 +14889,11 @@
         <p:spPr>
           <a:xfrm>
             <a:off x="7635240" y="1325880"/>
-            <a:ext cx="3474720" cy="1325880"/>
+            <a:ext cx="3474720" cy="1255471"/>
           </a:xfrm>
           <a:prstGeom prst="roundRect">
             <a:avLst>
-              <a:gd name="adj" fmla="val 8276"/>
+              <a:gd name="adj" fmla="val 8740"/>
             </a:avLst>
           </a:prstGeom>
           <a:solidFill>
@@ -14955,7 +14955,7 @@
         <p:spPr>
           <a:xfrm>
             <a:off x="7799832" y="1801368"/>
-            <a:ext cx="3145536" cy="758952"/>
+            <a:ext cx="3145536" cy="688543"/>
           </a:xfrm>
           <a:prstGeom prst="rect">
             <a:avLst/>
@@ -14995,12 +14995,12 @@
         </p:nvSpPr>
         <p:spPr>
           <a:xfrm>
-            <a:off x="7635240" y="2788920"/>
-            <a:ext cx="3474720" cy="1536192"/>
+            <a:off x="7635240" y="2718511"/>
+            <a:ext cx="3474720" cy="1328623"/>
           </a:xfrm>
           <a:prstGeom prst="roundRect">
             <a:avLst>
-              <a:gd name="adj" fmla="val 7143"/>
+              <a:gd name="adj" fmla="val 8259"/>
             </a:avLst>
           </a:prstGeom>
           <a:solidFill>
@@ -15022,7 +15022,7 @@
         </p:nvSpPr>
         <p:spPr>
           <a:xfrm>
-            <a:off x="7799832" y="2935224"/>
+            <a:off x="7799832" y="2864815"/>
             <a:ext cx="3145536" cy="256032"/>
           </a:xfrm>
           <a:prstGeom prst="rect">
@@ -15061,8 +15061,8 @@
         </p:nvSpPr>
         <p:spPr>
           <a:xfrm>
-            <a:off x="7818120" y="3300984"/>
-            <a:ext cx="3090672" cy="877824"/>
+            <a:off x="7818120" y="3230575"/>
+            <a:ext cx="3090672" cy="670255"/>
           </a:xfrm>
           <a:prstGeom prst="rect">
             <a:avLst/>
@@ -15102,12 +15102,12 @@
         </p:nvSpPr>
         <p:spPr>
           <a:xfrm>
-            <a:off x="7635240" y="4498848"/>
-            <a:ext cx="3474720" cy="1143000"/>
+            <a:off x="7635240" y="4184294"/>
+            <a:ext cx="3474720" cy="1466698"/>
           </a:xfrm>
           <a:prstGeom prst="roundRect">
             <a:avLst>
-              <a:gd name="adj" fmla="val 9600"/>
+              <a:gd name="adj" fmla="val 7481"/>
             </a:avLst>
           </a:prstGeom>
           <a:solidFill>
@@ -15129,7 +15129,7 @@
         </p:nvSpPr>
         <p:spPr>
           <a:xfrm>
-            <a:off x="7799832" y="4645152"/>
+            <a:off x="7799832" y="4330598"/>
             <a:ext cx="3145536" cy="256032"/>
           </a:xfrm>
           <a:prstGeom prst="rect">
@@ -15168,8 +15168,8 @@
         </p:nvSpPr>
         <p:spPr>
           <a:xfrm>
-            <a:off x="7799832" y="4974336"/>
-            <a:ext cx="3145536" cy="576072"/>
+            <a:off x="7799832" y="4659782"/>
+            <a:ext cx="3145536" cy="899770"/>
           </a:xfrm>
           <a:prstGeom prst="rect">
             <a:avLst/>
@@ -15195,7 +15195,7 @@
                 <a:ea typeface="Aptos" pitchFamily="34" charset="-122"/>
                 <a:cs typeface="Aptos" pitchFamily="34" charset="-120"/>
               </a:rPr>
-              <a:t>Use the assignment to test whether you can explain the concept, apply it to a realistic public health situation, and.</a:t>
+              <a:t>Use the assignment to test whether you can explain the concept, apply it to a realistic public health situation, and identify what would need review before the work moves forward.</a:t>
             </a:r>
             <a:endParaRPr lang="en-US" sz="1320" dirty="0"/>
           </a:p>
@@ -15547,11 +15547,11 @@
         <p:spPr>
           <a:xfrm>
             <a:off x="7635240" y="1325880"/>
-            <a:ext cx="3474720" cy="1325880"/>
+            <a:ext cx="3474720" cy="1255471"/>
           </a:xfrm>
           <a:prstGeom prst="roundRect">
             <a:avLst>
-              <a:gd name="adj" fmla="val 8276"/>
+              <a:gd name="adj" fmla="val 8740"/>
             </a:avLst>
           </a:prstGeom>
           <a:solidFill>
@@ -15613,7 +15613,7 @@
         <p:spPr>
           <a:xfrm>
             <a:off x="7799832" y="1801368"/>
-            <a:ext cx="3145536" cy="758952"/>
+            <a:ext cx="3145536" cy="688543"/>
           </a:xfrm>
           <a:prstGeom prst="rect">
             <a:avLst/>
@@ -15653,12 +15653,12 @@
         </p:nvSpPr>
         <p:spPr>
           <a:xfrm>
-            <a:off x="7635240" y="2788920"/>
-            <a:ext cx="3474720" cy="1536192"/>
+            <a:off x="7635240" y="2718511"/>
+            <a:ext cx="3474720" cy="1328623"/>
           </a:xfrm>
           <a:prstGeom prst="roundRect">
             <a:avLst>
-              <a:gd name="adj" fmla="val 7143"/>
+              <a:gd name="adj" fmla="val 8259"/>
             </a:avLst>
           </a:prstGeom>
           <a:solidFill>
@@ -15680,8 +15680,8 @@
         </p:nvSpPr>
         <p:spPr>
           <a:xfrm>
-            <a:off x="7799832" y="2935224"/>
-            <a:ext cx="3145536" cy="256032"/>
+            <a:off x="7799832" y="2846527"/>
+            <a:ext cx="3145536" cy="237744"/>
           </a:xfrm>
           <a:prstGeom prst="rect">
             <a:avLst/>
@@ -15697,7 +15697,7 @@
               <a:buNone/>
             </a:pPr>
             <a:r>
-              <a:rPr lang="en-US" sz="1300" b="1" dirty="0">
+              <a:rPr lang="en-US" sz="1250" b="1" dirty="0">
                 <a:solidFill>
                   <a:srgbClr val="0068B7"/>
                 </a:solidFill>
@@ -15705,84 +15705,317 @@
                 <a:ea typeface="Aptos" pitchFamily="34" charset="-122"/>
                 <a:cs typeface="Aptos" pitchFamily="34" charset="-120"/>
               </a:rPr>
-              <a:t>Concept checkpoints</a:t>
-            </a:r>
-            <a:endParaRPr lang="en-US" sz="1300" dirty="0"/>
-          </a:p>
-        </p:txBody>
-      </p:sp>
-      <p:sp>
-        <p:nvSpPr>
-          <p:cNvPr id="15" name="Text 13"/>
-          <p:cNvSpPr/>
-          <p:nvPr/>
-        </p:nvSpPr>
-        <p:spPr>
-          <a:xfrm>
-            <a:off x="7818120" y="3300984"/>
-            <a:ext cx="3090672" cy="877824"/>
-          </a:xfrm>
-          <a:prstGeom prst="rect">
-            <a:avLst/>
-          </a:prstGeom>
-          <a:noFill/>
-          <a:ln/>
-        </p:spPr>
-        <p:txBody>
-          <a:bodyPr wrap="square" lIns="508" tIns="508" rIns="508" bIns="508" rtlCol="0" anchor="t">
+              <a:t>Implementation path</a:t>
+            </a:r>
+            <a:endParaRPr lang="en-US" sz="1250" dirty="0"/>
+          </a:p>
+        </p:txBody>
+      </p:sp>
+      <p:sp>
+        <p:nvSpPr>
+          <p:cNvPr id="15" name="Shape 13"/>
+          <p:cNvSpPr/>
+          <p:nvPr/>
+        </p:nvSpPr>
+        <p:spPr>
+          <a:xfrm>
+            <a:off x="8763000" y="3399739"/>
+            <a:ext cx="164592" cy="0"/>
+          </a:xfrm>
+          <a:prstGeom prst="line">
+            <a:avLst/>
+          </a:prstGeom>
+          <a:noFill/>
+          <a:ln w="15240">
+            <a:solidFill>
+              <a:srgbClr val="8ABBD8"/>
+            </a:solidFill>
+            <a:prstDash val="solid"/>
+          </a:ln>
+        </p:spPr>
+      </p:sp>
+      <p:sp>
+        <p:nvSpPr>
+          <p:cNvPr id="16" name="Shape 14"/>
+          <p:cNvSpPr/>
+          <p:nvPr/>
+        </p:nvSpPr>
+        <p:spPr>
+          <a:xfrm>
+            <a:off x="7872984" y="3248863"/>
+            <a:ext cx="890016" cy="301752"/>
+          </a:xfrm>
+          <a:prstGeom prst="roundRect">
+            <a:avLst>
+              <a:gd name="adj" fmla="val 24242"/>
+            </a:avLst>
+          </a:prstGeom>
+          <a:solidFill>
+            <a:srgbClr val="0068B7"/>
+          </a:solidFill>
+          <a:ln w="12700">
+            <a:solidFill>
+              <a:srgbClr val="0068B7"/>
+            </a:solidFill>
+            <a:prstDash val="solid"/>
+          </a:ln>
+        </p:spPr>
+      </p:sp>
+      <p:sp>
+        <p:nvSpPr>
+          <p:cNvPr id="17" name="Text 15"/>
+          <p:cNvSpPr/>
+          <p:nvPr/>
+        </p:nvSpPr>
+        <p:spPr>
+          <a:xfrm>
+            <a:off x="7909560" y="3322015"/>
+            <a:ext cx="816864" cy="146304"/>
+          </a:xfrm>
+          <a:prstGeom prst="rect">
+            <a:avLst/>
+          </a:prstGeom>
+          <a:noFill/>
+          <a:ln/>
+        </p:spPr>
+        <p:txBody>
+          <a:bodyPr wrap="square" lIns="0" tIns="0" rIns="0" bIns="0" rtlCol="0" anchor="ctr">
             <a:normAutofit/>
           </a:bodyPr>
           <a:lstStyle/>
           <a:p>
-            <a:pPr indent="0" marL="0">
-              <a:buNone/>
-            </a:pPr>
-            <a:r>
-              <a:rPr lang="en-US" sz="1220" dirty="0">
-                <a:solidFill>
-                  <a:srgbClr val="17364A"/>
-                </a:solidFill>
-                <a:latin typeface="Aptos" pitchFamily="34" charset="0"/>
-                <a:ea typeface="Aptos" pitchFamily="34" charset="-122"/>
-                <a:cs typeface="Aptos" pitchFamily="34" charset="-120"/>
-              </a:rPr>
-              <a:t>AI procurement requires stronger requirements than ordinary.</a:t>
-            </a:r>
-            <a:endParaRPr lang="en-US" sz="1220" dirty="0"/>
-          </a:p>
-          <a:p>
-            <a:pPr indent="0" marL="0">
-              <a:buNone/>
-            </a:pPr>
-            <a:r>
-              <a:rPr lang="en-US" sz="1220" dirty="0">
-                <a:solidFill>
-                  <a:srgbClr val="17364A"/>
-                </a:solidFill>
-                <a:latin typeface="Aptos" pitchFamily="34" charset="0"/>
-                <a:ea typeface="Aptos" pitchFamily="34" charset="-122"/>
-                <a:cs typeface="Aptos" pitchFamily="34" charset="-120"/>
-              </a:rPr>
-              <a:t>This module teaches learners how to write requirements that can be.</a:t>
-            </a:r>
-            <a:endParaRPr lang="en-US" sz="1220" dirty="0"/>
-          </a:p>
-        </p:txBody>
-      </p:sp>
-      <p:sp>
-        <p:nvSpPr>
-          <p:cNvPr id="16" name="Shape 14"/>
-          <p:cNvSpPr/>
-          <p:nvPr/>
-        </p:nvSpPr>
-        <p:spPr>
-          <a:xfrm>
-            <a:off x="7635240" y="4498848"/>
-            <a:ext cx="3474720" cy="1143000"/>
+            <a:pPr algn="ctr" indent="0" marL="0">
+              <a:buNone/>
+            </a:pPr>
+            <a:r>
+              <a:rPr lang="en-US" sz="880" b="1" dirty="0">
+                <a:solidFill>
+                  <a:srgbClr val="FFFFFF"/>
+                </a:solidFill>
+                <a:latin typeface="Aptos" pitchFamily="34" charset="0"/>
+                <a:ea typeface="Aptos" pitchFamily="34" charset="-122"/>
+                <a:cs typeface="Aptos" pitchFamily="34" charset="-120"/>
+              </a:rPr>
+              <a:t>Need</a:t>
+            </a:r>
+            <a:endParaRPr lang="en-US" sz="880" dirty="0"/>
+          </a:p>
+        </p:txBody>
+      </p:sp>
+      <p:sp>
+        <p:nvSpPr>
+          <p:cNvPr id="18" name="Shape 16"/>
+          <p:cNvSpPr/>
+          <p:nvPr/>
+        </p:nvSpPr>
+        <p:spPr>
+          <a:xfrm>
+            <a:off x="9817608" y="3399739"/>
+            <a:ext cx="164592" cy="0"/>
+          </a:xfrm>
+          <a:prstGeom prst="line">
+            <a:avLst/>
+          </a:prstGeom>
+          <a:noFill/>
+          <a:ln w="15240">
+            <a:solidFill>
+              <a:srgbClr val="8ABBD8"/>
+            </a:solidFill>
+            <a:prstDash val="solid"/>
+          </a:ln>
+        </p:spPr>
+      </p:sp>
+      <p:sp>
+        <p:nvSpPr>
+          <p:cNvPr id="19" name="Shape 17"/>
+          <p:cNvSpPr/>
+          <p:nvPr/>
+        </p:nvSpPr>
+        <p:spPr>
+          <a:xfrm>
+            <a:off x="8927592" y="3248863"/>
+            <a:ext cx="890016" cy="301752"/>
           </a:xfrm>
           <a:prstGeom prst="roundRect">
             <a:avLst>
-              <a:gd name="adj" fmla="val 9600"/>
+              <a:gd name="adj" fmla="val 24242"/>
+            </a:avLst>
+          </a:prstGeom>
+          <a:solidFill>
+            <a:srgbClr val="2F8A28"/>
+          </a:solidFill>
+          <a:ln w="12700">
+            <a:solidFill>
+              <a:srgbClr val="2F8A28"/>
+            </a:solidFill>
+            <a:prstDash val="solid"/>
+          </a:ln>
+        </p:spPr>
+      </p:sp>
+      <p:sp>
+        <p:nvSpPr>
+          <p:cNvPr id="20" name="Text 18"/>
+          <p:cNvSpPr/>
+          <p:nvPr/>
+        </p:nvSpPr>
+        <p:spPr>
+          <a:xfrm>
+            <a:off x="8964168" y="3322015"/>
+            <a:ext cx="816864" cy="146304"/>
+          </a:xfrm>
+          <a:prstGeom prst="rect">
+            <a:avLst/>
+          </a:prstGeom>
+          <a:noFill/>
+          <a:ln/>
+        </p:spPr>
+        <p:txBody>
+          <a:bodyPr wrap="square" lIns="0" tIns="0" rIns="0" bIns="0" rtlCol="0" anchor="ctr">
+            <a:normAutofit/>
+          </a:bodyPr>
+          <a:lstStyle/>
+          <a:p>
+            <a:pPr algn="ctr" indent="0" marL="0">
+              <a:buNone/>
+            </a:pPr>
+            <a:r>
+              <a:rPr lang="en-US" sz="880" b="1" dirty="0">
+                <a:solidFill>
+                  <a:srgbClr val="FFFFFF"/>
+                </a:solidFill>
+                <a:latin typeface="Aptos" pitchFamily="34" charset="0"/>
+                <a:ea typeface="Aptos" pitchFamily="34" charset="-122"/>
+                <a:cs typeface="Aptos" pitchFamily="34" charset="-120"/>
+              </a:rPr>
+              <a:t>Build</a:t>
+            </a:r>
+            <a:endParaRPr lang="en-US" sz="880" dirty="0"/>
+          </a:p>
+        </p:txBody>
+      </p:sp>
+      <p:sp>
+        <p:nvSpPr>
+          <p:cNvPr id="21" name="Shape 19"/>
+          <p:cNvSpPr/>
+          <p:nvPr/>
+        </p:nvSpPr>
+        <p:spPr>
+          <a:xfrm>
+            <a:off x="9982200" y="3248863"/>
+            <a:ext cx="890016" cy="301752"/>
+          </a:xfrm>
+          <a:prstGeom prst="roundRect">
+            <a:avLst>
+              <a:gd name="adj" fmla="val 24242"/>
+            </a:avLst>
+          </a:prstGeom>
+          <a:solidFill>
+            <a:srgbClr val="6A4CA3"/>
+          </a:solidFill>
+          <a:ln w="12700">
+            <a:solidFill>
+              <a:srgbClr val="6A4CA3"/>
+            </a:solidFill>
+            <a:prstDash val="solid"/>
+          </a:ln>
+        </p:spPr>
+      </p:sp>
+      <p:sp>
+        <p:nvSpPr>
+          <p:cNvPr id="22" name="Text 20"/>
+          <p:cNvSpPr/>
+          <p:nvPr/>
+        </p:nvSpPr>
+        <p:spPr>
+          <a:xfrm>
+            <a:off x="10018776" y="3322015"/>
+            <a:ext cx="816864" cy="146304"/>
+          </a:xfrm>
+          <a:prstGeom prst="rect">
+            <a:avLst/>
+          </a:prstGeom>
+          <a:noFill/>
+          <a:ln/>
+        </p:spPr>
+        <p:txBody>
+          <a:bodyPr wrap="square" lIns="0" tIns="0" rIns="0" bIns="0" rtlCol="0" anchor="ctr">
+            <a:normAutofit/>
+          </a:bodyPr>
+          <a:lstStyle/>
+          <a:p>
+            <a:pPr algn="ctr" indent="0" marL="0">
+              <a:buNone/>
+            </a:pPr>
+            <a:r>
+              <a:rPr lang="en-US" sz="880" b="1" dirty="0">
+                <a:solidFill>
+                  <a:srgbClr val="FFFFFF"/>
+                </a:solidFill>
+                <a:latin typeface="Aptos" pitchFamily="34" charset="0"/>
+                <a:ea typeface="Aptos" pitchFamily="34" charset="-122"/>
+                <a:cs typeface="Aptos" pitchFamily="34" charset="-120"/>
+              </a:rPr>
+              <a:t>Adopt</a:t>
+            </a:r>
+            <a:endParaRPr lang="en-US" sz="880" dirty="0"/>
+          </a:p>
+        </p:txBody>
+      </p:sp>
+      <p:sp>
+        <p:nvSpPr>
+          <p:cNvPr id="23" name="Text 21"/>
+          <p:cNvSpPr/>
+          <p:nvPr/>
+        </p:nvSpPr>
+        <p:spPr>
+          <a:xfrm>
+            <a:off x="7854696" y="3742639"/>
+            <a:ext cx="3035808" cy="158191"/>
+          </a:xfrm>
+          <a:prstGeom prst="rect">
+            <a:avLst/>
+          </a:prstGeom>
+          <a:noFill/>
+          <a:ln/>
+        </p:spPr>
+        <p:txBody>
+          <a:bodyPr wrap="square" lIns="254" tIns="254" rIns="254" bIns="254" rtlCol="0" anchor="t">
+            <a:normAutofit/>
+          </a:bodyPr>
+          <a:lstStyle/>
+          <a:p>
+            <a:pPr indent="0" marL="0">
+              <a:buNone/>
+            </a:pPr>
+            <a:r>
+              <a:rPr lang="en-US" sz="1120" dirty="0">
+                <a:solidFill>
+                  <a:srgbClr val="17364A"/>
+                </a:solidFill>
+                <a:latin typeface="Aptos" pitchFamily="34" charset="0"/>
+                <a:ea typeface="Aptos" pitchFamily="34" charset="-122"/>
+                <a:cs typeface="Aptos" pitchFamily="34" charset="-120"/>
+              </a:rPr>
+              <a:t>Implementation work should make dependencies, approvals, training, and sustainment visible before launch.</a:t>
+            </a:r>
+            <a:endParaRPr lang="en-US" sz="1120" dirty="0"/>
+          </a:p>
+        </p:txBody>
+      </p:sp>
+      <p:sp>
+        <p:nvSpPr>
+          <p:cNvPr id="24" name="Shape 22"/>
+          <p:cNvSpPr/>
+          <p:nvPr/>
+        </p:nvSpPr>
+        <p:spPr>
+          <a:xfrm>
+            <a:off x="7635240" y="4184294"/>
+            <a:ext cx="3474720" cy="1466698"/>
+          </a:xfrm>
+          <a:prstGeom prst="roundRect">
+            <a:avLst>
+              <a:gd name="adj" fmla="val 7481"/>
             </a:avLst>
           </a:prstGeom>
           <a:solidFill>
@@ -15798,13 +16031,13 @@
       </p:sp>
       <p:sp>
         <p:nvSpPr>
-          <p:cNvPr id="17" name="Text 15"/>
-          <p:cNvSpPr/>
-          <p:nvPr/>
-        </p:nvSpPr>
-        <p:spPr>
-          <a:xfrm>
-            <a:off x="7799832" y="4645152"/>
+          <p:cNvPr id="25" name="Text 23"/>
+          <p:cNvSpPr/>
+          <p:nvPr/>
+        </p:nvSpPr>
+        <p:spPr>
+          <a:xfrm>
+            <a:off x="7799832" y="4330598"/>
             <a:ext cx="3145536" cy="256032"/>
           </a:xfrm>
           <a:prstGeom prst="rect">
@@ -15837,14 +16070,14 @@
       </p:sp>
       <p:sp>
         <p:nvSpPr>
-          <p:cNvPr id="18" name="Text 16"/>
-          <p:cNvSpPr/>
-          <p:nvPr/>
-        </p:nvSpPr>
-        <p:spPr>
-          <a:xfrm>
-            <a:off x="7799832" y="4974336"/>
-            <a:ext cx="3145536" cy="576072"/>
+          <p:cNvPr id="26" name="Text 24"/>
+          <p:cNvSpPr/>
+          <p:nvPr/>
+        </p:nvSpPr>
+        <p:spPr>
+          <a:xfrm>
+            <a:off x="7799832" y="4659782"/>
+            <a:ext cx="3145536" cy="899770"/>
           </a:xfrm>
           <a:prstGeom prst="rect">
             <a:avLst/>
@@ -15870,7 +16103,7 @@
                 <a:ea typeface="Aptos" pitchFamily="34" charset="-122"/>
                 <a:cs typeface="Aptos" pitchFamily="34" charset="-120"/>
               </a:rPr>
-              <a:t>Use the concept to clarify workflow changes, dependencies, staffing, procurement requirements, training needs, and.</a:t>
+              <a:t>Use the concept to clarify workflow changes, dependencies, staffing, procurement requirements, training needs, and implementation checkpoints.</a:t>
             </a:r>
             <a:endParaRPr lang="en-US" sz="1320" dirty="0"/>
           </a:p>
@@ -16239,11 +16472,11 @@
         <p:spPr>
           <a:xfrm>
             <a:off x="7635240" y="1325880"/>
-            <a:ext cx="3474720" cy="1325880"/>
+            <a:ext cx="3474720" cy="1207008"/>
           </a:xfrm>
           <a:prstGeom prst="roundRect">
             <a:avLst>
-              <a:gd name="adj" fmla="val 8276"/>
+              <a:gd name="adj" fmla="val 9091"/>
             </a:avLst>
           </a:prstGeom>
           <a:solidFill>
@@ -16305,7 +16538,7 @@
         <p:spPr>
           <a:xfrm>
             <a:off x="7799832" y="1801368"/>
-            <a:ext cx="3145536" cy="758952"/>
+            <a:ext cx="3145536" cy="640080"/>
           </a:xfrm>
           <a:prstGeom prst="rect">
             <a:avLst/>
@@ -16331,7 +16564,7 @@
                 <a:ea typeface="Aptos" pitchFamily="34" charset="-122"/>
                 <a:cs typeface="Aptos" pitchFamily="34" charset="-120"/>
               </a:rPr>
-              <a:t>This module provides national-level training guidance for public health agencies and partners.</a:t>
+              <a:t>This module provides national-level training guidance for public health agencies and.</a:t>
             </a:r>
             <a:endParaRPr lang="en-US" sz="1320" dirty="0"/>
           </a:p>
@@ -16345,12 +16578,12 @@
         </p:nvSpPr>
         <p:spPr>
           <a:xfrm>
-            <a:off x="7635240" y="2788920"/>
-            <a:ext cx="3474720" cy="1536192"/>
+            <a:off x="7635240" y="2670048"/>
+            <a:ext cx="3474720" cy="1377086"/>
           </a:xfrm>
           <a:prstGeom prst="roundRect">
             <a:avLst>
-              <a:gd name="adj" fmla="val 7143"/>
+              <a:gd name="adj" fmla="val 7968"/>
             </a:avLst>
           </a:prstGeom>
           <a:solidFill>
@@ -16372,8 +16605,8 @@
         </p:nvSpPr>
         <p:spPr>
           <a:xfrm>
-            <a:off x="7799832" y="2935224"/>
-            <a:ext cx="3145536" cy="256032"/>
+            <a:off x="7799832" y="2798064"/>
+            <a:ext cx="3145536" cy="237744"/>
           </a:xfrm>
           <a:prstGeom prst="rect">
             <a:avLst/>
@@ -16389,7 +16622,7 @@
               <a:buNone/>
             </a:pPr>
             <a:r>
-              <a:rPr lang="en-US" sz="1300" b="1" dirty="0">
+              <a:rPr lang="en-US" sz="1250" b="1" dirty="0">
                 <a:solidFill>
                   <a:srgbClr val="0068B7"/>
                 </a:solidFill>
@@ -16397,101 +16630,317 @@
                 <a:ea typeface="Aptos" pitchFamily="34" charset="-122"/>
                 <a:cs typeface="Aptos" pitchFamily="34" charset="-120"/>
               </a:rPr>
-              <a:t>Concept checkpoints</a:t>
-            </a:r>
-            <a:endParaRPr lang="en-US" sz="1300" dirty="0"/>
-          </a:p>
-        </p:txBody>
-      </p:sp>
-      <p:sp>
-        <p:nvSpPr>
-          <p:cNvPr id="15" name="Text 13"/>
-          <p:cNvSpPr/>
-          <p:nvPr/>
-        </p:nvSpPr>
-        <p:spPr>
-          <a:xfrm>
-            <a:off x="7818120" y="3300984"/>
-            <a:ext cx="3090672" cy="877824"/>
-          </a:xfrm>
-          <a:prstGeom prst="rect">
-            <a:avLst/>
-          </a:prstGeom>
-          <a:noFill/>
-          <a:ln/>
-        </p:spPr>
-        <p:txBody>
-          <a:bodyPr wrap="square" lIns="508" tIns="508" rIns="508" bIns="508" rtlCol="0" anchor="t">
+              <a:t>Governance pathway</a:t>
+            </a:r>
+            <a:endParaRPr lang="en-US" sz="1250" dirty="0"/>
+          </a:p>
+        </p:txBody>
+      </p:sp>
+      <p:sp>
+        <p:nvSpPr>
+          <p:cNvPr id="15" name="Shape 13"/>
+          <p:cNvSpPr/>
+          <p:nvPr/>
+        </p:nvSpPr>
+        <p:spPr>
+          <a:xfrm>
+            <a:off x="8763000" y="3351276"/>
+            <a:ext cx="164592" cy="0"/>
+          </a:xfrm>
+          <a:prstGeom prst="line">
+            <a:avLst/>
+          </a:prstGeom>
+          <a:noFill/>
+          <a:ln w="15240">
+            <a:solidFill>
+              <a:srgbClr val="8ABBD8"/>
+            </a:solidFill>
+            <a:prstDash val="solid"/>
+          </a:ln>
+        </p:spPr>
+      </p:sp>
+      <p:sp>
+        <p:nvSpPr>
+          <p:cNvPr id="16" name="Shape 14"/>
+          <p:cNvSpPr/>
+          <p:nvPr/>
+        </p:nvSpPr>
+        <p:spPr>
+          <a:xfrm>
+            <a:off x="7872984" y="3200400"/>
+            <a:ext cx="890016" cy="301752"/>
+          </a:xfrm>
+          <a:prstGeom prst="roundRect">
+            <a:avLst>
+              <a:gd name="adj" fmla="val 24242"/>
+            </a:avLst>
+          </a:prstGeom>
+          <a:solidFill>
+            <a:srgbClr val="0068B7"/>
+          </a:solidFill>
+          <a:ln w="12700">
+            <a:solidFill>
+              <a:srgbClr val="0068B7"/>
+            </a:solidFill>
+            <a:prstDash val="solid"/>
+          </a:ln>
+        </p:spPr>
+      </p:sp>
+      <p:sp>
+        <p:nvSpPr>
+          <p:cNvPr id="17" name="Text 15"/>
+          <p:cNvSpPr/>
+          <p:nvPr/>
+        </p:nvSpPr>
+        <p:spPr>
+          <a:xfrm>
+            <a:off x="7909560" y="3273552"/>
+            <a:ext cx="816864" cy="146304"/>
+          </a:xfrm>
+          <a:prstGeom prst="rect">
+            <a:avLst/>
+          </a:prstGeom>
+          <a:noFill/>
+          <a:ln/>
+        </p:spPr>
+        <p:txBody>
+          <a:bodyPr wrap="square" lIns="0" tIns="0" rIns="0" bIns="0" rtlCol="0" anchor="ctr">
             <a:normAutofit/>
           </a:bodyPr>
           <a:lstStyle/>
           <a:p>
-            <a:pPr indent="0" marL="0">
-              <a:buNone/>
-            </a:pPr>
-            <a:r>
-              <a:rPr lang="en-US" sz="1220" dirty="0">
-                <a:solidFill>
-                  <a:srgbClr val="17364A"/>
-                </a:solidFill>
-                <a:latin typeface="Aptos" pitchFamily="34" charset="0"/>
-                <a:ea typeface="Aptos" pitchFamily="34" charset="-122"/>
-                <a:cs typeface="Aptos" pitchFamily="34" charset="-120"/>
-              </a:rPr>
-              <a:t>It is not legal advice and does not replace review by agency legal.</a:t>
-            </a:r>
-            <a:endParaRPr lang="en-US" sz="1220" dirty="0"/>
-          </a:p>
-          <a:p>
-            <a:pPr indent="0" marL="0">
-              <a:buNone/>
-            </a:pPr>
-            <a:r>
-              <a:rPr lang="en-US" sz="1220" dirty="0">
-                <a:solidFill>
-                  <a:srgbClr val="17364A"/>
-                </a:solidFill>
-                <a:latin typeface="Aptos" pitchFamily="34" charset="0"/>
-                <a:ea typeface="Aptos" pitchFamily="34" charset="-122"/>
-                <a:cs typeface="Aptos" pitchFamily="34" charset="-120"/>
-              </a:rPr>
-              <a:t>Requirements may vary by state, locality, territory, Tribe,.</a:t>
-            </a:r>
-            <a:endParaRPr lang="en-US" sz="1220" dirty="0"/>
-          </a:p>
-          <a:p>
-            <a:pPr indent="0" marL="0">
-              <a:buNone/>
-            </a:pPr>
-            <a:r>
-              <a:rPr lang="en-US" sz="1220" dirty="0">
-                <a:solidFill>
-                  <a:srgbClr val="17364A"/>
-                </a:solidFill>
-                <a:latin typeface="Aptos" pitchFamily="34" charset="0"/>
-                <a:ea typeface="Aptos" pitchFamily="34" charset="-122"/>
-                <a:cs typeface="Aptos" pitchFamily="34" charset="-120"/>
-              </a:rPr>
-              <a:t>Learners should use this module to identify the issues that.</a:t>
-            </a:r>
-            <a:endParaRPr lang="en-US" sz="1220" dirty="0"/>
-          </a:p>
-        </p:txBody>
-      </p:sp>
-      <p:sp>
-        <p:nvSpPr>
-          <p:cNvPr id="16" name="Shape 14"/>
-          <p:cNvSpPr/>
-          <p:nvPr/>
-        </p:nvSpPr>
-        <p:spPr>
-          <a:xfrm>
-            <a:off x="7635240" y="4498848"/>
-            <a:ext cx="3474720" cy="1143000"/>
+            <a:pPr algn="ctr" indent="0" marL="0">
+              <a:buNone/>
+            </a:pPr>
+            <a:r>
+              <a:rPr lang="en-US" sz="880" b="1" dirty="0">
+                <a:solidFill>
+                  <a:srgbClr val="FFFFFF"/>
+                </a:solidFill>
+                <a:latin typeface="Aptos" pitchFamily="34" charset="0"/>
+                <a:ea typeface="Aptos" pitchFamily="34" charset="-122"/>
+                <a:cs typeface="Aptos" pitchFamily="34" charset="-120"/>
+              </a:rPr>
+              <a:t>Submit</a:t>
+            </a:r>
+            <a:endParaRPr lang="en-US" sz="880" dirty="0"/>
+          </a:p>
+        </p:txBody>
+      </p:sp>
+      <p:sp>
+        <p:nvSpPr>
+          <p:cNvPr id="18" name="Shape 16"/>
+          <p:cNvSpPr/>
+          <p:nvPr/>
+        </p:nvSpPr>
+        <p:spPr>
+          <a:xfrm>
+            <a:off x="9817608" y="3351276"/>
+            <a:ext cx="164592" cy="0"/>
+          </a:xfrm>
+          <a:prstGeom prst="line">
+            <a:avLst/>
+          </a:prstGeom>
+          <a:noFill/>
+          <a:ln w="15240">
+            <a:solidFill>
+              <a:srgbClr val="8ABBD8"/>
+            </a:solidFill>
+            <a:prstDash val="solid"/>
+          </a:ln>
+        </p:spPr>
+      </p:sp>
+      <p:sp>
+        <p:nvSpPr>
+          <p:cNvPr id="19" name="Shape 17"/>
+          <p:cNvSpPr/>
+          <p:nvPr/>
+        </p:nvSpPr>
+        <p:spPr>
+          <a:xfrm>
+            <a:off x="8927592" y="3200400"/>
+            <a:ext cx="890016" cy="301752"/>
           </a:xfrm>
           <a:prstGeom prst="roundRect">
             <a:avLst>
-              <a:gd name="adj" fmla="val 9600"/>
+              <a:gd name="adj" fmla="val 24242"/>
+            </a:avLst>
+          </a:prstGeom>
+          <a:solidFill>
+            <a:srgbClr val="2F8A28"/>
+          </a:solidFill>
+          <a:ln w="12700">
+            <a:solidFill>
+              <a:srgbClr val="2F8A28"/>
+            </a:solidFill>
+            <a:prstDash val="solid"/>
+          </a:ln>
+        </p:spPr>
+      </p:sp>
+      <p:sp>
+        <p:nvSpPr>
+          <p:cNvPr id="20" name="Text 18"/>
+          <p:cNvSpPr/>
+          <p:nvPr/>
+        </p:nvSpPr>
+        <p:spPr>
+          <a:xfrm>
+            <a:off x="8964168" y="3273552"/>
+            <a:ext cx="816864" cy="146304"/>
+          </a:xfrm>
+          <a:prstGeom prst="rect">
+            <a:avLst/>
+          </a:prstGeom>
+          <a:noFill/>
+          <a:ln/>
+        </p:spPr>
+        <p:txBody>
+          <a:bodyPr wrap="square" lIns="0" tIns="0" rIns="0" bIns="0" rtlCol="0" anchor="ctr">
+            <a:normAutofit/>
+          </a:bodyPr>
+          <a:lstStyle/>
+          <a:p>
+            <a:pPr algn="ctr" indent="0" marL="0">
+              <a:buNone/>
+            </a:pPr>
+            <a:r>
+              <a:rPr lang="en-US" sz="880" b="1" dirty="0">
+                <a:solidFill>
+                  <a:srgbClr val="FFFFFF"/>
+                </a:solidFill>
+                <a:latin typeface="Aptos" pitchFamily="34" charset="0"/>
+                <a:ea typeface="Aptos" pitchFamily="34" charset="-122"/>
+                <a:cs typeface="Aptos" pitchFamily="34" charset="-120"/>
+              </a:rPr>
+              <a:t>Review</a:t>
+            </a:r>
+            <a:endParaRPr lang="en-US" sz="880" dirty="0"/>
+          </a:p>
+        </p:txBody>
+      </p:sp>
+      <p:sp>
+        <p:nvSpPr>
+          <p:cNvPr id="21" name="Shape 19"/>
+          <p:cNvSpPr/>
+          <p:nvPr/>
+        </p:nvSpPr>
+        <p:spPr>
+          <a:xfrm>
+            <a:off x="9982200" y="3200400"/>
+            <a:ext cx="890016" cy="301752"/>
+          </a:xfrm>
+          <a:prstGeom prst="roundRect">
+            <a:avLst>
+              <a:gd name="adj" fmla="val 24242"/>
+            </a:avLst>
+          </a:prstGeom>
+          <a:solidFill>
+            <a:srgbClr val="6A4CA3"/>
+          </a:solidFill>
+          <a:ln w="12700">
+            <a:solidFill>
+              <a:srgbClr val="6A4CA3"/>
+            </a:solidFill>
+            <a:prstDash val="solid"/>
+          </a:ln>
+        </p:spPr>
+      </p:sp>
+      <p:sp>
+        <p:nvSpPr>
+          <p:cNvPr id="22" name="Text 20"/>
+          <p:cNvSpPr/>
+          <p:nvPr/>
+        </p:nvSpPr>
+        <p:spPr>
+          <a:xfrm>
+            <a:off x="10018776" y="3273552"/>
+            <a:ext cx="816864" cy="146304"/>
+          </a:xfrm>
+          <a:prstGeom prst="rect">
+            <a:avLst/>
+          </a:prstGeom>
+          <a:noFill/>
+          <a:ln/>
+        </p:spPr>
+        <p:txBody>
+          <a:bodyPr wrap="square" lIns="0" tIns="0" rIns="0" bIns="0" rtlCol="0" anchor="ctr">
+            <a:normAutofit/>
+          </a:bodyPr>
+          <a:lstStyle/>
+          <a:p>
+            <a:pPr algn="ctr" indent="0" marL="0">
+              <a:buNone/>
+            </a:pPr>
+            <a:r>
+              <a:rPr lang="en-US" sz="880" b="1" dirty="0">
+                <a:solidFill>
+                  <a:srgbClr val="FFFFFF"/>
+                </a:solidFill>
+                <a:latin typeface="Aptos" pitchFamily="34" charset="0"/>
+                <a:ea typeface="Aptos" pitchFamily="34" charset="-122"/>
+                <a:cs typeface="Aptos" pitchFamily="34" charset="-120"/>
+              </a:rPr>
+              <a:t>Oversee</a:t>
+            </a:r>
+            <a:endParaRPr lang="en-US" sz="880" dirty="0"/>
+          </a:p>
+        </p:txBody>
+      </p:sp>
+      <p:sp>
+        <p:nvSpPr>
+          <p:cNvPr id="23" name="Text 21"/>
+          <p:cNvSpPr/>
+          <p:nvPr/>
+        </p:nvSpPr>
+        <p:spPr>
+          <a:xfrm>
+            <a:off x="7854696" y="3694176"/>
+            <a:ext cx="3035808" cy="206654"/>
+          </a:xfrm>
+          <a:prstGeom prst="rect">
+            <a:avLst/>
+          </a:prstGeom>
+          <a:noFill/>
+          <a:ln/>
+        </p:spPr>
+        <p:txBody>
+          <a:bodyPr wrap="square" lIns="254" tIns="254" rIns="254" bIns="254" rtlCol="0" anchor="t">
+            <a:normAutofit/>
+          </a:bodyPr>
+          <a:lstStyle/>
+          <a:p>
+            <a:pPr indent="0" marL="0">
+              <a:buNone/>
+            </a:pPr>
+            <a:r>
+              <a:rPr lang="en-US" sz="1120" dirty="0">
+                <a:solidFill>
+                  <a:srgbClr val="17364A"/>
+                </a:solidFill>
+                <a:latin typeface="Aptos" pitchFamily="34" charset="0"/>
+                <a:ea typeface="Aptos" pitchFamily="34" charset="-122"/>
+                <a:cs typeface="Aptos" pitchFamily="34" charset="-120"/>
+              </a:rPr>
+              <a:t>A proposed AI use should move through documented review before it becomes an operational workflow.</a:t>
+            </a:r>
+            <a:endParaRPr lang="en-US" sz="1120" dirty="0"/>
+          </a:p>
+        </p:txBody>
+      </p:sp>
+      <p:sp>
+        <p:nvSpPr>
+          <p:cNvPr id="24" name="Shape 22"/>
+          <p:cNvSpPr/>
+          <p:nvPr/>
+        </p:nvSpPr>
+        <p:spPr>
+          <a:xfrm>
+            <a:off x="7635240" y="4184294"/>
+            <a:ext cx="3474720" cy="1466698"/>
+          </a:xfrm>
+          <a:prstGeom prst="roundRect">
+            <a:avLst>
+              <a:gd name="adj" fmla="val 7481"/>
             </a:avLst>
           </a:prstGeom>
           <a:solidFill>
@@ -16507,13 +16956,13 @@
       </p:sp>
       <p:sp>
         <p:nvSpPr>
-          <p:cNvPr id="17" name="Text 15"/>
-          <p:cNvSpPr/>
-          <p:nvPr/>
-        </p:nvSpPr>
-        <p:spPr>
-          <a:xfrm>
-            <a:off x="7799832" y="4645152"/>
+          <p:cNvPr id="25" name="Text 23"/>
+          <p:cNvSpPr/>
+          <p:nvPr/>
+        </p:nvSpPr>
+        <p:spPr>
+          <a:xfrm>
+            <a:off x="7799832" y="4330598"/>
             <a:ext cx="3145536" cy="256032"/>
           </a:xfrm>
           <a:prstGeom prst="rect">
@@ -16546,14 +16995,14 @@
       </p:sp>
       <p:sp>
         <p:nvSpPr>
-          <p:cNvPr id="18" name="Text 16"/>
-          <p:cNvSpPr/>
-          <p:nvPr/>
-        </p:nvSpPr>
-        <p:spPr>
-          <a:xfrm>
-            <a:off x="7799832" y="4974336"/>
-            <a:ext cx="3145536" cy="576072"/>
+          <p:cNvPr id="26" name="Text 24"/>
+          <p:cNvSpPr/>
+          <p:nvPr/>
+        </p:nvSpPr>
+        <p:spPr>
+          <a:xfrm>
+            <a:off x="7799832" y="4659782"/>
+            <a:ext cx="3145536" cy="899770"/>
           </a:xfrm>
           <a:prstGeom prst="rect">
             <a:avLst/>
@@ -16579,7 +17028,7 @@
                 <a:ea typeface="Aptos" pitchFamily="34" charset="-122"/>
                 <a:cs typeface="Aptos" pitchFamily="34" charset="-120"/>
               </a:rPr>
-              <a:t>Translate this concept into clear decision rights, review steps, documentation expectations, and escalation paths before.</a:t>
+              <a:t>Translate this concept into clear decision rights, review steps, documentation expectations, and escalation paths before an AI-supported workflow is approved.</a:t>
             </a:r>
             <a:endParaRPr lang="en-US" sz="1320" dirty="0"/>
           </a:p>
@@ -16948,11 +17397,11 @@
         <p:spPr>
           <a:xfrm>
             <a:off x="7635240" y="1325880"/>
-            <a:ext cx="3474720" cy="1325880"/>
+            <a:ext cx="3474720" cy="1255471"/>
           </a:xfrm>
           <a:prstGeom prst="roundRect">
             <a:avLst>
-              <a:gd name="adj" fmla="val 8276"/>
+              <a:gd name="adj" fmla="val 8740"/>
             </a:avLst>
           </a:prstGeom>
           <a:solidFill>
@@ -17014,7 +17463,7 @@
         <p:spPr>
           <a:xfrm>
             <a:off x="7799832" y="1801368"/>
-            <a:ext cx="3145536" cy="758952"/>
+            <a:ext cx="3145536" cy="688543"/>
           </a:xfrm>
           <a:prstGeom prst="rect">
             <a:avLst/>
@@ -17054,12 +17503,12 @@
         </p:nvSpPr>
         <p:spPr>
           <a:xfrm>
-            <a:off x="7635240" y="2788920"/>
-            <a:ext cx="3474720" cy="1536192"/>
+            <a:off x="7635240" y="2718511"/>
+            <a:ext cx="3474720" cy="1328623"/>
           </a:xfrm>
           <a:prstGeom prst="roundRect">
             <a:avLst>
-              <a:gd name="adj" fmla="val 7143"/>
+              <a:gd name="adj" fmla="val 8259"/>
             </a:avLst>
           </a:prstGeom>
           <a:solidFill>
@@ -17081,8 +17530,8 @@
         </p:nvSpPr>
         <p:spPr>
           <a:xfrm>
-            <a:off x="7799832" y="2935224"/>
-            <a:ext cx="3145536" cy="256032"/>
+            <a:off x="7799832" y="2846527"/>
+            <a:ext cx="3145536" cy="237744"/>
           </a:xfrm>
           <a:prstGeom prst="rect">
             <a:avLst/>
@@ -17098,7 +17547,7 @@
               <a:buNone/>
             </a:pPr>
             <a:r>
-              <a:rPr lang="en-US" sz="1300" b="1" dirty="0">
+              <a:rPr lang="en-US" sz="1250" b="1" dirty="0">
                 <a:solidFill>
                   <a:srgbClr val="0068B7"/>
                 </a:solidFill>
@@ -17106,101 +17555,317 @@
                 <a:ea typeface="Aptos" pitchFamily="34" charset="-122"/>
                 <a:cs typeface="Aptos" pitchFamily="34" charset="-120"/>
               </a:rPr>
-              <a:t>Concept checkpoints</a:t>
-            </a:r>
-            <a:endParaRPr lang="en-US" sz="1300" dirty="0"/>
-          </a:p>
-        </p:txBody>
-      </p:sp>
-      <p:sp>
-        <p:nvSpPr>
-          <p:cNvPr id="15" name="Text 13"/>
-          <p:cNvSpPr/>
-          <p:nvPr/>
-        </p:nvSpPr>
-        <p:spPr>
-          <a:xfrm>
-            <a:off x="7818120" y="3300984"/>
-            <a:ext cx="3090672" cy="877824"/>
-          </a:xfrm>
-          <a:prstGeom prst="rect">
-            <a:avLst/>
-          </a:prstGeom>
-          <a:noFill/>
-          <a:ln/>
-        </p:spPr>
-        <p:txBody>
-          <a:bodyPr wrap="square" lIns="508" tIns="508" rIns="508" bIns="508" rtlCol="0" anchor="t">
+              <a:t>Implementation path</a:t>
+            </a:r>
+            <a:endParaRPr lang="en-US" sz="1250" dirty="0"/>
+          </a:p>
+        </p:txBody>
+      </p:sp>
+      <p:sp>
+        <p:nvSpPr>
+          <p:cNvPr id="15" name="Shape 13"/>
+          <p:cNvSpPr/>
+          <p:nvPr/>
+        </p:nvSpPr>
+        <p:spPr>
+          <a:xfrm>
+            <a:off x="8763000" y="3399739"/>
+            <a:ext cx="164592" cy="0"/>
+          </a:xfrm>
+          <a:prstGeom prst="line">
+            <a:avLst/>
+          </a:prstGeom>
+          <a:noFill/>
+          <a:ln w="15240">
+            <a:solidFill>
+              <a:srgbClr val="8ABBD8"/>
+            </a:solidFill>
+            <a:prstDash val="solid"/>
+          </a:ln>
+        </p:spPr>
+      </p:sp>
+      <p:sp>
+        <p:nvSpPr>
+          <p:cNvPr id="16" name="Shape 14"/>
+          <p:cNvSpPr/>
+          <p:nvPr/>
+        </p:nvSpPr>
+        <p:spPr>
+          <a:xfrm>
+            <a:off x="7872984" y="3248863"/>
+            <a:ext cx="890016" cy="301752"/>
+          </a:xfrm>
+          <a:prstGeom prst="roundRect">
+            <a:avLst>
+              <a:gd name="adj" fmla="val 24242"/>
+            </a:avLst>
+          </a:prstGeom>
+          <a:solidFill>
+            <a:srgbClr val="0068B7"/>
+          </a:solidFill>
+          <a:ln w="12700">
+            <a:solidFill>
+              <a:srgbClr val="0068B7"/>
+            </a:solidFill>
+            <a:prstDash val="solid"/>
+          </a:ln>
+        </p:spPr>
+      </p:sp>
+      <p:sp>
+        <p:nvSpPr>
+          <p:cNvPr id="17" name="Text 15"/>
+          <p:cNvSpPr/>
+          <p:nvPr/>
+        </p:nvSpPr>
+        <p:spPr>
+          <a:xfrm>
+            <a:off x="7909560" y="3322015"/>
+            <a:ext cx="816864" cy="146304"/>
+          </a:xfrm>
+          <a:prstGeom prst="rect">
+            <a:avLst/>
+          </a:prstGeom>
+          <a:noFill/>
+          <a:ln/>
+        </p:spPr>
+        <p:txBody>
+          <a:bodyPr wrap="square" lIns="0" tIns="0" rIns="0" bIns="0" rtlCol="0" anchor="ctr">
             <a:normAutofit/>
           </a:bodyPr>
           <a:lstStyle/>
           <a:p>
-            <a:pPr indent="0" marL="0">
-              <a:buNone/>
-            </a:pPr>
-            <a:r>
-              <a:rPr lang="en-US" sz="1220" dirty="0">
-                <a:solidFill>
-                  <a:srgbClr val="17364A"/>
-                </a:solidFill>
-                <a:latin typeface="Aptos" pitchFamily="34" charset="0"/>
-                <a:ea typeface="Aptos" pitchFamily="34" charset="-122"/>
-                <a:cs typeface="Aptos" pitchFamily="34" charset="-120"/>
-              </a:rPr>
-              <a:t>Requirements Writing for AI Procurement and Implementation matters.</a:t>
-            </a:r>
-            <a:endParaRPr lang="en-US" sz="1220" dirty="0"/>
-          </a:p>
-          <a:p>
-            <a:pPr indent="0" marL="0">
-              <a:buNone/>
-            </a:pPr>
-            <a:r>
-              <a:rPr lang="en-US" sz="1220" dirty="0">
-                <a:solidFill>
-                  <a:srgbClr val="17364A"/>
-                </a:solidFill>
-                <a:latin typeface="Aptos" pitchFamily="34" charset="0"/>
-                <a:ea typeface="Aptos" pitchFamily="34" charset="-122"/>
-                <a:cs typeface="Aptos" pitchFamily="34" charset="-120"/>
-              </a:rPr>
-              <a:t>The topic also affects accountability.</a:t>
-            </a:r>
-            <a:endParaRPr lang="en-US" sz="1220" dirty="0"/>
-          </a:p>
-          <a:p>
-            <a:pPr indent="0" marL="0">
-              <a:buNone/>
-            </a:pPr>
-            <a:r>
-              <a:rPr lang="en-US" sz="1220" dirty="0">
-                <a:solidFill>
-                  <a:srgbClr val="17364A"/>
-                </a:solidFill>
-                <a:latin typeface="Aptos" pitchFamily="34" charset="0"/>
-                <a:ea typeface="Aptos" pitchFamily="34" charset="-122"/>
-                <a:cs typeface="Aptos" pitchFamily="34" charset="-120"/>
-              </a:rPr>
-              <a:t>Public health agencies must be able to explain how data are used,.</a:t>
-            </a:r>
-            <a:endParaRPr lang="en-US" sz="1220" dirty="0"/>
-          </a:p>
-        </p:txBody>
-      </p:sp>
-      <p:sp>
-        <p:nvSpPr>
-          <p:cNvPr id="16" name="Shape 14"/>
-          <p:cNvSpPr/>
-          <p:nvPr/>
-        </p:nvSpPr>
-        <p:spPr>
-          <a:xfrm>
-            <a:off x="7635240" y="4498848"/>
-            <a:ext cx="3474720" cy="1143000"/>
+            <a:pPr algn="ctr" indent="0" marL="0">
+              <a:buNone/>
+            </a:pPr>
+            <a:r>
+              <a:rPr lang="en-US" sz="880" b="1" dirty="0">
+                <a:solidFill>
+                  <a:srgbClr val="FFFFFF"/>
+                </a:solidFill>
+                <a:latin typeface="Aptos" pitchFamily="34" charset="0"/>
+                <a:ea typeface="Aptos" pitchFamily="34" charset="-122"/>
+                <a:cs typeface="Aptos" pitchFamily="34" charset="-120"/>
+              </a:rPr>
+              <a:t>Need</a:t>
+            </a:r>
+            <a:endParaRPr lang="en-US" sz="880" dirty="0"/>
+          </a:p>
+        </p:txBody>
+      </p:sp>
+      <p:sp>
+        <p:nvSpPr>
+          <p:cNvPr id="18" name="Shape 16"/>
+          <p:cNvSpPr/>
+          <p:nvPr/>
+        </p:nvSpPr>
+        <p:spPr>
+          <a:xfrm>
+            <a:off x="9817608" y="3399739"/>
+            <a:ext cx="164592" cy="0"/>
+          </a:xfrm>
+          <a:prstGeom prst="line">
+            <a:avLst/>
+          </a:prstGeom>
+          <a:noFill/>
+          <a:ln w="15240">
+            <a:solidFill>
+              <a:srgbClr val="8ABBD8"/>
+            </a:solidFill>
+            <a:prstDash val="solid"/>
+          </a:ln>
+        </p:spPr>
+      </p:sp>
+      <p:sp>
+        <p:nvSpPr>
+          <p:cNvPr id="19" name="Shape 17"/>
+          <p:cNvSpPr/>
+          <p:nvPr/>
+        </p:nvSpPr>
+        <p:spPr>
+          <a:xfrm>
+            <a:off x="8927592" y="3248863"/>
+            <a:ext cx="890016" cy="301752"/>
           </a:xfrm>
           <a:prstGeom prst="roundRect">
             <a:avLst>
-              <a:gd name="adj" fmla="val 9600"/>
+              <a:gd name="adj" fmla="val 24242"/>
+            </a:avLst>
+          </a:prstGeom>
+          <a:solidFill>
+            <a:srgbClr val="2F8A28"/>
+          </a:solidFill>
+          <a:ln w="12700">
+            <a:solidFill>
+              <a:srgbClr val="2F8A28"/>
+            </a:solidFill>
+            <a:prstDash val="solid"/>
+          </a:ln>
+        </p:spPr>
+      </p:sp>
+      <p:sp>
+        <p:nvSpPr>
+          <p:cNvPr id="20" name="Text 18"/>
+          <p:cNvSpPr/>
+          <p:nvPr/>
+        </p:nvSpPr>
+        <p:spPr>
+          <a:xfrm>
+            <a:off x="8964168" y="3322015"/>
+            <a:ext cx="816864" cy="146304"/>
+          </a:xfrm>
+          <a:prstGeom prst="rect">
+            <a:avLst/>
+          </a:prstGeom>
+          <a:noFill/>
+          <a:ln/>
+        </p:spPr>
+        <p:txBody>
+          <a:bodyPr wrap="square" lIns="0" tIns="0" rIns="0" bIns="0" rtlCol="0" anchor="ctr">
+            <a:normAutofit/>
+          </a:bodyPr>
+          <a:lstStyle/>
+          <a:p>
+            <a:pPr algn="ctr" indent="0" marL="0">
+              <a:buNone/>
+            </a:pPr>
+            <a:r>
+              <a:rPr lang="en-US" sz="880" b="1" dirty="0">
+                <a:solidFill>
+                  <a:srgbClr val="FFFFFF"/>
+                </a:solidFill>
+                <a:latin typeface="Aptos" pitchFamily="34" charset="0"/>
+                <a:ea typeface="Aptos" pitchFamily="34" charset="-122"/>
+                <a:cs typeface="Aptos" pitchFamily="34" charset="-120"/>
+              </a:rPr>
+              <a:t>Build</a:t>
+            </a:r>
+            <a:endParaRPr lang="en-US" sz="880" dirty="0"/>
+          </a:p>
+        </p:txBody>
+      </p:sp>
+      <p:sp>
+        <p:nvSpPr>
+          <p:cNvPr id="21" name="Shape 19"/>
+          <p:cNvSpPr/>
+          <p:nvPr/>
+        </p:nvSpPr>
+        <p:spPr>
+          <a:xfrm>
+            <a:off x="9982200" y="3248863"/>
+            <a:ext cx="890016" cy="301752"/>
+          </a:xfrm>
+          <a:prstGeom prst="roundRect">
+            <a:avLst>
+              <a:gd name="adj" fmla="val 24242"/>
+            </a:avLst>
+          </a:prstGeom>
+          <a:solidFill>
+            <a:srgbClr val="6A4CA3"/>
+          </a:solidFill>
+          <a:ln w="12700">
+            <a:solidFill>
+              <a:srgbClr val="6A4CA3"/>
+            </a:solidFill>
+            <a:prstDash val="solid"/>
+          </a:ln>
+        </p:spPr>
+      </p:sp>
+      <p:sp>
+        <p:nvSpPr>
+          <p:cNvPr id="22" name="Text 20"/>
+          <p:cNvSpPr/>
+          <p:nvPr/>
+        </p:nvSpPr>
+        <p:spPr>
+          <a:xfrm>
+            <a:off x="10018776" y="3322015"/>
+            <a:ext cx="816864" cy="146304"/>
+          </a:xfrm>
+          <a:prstGeom prst="rect">
+            <a:avLst/>
+          </a:prstGeom>
+          <a:noFill/>
+          <a:ln/>
+        </p:spPr>
+        <p:txBody>
+          <a:bodyPr wrap="square" lIns="0" tIns="0" rIns="0" bIns="0" rtlCol="0" anchor="ctr">
+            <a:normAutofit/>
+          </a:bodyPr>
+          <a:lstStyle/>
+          <a:p>
+            <a:pPr algn="ctr" indent="0" marL="0">
+              <a:buNone/>
+            </a:pPr>
+            <a:r>
+              <a:rPr lang="en-US" sz="880" b="1" dirty="0">
+                <a:solidFill>
+                  <a:srgbClr val="FFFFFF"/>
+                </a:solidFill>
+                <a:latin typeface="Aptos" pitchFamily="34" charset="0"/>
+                <a:ea typeface="Aptos" pitchFamily="34" charset="-122"/>
+                <a:cs typeface="Aptos" pitchFamily="34" charset="-120"/>
+              </a:rPr>
+              <a:t>Adopt</a:t>
+            </a:r>
+            <a:endParaRPr lang="en-US" sz="880" dirty="0"/>
+          </a:p>
+        </p:txBody>
+      </p:sp>
+      <p:sp>
+        <p:nvSpPr>
+          <p:cNvPr id="23" name="Text 21"/>
+          <p:cNvSpPr/>
+          <p:nvPr/>
+        </p:nvSpPr>
+        <p:spPr>
+          <a:xfrm>
+            <a:off x="7854696" y="3742639"/>
+            <a:ext cx="3035808" cy="158191"/>
+          </a:xfrm>
+          <a:prstGeom prst="rect">
+            <a:avLst/>
+          </a:prstGeom>
+          <a:noFill/>
+          <a:ln/>
+        </p:spPr>
+        <p:txBody>
+          <a:bodyPr wrap="square" lIns="254" tIns="254" rIns="254" bIns="254" rtlCol="0" anchor="t">
+            <a:normAutofit/>
+          </a:bodyPr>
+          <a:lstStyle/>
+          <a:p>
+            <a:pPr indent="0" marL="0">
+              <a:buNone/>
+            </a:pPr>
+            <a:r>
+              <a:rPr lang="en-US" sz="1120" dirty="0">
+                <a:solidFill>
+                  <a:srgbClr val="17364A"/>
+                </a:solidFill>
+                <a:latin typeface="Aptos" pitchFamily="34" charset="0"/>
+                <a:ea typeface="Aptos" pitchFamily="34" charset="-122"/>
+                <a:cs typeface="Aptos" pitchFamily="34" charset="-120"/>
+              </a:rPr>
+              <a:t>Implementation work should make dependencies, approvals, training, and sustainment visible before launch.</a:t>
+            </a:r>
+            <a:endParaRPr lang="en-US" sz="1120" dirty="0"/>
+          </a:p>
+        </p:txBody>
+      </p:sp>
+      <p:sp>
+        <p:nvSpPr>
+          <p:cNvPr id="24" name="Shape 22"/>
+          <p:cNvSpPr/>
+          <p:nvPr/>
+        </p:nvSpPr>
+        <p:spPr>
+          <a:xfrm>
+            <a:off x="7635240" y="4184294"/>
+            <a:ext cx="3474720" cy="1466698"/>
+          </a:xfrm>
+          <a:prstGeom prst="roundRect">
+            <a:avLst>
+              <a:gd name="adj" fmla="val 7481"/>
             </a:avLst>
           </a:prstGeom>
           <a:solidFill>
@@ -17216,13 +17881,13 @@
       </p:sp>
       <p:sp>
         <p:nvSpPr>
-          <p:cNvPr id="17" name="Text 15"/>
-          <p:cNvSpPr/>
-          <p:nvPr/>
-        </p:nvSpPr>
-        <p:spPr>
-          <a:xfrm>
-            <a:off x="7799832" y="4645152"/>
+          <p:cNvPr id="25" name="Text 23"/>
+          <p:cNvSpPr/>
+          <p:nvPr/>
+        </p:nvSpPr>
+        <p:spPr>
+          <a:xfrm>
+            <a:off x="7799832" y="4330598"/>
             <a:ext cx="3145536" cy="256032"/>
           </a:xfrm>
           <a:prstGeom prst="rect">
@@ -17255,14 +17920,14 @@
       </p:sp>
       <p:sp>
         <p:nvSpPr>
-          <p:cNvPr id="18" name="Text 16"/>
-          <p:cNvSpPr/>
-          <p:nvPr/>
-        </p:nvSpPr>
-        <p:spPr>
-          <a:xfrm>
-            <a:off x="7799832" y="4974336"/>
-            <a:ext cx="3145536" cy="576072"/>
+          <p:cNvPr id="26" name="Text 24"/>
+          <p:cNvSpPr/>
+          <p:nvPr/>
+        </p:nvSpPr>
+        <p:spPr>
+          <a:xfrm>
+            <a:off x="7799832" y="4659782"/>
+            <a:ext cx="3145536" cy="899770"/>
           </a:xfrm>
           <a:prstGeom prst="rect">
             <a:avLst/>
@@ -17288,7 +17953,7 @@
                 <a:ea typeface="Aptos" pitchFamily="34" charset="-122"/>
                 <a:cs typeface="Aptos" pitchFamily="34" charset="-120"/>
               </a:rPr>
-              <a:t>Use the concept to clarify workflow changes, dependencies, staffing, procurement requirements, training needs, and.</a:t>
+              <a:t>Use the concept to clarify workflow changes, dependencies, staffing, procurement requirements, training needs, and implementation checkpoints.</a:t>
             </a:r>
             <a:endParaRPr lang="en-US" sz="1320" dirty="0"/>
           </a:p>

--- a/downloads/presentations/modules/pmg-210.pptx
+++ b/downloads/presentations/modules/pmg-210.pptx
@@ -3336,8 +3336,8 @@
         </p:nvSpPr>
         <p:spPr>
           <a:xfrm>
-            <a:off x="868680" y="1508760"/>
-            <a:ext cx="6309360" cy="4160520"/>
+            <a:off x="822960" y="1463040"/>
+            <a:ext cx="6565392" cy="4343400"/>
           </a:xfrm>
           <a:prstGeom prst="rect">
             <a:avLst/>
@@ -3355,7 +3355,7 @@
               <a:buNone/>
             </a:pPr>
             <a:r>
-              <a:rPr lang="en-US" sz="2100" dirty="0">
+              <a:rPr lang="en-US" sz="1920" dirty="0">
                 <a:solidFill>
                   <a:srgbClr val="003A63"/>
                 </a:solidFill>
@@ -3363,16 +3363,16 @@
                 <a:ea typeface="Aptos" pitchFamily="34" charset="-122"/>
                 <a:cs typeface="Aptos" pitchFamily="34" charset="-120"/>
               </a:rPr>
-              <a:t>• A requirement is a clear statement of what a system must do or how it must perform.</a:t>
-            </a:r>
-            <a:endParaRPr lang="en-US" sz="2100" dirty="0"/>
-          </a:p>
-          <a:p>
-            <a:pPr indent="0" marL="0">
-              <a:buNone/>
-            </a:pPr>
-            <a:r>
-              <a:rPr lang="en-US" sz="2100" dirty="0">
+              <a:t>• A requirement is a clear statement of what a system must do or how it must.</a:t>
+            </a:r>
+            <a:endParaRPr lang="en-US" sz="1920" dirty="0"/>
+          </a:p>
+          <a:p>
+            <a:pPr indent="0" marL="0">
+              <a:buNone/>
+            </a:pPr>
+            <a:r>
+              <a:rPr lang="en-US" sz="1920" dirty="0">
                 <a:solidFill>
                   <a:srgbClr val="003A63"/>
                 </a:solidFill>
@@ -3380,16 +3380,16 @@
                 <a:ea typeface="Aptos" pitchFamily="34" charset="-122"/>
                 <a:cs typeface="Aptos" pitchFamily="34" charset="-120"/>
               </a:rPr>
-              <a:t>• AI requirements must cover functional capabilities, nonfunctional expectations, data handling,.</a:t>
-            </a:r>
-            <a:endParaRPr lang="en-US" sz="2100" dirty="0"/>
-          </a:p>
-          <a:p>
-            <a:pPr indent="0" marL="0">
-              <a:buNone/>
-            </a:pPr>
-            <a:r>
-              <a:rPr lang="en-US" sz="2100" dirty="0">
+              <a:t>• AI requirements must cover functional capabilities, nonfunctional.</a:t>
+            </a:r>
+            <a:endParaRPr lang="en-US" sz="1920" dirty="0"/>
+          </a:p>
+          <a:p>
+            <a:pPr indent="0" marL="0">
+              <a:buNone/>
+            </a:pPr>
+            <a:r>
+              <a:rPr lang="en-US" sz="1920" dirty="0">
                 <a:solidFill>
                   <a:srgbClr val="003A63"/>
                 </a:solidFill>
@@ -3397,9 +3397,9 @@
                 <a:ea typeface="Aptos" pitchFamily="34" charset="-122"/>
                 <a:cs typeface="Aptos" pitchFamily="34" charset="-120"/>
               </a:rPr>
-              <a:t>• Functional requirements describe what the tool must do, such as summarize a case report,.</a:t>
-            </a:r>
-            <a:endParaRPr lang="en-US" sz="2100" dirty="0"/>
+              <a:t>• Functional requirements describe what the tool must do, such as summarize a.</a:t>
+            </a:r>
+            <a:endParaRPr lang="en-US" sz="1920" dirty="0"/>
           </a:p>
         </p:txBody>
       </p:sp>
@@ -3411,12 +3411,12 @@
         </p:nvSpPr>
         <p:spPr>
           <a:xfrm>
-            <a:off x="7635240" y="1325880"/>
-            <a:ext cx="3474720" cy="1207008"/>
+            <a:off x="7543800" y="1325880"/>
+            <a:ext cx="3611880" cy="1261872"/>
           </a:xfrm>
           <a:prstGeom prst="roundRect">
             <a:avLst>
-              <a:gd name="adj" fmla="val 9091"/>
+              <a:gd name="adj" fmla="val 8696"/>
             </a:avLst>
           </a:prstGeom>
           <a:solidFill>
@@ -3438,8 +3438,8 @@
         </p:nvSpPr>
         <p:spPr>
           <a:xfrm>
-            <a:off x="7799832" y="1472184"/>
-            <a:ext cx="3145536" cy="256032"/>
+            <a:off x="7708392" y="1453896"/>
+            <a:ext cx="3282696" cy="228600"/>
           </a:xfrm>
           <a:prstGeom prst="rect">
             <a:avLst/>
@@ -3455,7 +3455,7 @@
               <a:buNone/>
             </a:pPr>
             <a:r>
-              <a:rPr lang="en-US" sz="1300" b="1" dirty="0">
+              <a:rPr lang="en-US" sz="1220" b="1" dirty="0">
                 <a:solidFill>
                   <a:srgbClr val="0068B7"/>
                 </a:solidFill>
@@ -3465,7 +3465,7 @@
               </a:rPr>
               <a:t>Implementation cue</a:t>
             </a:r>
-            <a:endParaRPr lang="en-US" sz="1300" dirty="0"/>
+            <a:endParaRPr lang="en-US" sz="1220" dirty="0"/>
           </a:p>
         </p:txBody>
       </p:sp>
@@ -3477,8 +3477,8 @@
         </p:nvSpPr>
         <p:spPr>
           <a:xfrm>
-            <a:off x="7799832" y="1801368"/>
-            <a:ext cx="3145536" cy="640080"/>
+            <a:off x="7708392" y="1764792"/>
+            <a:ext cx="3282696" cy="749808"/>
           </a:xfrm>
           <a:prstGeom prst="rect">
             <a:avLst/>
@@ -3496,7 +3496,7 @@
               <a:buNone/>
             </a:pPr>
             <a:r>
-              <a:rPr lang="en-US" sz="1320" dirty="0">
+              <a:rPr lang="en-US" sz="1220" dirty="0">
                 <a:solidFill>
                   <a:srgbClr val="17364A"/>
                 </a:solidFill>
@@ -3504,9 +3504,9 @@
                 <a:ea typeface="Aptos" pitchFamily="34" charset="-122"/>
                 <a:cs typeface="Aptos" pitchFamily="34" charset="-120"/>
               </a:rPr>
-              <a:t>A requirement is a clear statement of what a system must do or how it must perform.</a:t>
-            </a:r>
-            <a:endParaRPr lang="en-US" sz="1320" dirty="0"/>
+              <a:t>A requirement is a clear statement of what a system must do or how it must.</a:t>
+            </a:r>
+            <a:endParaRPr lang="en-US" sz="1220" dirty="0"/>
           </a:p>
         </p:txBody>
       </p:sp>
@@ -3518,12 +3518,12 @@
         </p:nvSpPr>
         <p:spPr>
           <a:xfrm>
-            <a:off x="7635240" y="2670048"/>
-            <a:ext cx="3474720" cy="1377086"/>
+            <a:off x="7543800" y="2724912"/>
+            <a:ext cx="3611880" cy="1527048"/>
           </a:xfrm>
           <a:prstGeom prst="roundRect">
             <a:avLst>
-              <a:gd name="adj" fmla="val 7968"/>
+              <a:gd name="adj" fmla="val 7186"/>
             </a:avLst>
           </a:prstGeom>
           <a:solidFill>
@@ -3545,8 +3545,8 @@
         </p:nvSpPr>
         <p:spPr>
           <a:xfrm>
-            <a:off x="7799832" y="2816352"/>
-            <a:ext cx="3145536" cy="256032"/>
+            <a:off x="7708392" y="2852928"/>
+            <a:ext cx="3282696" cy="228600"/>
           </a:xfrm>
           <a:prstGeom prst="rect">
             <a:avLst/>
@@ -3562,7 +3562,7 @@
               <a:buNone/>
             </a:pPr>
             <a:r>
-              <a:rPr lang="en-US" sz="1300" b="1" dirty="0">
+              <a:rPr lang="en-US" sz="1220" b="1" dirty="0">
                 <a:solidFill>
                   <a:srgbClr val="0068B7"/>
                 </a:solidFill>
@@ -3572,7 +3572,7 @@
               </a:rPr>
               <a:t>Concept checkpoints</a:t>
             </a:r>
-            <a:endParaRPr lang="en-US" sz="1300" dirty="0"/>
+            <a:endParaRPr lang="en-US" sz="1220" dirty="0"/>
           </a:p>
         </p:txBody>
       </p:sp>
@@ -3584,8 +3584,8 @@
         </p:nvSpPr>
         <p:spPr>
           <a:xfrm>
-            <a:off x="7818120" y="3182112"/>
-            <a:ext cx="3090672" cy="718718"/>
+            <a:off x="7726680" y="3182112"/>
+            <a:ext cx="3227832" cy="960120"/>
           </a:xfrm>
           <a:prstGeom prst="rect">
             <a:avLst/>
@@ -3603,7 +3603,7 @@
               <a:buNone/>
             </a:pPr>
             <a:r>
-              <a:rPr lang="en-US" sz="1220" dirty="0">
+              <a:rPr lang="en-US" sz="1140" dirty="0">
                 <a:solidFill>
                   <a:srgbClr val="17364A"/>
                 </a:solidFill>
@@ -3611,16 +3611,16 @@
                 <a:ea typeface="Aptos" pitchFamily="34" charset="-122"/>
                 <a:cs typeface="Aptos" pitchFamily="34" charset="-120"/>
               </a:rPr>
-              <a:t>AI requirements must cover functional capabilities, nonfunctional.</a:t>
-            </a:r>
-            <a:endParaRPr lang="en-US" sz="1220" dirty="0"/>
-          </a:p>
-          <a:p>
-            <a:pPr indent="0" marL="0">
-              <a:buNone/>
-            </a:pPr>
-            <a:r>
-              <a:rPr lang="en-US" sz="1220" dirty="0">
+              <a:t>AI requirements must cover functional.</a:t>
+            </a:r>
+            <a:endParaRPr lang="en-US" sz="1140" dirty="0"/>
+          </a:p>
+          <a:p>
+            <a:pPr indent="0" marL="0">
+              <a:buNone/>
+            </a:pPr>
+            <a:r>
+              <a:rPr lang="en-US" sz="1140" dirty="0">
                 <a:solidFill>
                   <a:srgbClr val="17364A"/>
                 </a:solidFill>
@@ -3628,16 +3628,16 @@
                 <a:ea typeface="Aptos" pitchFamily="34" charset="-122"/>
                 <a:cs typeface="Aptos" pitchFamily="34" charset="-120"/>
               </a:rPr>
-              <a:t>Functional requirements describe what the tool must do, such as.</a:t>
-            </a:r>
-            <a:endParaRPr lang="en-US" sz="1220" dirty="0"/>
-          </a:p>
-          <a:p>
-            <a:pPr indent="0" marL="0">
-              <a:buNone/>
-            </a:pPr>
-            <a:r>
-              <a:rPr lang="en-US" sz="1220" dirty="0">
+              <a:t>Functional requirements describe what the tool.</a:t>
+            </a:r>
+            <a:endParaRPr lang="en-US" sz="1140" dirty="0"/>
+          </a:p>
+          <a:p>
+            <a:pPr indent="0" marL="0">
+              <a:buNone/>
+            </a:pPr>
+            <a:r>
+              <a:rPr lang="en-US" sz="1140" dirty="0">
                 <a:solidFill>
                   <a:srgbClr val="17364A"/>
                 </a:solidFill>
@@ -3645,9 +3645,9 @@
                 <a:ea typeface="Aptos" pitchFamily="34" charset="-122"/>
                 <a:cs typeface="Aptos" pitchFamily="34" charset="-120"/>
               </a:rPr>
-              <a:t>Nonfunctional requirements describe how the tool must perform,.</a:t>
-            </a:r>
-            <a:endParaRPr lang="en-US" sz="1220" dirty="0"/>
+              <a:t>Nonfunctional requirements describe how the tool.</a:t>
+            </a:r>
+            <a:endParaRPr lang="en-US" sz="1140" dirty="0"/>
           </a:p>
         </p:txBody>
       </p:sp>
@@ -3659,12 +3659,12 @@
         </p:nvSpPr>
         <p:spPr>
           <a:xfrm>
-            <a:off x="7635240" y="4184294"/>
-            <a:ext cx="3474720" cy="1466698"/>
+            <a:off x="7543800" y="4389120"/>
+            <a:ext cx="3611880" cy="1261872"/>
           </a:xfrm>
           <a:prstGeom prst="roundRect">
             <a:avLst>
-              <a:gd name="adj" fmla="val 7481"/>
+              <a:gd name="adj" fmla="val 8696"/>
             </a:avLst>
           </a:prstGeom>
           <a:solidFill>
@@ -3686,8 +3686,8 @@
         </p:nvSpPr>
         <p:spPr>
           <a:xfrm>
-            <a:off x="7799832" y="4330598"/>
-            <a:ext cx="3145536" cy="256032"/>
+            <a:off x="7708392" y="4517136"/>
+            <a:ext cx="3282696" cy="228600"/>
           </a:xfrm>
           <a:prstGeom prst="rect">
             <a:avLst/>
@@ -3703,7 +3703,7 @@
               <a:buNone/>
             </a:pPr>
             <a:r>
-              <a:rPr lang="en-US" sz="1300" b="1" dirty="0">
+              <a:rPr lang="en-US" sz="1220" b="1" dirty="0">
                 <a:solidFill>
                   <a:srgbClr val="0068B7"/>
                 </a:solidFill>
@@ -3713,7 +3713,7 @@
               </a:rPr>
               <a:t>Next action</a:t>
             </a:r>
-            <a:endParaRPr lang="en-US" sz="1300" dirty="0"/>
+            <a:endParaRPr lang="en-US" sz="1220" dirty="0"/>
           </a:p>
         </p:txBody>
       </p:sp>
@@ -3725,8 +3725,8 @@
         </p:nvSpPr>
         <p:spPr>
           <a:xfrm>
-            <a:off x="7799832" y="4659782"/>
-            <a:ext cx="3145536" cy="899770"/>
+            <a:off x="7708392" y="4828032"/>
+            <a:ext cx="3282696" cy="749808"/>
           </a:xfrm>
           <a:prstGeom prst="rect">
             <a:avLst/>
@@ -3744,7 +3744,7 @@
               <a:buNone/>
             </a:pPr>
             <a:r>
-              <a:rPr lang="en-US" sz="1320" dirty="0">
+              <a:rPr lang="en-US" sz="1220" dirty="0">
                 <a:solidFill>
                   <a:srgbClr val="17364A"/>
                 </a:solidFill>
@@ -3752,9 +3752,9 @@
                 <a:ea typeface="Aptos" pitchFamily="34" charset="-122"/>
                 <a:cs typeface="Aptos" pitchFamily="34" charset="-120"/>
               </a:rPr>
-              <a:t>Use the concept to clarify workflow changes, dependencies, staffing, procurement requirements, training needs, and implementation checkpoints.</a:t>
-            </a:r>
-            <a:endParaRPr lang="en-US" sz="1320" dirty="0"/>
+              <a:t>Use the concept to clarify workflow changes, dependencies, staffing, procurement.</a:t>
+            </a:r>
+            <a:endParaRPr lang="en-US" sz="1220" dirty="0"/>
           </a:p>
         </p:txBody>
       </p:sp>
@@ -4045,8 +4045,8 @@
         </p:nvSpPr>
         <p:spPr>
           <a:xfrm>
-            <a:off x="868680" y="1508760"/>
-            <a:ext cx="6309360" cy="4160520"/>
+            <a:off x="822960" y="1463040"/>
+            <a:ext cx="6565392" cy="4343400"/>
           </a:xfrm>
           <a:prstGeom prst="rect">
             <a:avLst/>
@@ -4064,7 +4064,7 @@
               <a:buNone/>
             </a:pPr>
             <a:r>
-              <a:rPr lang="en-US" sz="2100" dirty="0">
+              <a:rPr lang="en-US" sz="1920" dirty="0">
                 <a:solidFill>
                   <a:srgbClr val="003A63"/>
                 </a:solidFill>
@@ -4072,16 +4072,16 @@
                 <a:ea typeface="Aptos" pitchFamily="34" charset="-122"/>
                 <a:cs typeface="Aptos" pitchFamily="34" charset="-120"/>
               </a:rPr>
-              <a:t>• A state health agency procuring an AI-supported case triage tool should require.</a:t>
-            </a:r>
-            <a:endParaRPr lang="en-US" sz="2100" dirty="0"/>
-          </a:p>
-          <a:p>
-            <a:pPr indent="0" marL="0">
-              <a:buNone/>
-            </a:pPr>
-            <a:r>
-              <a:rPr lang="en-US" sz="2100" dirty="0">
+              <a:t>• A state health agency procuring an AI-supported case triage tool should.</a:t>
+            </a:r>
+            <a:endParaRPr lang="en-US" sz="1920" dirty="0"/>
+          </a:p>
+          <a:p>
+            <a:pPr indent="0" marL="0">
+              <a:buNone/>
+            </a:pPr>
+            <a:r>
+              <a:rPr lang="en-US" sz="1920" dirty="0">
                 <a:solidFill>
                   <a:srgbClr val="003A63"/>
                 </a:solidFill>
@@ -4091,7 +4091,7 @@
               </a:rPr>
               <a:t>• These requirements make vendor claims testable and enforceable.</a:t>
             </a:r>
-            <a:endParaRPr lang="en-US" sz="2100" dirty="0"/>
+            <a:endParaRPr lang="en-US" sz="1920" dirty="0"/>
           </a:p>
         </p:txBody>
       </p:sp>
@@ -4103,12 +4103,12 @@
         </p:nvSpPr>
         <p:spPr>
           <a:xfrm>
-            <a:off x="7635240" y="1325880"/>
-            <a:ext cx="3474720" cy="1255471"/>
+            <a:off x="7543800" y="1325880"/>
+            <a:ext cx="3611880" cy="1261872"/>
           </a:xfrm>
           <a:prstGeom prst="roundRect">
             <a:avLst>
-              <a:gd name="adj" fmla="val 8740"/>
+              <a:gd name="adj" fmla="val 8696"/>
             </a:avLst>
           </a:prstGeom>
           <a:solidFill>
@@ -4130,8 +4130,8 @@
         </p:nvSpPr>
         <p:spPr>
           <a:xfrm>
-            <a:off x="7799832" y="1472184"/>
-            <a:ext cx="3145536" cy="256032"/>
+            <a:off x="7708392" y="1453896"/>
+            <a:ext cx="3282696" cy="228600"/>
           </a:xfrm>
           <a:prstGeom prst="rect">
             <a:avLst/>
@@ -4147,7 +4147,7 @@
               <a:buNone/>
             </a:pPr>
             <a:r>
-              <a:rPr lang="en-US" sz="1300" b="1" dirty="0">
+              <a:rPr lang="en-US" sz="1220" b="1" dirty="0">
                 <a:solidFill>
                   <a:srgbClr val="0068B7"/>
                 </a:solidFill>
@@ -4157,7 +4157,7 @@
               </a:rPr>
               <a:t>Implementation cue</a:t>
             </a:r>
-            <a:endParaRPr lang="en-US" sz="1300" dirty="0"/>
+            <a:endParaRPr lang="en-US" sz="1220" dirty="0"/>
           </a:p>
         </p:txBody>
       </p:sp>
@@ -4169,8 +4169,8 @@
         </p:nvSpPr>
         <p:spPr>
           <a:xfrm>
-            <a:off x="7799832" y="1801368"/>
-            <a:ext cx="3145536" cy="688543"/>
+            <a:off x="7708392" y="1764792"/>
+            <a:ext cx="3282696" cy="749808"/>
           </a:xfrm>
           <a:prstGeom prst="rect">
             <a:avLst/>
@@ -4188,7 +4188,7 @@
               <a:buNone/>
             </a:pPr>
             <a:r>
-              <a:rPr lang="en-US" sz="1320" dirty="0">
+              <a:rPr lang="en-US" sz="1220" dirty="0">
                 <a:solidFill>
                   <a:srgbClr val="17364A"/>
                 </a:solidFill>
@@ -4196,9 +4196,9 @@
                 <a:ea typeface="Aptos" pitchFamily="34" charset="-122"/>
                 <a:cs typeface="Aptos" pitchFamily="34" charset="-120"/>
               </a:rPr>
-              <a:t>A state health agency procuring an AI-supported case triage tool should require interoperability with.</a:t>
-            </a:r>
-            <a:endParaRPr lang="en-US" sz="1320" dirty="0"/>
+              <a:t>A state health agency procuring an AI-supported case triage tool should require.</a:t>
+            </a:r>
+            <a:endParaRPr lang="en-US" sz="1220" dirty="0"/>
           </a:p>
         </p:txBody>
       </p:sp>
@@ -4210,12 +4210,12 @@
         </p:nvSpPr>
         <p:spPr>
           <a:xfrm>
-            <a:off x="7635240" y="2718511"/>
-            <a:ext cx="3474720" cy="1328623"/>
+            <a:off x="7543800" y="2724912"/>
+            <a:ext cx="3611880" cy="1527048"/>
           </a:xfrm>
           <a:prstGeom prst="roundRect">
             <a:avLst>
-              <a:gd name="adj" fmla="val 8259"/>
+              <a:gd name="adj" fmla="val 7186"/>
             </a:avLst>
           </a:prstGeom>
           <a:solidFill>
@@ -4237,8 +4237,8 @@
         </p:nvSpPr>
         <p:spPr>
           <a:xfrm>
-            <a:off x="7799832" y="2864815"/>
-            <a:ext cx="3145536" cy="256032"/>
+            <a:off x="7708392" y="2852928"/>
+            <a:ext cx="3282696" cy="228600"/>
           </a:xfrm>
           <a:prstGeom prst="rect">
             <a:avLst/>
@@ -4254,7 +4254,7 @@
               <a:buNone/>
             </a:pPr>
             <a:r>
-              <a:rPr lang="en-US" sz="1300" b="1" dirty="0">
+              <a:rPr lang="en-US" sz="1220" b="1" dirty="0">
                 <a:solidFill>
                   <a:srgbClr val="0068B7"/>
                 </a:solidFill>
@@ -4264,7 +4264,7 @@
               </a:rPr>
               <a:t>Concept checkpoints</a:t>
             </a:r>
-            <a:endParaRPr lang="en-US" sz="1300" dirty="0"/>
+            <a:endParaRPr lang="en-US" sz="1220" dirty="0"/>
           </a:p>
         </p:txBody>
       </p:sp>
@@ -4276,8 +4276,8 @@
         </p:nvSpPr>
         <p:spPr>
           <a:xfrm>
-            <a:off x="7818120" y="3230575"/>
-            <a:ext cx="3090672" cy="670255"/>
+            <a:off x="7726680" y="3182112"/>
+            <a:ext cx="3227832" cy="960120"/>
           </a:xfrm>
           <a:prstGeom prst="rect">
             <a:avLst/>
@@ -4295,7 +4295,7 @@
               <a:buNone/>
             </a:pPr>
             <a:r>
-              <a:rPr lang="en-US" sz="1220" dirty="0">
+              <a:rPr lang="en-US" sz="1140" dirty="0">
                 <a:solidFill>
                   <a:srgbClr val="17364A"/>
                 </a:solidFill>
@@ -4303,16 +4303,16 @@
                 <a:ea typeface="Aptos" pitchFamily="34" charset="-122"/>
                 <a:cs typeface="Aptos" pitchFamily="34" charset="-120"/>
               </a:rPr>
-              <a:t>A state health agency procuring an AI-supported case triage tool.</a:t>
-            </a:r>
-            <a:endParaRPr lang="en-US" sz="1220" dirty="0"/>
-          </a:p>
-          <a:p>
-            <a:pPr indent="0" marL="0">
-              <a:buNone/>
-            </a:pPr>
-            <a:r>
-              <a:rPr lang="en-US" sz="1220" dirty="0">
+              <a:t>A state health agency procuring an AI-supported.</a:t>
+            </a:r>
+            <a:endParaRPr lang="en-US" sz="1140" dirty="0"/>
+          </a:p>
+          <a:p>
+            <a:pPr indent="0" marL="0">
+              <a:buNone/>
+            </a:pPr>
+            <a:r>
+              <a:rPr lang="en-US" sz="1140" dirty="0">
                 <a:solidFill>
                   <a:srgbClr val="17364A"/>
                 </a:solidFill>
@@ -4320,9 +4320,9 @@
                 <a:ea typeface="Aptos" pitchFamily="34" charset="-122"/>
                 <a:cs typeface="Aptos" pitchFamily="34" charset="-120"/>
               </a:rPr>
-              <a:t>These requirements make vendor claims testable and enforceable.</a:t>
-            </a:r>
-            <a:endParaRPr lang="en-US" sz="1220" dirty="0"/>
+              <a:t>These requirements make vendor claims testable and.</a:t>
+            </a:r>
+            <a:endParaRPr lang="en-US" sz="1140" dirty="0"/>
           </a:p>
         </p:txBody>
       </p:sp>
@@ -4334,12 +4334,12 @@
         </p:nvSpPr>
         <p:spPr>
           <a:xfrm>
-            <a:off x="7635240" y="4184294"/>
-            <a:ext cx="3474720" cy="1466698"/>
+            <a:off x="7543800" y="4389120"/>
+            <a:ext cx="3611880" cy="1261872"/>
           </a:xfrm>
           <a:prstGeom prst="roundRect">
             <a:avLst>
-              <a:gd name="adj" fmla="val 7481"/>
+              <a:gd name="adj" fmla="val 8696"/>
             </a:avLst>
           </a:prstGeom>
           <a:solidFill>
@@ -4361,8 +4361,8 @@
         </p:nvSpPr>
         <p:spPr>
           <a:xfrm>
-            <a:off x="7799832" y="4330598"/>
-            <a:ext cx="3145536" cy="256032"/>
+            <a:off x="7708392" y="4517136"/>
+            <a:ext cx="3282696" cy="228600"/>
           </a:xfrm>
           <a:prstGeom prst="rect">
             <a:avLst/>
@@ -4378,7 +4378,7 @@
               <a:buNone/>
             </a:pPr>
             <a:r>
-              <a:rPr lang="en-US" sz="1300" b="1" dirty="0">
+              <a:rPr lang="en-US" sz="1220" b="1" dirty="0">
                 <a:solidFill>
                   <a:srgbClr val="0068B7"/>
                 </a:solidFill>
@@ -4388,7 +4388,7 @@
               </a:rPr>
               <a:t>Next action</a:t>
             </a:r>
-            <a:endParaRPr lang="en-US" sz="1300" dirty="0"/>
+            <a:endParaRPr lang="en-US" sz="1220" dirty="0"/>
           </a:p>
         </p:txBody>
       </p:sp>
@@ -4400,8 +4400,8 @@
         </p:nvSpPr>
         <p:spPr>
           <a:xfrm>
-            <a:off x="7799832" y="4659782"/>
-            <a:ext cx="3145536" cy="899770"/>
+            <a:off x="7708392" y="4828032"/>
+            <a:ext cx="3282696" cy="749808"/>
           </a:xfrm>
           <a:prstGeom prst="rect">
             <a:avLst/>
@@ -4419,7 +4419,7 @@
               <a:buNone/>
             </a:pPr>
             <a:r>
-              <a:rPr lang="en-US" sz="1320" dirty="0">
+              <a:rPr lang="en-US" sz="1220" dirty="0">
                 <a:solidFill>
                   <a:srgbClr val="17364A"/>
                 </a:solidFill>
@@ -4427,9 +4427,9 @@
                 <a:ea typeface="Aptos" pitchFamily="34" charset="-122"/>
                 <a:cs typeface="Aptos" pitchFamily="34" charset="-120"/>
               </a:rPr>
-              <a:t>Use the concept to clarify workflow changes, dependencies, staffing, procurement requirements, training needs, and implementation checkpoints.</a:t>
-            </a:r>
-            <a:endParaRPr lang="en-US" sz="1320" dirty="0"/>
+              <a:t>Use the concept to clarify workflow changes, dependencies, staffing, procurement.</a:t>
+            </a:r>
+            <a:endParaRPr lang="en-US" sz="1220" dirty="0"/>
           </a:p>
         </p:txBody>
       </p:sp>
@@ -4720,8 +4720,8 @@
         </p:nvSpPr>
         <p:spPr>
           <a:xfrm>
-            <a:off x="868680" y="1508760"/>
-            <a:ext cx="6309360" cy="4160520"/>
+            <a:off x="822960" y="1463040"/>
+            <a:ext cx="6565392" cy="4343400"/>
           </a:xfrm>
           <a:prstGeom prst="rect">
             <a:avLst/>
@@ -4739,7 +4739,7 @@
               <a:buNone/>
             </a:pPr>
             <a:r>
-              <a:rPr lang="en-US" sz="2100" dirty="0">
+              <a:rPr lang="en-US" sz="1920" dirty="0">
                 <a:solidFill>
                   <a:srgbClr val="003A63"/>
                 </a:solidFill>
@@ -4749,14 +4749,14 @@
               </a:rPr>
               <a:t>• Strong AI requirements begin with intended use.</a:t>
             </a:r>
-            <a:endParaRPr lang="en-US" sz="2100" dirty="0"/>
-          </a:p>
-          <a:p>
-            <a:pPr indent="0" marL="0">
-              <a:buNone/>
-            </a:pPr>
-            <a:r>
-              <a:rPr lang="en-US" sz="2100" dirty="0">
+            <a:endParaRPr lang="en-US" sz="1920" dirty="0"/>
+          </a:p>
+          <a:p>
+            <a:pPr indent="0" marL="0">
+              <a:buNone/>
+            </a:pPr>
+            <a:r>
+              <a:rPr lang="en-US" sz="1920" dirty="0">
                 <a:solidFill>
                   <a:srgbClr val="003A63"/>
                 </a:solidFill>
@@ -4764,16 +4764,16 @@
                 <a:ea typeface="Aptos" pitchFamily="34" charset="-122"/>
                 <a:cs typeface="Aptos" pitchFamily="34" charset="-120"/>
               </a:rPr>
-              <a:t>• The agency should state the specific workflow, users, data sources, outputs, and decisions the.</a:t>
-            </a:r>
-            <a:endParaRPr lang="en-US" sz="2100" dirty="0"/>
-          </a:p>
-          <a:p>
-            <a:pPr indent="0" marL="0">
-              <a:buNone/>
-            </a:pPr>
-            <a:r>
-              <a:rPr lang="en-US" sz="2100" dirty="0">
+              <a:t>• The agency should state the specific workflow, users, data sources, outputs,.</a:t>
+            </a:r>
+            <a:endParaRPr lang="en-US" sz="1920" dirty="0"/>
+          </a:p>
+          <a:p>
+            <a:pPr indent="0" marL="0">
+              <a:buNone/>
+            </a:pPr>
+            <a:r>
+              <a:rPr lang="en-US" sz="1920" dirty="0">
                 <a:solidFill>
                   <a:srgbClr val="003A63"/>
                 </a:solidFill>
@@ -4783,7 +4783,7 @@
               </a:rPr>
               <a:t>• It should also state prohibited uses.</a:t>
             </a:r>
-            <a:endParaRPr lang="en-US" sz="2100" dirty="0"/>
+            <a:endParaRPr lang="en-US" sz="1920" dirty="0"/>
           </a:p>
         </p:txBody>
       </p:sp>
@@ -4795,12 +4795,12 @@
         </p:nvSpPr>
         <p:spPr>
           <a:xfrm>
-            <a:off x="7635240" y="1325880"/>
-            <a:ext cx="3474720" cy="1207008"/>
+            <a:off x="7543800" y="1325880"/>
+            <a:ext cx="3611880" cy="1261872"/>
           </a:xfrm>
           <a:prstGeom prst="roundRect">
             <a:avLst>
-              <a:gd name="adj" fmla="val 9091"/>
+              <a:gd name="adj" fmla="val 8696"/>
             </a:avLst>
           </a:prstGeom>
           <a:solidFill>
@@ -4822,8 +4822,8 @@
         </p:nvSpPr>
         <p:spPr>
           <a:xfrm>
-            <a:off x="7799832" y="1472184"/>
-            <a:ext cx="3145536" cy="256032"/>
+            <a:off x="7708392" y="1453896"/>
+            <a:ext cx="3282696" cy="228600"/>
           </a:xfrm>
           <a:prstGeom prst="rect">
             <a:avLst/>
@@ -4839,7 +4839,7 @@
               <a:buNone/>
             </a:pPr>
             <a:r>
-              <a:rPr lang="en-US" sz="1300" b="1" dirty="0">
+              <a:rPr lang="en-US" sz="1220" b="1" dirty="0">
                 <a:solidFill>
                   <a:srgbClr val="0068B7"/>
                 </a:solidFill>
@@ -4849,7 +4849,7 @@
               </a:rPr>
               <a:t>Implementation cue</a:t>
             </a:r>
-            <a:endParaRPr lang="en-US" sz="1300" dirty="0"/>
+            <a:endParaRPr lang="en-US" sz="1220" dirty="0"/>
           </a:p>
         </p:txBody>
       </p:sp>
@@ -4861,8 +4861,8 @@
         </p:nvSpPr>
         <p:spPr>
           <a:xfrm>
-            <a:off x="7799832" y="1801368"/>
-            <a:ext cx="3145536" cy="640080"/>
+            <a:off x="7708392" y="1764792"/>
+            <a:ext cx="3282696" cy="749808"/>
           </a:xfrm>
           <a:prstGeom prst="rect">
             <a:avLst/>
@@ -4880,7 +4880,7 @@
               <a:buNone/>
             </a:pPr>
             <a:r>
-              <a:rPr lang="en-US" sz="1320" dirty="0">
+              <a:rPr lang="en-US" sz="1220" dirty="0">
                 <a:solidFill>
                   <a:srgbClr val="17364A"/>
                 </a:solidFill>
@@ -4890,7 +4890,7 @@
               </a:rPr>
               <a:t>Strong AI requirements begin with intended use.</a:t>
             </a:r>
-            <a:endParaRPr lang="en-US" sz="1320" dirty="0"/>
+            <a:endParaRPr lang="en-US" sz="1220" dirty="0"/>
           </a:p>
         </p:txBody>
       </p:sp>
@@ -4902,12 +4902,12 @@
         </p:nvSpPr>
         <p:spPr>
           <a:xfrm>
-            <a:off x="7635240" y="2670048"/>
-            <a:ext cx="3474720" cy="1377086"/>
+            <a:off x="7543800" y="2724912"/>
+            <a:ext cx="3611880" cy="1527048"/>
           </a:xfrm>
           <a:prstGeom prst="roundRect">
             <a:avLst>
-              <a:gd name="adj" fmla="val 7968"/>
+              <a:gd name="adj" fmla="val 7186"/>
             </a:avLst>
           </a:prstGeom>
           <a:solidFill>
@@ -4929,8 +4929,8 @@
         </p:nvSpPr>
         <p:spPr>
           <a:xfrm>
-            <a:off x="7799832" y="2816352"/>
-            <a:ext cx="3145536" cy="256032"/>
+            <a:off x="7708392" y="2852928"/>
+            <a:ext cx="3282696" cy="228600"/>
           </a:xfrm>
           <a:prstGeom prst="rect">
             <a:avLst/>
@@ -4946,7 +4946,7 @@
               <a:buNone/>
             </a:pPr>
             <a:r>
-              <a:rPr lang="en-US" sz="1300" b="1" dirty="0">
+              <a:rPr lang="en-US" sz="1220" b="1" dirty="0">
                 <a:solidFill>
                   <a:srgbClr val="0068B7"/>
                 </a:solidFill>
@@ -4956,7 +4956,7 @@
               </a:rPr>
               <a:t>Concept checkpoints</a:t>
             </a:r>
-            <a:endParaRPr lang="en-US" sz="1300" dirty="0"/>
+            <a:endParaRPr lang="en-US" sz="1220" dirty="0"/>
           </a:p>
         </p:txBody>
       </p:sp>
@@ -4968,8 +4968,8 @@
         </p:nvSpPr>
         <p:spPr>
           <a:xfrm>
-            <a:off x="7818120" y="3182112"/>
-            <a:ext cx="3090672" cy="718718"/>
+            <a:off x="7726680" y="3182112"/>
+            <a:ext cx="3227832" cy="960120"/>
           </a:xfrm>
           <a:prstGeom prst="rect">
             <a:avLst/>
@@ -4987,7 +4987,7 @@
               <a:buNone/>
             </a:pPr>
             <a:r>
-              <a:rPr lang="en-US" sz="1220" dirty="0">
+              <a:rPr lang="en-US" sz="1140" dirty="0">
                 <a:solidFill>
                   <a:srgbClr val="17364A"/>
                 </a:solidFill>
@@ -4995,16 +4995,16 @@
                 <a:ea typeface="Aptos" pitchFamily="34" charset="-122"/>
                 <a:cs typeface="Aptos" pitchFamily="34" charset="-120"/>
               </a:rPr>
-              <a:t>The agency should state the specific workflow, users, data.</a:t>
-            </a:r>
-            <a:endParaRPr lang="en-US" sz="1220" dirty="0"/>
-          </a:p>
-          <a:p>
-            <a:pPr indent="0" marL="0">
-              <a:buNone/>
-            </a:pPr>
-            <a:r>
-              <a:rPr lang="en-US" sz="1220" dirty="0">
+              <a:t>The agency should state the specific workflow,.</a:t>
+            </a:r>
+            <a:endParaRPr lang="en-US" sz="1140" dirty="0"/>
+          </a:p>
+          <a:p>
+            <a:pPr indent="0" marL="0">
+              <a:buNone/>
+            </a:pPr>
+            <a:r>
+              <a:rPr lang="en-US" sz="1140" dirty="0">
                 <a:solidFill>
                   <a:srgbClr val="17364A"/>
                 </a:solidFill>
@@ -5012,16 +5012,16 @@
                 <a:ea typeface="Aptos" pitchFamily="34" charset="-122"/>
                 <a:cs typeface="Aptos" pitchFamily="34" charset="-120"/>
               </a:rPr>
-              <a:t>This prevents scope creep and reduces the chance that a tool will.</a:t>
-            </a:r>
-            <a:endParaRPr lang="en-US" sz="1220" dirty="0"/>
-          </a:p>
-          <a:p>
-            <a:pPr indent="0" marL="0">
-              <a:buNone/>
-            </a:pPr>
-            <a:r>
-              <a:rPr lang="en-US" sz="1220" dirty="0">
+              <a:t>This prevents scope creep and reduces the chance.</a:t>
+            </a:r>
+            <a:endParaRPr lang="en-US" sz="1140" dirty="0"/>
+          </a:p>
+          <a:p>
+            <a:pPr indent="0" marL="0">
+              <a:buNone/>
+            </a:pPr>
+            <a:r>
+              <a:rPr lang="en-US" sz="1140" dirty="0">
                 <a:solidFill>
                   <a:srgbClr val="17364A"/>
                 </a:solidFill>
@@ -5029,9 +5029,9 @@
                 <a:ea typeface="Aptos" pitchFamily="34" charset="-122"/>
                 <a:cs typeface="Aptos" pitchFamily="34" charset="-120"/>
               </a:rPr>
-              <a:t>Data requirements should specify allowed data sources, minimum.</a:t>
-            </a:r>
-            <a:endParaRPr lang="en-US" sz="1220" dirty="0"/>
+              <a:t>Data requirements should specify allowed data.</a:t>
+            </a:r>
+            <a:endParaRPr lang="en-US" sz="1140" dirty="0"/>
           </a:p>
         </p:txBody>
       </p:sp>
@@ -5043,12 +5043,12 @@
         </p:nvSpPr>
         <p:spPr>
           <a:xfrm>
-            <a:off x="7635240" y="4184294"/>
-            <a:ext cx="3474720" cy="1466698"/>
+            <a:off x="7543800" y="4389120"/>
+            <a:ext cx="3611880" cy="1261872"/>
           </a:xfrm>
           <a:prstGeom prst="roundRect">
             <a:avLst>
-              <a:gd name="adj" fmla="val 7481"/>
+              <a:gd name="adj" fmla="val 8696"/>
             </a:avLst>
           </a:prstGeom>
           <a:solidFill>
@@ -5070,8 +5070,8 @@
         </p:nvSpPr>
         <p:spPr>
           <a:xfrm>
-            <a:off x="7799832" y="4330598"/>
-            <a:ext cx="3145536" cy="256032"/>
+            <a:off x="7708392" y="4517136"/>
+            <a:ext cx="3282696" cy="228600"/>
           </a:xfrm>
           <a:prstGeom prst="rect">
             <a:avLst/>
@@ -5087,7 +5087,7 @@
               <a:buNone/>
             </a:pPr>
             <a:r>
-              <a:rPr lang="en-US" sz="1300" b="1" dirty="0">
+              <a:rPr lang="en-US" sz="1220" b="1" dirty="0">
                 <a:solidFill>
                   <a:srgbClr val="0068B7"/>
                 </a:solidFill>
@@ -5097,7 +5097,7 @@
               </a:rPr>
               <a:t>Next action</a:t>
             </a:r>
-            <a:endParaRPr lang="en-US" sz="1300" dirty="0"/>
+            <a:endParaRPr lang="en-US" sz="1220" dirty="0"/>
           </a:p>
         </p:txBody>
       </p:sp>
@@ -5109,8 +5109,8 @@
         </p:nvSpPr>
         <p:spPr>
           <a:xfrm>
-            <a:off x="7799832" y="4659782"/>
-            <a:ext cx="3145536" cy="899770"/>
+            <a:off x="7708392" y="4828032"/>
+            <a:ext cx="3282696" cy="749808"/>
           </a:xfrm>
           <a:prstGeom prst="rect">
             <a:avLst/>
@@ -5128,7 +5128,7 @@
               <a:buNone/>
             </a:pPr>
             <a:r>
-              <a:rPr lang="en-US" sz="1320" dirty="0">
+              <a:rPr lang="en-US" sz="1220" dirty="0">
                 <a:solidFill>
                   <a:srgbClr val="17364A"/>
                 </a:solidFill>
@@ -5136,9 +5136,9 @@
                 <a:ea typeface="Aptos" pitchFamily="34" charset="-122"/>
                 <a:cs typeface="Aptos" pitchFamily="34" charset="-120"/>
               </a:rPr>
-              <a:t>Use the concept to clarify workflow changes, dependencies, staffing, procurement requirements, training needs, and implementation checkpoints.</a:t>
-            </a:r>
-            <a:endParaRPr lang="en-US" sz="1320" dirty="0"/>
+              <a:t>Use the concept to clarify workflow changes, dependencies, staffing, procurement.</a:t>
+            </a:r>
+            <a:endParaRPr lang="en-US" sz="1220" dirty="0"/>
           </a:p>
         </p:txBody>
       </p:sp>
@@ -5429,8 +5429,8 @@
         </p:nvSpPr>
         <p:spPr>
           <a:xfrm>
-            <a:off x="868680" y="1508760"/>
-            <a:ext cx="6309360" cy="4160520"/>
+            <a:off x="822960" y="1463040"/>
+            <a:ext cx="6565392" cy="4343400"/>
           </a:xfrm>
           <a:prstGeom prst="rect">
             <a:avLst/>
@@ -5448,7 +5448,7 @@
               <a:buNone/>
             </a:pPr>
             <a:r>
-              <a:rPr lang="en-US" sz="2100" dirty="0">
+              <a:rPr lang="en-US" sz="1920" dirty="0">
                 <a:solidFill>
                   <a:srgbClr val="003A63"/>
                 </a:solidFill>
@@ -5456,16 +5456,16 @@
                 <a:ea typeface="Aptos" pitchFamily="34" charset="-122"/>
                 <a:cs typeface="Aptos" pitchFamily="34" charset="-120"/>
               </a:rPr>
-              <a:t>• A common failure mode is treating the topic as a technical detail rather than a public health.</a:t>
-            </a:r>
-            <a:endParaRPr lang="en-US" sz="2100" dirty="0"/>
-          </a:p>
-          <a:p>
-            <a:pPr indent="0" marL="0">
-              <a:buNone/>
-            </a:pPr>
-            <a:r>
-              <a:rPr lang="en-US" sz="2100" dirty="0">
+              <a:t>• A common failure mode is treating the topic as a technical detail rather.</a:t>
+            </a:r>
+            <a:endParaRPr lang="en-US" sz="1920" dirty="0"/>
+          </a:p>
+          <a:p>
+            <a:pPr indent="0" marL="0">
+              <a:buNone/>
+            </a:pPr>
+            <a:r>
+              <a:rPr lang="en-US" sz="1920" dirty="0">
                 <a:solidFill>
                   <a:srgbClr val="003A63"/>
                 </a:solidFill>
@@ -5473,16 +5473,16 @@
                 <a:ea typeface="Aptos" pitchFamily="34" charset="-122"/>
                 <a:cs typeface="Aptos" pitchFamily="34" charset="-120"/>
               </a:rPr>
-              <a:t>• When staff do not connect technical decisions to authority, workflow, equity, privacy,.</a:t>
-            </a:r>
-            <a:endParaRPr lang="en-US" sz="2100" dirty="0"/>
-          </a:p>
-          <a:p>
-            <a:pPr indent="0" marL="0">
-              <a:buNone/>
-            </a:pPr>
-            <a:r>
-              <a:rPr lang="en-US" sz="2100" dirty="0">
+              <a:t>• When staff do not connect technical decisions to authority, workflow,.</a:t>
+            </a:r>
+            <a:endParaRPr lang="en-US" sz="1920" dirty="0"/>
+          </a:p>
+          <a:p>
+            <a:pPr indent="0" marL="0">
+              <a:buNone/>
+            </a:pPr>
+            <a:r>
+              <a:rPr lang="en-US" sz="1920" dirty="0">
                 <a:solidFill>
                   <a:srgbClr val="003A63"/>
                 </a:solidFill>
@@ -5492,7 +5492,7 @@
               </a:rPr>
               <a:t>• Another risk is relying on vendor claims without agency-defined evidence.</a:t>
             </a:r>
-            <a:endParaRPr lang="en-US" sz="2100" dirty="0"/>
+            <a:endParaRPr lang="en-US" sz="1920" dirty="0"/>
           </a:p>
         </p:txBody>
       </p:sp>
@@ -5504,12 +5504,12 @@
         </p:nvSpPr>
         <p:spPr>
           <a:xfrm>
-            <a:off x="7635240" y="1325880"/>
-            <a:ext cx="3474720" cy="1255471"/>
+            <a:off x="7543800" y="1325880"/>
+            <a:ext cx="3611880" cy="1261872"/>
           </a:xfrm>
           <a:prstGeom prst="roundRect">
             <a:avLst>
-              <a:gd name="adj" fmla="val 8740"/>
+              <a:gd name="adj" fmla="val 8696"/>
             </a:avLst>
           </a:prstGeom>
           <a:solidFill>
@@ -5531,8 +5531,8 @@
         </p:nvSpPr>
         <p:spPr>
           <a:xfrm>
-            <a:off x="7799832" y="1472184"/>
-            <a:ext cx="3145536" cy="256032"/>
+            <a:off x="7708392" y="1453896"/>
+            <a:ext cx="3282696" cy="228600"/>
           </a:xfrm>
           <a:prstGeom prst="rect">
             <a:avLst/>
@@ -5548,7 +5548,7 @@
               <a:buNone/>
             </a:pPr>
             <a:r>
-              <a:rPr lang="en-US" sz="1300" b="1" dirty="0">
+              <a:rPr lang="en-US" sz="1220" b="1" dirty="0">
                 <a:solidFill>
                   <a:srgbClr val="0068B7"/>
                 </a:solidFill>
@@ -5558,7 +5558,7 @@
               </a:rPr>
               <a:t>Risk check</a:t>
             </a:r>
-            <a:endParaRPr lang="en-US" sz="1300" dirty="0"/>
+            <a:endParaRPr lang="en-US" sz="1220" dirty="0"/>
           </a:p>
         </p:txBody>
       </p:sp>
@@ -5570,8 +5570,8 @@
         </p:nvSpPr>
         <p:spPr>
           <a:xfrm>
-            <a:off x="7799832" y="1801368"/>
-            <a:ext cx="3145536" cy="688543"/>
+            <a:off x="7708392" y="1764792"/>
+            <a:ext cx="3282696" cy="749808"/>
           </a:xfrm>
           <a:prstGeom prst="rect">
             <a:avLst/>
@@ -5589,7 +5589,7 @@
               <a:buNone/>
             </a:pPr>
             <a:r>
-              <a:rPr lang="en-US" sz="1320" dirty="0">
+              <a:rPr lang="en-US" sz="1220" dirty="0">
                 <a:solidFill>
                   <a:srgbClr val="17364A"/>
                 </a:solidFill>
@@ -5597,9 +5597,9 @@
                 <a:ea typeface="Aptos" pitchFamily="34" charset="-122"/>
                 <a:cs typeface="Aptos" pitchFamily="34" charset="-120"/>
               </a:rPr>
-              <a:t>A common failure mode is treating the topic as a technical detail rather than a public health control.</a:t>
-            </a:r>
-            <a:endParaRPr lang="en-US" sz="1320" dirty="0"/>
+              <a:t>A common failure mode is treating the topic as a technical detail rather than a.</a:t>
+            </a:r>
+            <a:endParaRPr lang="en-US" sz="1220" dirty="0"/>
           </a:p>
         </p:txBody>
       </p:sp>
@@ -5611,12 +5611,12 @@
         </p:nvSpPr>
         <p:spPr>
           <a:xfrm>
-            <a:off x="7635240" y="2718511"/>
-            <a:ext cx="3474720" cy="1536192"/>
+            <a:off x="7543800" y="2724912"/>
+            <a:ext cx="3611880" cy="1527048"/>
           </a:xfrm>
           <a:prstGeom prst="roundRect">
             <a:avLst>
-              <a:gd name="adj" fmla="val 7143"/>
+              <a:gd name="adj" fmla="val 7186"/>
             </a:avLst>
           </a:prstGeom>
           <a:solidFill>
@@ -5638,8 +5638,8 @@
         </p:nvSpPr>
         <p:spPr>
           <a:xfrm>
-            <a:off x="7799832" y="2864815"/>
-            <a:ext cx="3145536" cy="256032"/>
+            <a:off x="7708392" y="2852928"/>
+            <a:ext cx="3282696" cy="228600"/>
           </a:xfrm>
           <a:prstGeom prst="rect">
             <a:avLst/>
@@ -5655,7 +5655,7 @@
               <a:buNone/>
             </a:pPr>
             <a:r>
-              <a:rPr lang="en-US" sz="1300" b="1" dirty="0">
+              <a:rPr lang="en-US" sz="1220" b="1" dirty="0">
                 <a:solidFill>
                   <a:srgbClr val="0068B7"/>
                 </a:solidFill>
@@ -5665,7 +5665,7 @@
               </a:rPr>
               <a:t>Concept checkpoints</a:t>
             </a:r>
-            <a:endParaRPr lang="en-US" sz="1300" dirty="0"/>
+            <a:endParaRPr lang="en-US" sz="1220" dirty="0"/>
           </a:p>
         </p:txBody>
       </p:sp>
@@ -5677,8 +5677,8 @@
         </p:nvSpPr>
         <p:spPr>
           <a:xfrm>
-            <a:off x="7818120" y="3230575"/>
-            <a:ext cx="3090672" cy="877824"/>
+            <a:off x="7726680" y="3182112"/>
+            <a:ext cx="3227832" cy="960120"/>
           </a:xfrm>
           <a:prstGeom prst="rect">
             <a:avLst/>
@@ -5696,7 +5696,7 @@
               <a:buNone/>
             </a:pPr>
             <a:r>
-              <a:rPr lang="en-US" sz="1220" dirty="0">
+              <a:rPr lang="en-US" sz="1140" dirty="0">
                 <a:solidFill>
                   <a:srgbClr val="17364A"/>
                 </a:solidFill>
@@ -5704,16 +5704,16 @@
                 <a:ea typeface="Aptos" pitchFamily="34" charset="-122"/>
                 <a:cs typeface="Aptos" pitchFamily="34" charset="-120"/>
               </a:rPr>
-              <a:t>When staff do not connect technical decisions to authority,.</a:t>
-            </a:r>
-            <a:endParaRPr lang="en-US" sz="1220" dirty="0"/>
-          </a:p>
-          <a:p>
-            <a:pPr indent="0" marL="0">
-              <a:buNone/>
-            </a:pPr>
-            <a:r>
-              <a:rPr lang="en-US" sz="1220" dirty="0">
+              <a:t>When staff do not connect technical decisions to.</a:t>
+            </a:r>
+            <a:endParaRPr lang="en-US" sz="1140" dirty="0"/>
+          </a:p>
+          <a:p>
+            <a:pPr indent="0" marL="0">
+              <a:buNone/>
+            </a:pPr>
+            <a:r>
+              <a:rPr lang="en-US" sz="1140" dirty="0">
                 <a:solidFill>
                   <a:srgbClr val="17364A"/>
                 </a:solidFill>
@@ -5721,16 +5721,16 @@
                 <a:ea typeface="Aptos" pitchFamily="34" charset="-122"/>
                 <a:cs typeface="Aptos" pitchFamily="34" charset="-120"/>
               </a:rPr>
-              <a:t>Vendors may provide demonstrations, dashboards, or summary metrics.</a:t>
-            </a:r>
-            <a:endParaRPr lang="en-US" sz="1220" dirty="0"/>
-          </a:p>
-          <a:p>
-            <a:pPr indent="0" marL="0">
-              <a:buNone/>
-            </a:pPr>
-            <a:r>
-              <a:rPr lang="en-US" sz="1220" dirty="0">
+              <a:t>Vendors may provide demonstrations, dashboards, or.</a:t>
+            </a:r>
+            <a:endParaRPr lang="en-US" sz="1140" dirty="0"/>
+          </a:p>
+          <a:p>
+            <a:pPr indent="0" marL="0">
+              <a:buNone/>
+            </a:pPr>
+            <a:r>
+              <a:rPr lang="en-US" sz="1140" dirty="0">
                 <a:solidFill>
                   <a:srgbClr val="17364A"/>
                 </a:solidFill>
@@ -5738,9 +5738,9 @@
                 <a:ea typeface="Aptos" pitchFamily="34" charset="-122"/>
                 <a:cs typeface="Aptos" pitchFamily="34" charset="-120"/>
               </a:rPr>
-              <a:t>A guardrail is to require documentation, test results, acceptance.</a:t>
-            </a:r>
-            <a:endParaRPr lang="en-US" sz="1220" dirty="0"/>
+              <a:t>A guardrail is to require documentation, test.</a:t>
+            </a:r>
+            <a:endParaRPr lang="en-US" sz="1140" dirty="0"/>
           </a:p>
         </p:txBody>
       </p:sp>
@@ -5752,12 +5752,12 @@
         </p:nvSpPr>
         <p:spPr>
           <a:xfrm>
-            <a:off x="7635240" y="4391863"/>
-            <a:ext cx="3474720" cy="1255471"/>
+            <a:off x="7543800" y="4389120"/>
+            <a:ext cx="3611880" cy="1261872"/>
           </a:xfrm>
           <a:prstGeom prst="roundRect">
             <a:avLst>
-              <a:gd name="adj" fmla="val 8740"/>
+              <a:gd name="adj" fmla="val 8696"/>
             </a:avLst>
           </a:prstGeom>
           <a:solidFill>
@@ -5779,8 +5779,8 @@
         </p:nvSpPr>
         <p:spPr>
           <a:xfrm>
-            <a:off x="7799832" y="4538167"/>
-            <a:ext cx="3145536" cy="256032"/>
+            <a:off x="7708392" y="4517136"/>
+            <a:ext cx="3282696" cy="228600"/>
           </a:xfrm>
           <a:prstGeom prst="rect">
             <a:avLst/>
@@ -5796,7 +5796,7 @@
               <a:buNone/>
             </a:pPr>
             <a:r>
-              <a:rPr lang="en-US" sz="1300" b="1" dirty="0">
+              <a:rPr lang="en-US" sz="1220" b="1" dirty="0">
                 <a:solidFill>
                   <a:srgbClr val="0068B7"/>
                 </a:solidFill>
@@ -5806,7 +5806,7 @@
               </a:rPr>
               <a:t>Safeguard to plan</a:t>
             </a:r>
-            <a:endParaRPr lang="en-US" sz="1300" dirty="0"/>
+            <a:endParaRPr lang="en-US" sz="1220" dirty="0"/>
           </a:p>
         </p:txBody>
       </p:sp>
@@ -5818,8 +5818,8 @@
         </p:nvSpPr>
         <p:spPr>
           <a:xfrm>
-            <a:off x="7799832" y="4867351"/>
-            <a:ext cx="3145536" cy="688543"/>
+            <a:off x="7708392" y="4828032"/>
+            <a:ext cx="3282696" cy="749808"/>
           </a:xfrm>
           <a:prstGeom prst="rect">
             <a:avLst/>
@@ -5837,7 +5837,7 @@
               <a:buNone/>
             </a:pPr>
             <a:r>
-              <a:rPr lang="en-US" sz="1320" dirty="0">
+              <a:rPr lang="en-US" sz="1220" dirty="0">
                 <a:solidFill>
                   <a:srgbClr val="17364A"/>
                 </a:solidFill>
@@ -5845,9 +5845,9 @@
                 <a:ea typeface="Aptos" pitchFamily="34" charset="-122"/>
                 <a:cs typeface="Aptos" pitchFamily="34" charset="-120"/>
               </a:rPr>
-              <a:t>Identify what could go wrong, who could be affected, what safeguards are needed, and what evidence should be reviewed before use.</a:t>
-            </a:r>
-            <a:endParaRPr lang="en-US" sz="1320" dirty="0"/>
+              <a:t>Identify what could go wrong, who could be affected, what safeguards are needed,.</a:t>
+            </a:r>
+            <a:endParaRPr lang="en-US" sz="1220" dirty="0"/>
           </a:p>
         </p:txBody>
       </p:sp>
@@ -6138,8 +6138,8 @@
         </p:nvSpPr>
         <p:spPr>
           <a:xfrm>
-            <a:off x="868680" y="1508760"/>
-            <a:ext cx="6309360" cy="4160520"/>
+            <a:off x="822960" y="1463040"/>
+            <a:ext cx="6565392" cy="4343400"/>
           </a:xfrm>
           <a:prstGeom prst="rect">
             <a:avLst/>
@@ -6157,7 +6157,7 @@
               <a:buNone/>
             </a:pPr>
             <a:r>
-              <a:rPr lang="en-US" sz="2100" dirty="0">
+              <a:rPr lang="en-US" sz="1920" dirty="0">
                 <a:solidFill>
                   <a:srgbClr val="003A63"/>
                 </a:solidFill>
@@ -6165,16 +6165,16 @@
                 <a:ea typeface="Aptos" pitchFamily="34" charset="-122"/>
                 <a:cs typeface="Aptos" pitchFamily="34" charset="-120"/>
               </a:rPr>
-              <a:t>• Generative AI, predictive analytics, RAG, automation, and agentic workflows all depend on the.</a:t>
-            </a:r>
-            <a:endParaRPr lang="en-US" sz="2100" dirty="0"/>
-          </a:p>
-          <a:p>
-            <a:pPr indent="0" marL="0">
-              <a:buNone/>
-            </a:pPr>
-            <a:r>
-              <a:rPr lang="en-US" sz="2100" dirty="0">
+              <a:t>• Generative AI, predictive analytics, RAG, automation, and agentic workflows.</a:t>
+            </a:r>
+            <a:endParaRPr lang="en-US" sz="1920" dirty="0"/>
+          </a:p>
+          <a:p>
+            <a:pPr indent="0" marL="0">
+              <a:buNone/>
+            </a:pPr>
+            <a:r>
+              <a:rPr lang="en-US" sz="1920" dirty="0">
                 <a:solidFill>
                   <a:srgbClr val="003A63"/>
                 </a:solidFill>
@@ -6184,14 +6184,14 @@
               </a:rPr>
               <a:t>• The controls should be scaled to the risk of the use case.</a:t>
             </a:r>
-            <a:endParaRPr lang="en-US" sz="2100" dirty="0"/>
-          </a:p>
-          <a:p>
-            <a:pPr indent="0" marL="0">
-              <a:buNone/>
-            </a:pPr>
-            <a:r>
-              <a:rPr lang="en-US" sz="2100" dirty="0">
+            <a:endParaRPr lang="en-US" sz="1920" dirty="0"/>
+          </a:p>
+          <a:p>
+            <a:pPr indent="0" marL="0">
+              <a:buNone/>
+            </a:pPr>
+            <a:r>
+              <a:rPr lang="en-US" sz="1920" dirty="0">
                 <a:solidFill>
                   <a:srgbClr val="003A63"/>
                 </a:solidFill>
@@ -6199,9 +6199,9 @@
                 <a:ea typeface="Aptos" pitchFamily="34" charset="-122"/>
                 <a:cs typeface="Aptos" pitchFamily="34" charset="-120"/>
               </a:rPr>
-              <a:t>• A tool that drafts internal training text may require lighter review than a tool that updates.</a:t>
-            </a:r>
-            <a:endParaRPr lang="en-US" sz="2100" dirty="0"/>
+              <a:t>• A tool that drafts internal training text may require lighter review than a.</a:t>
+            </a:r>
+            <a:endParaRPr lang="en-US" sz="1920" dirty="0"/>
           </a:p>
         </p:txBody>
       </p:sp>
@@ -6213,12 +6213,12 @@
         </p:nvSpPr>
         <p:spPr>
           <a:xfrm>
-            <a:off x="7635240" y="1325880"/>
-            <a:ext cx="3474720" cy="1255471"/>
+            <a:off x="7543800" y="1325880"/>
+            <a:ext cx="3611880" cy="1261872"/>
           </a:xfrm>
           <a:prstGeom prst="roundRect">
             <a:avLst>
-              <a:gd name="adj" fmla="val 8740"/>
+              <a:gd name="adj" fmla="val 8696"/>
             </a:avLst>
           </a:prstGeom>
           <a:solidFill>
@@ -6240,8 +6240,8 @@
         </p:nvSpPr>
         <p:spPr>
           <a:xfrm>
-            <a:off x="7799832" y="1472184"/>
-            <a:ext cx="3145536" cy="256032"/>
+            <a:off x="7708392" y="1453896"/>
+            <a:ext cx="3282696" cy="228600"/>
           </a:xfrm>
           <a:prstGeom prst="rect">
             <a:avLst/>
@@ -6257,7 +6257,7 @@
               <a:buNone/>
             </a:pPr>
             <a:r>
-              <a:rPr lang="en-US" sz="1300" b="1" dirty="0">
+              <a:rPr lang="en-US" sz="1220" b="1" dirty="0">
                 <a:solidFill>
                   <a:srgbClr val="0068B7"/>
                 </a:solidFill>
@@ -6267,7 +6267,7 @@
               </a:rPr>
               <a:t>Implementation cue</a:t>
             </a:r>
-            <a:endParaRPr lang="en-US" sz="1300" dirty="0"/>
+            <a:endParaRPr lang="en-US" sz="1220" dirty="0"/>
           </a:p>
         </p:txBody>
       </p:sp>
@@ -6279,8 +6279,8 @@
         </p:nvSpPr>
         <p:spPr>
           <a:xfrm>
-            <a:off x="7799832" y="1801368"/>
-            <a:ext cx="3145536" cy="688543"/>
+            <a:off x="7708392" y="1764792"/>
+            <a:ext cx="3282696" cy="749808"/>
           </a:xfrm>
           <a:prstGeom prst="rect">
             <a:avLst/>
@@ -6298,7 +6298,7 @@
               <a:buNone/>
             </a:pPr>
             <a:r>
-              <a:rPr lang="en-US" sz="1320" dirty="0">
+              <a:rPr lang="en-US" sz="1220" dirty="0">
                 <a:solidFill>
                   <a:srgbClr val="17364A"/>
                 </a:solidFill>
@@ -6306,9 +6306,9 @@
                 <a:ea typeface="Aptos" pitchFamily="34" charset="-122"/>
                 <a:cs typeface="Aptos" pitchFamily="34" charset="-120"/>
               </a:rPr>
-              <a:t>Generative AI, predictive analytics, RAG, automation, and agentic workflows all depend on the controls.</a:t>
-            </a:r>
-            <a:endParaRPr lang="en-US" sz="1320" dirty="0"/>
+              <a:t>Generative AI, predictive analytics, RAG, automation, and agentic workflows all.</a:t>
+            </a:r>
+            <a:endParaRPr lang="en-US" sz="1220" dirty="0"/>
           </a:p>
         </p:txBody>
       </p:sp>
@@ -6320,12 +6320,12 @@
         </p:nvSpPr>
         <p:spPr>
           <a:xfrm>
-            <a:off x="7635240" y="2718511"/>
-            <a:ext cx="3474720" cy="1328623"/>
+            <a:off x="7543800" y="2724912"/>
+            <a:ext cx="3611880" cy="1527048"/>
           </a:xfrm>
           <a:prstGeom prst="roundRect">
             <a:avLst>
-              <a:gd name="adj" fmla="val 8259"/>
+              <a:gd name="adj" fmla="val 7186"/>
             </a:avLst>
           </a:prstGeom>
           <a:solidFill>
@@ -6347,8 +6347,8 @@
         </p:nvSpPr>
         <p:spPr>
           <a:xfrm>
-            <a:off x="7799832" y="2864815"/>
-            <a:ext cx="3145536" cy="256032"/>
+            <a:off x="7708392" y="2852928"/>
+            <a:ext cx="3282696" cy="228600"/>
           </a:xfrm>
           <a:prstGeom prst="rect">
             <a:avLst/>
@@ -6364,7 +6364,7 @@
               <a:buNone/>
             </a:pPr>
             <a:r>
-              <a:rPr lang="en-US" sz="1300" b="1" dirty="0">
+              <a:rPr lang="en-US" sz="1220" b="1" dirty="0">
                 <a:solidFill>
                   <a:srgbClr val="0068B7"/>
                 </a:solidFill>
@@ -6374,7 +6374,7 @@
               </a:rPr>
               <a:t>Concept checkpoints</a:t>
             </a:r>
-            <a:endParaRPr lang="en-US" sz="1300" dirty="0"/>
+            <a:endParaRPr lang="en-US" sz="1220" dirty="0"/>
           </a:p>
         </p:txBody>
       </p:sp>
@@ -6386,8 +6386,8 @@
         </p:nvSpPr>
         <p:spPr>
           <a:xfrm>
-            <a:off x="7818120" y="3230575"/>
-            <a:ext cx="3090672" cy="670255"/>
+            <a:off x="7726680" y="3182112"/>
+            <a:ext cx="3227832" cy="960120"/>
           </a:xfrm>
           <a:prstGeom prst="rect">
             <a:avLst/>
@@ -6405,7 +6405,7 @@
               <a:buNone/>
             </a:pPr>
             <a:r>
-              <a:rPr lang="en-US" sz="1220" dirty="0">
+              <a:rPr lang="en-US" sz="1140" dirty="0">
                 <a:solidFill>
                   <a:srgbClr val="17364A"/>
                 </a:solidFill>
@@ -6413,16 +6413,16 @@
                 <a:ea typeface="Aptos" pitchFamily="34" charset="-122"/>
                 <a:cs typeface="Aptos" pitchFamily="34" charset="-120"/>
               </a:rPr>
-              <a:t>Generative AI, predictive analytics, RAG, automation, and agentic.</a:t>
-            </a:r>
-            <a:endParaRPr lang="en-US" sz="1220" dirty="0"/>
-          </a:p>
-          <a:p>
-            <a:pPr indent="0" marL="0">
-              <a:buNone/>
-            </a:pPr>
-            <a:r>
-              <a:rPr lang="en-US" sz="1220" dirty="0">
+              <a:t>Generative AI, predictive analytics, RAG,.</a:t>
+            </a:r>
+            <a:endParaRPr lang="en-US" sz="1140" dirty="0"/>
+          </a:p>
+          <a:p>
+            <a:pPr indent="0" marL="0">
+              <a:buNone/>
+            </a:pPr>
+            <a:r>
+              <a:rPr lang="en-US" sz="1140" dirty="0">
                 <a:solidFill>
                   <a:srgbClr val="17364A"/>
                 </a:solidFill>
@@ -6430,16 +6430,16 @@
                 <a:ea typeface="Aptos" pitchFamily="34" charset="-122"/>
                 <a:cs typeface="Aptos" pitchFamily="34" charset="-120"/>
               </a:rPr>
-              <a:t>A tool that drafts internal training text may require lighter.</a:t>
-            </a:r>
-            <a:endParaRPr lang="en-US" sz="1220" dirty="0"/>
-          </a:p>
-          <a:p>
-            <a:pPr indent="0" marL="0">
-              <a:buNone/>
-            </a:pPr>
-            <a:r>
-              <a:rPr lang="en-US" sz="1220" dirty="0">
+              <a:t>A tool that drafts internal training text may.</a:t>
+            </a:r>
+            <a:endParaRPr lang="en-US" sz="1140" dirty="0"/>
+          </a:p>
+          <a:p>
+            <a:pPr indent="0" marL="0">
+              <a:buNone/>
+            </a:pPr>
+            <a:r>
+              <a:rPr lang="en-US" sz="1140" dirty="0">
                 <a:solidFill>
                   <a:srgbClr val="17364A"/>
                 </a:solidFill>
@@ -6447,9 +6447,9 @@
                 <a:ea typeface="Aptos" pitchFamily="34" charset="-122"/>
                 <a:cs typeface="Aptos" pitchFamily="34" charset="-120"/>
               </a:rPr>
-              <a:t>The module should be applied during readiness assessment,.</a:t>
-            </a:r>
-            <a:endParaRPr lang="en-US" sz="1220" dirty="0"/>
+              <a:t>The module should be applied during readiness.</a:t>
+            </a:r>
+            <a:endParaRPr lang="en-US" sz="1140" dirty="0"/>
           </a:p>
         </p:txBody>
       </p:sp>
@@ -6461,12 +6461,12 @@
         </p:nvSpPr>
         <p:spPr>
           <a:xfrm>
-            <a:off x="7635240" y="4184294"/>
-            <a:ext cx="3474720" cy="1466698"/>
+            <a:off x="7543800" y="4389120"/>
+            <a:ext cx="3611880" cy="1261872"/>
           </a:xfrm>
           <a:prstGeom prst="roundRect">
             <a:avLst>
-              <a:gd name="adj" fmla="val 7481"/>
+              <a:gd name="adj" fmla="val 8696"/>
             </a:avLst>
           </a:prstGeom>
           <a:solidFill>
@@ -6488,8 +6488,8 @@
         </p:nvSpPr>
         <p:spPr>
           <a:xfrm>
-            <a:off x="7799832" y="4330598"/>
-            <a:ext cx="3145536" cy="256032"/>
+            <a:off x="7708392" y="4517136"/>
+            <a:ext cx="3282696" cy="228600"/>
           </a:xfrm>
           <a:prstGeom prst="rect">
             <a:avLst/>
@@ -6505,7 +6505,7 @@
               <a:buNone/>
             </a:pPr>
             <a:r>
-              <a:rPr lang="en-US" sz="1300" b="1" dirty="0">
+              <a:rPr lang="en-US" sz="1220" b="1" dirty="0">
                 <a:solidFill>
                   <a:srgbClr val="0068B7"/>
                 </a:solidFill>
@@ -6515,7 +6515,7 @@
               </a:rPr>
               <a:t>Next action</a:t>
             </a:r>
-            <a:endParaRPr lang="en-US" sz="1300" dirty="0"/>
+            <a:endParaRPr lang="en-US" sz="1220" dirty="0"/>
           </a:p>
         </p:txBody>
       </p:sp>
@@ -6527,8 +6527,8 @@
         </p:nvSpPr>
         <p:spPr>
           <a:xfrm>
-            <a:off x="7799832" y="4659782"/>
-            <a:ext cx="3145536" cy="899770"/>
+            <a:off x="7708392" y="4828032"/>
+            <a:ext cx="3282696" cy="749808"/>
           </a:xfrm>
           <a:prstGeom prst="rect">
             <a:avLst/>
@@ -6546,7 +6546,7 @@
               <a:buNone/>
             </a:pPr>
             <a:r>
-              <a:rPr lang="en-US" sz="1320" dirty="0">
+              <a:rPr lang="en-US" sz="1220" dirty="0">
                 <a:solidFill>
                   <a:srgbClr val="17364A"/>
                 </a:solidFill>
@@ -6554,9 +6554,9 @@
                 <a:ea typeface="Aptos" pitchFamily="34" charset="-122"/>
                 <a:cs typeface="Aptos" pitchFamily="34" charset="-120"/>
               </a:rPr>
-              <a:t>Use the concept to clarify workflow changes, dependencies, staffing, procurement requirements, training needs, and implementation checkpoints.</a:t>
-            </a:r>
-            <a:endParaRPr lang="en-US" sz="1320" dirty="0"/>
+              <a:t>Use the concept to clarify workflow changes, dependencies, staffing, procurement.</a:t>
+            </a:r>
+            <a:endParaRPr lang="en-US" sz="1220" dirty="0"/>
           </a:p>
         </p:txBody>
       </p:sp>
@@ -6847,8 +6847,8 @@
         </p:nvSpPr>
         <p:spPr>
           <a:xfrm>
-            <a:off x="868680" y="1508760"/>
-            <a:ext cx="6309360" cy="4160520"/>
+            <a:off x="822960" y="1463040"/>
+            <a:ext cx="6565392" cy="4343400"/>
           </a:xfrm>
           <a:prstGeom prst="rect">
             <a:avLst/>
@@ -6866,7 +6866,7 @@
               <a:buNone/>
             </a:pPr>
             <a:r>
-              <a:rPr lang="en-US" sz="2100" dirty="0">
+              <a:rPr lang="en-US" sz="1920" dirty="0">
                 <a:solidFill>
                   <a:srgbClr val="003A63"/>
                 </a:solidFill>
@@ -6874,16 +6874,16 @@
                 <a:ea typeface="Aptos" pitchFamily="34" charset="-122"/>
                 <a:cs typeface="Aptos" pitchFamily="34" charset="-120"/>
               </a:rPr>
-              <a:t>• Where does this topic appear in one current or proposed AI workflow in your agency?</a:t>
-            </a:r>
-            <a:endParaRPr lang="en-US" sz="2100" dirty="0"/>
-          </a:p>
-          <a:p>
-            <a:pPr indent="0" marL="0">
-              <a:buNone/>
-            </a:pPr>
-            <a:r>
-              <a:rPr lang="en-US" sz="2100" dirty="0">
+              <a:t>• Where does this topic appear in one current or proposed AI workflow in your.</a:t>
+            </a:r>
+            <a:endParaRPr lang="en-US" sz="1920" dirty="0"/>
+          </a:p>
+          <a:p>
+            <a:pPr indent="0" marL="0">
+              <a:buNone/>
+            </a:pPr>
+            <a:r>
+              <a:rPr lang="en-US" sz="1920" dirty="0">
                 <a:solidFill>
                   <a:srgbClr val="003A63"/>
                 </a:solidFill>
@@ -6891,16 +6891,16 @@
                 <a:ea typeface="Aptos" pitchFamily="34" charset="-122"/>
                 <a:cs typeface="Aptos" pitchFamily="34" charset="-120"/>
               </a:rPr>
-              <a:t>• What decisions, data sources, users, or partners would be affected if this area is poorly.</a:t>
-            </a:r>
-            <a:endParaRPr lang="en-US" sz="2100" dirty="0"/>
-          </a:p>
-          <a:p>
-            <a:pPr indent="0" marL="0">
-              <a:buNone/>
-            </a:pPr>
-            <a:r>
-              <a:rPr lang="en-US" sz="2100" dirty="0">
+              <a:t>• What decisions, data sources, users, or partners would be affected if this.</a:t>
+            </a:r>
+            <a:endParaRPr lang="en-US" sz="1920" dirty="0"/>
+          </a:p>
+          <a:p>
+            <a:pPr indent="0" marL="0">
+              <a:buNone/>
+            </a:pPr>
+            <a:r>
+              <a:rPr lang="en-US" sz="1920" dirty="0">
                 <a:solidFill>
                   <a:srgbClr val="003A63"/>
                 </a:solidFill>
@@ -6910,7 +6910,7 @@
               </a:rPr>
               <a:t>• What evidence would governance reviewers need before approving the workflow?</a:t>
             </a:r>
-            <a:endParaRPr lang="en-US" sz="2100" dirty="0"/>
+            <a:endParaRPr lang="en-US" sz="1920" dirty="0"/>
           </a:p>
         </p:txBody>
       </p:sp>
@@ -6922,12 +6922,12 @@
         </p:nvSpPr>
         <p:spPr>
           <a:xfrm>
-            <a:off x="7635240" y="1325880"/>
-            <a:ext cx="3474720" cy="1207008"/>
+            <a:off x="7543800" y="1325880"/>
+            <a:ext cx="3611880" cy="1261872"/>
           </a:xfrm>
           <a:prstGeom prst="roundRect">
             <a:avLst>
-              <a:gd name="adj" fmla="val 9091"/>
+              <a:gd name="adj" fmla="val 8696"/>
             </a:avLst>
           </a:prstGeom>
           <a:solidFill>
@@ -6949,8 +6949,8 @@
         </p:nvSpPr>
         <p:spPr>
           <a:xfrm>
-            <a:off x="7799832" y="1472184"/>
-            <a:ext cx="3145536" cy="256032"/>
+            <a:off x="7708392" y="1453896"/>
+            <a:ext cx="3282696" cy="228600"/>
           </a:xfrm>
           <a:prstGeom prst="rect">
             <a:avLst/>
@@ -6966,7 +6966,7 @@
               <a:buNone/>
             </a:pPr>
             <a:r>
-              <a:rPr lang="en-US" sz="1300" b="1" dirty="0">
+              <a:rPr lang="en-US" sz="1220" b="1" dirty="0">
                 <a:solidFill>
                   <a:srgbClr val="0068B7"/>
                 </a:solidFill>
@@ -6976,7 +6976,7 @@
               </a:rPr>
               <a:t>Implementation cue</a:t>
             </a:r>
-            <a:endParaRPr lang="en-US" sz="1300" dirty="0"/>
+            <a:endParaRPr lang="en-US" sz="1220" dirty="0"/>
           </a:p>
         </p:txBody>
       </p:sp>
@@ -6988,8 +6988,8 @@
         </p:nvSpPr>
         <p:spPr>
           <a:xfrm>
-            <a:off x="7799832" y="1801368"/>
-            <a:ext cx="3145536" cy="640080"/>
+            <a:off x="7708392" y="1764792"/>
+            <a:ext cx="3282696" cy="749808"/>
           </a:xfrm>
           <a:prstGeom prst="rect">
             <a:avLst/>
@@ -7007,7 +7007,7 @@
               <a:buNone/>
             </a:pPr>
             <a:r>
-              <a:rPr lang="en-US" sz="1320" dirty="0">
+              <a:rPr lang="en-US" sz="1220" dirty="0">
                 <a:solidFill>
                   <a:srgbClr val="17364A"/>
                 </a:solidFill>
@@ -7015,9 +7015,9 @@
                 <a:ea typeface="Aptos" pitchFamily="34" charset="-122"/>
                 <a:cs typeface="Aptos" pitchFamily="34" charset="-120"/>
               </a:rPr>
-              <a:t>Where does this topic appear in one current or proposed AI workflow in your agency?</a:t>
-            </a:r>
-            <a:endParaRPr lang="en-US" sz="1320" dirty="0"/>
+              <a:t>Where does this topic appear in one current or proposed AI workflow in your.</a:t>
+            </a:r>
+            <a:endParaRPr lang="en-US" sz="1220" dirty="0"/>
           </a:p>
         </p:txBody>
       </p:sp>
@@ -7029,12 +7029,12 @@
         </p:nvSpPr>
         <p:spPr>
           <a:xfrm>
-            <a:off x="7635240" y="2670048"/>
-            <a:ext cx="3474720" cy="1377086"/>
+            <a:off x="7543800" y="2724912"/>
+            <a:ext cx="3611880" cy="1527048"/>
           </a:xfrm>
           <a:prstGeom prst="roundRect">
             <a:avLst>
-              <a:gd name="adj" fmla="val 7968"/>
+              <a:gd name="adj" fmla="val 7186"/>
             </a:avLst>
           </a:prstGeom>
           <a:solidFill>
@@ -7056,8 +7056,8 @@
         </p:nvSpPr>
         <p:spPr>
           <a:xfrm>
-            <a:off x="7799832" y="2816352"/>
-            <a:ext cx="3145536" cy="256032"/>
+            <a:off x="7708392" y="2852928"/>
+            <a:ext cx="3282696" cy="228600"/>
           </a:xfrm>
           <a:prstGeom prst="rect">
             <a:avLst/>
@@ -7073,7 +7073,7 @@
               <a:buNone/>
             </a:pPr>
             <a:r>
-              <a:rPr lang="en-US" sz="1300" b="1" dirty="0">
+              <a:rPr lang="en-US" sz="1220" b="1" dirty="0">
                 <a:solidFill>
                   <a:srgbClr val="0068B7"/>
                 </a:solidFill>
@@ -7083,7 +7083,7 @@
               </a:rPr>
               <a:t>Concept checkpoints</a:t>
             </a:r>
-            <a:endParaRPr lang="en-US" sz="1300" dirty="0"/>
+            <a:endParaRPr lang="en-US" sz="1220" dirty="0"/>
           </a:p>
         </p:txBody>
       </p:sp>
@@ -7095,8 +7095,8 @@
         </p:nvSpPr>
         <p:spPr>
           <a:xfrm>
-            <a:off x="7818120" y="3182112"/>
-            <a:ext cx="3090672" cy="718718"/>
+            <a:off x="7726680" y="3182112"/>
+            <a:ext cx="3227832" cy="960120"/>
           </a:xfrm>
           <a:prstGeom prst="rect">
             <a:avLst/>
@@ -7114,7 +7114,7 @@
               <a:buNone/>
             </a:pPr>
             <a:r>
-              <a:rPr lang="en-US" sz="1220" dirty="0">
+              <a:rPr lang="en-US" sz="1140" dirty="0">
                 <a:solidFill>
                   <a:srgbClr val="17364A"/>
                 </a:solidFill>
@@ -7122,16 +7122,16 @@
                 <a:ea typeface="Aptos" pitchFamily="34" charset="-122"/>
                 <a:cs typeface="Aptos" pitchFamily="34" charset="-120"/>
               </a:rPr>
-              <a:t>Where does this topic appear in one current or proposed AI.</a:t>
-            </a:r>
-            <a:endParaRPr lang="en-US" sz="1220" dirty="0"/>
-          </a:p>
-          <a:p>
-            <a:pPr indent="0" marL="0">
-              <a:buNone/>
-            </a:pPr>
-            <a:r>
-              <a:rPr lang="en-US" sz="1220" dirty="0">
+              <a:t>Where does this topic appear in one current or.</a:t>
+            </a:r>
+            <a:endParaRPr lang="en-US" sz="1140" dirty="0"/>
+          </a:p>
+          <a:p>
+            <a:pPr indent="0" marL="0">
+              <a:buNone/>
+            </a:pPr>
+            <a:r>
+              <a:rPr lang="en-US" sz="1140" dirty="0">
                 <a:solidFill>
                   <a:srgbClr val="17364A"/>
                 </a:solidFill>
@@ -7139,16 +7139,16 @@
                 <a:ea typeface="Aptos" pitchFamily="34" charset="-122"/>
                 <a:cs typeface="Aptos" pitchFamily="34" charset="-120"/>
               </a:rPr>
-              <a:t>What decisions, data sources, users, or partners would be affected.</a:t>
-            </a:r>
-            <a:endParaRPr lang="en-US" sz="1220" dirty="0"/>
-          </a:p>
-          <a:p>
-            <a:pPr indent="0" marL="0">
-              <a:buNone/>
-            </a:pPr>
-            <a:r>
-              <a:rPr lang="en-US" sz="1220" dirty="0">
+              <a:t>What decisions, data sources, users, or partners.</a:t>
+            </a:r>
+            <a:endParaRPr lang="en-US" sz="1140" dirty="0"/>
+          </a:p>
+          <a:p>
+            <a:pPr indent="0" marL="0">
+              <a:buNone/>
+            </a:pPr>
+            <a:r>
+              <a:rPr lang="en-US" sz="1140" dirty="0">
                 <a:solidFill>
                   <a:srgbClr val="17364A"/>
                 </a:solidFill>
@@ -7156,9 +7156,9 @@
                 <a:ea typeface="Aptos" pitchFamily="34" charset="-122"/>
                 <a:cs typeface="Aptos" pitchFamily="34" charset="-120"/>
               </a:rPr>
-              <a:t>What evidence would governance reviewers need before approving the.</a:t>
-            </a:r>
-            <a:endParaRPr lang="en-US" sz="1220" dirty="0"/>
+              <a:t>What evidence would governance reviewers need.</a:t>
+            </a:r>
+            <a:endParaRPr lang="en-US" sz="1140" dirty="0"/>
           </a:p>
         </p:txBody>
       </p:sp>
@@ -7170,12 +7170,12 @@
         </p:nvSpPr>
         <p:spPr>
           <a:xfrm>
-            <a:off x="7635240" y="4184294"/>
-            <a:ext cx="3474720" cy="1466698"/>
+            <a:off x="7543800" y="4389120"/>
+            <a:ext cx="3611880" cy="1261872"/>
           </a:xfrm>
           <a:prstGeom prst="roundRect">
             <a:avLst>
-              <a:gd name="adj" fmla="val 7481"/>
+              <a:gd name="adj" fmla="val 8696"/>
             </a:avLst>
           </a:prstGeom>
           <a:solidFill>
@@ -7197,8 +7197,8 @@
         </p:nvSpPr>
         <p:spPr>
           <a:xfrm>
-            <a:off x="7799832" y="4330598"/>
-            <a:ext cx="3145536" cy="256032"/>
+            <a:off x="7708392" y="4517136"/>
+            <a:ext cx="3282696" cy="228600"/>
           </a:xfrm>
           <a:prstGeom prst="rect">
             <a:avLst/>
@@ -7214,7 +7214,7 @@
               <a:buNone/>
             </a:pPr>
             <a:r>
-              <a:rPr lang="en-US" sz="1300" b="1" dirty="0">
+              <a:rPr lang="en-US" sz="1220" b="1" dirty="0">
                 <a:solidFill>
                   <a:srgbClr val="0068B7"/>
                 </a:solidFill>
@@ -7224,7 +7224,7 @@
               </a:rPr>
               <a:t>Next action</a:t>
             </a:r>
-            <a:endParaRPr lang="en-US" sz="1300" dirty="0"/>
+            <a:endParaRPr lang="en-US" sz="1220" dirty="0"/>
           </a:p>
         </p:txBody>
       </p:sp>
@@ -7236,8 +7236,8 @@
         </p:nvSpPr>
         <p:spPr>
           <a:xfrm>
-            <a:off x="7799832" y="4659782"/>
-            <a:ext cx="3145536" cy="899770"/>
+            <a:off x="7708392" y="4828032"/>
+            <a:ext cx="3282696" cy="749808"/>
           </a:xfrm>
           <a:prstGeom prst="rect">
             <a:avLst/>
@@ -7255,7 +7255,7 @@
               <a:buNone/>
             </a:pPr>
             <a:r>
-              <a:rPr lang="en-US" sz="1320" dirty="0">
+              <a:rPr lang="en-US" sz="1220" dirty="0">
                 <a:solidFill>
                   <a:srgbClr val="17364A"/>
                 </a:solidFill>
@@ -7263,9 +7263,9 @@
                 <a:ea typeface="Aptos" pitchFamily="34" charset="-122"/>
                 <a:cs typeface="Aptos" pitchFamily="34" charset="-120"/>
               </a:rPr>
-              <a:t>Use the concept to clarify workflow changes, dependencies, staffing, procurement requirements, training needs, and implementation checkpoints.</a:t>
-            </a:r>
-            <a:endParaRPr lang="en-US" sz="1320" dirty="0"/>
+              <a:t>Use the concept to clarify workflow changes, dependencies, staffing, procurement.</a:t>
+            </a:r>
+            <a:endParaRPr lang="en-US" sz="1220" dirty="0"/>
           </a:p>
         </p:txBody>
       </p:sp>
@@ -7556,8 +7556,8 @@
         </p:nvSpPr>
         <p:spPr>
           <a:xfrm>
-            <a:off x="868680" y="1508760"/>
-            <a:ext cx="6309360" cy="4160520"/>
+            <a:off x="822960" y="1463040"/>
+            <a:ext cx="6565392" cy="4343400"/>
           </a:xfrm>
           <a:prstGeom prst="rect">
             <a:avLst/>
@@ -7575,7 +7575,7 @@
               <a:buNone/>
             </a:pPr>
             <a:r>
-              <a:rPr lang="en-US" sz="2100" dirty="0">
+              <a:rPr lang="en-US" sz="1920" dirty="0">
                 <a:solidFill>
                   <a:srgbClr val="003A63"/>
                 </a:solidFill>
@@ -7585,14 +7585,14 @@
               </a:rPr>
               <a:t>• Which safeguards should be required before pilot testing?</a:t>
             </a:r>
-            <a:endParaRPr lang="en-US" sz="2100" dirty="0"/>
-          </a:p>
-          <a:p>
-            <a:pPr indent="0" marL="0">
-              <a:buNone/>
-            </a:pPr>
-            <a:r>
-              <a:rPr lang="en-US" sz="2100" dirty="0">
+            <a:endParaRPr lang="en-US" sz="1920" dirty="0"/>
+          </a:p>
+          <a:p>
+            <a:pPr indent="0" marL="0">
+              <a:buNone/>
+            </a:pPr>
+            <a:r>
+              <a:rPr lang="en-US" sz="1920" dirty="0">
                 <a:solidFill>
                   <a:srgbClr val="003A63"/>
                 </a:solidFill>
@@ -7602,7 +7602,7 @@
               </a:rPr>
               <a:t>• Who owns ongoing monitoring and review?</a:t>
             </a:r>
-            <a:endParaRPr lang="en-US" sz="2100" dirty="0"/>
+            <a:endParaRPr lang="en-US" sz="1920" dirty="0"/>
           </a:p>
         </p:txBody>
       </p:sp>
@@ -7614,12 +7614,12 @@
         </p:nvSpPr>
         <p:spPr>
           <a:xfrm>
-            <a:off x="7635240" y="1325880"/>
-            <a:ext cx="3474720" cy="1207008"/>
+            <a:off x="7543800" y="1325880"/>
+            <a:ext cx="3611880" cy="1261872"/>
           </a:xfrm>
           <a:prstGeom prst="roundRect">
             <a:avLst>
-              <a:gd name="adj" fmla="val 9091"/>
+              <a:gd name="adj" fmla="val 8696"/>
             </a:avLst>
           </a:prstGeom>
           <a:solidFill>
@@ -7641,8 +7641,8 @@
         </p:nvSpPr>
         <p:spPr>
           <a:xfrm>
-            <a:off x="7799832" y="1472184"/>
-            <a:ext cx="3145536" cy="256032"/>
+            <a:off x="7708392" y="1453896"/>
+            <a:ext cx="3282696" cy="228600"/>
           </a:xfrm>
           <a:prstGeom prst="rect">
             <a:avLst/>
@@ -7658,7 +7658,7 @@
               <a:buNone/>
             </a:pPr>
             <a:r>
-              <a:rPr lang="en-US" sz="1300" b="1" dirty="0">
+              <a:rPr lang="en-US" sz="1220" b="1" dirty="0">
                 <a:solidFill>
                   <a:srgbClr val="0068B7"/>
                 </a:solidFill>
@@ -7668,7 +7668,7 @@
               </a:rPr>
               <a:t>Implementation cue</a:t>
             </a:r>
-            <a:endParaRPr lang="en-US" sz="1300" dirty="0"/>
+            <a:endParaRPr lang="en-US" sz="1220" dirty="0"/>
           </a:p>
         </p:txBody>
       </p:sp>
@@ -7680,8 +7680,8 @@
         </p:nvSpPr>
         <p:spPr>
           <a:xfrm>
-            <a:off x="7799832" y="1801368"/>
-            <a:ext cx="3145536" cy="640080"/>
+            <a:off x="7708392" y="1764792"/>
+            <a:ext cx="3282696" cy="749808"/>
           </a:xfrm>
           <a:prstGeom prst="rect">
             <a:avLst/>
@@ -7699,7 +7699,7 @@
               <a:buNone/>
             </a:pPr>
             <a:r>
-              <a:rPr lang="en-US" sz="1320" dirty="0">
+              <a:rPr lang="en-US" sz="1220" dirty="0">
                 <a:solidFill>
                   <a:srgbClr val="17364A"/>
                 </a:solidFill>
@@ -7709,7 +7709,7 @@
               </a:rPr>
               <a:t>Which safeguards should be required before pilot testing?</a:t>
             </a:r>
-            <a:endParaRPr lang="en-US" sz="1320" dirty="0"/>
+            <a:endParaRPr lang="en-US" sz="1220" dirty="0"/>
           </a:p>
         </p:txBody>
       </p:sp>
@@ -7721,12 +7721,12 @@
         </p:nvSpPr>
         <p:spPr>
           <a:xfrm>
-            <a:off x="7635240" y="2670048"/>
-            <a:ext cx="3474720" cy="1377086"/>
+            <a:off x="7543800" y="2724912"/>
+            <a:ext cx="3611880" cy="1527048"/>
           </a:xfrm>
           <a:prstGeom prst="roundRect">
             <a:avLst>
-              <a:gd name="adj" fmla="val 7968"/>
+              <a:gd name="adj" fmla="val 7186"/>
             </a:avLst>
           </a:prstGeom>
           <a:solidFill>
@@ -7748,8 +7748,8 @@
         </p:nvSpPr>
         <p:spPr>
           <a:xfrm>
-            <a:off x="7799832" y="2816352"/>
-            <a:ext cx="3145536" cy="256032"/>
+            <a:off x="7708392" y="2852928"/>
+            <a:ext cx="3282696" cy="228600"/>
           </a:xfrm>
           <a:prstGeom prst="rect">
             <a:avLst/>
@@ -7765,7 +7765,7 @@
               <a:buNone/>
             </a:pPr>
             <a:r>
-              <a:rPr lang="en-US" sz="1300" b="1" dirty="0">
+              <a:rPr lang="en-US" sz="1220" b="1" dirty="0">
                 <a:solidFill>
                   <a:srgbClr val="0068B7"/>
                 </a:solidFill>
@@ -7775,7 +7775,7 @@
               </a:rPr>
               <a:t>Concept checkpoints</a:t>
             </a:r>
-            <a:endParaRPr lang="en-US" sz="1300" dirty="0"/>
+            <a:endParaRPr lang="en-US" sz="1220" dirty="0"/>
           </a:p>
         </p:txBody>
       </p:sp>
@@ -7787,8 +7787,8 @@
         </p:nvSpPr>
         <p:spPr>
           <a:xfrm>
-            <a:off x="7818120" y="3182112"/>
-            <a:ext cx="3090672" cy="718718"/>
+            <a:off x="7726680" y="3182112"/>
+            <a:ext cx="3227832" cy="960120"/>
           </a:xfrm>
           <a:prstGeom prst="rect">
             <a:avLst/>
@@ -7806,7 +7806,7 @@
               <a:buNone/>
             </a:pPr>
             <a:r>
-              <a:rPr lang="en-US" sz="1220" dirty="0">
+              <a:rPr lang="en-US" sz="1140" dirty="0">
                 <a:solidFill>
                   <a:srgbClr val="17364A"/>
                 </a:solidFill>
@@ -7814,16 +7814,16 @@
                 <a:ea typeface="Aptos" pitchFamily="34" charset="-122"/>
                 <a:cs typeface="Aptos" pitchFamily="34" charset="-120"/>
               </a:rPr>
-              <a:t>Which safeguards should be required before pilot testing?</a:t>
-            </a:r>
-            <a:endParaRPr lang="en-US" sz="1220" dirty="0"/>
-          </a:p>
-          <a:p>
-            <a:pPr indent="0" marL="0">
-              <a:buNone/>
-            </a:pPr>
-            <a:r>
-              <a:rPr lang="en-US" sz="1220" dirty="0">
+              <a:t>Which safeguards should be required before pilot.</a:t>
+            </a:r>
+            <a:endParaRPr lang="en-US" sz="1140" dirty="0"/>
+          </a:p>
+          <a:p>
+            <a:pPr indent="0" marL="0">
+              <a:buNone/>
+            </a:pPr>
+            <a:r>
+              <a:rPr lang="en-US" sz="1140" dirty="0">
                 <a:solidFill>
                   <a:srgbClr val="17364A"/>
                 </a:solidFill>
@@ -7833,7 +7833,7 @@
               </a:rPr>
               <a:t>Who owns ongoing monitoring and review?</a:t>
             </a:r>
-            <a:endParaRPr lang="en-US" sz="1220" dirty="0"/>
+            <a:endParaRPr lang="en-US" sz="1140" dirty="0"/>
           </a:p>
         </p:txBody>
       </p:sp>
@@ -7845,12 +7845,12 @@
         </p:nvSpPr>
         <p:spPr>
           <a:xfrm>
-            <a:off x="7635240" y="4184294"/>
-            <a:ext cx="3474720" cy="1466698"/>
+            <a:off x="7543800" y="4389120"/>
+            <a:ext cx="3611880" cy="1261872"/>
           </a:xfrm>
           <a:prstGeom prst="roundRect">
             <a:avLst>
-              <a:gd name="adj" fmla="val 7481"/>
+              <a:gd name="adj" fmla="val 8696"/>
             </a:avLst>
           </a:prstGeom>
           <a:solidFill>
@@ -7872,8 +7872,8 @@
         </p:nvSpPr>
         <p:spPr>
           <a:xfrm>
-            <a:off x="7799832" y="4330598"/>
-            <a:ext cx="3145536" cy="256032"/>
+            <a:off x="7708392" y="4517136"/>
+            <a:ext cx="3282696" cy="228600"/>
           </a:xfrm>
           <a:prstGeom prst="rect">
             <a:avLst/>
@@ -7889,7 +7889,7 @@
               <a:buNone/>
             </a:pPr>
             <a:r>
-              <a:rPr lang="en-US" sz="1300" b="1" dirty="0">
+              <a:rPr lang="en-US" sz="1220" b="1" dirty="0">
                 <a:solidFill>
                   <a:srgbClr val="0068B7"/>
                 </a:solidFill>
@@ -7899,7 +7899,7 @@
               </a:rPr>
               <a:t>Next action</a:t>
             </a:r>
-            <a:endParaRPr lang="en-US" sz="1300" dirty="0"/>
+            <a:endParaRPr lang="en-US" sz="1220" dirty="0"/>
           </a:p>
         </p:txBody>
       </p:sp>
@@ -7911,8 +7911,8 @@
         </p:nvSpPr>
         <p:spPr>
           <a:xfrm>
-            <a:off x="7799832" y="4659782"/>
-            <a:ext cx="3145536" cy="899770"/>
+            <a:off x="7708392" y="4828032"/>
+            <a:ext cx="3282696" cy="749808"/>
           </a:xfrm>
           <a:prstGeom prst="rect">
             <a:avLst/>
@@ -7930,7 +7930,7 @@
               <a:buNone/>
             </a:pPr>
             <a:r>
-              <a:rPr lang="en-US" sz="1320" dirty="0">
+              <a:rPr lang="en-US" sz="1220" dirty="0">
                 <a:solidFill>
                   <a:srgbClr val="17364A"/>
                 </a:solidFill>
@@ -7938,9 +7938,9 @@
                 <a:ea typeface="Aptos" pitchFamily="34" charset="-122"/>
                 <a:cs typeface="Aptos" pitchFamily="34" charset="-120"/>
               </a:rPr>
-              <a:t>Use the concept to clarify workflow changes, dependencies, staffing, procurement requirements, training needs, and implementation checkpoints.</a:t>
-            </a:r>
-            <a:endParaRPr lang="en-US" sz="1320" dirty="0"/>
+              <a:t>Use the concept to clarify workflow changes, dependencies, staffing, procurement.</a:t>
+            </a:r>
+            <a:endParaRPr lang="en-US" sz="1220" dirty="0"/>
           </a:p>
         </p:txBody>
       </p:sp>
@@ -8231,8 +8231,8 @@
         </p:nvSpPr>
         <p:spPr>
           <a:xfrm>
-            <a:off x="868680" y="1508760"/>
-            <a:ext cx="6309360" cy="4160520"/>
+            <a:off x="822960" y="1463040"/>
+            <a:ext cx="6565392" cy="4343400"/>
           </a:xfrm>
           <a:prstGeom prst="rect">
             <a:avLst/>
@@ -8250,7 +8250,7 @@
               <a:buNone/>
             </a:pPr>
             <a:r>
-              <a:rPr lang="en-US" sz="2100" dirty="0">
+              <a:rPr lang="en-US" sz="1920" dirty="0">
                 <a:solidFill>
                   <a:srgbClr val="003A63"/>
                 </a:solidFill>
@@ -8258,16 +8258,16 @@
                 <a:ea typeface="Aptos" pitchFamily="34" charset="-122"/>
                 <a:cs typeface="Aptos" pitchFamily="34" charset="-120"/>
               </a:rPr>
-              <a:t>• Create a AI requirements matrix for one real or realistic public health AI workflow.</a:t>
-            </a:r>
-            <a:endParaRPr lang="en-US" sz="2100" dirty="0"/>
-          </a:p>
-          <a:p>
-            <a:pPr indent="0" marL="0">
-              <a:buNone/>
-            </a:pPr>
-            <a:r>
-              <a:rPr lang="en-US" sz="2100" dirty="0">
+              <a:t>• Create a AI requirements matrix for one real or realistic public health AI.</a:t>
+            </a:r>
+            <a:endParaRPr lang="en-US" sz="1920" dirty="0"/>
+          </a:p>
+          <a:p>
+            <a:pPr indent="0" marL="0">
+              <a:buNone/>
+            </a:pPr>
+            <a:r>
+              <a:rPr lang="en-US" sz="1920" dirty="0">
                 <a:solidFill>
                   <a:srgbClr val="003A63"/>
                 </a:solidFill>
@@ -8275,16 +8275,16 @@
                 <a:ea typeface="Aptos" pitchFamily="34" charset="-122"/>
                 <a:cs typeface="Aptos" pitchFamily="34" charset="-120"/>
               </a:rPr>
-              <a:t>• The artifact should describe the use case, affected users, data sources, system dependencies,.</a:t>
-            </a:r>
-            <a:endParaRPr lang="en-US" sz="2100" dirty="0"/>
-          </a:p>
-          <a:p>
-            <a:pPr indent="0" marL="0">
-              <a:buNone/>
-            </a:pPr>
-            <a:r>
-              <a:rPr lang="en-US" sz="2100" dirty="0">
+              <a:t>• The artifact should describe the use case, affected users, data sources,.</a:t>
+            </a:r>
+            <a:endParaRPr lang="en-US" sz="1920" dirty="0"/>
+          </a:p>
+          <a:p>
+            <a:pPr indent="0" marL="0">
+              <a:buNone/>
+            </a:pPr>
+            <a:r>
+              <a:rPr lang="en-US" sz="1920" dirty="0">
                 <a:solidFill>
                   <a:srgbClr val="003A63"/>
                 </a:solidFill>
@@ -8292,9 +8292,9 @@
                 <a:ea typeface="Aptos" pitchFamily="34" charset="-122"/>
                 <a:cs typeface="Aptos" pitchFamily="34" charset="-120"/>
               </a:rPr>
-              <a:t>• The exercise should produce a work product that could be used in a governance meeting,.</a:t>
-            </a:r>
-            <a:endParaRPr lang="en-US" sz="2100" dirty="0"/>
+              <a:t>• The exercise should produce a work product that could be used in a.</a:t>
+            </a:r>
+            <a:endParaRPr lang="en-US" sz="1920" dirty="0"/>
           </a:p>
         </p:txBody>
       </p:sp>
@@ -8306,12 +8306,12 @@
         </p:nvSpPr>
         <p:spPr>
           <a:xfrm>
-            <a:off x="7635240" y="1325880"/>
-            <a:ext cx="3474720" cy="1207008"/>
+            <a:off x="7543800" y="1325880"/>
+            <a:ext cx="3611880" cy="1261872"/>
           </a:xfrm>
           <a:prstGeom prst="roundRect">
             <a:avLst>
-              <a:gd name="adj" fmla="val 9091"/>
+              <a:gd name="adj" fmla="val 8696"/>
             </a:avLst>
           </a:prstGeom>
           <a:solidFill>
@@ -8333,8 +8333,8 @@
         </p:nvSpPr>
         <p:spPr>
           <a:xfrm>
-            <a:off x="7799832" y="1472184"/>
-            <a:ext cx="3145536" cy="256032"/>
+            <a:off x="7708392" y="1453896"/>
+            <a:ext cx="3282696" cy="228600"/>
           </a:xfrm>
           <a:prstGeom prst="rect">
             <a:avLst/>
@@ -8350,7 +8350,7 @@
               <a:buNone/>
             </a:pPr>
             <a:r>
-              <a:rPr lang="en-US" sz="1300" b="1" dirty="0">
+              <a:rPr lang="en-US" sz="1220" b="1" dirty="0">
                 <a:solidFill>
                   <a:srgbClr val="0068B7"/>
                 </a:solidFill>
@@ -8360,7 +8360,7 @@
               </a:rPr>
               <a:t>Implementation cue</a:t>
             </a:r>
-            <a:endParaRPr lang="en-US" sz="1300" dirty="0"/>
+            <a:endParaRPr lang="en-US" sz="1220" dirty="0"/>
           </a:p>
         </p:txBody>
       </p:sp>
@@ -8372,8 +8372,8 @@
         </p:nvSpPr>
         <p:spPr>
           <a:xfrm>
-            <a:off x="7799832" y="1801368"/>
-            <a:ext cx="3145536" cy="640080"/>
+            <a:off x="7708392" y="1764792"/>
+            <a:ext cx="3282696" cy="749808"/>
           </a:xfrm>
           <a:prstGeom prst="rect">
             <a:avLst/>
@@ -8391,7 +8391,7 @@
               <a:buNone/>
             </a:pPr>
             <a:r>
-              <a:rPr lang="en-US" sz="1320" dirty="0">
+              <a:rPr lang="en-US" sz="1220" dirty="0">
                 <a:solidFill>
                   <a:srgbClr val="17364A"/>
                 </a:solidFill>
@@ -8399,9 +8399,9 @@
                 <a:ea typeface="Aptos" pitchFamily="34" charset="-122"/>
                 <a:cs typeface="Aptos" pitchFamily="34" charset="-120"/>
               </a:rPr>
-              <a:t>Create a AI requirements matrix for one real or realistic public health AI workflow.</a:t>
-            </a:r>
-            <a:endParaRPr lang="en-US" sz="1320" dirty="0"/>
+              <a:t>Create a AI requirements matrix for one real or realistic public health AI.</a:t>
+            </a:r>
+            <a:endParaRPr lang="en-US" sz="1220" dirty="0"/>
           </a:p>
         </p:txBody>
       </p:sp>
@@ -8413,12 +8413,12 @@
         </p:nvSpPr>
         <p:spPr>
           <a:xfrm>
-            <a:off x="7635240" y="2670048"/>
-            <a:ext cx="3474720" cy="1377086"/>
+            <a:off x="7543800" y="2724912"/>
+            <a:ext cx="3611880" cy="1527048"/>
           </a:xfrm>
           <a:prstGeom prst="roundRect">
             <a:avLst>
-              <a:gd name="adj" fmla="val 7968"/>
+              <a:gd name="adj" fmla="val 7186"/>
             </a:avLst>
           </a:prstGeom>
           <a:solidFill>
@@ -8440,8 +8440,8 @@
         </p:nvSpPr>
         <p:spPr>
           <a:xfrm>
-            <a:off x="7799832" y="2816352"/>
-            <a:ext cx="3145536" cy="256032"/>
+            <a:off x="7708392" y="2852928"/>
+            <a:ext cx="3282696" cy="228600"/>
           </a:xfrm>
           <a:prstGeom prst="rect">
             <a:avLst/>
@@ -8457,7 +8457,7 @@
               <a:buNone/>
             </a:pPr>
             <a:r>
-              <a:rPr lang="en-US" sz="1300" b="1" dirty="0">
+              <a:rPr lang="en-US" sz="1220" b="1" dirty="0">
                 <a:solidFill>
                   <a:srgbClr val="0068B7"/>
                 </a:solidFill>
@@ -8467,7 +8467,7 @@
               </a:rPr>
               <a:t>Concept checkpoints</a:t>
             </a:r>
-            <a:endParaRPr lang="en-US" sz="1300" dirty="0"/>
+            <a:endParaRPr lang="en-US" sz="1220" dirty="0"/>
           </a:p>
         </p:txBody>
       </p:sp>
@@ -8479,8 +8479,8 @@
         </p:nvSpPr>
         <p:spPr>
           <a:xfrm>
-            <a:off x="7818120" y="3182112"/>
-            <a:ext cx="3090672" cy="718718"/>
+            <a:off x="7726680" y="3182112"/>
+            <a:ext cx="3227832" cy="960120"/>
           </a:xfrm>
           <a:prstGeom prst="rect">
             <a:avLst/>
@@ -8498,7 +8498,7 @@
               <a:buNone/>
             </a:pPr>
             <a:r>
-              <a:rPr lang="en-US" sz="1220" dirty="0">
+              <a:rPr lang="en-US" sz="1140" dirty="0">
                 <a:solidFill>
                   <a:srgbClr val="17364A"/>
                 </a:solidFill>
@@ -8506,16 +8506,16 @@
                 <a:ea typeface="Aptos" pitchFamily="34" charset="-122"/>
                 <a:cs typeface="Aptos" pitchFamily="34" charset="-120"/>
               </a:rPr>
-              <a:t>The artifact should describe the use case, affected users, data.</a:t>
-            </a:r>
-            <a:endParaRPr lang="en-US" sz="1220" dirty="0"/>
-          </a:p>
-          <a:p>
-            <a:pPr indent="0" marL="0">
-              <a:buNone/>
-            </a:pPr>
-            <a:r>
-              <a:rPr lang="en-US" sz="1220" dirty="0">
+              <a:t>The artifact should describe the use case,.</a:t>
+            </a:r>
+            <a:endParaRPr lang="en-US" sz="1140" dirty="0"/>
+          </a:p>
+          <a:p>
+            <a:pPr indent="0" marL="0">
+              <a:buNone/>
+            </a:pPr>
+            <a:r>
+              <a:rPr lang="en-US" sz="1140" dirty="0">
                 <a:solidFill>
                   <a:srgbClr val="17364A"/>
                 </a:solidFill>
@@ -8523,16 +8523,16 @@
                 <a:ea typeface="Aptos" pitchFamily="34" charset="-122"/>
                 <a:cs typeface="Aptos" pitchFamily="34" charset="-120"/>
               </a:rPr>
-              <a:t>The exercise should produce a work product that could be used in a.</a:t>
-            </a:r>
-            <a:endParaRPr lang="en-US" sz="1220" dirty="0"/>
-          </a:p>
-          <a:p>
-            <a:pPr indent="0" marL="0">
-              <a:buNone/>
-            </a:pPr>
-            <a:r>
-              <a:rPr lang="en-US" sz="1220" dirty="0">
+              <a:t>The exercise should produce a work product that.</a:t>
+            </a:r>
+            <a:endParaRPr lang="en-US" sz="1140" dirty="0"/>
+          </a:p>
+          <a:p>
+            <a:pPr indent="0" marL="0">
+              <a:buNone/>
+            </a:pPr>
+            <a:r>
+              <a:rPr lang="en-US" sz="1140" dirty="0">
                 <a:solidFill>
                   <a:srgbClr val="17364A"/>
                 </a:solidFill>
@@ -8540,9 +8540,9 @@
                 <a:ea typeface="Aptos" pitchFamily="34" charset="-122"/>
                 <a:cs typeface="Aptos" pitchFamily="34" charset="-120"/>
               </a:rPr>
-              <a:t>Learners should document assumptions and identify which staff or.</a:t>
-            </a:r>
-            <a:endParaRPr lang="en-US" sz="1220" dirty="0"/>
+              <a:t>Learners should document assumptions and identify.</a:t>
+            </a:r>
+            <a:endParaRPr lang="en-US" sz="1140" dirty="0"/>
           </a:p>
         </p:txBody>
       </p:sp>
@@ -8554,12 +8554,12 @@
         </p:nvSpPr>
         <p:spPr>
           <a:xfrm>
-            <a:off x="7635240" y="4184294"/>
-            <a:ext cx="3474720" cy="1466698"/>
+            <a:off x="7543800" y="4389120"/>
+            <a:ext cx="3611880" cy="1261872"/>
           </a:xfrm>
           <a:prstGeom prst="roundRect">
             <a:avLst>
-              <a:gd name="adj" fmla="val 7481"/>
+              <a:gd name="adj" fmla="val 8696"/>
             </a:avLst>
           </a:prstGeom>
           <a:solidFill>
@@ -8581,8 +8581,8 @@
         </p:nvSpPr>
         <p:spPr>
           <a:xfrm>
-            <a:off x="7799832" y="4330598"/>
-            <a:ext cx="3145536" cy="256032"/>
+            <a:off x="7708392" y="4517136"/>
+            <a:ext cx="3282696" cy="228600"/>
           </a:xfrm>
           <a:prstGeom prst="rect">
             <a:avLst/>
@@ -8598,7 +8598,7 @@
               <a:buNone/>
             </a:pPr>
             <a:r>
-              <a:rPr lang="en-US" sz="1300" b="1" dirty="0">
+              <a:rPr lang="en-US" sz="1220" b="1" dirty="0">
                 <a:solidFill>
                   <a:srgbClr val="0068B7"/>
                 </a:solidFill>
@@ -8608,7 +8608,7 @@
               </a:rPr>
               <a:t>Next action</a:t>
             </a:r>
-            <a:endParaRPr lang="en-US" sz="1300" dirty="0"/>
+            <a:endParaRPr lang="en-US" sz="1220" dirty="0"/>
           </a:p>
         </p:txBody>
       </p:sp>
@@ -8620,8 +8620,8 @@
         </p:nvSpPr>
         <p:spPr>
           <a:xfrm>
-            <a:off x="7799832" y="4659782"/>
-            <a:ext cx="3145536" cy="899770"/>
+            <a:off x="7708392" y="4828032"/>
+            <a:ext cx="3282696" cy="749808"/>
           </a:xfrm>
           <a:prstGeom prst="rect">
             <a:avLst/>
@@ -8639,7 +8639,7 @@
               <a:buNone/>
             </a:pPr>
             <a:r>
-              <a:rPr lang="en-US" sz="1320" dirty="0">
+              <a:rPr lang="en-US" sz="1220" dirty="0">
                 <a:solidFill>
                   <a:srgbClr val="17364A"/>
                 </a:solidFill>
@@ -8647,9 +8647,9 @@
                 <a:ea typeface="Aptos" pitchFamily="34" charset="-122"/>
                 <a:cs typeface="Aptos" pitchFamily="34" charset="-120"/>
               </a:rPr>
-              <a:t>Use the assignment to test whether you can explain the concept, apply it to a realistic public health situation, and identify what would need review before the work moves forward.</a:t>
-            </a:r>
-            <a:endParaRPr lang="en-US" sz="1320" dirty="0"/>
+              <a:t>Use the assignment to test whether you can explain the concept, apply it to a.</a:t>
+            </a:r>
+            <a:endParaRPr lang="en-US" sz="1220" dirty="0"/>
           </a:p>
         </p:txBody>
       </p:sp>
@@ -8940,8 +8940,8 @@
         </p:nvSpPr>
         <p:spPr>
           <a:xfrm>
-            <a:off x="868680" y="1508760"/>
-            <a:ext cx="6309360" cy="4160520"/>
+            <a:off x="822960" y="1463040"/>
+            <a:ext cx="6565392" cy="4343400"/>
           </a:xfrm>
           <a:prstGeom prst="rect">
             <a:avLst/>
@@ -8959,7 +8959,7 @@
               <a:buNone/>
             </a:pPr>
             <a:r>
-              <a:rPr lang="en-US" sz="2100" dirty="0">
+              <a:rPr lang="en-US" sz="1920" dirty="0">
                 <a:solidFill>
                   <a:srgbClr val="003A63"/>
                 </a:solidFill>
@@ -8969,14 +8969,14 @@
               </a:rPr>
               <a:t>• The expected artifact is a completed AI requirements matrix.</a:t>
             </a:r>
-            <a:endParaRPr lang="en-US" sz="2100" dirty="0"/>
-          </a:p>
-          <a:p>
-            <a:pPr indent="0" marL="0">
-              <a:buNone/>
-            </a:pPr>
-            <a:r>
-              <a:rPr lang="en-US" sz="2100" dirty="0">
+            <a:endParaRPr lang="en-US" sz="1920" dirty="0"/>
+          </a:p>
+          <a:p>
+            <a:pPr indent="0" marL="0">
+              <a:buNone/>
+            </a:pPr>
+            <a:r>
+              <a:rPr lang="en-US" sz="1920" dirty="0">
                 <a:solidFill>
                   <a:srgbClr val="003A63"/>
                 </a:solidFill>
@@ -8984,9 +8984,9 @@
                 <a:ea typeface="Aptos" pitchFamily="34" charset="-122"/>
                 <a:cs typeface="Aptos" pitchFamily="34" charset="-120"/>
               </a:rPr>
-              <a:t>• It should be specific to a public health workflow and should include technical dependencies,.</a:t>
-            </a:r>
-            <a:endParaRPr lang="en-US" sz="2100" dirty="0"/>
+              <a:t>• It should be specific to a public health workflow and should include.</a:t>
+            </a:r>
+            <a:endParaRPr lang="en-US" sz="1920" dirty="0"/>
           </a:p>
         </p:txBody>
       </p:sp>
@@ -8998,12 +8998,12 @@
         </p:nvSpPr>
         <p:spPr>
           <a:xfrm>
-            <a:off x="7635240" y="1325880"/>
-            <a:ext cx="3474720" cy="1207008"/>
+            <a:off x="7543800" y="1325880"/>
+            <a:ext cx="3611880" cy="1261872"/>
           </a:xfrm>
           <a:prstGeom prst="roundRect">
             <a:avLst>
-              <a:gd name="adj" fmla="val 9091"/>
+              <a:gd name="adj" fmla="val 8696"/>
             </a:avLst>
           </a:prstGeom>
           <a:solidFill>
@@ -9025,8 +9025,8 @@
         </p:nvSpPr>
         <p:spPr>
           <a:xfrm>
-            <a:off x="7799832" y="1472184"/>
-            <a:ext cx="3145536" cy="256032"/>
+            <a:off x="7708392" y="1453896"/>
+            <a:ext cx="3282696" cy="228600"/>
           </a:xfrm>
           <a:prstGeom prst="rect">
             <a:avLst/>
@@ -9042,7 +9042,7 @@
               <a:buNone/>
             </a:pPr>
             <a:r>
-              <a:rPr lang="en-US" sz="1300" b="1" dirty="0">
+              <a:rPr lang="en-US" sz="1220" b="1" dirty="0">
                 <a:solidFill>
                   <a:srgbClr val="0068B7"/>
                 </a:solidFill>
@@ -9052,7 +9052,7 @@
               </a:rPr>
               <a:t>Implementation cue</a:t>
             </a:r>
-            <a:endParaRPr lang="en-US" sz="1300" dirty="0"/>
+            <a:endParaRPr lang="en-US" sz="1220" dirty="0"/>
           </a:p>
         </p:txBody>
       </p:sp>
@@ -9064,8 +9064,8 @@
         </p:nvSpPr>
         <p:spPr>
           <a:xfrm>
-            <a:off x="7799832" y="1801368"/>
-            <a:ext cx="3145536" cy="640080"/>
+            <a:off x="7708392" y="1764792"/>
+            <a:ext cx="3282696" cy="749808"/>
           </a:xfrm>
           <a:prstGeom prst="rect">
             <a:avLst/>
@@ -9083,7 +9083,7 @@
               <a:buNone/>
             </a:pPr>
             <a:r>
-              <a:rPr lang="en-US" sz="1320" dirty="0">
+              <a:rPr lang="en-US" sz="1220" dirty="0">
                 <a:solidFill>
                   <a:srgbClr val="17364A"/>
                 </a:solidFill>
@@ -9093,7 +9093,7 @@
               </a:rPr>
               <a:t>The expected artifact is a completed AI requirements matrix.</a:t>
             </a:r>
-            <a:endParaRPr lang="en-US" sz="1320" dirty="0"/>
+            <a:endParaRPr lang="en-US" sz="1220" dirty="0"/>
           </a:p>
         </p:txBody>
       </p:sp>
@@ -9105,12 +9105,12 @@
         </p:nvSpPr>
         <p:spPr>
           <a:xfrm>
-            <a:off x="7635240" y="2670048"/>
-            <a:ext cx="3474720" cy="1377086"/>
+            <a:off x="7543800" y="2724912"/>
+            <a:ext cx="3611880" cy="1527048"/>
           </a:xfrm>
           <a:prstGeom prst="roundRect">
             <a:avLst>
-              <a:gd name="adj" fmla="val 7968"/>
+              <a:gd name="adj" fmla="val 7186"/>
             </a:avLst>
           </a:prstGeom>
           <a:solidFill>
@@ -9132,8 +9132,8 @@
         </p:nvSpPr>
         <p:spPr>
           <a:xfrm>
-            <a:off x="7799832" y="2816352"/>
-            <a:ext cx="3145536" cy="256032"/>
+            <a:off x="7708392" y="2852928"/>
+            <a:ext cx="3282696" cy="228600"/>
           </a:xfrm>
           <a:prstGeom prst="rect">
             <a:avLst/>
@@ -9149,7 +9149,7 @@
               <a:buNone/>
             </a:pPr>
             <a:r>
-              <a:rPr lang="en-US" sz="1300" b="1" dirty="0">
+              <a:rPr lang="en-US" sz="1220" b="1" dirty="0">
                 <a:solidFill>
                   <a:srgbClr val="0068B7"/>
                 </a:solidFill>
@@ -9159,7 +9159,7 @@
               </a:rPr>
               <a:t>Concept checkpoints</a:t>
             </a:r>
-            <a:endParaRPr lang="en-US" sz="1300" dirty="0"/>
+            <a:endParaRPr lang="en-US" sz="1220" dirty="0"/>
           </a:p>
         </p:txBody>
       </p:sp>
@@ -9171,8 +9171,8 @@
         </p:nvSpPr>
         <p:spPr>
           <a:xfrm>
-            <a:off x="7818120" y="3182112"/>
-            <a:ext cx="3090672" cy="718718"/>
+            <a:off x="7726680" y="3182112"/>
+            <a:ext cx="3227832" cy="960120"/>
           </a:xfrm>
           <a:prstGeom prst="rect">
             <a:avLst/>
@@ -9190,7 +9190,7 @@
               <a:buNone/>
             </a:pPr>
             <a:r>
-              <a:rPr lang="en-US" sz="1220" dirty="0">
+              <a:rPr lang="en-US" sz="1140" dirty="0">
                 <a:solidFill>
                   <a:srgbClr val="17364A"/>
                 </a:solidFill>
@@ -9198,16 +9198,16 @@
                 <a:ea typeface="Aptos" pitchFamily="34" charset="-122"/>
                 <a:cs typeface="Aptos" pitchFamily="34" charset="-120"/>
               </a:rPr>
-              <a:t>The expected artifact is a completed AI requirements matrix.</a:t>
-            </a:r>
-            <a:endParaRPr lang="en-US" sz="1220" dirty="0"/>
-          </a:p>
-          <a:p>
-            <a:pPr indent="0" marL="0">
-              <a:buNone/>
-            </a:pPr>
-            <a:r>
-              <a:rPr lang="en-US" sz="1220" dirty="0">
+              <a:t>The expected artifact is a completed AI.</a:t>
+            </a:r>
+            <a:endParaRPr lang="en-US" sz="1140" dirty="0"/>
+          </a:p>
+          <a:p>
+            <a:pPr indent="0" marL="0">
+              <a:buNone/>
+            </a:pPr>
+            <a:r>
+              <a:rPr lang="en-US" sz="1140" dirty="0">
                 <a:solidFill>
                   <a:srgbClr val="17364A"/>
                 </a:solidFill>
@@ -9215,9 +9215,9 @@
                 <a:ea typeface="Aptos" pitchFamily="34" charset="-122"/>
                 <a:cs typeface="Aptos" pitchFamily="34" charset="-120"/>
               </a:rPr>
-              <a:t>It should be specific to a public health workflow and should.</a:t>
-            </a:r>
-            <a:endParaRPr lang="en-US" sz="1220" dirty="0"/>
+              <a:t>It should be specific to a public health workflow.</a:t>
+            </a:r>
+            <a:endParaRPr lang="en-US" sz="1140" dirty="0"/>
           </a:p>
         </p:txBody>
       </p:sp>
@@ -9229,12 +9229,12 @@
         </p:nvSpPr>
         <p:spPr>
           <a:xfrm>
-            <a:off x="7635240" y="4184294"/>
-            <a:ext cx="3474720" cy="1466698"/>
+            <a:off x="7543800" y="4389120"/>
+            <a:ext cx="3611880" cy="1261872"/>
           </a:xfrm>
           <a:prstGeom prst="roundRect">
             <a:avLst>
-              <a:gd name="adj" fmla="val 7481"/>
+              <a:gd name="adj" fmla="val 8696"/>
             </a:avLst>
           </a:prstGeom>
           <a:solidFill>
@@ -9256,8 +9256,8 @@
         </p:nvSpPr>
         <p:spPr>
           <a:xfrm>
-            <a:off x="7799832" y="4330598"/>
-            <a:ext cx="3145536" cy="256032"/>
+            <a:off x="7708392" y="4517136"/>
+            <a:ext cx="3282696" cy="228600"/>
           </a:xfrm>
           <a:prstGeom prst="rect">
             <a:avLst/>
@@ -9273,7 +9273,7 @@
               <a:buNone/>
             </a:pPr>
             <a:r>
-              <a:rPr lang="en-US" sz="1300" b="1" dirty="0">
+              <a:rPr lang="en-US" sz="1220" b="1" dirty="0">
                 <a:solidFill>
                   <a:srgbClr val="0068B7"/>
                 </a:solidFill>
@@ -9283,7 +9283,7 @@
               </a:rPr>
               <a:t>Next action</a:t>
             </a:r>
-            <a:endParaRPr lang="en-US" sz="1300" dirty="0"/>
+            <a:endParaRPr lang="en-US" sz="1220" dirty="0"/>
           </a:p>
         </p:txBody>
       </p:sp>
@@ -9295,8 +9295,8 @@
         </p:nvSpPr>
         <p:spPr>
           <a:xfrm>
-            <a:off x="7799832" y="4659782"/>
-            <a:ext cx="3145536" cy="899770"/>
+            <a:off x="7708392" y="4828032"/>
+            <a:ext cx="3282696" cy="749808"/>
           </a:xfrm>
           <a:prstGeom prst="rect">
             <a:avLst/>
@@ -9314,7 +9314,7 @@
               <a:buNone/>
             </a:pPr>
             <a:r>
-              <a:rPr lang="en-US" sz="1320" dirty="0">
+              <a:rPr lang="en-US" sz="1220" dirty="0">
                 <a:solidFill>
                   <a:srgbClr val="17364A"/>
                 </a:solidFill>
@@ -9322,9 +9322,9 @@
                 <a:ea typeface="Aptos" pitchFamily="34" charset="-122"/>
                 <a:cs typeface="Aptos" pitchFamily="34" charset="-120"/>
               </a:rPr>
-              <a:t>Use the concept to clarify workflow changes, dependencies, staffing, procurement requirements, training needs, and implementation checkpoints.</a:t>
-            </a:r>
-            <a:endParaRPr lang="en-US" sz="1320" dirty="0"/>
+              <a:t>Use the concept to clarify workflow changes, dependencies, staffing, procurement.</a:t>
+            </a:r>
+            <a:endParaRPr lang="en-US" sz="1220" dirty="0"/>
           </a:p>
         </p:txBody>
       </p:sp>
@@ -9615,8 +9615,8 @@
         </p:nvSpPr>
         <p:spPr>
           <a:xfrm>
-            <a:off x="868680" y="1508760"/>
-            <a:ext cx="6309360" cy="4160520"/>
+            <a:off x="822960" y="1463040"/>
+            <a:ext cx="6565392" cy="4343400"/>
           </a:xfrm>
           <a:prstGeom prst="rect">
             <a:avLst/>
@@ -9634,7 +9634,7 @@
               <a:buNone/>
             </a:pPr>
             <a:r>
-              <a:rPr lang="en-US" sz="2100" dirty="0">
+              <a:rPr lang="en-US" sz="1920" dirty="0">
                 <a:solidFill>
                   <a:srgbClr val="003A63"/>
                 </a:solidFill>
@@ -9642,9 +9642,9 @@
                 <a:ea typeface="Aptos" pitchFamily="34" charset="-122"/>
                 <a:cs typeface="Aptos" pitchFamily="34" charset="-120"/>
               </a:rPr>
-              <a:t>• The expected artifact is a completed AI requirements matrix. It should be specific to a public.</a:t>
-            </a:r>
-            <a:endParaRPr lang="en-US" sz="2100" dirty="0"/>
+              <a:t>• The expected artifact is a completed AI requirements matrix. It should be.</a:t>
+            </a:r>
+            <a:endParaRPr lang="en-US" sz="1920" dirty="0"/>
           </a:p>
         </p:txBody>
       </p:sp>
@@ -9656,12 +9656,12 @@
         </p:nvSpPr>
         <p:spPr>
           <a:xfrm>
-            <a:off x="7635240" y="1325880"/>
-            <a:ext cx="3474720" cy="1255471"/>
+            <a:off x="7543800" y="1325880"/>
+            <a:ext cx="3611880" cy="1261872"/>
           </a:xfrm>
           <a:prstGeom prst="roundRect">
             <a:avLst>
-              <a:gd name="adj" fmla="val 8740"/>
+              <a:gd name="adj" fmla="val 8696"/>
             </a:avLst>
           </a:prstGeom>
           <a:solidFill>
@@ -9683,8 +9683,8 @@
         </p:nvSpPr>
         <p:spPr>
           <a:xfrm>
-            <a:off x="7799832" y="1472184"/>
-            <a:ext cx="3145536" cy="256032"/>
+            <a:off x="7708392" y="1453896"/>
+            <a:ext cx="3282696" cy="228600"/>
           </a:xfrm>
           <a:prstGeom prst="rect">
             <a:avLst/>
@@ -9700,7 +9700,7 @@
               <a:buNone/>
             </a:pPr>
             <a:r>
-              <a:rPr lang="en-US" sz="1300" b="1" dirty="0">
+              <a:rPr lang="en-US" sz="1220" b="1" dirty="0">
                 <a:solidFill>
                   <a:srgbClr val="0068B7"/>
                 </a:solidFill>
@@ -9710,7 +9710,7 @@
               </a:rPr>
               <a:t>Implementation cue</a:t>
             </a:r>
-            <a:endParaRPr lang="en-US" sz="1300" dirty="0"/>
+            <a:endParaRPr lang="en-US" sz="1220" dirty="0"/>
           </a:p>
         </p:txBody>
       </p:sp>
@@ -9722,8 +9722,8 @@
         </p:nvSpPr>
         <p:spPr>
           <a:xfrm>
-            <a:off x="7799832" y="1801368"/>
-            <a:ext cx="3145536" cy="688543"/>
+            <a:off x="7708392" y="1764792"/>
+            <a:ext cx="3282696" cy="749808"/>
           </a:xfrm>
           <a:prstGeom prst="rect">
             <a:avLst/>
@@ -9741,7 +9741,7 @@
               <a:buNone/>
             </a:pPr>
             <a:r>
-              <a:rPr lang="en-US" sz="1320" dirty="0">
+              <a:rPr lang="en-US" sz="1220" dirty="0">
                 <a:solidFill>
                   <a:srgbClr val="17364A"/>
                 </a:solidFill>
@@ -9749,9 +9749,9 @@
                 <a:ea typeface="Aptos" pitchFamily="34" charset="-122"/>
                 <a:cs typeface="Aptos" pitchFamily="34" charset="-120"/>
               </a:rPr>
-              <a:t>The expected artifact is a completed AI requirements matrix. It should be specific to a public health.</a:t>
-            </a:r>
-            <a:endParaRPr lang="en-US" sz="1320" dirty="0"/>
+              <a:t>The expected artifact is a completed AI requirements matrix. It should be.</a:t>
+            </a:r>
+            <a:endParaRPr lang="en-US" sz="1220" dirty="0"/>
           </a:p>
         </p:txBody>
       </p:sp>
@@ -9763,12 +9763,12 @@
         </p:nvSpPr>
         <p:spPr>
           <a:xfrm>
-            <a:off x="7635240" y="2718511"/>
-            <a:ext cx="3474720" cy="1328623"/>
+            <a:off x="7543800" y="2724912"/>
+            <a:ext cx="3611880" cy="1527048"/>
           </a:xfrm>
           <a:prstGeom prst="roundRect">
             <a:avLst>
-              <a:gd name="adj" fmla="val 8259"/>
+              <a:gd name="adj" fmla="val 7186"/>
             </a:avLst>
           </a:prstGeom>
           <a:solidFill>
@@ -9790,8 +9790,8 @@
         </p:nvSpPr>
         <p:spPr>
           <a:xfrm>
-            <a:off x="7799832" y="2864815"/>
-            <a:ext cx="3145536" cy="256032"/>
+            <a:off x="7708392" y="2852928"/>
+            <a:ext cx="3282696" cy="228600"/>
           </a:xfrm>
           <a:prstGeom prst="rect">
             <a:avLst/>
@@ -9807,7 +9807,7 @@
               <a:buNone/>
             </a:pPr>
             <a:r>
-              <a:rPr lang="en-US" sz="1300" b="1" dirty="0">
+              <a:rPr lang="en-US" sz="1220" b="1" dirty="0">
                 <a:solidFill>
                   <a:srgbClr val="0068B7"/>
                 </a:solidFill>
@@ -9817,7 +9817,7 @@
               </a:rPr>
               <a:t>Concept checkpoints</a:t>
             </a:r>
-            <a:endParaRPr lang="en-US" sz="1300" dirty="0"/>
+            <a:endParaRPr lang="en-US" sz="1220" dirty="0"/>
           </a:p>
         </p:txBody>
       </p:sp>
@@ -9829,8 +9829,8 @@
         </p:nvSpPr>
         <p:spPr>
           <a:xfrm>
-            <a:off x="7818120" y="3230575"/>
-            <a:ext cx="3090672" cy="670255"/>
+            <a:off x="7726680" y="3182112"/>
+            <a:ext cx="3227832" cy="960120"/>
           </a:xfrm>
           <a:prstGeom prst="rect">
             <a:avLst/>
@@ -9848,7 +9848,7 @@
               <a:buNone/>
             </a:pPr>
             <a:r>
-              <a:rPr lang="en-US" sz="1220" dirty="0">
+              <a:rPr lang="en-US" sz="1140" dirty="0">
                 <a:solidFill>
                   <a:srgbClr val="17364A"/>
                 </a:solidFill>
@@ -9856,16 +9856,16 @@
                 <a:ea typeface="Aptos" pitchFamily="34" charset="-122"/>
                 <a:cs typeface="Aptos" pitchFamily="34" charset="-120"/>
               </a:rPr>
-              <a:t>The expected artifact is a completed AI requirements matrix.</a:t>
-            </a:r>
-            <a:endParaRPr lang="en-US" sz="1220" dirty="0"/>
-          </a:p>
-          <a:p>
-            <a:pPr indent="0" marL="0">
-              <a:buNone/>
-            </a:pPr>
-            <a:r>
-              <a:rPr lang="en-US" sz="1220" dirty="0">
+              <a:t>The expected artifact is a completed AI.</a:t>
+            </a:r>
+            <a:endParaRPr lang="en-US" sz="1140" dirty="0"/>
+          </a:p>
+          <a:p>
+            <a:pPr indent="0" marL="0">
+              <a:buNone/>
+            </a:pPr>
+            <a:r>
+              <a:rPr lang="en-US" sz="1140" dirty="0">
                 <a:solidFill>
                   <a:srgbClr val="17364A"/>
                 </a:solidFill>
@@ -9873,9 +9873,9 @@
                 <a:ea typeface="Aptos" pitchFamily="34" charset="-122"/>
                 <a:cs typeface="Aptos" pitchFamily="34" charset="-120"/>
               </a:rPr>
-              <a:t>It should be specific to a public health workflow and should.</a:t>
-            </a:r>
-            <a:endParaRPr lang="en-US" sz="1220" dirty="0"/>
+              <a:t>It should be specific to a public health workflow.</a:t>
+            </a:r>
+            <a:endParaRPr lang="en-US" sz="1140" dirty="0"/>
           </a:p>
         </p:txBody>
       </p:sp>
@@ -9887,12 +9887,12 @@
         </p:nvSpPr>
         <p:spPr>
           <a:xfrm>
-            <a:off x="7635240" y="4184294"/>
-            <a:ext cx="3474720" cy="1466698"/>
+            <a:off x="7543800" y="4389120"/>
+            <a:ext cx="3611880" cy="1261872"/>
           </a:xfrm>
           <a:prstGeom prst="roundRect">
             <a:avLst>
-              <a:gd name="adj" fmla="val 7481"/>
+              <a:gd name="adj" fmla="val 8696"/>
             </a:avLst>
           </a:prstGeom>
           <a:solidFill>
@@ -9914,8 +9914,8 @@
         </p:nvSpPr>
         <p:spPr>
           <a:xfrm>
-            <a:off x="7799832" y="4330598"/>
-            <a:ext cx="3145536" cy="256032"/>
+            <a:off x="7708392" y="4517136"/>
+            <a:ext cx="3282696" cy="228600"/>
           </a:xfrm>
           <a:prstGeom prst="rect">
             <a:avLst/>
@@ -9931,7 +9931,7 @@
               <a:buNone/>
             </a:pPr>
             <a:r>
-              <a:rPr lang="en-US" sz="1300" b="1" dirty="0">
+              <a:rPr lang="en-US" sz="1220" b="1" dirty="0">
                 <a:solidFill>
                   <a:srgbClr val="0068B7"/>
                 </a:solidFill>
@@ -9941,7 +9941,7 @@
               </a:rPr>
               <a:t>Next action</a:t>
             </a:r>
-            <a:endParaRPr lang="en-US" sz="1300" dirty="0"/>
+            <a:endParaRPr lang="en-US" sz="1220" dirty="0"/>
           </a:p>
         </p:txBody>
       </p:sp>
@@ -9953,8 +9953,8 @@
         </p:nvSpPr>
         <p:spPr>
           <a:xfrm>
-            <a:off x="7799832" y="4659782"/>
-            <a:ext cx="3145536" cy="899770"/>
+            <a:off x="7708392" y="4828032"/>
+            <a:ext cx="3282696" cy="749808"/>
           </a:xfrm>
           <a:prstGeom prst="rect">
             <a:avLst/>
@@ -9972,7 +9972,7 @@
               <a:buNone/>
             </a:pPr>
             <a:r>
-              <a:rPr lang="en-US" sz="1320" dirty="0">
+              <a:rPr lang="en-US" sz="1220" dirty="0">
                 <a:solidFill>
                   <a:srgbClr val="17364A"/>
                 </a:solidFill>
@@ -9980,9 +9980,9 @@
                 <a:ea typeface="Aptos" pitchFamily="34" charset="-122"/>
                 <a:cs typeface="Aptos" pitchFamily="34" charset="-120"/>
               </a:rPr>
-              <a:t>Use the assignment to test whether you can explain the concept, apply it to a realistic public health situation, and identify what would need review before the work moves forward.</a:t>
-            </a:r>
-            <a:endParaRPr lang="en-US" sz="1320" dirty="0"/>
+              <a:t>Use the assignment to test whether you can explain the concept, apply it to a.</a:t>
+            </a:r>
+            <a:endParaRPr lang="en-US" sz="1220" dirty="0"/>
           </a:p>
         </p:txBody>
       </p:sp>
@@ -10300,7 +10300,7 @@
                 <a:ea typeface="Aptos" pitchFamily="34" charset="-122"/>
                 <a:cs typeface="Aptos" pitchFamily="34" charset="-120"/>
               </a:rPr>
-              <a:t>• AI procurement requires stronger requirements than ordinary software purchasing because.</a:t>
+              <a:t>• AI procurement requires stronger requirements than ordinary software.</a:t>
             </a:r>
             <a:endParaRPr lang="en-US" sz="2100" dirty="0"/>
           </a:p>
@@ -10317,7 +10317,7 @@
                 <a:ea typeface="Aptos" pitchFamily="34" charset="-122"/>
                 <a:cs typeface="Aptos" pitchFamily="34" charset="-120"/>
               </a:rPr>
-              <a:t>• This module teaches learners how to write requirements that can be evaluated, tested,.</a:t>
+              <a:t>• This module teaches learners how to write requirements that can be.</a:t>
             </a:r>
             <a:endParaRPr lang="en-US" sz="2100" dirty="0"/>
           </a:p>
@@ -10358,8 +10358,8 @@
         </p:nvSpPr>
         <p:spPr>
           <a:xfrm>
-            <a:off x="8074152" y="1563624"/>
-            <a:ext cx="2825496" cy="256032"/>
+            <a:off x="8074152" y="1545336"/>
+            <a:ext cx="2825496" cy="228600"/>
           </a:xfrm>
           <a:prstGeom prst="rect">
             <a:avLst/>
@@ -10375,7 +10375,7 @@
               <a:buNone/>
             </a:pPr>
             <a:r>
-              <a:rPr lang="en-US" sz="1300" b="1" dirty="0">
+              <a:rPr lang="en-US" sz="1220" b="1" dirty="0">
                 <a:solidFill>
                   <a:srgbClr val="0068B7"/>
                 </a:solidFill>
@@ -10385,7 +10385,7 @@
               </a:rPr>
               <a:t>Module details</a:t>
             </a:r>
-            <a:endParaRPr lang="en-US" sz="1300" dirty="0"/>
+            <a:endParaRPr lang="en-US" sz="1220" dirty="0"/>
           </a:p>
         </p:txBody>
       </p:sp>
@@ -10397,8 +10397,8 @@
         </p:nvSpPr>
         <p:spPr>
           <a:xfrm>
-            <a:off x="8074152" y="1892808"/>
-            <a:ext cx="2825496" cy="1353312"/>
+            <a:off x="8074152" y="1856232"/>
+            <a:ext cx="2825496" cy="1408176"/>
           </a:xfrm>
           <a:prstGeom prst="rect">
             <a:avLst/>
@@ -10416,7 +10416,7 @@
               <a:buNone/>
             </a:pPr>
             <a:r>
-              <a:rPr lang="en-US" sz="1320" dirty="0">
+              <a:rPr lang="en-US" sz="1220" dirty="0">
                 <a:solidFill>
                   <a:srgbClr val="17364A"/>
                 </a:solidFill>
@@ -10424,9 +10424,9 @@
                 <a:ea typeface="Aptos" pitchFamily="34" charset="-122"/>
                 <a:cs typeface="Aptos" pitchFamily="34" charset="-120"/>
               </a:rPr>
-              <a:t>Level: applied/foundational Primary track: Program Management Role-Based Track Appears in tracks: operations-data-quality</a:t>
-            </a:r>
-            <a:endParaRPr lang="en-US" sz="1320" dirty="0"/>
+              <a:t>Level: applied/foundational Primary track: Program Management Role-Based Track.</a:t>
+            </a:r>
+            <a:endParaRPr lang="en-US" sz="1220" dirty="0"/>
           </a:p>
         </p:txBody>
       </p:sp>
@@ -10465,8 +10465,8 @@
         </p:nvSpPr>
         <p:spPr>
           <a:xfrm>
-            <a:off x="8074152" y="3822192"/>
-            <a:ext cx="2825496" cy="256032"/>
+            <a:off x="8074152" y="3803904"/>
+            <a:ext cx="2825496" cy="228600"/>
           </a:xfrm>
           <a:prstGeom prst="rect">
             <a:avLst/>
@@ -10482,7 +10482,7 @@
               <a:buNone/>
             </a:pPr>
             <a:r>
-              <a:rPr lang="en-US" sz="1300" b="1" dirty="0">
+              <a:rPr lang="en-US" sz="1220" b="1" dirty="0">
                 <a:solidFill>
                   <a:srgbClr val="0068B7"/>
                 </a:solidFill>
@@ -10492,7 +10492,7 @@
               </a:rPr>
               <a:t>Learning sequence</a:t>
             </a:r>
-            <a:endParaRPr lang="en-US" sz="1300" dirty="0"/>
+            <a:endParaRPr lang="en-US" sz="1220" dirty="0"/>
           </a:p>
         </p:txBody>
       </p:sp>
@@ -10504,8 +10504,8 @@
         </p:nvSpPr>
         <p:spPr>
           <a:xfrm>
-            <a:off x="8092440" y="4187952"/>
-            <a:ext cx="2770632" cy="1033272"/>
+            <a:off x="8092440" y="4133088"/>
+            <a:ext cx="2770632" cy="1124712"/>
           </a:xfrm>
           <a:prstGeom prst="rect">
             <a:avLst/>
@@ -10523,7 +10523,7 @@
               <a:buNone/>
             </a:pPr>
             <a:r>
-              <a:rPr lang="en-US" sz="1220" dirty="0">
+              <a:rPr lang="en-US" sz="1140" dirty="0">
                 <a:solidFill>
                   <a:srgbClr val="17364A"/>
                 </a:solidFill>
@@ -10533,14 +10533,14 @@
               </a:rPr>
               <a:t>Read the module for shared vocabulary and context.</a:t>
             </a:r>
-            <a:endParaRPr lang="en-US" sz="1220" dirty="0"/>
-          </a:p>
-          <a:p>
-            <a:pPr indent="0" marL="0">
-              <a:buNone/>
-            </a:pPr>
-            <a:r>
-              <a:rPr lang="en-US" sz="1220" dirty="0">
+            <a:endParaRPr lang="en-US" sz="1140" dirty="0"/>
+          </a:p>
+          <a:p>
+            <a:pPr indent="0" marL="0">
+              <a:buNone/>
+            </a:pPr>
+            <a:r>
+              <a:rPr lang="en-US" sz="1140" dirty="0">
                 <a:solidFill>
                   <a:srgbClr val="17364A"/>
                 </a:solidFill>
@@ -10548,16 +10548,16 @@
                 <a:ea typeface="Aptos" pitchFamily="34" charset="-122"/>
                 <a:cs typeface="Aptos" pitchFamily="34" charset="-120"/>
               </a:rPr>
-              <a:t>Complete the practical exercise to apply the concept.</a:t>
-            </a:r>
-            <a:endParaRPr lang="en-US" sz="1220" dirty="0"/>
-          </a:p>
-          <a:p>
-            <a:pPr indent="0" marL="0">
-              <a:buNone/>
-            </a:pPr>
-            <a:r>
-              <a:rPr lang="en-US" sz="1220" dirty="0">
+              <a:t>Complete the practical exercise to apply the.</a:t>
+            </a:r>
+            <a:endParaRPr lang="en-US" sz="1140" dirty="0"/>
+          </a:p>
+          <a:p>
+            <a:pPr indent="0" marL="0">
+              <a:buNone/>
+            </a:pPr>
+            <a:r>
+              <a:rPr lang="en-US" sz="1140" dirty="0">
                 <a:solidFill>
                   <a:srgbClr val="17364A"/>
                 </a:solidFill>
@@ -10567,7 +10567,7 @@
               </a:rPr>
               <a:t>Use the notes and references for deeper review.</a:t>
             </a:r>
-            <a:endParaRPr lang="en-US" sz="1220" dirty="0"/>
+            <a:endParaRPr lang="en-US" sz="1140" dirty="0"/>
           </a:p>
         </p:txBody>
       </p:sp>
@@ -10858,8 +10858,8 @@
         </p:nvSpPr>
         <p:spPr>
           <a:xfrm>
-            <a:off x="868680" y="1508760"/>
-            <a:ext cx="6309360" cy="4160520"/>
+            <a:off x="822960" y="1463040"/>
+            <a:ext cx="6565392" cy="4343400"/>
           </a:xfrm>
           <a:prstGeom prst="rect">
             <a:avLst/>
@@ -10877,7 +10877,7 @@
               <a:buNone/>
             </a:pPr>
             <a:r>
-              <a:rPr lang="en-US" sz="2100" dirty="0">
+              <a:rPr lang="en-US" sz="1920" dirty="0">
                 <a:solidFill>
                   <a:srgbClr val="003A63"/>
                 </a:solidFill>
@@ -10885,16 +10885,16 @@
                 <a:ea typeface="Aptos" pitchFamily="34" charset="-122"/>
                 <a:cs typeface="Aptos" pitchFamily="34" charset="-120"/>
               </a:rPr>
-              <a:t>• 1. What is the best reason to address requirements writing for ai procurement and.</a:t>
-            </a:r>
-            <a:endParaRPr lang="en-US" sz="2100" dirty="0"/>
-          </a:p>
-          <a:p>
-            <a:pPr indent="0" marL="0">
-              <a:buNone/>
-            </a:pPr>
-            <a:r>
-              <a:rPr lang="en-US" sz="2100" dirty="0">
+              <a:t>• 1. What is the best reason to address requirements writing for ai.</a:t>
+            </a:r>
+            <a:endParaRPr lang="en-US" sz="1920" dirty="0"/>
+          </a:p>
+          <a:p>
+            <a:pPr indent="0" marL="0">
+              <a:buNone/>
+            </a:pPr>
+            <a:r>
+              <a:rPr lang="en-US" sz="1920" dirty="0">
                 <a:solidFill>
                   <a:srgbClr val="003A63"/>
                 </a:solidFill>
@@ -10904,14 +10904,14 @@
               </a:rPr>
               <a:t>• 2. Which practice best supports responsible implementation?</a:t>
             </a:r>
-            <a:endParaRPr lang="en-US" sz="2100" dirty="0"/>
-          </a:p>
-          <a:p>
-            <a:pPr indent="0" marL="0">
-              <a:buNone/>
-            </a:pPr>
-            <a:r>
-              <a:rPr lang="en-US" sz="2100" dirty="0">
+            <a:endParaRPr lang="en-US" sz="1920" dirty="0"/>
+          </a:p>
+          <a:p>
+            <a:pPr indent="0" marL="0">
+              <a:buNone/>
+            </a:pPr>
+            <a:r>
+              <a:rPr lang="en-US" sz="1920" dirty="0">
                 <a:solidFill>
                   <a:srgbClr val="003A63"/>
                 </a:solidFill>
@@ -10921,7 +10921,7 @@
               </a:rPr>
               <a:t>• 3. Which statement best describes a common failure mode?</a:t>
             </a:r>
-            <a:endParaRPr lang="en-US" sz="2100" dirty="0"/>
+            <a:endParaRPr lang="en-US" sz="1920" dirty="0"/>
           </a:p>
         </p:txBody>
       </p:sp>
@@ -10933,12 +10933,12 @@
         </p:nvSpPr>
         <p:spPr>
           <a:xfrm>
-            <a:off x="7635240" y="1325880"/>
-            <a:ext cx="3474720" cy="1255471"/>
+            <a:off x="7543800" y="1325880"/>
+            <a:ext cx="3611880" cy="1261872"/>
           </a:xfrm>
           <a:prstGeom prst="roundRect">
             <a:avLst>
-              <a:gd name="adj" fmla="val 8740"/>
+              <a:gd name="adj" fmla="val 8696"/>
             </a:avLst>
           </a:prstGeom>
           <a:solidFill>
@@ -10960,8 +10960,8 @@
         </p:nvSpPr>
         <p:spPr>
           <a:xfrm>
-            <a:off x="7799832" y="1472184"/>
-            <a:ext cx="3145536" cy="256032"/>
+            <a:off x="7708392" y="1453896"/>
+            <a:ext cx="3282696" cy="228600"/>
           </a:xfrm>
           <a:prstGeom prst="rect">
             <a:avLst/>
@@ -10977,7 +10977,7 @@
               <a:buNone/>
             </a:pPr>
             <a:r>
-              <a:rPr lang="en-US" sz="1300" b="1" dirty="0">
+              <a:rPr lang="en-US" sz="1220" b="1" dirty="0">
                 <a:solidFill>
                   <a:srgbClr val="0068B7"/>
                 </a:solidFill>
@@ -10987,7 +10987,7 @@
               </a:rPr>
               <a:t>Implementation cue</a:t>
             </a:r>
-            <a:endParaRPr lang="en-US" sz="1300" dirty="0"/>
+            <a:endParaRPr lang="en-US" sz="1220" dirty="0"/>
           </a:p>
         </p:txBody>
       </p:sp>
@@ -10999,8 +10999,8 @@
         </p:nvSpPr>
         <p:spPr>
           <a:xfrm>
-            <a:off x="7799832" y="1801368"/>
-            <a:ext cx="3145536" cy="688543"/>
+            <a:off x="7708392" y="1764792"/>
+            <a:ext cx="3282696" cy="749808"/>
           </a:xfrm>
           <a:prstGeom prst="rect">
             <a:avLst/>
@@ -11018,7 +11018,7 @@
               <a:buNone/>
             </a:pPr>
             <a:r>
-              <a:rPr lang="en-US" sz="1320" dirty="0">
+              <a:rPr lang="en-US" sz="1220" dirty="0">
                 <a:solidFill>
                   <a:srgbClr val="17364A"/>
                 </a:solidFill>
@@ -11026,9 +11026,9 @@
                 <a:ea typeface="Aptos" pitchFamily="34" charset="-122"/>
                 <a:cs typeface="Aptos" pitchFamily="34" charset="-120"/>
               </a:rPr>
-              <a:t>1. What is the best reason to address requirements writing for ai procurement and implementation before.</a:t>
-            </a:r>
-            <a:endParaRPr lang="en-US" sz="1320" dirty="0"/>
+              <a:t>1. What is the best reason to address requirements writing for ai procurement.</a:t>
+            </a:r>
+            <a:endParaRPr lang="en-US" sz="1220" dirty="0"/>
           </a:p>
         </p:txBody>
       </p:sp>
@@ -11040,12 +11040,12 @@
         </p:nvSpPr>
         <p:spPr>
           <a:xfrm>
-            <a:off x="7635240" y="2718511"/>
-            <a:ext cx="3474720" cy="1328623"/>
+            <a:off x="7543800" y="2724912"/>
+            <a:ext cx="3611880" cy="1527048"/>
           </a:xfrm>
           <a:prstGeom prst="roundRect">
             <a:avLst>
-              <a:gd name="adj" fmla="val 8259"/>
+              <a:gd name="adj" fmla="val 7186"/>
             </a:avLst>
           </a:prstGeom>
           <a:solidFill>
@@ -11067,8 +11067,8 @@
         </p:nvSpPr>
         <p:spPr>
           <a:xfrm>
-            <a:off x="7799832" y="2864815"/>
-            <a:ext cx="3145536" cy="256032"/>
+            <a:off x="7708392" y="2852928"/>
+            <a:ext cx="3282696" cy="228600"/>
           </a:xfrm>
           <a:prstGeom prst="rect">
             <a:avLst/>
@@ -11084,7 +11084,7 @@
               <a:buNone/>
             </a:pPr>
             <a:r>
-              <a:rPr lang="en-US" sz="1300" b="1" dirty="0">
+              <a:rPr lang="en-US" sz="1220" b="1" dirty="0">
                 <a:solidFill>
                   <a:srgbClr val="0068B7"/>
                 </a:solidFill>
@@ -11094,7 +11094,7 @@
               </a:rPr>
               <a:t>Concept checkpoints</a:t>
             </a:r>
-            <a:endParaRPr lang="en-US" sz="1300" dirty="0"/>
+            <a:endParaRPr lang="en-US" sz="1220" dirty="0"/>
           </a:p>
         </p:txBody>
       </p:sp>
@@ -11106,8 +11106,8 @@
         </p:nvSpPr>
         <p:spPr>
           <a:xfrm>
-            <a:off x="7818120" y="3230575"/>
-            <a:ext cx="3090672" cy="670255"/>
+            <a:off x="7726680" y="3182112"/>
+            <a:ext cx="3227832" cy="960120"/>
           </a:xfrm>
           <a:prstGeom prst="rect">
             <a:avLst/>
@@ -11125,7 +11125,7 @@
               <a:buNone/>
             </a:pPr>
             <a:r>
-              <a:rPr lang="en-US" sz="1220" dirty="0">
+              <a:rPr lang="en-US" sz="1140" dirty="0">
                 <a:solidFill>
                   <a:srgbClr val="17364A"/>
                 </a:solidFill>
@@ -11135,14 +11135,14 @@
               </a:rPr>
               <a:t>1.</a:t>
             </a:r>
-            <a:endParaRPr lang="en-US" sz="1220" dirty="0"/>
-          </a:p>
-          <a:p>
-            <a:pPr indent="0" marL="0">
-              <a:buNone/>
-            </a:pPr>
-            <a:r>
-              <a:rPr lang="en-US" sz="1220" dirty="0">
+            <a:endParaRPr lang="en-US" sz="1140" dirty="0"/>
+          </a:p>
+          <a:p>
+            <a:pPr indent="0" marL="0">
+              <a:buNone/>
+            </a:pPr>
+            <a:r>
+              <a:rPr lang="en-US" sz="1140" dirty="0">
                 <a:solidFill>
                   <a:srgbClr val="17364A"/>
                 </a:solidFill>
@@ -11150,16 +11150,16 @@
                 <a:ea typeface="Aptos" pitchFamily="34" charset="-122"/>
                 <a:cs typeface="Aptos" pitchFamily="34" charset="-120"/>
               </a:rPr>
-              <a:t>What is the best reason to address requirements writing for ai.</a:t>
-            </a:r>
-            <a:endParaRPr lang="en-US" sz="1220" dirty="0"/>
-          </a:p>
-          <a:p>
-            <a:pPr indent="0" marL="0">
-              <a:buNone/>
-            </a:pPr>
-            <a:r>
-              <a:rPr lang="en-US" sz="1220" dirty="0">
+              <a:t>What is the best reason to address requirements.</a:t>
+            </a:r>
+            <a:endParaRPr lang="en-US" sz="1140" dirty="0"/>
+          </a:p>
+          <a:p>
+            <a:pPr indent="0" marL="0">
+              <a:buNone/>
+            </a:pPr>
+            <a:r>
+              <a:rPr lang="en-US" sz="1140" dirty="0">
                 <a:solidFill>
                   <a:srgbClr val="17364A"/>
                 </a:solidFill>
@@ -11169,7 +11169,7 @@
               </a:rPr>
               <a:t>2.</a:t>
             </a:r>
-            <a:endParaRPr lang="en-US" sz="1220" dirty="0"/>
+            <a:endParaRPr lang="en-US" sz="1140" dirty="0"/>
           </a:p>
         </p:txBody>
       </p:sp>
@@ -11181,12 +11181,12 @@
         </p:nvSpPr>
         <p:spPr>
           <a:xfrm>
-            <a:off x="7635240" y="4184294"/>
-            <a:ext cx="3474720" cy="1466698"/>
+            <a:off x="7543800" y="4389120"/>
+            <a:ext cx="3611880" cy="1261872"/>
           </a:xfrm>
           <a:prstGeom prst="roundRect">
             <a:avLst>
-              <a:gd name="adj" fmla="val 7481"/>
+              <a:gd name="adj" fmla="val 8696"/>
             </a:avLst>
           </a:prstGeom>
           <a:solidFill>
@@ -11208,8 +11208,8 @@
         </p:nvSpPr>
         <p:spPr>
           <a:xfrm>
-            <a:off x="7799832" y="4330598"/>
-            <a:ext cx="3145536" cy="256032"/>
+            <a:off x="7708392" y="4517136"/>
+            <a:ext cx="3282696" cy="228600"/>
           </a:xfrm>
           <a:prstGeom prst="rect">
             <a:avLst/>
@@ -11225,7 +11225,7 @@
               <a:buNone/>
             </a:pPr>
             <a:r>
-              <a:rPr lang="en-US" sz="1300" b="1" dirty="0">
+              <a:rPr lang="en-US" sz="1220" b="1" dirty="0">
                 <a:solidFill>
                   <a:srgbClr val="0068B7"/>
                 </a:solidFill>
@@ -11235,7 +11235,7 @@
               </a:rPr>
               <a:t>Next action</a:t>
             </a:r>
-            <a:endParaRPr lang="en-US" sz="1300" dirty="0"/>
+            <a:endParaRPr lang="en-US" sz="1220" dirty="0"/>
           </a:p>
         </p:txBody>
       </p:sp>
@@ -11247,8 +11247,8 @@
         </p:nvSpPr>
         <p:spPr>
           <a:xfrm>
-            <a:off x="7799832" y="4659782"/>
-            <a:ext cx="3145536" cy="899770"/>
+            <a:off x="7708392" y="4828032"/>
+            <a:ext cx="3282696" cy="749808"/>
           </a:xfrm>
           <a:prstGeom prst="rect">
             <a:avLst/>
@@ -11266,7 +11266,7 @@
               <a:buNone/>
             </a:pPr>
             <a:r>
-              <a:rPr lang="en-US" sz="1320" dirty="0">
+              <a:rPr lang="en-US" sz="1220" dirty="0">
                 <a:solidFill>
                   <a:srgbClr val="17364A"/>
                 </a:solidFill>
@@ -11274,9 +11274,9 @@
                 <a:ea typeface="Aptos" pitchFamily="34" charset="-122"/>
                 <a:cs typeface="Aptos" pitchFamily="34" charset="-120"/>
               </a:rPr>
-              <a:t>Use the assignment to test whether you can explain the concept, apply it to a realistic public health situation, and identify what would need review before the work moves forward.</a:t>
-            </a:r>
-            <a:endParaRPr lang="en-US" sz="1320" dirty="0"/>
+              <a:t>Use the assignment to test whether you can explain the concept, apply it to a.</a:t>
+            </a:r>
+            <a:endParaRPr lang="en-US" sz="1220" dirty="0"/>
           </a:p>
         </p:txBody>
       </p:sp>
@@ -11567,8 +11567,8 @@
         </p:nvSpPr>
         <p:spPr>
           <a:xfrm>
-            <a:off x="868680" y="1508760"/>
-            <a:ext cx="6309360" cy="4160520"/>
+            <a:off x="822960" y="1463040"/>
+            <a:ext cx="6565392" cy="4343400"/>
           </a:xfrm>
           <a:prstGeom prst="rect">
             <a:avLst/>
@@ -11586,7 +11586,7 @@
               <a:buNone/>
             </a:pPr>
             <a:r>
-              <a:rPr lang="en-US" sz="2100" dirty="0">
+              <a:rPr lang="en-US" sz="1920" dirty="0">
                 <a:solidFill>
                   <a:srgbClr val="003A63"/>
                 </a:solidFill>
@@ -11594,16 +11594,16 @@
                 <a:ea typeface="Aptos" pitchFamily="34" charset="-122"/>
                 <a:cs typeface="Aptos" pitchFamily="34" charset="-120"/>
               </a:rPr>
-              <a:t>• NIST AI Risk Management Framework: https://www.nist.gov/itl/ai-risk-management-framework</a:t>
-            </a:r>
-            <a:endParaRPr lang="en-US" sz="2100" dirty="0"/>
-          </a:p>
-          <a:p>
-            <a:pPr indent="0" marL="0">
-              <a:buNone/>
-            </a:pPr>
-            <a:r>
-              <a:rPr lang="en-US" sz="2100" dirty="0">
+              <a:t>• NIST AI Risk Management Framework:.</a:t>
+            </a:r>
+            <a:endParaRPr lang="en-US" sz="1920" dirty="0"/>
+          </a:p>
+          <a:p>
+            <a:pPr indent="0" marL="0">
+              <a:buNone/>
+            </a:pPr>
+            <a:r>
+              <a:rPr lang="en-US" sz="1920" dirty="0">
                 <a:solidFill>
                   <a:srgbClr val="003A63"/>
                 </a:solidFill>
@@ -11613,14 +11613,14 @@
               </a:rPr>
               <a:t>• ONC interoperability resources and agency procurement templates</a:t>
             </a:r>
-            <a:endParaRPr lang="en-US" sz="2100" dirty="0"/>
-          </a:p>
-          <a:p>
-            <a:pPr indent="0" marL="0">
-              <a:buNone/>
-            </a:pPr>
-            <a:r>
-              <a:rPr lang="en-US" sz="2100" dirty="0">
+            <a:endParaRPr lang="en-US" sz="1920" dirty="0"/>
+          </a:p>
+          <a:p>
+            <a:pPr indent="0" marL="0">
+              <a:buNone/>
+            </a:pPr>
+            <a:r>
+              <a:rPr lang="en-US" sz="1920" dirty="0">
                 <a:solidFill>
                   <a:srgbClr val="003A63"/>
                 </a:solidFill>
@@ -11630,7 +11630,7 @@
               </a:rPr>
               <a:t>• NIST Generative AI Profile:.</a:t>
             </a:r>
-            <a:endParaRPr lang="en-US" sz="2100" dirty="0"/>
+            <a:endParaRPr lang="en-US" sz="1920" dirty="0"/>
           </a:p>
         </p:txBody>
       </p:sp>
@@ -11642,12 +11642,12 @@
         </p:nvSpPr>
         <p:spPr>
           <a:xfrm>
-            <a:off x="7635240" y="1325880"/>
-            <a:ext cx="3474720" cy="1207008"/>
+            <a:off x="7543800" y="1325880"/>
+            <a:ext cx="3611880" cy="1261872"/>
           </a:xfrm>
           <a:prstGeom prst="roundRect">
             <a:avLst>
-              <a:gd name="adj" fmla="val 9091"/>
+              <a:gd name="adj" fmla="val 8696"/>
             </a:avLst>
           </a:prstGeom>
           <a:solidFill>
@@ -11669,8 +11669,8 @@
         </p:nvSpPr>
         <p:spPr>
           <a:xfrm>
-            <a:off x="7799832" y="1472184"/>
-            <a:ext cx="3145536" cy="256032"/>
+            <a:off x="7708392" y="1453896"/>
+            <a:ext cx="3282696" cy="228600"/>
           </a:xfrm>
           <a:prstGeom prst="rect">
             <a:avLst/>
@@ -11686,7 +11686,7 @@
               <a:buNone/>
             </a:pPr>
             <a:r>
-              <a:rPr lang="en-US" sz="1300" b="1" dirty="0">
+              <a:rPr lang="en-US" sz="1220" b="1" dirty="0">
                 <a:solidFill>
                   <a:srgbClr val="0068B7"/>
                 </a:solidFill>
@@ -11696,7 +11696,7 @@
               </a:rPr>
               <a:t>Implementation cue</a:t>
             </a:r>
-            <a:endParaRPr lang="en-US" sz="1300" dirty="0"/>
+            <a:endParaRPr lang="en-US" sz="1220" dirty="0"/>
           </a:p>
         </p:txBody>
       </p:sp>
@@ -11708,8 +11708,8 @@
         </p:nvSpPr>
         <p:spPr>
           <a:xfrm>
-            <a:off x="7799832" y="1801368"/>
-            <a:ext cx="3145536" cy="640080"/>
+            <a:off x="7708392" y="1764792"/>
+            <a:ext cx="3282696" cy="749808"/>
           </a:xfrm>
           <a:prstGeom prst="rect">
             <a:avLst/>
@@ -11727,7 +11727,7 @@
               <a:buNone/>
             </a:pPr>
             <a:r>
-              <a:rPr lang="en-US" sz="1320" dirty="0">
+              <a:rPr lang="en-US" sz="1220" dirty="0">
                 <a:solidFill>
                   <a:srgbClr val="17364A"/>
                 </a:solidFill>
@@ -11735,9 +11735,9 @@
                 <a:ea typeface="Aptos" pitchFamily="34" charset="-122"/>
                 <a:cs typeface="Aptos" pitchFamily="34" charset="-120"/>
               </a:rPr>
-              <a:t>NIST AI Risk Management Framework: https://www.nist.gov/itl/ai-risk-management-framework</a:t>
-            </a:r>
-            <a:endParaRPr lang="en-US" sz="1320" dirty="0"/>
+              <a:t>NIST AI Risk Management Framework:.</a:t>
+            </a:r>
+            <a:endParaRPr lang="en-US" sz="1220" dirty="0"/>
           </a:p>
         </p:txBody>
       </p:sp>
@@ -11749,12 +11749,12 @@
         </p:nvSpPr>
         <p:spPr>
           <a:xfrm>
-            <a:off x="7635240" y="2670048"/>
-            <a:ext cx="3474720" cy="1377086"/>
+            <a:off x="7543800" y="2724912"/>
+            <a:ext cx="3611880" cy="1527048"/>
           </a:xfrm>
           <a:prstGeom prst="roundRect">
             <a:avLst>
-              <a:gd name="adj" fmla="val 7968"/>
+              <a:gd name="adj" fmla="val 7186"/>
             </a:avLst>
           </a:prstGeom>
           <a:solidFill>
@@ -11776,8 +11776,8 @@
         </p:nvSpPr>
         <p:spPr>
           <a:xfrm>
-            <a:off x="7799832" y="2816352"/>
-            <a:ext cx="3145536" cy="256032"/>
+            <a:off x="7708392" y="2852928"/>
+            <a:ext cx="3282696" cy="228600"/>
           </a:xfrm>
           <a:prstGeom prst="rect">
             <a:avLst/>
@@ -11793,7 +11793,7 @@
               <a:buNone/>
             </a:pPr>
             <a:r>
-              <a:rPr lang="en-US" sz="1300" b="1" dirty="0">
+              <a:rPr lang="en-US" sz="1220" b="1" dirty="0">
                 <a:solidFill>
                   <a:srgbClr val="0068B7"/>
                 </a:solidFill>
@@ -11803,7 +11803,7 @@
               </a:rPr>
               <a:t>Concept checkpoints</a:t>
             </a:r>
-            <a:endParaRPr lang="en-US" sz="1300" dirty="0"/>
+            <a:endParaRPr lang="en-US" sz="1220" dirty="0"/>
           </a:p>
         </p:txBody>
       </p:sp>
@@ -11815,8 +11815,8 @@
         </p:nvSpPr>
         <p:spPr>
           <a:xfrm>
-            <a:off x="7818120" y="3182112"/>
-            <a:ext cx="3090672" cy="718718"/>
+            <a:off x="7726680" y="3182112"/>
+            <a:ext cx="3227832" cy="960120"/>
           </a:xfrm>
           <a:prstGeom prst="rect">
             <a:avLst/>
@@ -11834,7 +11834,7 @@
               <a:buNone/>
             </a:pPr>
             <a:r>
-              <a:rPr lang="en-US" sz="1220" dirty="0">
+              <a:rPr lang="en-US" sz="1140" dirty="0">
                 <a:solidFill>
                   <a:srgbClr val="17364A"/>
                 </a:solidFill>
@@ -11842,16 +11842,16 @@
                 <a:ea typeface="Aptos" pitchFamily="34" charset="-122"/>
                 <a:cs typeface="Aptos" pitchFamily="34" charset="-120"/>
               </a:rPr>
-              <a:t>CDC Public Health Data Strategy and Data Modernization resources:.</a:t>
-            </a:r>
-            <a:endParaRPr lang="en-US" sz="1220" dirty="0"/>
-          </a:p>
-          <a:p>
-            <a:pPr indent="0" marL="0">
-              <a:buNone/>
-            </a:pPr>
-            <a:r>
-              <a:rPr lang="en-US" sz="1220" dirty="0">
+              <a:t>CDC Public Health Data Strategy and Data.</a:t>
+            </a:r>
+            <a:endParaRPr lang="en-US" sz="1140" dirty="0"/>
+          </a:p>
+          <a:p>
+            <a:pPr indent="0" marL="0">
+              <a:buNone/>
+            </a:pPr>
+            <a:r>
+              <a:rPr lang="en-US" sz="1140" dirty="0">
                 <a:solidFill>
                   <a:srgbClr val="17364A"/>
                 </a:solidFill>
@@ -11859,9 +11859,9 @@
                 <a:ea typeface="Aptos" pitchFamily="34" charset="-122"/>
                 <a:cs typeface="Aptos" pitchFamily="34" charset="-120"/>
               </a:rPr>
-              <a:t>OWASP Top 10 for LLM Applications, when security or AI.</a:t>
-            </a:r>
-            <a:endParaRPr lang="en-US" sz="1220" dirty="0"/>
+              <a:t>OWASP Top 10 for LLM Applications, when security.</a:t>
+            </a:r>
+            <a:endParaRPr lang="en-US" sz="1140" dirty="0"/>
           </a:p>
         </p:txBody>
       </p:sp>
@@ -11873,12 +11873,12 @@
         </p:nvSpPr>
         <p:spPr>
           <a:xfrm>
-            <a:off x="7635240" y="4184294"/>
-            <a:ext cx="3474720" cy="1466698"/>
+            <a:off x="7543800" y="4389120"/>
+            <a:ext cx="3611880" cy="1261872"/>
           </a:xfrm>
           <a:prstGeom prst="roundRect">
             <a:avLst>
-              <a:gd name="adj" fmla="val 7481"/>
+              <a:gd name="adj" fmla="val 8696"/>
             </a:avLst>
           </a:prstGeom>
           <a:solidFill>
@@ -11900,8 +11900,8 @@
         </p:nvSpPr>
         <p:spPr>
           <a:xfrm>
-            <a:off x="7799832" y="4330598"/>
-            <a:ext cx="3145536" cy="256032"/>
+            <a:off x="7708392" y="4517136"/>
+            <a:ext cx="3282696" cy="228600"/>
           </a:xfrm>
           <a:prstGeom prst="rect">
             <a:avLst/>
@@ -11917,7 +11917,7 @@
               <a:buNone/>
             </a:pPr>
             <a:r>
-              <a:rPr lang="en-US" sz="1300" b="1" dirty="0">
+              <a:rPr lang="en-US" sz="1220" b="1" dirty="0">
                 <a:solidFill>
                   <a:srgbClr val="0068B7"/>
                 </a:solidFill>
@@ -11927,7 +11927,7 @@
               </a:rPr>
               <a:t>Next action</a:t>
             </a:r>
-            <a:endParaRPr lang="en-US" sz="1300" dirty="0"/>
+            <a:endParaRPr lang="en-US" sz="1220" dirty="0"/>
           </a:p>
         </p:txBody>
       </p:sp>
@@ -11939,8 +11939,8 @@
         </p:nvSpPr>
         <p:spPr>
           <a:xfrm>
-            <a:off x="7799832" y="4659782"/>
-            <a:ext cx="3145536" cy="899770"/>
+            <a:off x="7708392" y="4828032"/>
+            <a:ext cx="3282696" cy="749808"/>
           </a:xfrm>
           <a:prstGeom prst="rect">
             <a:avLst/>
@@ -11958,7 +11958,7 @@
               <a:buNone/>
             </a:pPr>
             <a:r>
-              <a:rPr lang="en-US" sz="1320" dirty="0">
+              <a:rPr lang="en-US" sz="1220" dirty="0">
                 <a:solidFill>
                   <a:srgbClr val="17364A"/>
                 </a:solidFill>
@@ -11966,9 +11966,9 @@
                 <a:ea typeface="Aptos" pitchFamily="34" charset="-122"/>
                 <a:cs typeface="Aptos" pitchFamily="34" charset="-120"/>
               </a:rPr>
-              <a:t>Use the concept to clarify workflow changes, dependencies, staffing, procurement requirements, training needs, and implementation checkpoints.</a:t>
-            </a:r>
-            <a:endParaRPr lang="en-US" sz="1320" dirty="0"/>
+              <a:t>Use the concept to clarify workflow changes, dependencies, staffing, procurement.</a:t>
+            </a:r>
+            <a:endParaRPr lang="en-US" sz="1220" dirty="0"/>
           </a:p>
         </p:txBody>
       </p:sp>
@@ -12259,8 +12259,8 @@
         </p:nvSpPr>
         <p:spPr>
           <a:xfrm>
-            <a:off x="868680" y="1508760"/>
-            <a:ext cx="6309360" cy="4160520"/>
+            <a:off x="822960" y="1463040"/>
+            <a:ext cx="6565392" cy="4343400"/>
           </a:xfrm>
           <a:prstGeom prst="rect">
             <a:avLst/>
@@ -12278,7 +12278,7 @@
               <a:buNone/>
             </a:pPr>
             <a:r>
-              <a:rPr lang="en-US" sz="2100" dirty="0">
+              <a:rPr lang="en-US" sz="1920" dirty="0">
                 <a:solidFill>
                   <a:srgbClr val="003A63"/>
                 </a:solidFill>
@@ -12286,9 +12286,9 @@
                 <a:ea typeface="Aptos" pitchFamily="34" charset="-122"/>
                 <a:cs typeface="Aptos" pitchFamily="34" charset="-120"/>
               </a:rPr>
-              <a:t>• Agency privacy, cybersecurity, data governance, procurement, and records management policies</a:t>
-            </a:r>
-            <a:endParaRPr lang="en-US" sz="2100" dirty="0"/>
+              <a:t>• Agency privacy, cybersecurity, data governance, procurement, and records.</a:t>
+            </a:r>
+            <a:endParaRPr lang="en-US" sz="1920" dirty="0"/>
           </a:p>
         </p:txBody>
       </p:sp>
@@ -12300,12 +12300,12 @@
         </p:nvSpPr>
         <p:spPr>
           <a:xfrm>
-            <a:off x="7635240" y="1325880"/>
-            <a:ext cx="3474720" cy="1207008"/>
+            <a:off x="7543800" y="1325880"/>
+            <a:ext cx="3611880" cy="1261872"/>
           </a:xfrm>
           <a:prstGeom prst="roundRect">
             <a:avLst>
-              <a:gd name="adj" fmla="val 9091"/>
+              <a:gd name="adj" fmla="val 8696"/>
             </a:avLst>
           </a:prstGeom>
           <a:solidFill>
@@ -12327,8 +12327,8 @@
         </p:nvSpPr>
         <p:spPr>
           <a:xfrm>
-            <a:off x="7799832" y="1472184"/>
-            <a:ext cx="3145536" cy="256032"/>
+            <a:off x="7708392" y="1453896"/>
+            <a:ext cx="3282696" cy="228600"/>
           </a:xfrm>
           <a:prstGeom prst="rect">
             <a:avLst/>
@@ -12344,7 +12344,7 @@
               <a:buNone/>
             </a:pPr>
             <a:r>
-              <a:rPr lang="en-US" sz="1300" b="1" dirty="0">
+              <a:rPr lang="en-US" sz="1220" b="1" dirty="0">
                 <a:solidFill>
                   <a:srgbClr val="0068B7"/>
                 </a:solidFill>
@@ -12354,7 +12354,7 @@
               </a:rPr>
               <a:t>Implementation cue</a:t>
             </a:r>
-            <a:endParaRPr lang="en-US" sz="1300" dirty="0"/>
+            <a:endParaRPr lang="en-US" sz="1220" dirty="0"/>
           </a:p>
         </p:txBody>
       </p:sp>
@@ -12366,8 +12366,8 @@
         </p:nvSpPr>
         <p:spPr>
           <a:xfrm>
-            <a:off x="7799832" y="1801368"/>
-            <a:ext cx="3145536" cy="640080"/>
+            <a:off x="7708392" y="1764792"/>
+            <a:ext cx="3282696" cy="749808"/>
           </a:xfrm>
           <a:prstGeom prst="rect">
             <a:avLst/>
@@ -12385,7 +12385,7 @@
               <a:buNone/>
             </a:pPr>
             <a:r>
-              <a:rPr lang="en-US" sz="1320" dirty="0">
+              <a:rPr lang="en-US" sz="1220" dirty="0">
                 <a:solidFill>
                   <a:srgbClr val="17364A"/>
                 </a:solidFill>
@@ -12393,9 +12393,9 @@
                 <a:ea typeface="Aptos" pitchFamily="34" charset="-122"/>
                 <a:cs typeface="Aptos" pitchFamily="34" charset="-120"/>
               </a:rPr>
-              <a:t>Agency privacy, cybersecurity, data governance, procurement, and records management.</a:t>
-            </a:r>
-            <a:endParaRPr lang="en-US" sz="1320" dirty="0"/>
+              <a:t>Agency privacy, cybersecurity, data governance, procurement, and records.</a:t>
+            </a:r>
+            <a:endParaRPr lang="en-US" sz="1220" dirty="0"/>
           </a:p>
         </p:txBody>
       </p:sp>
@@ -12407,12 +12407,12 @@
         </p:nvSpPr>
         <p:spPr>
           <a:xfrm>
-            <a:off x="7635240" y="2670048"/>
-            <a:ext cx="3474720" cy="1377086"/>
+            <a:off x="7543800" y="2724912"/>
+            <a:ext cx="3611880" cy="1527048"/>
           </a:xfrm>
           <a:prstGeom prst="roundRect">
             <a:avLst>
-              <a:gd name="adj" fmla="val 7968"/>
+              <a:gd name="adj" fmla="val 7186"/>
             </a:avLst>
           </a:prstGeom>
           <a:solidFill>
@@ -12434,8 +12434,8 @@
         </p:nvSpPr>
         <p:spPr>
           <a:xfrm>
-            <a:off x="7799832" y="2816352"/>
-            <a:ext cx="3145536" cy="256032"/>
+            <a:off x="7708392" y="2852928"/>
+            <a:ext cx="3282696" cy="228600"/>
           </a:xfrm>
           <a:prstGeom prst="rect">
             <a:avLst/>
@@ -12451,7 +12451,7 @@
               <a:buNone/>
             </a:pPr>
             <a:r>
-              <a:rPr lang="en-US" sz="1300" b="1" dirty="0">
+              <a:rPr lang="en-US" sz="1220" b="1" dirty="0">
                 <a:solidFill>
                   <a:srgbClr val="0068B7"/>
                 </a:solidFill>
@@ -12461,7 +12461,7 @@
               </a:rPr>
               <a:t>Concept checkpoints</a:t>
             </a:r>
-            <a:endParaRPr lang="en-US" sz="1300" dirty="0"/>
+            <a:endParaRPr lang="en-US" sz="1220" dirty="0"/>
           </a:p>
         </p:txBody>
       </p:sp>
@@ -12473,8 +12473,8 @@
         </p:nvSpPr>
         <p:spPr>
           <a:xfrm>
-            <a:off x="7818120" y="3182112"/>
-            <a:ext cx="3090672" cy="718718"/>
+            <a:off x="7726680" y="3182112"/>
+            <a:ext cx="3227832" cy="960120"/>
           </a:xfrm>
           <a:prstGeom prst="rect">
             <a:avLst/>
@@ -12492,7 +12492,7 @@
               <a:buNone/>
             </a:pPr>
             <a:r>
-              <a:rPr lang="en-US" sz="1220" dirty="0">
+              <a:rPr lang="en-US" sz="1140" dirty="0">
                 <a:solidFill>
                   <a:srgbClr val="17364A"/>
                 </a:solidFill>
@@ -12500,9 +12500,9 @@
                 <a:ea typeface="Aptos" pitchFamily="34" charset="-122"/>
                 <a:cs typeface="Aptos" pitchFamily="34" charset="-120"/>
               </a:rPr>
-              <a:t>Agency privacy, cybersecurity, data governance, procurement, and.</a:t>
-            </a:r>
-            <a:endParaRPr lang="en-US" sz="1220" dirty="0"/>
+              <a:t>Agency privacy, cybersecurity, data governance,.</a:t>
+            </a:r>
+            <a:endParaRPr lang="en-US" sz="1140" dirty="0"/>
           </a:p>
         </p:txBody>
       </p:sp>
@@ -12514,12 +12514,12 @@
         </p:nvSpPr>
         <p:spPr>
           <a:xfrm>
-            <a:off x="7635240" y="4184294"/>
-            <a:ext cx="3474720" cy="1466698"/>
+            <a:off x="7543800" y="4389120"/>
+            <a:ext cx="3611880" cy="1261872"/>
           </a:xfrm>
           <a:prstGeom prst="roundRect">
             <a:avLst>
-              <a:gd name="adj" fmla="val 7481"/>
+              <a:gd name="adj" fmla="val 8696"/>
             </a:avLst>
           </a:prstGeom>
           <a:solidFill>
@@ -12541,8 +12541,8 @@
         </p:nvSpPr>
         <p:spPr>
           <a:xfrm>
-            <a:off x="7799832" y="4330598"/>
-            <a:ext cx="3145536" cy="256032"/>
+            <a:off x="7708392" y="4517136"/>
+            <a:ext cx="3282696" cy="228600"/>
           </a:xfrm>
           <a:prstGeom prst="rect">
             <a:avLst/>
@@ -12558,7 +12558,7 @@
               <a:buNone/>
             </a:pPr>
             <a:r>
-              <a:rPr lang="en-US" sz="1300" b="1" dirty="0">
+              <a:rPr lang="en-US" sz="1220" b="1" dirty="0">
                 <a:solidFill>
                   <a:srgbClr val="0068B7"/>
                 </a:solidFill>
@@ -12568,7 +12568,7 @@
               </a:rPr>
               <a:t>Next action</a:t>
             </a:r>
-            <a:endParaRPr lang="en-US" sz="1300" dirty="0"/>
+            <a:endParaRPr lang="en-US" sz="1220" dirty="0"/>
           </a:p>
         </p:txBody>
       </p:sp>
@@ -12580,8 +12580,8 @@
         </p:nvSpPr>
         <p:spPr>
           <a:xfrm>
-            <a:off x="7799832" y="4659782"/>
-            <a:ext cx="3145536" cy="899770"/>
+            <a:off x="7708392" y="4828032"/>
+            <a:ext cx="3282696" cy="749808"/>
           </a:xfrm>
           <a:prstGeom prst="rect">
             <a:avLst/>
@@ -12599,7 +12599,7 @@
               <a:buNone/>
             </a:pPr>
             <a:r>
-              <a:rPr lang="en-US" sz="1320" dirty="0">
+              <a:rPr lang="en-US" sz="1220" dirty="0">
                 <a:solidFill>
                   <a:srgbClr val="17364A"/>
                 </a:solidFill>
@@ -12607,9 +12607,9 @@
                 <a:ea typeface="Aptos" pitchFamily="34" charset="-122"/>
                 <a:cs typeface="Aptos" pitchFamily="34" charset="-120"/>
               </a:rPr>
-              <a:t>Use the concept to clarify workflow changes, dependencies, staffing, procurement requirements, training needs, and implementation checkpoints.</a:t>
-            </a:r>
-            <a:endParaRPr lang="en-US" sz="1320" dirty="0"/>
+              <a:t>Use the concept to clarify workflow changes, dependencies, staffing, procurement.</a:t>
+            </a:r>
+            <a:endParaRPr lang="en-US" sz="1220" dirty="0"/>
           </a:p>
         </p:txBody>
       </p:sp>
@@ -12927,7 +12927,7 @@
                 <a:ea typeface="Aptos" pitchFamily="34" charset="-122"/>
                 <a:cs typeface="Aptos" pitchFamily="34" charset="-120"/>
               </a:rPr>
-              <a:t>• Play 11: Build and Deploy AI Solutions - This lesson informs Play 11 by helping learners.</a:t>
+              <a:t>• Play 11: Build and Deploy AI Solutions - This lesson informs Play 11 by.</a:t>
             </a:r>
             <a:endParaRPr lang="en-US" sz="1900" dirty="0"/>
           </a:p>
@@ -12944,7 +12944,7 @@
                 <a:ea typeface="Aptos" pitchFamily="34" charset="-122"/>
                 <a:cs typeface="Aptos" pitchFamily="34" charset="-120"/>
               </a:rPr>
-              <a:t>• Play 2: Readiness Assessment - This lesson informs Play 2 by helping learners connect the.</a:t>
+              <a:t>• Play 2: Readiness Assessment - This lesson informs Play 2 by helping.</a:t>
             </a:r>
             <a:endParaRPr lang="en-US" sz="1900" dirty="0"/>
           </a:p>
@@ -12961,7 +12961,7 @@
                 <a:ea typeface="Aptos" pitchFamily="34" charset="-122"/>
                 <a:cs typeface="Aptos" pitchFamily="34" charset="-120"/>
               </a:rPr>
-              <a:t>• Play 7: Prioritize Use Cases - This lesson informs Play 7 by helping learners connect the.</a:t>
+              <a:t>• Play 7: Prioritize Use Cases - This lesson informs Play 7 by helping.</a:t>
             </a:r>
             <a:endParaRPr lang="en-US" sz="1900" dirty="0"/>
           </a:p>
@@ -12978,7 +12978,7 @@
                 <a:ea typeface="Aptos" pitchFamily="34" charset="-122"/>
                 <a:cs typeface="Aptos" pitchFamily="34" charset="-120"/>
               </a:rPr>
-              <a:t>• Play 3: Establish AI Governance - This lesson informs Play 3 by helping learners connect the.</a:t>
+              <a:t>• Play 3: Establish AI Governance - This lesson informs Play 3 by helping.</a:t>
             </a:r>
             <a:endParaRPr lang="en-US" sz="1900" dirty="0"/>
           </a:p>
@@ -13019,8 +13019,8 @@
         </p:nvSpPr>
         <p:spPr>
           <a:xfrm>
-            <a:off x="8211312" y="1563624"/>
-            <a:ext cx="2734056" cy="256032"/>
+            <a:off x="8211312" y="1545336"/>
+            <a:ext cx="2734056" cy="228600"/>
           </a:xfrm>
           <a:prstGeom prst="rect">
             <a:avLst/>
@@ -13036,7 +13036,7 @@
               <a:buNone/>
             </a:pPr>
             <a:r>
-              <a:rPr lang="en-US" sz="1300" b="1" dirty="0">
+              <a:rPr lang="en-US" sz="1220" b="1" dirty="0">
                 <a:solidFill>
                   <a:srgbClr val="0068B7"/>
                 </a:solidFill>
@@ -13046,7 +13046,7 @@
               </a:rPr>
               <a:t>Apply the lesson</a:t>
             </a:r>
-            <a:endParaRPr lang="en-US" sz="1300" dirty="0"/>
+            <a:endParaRPr lang="en-US" sz="1220" dirty="0"/>
           </a:p>
         </p:txBody>
       </p:sp>
@@ -13058,8 +13058,8 @@
         </p:nvSpPr>
         <p:spPr>
           <a:xfrm>
-            <a:off x="8211312" y="1892808"/>
-            <a:ext cx="2734056" cy="1536192"/>
+            <a:off x="8211312" y="1856232"/>
+            <a:ext cx="2734056" cy="1591056"/>
           </a:xfrm>
           <a:prstGeom prst="rect">
             <a:avLst/>
@@ -13077,7 +13077,7 @@
               <a:buNone/>
             </a:pPr>
             <a:r>
-              <a:rPr lang="en-US" sz="1320" dirty="0">
+              <a:rPr lang="en-US" sz="1220" dirty="0">
                 <a:solidFill>
                   <a:srgbClr val="17364A"/>
                 </a:solidFill>
@@ -13085,9 +13085,9 @@
                 <a:ea typeface="Aptos" pitchFamily="34" charset="-122"/>
                 <a:cs typeface="Aptos" pitchFamily="34" charset="-120"/>
               </a:rPr>
-              <a:t>Use the related plays to identify decisions, participants, timing, approvals, and documentation needed for responsible implementation.</a:t>
-            </a:r>
-            <a:endParaRPr lang="en-US" sz="1320" dirty="0"/>
+              <a:t>Use the related plays to identify decisions, participants, timing, approvals,.</a:t>
+            </a:r>
+            <a:endParaRPr lang="en-US" sz="1220" dirty="0"/>
           </a:p>
         </p:txBody>
       </p:sp>
@@ -13126,8 +13126,8 @@
         </p:nvSpPr>
         <p:spPr>
           <a:xfrm>
-            <a:off x="8211312" y="3941064"/>
-            <a:ext cx="2734056" cy="256032"/>
+            <a:off x="8211312" y="3922776"/>
+            <a:ext cx="2734056" cy="228600"/>
           </a:xfrm>
           <a:prstGeom prst="rect">
             <a:avLst/>
@@ -13143,7 +13143,7 @@
               <a:buNone/>
             </a:pPr>
             <a:r>
-              <a:rPr lang="en-US" sz="1300" b="1" dirty="0">
+              <a:rPr lang="en-US" sz="1220" b="1" dirty="0">
                 <a:solidFill>
                   <a:srgbClr val="0068B7"/>
                 </a:solidFill>
@@ -13153,7 +13153,7 @@
               </a:rPr>
               <a:t>Use the play links to</a:t>
             </a:r>
-            <a:endParaRPr lang="en-US" sz="1300" dirty="0"/>
+            <a:endParaRPr lang="en-US" sz="1220" dirty="0"/>
           </a:p>
         </p:txBody>
       </p:sp>
@@ -13165,8 +13165,8 @@
         </p:nvSpPr>
         <p:spPr>
           <a:xfrm>
-            <a:off x="8229600" y="4306824"/>
-            <a:ext cx="2679192" cy="941832"/>
+            <a:off x="8229600" y="4251960"/>
+            <a:ext cx="2679192" cy="1033272"/>
           </a:xfrm>
           <a:prstGeom prst="rect">
             <a:avLst/>
@@ -13184,7 +13184,7 @@
               <a:buNone/>
             </a:pPr>
             <a:r>
-              <a:rPr lang="en-US" sz="1220" dirty="0">
+              <a:rPr lang="en-US" sz="1140" dirty="0">
                 <a:solidFill>
                   <a:srgbClr val="17364A"/>
                 </a:solidFill>
@@ -13194,14 +13194,14 @@
               </a:rPr>
               <a:t>Locate the decision point in the playbook sequence.</a:t>
             </a:r>
-            <a:endParaRPr lang="en-US" sz="1220" dirty="0"/>
-          </a:p>
-          <a:p>
-            <a:pPr indent="0" marL="0">
-              <a:buNone/>
-            </a:pPr>
-            <a:r>
-              <a:rPr lang="en-US" sz="1220" dirty="0">
+            <a:endParaRPr lang="en-US" sz="1140" dirty="0"/>
+          </a:p>
+          <a:p>
+            <a:pPr indent="0" marL="0">
+              <a:buNone/>
+            </a:pPr>
+            <a:r>
+              <a:rPr lang="en-US" sz="1140" dirty="0">
                 <a:solidFill>
                   <a:srgbClr val="17364A"/>
                 </a:solidFill>
@@ -13211,14 +13211,14 @@
               </a:rPr>
               <a:t>Identify who should participate in the work.</a:t>
             </a:r>
-            <a:endParaRPr lang="en-US" sz="1220" dirty="0"/>
-          </a:p>
-          <a:p>
-            <a:pPr indent="0" marL="0">
-              <a:buNone/>
-            </a:pPr>
-            <a:r>
-              <a:rPr lang="en-US" sz="1220" dirty="0">
+            <a:endParaRPr lang="en-US" sz="1140" dirty="0"/>
+          </a:p>
+          <a:p>
+            <a:pPr indent="0" marL="0">
+              <a:buNone/>
+            </a:pPr>
+            <a:r>
+              <a:rPr lang="en-US" sz="1140" dirty="0">
                 <a:solidFill>
                   <a:srgbClr val="17364A"/>
                 </a:solidFill>
@@ -13226,9 +13226,9 @@
                 <a:ea typeface="Aptos" pitchFamily="34" charset="-122"/>
                 <a:cs typeface="Aptos" pitchFamily="34" charset="-120"/>
               </a:rPr>
-              <a:t>Document the review, approval, or implementation step.</a:t>
-            </a:r>
-            <a:endParaRPr lang="en-US" sz="1220" dirty="0"/>
+              <a:t>Document the review, approval, or implementation.</a:t>
+            </a:r>
+            <a:endParaRPr lang="en-US" sz="1140" dirty="0"/>
           </a:p>
         </p:txBody>
       </p:sp>
@@ -13546,7 +13546,7 @@
                 <a:ea typeface="Aptos" pitchFamily="34" charset="-122"/>
                 <a:cs typeface="Aptos" pitchFamily="34" charset="-120"/>
               </a:rPr>
-              <a:t>• Tool 4: AI Policy Landscape Scan (Worksheet) - Use AI Policy Landscape Scan to translate this.</a:t>
+              <a:t>• Tool 4: AI Policy Landscape Scan (Worksheet) - Use AI Policy Landscape Scan.</a:t>
             </a:r>
             <a:endParaRPr lang="en-US" sz="1850" dirty="0"/>
           </a:p>
@@ -13563,7 +13563,7 @@
                 <a:ea typeface="Aptos" pitchFamily="34" charset="-122"/>
                 <a:cs typeface="Aptos" pitchFamily="34" charset="-120"/>
               </a:rPr>
-              <a:t>• Tool 5: AI Environmental and Resource Impact Review (Checklist) - Use this tool to complete or.</a:t>
+              <a:t>• Tool 5: AI Environmental and Resource Impact Review (Checklist) - Use this.</a:t>
             </a:r>
             <a:endParaRPr lang="en-US" sz="1850" dirty="0"/>
           </a:p>
@@ -13580,7 +13580,7 @@
                 <a:ea typeface="Aptos" pitchFamily="34" charset="-122"/>
                 <a:cs typeface="Aptos" pitchFamily="34" charset="-120"/>
               </a:rPr>
-              <a:t>• Tool 6: Human-Centered AI Decision Rule Checklist (Checklist) - Use Human-Centered AI Decision.</a:t>
+              <a:t>• Tool 6: Human-Centered AI Decision Rule Checklist (Checklist) - Use.</a:t>
             </a:r>
             <a:endParaRPr lang="en-US" sz="1850" dirty="0"/>
           </a:p>
@@ -13597,7 +13597,7 @@
                 <a:ea typeface="Aptos" pitchFamily="34" charset="-122"/>
                 <a:cs typeface="Aptos" pitchFamily="34" charset="-120"/>
               </a:rPr>
-              <a:t>• Tool 8: AI Project Charter (Planning) - Use AI Project Charter to translate this lesson into a.</a:t>
+              <a:t>• Tool 8: AI Project Charter (Planning) - Use AI Project Charter to translate.</a:t>
             </a:r>
             <a:endParaRPr lang="en-US" sz="1850" dirty="0"/>
           </a:p>
@@ -13638,8 +13638,8 @@
         </p:nvSpPr>
         <p:spPr>
           <a:xfrm>
-            <a:off x="8211312" y="1563624"/>
-            <a:ext cx="2734056" cy="256032"/>
+            <a:off x="8211312" y="1545336"/>
+            <a:ext cx="2734056" cy="228600"/>
           </a:xfrm>
           <a:prstGeom prst="rect">
             <a:avLst/>
@@ -13655,7 +13655,7 @@
               <a:buNone/>
             </a:pPr>
             <a:r>
-              <a:rPr lang="en-US" sz="1300" b="1" dirty="0">
+              <a:rPr lang="en-US" sz="1220" b="1" dirty="0">
                 <a:solidFill>
                   <a:srgbClr val="0068B7"/>
                 </a:solidFill>
@@ -13665,7 +13665,7 @@
               </a:rPr>
               <a:t>Use the tools</a:t>
             </a:r>
-            <a:endParaRPr lang="en-US" sz="1300" dirty="0"/>
+            <a:endParaRPr lang="en-US" sz="1220" dirty="0"/>
           </a:p>
         </p:txBody>
       </p:sp>
@@ -13677,8 +13677,8 @@
         </p:nvSpPr>
         <p:spPr>
           <a:xfrm>
-            <a:off x="8211312" y="1892808"/>
-            <a:ext cx="2734056" cy="1536192"/>
+            <a:off x="8211312" y="1856232"/>
+            <a:ext cx="2734056" cy="1591056"/>
           </a:xfrm>
           <a:prstGeom prst="rect">
             <a:avLst/>
@@ -13696,7 +13696,7 @@
               <a:buNone/>
             </a:pPr>
             <a:r>
-              <a:rPr lang="en-US" sz="1320" dirty="0">
+              <a:rPr lang="en-US" sz="1220" dirty="0">
                 <a:solidFill>
                   <a:srgbClr val="17364A"/>
                 </a:solidFill>
@@ -13704,9 +13704,9 @@
                 <a:ea typeface="Aptos" pitchFamily="34" charset="-122"/>
                 <a:cs typeface="Aptos" pitchFamily="34" charset="-120"/>
               </a:rPr>
-              <a:t>Use linked tools when your department needs a structured worksheet, template, checklist, review process, or documentation artifact.</a:t>
-            </a:r>
-            <a:endParaRPr lang="en-US" sz="1320" dirty="0"/>
+              <a:t>Use linked tools when your department needs a structured worksheet, template,.</a:t>
+            </a:r>
+            <a:endParaRPr lang="en-US" sz="1220" dirty="0"/>
           </a:p>
         </p:txBody>
       </p:sp>
@@ -13745,8 +13745,8 @@
         </p:nvSpPr>
         <p:spPr>
           <a:xfrm>
-            <a:off x="8211312" y="3941064"/>
-            <a:ext cx="2734056" cy="256032"/>
+            <a:off x="8211312" y="3922776"/>
+            <a:ext cx="2734056" cy="228600"/>
           </a:xfrm>
           <a:prstGeom prst="rect">
             <a:avLst/>
@@ -13762,7 +13762,7 @@
               <a:buNone/>
             </a:pPr>
             <a:r>
-              <a:rPr lang="en-US" sz="1300" b="1" dirty="0">
+              <a:rPr lang="en-US" sz="1220" b="1" dirty="0">
                 <a:solidFill>
                   <a:srgbClr val="0068B7"/>
                 </a:solidFill>
@@ -13772,7 +13772,7 @@
               </a:rPr>
               <a:t>Tool selection cues</a:t>
             </a:r>
-            <a:endParaRPr lang="en-US" sz="1300" dirty="0"/>
+            <a:endParaRPr lang="en-US" sz="1220" dirty="0"/>
           </a:p>
         </p:txBody>
       </p:sp>
@@ -13784,8 +13784,8 @@
         </p:nvSpPr>
         <p:spPr>
           <a:xfrm>
-            <a:off x="8229600" y="4306824"/>
-            <a:ext cx="2679192" cy="941832"/>
+            <a:off x="8229600" y="4251960"/>
+            <a:ext cx="2679192" cy="1033272"/>
           </a:xfrm>
           <a:prstGeom prst="rect">
             <a:avLst/>
@@ -13803,7 +13803,7 @@
               <a:buNone/>
             </a:pPr>
             <a:r>
-              <a:rPr lang="en-US" sz="1220" dirty="0">
+              <a:rPr lang="en-US" sz="1140" dirty="0">
                 <a:solidFill>
                   <a:srgbClr val="17364A"/>
                 </a:solidFill>
@@ -13813,14 +13813,14 @@
               </a:rPr>
               <a:t>Use a tool when no comparable local process exists.</a:t>
             </a:r>
-            <a:endParaRPr lang="en-US" sz="1220" dirty="0"/>
-          </a:p>
-          <a:p>
-            <a:pPr indent="0" marL="0">
-              <a:buNone/>
-            </a:pPr>
-            <a:r>
-              <a:rPr lang="en-US" sz="1220" dirty="0">
+            <a:endParaRPr lang="en-US" sz="1140" dirty="0"/>
+          </a:p>
+          <a:p>
+            <a:pPr indent="0" marL="0">
+              <a:buNone/>
+            </a:pPr>
+            <a:r>
+              <a:rPr lang="en-US" sz="1140" dirty="0">
                 <a:solidFill>
                   <a:srgbClr val="17364A"/>
                 </a:solidFill>
@@ -13828,16 +13828,16 @@
                 <a:ea typeface="Aptos" pitchFamily="34" charset="-122"/>
                 <a:cs typeface="Aptos" pitchFamily="34" charset="-120"/>
               </a:rPr>
-              <a:t>Adapt existing department templates when they already fit the.</a:t>
-            </a:r>
-            <a:endParaRPr lang="en-US" sz="1220" dirty="0"/>
-          </a:p>
-          <a:p>
-            <a:pPr indent="0" marL="0">
-              <a:buNone/>
-            </a:pPr>
-            <a:r>
-              <a:rPr lang="en-US" sz="1220" dirty="0">
+              <a:t>Adapt existing department templates when they.</a:t>
+            </a:r>
+            <a:endParaRPr lang="en-US" sz="1140" dirty="0"/>
+          </a:p>
+          <a:p>
+            <a:pPr indent="0" marL="0">
+              <a:buNone/>
+            </a:pPr>
+            <a:r>
+              <a:rPr lang="en-US" sz="1140" dirty="0">
                 <a:solidFill>
                   <a:srgbClr val="17364A"/>
                 </a:solidFill>
@@ -13845,9 +13845,9 @@
                 <a:ea typeface="Aptos" pitchFamily="34" charset="-122"/>
                 <a:cs typeface="Aptos" pitchFamily="34" charset="-120"/>
               </a:rPr>
-              <a:t>Save the completed artifact as evidence of the decision.</a:t>
-            </a:r>
-            <a:endParaRPr lang="en-US" sz="1220" dirty="0"/>
+              <a:t>Save the completed artifact as evidence of the.</a:t>
+            </a:r>
+            <a:endParaRPr lang="en-US" sz="1140" dirty="0"/>
           </a:p>
         </p:txBody>
       </p:sp>
@@ -14138,8 +14138,8 @@
         </p:nvSpPr>
         <p:spPr>
           <a:xfrm>
-            <a:off x="868680" y="1508760"/>
-            <a:ext cx="6309360" cy="4160520"/>
+            <a:off x="822960" y="1463040"/>
+            <a:ext cx="6565392" cy="4343400"/>
           </a:xfrm>
           <a:prstGeom prst="rect">
             <a:avLst/>
@@ -14157,7 +14157,7 @@
               <a:buNone/>
             </a:pPr>
             <a:r>
-              <a:rPr lang="en-US" sz="2100" dirty="0">
+              <a:rPr lang="en-US" sz="1920" dirty="0">
                 <a:solidFill>
                   <a:srgbClr val="003A63"/>
                 </a:solidFill>
@@ -14165,16 +14165,16 @@
                 <a:ea typeface="Aptos" pitchFamily="34" charset="-122"/>
                 <a:cs typeface="Aptos" pitchFamily="34" charset="-120"/>
               </a:rPr>
-              <a:t>• Explain the purpose of requirements writing for ai procurement and implementation in public.</a:t>
-            </a:r>
-            <a:endParaRPr lang="en-US" sz="2100" dirty="0"/>
-          </a:p>
-          <a:p>
-            <a:pPr indent="0" marL="0">
-              <a:buNone/>
-            </a:pPr>
-            <a:r>
-              <a:rPr lang="en-US" sz="2100" dirty="0">
+              <a:t>• Explain the purpose of requirements writing for ai procurement and.</a:t>
+            </a:r>
+            <a:endParaRPr lang="en-US" sz="1920" dirty="0"/>
+          </a:p>
+          <a:p>
+            <a:pPr indent="0" marL="0">
+              <a:buNone/>
+            </a:pPr>
+            <a:r>
+              <a:rPr lang="en-US" sz="1920" dirty="0">
                 <a:solidFill>
                   <a:srgbClr val="003A63"/>
                 </a:solidFill>
@@ -14182,16 +14182,16 @@
                 <a:ea typeface="Aptos" pitchFamily="34" charset="-122"/>
                 <a:cs typeface="Aptos" pitchFamily="34" charset="-120"/>
               </a:rPr>
-              <a:t>• Identify the technical, operational, privacy, security, equity, and governance issues.</a:t>
-            </a:r>
-            <a:endParaRPr lang="en-US" sz="2100" dirty="0"/>
-          </a:p>
-          <a:p>
-            <a:pPr indent="0" marL="0">
-              <a:buNone/>
-            </a:pPr>
-            <a:r>
-              <a:rPr lang="en-US" sz="2100" dirty="0">
+              <a:t>• Identify the technical, operational, privacy, security, equity, and.</a:t>
+            </a:r>
+            <a:endParaRPr lang="en-US" sz="1920" dirty="0"/>
+          </a:p>
+          <a:p>
+            <a:pPr indent="0" marL="0">
+              <a:buNone/>
+            </a:pPr>
+            <a:r>
+              <a:rPr lang="en-US" sz="1920" dirty="0">
                 <a:solidFill>
                   <a:srgbClr val="003A63"/>
                 </a:solidFill>
@@ -14199,9 +14199,9 @@
                 <a:ea typeface="Aptos" pitchFamily="34" charset="-122"/>
                 <a:cs typeface="Aptos" pitchFamily="34" charset="-120"/>
               </a:rPr>
-              <a:t>• Apply the topic to a real or realistic public health workflow, system, or implementation.</a:t>
-            </a:r>
-            <a:endParaRPr lang="en-US" sz="2100" dirty="0"/>
+              <a:t>• Apply the topic to a real or realistic public health workflow, system, or.</a:t>
+            </a:r>
+            <a:endParaRPr lang="en-US" sz="1920" dirty="0"/>
           </a:p>
         </p:txBody>
       </p:sp>
@@ -14213,12 +14213,12 @@
         </p:nvSpPr>
         <p:spPr>
           <a:xfrm>
-            <a:off x="7635240" y="1325880"/>
-            <a:ext cx="3474720" cy="1255471"/>
+            <a:off x="7543800" y="1325880"/>
+            <a:ext cx="3611880" cy="1261872"/>
           </a:xfrm>
           <a:prstGeom prst="roundRect">
             <a:avLst>
-              <a:gd name="adj" fmla="val 8740"/>
+              <a:gd name="adj" fmla="val 8696"/>
             </a:avLst>
           </a:prstGeom>
           <a:solidFill>
@@ -14240,8 +14240,8 @@
         </p:nvSpPr>
         <p:spPr>
           <a:xfrm>
-            <a:off x="7799832" y="1472184"/>
-            <a:ext cx="3145536" cy="256032"/>
+            <a:off x="7708392" y="1453896"/>
+            <a:ext cx="3282696" cy="228600"/>
           </a:xfrm>
           <a:prstGeom prst="rect">
             <a:avLst/>
@@ -14257,7 +14257,7 @@
               <a:buNone/>
             </a:pPr>
             <a:r>
-              <a:rPr lang="en-US" sz="1300" b="1" dirty="0">
+              <a:rPr lang="en-US" sz="1220" b="1" dirty="0">
                 <a:solidFill>
                   <a:srgbClr val="0068B7"/>
                 </a:solidFill>
@@ -14267,7 +14267,7 @@
               </a:rPr>
               <a:t>Implementation cue</a:t>
             </a:r>
-            <a:endParaRPr lang="en-US" sz="1300" dirty="0"/>
+            <a:endParaRPr lang="en-US" sz="1220" dirty="0"/>
           </a:p>
         </p:txBody>
       </p:sp>
@@ -14279,8 +14279,8 @@
         </p:nvSpPr>
         <p:spPr>
           <a:xfrm>
-            <a:off x="7799832" y="1801368"/>
-            <a:ext cx="3145536" cy="688543"/>
+            <a:off x="7708392" y="1764792"/>
+            <a:ext cx="3282696" cy="749808"/>
           </a:xfrm>
           <a:prstGeom prst="rect">
             <a:avLst/>
@@ -14298,7 +14298,7 @@
               <a:buNone/>
             </a:pPr>
             <a:r>
-              <a:rPr lang="en-US" sz="1320" dirty="0">
+              <a:rPr lang="en-US" sz="1220" dirty="0">
                 <a:solidFill>
                   <a:srgbClr val="17364A"/>
                 </a:solidFill>
@@ -14306,9 +14306,9 @@
                 <a:ea typeface="Aptos" pitchFamily="34" charset="-122"/>
                 <a:cs typeface="Aptos" pitchFamily="34" charset="-120"/>
               </a:rPr>
-              <a:t>Explain the purpose of requirements writing for ai procurement and implementation in public health AI.</a:t>
-            </a:r>
-            <a:endParaRPr lang="en-US" sz="1320" dirty="0"/>
+              <a:t>Explain the purpose of requirements writing for ai procurement and.</a:t>
+            </a:r>
+            <a:endParaRPr lang="en-US" sz="1220" dirty="0"/>
           </a:p>
         </p:txBody>
       </p:sp>
@@ -14320,12 +14320,12 @@
         </p:nvSpPr>
         <p:spPr>
           <a:xfrm>
-            <a:off x="7635240" y="2718511"/>
-            <a:ext cx="3474720" cy="1328623"/>
+            <a:off x="7543800" y="2724912"/>
+            <a:ext cx="3611880" cy="1527048"/>
           </a:xfrm>
           <a:prstGeom prst="roundRect">
             <a:avLst>
-              <a:gd name="adj" fmla="val 8259"/>
+              <a:gd name="adj" fmla="val 7186"/>
             </a:avLst>
           </a:prstGeom>
           <a:solidFill>
@@ -14347,8 +14347,8 @@
         </p:nvSpPr>
         <p:spPr>
           <a:xfrm>
-            <a:off x="7799832" y="2864815"/>
-            <a:ext cx="3145536" cy="256032"/>
+            <a:off x="7708392" y="2852928"/>
+            <a:ext cx="3282696" cy="228600"/>
           </a:xfrm>
           <a:prstGeom prst="rect">
             <a:avLst/>
@@ -14364,7 +14364,7 @@
               <a:buNone/>
             </a:pPr>
             <a:r>
-              <a:rPr lang="en-US" sz="1300" b="1" dirty="0">
+              <a:rPr lang="en-US" sz="1220" b="1" dirty="0">
                 <a:solidFill>
                   <a:srgbClr val="0068B7"/>
                 </a:solidFill>
@@ -14374,7 +14374,7 @@
               </a:rPr>
               <a:t>Concept checkpoints</a:t>
             </a:r>
-            <a:endParaRPr lang="en-US" sz="1300" dirty="0"/>
+            <a:endParaRPr lang="en-US" sz="1220" dirty="0"/>
           </a:p>
         </p:txBody>
       </p:sp>
@@ -14386,8 +14386,8 @@
         </p:nvSpPr>
         <p:spPr>
           <a:xfrm>
-            <a:off x="7818120" y="3230575"/>
-            <a:ext cx="3090672" cy="670255"/>
+            <a:off x="7726680" y="3182112"/>
+            <a:ext cx="3227832" cy="960120"/>
           </a:xfrm>
           <a:prstGeom prst="rect">
             <a:avLst/>
@@ -14405,7 +14405,7 @@
               <a:buNone/>
             </a:pPr>
             <a:r>
-              <a:rPr lang="en-US" sz="1220" dirty="0">
+              <a:rPr lang="en-US" sz="1140" dirty="0">
                 <a:solidFill>
                   <a:srgbClr val="17364A"/>
                 </a:solidFill>
@@ -14413,16 +14413,16 @@
                 <a:ea typeface="Aptos" pitchFamily="34" charset="-122"/>
                 <a:cs typeface="Aptos" pitchFamily="34" charset="-120"/>
               </a:rPr>
-              <a:t>Explain the purpose of requirements writing for ai procurement and.</a:t>
-            </a:r>
-            <a:endParaRPr lang="en-US" sz="1220" dirty="0"/>
-          </a:p>
-          <a:p>
-            <a:pPr indent="0" marL="0">
-              <a:buNone/>
-            </a:pPr>
-            <a:r>
-              <a:rPr lang="en-US" sz="1220" dirty="0">
+              <a:t>Explain the purpose of requirements writing for ai.</a:t>
+            </a:r>
+            <a:endParaRPr lang="en-US" sz="1140" dirty="0"/>
+          </a:p>
+          <a:p>
+            <a:pPr indent="0" marL="0">
+              <a:buNone/>
+            </a:pPr>
+            <a:r>
+              <a:rPr lang="en-US" sz="1140" dirty="0">
                 <a:solidFill>
                   <a:srgbClr val="17364A"/>
                 </a:solidFill>
@@ -14430,16 +14430,16 @@
                 <a:ea typeface="Aptos" pitchFamily="34" charset="-122"/>
                 <a:cs typeface="Aptos" pitchFamily="34" charset="-120"/>
               </a:rPr>
-              <a:t>Identify the technical, operational, privacy, security, equity,.</a:t>
-            </a:r>
-            <a:endParaRPr lang="en-US" sz="1220" dirty="0"/>
-          </a:p>
-          <a:p>
-            <a:pPr indent="0" marL="0">
-              <a:buNone/>
-            </a:pPr>
-            <a:r>
-              <a:rPr lang="en-US" sz="1220" dirty="0">
+              <a:t>Identify the technical, operational, privacy,.</a:t>
+            </a:r>
+            <a:endParaRPr lang="en-US" sz="1140" dirty="0"/>
+          </a:p>
+          <a:p>
+            <a:pPr indent="0" marL="0">
+              <a:buNone/>
+            </a:pPr>
+            <a:r>
+              <a:rPr lang="en-US" sz="1140" dirty="0">
                 <a:solidFill>
                   <a:srgbClr val="17364A"/>
                 </a:solidFill>
@@ -14447,9 +14447,9 @@
                 <a:ea typeface="Aptos" pitchFamily="34" charset="-122"/>
                 <a:cs typeface="Aptos" pitchFamily="34" charset="-120"/>
               </a:rPr>
-              <a:t>Recognize common failure modes that can affect safety, accuracy,.</a:t>
-            </a:r>
-            <a:endParaRPr lang="en-US" sz="1220" dirty="0"/>
+              <a:t>Recognize common failure modes that can affect.</a:t>
+            </a:r>
+            <a:endParaRPr lang="en-US" sz="1140" dirty="0"/>
           </a:p>
         </p:txBody>
       </p:sp>
@@ -14461,12 +14461,12 @@
         </p:nvSpPr>
         <p:spPr>
           <a:xfrm>
-            <a:off x="7635240" y="4184294"/>
-            <a:ext cx="3474720" cy="1466698"/>
+            <a:off x="7543800" y="4389120"/>
+            <a:ext cx="3611880" cy="1261872"/>
           </a:xfrm>
           <a:prstGeom prst="roundRect">
             <a:avLst>
-              <a:gd name="adj" fmla="val 7481"/>
+              <a:gd name="adj" fmla="val 8696"/>
             </a:avLst>
           </a:prstGeom>
           <a:solidFill>
@@ -14488,8 +14488,8 @@
         </p:nvSpPr>
         <p:spPr>
           <a:xfrm>
-            <a:off x="7799832" y="4330598"/>
-            <a:ext cx="3145536" cy="256032"/>
+            <a:off x="7708392" y="4517136"/>
+            <a:ext cx="3282696" cy="228600"/>
           </a:xfrm>
           <a:prstGeom prst="rect">
             <a:avLst/>
@@ -14505,7 +14505,7 @@
               <a:buNone/>
             </a:pPr>
             <a:r>
-              <a:rPr lang="en-US" sz="1300" b="1" dirty="0">
+              <a:rPr lang="en-US" sz="1220" b="1" dirty="0">
                 <a:solidFill>
                   <a:srgbClr val="0068B7"/>
                 </a:solidFill>
@@ -14515,7 +14515,7 @@
               </a:rPr>
               <a:t>Next action</a:t>
             </a:r>
-            <a:endParaRPr lang="en-US" sz="1300" dirty="0"/>
+            <a:endParaRPr lang="en-US" sz="1220" dirty="0"/>
           </a:p>
         </p:txBody>
       </p:sp>
@@ -14527,8 +14527,8 @@
         </p:nvSpPr>
         <p:spPr>
           <a:xfrm>
-            <a:off x="7799832" y="4659782"/>
-            <a:ext cx="3145536" cy="899770"/>
+            <a:off x="7708392" y="4828032"/>
+            <a:ext cx="3282696" cy="749808"/>
           </a:xfrm>
           <a:prstGeom prst="rect">
             <a:avLst/>
@@ -14546,7 +14546,7 @@
               <a:buNone/>
             </a:pPr>
             <a:r>
-              <a:rPr lang="en-US" sz="1320" dirty="0">
+              <a:rPr lang="en-US" sz="1220" dirty="0">
                 <a:solidFill>
                   <a:srgbClr val="17364A"/>
                 </a:solidFill>
@@ -14554,9 +14554,9 @@
                 <a:ea typeface="Aptos" pitchFamily="34" charset="-122"/>
                 <a:cs typeface="Aptos" pitchFamily="34" charset="-120"/>
               </a:rPr>
-              <a:t>Use the assignment to test whether you can explain the concept, apply it to a realistic public health situation, and identify what would need review before the work moves forward.</a:t>
-            </a:r>
-            <a:endParaRPr lang="en-US" sz="1320" dirty="0"/>
+              <a:t>Use the assignment to test whether you can explain the concept, apply it to a.</a:t>
+            </a:r>
+            <a:endParaRPr lang="en-US" sz="1220" dirty="0"/>
           </a:p>
         </p:txBody>
       </p:sp>
@@ -14847,8 +14847,8 @@
         </p:nvSpPr>
         <p:spPr>
           <a:xfrm>
-            <a:off x="868680" y="1508760"/>
-            <a:ext cx="6309360" cy="4160520"/>
+            <a:off x="822960" y="1463040"/>
+            <a:ext cx="6565392" cy="4343400"/>
           </a:xfrm>
           <a:prstGeom prst="rect">
             <a:avLst/>
@@ -14866,7 +14866,7 @@
               <a:buNone/>
             </a:pPr>
             <a:r>
-              <a:rPr lang="en-US" sz="2100" dirty="0">
+              <a:rPr lang="en-US" sz="1920" dirty="0">
                 <a:solidFill>
                   <a:srgbClr val="003A63"/>
                 </a:solidFill>
@@ -14874,9 +14874,9 @@
                 <a:ea typeface="Aptos" pitchFamily="34" charset="-122"/>
                 <a:cs typeface="Aptos" pitchFamily="34" charset="-120"/>
               </a:rPr>
-              <a:t>• Produce a AI requirements matrix that can support readiness assessment, governance review,.</a:t>
-            </a:r>
-            <a:endParaRPr lang="en-US" sz="2100" dirty="0"/>
+              <a:t>• Produce a AI requirements matrix that can support readiness assessment,.</a:t>
+            </a:r>
+            <a:endParaRPr lang="en-US" sz="1920" dirty="0"/>
           </a:p>
         </p:txBody>
       </p:sp>
@@ -14888,12 +14888,12 @@
         </p:nvSpPr>
         <p:spPr>
           <a:xfrm>
-            <a:off x="7635240" y="1325880"/>
-            <a:ext cx="3474720" cy="1255471"/>
+            <a:off x="7543800" y="1325880"/>
+            <a:ext cx="3611880" cy="1261872"/>
           </a:xfrm>
           <a:prstGeom prst="roundRect">
             <a:avLst>
-              <a:gd name="adj" fmla="val 8740"/>
+              <a:gd name="adj" fmla="val 8696"/>
             </a:avLst>
           </a:prstGeom>
           <a:solidFill>
@@ -14915,8 +14915,8 @@
         </p:nvSpPr>
         <p:spPr>
           <a:xfrm>
-            <a:off x="7799832" y="1472184"/>
-            <a:ext cx="3145536" cy="256032"/>
+            <a:off x="7708392" y="1453896"/>
+            <a:ext cx="3282696" cy="228600"/>
           </a:xfrm>
           <a:prstGeom prst="rect">
             <a:avLst/>
@@ -14932,7 +14932,7 @@
               <a:buNone/>
             </a:pPr>
             <a:r>
-              <a:rPr lang="en-US" sz="1300" b="1" dirty="0">
+              <a:rPr lang="en-US" sz="1220" b="1" dirty="0">
                 <a:solidFill>
                   <a:srgbClr val="0068B7"/>
                 </a:solidFill>
@@ -14942,7 +14942,7 @@
               </a:rPr>
               <a:t>Implementation cue</a:t>
             </a:r>
-            <a:endParaRPr lang="en-US" sz="1300" dirty="0"/>
+            <a:endParaRPr lang="en-US" sz="1220" dirty="0"/>
           </a:p>
         </p:txBody>
       </p:sp>
@@ -14954,8 +14954,8 @@
         </p:nvSpPr>
         <p:spPr>
           <a:xfrm>
-            <a:off x="7799832" y="1801368"/>
-            <a:ext cx="3145536" cy="688543"/>
+            <a:off x="7708392" y="1764792"/>
+            <a:ext cx="3282696" cy="749808"/>
           </a:xfrm>
           <a:prstGeom prst="rect">
             <a:avLst/>
@@ -14973,7 +14973,7 @@
               <a:buNone/>
             </a:pPr>
             <a:r>
-              <a:rPr lang="en-US" sz="1320" dirty="0">
+              <a:rPr lang="en-US" sz="1220" dirty="0">
                 <a:solidFill>
                   <a:srgbClr val="17364A"/>
                 </a:solidFill>
@@ -14981,9 +14981,9 @@
                 <a:ea typeface="Aptos" pitchFamily="34" charset="-122"/>
                 <a:cs typeface="Aptos" pitchFamily="34" charset="-120"/>
               </a:rPr>
-              <a:t>Produce a AI requirements matrix that can support readiness assessment, governance review, procurement,.</a:t>
-            </a:r>
-            <a:endParaRPr lang="en-US" sz="1320" dirty="0"/>
+              <a:t>Produce a AI requirements matrix that can support readiness assessment,.</a:t>
+            </a:r>
+            <a:endParaRPr lang="en-US" sz="1220" dirty="0"/>
           </a:p>
         </p:txBody>
       </p:sp>
@@ -14995,12 +14995,12 @@
         </p:nvSpPr>
         <p:spPr>
           <a:xfrm>
-            <a:off x="7635240" y="2718511"/>
-            <a:ext cx="3474720" cy="1328623"/>
+            <a:off x="7543800" y="2724912"/>
+            <a:ext cx="3611880" cy="1527048"/>
           </a:xfrm>
           <a:prstGeom prst="roundRect">
             <a:avLst>
-              <a:gd name="adj" fmla="val 8259"/>
+              <a:gd name="adj" fmla="val 7186"/>
             </a:avLst>
           </a:prstGeom>
           <a:solidFill>
@@ -15022,8 +15022,8 @@
         </p:nvSpPr>
         <p:spPr>
           <a:xfrm>
-            <a:off x="7799832" y="2864815"/>
-            <a:ext cx="3145536" cy="256032"/>
+            <a:off x="7708392" y="2852928"/>
+            <a:ext cx="3282696" cy="228600"/>
           </a:xfrm>
           <a:prstGeom prst="rect">
             <a:avLst/>
@@ -15039,7 +15039,7 @@
               <a:buNone/>
             </a:pPr>
             <a:r>
-              <a:rPr lang="en-US" sz="1300" b="1" dirty="0">
+              <a:rPr lang="en-US" sz="1220" b="1" dirty="0">
                 <a:solidFill>
                   <a:srgbClr val="0068B7"/>
                 </a:solidFill>
@@ -15049,7 +15049,7 @@
               </a:rPr>
               <a:t>Concept checkpoints</a:t>
             </a:r>
-            <a:endParaRPr lang="en-US" sz="1300" dirty="0"/>
+            <a:endParaRPr lang="en-US" sz="1220" dirty="0"/>
           </a:p>
         </p:txBody>
       </p:sp>
@@ -15061,8 +15061,8 @@
         </p:nvSpPr>
         <p:spPr>
           <a:xfrm>
-            <a:off x="7818120" y="3230575"/>
-            <a:ext cx="3090672" cy="670255"/>
+            <a:off x="7726680" y="3182112"/>
+            <a:ext cx="3227832" cy="960120"/>
           </a:xfrm>
           <a:prstGeom prst="rect">
             <a:avLst/>
@@ -15080,7 +15080,7 @@
               <a:buNone/>
             </a:pPr>
             <a:r>
-              <a:rPr lang="en-US" sz="1220" dirty="0">
+              <a:rPr lang="en-US" sz="1140" dirty="0">
                 <a:solidFill>
                   <a:srgbClr val="17364A"/>
                 </a:solidFill>
@@ -15088,9 +15088,9 @@
                 <a:ea typeface="Aptos" pitchFamily="34" charset="-122"/>
                 <a:cs typeface="Aptos" pitchFamily="34" charset="-120"/>
               </a:rPr>
-              <a:t>Produce a AI requirements matrix that can support readiness.</a:t>
-            </a:r>
-            <a:endParaRPr lang="en-US" sz="1220" dirty="0"/>
+              <a:t>Produce a AI requirements matrix that can support.</a:t>
+            </a:r>
+            <a:endParaRPr lang="en-US" sz="1140" dirty="0"/>
           </a:p>
         </p:txBody>
       </p:sp>
@@ -15102,12 +15102,12 @@
         </p:nvSpPr>
         <p:spPr>
           <a:xfrm>
-            <a:off x="7635240" y="4184294"/>
-            <a:ext cx="3474720" cy="1466698"/>
+            <a:off x="7543800" y="4389120"/>
+            <a:ext cx="3611880" cy="1261872"/>
           </a:xfrm>
           <a:prstGeom prst="roundRect">
             <a:avLst>
-              <a:gd name="adj" fmla="val 7481"/>
+              <a:gd name="adj" fmla="val 8696"/>
             </a:avLst>
           </a:prstGeom>
           <a:solidFill>
@@ -15129,8 +15129,8 @@
         </p:nvSpPr>
         <p:spPr>
           <a:xfrm>
-            <a:off x="7799832" y="4330598"/>
-            <a:ext cx="3145536" cy="256032"/>
+            <a:off x="7708392" y="4517136"/>
+            <a:ext cx="3282696" cy="228600"/>
           </a:xfrm>
           <a:prstGeom prst="rect">
             <a:avLst/>
@@ -15146,7 +15146,7 @@
               <a:buNone/>
             </a:pPr>
             <a:r>
-              <a:rPr lang="en-US" sz="1300" b="1" dirty="0">
+              <a:rPr lang="en-US" sz="1220" b="1" dirty="0">
                 <a:solidFill>
                   <a:srgbClr val="0068B7"/>
                 </a:solidFill>
@@ -15156,7 +15156,7 @@
               </a:rPr>
               <a:t>Next action</a:t>
             </a:r>
-            <a:endParaRPr lang="en-US" sz="1300" dirty="0"/>
+            <a:endParaRPr lang="en-US" sz="1220" dirty="0"/>
           </a:p>
         </p:txBody>
       </p:sp>
@@ -15168,8 +15168,8 @@
         </p:nvSpPr>
         <p:spPr>
           <a:xfrm>
-            <a:off x="7799832" y="4659782"/>
-            <a:ext cx="3145536" cy="899770"/>
+            <a:off x="7708392" y="4828032"/>
+            <a:ext cx="3282696" cy="749808"/>
           </a:xfrm>
           <a:prstGeom prst="rect">
             <a:avLst/>
@@ -15187,7 +15187,7 @@
               <a:buNone/>
             </a:pPr>
             <a:r>
-              <a:rPr lang="en-US" sz="1320" dirty="0">
+              <a:rPr lang="en-US" sz="1220" dirty="0">
                 <a:solidFill>
                   <a:srgbClr val="17364A"/>
                 </a:solidFill>
@@ -15195,9 +15195,9 @@
                 <a:ea typeface="Aptos" pitchFamily="34" charset="-122"/>
                 <a:cs typeface="Aptos" pitchFamily="34" charset="-120"/>
               </a:rPr>
-              <a:t>Use the assignment to test whether you can explain the concept, apply it to a realistic public health situation, and identify what would need review before the work moves forward.</a:t>
-            </a:r>
-            <a:endParaRPr lang="en-US" sz="1320" dirty="0"/>
+              <a:t>Use the assignment to test whether you can explain the concept, apply it to a.</a:t>
+            </a:r>
+            <a:endParaRPr lang="en-US" sz="1220" dirty="0"/>
           </a:p>
         </p:txBody>
       </p:sp>
@@ -15488,8 +15488,8 @@
         </p:nvSpPr>
         <p:spPr>
           <a:xfrm>
-            <a:off x="868680" y="1508760"/>
-            <a:ext cx="6309360" cy="4160520"/>
+            <a:off x="822960" y="1463040"/>
+            <a:ext cx="6565392" cy="4343400"/>
           </a:xfrm>
           <a:prstGeom prst="rect">
             <a:avLst/>
@@ -15507,7 +15507,7 @@
               <a:buNone/>
             </a:pPr>
             <a:r>
-              <a:rPr lang="en-US" sz="2100" dirty="0">
+              <a:rPr lang="en-US" sz="1920" dirty="0">
                 <a:solidFill>
                   <a:srgbClr val="003A63"/>
                 </a:solidFill>
@@ -15515,16 +15515,16 @@
                 <a:ea typeface="Aptos" pitchFamily="34" charset="-122"/>
                 <a:cs typeface="Aptos" pitchFamily="34" charset="-120"/>
               </a:rPr>
-              <a:t>• AI procurement requires stronger requirements than ordinary software purchasing because.</a:t>
-            </a:r>
-            <a:endParaRPr lang="en-US" sz="2100" dirty="0"/>
-          </a:p>
-          <a:p>
-            <a:pPr indent="0" marL="0">
-              <a:buNone/>
-            </a:pPr>
-            <a:r>
-              <a:rPr lang="en-US" sz="2100" dirty="0">
+              <a:t>• AI procurement requires stronger requirements than ordinary software.</a:t>
+            </a:r>
+            <a:endParaRPr lang="en-US" sz="1920" dirty="0"/>
+          </a:p>
+          <a:p>
+            <a:pPr indent="0" marL="0">
+              <a:buNone/>
+            </a:pPr>
+            <a:r>
+              <a:rPr lang="en-US" sz="1920" dirty="0">
                 <a:solidFill>
                   <a:srgbClr val="003A63"/>
                 </a:solidFill>
@@ -15532,9 +15532,9 @@
                 <a:ea typeface="Aptos" pitchFamily="34" charset="-122"/>
                 <a:cs typeface="Aptos" pitchFamily="34" charset="-120"/>
               </a:rPr>
-              <a:t>• This module teaches learners how to write requirements that can be evaluated, tested,.</a:t>
-            </a:r>
-            <a:endParaRPr lang="en-US" sz="2100" dirty="0"/>
+              <a:t>• This module teaches learners how to write requirements that can be.</a:t>
+            </a:r>
+            <a:endParaRPr lang="en-US" sz="1920" dirty="0"/>
           </a:p>
         </p:txBody>
       </p:sp>
@@ -15546,12 +15546,12 @@
         </p:nvSpPr>
         <p:spPr>
           <a:xfrm>
-            <a:off x="7635240" y="1325880"/>
-            <a:ext cx="3474720" cy="1255471"/>
+            <a:off x="7543800" y="1325880"/>
+            <a:ext cx="3611880" cy="1261872"/>
           </a:xfrm>
           <a:prstGeom prst="roundRect">
             <a:avLst>
-              <a:gd name="adj" fmla="val 8740"/>
+              <a:gd name="adj" fmla="val 8696"/>
             </a:avLst>
           </a:prstGeom>
           <a:solidFill>
@@ -15573,8 +15573,8 @@
         </p:nvSpPr>
         <p:spPr>
           <a:xfrm>
-            <a:off x="7799832" y="1472184"/>
-            <a:ext cx="3145536" cy="256032"/>
+            <a:off x="7708392" y="1453896"/>
+            <a:ext cx="3282696" cy="228600"/>
           </a:xfrm>
           <a:prstGeom prst="rect">
             <a:avLst/>
@@ -15590,7 +15590,7 @@
               <a:buNone/>
             </a:pPr>
             <a:r>
-              <a:rPr lang="en-US" sz="1300" b="1" dirty="0">
+              <a:rPr lang="en-US" sz="1220" b="1" dirty="0">
                 <a:solidFill>
                   <a:srgbClr val="0068B7"/>
                 </a:solidFill>
@@ -15600,7 +15600,7 @@
               </a:rPr>
               <a:t>Implementation cue</a:t>
             </a:r>
-            <a:endParaRPr lang="en-US" sz="1300" dirty="0"/>
+            <a:endParaRPr lang="en-US" sz="1220" dirty="0"/>
           </a:p>
         </p:txBody>
       </p:sp>
@@ -15612,8 +15612,8 @@
         </p:nvSpPr>
         <p:spPr>
           <a:xfrm>
-            <a:off x="7799832" y="1801368"/>
-            <a:ext cx="3145536" cy="688543"/>
+            <a:off x="7708392" y="1764792"/>
+            <a:ext cx="3282696" cy="749808"/>
           </a:xfrm>
           <a:prstGeom prst="rect">
             <a:avLst/>
@@ -15631,7 +15631,7 @@
               <a:buNone/>
             </a:pPr>
             <a:r>
-              <a:rPr lang="en-US" sz="1320" dirty="0">
+              <a:rPr lang="en-US" sz="1220" dirty="0">
                 <a:solidFill>
                   <a:srgbClr val="17364A"/>
                 </a:solidFill>
@@ -15639,9 +15639,9 @@
                 <a:ea typeface="Aptos" pitchFamily="34" charset="-122"/>
                 <a:cs typeface="Aptos" pitchFamily="34" charset="-120"/>
               </a:rPr>
-              <a:t>AI procurement requires stronger requirements than ordinary software purchasing because agencies must.</a:t>
-            </a:r>
-            <a:endParaRPr lang="en-US" sz="1320" dirty="0"/>
+              <a:t>AI procurement requires stronger requirements than ordinary software purchasing.</a:t>
+            </a:r>
+            <a:endParaRPr lang="en-US" sz="1220" dirty="0"/>
           </a:p>
         </p:txBody>
       </p:sp>
@@ -15653,12 +15653,12 @@
         </p:nvSpPr>
         <p:spPr>
           <a:xfrm>
-            <a:off x="7635240" y="2718511"/>
-            <a:ext cx="3474720" cy="1328623"/>
+            <a:off x="7543800" y="2724912"/>
+            <a:ext cx="3611880" cy="1527048"/>
           </a:xfrm>
           <a:prstGeom prst="roundRect">
             <a:avLst>
-              <a:gd name="adj" fmla="val 8259"/>
+              <a:gd name="adj" fmla="val 7186"/>
             </a:avLst>
           </a:prstGeom>
           <a:solidFill>
@@ -15680,24 +15680,26 @@
         </p:nvSpPr>
         <p:spPr>
           <a:xfrm>
-            <a:off x="7799832" y="2846527"/>
-            <a:ext cx="3145536" cy="237744"/>
-          </a:xfrm>
-          <a:prstGeom prst="rect">
-            <a:avLst/>
-          </a:prstGeom>
-          <a:noFill/>
-          <a:ln/>
-        </p:spPr>
-        <p:txBody>
-          <a:bodyPr wrap="square" lIns="0" tIns="0" rIns="0" bIns="0" rtlCol="0" anchor="ctr"/>
-          <a:lstStyle/>
-          <a:p>
-            <a:pPr indent="0" marL="0">
-              <a:buNone/>
-            </a:pPr>
-            <a:r>
-              <a:rPr lang="en-US" sz="1250" b="1" dirty="0">
+            <a:off x="7708392" y="2852928"/>
+            <a:ext cx="3282696" cy="219456"/>
+          </a:xfrm>
+          <a:prstGeom prst="rect">
+            <a:avLst/>
+          </a:prstGeom>
+          <a:noFill/>
+          <a:ln/>
+        </p:spPr>
+        <p:txBody>
+          <a:bodyPr wrap="square" lIns="0" tIns="0" rIns="0" bIns="0" rtlCol="0" anchor="ctr">
+            <a:normAutofit/>
+          </a:bodyPr>
+          <a:lstStyle/>
+          <a:p>
+            <a:pPr indent="0" marL="0">
+              <a:buNone/>
+            </a:pPr>
+            <a:r>
+              <a:rPr lang="en-US" sz="1160" b="1" dirty="0">
                 <a:solidFill>
                   <a:srgbClr val="0068B7"/>
                 </a:solidFill>
@@ -15707,7 +15709,7 @@
               </a:rPr>
               <a:t>Implementation path</a:t>
             </a:r>
-            <a:endParaRPr lang="en-US" sz="1250" dirty="0"/>
+            <a:endParaRPr lang="en-US" sz="1160" dirty="0"/>
           </a:p>
         </p:txBody>
       </p:sp>
@@ -15719,7 +15721,7 @@
         </p:nvSpPr>
         <p:spPr>
           <a:xfrm>
-            <a:off x="8763000" y="3399739"/>
+            <a:off x="8717280" y="3406140"/>
             <a:ext cx="164592" cy="0"/>
           </a:xfrm>
           <a:prstGeom prst="line">
@@ -15742,8 +15744,8 @@
         </p:nvSpPr>
         <p:spPr>
           <a:xfrm>
-            <a:off x="7872984" y="3248863"/>
-            <a:ext cx="890016" cy="301752"/>
+            <a:off x="7781544" y="3255264"/>
+            <a:ext cx="935736" cy="301752"/>
           </a:xfrm>
           <a:prstGeom prst="roundRect">
             <a:avLst>
@@ -15769,8 +15771,8 @@
         </p:nvSpPr>
         <p:spPr>
           <a:xfrm>
-            <a:off x="7909560" y="3322015"/>
-            <a:ext cx="816864" cy="146304"/>
+            <a:off x="7818120" y="3328416"/>
+            <a:ext cx="862584" cy="146304"/>
           </a:xfrm>
           <a:prstGeom prst="rect">
             <a:avLst/>
@@ -15810,7 +15812,7 @@
         </p:nvSpPr>
         <p:spPr>
           <a:xfrm>
-            <a:off x="9817608" y="3399739"/>
+            <a:off x="9817608" y="3406140"/>
             <a:ext cx="164592" cy="0"/>
           </a:xfrm>
           <a:prstGeom prst="line">
@@ -15833,8 +15835,8 @@
         </p:nvSpPr>
         <p:spPr>
           <a:xfrm>
-            <a:off x="8927592" y="3248863"/>
-            <a:ext cx="890016" cy="301752"/>
+            <a:off x="8881872" y="3255264"/>
+            <a:ext cx="935736" cy="301752"/>
           </a:xfrm>
           <a:prstGeom prst="roundRect">
             <a:avLst>
@@ -15860,8 +15862,8 @@
         </p:nvSpPr>
         <p:spPr>
           <a:xfrm>
-            <a:off x="8964168" y="3322015"/>
-            <a:ext cx="816864" cy="146304"/>
+            <a:off x="8918448" y="3328416"/>
+            <a:ext cx="862584" cy="146304"/>
           </a:xfrm>
           <a:prstGeom prst="rect">
             <a:avLst/>
@@ -15901,8 +15903,8 @@
         </p:nvSpPr>
         <p:spPr>
           <a:xfrm>
-            <a:off x="9982200" y="3248863"/>
-            <a:ext cx="890016" cy="301752"/>
+            <a:off x="9982200" y="3255264"/>
+            <a:ext cx="935736" cy="301752"/>
           </a:xfrm>
           <a:prstGeom prst="roundRect">
             <a:avLst>
@@ -15928,8 +15930,8 @@
         </p:nvSpPr>
         <p:spPr>
           <a:xfrm>
-            <a:off x="10018776" y="3322015"/>
-            <a:ext cx="816864" cy="146304"/>
+            <a:off x="10018776" y="3328416"/>
+            <a:ext cx="862584" cy="146304"/>
           </a:xfrm>
           <a:prstGeom prst="rect">
             <a:avLst/>
@@ -15969,8 +15971,8 @@
         </p:nvSpPr>
         <p:spPr>
           <a:xfrm>
-            <a:off x="7854696" y="3742639"/>
-            <a:ext cx="3035808" cy="158191"/>
+            <a:off x="7763256" y="3749040"/>
+            <a:ext cx="3172968" cy="356616"/>
           </a:xfrm>
           <a:prstGeom prst="rect">
             <a:avLst/>
@@ -15988,7 +15990,7 @@
               <a:buNone/>
             </a:pPr>
             <a:r>
-              <a:rPr lang="en-US" sz="1120" dirty="0">
+              <a:rPr lang="en-US" sz="1040" dirty="0">
                 <a:solidFill>
                   <a:srgbClr val="17364A"/>
                 </a:solidFill>
@@ -15996,9 +15998,9 @@
                 <a:ea typeface="Aptos" pitchFamily="34" charset="-122"/>
                 <a:cs typeface="Aptos" pitchFamily="34" charset="-120"/>
               </a:rPr>
-              <a:t>Implementation work should make dependencies, approvals, training, and sustainment visible before launch.</a:t>
-            </a:r>
-            <a:endParaRPr lang="en-US" sz="1120" dirty="0"/>
+              <a:t>Implementation work should make dependencies, approvals, training, and.</a:t>
+            </a:r>
+            <a:endParaRPr lang="en-US" sz="1040" dirty="0"/>
           </a:p>
         </p:txBody>
       </p:sp>
@@ -16010,12 +16012,12 @@
         </p:nvSpPr>
         <p:spPr>
           <a:xfrm>
-            <a:off x="7635240" y="4184294"/>
-            <a:ext cx="3474720" cy="1466698"/>
+            <a:off x="7543800" y="4389120"/>
+            <a:ext cx="3611880" cy="1261872"/>
           </a:xfrm>
           <a:prstGeom prst="roundRect">
             <a:avLst>
-              <a:gd name="adj" fmla="val 7481"/>
+              <a:gd name="adj" fmla="val 8696"/>
             </a:avLst>
           </a:prstGeom>
           <a:solidFill>
@@ -16037,8 +16039,8 @@
         </p:nvSpPr>
         <p:spPr>
           <a:xfrm>
-            <a:off x="7799832" y="4330598"/>
-            <a:ext cx="3145536" cy="256032"/>
+            <a:off x="7708392" y="4517136"/>
+            <a:ext cx="3282696" cy="228600"/>
           </a:xfrm>
           <a:prstGeom prst="rect">
             <a:avLst/>
@@ -16054,7 +16056,7 @@
               <a:buNone/>
             </a:pPr>
             <a:r>
-              <a:rPr lang="en-US" sz="1300" b="1" dirty="0">
+              <a:rPr lang="en-US" sz="1220" b="1" dirty="0">
                 <a:solidFill>
                   <a:srgbClr val="0068B7"/>
                 </a:solidFill>
@@ -16064,7 +16066,7 @@
               </a:rPr>
               <a:t>Next action</a:t>
             </a:r>
-            <a:endParaRPr lang="en-US" sz="1300" dirty="0"/>
+            <a:endParaRPr lang="en-US" sz="1220" dirty="0"/>
           </a:p>
         </p:txBody>
       </p:sp>
@@ -16076,8 +16078,8 @@
         </p:nvSpPr>
         <p:spPr>
           <a:xfrm>
-            <a:off x="7799832" y="4659782"/>
-            <a:ext cx="3145536" cy="899770"/>
+            <a:off x="7708392" y="4828032"/>
+            <a:ext cx="3282696" cy="749808"/>
           </a:xfrm>
           <a:prstGeom prst="rect">
             <a:avLst/>
@@ -16095,7 +16097,7 @@
               <a:buNone/>
             </a:pPr>
             <a:r>
-              <a:rPr lang="en-US" sz="1320" dirty="0">
+              <a:rPr lang="en-US" sz="1220" dirty="0">
                 <a:solidFill>
                   <a:srgbClr val="17364A"/>
                 </a:solidFill>
@@ -16103,9 +16105,9 @@
                 <a:ea typeface="Aptos" pitchFamily="34" charset="-122"/>
                 <a:cs typeface="Aptos" pitchFamily="34" charset="-120"/>
               </a:rPr>
-              <a:t>Use the concept to clarify workflow changes, dependencies, staffing, procurement requirements, training needs, and implementation checkpoints.</a:t>
-            </a:r>
-            <a:endParaRPr lang="en-US" sz="1320" dirty="0"/>
+              <a:t>Use the concept to clarify workflow changes, dependencies, staffing, procurement.</a:t>
+            </a:r>
+            <a:endParaRPr lang="en-US" sz="1220" dirty="0"/>
           </a:p>
         </p:txBody>
       </p:sp>
@@ -16396,8 +16398,8 @@
         </p:nvSpPr>
         <p:spPr>
           <a:xfrm>
-            <a:off x="868680" y="1508760"/>
-            <a:ext cx="6309360" cy="4160520"/>
+            <a:off x="822960" y="1463040"/>
+            <a:ext cx="6565392" cy="4343400"/>
           </a:xfrm>
           <a:prstGeom prst="rect">
             <a:avLst/>
@@ -16415,7 +16417,7 @@
               <a:buNone/>
             </a:pPr>
             <a:r>
-              <a:rPr lang="en-US" sz="2100" dirty="0">
+              <a:rPr lang="en-US" sz="1920" dirty="0">
                 <a:solidFill>
                   <a:srgbClr val="003A63"/>
                 </a:solidFill>
@@ -16423,16 +16425,16 @@
                 <a:ea typeface="Aptos" pitchFamily="34" charset="-122"/>
                 <a:cs typeface="Aptos" pitchFamily="34" charset="-120"/>
               </a:rPr>
-              <a:t>• This module provides national-level training guidance for public health agencies and partners.</a:t>
-            </a:r>
-            <a:endParaRPr lang="en-US" sz="2100" dirty="0"/>
-          </a:p>
-          <a:p>
-            <a:pPr indent="0" marL="0">
-              <a:buNone/>
-            </a:pPr>
-            <a:r>
-              <a:rPr lang="en-US" sz="2100" dirty="0">
+              <a:t>• This module provides national-level training guidance for public health.</a:t>
+            </a:r>
+            <a:endParaRPr lang="en-US" sz="1920" dirty="0"/>
+          </a:p>
+          <a:p>
+            <a:pPr indent="0" marL="0">
+              <a:buNone/>
+            </a:pPr>
+            <a:r>
+              <a:rPr lang="en-US" sz="1920" dirty="0">
                 <a:solidFill>
                   <a:srgbClr val="003A63"/>
                 </a:solidFill>
@@ -16440,16 +16442,16 @@
                 <a:ea typeface="Aptos" pitchFamily="34" charset="-122"/>
                 <a:cs typeface="Aptos" pitchFamily="34" charset="-120"/>
               </a:rPr>
-              <a:t>• It is not legal advice and does not replace review by agency legal counsel, privacy officers,.</a:t>
-            </a:r>
-            <a:endParaRPr lang="en-US" sz="2100" dirty="0"/>
-          </a:p>
-          <a:p>
-            <a:pPr indent="0" marL="0">
-              <a:buNone/>
-            </a:pPr>
-            <a:r>
-              <a:rPr lang="en-US" sz="2100" dirty="0">
+              <a:t>• It is not legal advice and does not replace review by agency legal counsel,.</a:t>
+            </a:r>
+            <a:endParaRPr lang="en-US" sz="1920" dirty="0"/>
+          </a:p>
+          <a:p>
+            <a:pPr indent="0" marL="0">
+              <a:buNone/>
+            </a:pPr>
+            <a:r>
+              <a:rPr lang="en-US" sz="1920" dirty="0">
                 <a:solidFill>
                   <a:srgbClr val="003A63"/>
                 </a:solidFill>
@@ -16457,9 +16459,9 @@
                 <a:ea typeface="Aptos" pitchFamily="34" charset="-122"/>
                 <a:cs typeface="Aptos" pitchFamily="34" charset="-120"/>
               </a:rPr>
-              <a:t>• Requirements may vary by state, locality, territory, Tribe, agency, funding source,.</a:t>
-            </a:r>
-            <a:endParaRPr lang="en-US" sz="2100" dirty="0"/>
+              <a:t>• Requirements may vary by state, locality, territory, Tribe, agency, funding.</a:t>
+            </a:r>
+            <a:endParaRPr lang="en-US" sz="1920" dirty="0"/>
           </a:p>
         </p:txBody>
       </p:sp>
@@ -16471,12 +16473,12 @@
         </p:nvSpPr>
         <p:spPr>
           <a:xfrm>
-            <a:off x="7635240" y="1325880"/>
-            <a:ext cx="3474720" cy="1207008"/>
+            <a:off x="7543800" y="1325880"/>
+            <a:ext cx="3611880" cy="1261872"/>
           </a:xfrm>
           <a:prstGeom prst="roundRect">
             <a:avLst>
-              <a:gd name="adj" fmla="val 9091"/>
+              <a:gd name="adj" fmla="val 8696"/>
             </a:avLst>
           </a:prstGeom>
           <a:solidFill>
@@ -16498,8 +16500,8 @@
         </p:nvSpPr>
         <p:spPr>
           <a:xfrm>
-            <a:off x="7799832" y="1472184"/>
-            <a:ext cx="3145536" cy="256032"/>
+            <a:off x="7708392" y="1453896"/>
+            <a:ext cx="3282696" cy="228600"/>
           </a:xfrm>
           <a:prstGeom prst="rect">
             <a:avLst/>
@@ -16515,7 +16517,7 @@
               <a:buNone/>
             </a:pPr>
             <a:r>
-              <a:rPr lang="en-US" sz="1300" b="1" dirty="0">
+              <a:rPr lang="en-US" sz="1220" b="1" dirty="0">
                 <a:solidFill>
                   <a:srgbClr val="0068B7"/>
                 </a:solidFill>
@@ -16525,7 +16527,7 @@
               </a:rPr>
               <a:t>Governance lens</a:t>
             </a:r>
-            <a:endParaRPr lang="en-US" sz="1300" dirty="0"/>
+            <a:endParaRPr lang="en-US" sz="1220" dirty="0"/>
           </a:p>
         </p:txBody>
       </p:sp>
@@ -16537,8 +16539,8 @@
         </p:nvSpPr>
         <p:spPr>
           <a:xfrm>
-            <a:off x="7799832" y="1801368"/>
-            <a:ext cx="3145536" cy="640080"/>
+            <a:off x="7708392" y="1764792"/>
+            <a:ext cx="3282696" cy="749808"/>
           </a:xfrm>
           <a:prstGeom prst="rect">
             <a:avLst/>
@@ -16556,7 +16558,7 @@
               <a:buNone/>
             </a:pPr>
             <a:r>
-              <a:rPr lang="en-US" sz="1320" dirty="0">
+              <a:rPr lang="en-US" sz="1220" dirty="0">
                 <a:solidFill>
                   <a:srgbClr val="17364A"/>
                 </a:solidFill>
@@ -16564,9 +16566,9 @@
                 <a:ea typeface="Aptos" pitchFamily="34" charset="-122"/>
                 <a:cs typeface="Aptos" pitchFamily="34" charset="-120"/>
               </a:rPr>
-              <a:t>This module provides national-level training guidance for public health agencies and.</a:t>
-            </a:r>
-            <a:endParaRPr lang="en-US" sz="1320" dirty="0"/>
+              <a:t>This module provides national-level training guidance for public health agencies.</a:t>
+            </a:r>
+            <a:endParaRPr lang="en-US" sz="1220" dirty="0"/>
           </a:p>
         </p:txBody>
       </p:sp>
@@ -16578,12 +16580,12 @@
         </p:nvSpPr>
         <p:spPr>
           <a:xfrm>
-            <a:off x="7635240" y="2670048"/>
-            <a:ext cx="3474720" cy="1377086"/>
+            <a:off x="7543800" y="2724912"/>
+            <a:ext cx="3611880" cy="1527048"/>
           </a:xfrm>
           <a:prstGeom prst="roundRect">
             <a:avLst>
-              <a:gd name="adj" fmla="val 7968"/>
+              <a:gd name="adj" fmla="val 7186"/>
             </a:avLst>
           </a:prstGeom>
           <a:solidFill>
@@ -16605,24 +16607,26 @@
         </p:nvSpPr>
         <p:spPr>
           <a:xfrm>
-            <a:off x="7799832" y="2798064"/>
-            <a:ext cx="3145536" cy="237744"/>
-          </a:xfrm>
-          <a:prstGeom prst="rect">
-            <a:avLst/>
-          </a:prstGeom>
-          <a:noFill/>
-          <a:ln/>
-        </p:spPr>
-        <p:txBody>
-          <a:bodyPr wrap="square" lIns="0" tIns="0" rIns="0" bIns="0" rtlCol="0" anchor="ctr"/>
-          <a:lstStyle/>
-          <a:p>
-            <a:pPr indent="0" marL="0">
-              <a:buNone/>
-            </a:pPr>
-            <a:r>
-              <a:rPr lang="en-US" sz="1250" b="1" dirty="0">
+            <a:off x="7708392" y="2852928"/>
+            <a:ext cx="3282696" cy="219456"/>
+          </a:xfrm>
+          <a:prstGeom prst="rect">
+            <a:avLst/>
+          </a:prstGeom>
+          <a:noFill/>
+          <a:ln/>
+        </p:spPr>
+        <p:txBody>
+          <a:bodyPr wrap="square" lIns="0" tIns="0" rIns="0" bIns="0" rtlCol="0" anchor="ctr">
+            <a:normAutofit/>
+          </a:bodyPr>
+          <a:lstStyle/>
+          <a:p>
+            <a:pPr indent="0" marL="0">
+              <a:buNone/>
+            </a:pPr>
+            <a:r>
+              <a:rPr lang="en-US" sz="1160" b="1" dirty="0">
                 <a:solidFill>
                   <a:srgbClr val="0068B7"/>
                 </a:solidFill>
@@ -16632,7 +16636,7 @@
               </a:rPr>
               <a:t>Governance pathway</a:t>
             </a:r>
-            <a:endParaRPr lang="en-US" sz="1250" dirty="0"/>
+            <a:endParaRPr lang="en-US" sz="1160" dirty="0"/>
           </a:p>
         </p:txBody>
       </p:sp>
@@ -16644,7 +16648,7 @@
         </p:nvSpPr>
         <p:spPr>
           <a:xfrm>
-            <a:off x="8763000" y="3351276"/>
+            <a:off x="8717280" y="3406140"/>
             <a:ext cx="164592" cy="0"/>
           </a:xfrm>
           <a:prstGeom prst="line">
@@ -16667,8 +16671,8 @@
         </p:nvSpPr>
         <p:spPr>
           <a:xfrm>
-            <a:off x="7872984" y="3200400"/>
-            <a:ext cx="890016" cy="301752"/>
+            <a:off x="7781544" y="3255264"/>
+            <a:ext cx="935736" cy="301752"/>
           </a:xfrm>
           <a:prstGeom prst="roundRect">
             <a:avLst>
@@ -16694,8 +16698,8 @@
         </p:nvSpPr>
         <p:spPr>
           <a:xfrm>
-            <a:off x="7909560" y="3273552"/>
-            <a:ext cx="816864" cy="146304"/>
+            <a:off x="7818120" y="3328416"/>
+            <a:ext cx="862584" cy="146304"/>
           </a:xfrm>
           <a:prstGeom prst="rect">
             <a:avLst/>
@@ -16735,7 +16739,7 @@
         </p:nvSpPr>
         <p:spPr>
           <a:xfrm>
-            <a:off x="9817608" y="3351276"/>
+            <a:off x="9817608" y="3406140"/>
             <a:ext cx="164592" cy="0"/>
           </a:xfrm>
           <a:prstGeom prst="line">
@@ -16758,8 +16762,8 @@
         </p:nvSpPr>
         <p:spPr>
           <a:xfrm>
-            <a:off x="8927592" y="3200400"/>
-            <a:ext cx="890016" cy="301752"/>
+            <a:off x="8881872" y="3255264"/>
+            <a:ext cx="935736" cy="301752"/>
           </a:xfrm>
           <a:prstGeom prst="roundRect">
             <a:avLst>
@@ -16785,8 +16789,8 @@
         </p:nvSpPr>
         <p:spPr>
           <a:xfrm>
-            <a:off x="8964168" y="3273552"/>
-            <a:ext cx="816864" cy="146304"/>
+            <a:off x="8918448" y="3328416"/>
+            <a:ext cx="862584" cy="146304"/>
           </a:xfrm>
           <a:prstGeom prst="rect">
             <a:avLst/>
@@ -16826,8 +16830,8 @@
         </p:nvSpPr>
         <p:spPr>
           <a:xfrm>
-            <a:off x="9982200" y="3200400"/>
-            <a:ext cx="890016" cy="301752"/>
+            <a:off x="9982200" y="3255264"/>
+            <a:ext cx="935736" cy="301752"/>
           </a:xfrm>
           <a:prstGeom prst="roundRect">
             <a:avLst>
@@ -16853,8 +16857,8 @@
         </p:nvSpPr>
         <p:spPr>
           <a:xfrm>
-            <a:off x="10018776" y="3273552"/>
-            <a:ext cx="816864" cy="146304"/>
+            <a:off x="10018776" y="3328416"/>
+            <a:ext cx="862584" cy="146304"/>
           </a:xfrm>
           <a:prstGeom prst="rect">
             <a:avLst/>
@@ -16894,8 +16898,8 @@
         </p:nvSpPr>
         <p:spPr>
           <a:xfrm>
-            <a:off x="7854696" y="3694176"/>
-            <a:ext cx="3035808" cy="206654"/>
+            <a:off x="7763256" y="3749040"/>
+            <a:ext cx="3172968" cy="356616"/>
           </a:xfrm>
           <a:prstGeom prst="rect">
             <a:avLst/>
@@ -16913,7 +16917,7 @@
               <a:buNone/>
             </a:pPr>
             <a:r>
-              <a:rPr lang="en-US" sz="1120" dirty="0">
+              <a:rPr lang="en-US" sz="1040" dirty="0">
                 <a:solidFill>
                   <a:srgbClr val="17364A"/>
                 </a:solidFill>
@@ -16921,9 +16925,9 @@
                 <a:ea typeface="Aptos" pitchFamily="34" charset="-122"/>
                 <a:cs typeface="Aptos" pitchFamily="34" charset="-120"/>
               </a:rPr>
-              <a:t>A proposed AI use should move through documented review before it becomes an operational workflow.</a:t>
-            </a:r>
-            <a:endParaRPr lang="en-US" sz="1120" dirty="0"/>
+              <a:t>A proposed AI use should move through documented review before it.</a:t>
+            </a:r>
+            <a:endParaRPr lang="en-US" sz="1040" dirty="0"/>
           </a:p>
         </p:txBody>
       </p:sp>
@@ -16935,12 +16939,12 @@
         </p:nvSpPr>
         <p:spPr>
           <a:xfrm>
-            <a:off x="7635240" y="4184294"/>
-            <a:ext cx="3474720" cy="1466698"/>
+            <a:off x="7543800" y="4389120"/>
+            <a:ext cx="3611880" cy="1261872"/>
           </a:xfrm>
           <a:prstGeom prst="roundRect">
             <a:avLst>
-              <a:gd name="adj" fmla="val 7481"/>
+              <a:gd name="adj" fmla="val 8696"/>
             </a:avLst>
           </a:prstGeom>
           <a:solidFill>
@@ -16962,8 +16966,8 @@
         </p:nvSpPr>
         <p:spPr>
           <a:xfrm>
-            <a:off x="7799832" y="4330598"/>
-            <a:ext cx="3145536" cy="256032"/>
+            <a:off x="7708392" y="4517136"/>
+            <a:ext cx="3282696" cy="228600"/>
           </a:xfrm>
           <a:prstGeom prst="rect">
             <a:avLst/>
@@ -16979,7 +16983,7 @@
               <a:buNone/>
             </a:pPr>
             <a:r>
-              <a:rPr lang="en-US" sz="1300" b="1" dirty="0">
+              <a:rPr lang="en-US" sz="1220" b="1" dirty="0">
                 <a:solidFill>
                   <a:srgbClr val="0068B7"/>
                 </a:solidFill>
@@ -16989,7 +16993,7 @@
               </a:rPr>
               <a:t>What to document</a:t>
             </a:r>
-            <a:endParaRPr lang="en-US" sz="1300" dirty="0"/>
+            <a:endParaRPr lang="en-US" sz="1220" dirty="0"/>
           </a:p>
         </p:txBody>
       </p:sp>
@@ -17001,8 +17005,8 @@
         </p:nvSpPr>
         <p:spPr>
           <a:xfrm>
-            <a:off x="7799832" y="4659782"/>
-            <a:ext cx="3145536" cy="899770"/>
+            <a:off x="7708392" y="4828032"/>
+            <a:ext cx="3282696" cy="749808"/>
           </a:xfrm>
           <a:prstGeom prst="rect">
             <a:avLst/>
@@ -17020,7 +17024,7 @@
               <a:buNone/>
             </a:pPr>
             <a:r>
-              <a:rPr lang="en-US" sz="1320" dirty="0">
+              <a:rPr lang="en-US" sz="1220" dirty="0">
                 <a:solidFill>
                   <a:srgbClr val="17364A"/>
                 </a:solidFill>
@@ -17028,9 +17032,9 @@
                 <a:ea typeface="Aptos" pitchFamily="34" charset="-122"/>
                 <a:cs typeface="Aptos" pitchFamily="34" charset="-120"/>
               </a:rPr>
-              <a:t>Translate this concept into clear decision rights, review steps, documentation expectations, and escalation paths before an AI-supported workflow is approved.</a:t>
-            </a:r>
-            <a:endParaRPr lang="en-US" sz="1320" dirty="0"/>
+              <a:t>Translate this concept into clear decision rights, review steps, documentation.</a:t>
+            </a:r>
+            <a:endParaRPr lang="en-US" sz="1220" dirty="0"/>
           </a:p>
         </p:txBody>
       </p:sp>
@@ -17321,8 +17325,8 @@
         </p:nvSpPr>
         <p:spPr>
           <a:xfrm>
-            <a:off x="868680" y="1508760"/>
-            <a:ext cx="6309360" cy="4160520"/>
+            <a:off x="822960" y="1463040"/>
+            <a:ext cx="6565392" cy="4343400"/>
           </a:xfrm>
           <a:prstGeom prst="rect">
             <a:avLst/>
@@ -17340,7 +17344,7 @@
               <a:buNone/>
             </a:pPr>
             <a:r>
-              <a:rPr lang="en-US" sz="2100" dirty="0">
+              <a:rPr lang="en-US" sz="1920" dirty="0">
                 <a:solidFill>
                   <a:srgbClr val="003A63"/>
                 </a:solidFill>
@@ -17348,16 +17352,16 @@
                 <a:ea typeface="Aptos" pitchFamily="34" charset="-122"/>
                 <a:cs typeface="Aptos" pitchFamily="34" charset="-120"/>
               </a:rPr>
-              <a:t>• Requirements Writing for AI Procurement and Implementation matters because AI systems are.</a:t>
-            </a:r>
-            <a:endParaRPr lang="en-US" sz="2100" dirty="0"/>
-          </a:p>
-          <a:p>
-            <a:pPr indent="0" marL="0">
-              <a:buNone/>
-            </a:pPr>
-            <a:r>
-              <a:rPr lang="en-US" sz="2100" dirty="0">
+              <a:t>• Requirements Writing for AI Procurement and Implementation matters because.</a:t>
+            </a:r>
+            <a:endParaRPr lang="en-US" sz="1920" dirty="0"/>
+          </a:p>
+          <a:p>
+            <a:pPr indent="0" marL="0">
+              <a:buNone/>
+            </a:pPr>
+            <a:r>
+              <a:rPr lang="en-US" sz="1920" dirty="0">
                 <a:solidFill>
                   <a:srgbClr val="003A63"/>
                 </a:solidFill>
@@ -17365,16 +17369,16 @@
                 <a:ea typeface="Aptos" pitchFamily="34" charset="-122"/>
                 <a:cs typeface="Aptos" pitchFamily="34" charset="-120"/>
               </a:rPr>
-              <a:t>• The topic affects whether AI outputs are accurate, explainable, safe, equitable, secure, and.</a:t>
-            </a:r>
-            <a:endParaRPr lang="en-US" sz="2100" dirty="0"/>
-          </a:p>
-          <a:p>
-            <a:pPr indent="0" marL="0">
-              <a:buNone/>
-            </a:pPr>
-            <a:r>
-              <a:rPr lang="en-US" sz="2100" dirty="0">
+              <a:t>• The topic affects whether AI outputs are accurate, explainable, safe,.</a:t>
+            </a:r>
+            <a:endParaRPr lang="en-US" sz="1920" dirty="0"/>
+          </a:p>
+          <a:p>
+            <a:pPr indent="0" marL="0">
+              <a:buNone/>
+            </a:pPr>
+            <a:r>
+              <a:rPr lang="en-US" sz="1920" dirty="0">
                 <a:solidFill>
                   <a:srgbClr val="003A63"/>
                 </a:solidFill>
@@ -17382,9 +17386,9 @@
                 <a:ea typeface="Aptos" pitchFamily="34" charset="-122"/>
                 <a:cs typeface="Aptos" pitchFamily="34" charset="-120"/>
               </a:rPr>
-              <a:t>• Agencies that ignore this area may create tools that work in a demonstration but fail in.</a:t>
-            </a:r>
-            <a:endParaRPr lang="en-US" sz="2100" dirty="0"/>
+              <a:t>• Agencies that ignore this area may create tools that work in a demonstration.</a:t>
+            </a:r>
+            <a:endParaRPr lang="en-US" sz="1920" dirty="0"/>
           </a:p>
         </p:txBody>
       </p:sp>
@@ -17396,12 +17400,12 @@
         </p:nvSpPr>
         <p:spPr>
           <a:xfrm>
-            <a:off x="7635240" y="1325880"/>
-            <a:ext cx="3474720" cy="1255471"/>
+            <a:off x="7543800" y="1325880"/>
+            <a:ext cx="3611880" cy="1261872"/>
           </a:xfrm>
           <a:prstGeom prst="roundRect">
             <a:avLst>
-              <a:gd name="adj" fmla="val 8740"/>
+              <a:gd name="adj" fmla="val 8696"/>
             </a:avLst>
           </a:prstGeom>
           <a:solidFill>
@@ -17423,8 +17427,8 @@
         </p:nvSpPr>
         <p:spPr>
           <a:xfrm>
-            <a:off x="7799832" y="1472184"/>
-            <a:ext cx="3145536" cy="256032"/>
+            <a:off x="7708392" y="1453896"/>
+            <a:ext cx="3282696" cy="228600"/>
           </a:xfrm>
           <a:prstGeom prst="rect">
             <a:avLst/>
@@ -17440,7 +17444,7 @@
               <a:buNone/>
             </a:pPr>
             <a:r>
-              <a:rPr lang="en-US" sz="1300" b="1" dirty="0">
+              <a:rPr lang="en-US" sz="1220" b="1" dirty="0">
                 <a:solidFill>
                   <a:srgbClr val="0068B7"/>
                 </a:solidFill>
@@ -17450,7 +17454,7 @@
               </a:rPr>
               <a:t>Implementation cue</a:t>
             </a:r>
-            <a:endParaRPr lang="en-US" sz="1300" dirty="0"/>
+            <a:endParaRPr lang="en-US" sz="1220" dirty="0"/>
           </a:p>
         </p:txBody>
       </p:sp>
@@ -17462,8 +17466,8 @@
         </p:nvSpPr>
         <p:spPr>
           <a:xfrm>
-            <a:off x="7799832" y="1801368"/>
-            <a:ext cx="3145536" cy="688543"/>
+            <a:off x="7708392" y="1764792"/>
+            <a:ext cx="3282696" cy="749808"/>
           </a:xfrm>
           <a:prstGeom prst="rect">
             <a:avLst/>
@@ -17481,7 +17485,7 @@
               <a:buNone/>
             </a:pPr>
             <a:r>
-              <a:rPr lang="en-US" sz="1320" dirty="0">
+              <a:rPr lang="en-US" sz="1220" dirty="0">
                 <a:solidFill>
                   <a:srgbClr val="17364A"/>
                 </a:solidFill>
@@ -17489,9 +17493,9 @@
                 <a:ea typeface="Aptos" pitchFamily="34" charset="-122"/>
                 <a:cs typeface="Aptos" pitchFamily="34" charset="-120"/>
               </a:rPr>
-              <a:t>Requirements Writing for AI Procurement and Implementation matters because AI systems are embedded in.</a:t>
-            </a:r>
-            <a:endParaRPr lang="en-US" sz="1320" dirty="0"/>
+              <a:t>Requirements Writing for AI Procurement and Implementation matters because AI.</a:t>
+            </a:r>
+            <a:endParaRPr lang="en-US" sz="1220" dirty="0"/>
           </a:p>
         </p:txBody>
       </p:sp>
@@ -17503,12 +17507,12 @@
         </p:nvSpPr>
         <p:spPr>
           <a:xfrm>
-            <a:off x="7635240" y="2718511"/>
-            <a:ext cx="3474720" cy="1328623"/>
+            <a:off x="7543800" y="2724912"/>
+            <a:ext cx="3611880" cy="1527048"/>
           </a:xfrm>
           <a:prstGeom prst="roundRect">
             <a:avLst>
-              <a:gd name="adj" fmla="val 8259"/>
+              <a:gd name="adj" fmla="val 7186"/>
             </a:avLst>
           </a:prstGeom>
           <a:solidFill>
@@ -17530,24 +17534,26 @@
         </p:nvSpPr>
         <p:spPr>
           <a:xfrm>
-            <a:off x="7799832" y="2846527"/>
-            <a:ext cx="3145536" cy="237744"/>
-          </a:xfrm>
-          <a:prstGeom prst="rect">
-            <a:avLst/>
-          </a:prstGeom>
-          <a:noFill/>
-          <a:ln/>
-        </p:spPr>
-        <p:txBody>
-          <a:bodyPr wrap="square" lIns="0" tIns="0" rIns="0" bIns="0" rtlCol="0" anchor="ctr"/>
-          <a:lstStyle/>
-          <a:p>
-            <a:pPr indent="0" marL="0">
-              <a:buNone/>
-            </a:pPr>
-            <a:r>
-              <a:rPr lang="en-US" sz="1250" b="1" dirty="0">
+            <a:off x="7708392" y="2852928"/>
+            <a:ext cx="3282696" cy="219456"/>
+          </a:xfrm>
+          <a:prstGeom prst="rect">
+            <a:avLst/>
+          </a:prstGeom>
+          <a:noFill/>
+          <a:ln/>
+        </p:spPr>
+        <p:txBody>
+          <a:bodyPr wrap="square" lIns="0" tIns="0" rIns="0" bIns="0" rtlCol="0" anchor="ctr">
+            <a:normAutofit/>
+          </a:bodyPr>
+          <a:lstStyle/>
+          <a:p>
+            <a:pPr indent="0" marL="0">
+              <a:buNone/>
+            </a:pPr>
+            <a:r>
+              <a:rPr lang="en-US" sz="1160" b="1" dirty="0">
                 <a:solidFill>
                   <a:srgbClr val="0068B7"/>
                 </a:solidFill>
@@ -17557,7 +17563,7 @@
               </a:rPr>
               <a:t>Implementation path</a:t>
             </a:r>
-            <a:endParaRPr lang="en-US" sz="1250" dirty="0"/>
+            <a:endParaRPr lang="en-US" sz="1160" dirty="0"/>
           </a:p>
         </p:txBody>
       </p:sp>
@@ -17569,7 +17575,7 @@
         </p:nvSpPr>
         <p:spPr>
           <a:xfrm>
-            <a:off x="8763000" y="3399739"/>
+            <a:off x="8717280" y="3406140"/>
             <a:ext cx="164592" cy="0"/>
           </a:xfrm>
           <a:prstGeom prst="line">
@@ -17592,8 +17598,8 @@
         </p:nvSpPr>
         <p:spPr>
           <a:xfrm>
-            <a:off x="7872984" y="3248863"/>
-            <a:ext cx="890016" cy="301752"/>
+            <a:off x="7781544" y="3255264"/>
+            <a:ext cx="935736" cy="301752"/>
           </a:xfrm>
           <a:prstGeom prst="roundRect">
             <a:avLst>
@@ -17619,8 +17625,8 @@
         </p:nvSpPr>
         <p:spPr>
           <a:xfrm>
-            <a:off x="7909560" y="3322015"/>
-            <a:ext cx="816864" cy="146304"/>
+            <a:off x="7818120" y="3328416"/>
+            <a:ext cx="862584" cy="146304"/>
           </a:xfrm>
           <a:prstGeom prst="rect">
             <a:avLst/>
@@ -17660,7 +17666,7 @@
         </p:nvSpPr>
         <p:spPr>
           <a:xfrm>
-            <a:off x="9817608" y="3399739"/>
+            <a:off x="9817608" y="3406140"/>
             <a:ext cx="164592" cy="0"/>
           </a:xfrm>
           <a:prstGeom prst="line">
@@ -17683,8 +17689,8 @@
         </p:nvSpPr>
         <p:spPr>
           <a:xfrm>
-            <a:off x="8927592" y="3248863"/>
-            <a:ext cx="890016" cy="301752"/>
+            <a:off x="8881872" y="3255264"/>
+            <a:ext cx="935736" cy="301752"/>
           </a:xfrm>
           <a:prstGeom prst="roundRect">
             <a:avLst>
@@ -17710,8 +17716,8 @@
         </p:nvSpPr>
         <p:spPr>
           <a:xfrm>
-            <a:off x="8964168" y="3322015"/>
-            <a:ext cx="816864" cy="146304"/>
+            <a:off x="8918448" y="3328416"/>
+            <a:ext cx="862584" cy="146304"/>
           </a:xfrm>
           <a:prstGeom prst="rect">
             <a:avLst/>
@@ -17751,8 +17757,8 @@
         </p:nvSpPr>
         <p:spPr>
           <a:xfrm>
-            <a:off x="9982200" y="3248863"/>
-            <a:ext cx="890016" cy="301752"/>
+            <a:off x="9982200" y="3255264"/>
+            <a:ext cx="935736" cy="301752"/>
           </a:xfrm>
           <a:prstGeom prst="roundRect">
             <a:avLst>
@@ -17778,8 +17784,8 @@
         </p:nvSpPr>
         <p:spPr>
           <a:xfrm>
-            <a:off x="10018776" y="3322015"/>
-            <a:ext cx="816864" cy="146304"/>
+            <a:off x="10018776" y="3328416"/>
+            <a:ext cx="862584" cy="146304"/>
           </a:xfrm>
           <a:prstGeom prst="rect">
             <a:avLst/>
@@ -17819,8 +17825,8 @@
         </p:nvSpPr>
         <p:spPr>
           <a:xfrm>
-            <a:off x="7854696" y="3742639"/>
-            <a:ext cx="3035808" cy="158191"/>
+            <a:off x="7763256" y="3749040"/>
+            <a:ext cx="3172968" cy="356616"/>
           </a:xfrm>
           <a:prstGeom prst="rect">
             <a:avLst/>
@@ -17838,7 +17844,7 @@
               <a:buNone/>
             </a:pPr>
             <a:r>
-              <a:rPr lang="en-US" sz="1120" dirty="0">
+              <a:rPr lang="en-US" sz="1040" dirty="0">
                 <a:solidFill>
                   <a:srgbClr val="17364A"/>
                 </a:solidFill>
@@ -17846,9 +17852,9 @@
                 <a:ea typeface="Aptos" pitchFamily="34" charset="-122"/>
                 <a:cs typeface="Aptos" pitchFamily="34" charset="-120"/>
               </a:rPr>
-              <a:t>Implementation work should make dependencies, approvals, training, and sustainment visible before launch.</a:t>
-            </a:r>
-            <a:endParaRPr lang="en-US" sz="1120" dirty="0"/>
+              <a:t>Implementation work should make dependencies, approvals, training, and.</a:t>
+            </a:r>
+            <a:endParaRPr lang="en-US" sz="1040" dirty="0"/>
           </a:p>
         </p:txBody>
       </p:sp>
@@ -17860,12 +17866,12 @@
         </p:nvSpPr>
         <p:spPr>
           <a:xfrm>
-            <a:off x="7635240" y="4184294"/>
-            <a:ext cx="3474720" cy="1466698"/>
+            <a:off x="7543800" y="4389120"/>
+            <a:ext cx="3611880" cy="1261872"/>
           </a:xfrm>
           <a:prstGeom prst="roundRect">
             <a:avLst>
-              <a:gd name="adj" fmla="val 7481"/>
+              <a:gd name="adj" fmla="val 8696"/>
             </a:avLst>
           </a:prstGeom>
           <a:solidFill>
@@ -17887,8 +17893,8 @@
         </p:nvSpPr>
         <p:spPr>
           <a:xfrm>
-            <a:off x="7799832" y="4330598"/>
-            <a:ext cx="3145536" cy="256032"/>
+            <a:off x="7708392" y="4517136"/>
+            <a:ext cx="3282696" cy="228600"/>
           </a:xfrm>
           <a:prstGeom prst="rect">
             <a:avLst/>
@@ -17904,7 +17910,7 @@
               <a:buNone/>
             </a:pPr>
             <a:r>
-              <a:rPr lang="en-US" sz="1300" b="1" dirty="0">
+              <a:rPr lang="en-US" sz="1220" b="1" dirty="0">
                 <a:solidFill>
                   <a:srgbClr val="0068B7"/>
                 </a:solidFill>
@@ -17914,7 +17920,7 @@
               </a:rPr>
               <a:t>Next action</a:t>
             </a:r>
-            <a:endParaRPr lang="en-US" sz="1300" dirty="0"/>
+            <a:endParaRPr lang="en-US" sz="1220" dirty="0"/>
           </a:p>
         </p:txBody>
       </p:sp>
@@ -17926,8 +17932,8 @@
         </p:nvSpPr>
         <p:spPr>
           <a:xfrm>
-            <a:off x="7799832" y="4659782"/>
-            <a:ext cx="3145536" cy="899770"/>
+            <a:off x="7708392" y="4828032"/>
+            <a:ext cx="3282696" cy="749808"/>
           </a:xfrm>
           <a:prstGeom prst="rect">
             <a:avLst/>
@@ -17945,7 +17951,7 @@
               <a:buNone/>
             </a:pPr>
             <a:r>
-              <a:rPr lang="en-US" sz="1320" dirty="0">
+              <a:rPr lang="en-US" sz="1220" dirty="0">
                 <a:solidFill>
                   <a:srgbClr val="17364A"/>
                 </a:solidFill>
@@ -17953,9 +17959,9 @@
                 <a:ea typeface="Aptos" pitchFamily="34" charset="-122"/>
                 <a:cs typeface="Aptos" pitchFamily="34" charset="-120"/>
               </a:rPr>
-              <a:t>Use the concept to clarify workflow changes, dependencies, staffing, procurement requirements, training needs, and implementation checkpoints.</a:t>
-            </a:r>
-            <a:endParaRPr lang="en-US" sz="1320" dirty="0"/>
+              <a:t>Use the concept to clarify workflow changes, dependencies, staffing, procurement.</a:t>
+            </a:r>
+            <a:endParaRPr lang="en-US" sz="1220" dirty="0"/>
           </a:p>
         </p:txBody>
       </p:sp>

--- a/downloads/presentations/modules/pmg-210.pptx
+++ b/downloads/presentations/modules/pmg-210.pptx
@@ -10885,7 +10885,7 @@
                 <a:ea typeface="Aptos" pitchFamily="34" charset="-122"/>
                 <a:cs typeface="Aptos" pitchFamily="34" charset="-120"/>
               </a:rPr>
-              <a:t>• 1. What is the best reason to address requirements writing for ai.</a:t>
+              <a:t>1. What is the best reason to address requirements writing for ai.</a:t>
             </a:r>
             <a:endParaRPr lang="en-US" sz="1920" dirty="0"/>
           </a:p>
@@ -10902,7 +10902,7 @@
                 <a:ea typeface="Aptos" pitchFamily="34" charset="-122"/>
                 <a:cs typeface="Aptos" pitchFamily="34" charset="-120"/>
               </a:rPr>
-              <a:t>• 2. Which practice best supports responsible implementation?</a:t>
+              <a:t>2. Which practice best supports responsible implementation?</a:t>
             </a:r>
             <a:endParaRPr lang="en-US" sz="1920" dirty="0"/>
           </a:p>
@@ -10919,7 +10919,7 @@
                 <a:ea typeface="Aptos" pitchFamily="34" charset="-122"/>
                 <a:cs typeface="Aptos" pitchFamily="34" charset="-120"/>
               </a:rPr>
-              <a:t>• 3. Which statement best describes a common failure mode?</a:t>
+              <a:t>3. Which statement best describes a common failure mode?</a:t>
             </a:r>
             <a:endParaRPr lang="en-US" sz="1920" dirty="0"/>
           </a:p>
@@ -11026,7 +11026,7 @@
                 <a:ea typeface="Aptos" pitchFamily="34" charset="-122"/>
                 <a:cs typeface="Aptos" pitchFamily="34" charset="-120"/>
               </a:rPr>
-              <a:t>1. What is the best reason to address requirements writing for ai procurement.</a:t>
+              <a:t>What is the best reason to address requirements writing for ai procurement and.</a:t>
             </a:r>
             <a:endParaRPr lang="en-US" sz="1220" dirty="0"/>
           </a:p>
@@ -11133,41 +11133,7 @@
                 <a:ea typeface="Aptos" pitchFamily="34" charset="-122"/>
                 <a:cs typeface="Aptos" pitchFamily="34" charset="-120"/>
               </a:rPr>
-              <a:t>1.</a:t>
-            </a:r>
-            <a:endParaRPr lang="en-US" sz="1140" dirty="0"/>
-          </a:p>
-          <a:p>
-            <a:pPr indent="0" marL="0">
-              <a:buNone/>
-            </a:pPr>
-            <a:r>
-              <a:rPr lang="en-US" sz="1140" dirty="0">
-                <a:solidFill>
-                  <a:srgbClr val="17364A"/>
-                </a:solidFill>
-                <a:latin typeface="Aptos" pitchFamily="34" charset="0"/>
-                <a:ea typeface="Aptos" pitchFamily="34" charset="-122"/>
-                <a:cs typeface="Aptos" pitchFamily="34" charset="-120"/>
-              </a:rPr>
               <a:t>What is the best reason to address requirements.</a:t>
-            </a:r>
-            <a:endParaRPr lang="en-US" sz="1140" dirty="0"/>
-          </a:p>
-          <a:p>
-            <a:pPr indent="0" marL="0">
-              <a:buNone/>
-            </a:pPr>
-            <a:r>
-              <a:rPr lang="en-US" sz="1140" dirty="0">
-                <a:solidFill>
-                  <a:srgbClr val="17364A"/>
-                </a:solidFill>
-                <a:latin typeface="Aptos" pitchFamily="34" charset="0"/>
-                <a:ea typeface="Aptos" pitchFamily="34" charset="-122"/>
-                <a:cs typeface="Aptos" pitchFamily="34" charset="-120"/>
-              </a:rPr>
-              <a:t>2.</a:t>
             </a:r>
             <a:endParaRPr lang="en-US" sz="1140" dirty="0"/>
           </a:p>
